--- a/lesson_02/lesson_02_slides.pptx
+++ b/lesson_02/lesson_02_slides.pptx
@@ -15,9 +15,10 @@
     <p:sldId id="263" r:id="rId9"/>
     <p:sldId id="264" r:id="rId10"/>
     <p:sldId id="265" r:id="rId11"/>
+    <p:sldId id="266" r:id="rId12"/>
   </p:sldIdLst>
   <p:notesMasterIdLst>
-    <p:notesMasterId r:id="rId12"/>
+    <p:notesMasterId r:id="rId13"/>
   </p:notesMasterIdLst>
   <p:sldSz cx="12192000" cy="6858000"/>
   <p:notesSz cx="6858000" cy="12192000"/>
@@ -623,6 +624,94 @@
             <a:fld id="{F7021451-1387-4CA6-816F-3879F97B5CBC}" type="slidenum">
               <a:rPr lang="en-US"/>
               <a:t>10</a:t>
+            </a:fld>
+            <a:endParaRPr lang="en-US"/>
+          </a:p>
+        </p:txBody>
+      </p:sp>
+    </p:spTree>
+    <p:extLst>
+      <p:ext uri="{BB962C8B-B14F-4D97-AF65-F5344CB8AC3E}">
+        <p14:creationId xmlns:p14="http://schemas.microsoft.com/office/powerpoint/2010/main" val="1024086991"/>
+      </p:ext>
+    </p:extLst>
+  </p:cSld>
+  <p:clrMapOvr>
+    <a:masterClrMapping/>
+  </p:clrMapOvr>
+</p:notes>
+</file>
+
+<file path=ppt/notesSlides/notesSlide11.xml><?xml version="1.0" encoding="utf-8"?>
+<p:notes xmlns:a="http://schemas.openxmlformats.org/drawingml/2006/main" xmlns:r="http://schemas.openxmlformats.org/officeDocument/2006/relationships" xmlns:p="http://schemas.openxmlformats.org/presentationml/2006/main">
+  <p:cSld>
+    <p:spTree>
+      <p:nvGrpSpPr>
+        <p:cNvPr id="1" name=""/>
+        <p:cNvGrpSpPr/>
+        <p:nvPr/>
+      </p:nvGrpSpPr>
+      <p:grpSpPr>
+        <a:xfrm>
+          <a:off x="0" y="0"/>
+          <a:ext cx="0" cy="0"/>
+          <a:chOff x="0" y="0"/>
+          <a:chExt cx="0" cy="0"/>
+        </a:xfrm>
+      </p:grpSpPr>
+      <p:sp>
+        <p:nvSpPr>
+          <p:cNvPr id="2" name="Slide Image Placeholder 1"/>
+          <p:cNvSpPr>
+            <a:spLocks noGrp="1" noRot="1" noChangeAspect="1"/>
+          </p:cNvSpPr>
+          <p:nvPr>
+            <p:ph type="sldImg"/>
+          </p:nvPr>
+        </p:nvSpPr>
+        <p:spPr/>
+      </p:sp>
+      <p:sp>
+        <p:nvSpPr>
+          <p:cNvPr id="3" name="Notes Placeholder 2"/>
+          <p:cNvSpPr>
+            <a:spLocks noGrp="1"/>
+          </p:cNvSpPr>
+          <p:nvPr>
+            <p:ph type="body" idx="1"/>
+          </p:nvPr>
+        </p:nvSpPr>
+        <p:spPr/>
+        <p:txBody>
+          <a:bodyPr/>
+          <a:lstStyle/>
+          <a:p>
+            <a:r>
+              <a:rPr lang="en-US" dirty="0"/>
+              <a:t/>
+            </a:r>
+            <a:endParaRPr lang="en-US" dirty="0"/>
+          </a:p>
+        </p:txBody>
+      </p:sp>
+      <p:sp>
+        <p:nvSpPr>
+          <p:cNvPr id="4" name="Slide Number Placeholder 3"/>
+          <p:cNvSpPr>
+            <a:spLocks noGrp="1"/>
+          </p:cNvSpPr>
+          <p:nvPr>
+            <p:ph type="sldNum" sz="quarter" idx="10"/>
+          </p:nvPr>
+        </p:nvSpPr>
+        <p:spPr/>
+        <p:txBody>
+          <a:bodyPr/>
+          <a:lstStyle/>
+          <a:p>
+            <a:fld id="{F7021451-1387-4CA6-816F-3879F97B5CBC}" type="slidenum">
+              <a:rPr lang="en-US"/>
+              <a:t>11</a:t>
             </a:fld>
             <a:endParaRPr lang="en-US"/>
           </a:p>
@@ -2012,6 +2101,321 @@
     <p:bg>
       <p:bgPr>
         <a:solidFill>
+          <a:srgbClr val="00C2A8"/>
+        </a:solidFill>
+      </p:bgPr>
+    </p:bg>
+    <p:spTree>
+      <p:nvGrpSpPr>
+        <p:cNvPr id="1" name=""/>
+        <p:cNvGrpSpPr/>
+        <p:nvPr/>
+      </p:nvGrpSpPr>
+      <p:grpSpPr>
+        <a:xfrm>
+          <a:off x="0" y="0"/>
+          <a:ext cx="0" cy="0"/>
+          <a:chOff x="0" y="0"/>
+          <a:chExt cx="0" cy="0"/>
+        </a:xfrm>
+      </p:grpSpPr>
+      <p:sp>
+        <p:nvSpPr>
+          <p:cNvPr id="2" name="Text 0"/>
+          <p:cNvSpPr/>
+          <p:nvPr/>
+        </p:nvSpPr>
+        <p:spPr>
+          <a:xfrm>
+            <a:off x="548640" y="548640"/>
+            <a:ext cx="11091672" cy="548640"/>
+          </a:xfrm>
+          <a:prstGeom prst="rect">
+            <a:avLst/>
+          </a:prstGeom>
+          <a:noFill/>
+          <a:ln/>
+        </p:spPr>
+        <p:txBody>
+          <a:bodyPr wrap="square" lIns="0" tIns="0" rIns="0" bIns="0" rtlCol="0" anchor="ctr"/>
+          <a:lstStyle/>
+          <a:p>
+            <a:pPr algn="ctr" indent="0" marL="0">
+              <a:buNone/>
+            </a:pPr>
+            <a:r>
+              <a:rPr lang="en-US" sz="1600" i="1" dirty="0">
+                <a:solidFill>
+                  <a:srgbClr val="1B1F3B"/>
+                </a:solidFill>
+                <a:latin typeface="Calibri" pitchFamily="34" charset="0"/>
+                <a:ea typeface="Calibri" pitchFamily="34" charset="-122"/>
+                <a:cs typeface="Calibri" pitchFamily="34" charset="-120"/>
+              </a:rPr>
+              <a:t>עוברים לתרגול</a:t>
+            </a:r>
+            <a:endParaRPr lang="en-US" sz="1600" dirty="0"/>
+          </a:p>
+        </p:txBody>
+      </p:sp>
+      <p:sp>
+        <p:nvSpPr>
+          <p:cNvPr id="3" name="Text 1"/>
+          <p:cNvSpPr/>
+          <p:nvPr/>
+        </p:nvSpPr>
+        <p:spPr>
+          <a:xfrm>
+            <a:off x="548640" y="1188720"/>
+            <a:ext cx="11091672" cy="1005840"/>
+          </a:xfrm>
+          <a:prstGeom prst="rect">
+            <a:avLst/>
+          </a:prstGeom>
+          <a:noFill/>
+          <a:ln/>
+        </p:spPr>
+        <p:txBody>
+          <a:bodyPr wrap="square" lIns="0" tIns="0" rIns="0" bIns="0" rtlCol="0" anchor="ctr"/>
+          <a:lstStyle/>
+          <a:p>
+            <a:pPr rtl="1" algn="ctr" indent="0" marL="0">
+              <a:buNone/>
+            </a:pPr>
+            <a:r>
+              <a:rPr lang="en-US" sz="3200" b="1" dirty="0">
+                <a:solidFill>
+                  <a:srgbClr val="FFFFFF"/>
+                </a:solidFill>
+                <a:latin typeface="Arial" pitchFamily="34" charset="0"/>
+                <a:ea typeface="Arial" pitchFamily="34" charset="-122"/>
+                <a:cs typeface="Arial" pitchFamily="34" charset="-120"/>
+              </a:rPr>
+              <a:t>45 דקות: הקמת סביבת עבודה</a:t>
+            </a:r>
+            <a:endParaRPr lang="en-US" sz="3200" dirty="0"/>
+          </a:p>
+        </p:txBody>
+      </p:sp>
+      <p:sp>
+        <p:nvSpPr>
+          <p:cNvPr id="4" name="Text 2"/>
+          <p:cNvSpPr/>
+          <p:nvPr/>
+        </p:nvSpPr>
+        <p:spPr>
+          <a:xfrm>
+            <a:off x="822960" y="2651760"/>
+            <a:ext cx="5120640" cy="2011680"/>
+          </a:xfrm>
+          <a:prstGeom prst="rect">
+            <a:avLst/>
+          </a:prstGeom>
+          <a:noFill/>
+          <a:ln/>
+        </p:spPr>
+        <p:txBody>
+          <a:bodyPr wrap="square" lIns="0" tIns="0" rIns="0" bIns="0" rtlCol="0" anchor="ctr"/>
+          <a:lstStyle/>
+          <a:p>
+            <a:pPr algn="r" indent="0" marL="0">
+              <a:spcAft>
+                <a:spcPts val="1000"/>
+              </a:spcAft>
+              <a:buNone/>
+            </a:pPr>
+            <a:r>
+              <a:rPr lang="en-US" sz="1600" dirty="0">
+                <a:solidFill>
+                  <a:srgbClr val="FFFFFF"/>
+                </a:solidFill>
+                <a:latin typeface="Calibri" pitchFamily="34" charset="0"/>
+                <a:ea typeface="Calibri" pitchFamily="34" charset="-122"/>
+                <a:cs typeface="Calibri" pitchFamily="34" charset="-120"/>
+              </a:rPr>
+              <a:t>• VS Code + Git מותקנים</a:t>
+            </a:r>
+            <a:endParaRPr lang="en-US" sz="1600" dirty="0"/>
+          </a:p>
+          <a:p>
+            <a:pPr algn="r" indent="0" marL="0">
+              <a:spcAft>
+                <a:spcPts val="1000"/>
+              </a:spcAft>
+              <a:buNone/>
+            </a:pPr>
+            <a:r>
+              <a:rPr lang="en-US" sz="1600" dirty="0">
+                <a:solidFill>
+                  <a:srgbClr val="FFFFFF"/>
+                </a:solidFill>
+                <a:latin typeface="Calibri" pitchFamily="34" charset="0"/>
+                <a:ea typeface="Calibri" pitchFamily="34" charset="-122"/>
+                <a:cs typeface="Calibri" pitchFamily="34" charset="-120"/>
+              </a:rPr>
+              <a:t>• Repository חדש ב-GitHub</a:t>
+            </a:r>
+            <a:endParaRPr lang="en-US" sz="1600" dirty="0"/>
+          </a:p>
+          <a:p>
+            <a:pPr algn="r" indent="0" marL="0">
+              <a:spcAft>
+                <a:spcPts val="1000"/>
+              </a:spcAft>
+              <a:buNone/>
+            </a:pPr>
+            <a:r>
+              <a:rPr lang="en-US" sz="1600" dirty="0">
+                <a:solidFill>
+                  <a:srgbClr val="FFFFFF"/>
+                </a:solidFill>
+                <a:latin typeface="Calibri" pitchFamily="34" charset="0"/>
+                <a:ea typeface="Calibri" pitchFamily="34" charset="-122"/>
+                <a:cs typeface="Calibri" pitchFamily="34" charset="-120"/>
+              </a:rPr>
+              <a:t>• כלי AI חינמי מחובר</a:t>
+            </a:r>
+            <a:endParaRPr lang="en-US" sz="1600" dirty="0"/>
+          </a:p>
+          <a:p>
+            <a:pPr algn="r" indent="0" marL="0">
+              <a:spcAft>
+                <a:spcPts val="1000"/>
+              </a:spcAft>
+              <a:buNone/>
+            </a:pPr>
+            <a:r>
+              <a:rPr lang="en-US" sz="1600" dirty="0">
+                <a:solidFill>
+                  <a:srgbClr val="FFFFFF"/>
+                </a:solidFill>
+                <a:latin typeface="Calibri" pitchFamily="34" charset="0"/>
+                <a:ea typeface="Calibri" pitchFamily="34" charset="-122"/>
+                <a:cs typeface="Calibri" pitchFamily="34" charset="-120"/>
+              </a:rPr>
+              <a:t>• Commit ראשון נדחף בהצלחה</a:t>
+            </a:r>
+            <a:endParaRPr lang="en-US" sz="1600" dirty="0"/>
+          </a:p>
+        </p:txBody>
+      </p:sp>
+      <p:sp>
+        <p:nvSpPr>
+          <p:cNvPr id="5" name="Shape 3"/>
+          <p:cNvSpPr/>
+          <p:nvPr/>
+        </p:nvSpPr>
+        <p:spPr>
+          <a:xfrm>
+            <a:off x="6309360" y="2651760"/>
+            <a:ext cx="5056632" cy="2926080"/>
+          </a:xfrm>
+          <a:prstGeom prst="rect">
+            <a:avLst/>
+          </a:prstGeom>
+          <a:solidFill>
+            <a:srgbClr val="2A2F55"/>
+          </a:solidFill>
+          <a:ln w="15875">
+            <a:solidFill>
+              <a:srgbClr val="00C2A8"/>
+            </a:solidFill>
+            <a:prstDash val="dash"/>
+          </a:ln>
+        </p:spPr>
+      </p:sp>
+      <p:sp>
+        <p:nvSpPr>
+          <p:cNvPr id="6" name="Text 4"/>
+          <p:cNvSpPr/>
+          <p:nvPr/>
+        </p:nvSpPr>
+        <p:spPr>
+          <a:xfrm>
+            <a:off x="6309360" y="2651760"/>
+            <a:ext cx="5056632" cy="2926080"/>
+          </a:xfrm>
+          <a:prstGeom prst="rect">
+            <a:avLst/>
+          </a:prstGeom>
+          <a:noFill/>
+          <a:ln/>
+        </p:spPr>
+        <p:txBody>
+          <a:bodyPr wrap="square" lIns="101600" tIns="101600" rIns="101600" bIns="101600" rtlCol="0" anchor="ctr"/>
+          <a:lstStyle/>
+          <a:p>
+            <a:pPr rtl="1" algn="ctr" indent="0" marL="0">
+              <a:buNone/>
+            </a:pPr>
+            <a:r>
+              <a:rPr lang="en-US" sz="1200" i="1" dirty="0">
+                <a:solidFill>
+                  <a:srgbClr val="00C2A8"/>
+                </a:solidFill>
+                <a:latin typeface="Calibri" pitchFamily="34" charset="0"/>
+                <a:ea typeface="Calibri" pitchFamily="34" charset="-122"/>
+                <a:cs typeface="Calibri" pitchFamily="34" charset="-120"/>
+              </a:rPr>
+              <a:t>[תמונה: מסך טרמינל אחרי git push מוצלח]</a:t>
+            </a:r>
+            <a:endParaRPr lang="en-US" sz="1200" dirty="0"/>
+          </a:p>
+        </p:txBody>
+      </p:sp>
+      <p:sp>
+        <p:nvSpPr>
+          <p:cNvPr id="7" name="Text 5"/>
+          <p:cNvSpPr/>
+          <p:nvPr/>
+        </p:nvSpPr>
+        <p:spPr>
+          <a:xfrm>
+            <a:off x="548640" y="6035040"/>
+            <a:ext cx="11091672" cy="365760"/>
+          </a:xfrm>
+          <a:prstGeom prst="rect">
+            <a:avLst/>
+          </a:prstGeom>
+          <a:noFill/>
+          <a:ln/>
+        </p:spPr>
+        <p:txBody>
+          <a:bodyPr wrap="square" lIns="0" tIns="0" rIns="0" bIns="0" rtlCol="0" anchor="ctr"/>
+          <a:lstStyle/>
+          <a:p>
+            <a:pPr rtl="1" algn="ctr" indent="0" marL="0">
+              <a:buNone/>
+            </a:pPr>
+            <a:r>
+              <a:rPr lang="en-US" sz="1300" i="1" dirty="0">
+                <a:solidFill>
+                  <a:srgbClr val="1B1F3B"/>
+                </a:solidFill>
+                <a:latin typeface="Calibri" pitchFamily="34" charset="0"/>
+                <a:ea typeface="Calibri" pitchFamily="34" charset="-122"/>
+                <a:cs typeface="Calibri" pitchFamily="34" charset="-120"/>
+              </a:rPr>
+              <a:t>ראו exercises.md ו-solutions.md לפירוט מלא</a:t>
+            </a:r>
+            <a:endParaRPr lang="en-US" sz="1300" dirty="0"/>
+          </a:p>
+        </p:txBody>
+      </p:sp>
+    </p:spTree>
+  </p:cSld>
+  <p:clrMapOvr>
+    <a:masterClrMapping/>
+  </p:clrMapOvr>
+</p:sld>
+</file>
+
+<file path=ppt/slides/slide11.xml><?xml version="1.0" encoding="utf-8"?>
+<p:sld xmlns:a="http://schemas.openxmlformats.org/drawingml/2006/main" xmlns:r="http://schemas.openxmlformats.org/officeDocument/2006/relationships" xmlns:p="http://schemas.openxmlformats.org/presentationml/2006/main">
+  <p:cSld name="Slide 11">
+    <p:bg>
+      <p:bgPr>
+        <a:solidFill>
           <a:srgbClr val="1B1F3B"/>
         </a:solidFill>
       </p:bgPr>
@@ -4607,7 +5011,7 @@
     <p:bg>
       <p:bgPr>
         <a:solidFill>
-          <a:srgbClr val="FFFFFF"/>
+          <a:srgbClr val="E6FBF7"/>
         </a:solidFill>
       </p:bgPr>
     </p:bg>
@@ -4658,7 +5062,7 @@
                 <a:ea typeface="Arial" pitchFamily="34" charset="-122"/>
                 <a:cs typeface="Arial" pitchFamily="34" charset="-120"/>
               </a:rPr>
-              <a:t>כלים חינמיים להתחלה</a:t>
+              <a:t>אתם כבר עובדים ליד AI</a:t>
             </a:r>
             <a:endParaRPr lang="en-US" sz="3000" dirty="0"/>
           </a:p>
@@ -4666,36 +5070,118 @@
       </p:sp>
       <p:sp>
         <p:nvSpPr>
-          <p:cNvPr id="3" name="Shape 1"/>
-          <p:cNvSpPr/>
-          <p:nvPr/>
-        </p:nvSpPr>
-        <p:spPr>
-          <a:xfrm>
-            <a:off x="8138160" y="1645920"/>
-            <a:ext cx="3520440" cy="2377440"/>
+          <p:cNvPr id="3" name="Text 1"/>
+          <p:cNvSpPr/>
+          <p:nvPr/>
+        </p:nvSpPr>
+        <p:spPr>
+          <a:xfrm>
+            <a:off x="548640" y="1737360"/>
+            <a:ext cx="11091672" cy="2011680"/>
+          </a:xfrm>
+          <a:prstGeom prst="rect">
+            <a:avLst/>
+          </a:prstGeom>
+          <a:noFill/>
+          <a:ln/>
+        </p:spPr>
+        <p:txBody>
+          <a:bodyPr wrap="square" lIns="0" tIns="0" rIns="0" bIns="0" rtlCol="0" anchor="ctr"/>
+          <a:lstStyle/>
+          <a:p>
+            <a:pPr algn="r" indent="0" marL="0">
+              <a:spcAft>
+                <a:spcPts val="1400"/>
+              </a:spcAft>
+              <a:buNone/>
+            </a:pPr>
+            <a:r>
+              <a:rPr lang="en-US" sz="1700" dirty="0">
+                <a:solidFill>
+                  <a:srgbClr val="1B1F3B"/>
+                </a:solidFill>
+                <a:latin typeface="Calibri" pitchFamily="34" charset="0"/>
+                <a:ea typeface="Calibri" pitchFamily="34" charset="-122"/>
+                <a:cs typeface="Calibri" pitchFamily="34" charset="-120"/>
+              </a:rPr>
+              <a:t>• רובכם כבר משתמשים ב-ChatGPT/Claude לכתיבת קוד עזר למחקר</a:t>
+            </a:r>
+            <a:endParaRPr lang="en-US" sz="1700" dirty="0"/>
+          </a:p>
+          <a:p>
+            <a:pPr algn="r" indent="0" marL="0">
+              <a:spcAft>
+                <a:spcPts val="1400"/>
+              </a:spcAft>
+              <a:buNone/>
+            </a:pPr>
+            <a:r>
+              <a:rPr lang="en-US" sz="1700" dirty="0">
+                <a:solidFill>
+                  <a:srgbClr val="1B1F3B"/>
+                </a:solidFill>
+                <a:latin typeface="Calibri" pitchFamily="34" charset="0"/>
+                <a:ea typeface="Calibri" pitchFamily="34" charset="-122"/>
+                <a:cs typeface="Calibri" pitchFamily="34" charset="-120"/>
+              </a:rPr>
+              <a:t>• מה עשיתם עם הקוד שקיבלתם? העתקתם-הדבקתם לקובץ</a:t>
+            </a:r>
+            <a:endParaRPr lang="en-US" sz="1700" dirty="0"/>
+          </a:p>
+          <a:p>
+            <a:pPr algn="r" indent="0" marL="0">
+              <a:spcAft>
+                <a:spcPts val="1400"/>
+              </a:spcAft>
+              <a:buNone/>
+            </a:pPr>
+            <a:r>
+              <a:rPr lang="en-US" sz="1700" dirty="0">
+                <a:solidFill>
+                  <a:srgbClr val="1B1F3B"/>
+                </a:solidFill>
+                <a:latin typeface="Calibri" pitchFamily="34" charset="0"/>
+                <a:ea typeface="Calibri" pitchFamily="34" charset="-122"/>
+                <a:cs typeface="Calibri" pitchFamily="34" charset="-120"/>
+              </a:rPr>
+              <a:t>• כלי אג'נטי עושה בדיוק את זה — רק כותב ישירות, וקורא את הפרויקט קודם</a:t>
+            </a:r>
+            <a:endParaRPr lang="en-US" sz="1700" dirty="0"/>
+          </a:p>
+        </p:txBody>
+      </p:sp>
+      <p:sp>
+        <p:nvSpPr>
+          <p:cNvPr id="4" name="Shape 2"/>
+          <p:cNvSpPr/>
+          <p:nvPr/>
+        </p:nvSpPr>
+        <p:spPr>
+          <a:xfrm>
+            <a:off x="548640" y="4023360"/>
+            <a:ext cx="11091672" cy="1188720"/>
           </a:xfrm>
           <a:prstGeom prst="roundRect">
             <a:avLst>
-              <a:gd name="adj" fmla="val 3846"/>
+              <a:gd name="adj" fmla="val 7692"/>
             </a:avLst>
           </a:prstGeom>
           <a:solidFill>
-            <a:srgbClr val="00C2A8"/>
+            <a:srgbClr val="1B1F3B"/>
           </a:solidFill>
           <a:ln/>
         </p:spPr>
       </p:sp>
       <p:sp>
         <p:nvSpPr>
-          <p:cNvPr id="4" name="Text 2"/>
-          <p:cNvSpPr/>
-          <p:nvPr/>
-        </p:nvSpPr>
-        <p:spPr>
-          <a:xfrm>
-            <a:off x="8321040" y="1828800"/>
-            <a:ext cx="3154680" cy="731520"/>
+          <p:cNvPr id="5" name="Text 3"/>
+          <p:cNvSpPr/>
+          <p:nvPr/>
+        </p:nvSpPr>
+        <p:spPr>
+          <a:xfrm>
+            <a:off x="822960" y="4023360"/>
+            <a:ext cx="10543032" cy="1188720"/>
           </a:xfrm>
           <a:prstGeom prst="rect">
             <a:avLst/>
@@ -4711,382 +5197,23 @@
               <a:buNone/>
             </a:pPr>
             <a:r>
-              <a:rPr lang="en-US" sz="1600" b="1" dirty="0">
-                <a:solidFill>
-                  <a:srgbClr val="FFFFFF"/>
+              <a:rPr lang="en-US" sz="1800" b="1" i="1" dirty="0">
+                <a:solidFill>
+                  <a:srgbClr val="00C2A8"/>
                 </a:solidFill>
                 <a:latin typeface="Arial" pitchFamily="34" charset="0"/>
                 <a:ea typeface="Arial" pitchFamily="34" charset="-122"/>
                 <a:cs typeface="Arial" pitchFamily="34" charset="-120"/>
               </a:rPr>
-              <a:t>GitHub Copilot Free</a:t>
-            </a:r>
-            <a:endParaRPr lang="en-US" sz="1600" dirty="0"/>
-          </a:p>
-        </p:txBody>
-      </p:sp>
-      <p:sp>
-        <p:nvSpPr>
-          <p:cNvPr id="5" name="Text 3"/>
-          <p:cNvSpPr/>
-          <p:nvPr/>
-        </p:nvSpPr>
-        <p:spPr>
-          <a:xfrm>
-            <a:off x="8321040" y="2606040"/>
-            <a:ext cx="3154680" cy="1280160"/>
-          </a:xfrm>
-          <a:prstGeom prst="rect">
-            <a:avLst/>
-          </a:prstGeom>
-          <a:noFill/>
-          <a:ln/>
-        </p:spPr>
-        <p:txBody>
-          <a:bodyPr wrap="square" lIns="0" tIns="0" rIns="0" bIns="0" rtlCol="0" anchor="ctr"/>
-          <a:lstStyle/>
-          <a:p>
-            <a:pPr rtl="1" algn="r" indent="0" marL="0">
-              <a:buNone/>
-            </a:pPr>
-            <a:r>
-              <a:rPr lang="en-US" sz="1250" dirty="0">
-                <a:solidFill>
-                  <a:srgbClr val="FFFFFF"/>
-                </a:solidFill>
-                <a:latin typeface="Calibri" pitchFamily="34" charset="0"/>
-                <a:ea typeface="Calibri" pitchFamily="34" charset="-122"/>
-                <a:cs typeface="Calibri" pitchFamily="34" charset="-120"/>
-              </a:rPr>
-              <a:t>מסלול חינמי רחב, ללא צורך באימות סטודנט</a:t>
-            </a:r>
-            <a:endParaRPr lang="en-US" sz="1250" dirty="0"/>
-          </a:p>
-        </p:txBody>
-      </p:sp>
-      <p:sp>
-        <p:nvSpPr>
-          <p:cNvPr id="6" name="Shape 4"/>
-          <p:cNvSpPr/>
-          <p:nvPr/>
-        </p:nvSpPr>
-        <p:spPr>
-          <a:xfrm>
-            <a:off x="4233672" y="1645920"/>
-            <a:ext cx="3520440" cy="2377440"/>
-          </a:xfrm>
-          <a:prstGeom prst="roundRect">
-            <a:avLst>
-              <a:gd name="adj" fmla="val 3846"/>
-            </a:avLst>
-          </a:prstGeom>
-          <a:solidFill>
-            <a:srgbClr val="E6FBF7"/>
-          </a:solidFill>
-          <a:ln/>
-        </p:spPr>
-      </p:sp>
-      <p:sp>
-        <p:nvSpPr>
-          <p:cNvPr id="7" name="Text 5"/>
-          <p:cNvSpPr/>
-          <p:nvPr/>
-        </p:nvSpPr>
-        <p:spPr>
-          <a:xfrm>
-            <a:off x="4416552" y="1828800"/>
-            <a:ext cx="3154680" cy="731520"/>
-          </a:xfrm>
-          <a:prstGeom prst="rect">
-            <a:avLst/>
-          </a:prstGeom>
-          <a:noFill/>
-          <a:ln/>
-        </p:spPr>
-        <p:txBody>
-          <a:bodyPr wrap="square" lIns="0" tIns="0" rIns="0" bIns="0" rtlCol="0" anchor="ctr"/>
-          <a:lstStyle/>
-          <a:p>
-            <a:pPr rtl="1" algn="r" indent="0" marL="0">
-              <a:buNone/>
-            </a:pPr>
-            <a:r>
-              <a:rPr lang="en-US" sz="1600" b="1" dirty="0">
-                <a:solidFill>
-                  <a:srgbClr val="1B1F3B"/>
-                </a:solidFill>
-                <a:latin typeface="Arial" pitchFamily="34" charset="0"/>
-                <a:ea typeface="Arial" pitchFamily="34" charset="-122"/>
-                <a:cs typeface="Arial" pitchFamily="34" charset="-120"/>
-              </a:rPr>
-              <a:t>GitHub Student Pack</a:t>
-            </a:r>
-            <a:endParaRPr lang="en-US" sz="1600" dirty="0"/>
-          </a:p>
-        </p:txBody>
-      </p:sp>
-      <p:sp>
-        <p:nvSpPr>
-          <p:cNvPr id="8" name="Text 6"/>
-          <p:cNvSpPr/>
-          <p:nvPr/>
-        </p:nvSpPr>
-        <p:spPr>
-          <a:xfrm>
-            <a:off x="4416552" y="2606040"/>
-            <a:ext cx="3154680" cy="1280160"/>
-          </a:xfrm>
-          <a:prstGeom prst="rect">
-            <a:avLst/>
-          </a:prstGeom>
-          <a:noFill/>
-          <a:ln/>
-        </p:spPr>
-        <p:txBody>
-          <a:bodyPr wrap="square" lIns="0" tIns="0" rIns="0" bIns="0" rtlCol="0" anchor="ctr"/>
-          <a:lstStyle/>
-          <a:p>
-            <a:pPr rtl="1" algn="r" indent="0" marL="0">
-              <a:buNone/>
-            </a:pPr>
-            <a:r>
-              <a:rPr lang="en-US" sz="1250" dirty="0">
-                <a:solidFill>
-                  <a:srgbClr val="1B1F3B"/>
-                </a:solidFill>
-                <a:latin typeface="Calibri" pitchFamily="34" charset="0"/>
-                <a:ea typeface="Calibri" pitchFamily="34" charset="-122"/>
-                <a:cs typeface="Calibri" pitchFamily="34" charset="-120"/>
-              </a:rPr>
-              <a:t>הרחבה למי שמאמת סטודנט (זמינות משתנה)</a:t>
-            </a:r>
-            <a:endParaRPr lang="en-US" sz="1250" dirty="0"/>
-          </a:p>
-        </p:txBody>
-      </p:sp>
-      <p:sp>
-        <p:nvSpPr>
-          <p:cNvPr id="9" name="Shape 7"/>
-          <p:cNvSpPr/>
-          <p:nvPr/>
-        </p:nvSpPr>
-        <p:spPr>
-          <a:xfrm>
-            <a:off x="329184" y="1645920"/>
-            <a:ext cx="3520440" cy="2377440"/>
-          </a:xfrm>
-          <a:prstGeom prst="roundRect">
-            <a:avLst>
-              <a:gd name="adj" fmla="val 3846"/>
-            </a:avLst>
-          </a:prstGeom>
-          <a:solidFill>
-            <a:srgbClr val="E6FBF7"/>
-          </a:solidFill>
-          <a:ln/>
-        </p:spPr>
-      </p:sp>
-      <p:sp>
-        <p:nvSpPr>
-          <p:cNvPr id="10" name="Text 8"/>
-          <p:cNvSpPr/>
-          <p:nvPr/>
-        </p:nvSpPr>
-        <p:spPr>
-          <a:xfrm>
-            <a:off x="512064" y="1828800"/>
-            <a:ext cx="3154680" cy="731520"/>
-          </a:xfrm>
-          <a:prstGeom prst="rect">
-            <a:avLst/>
-          </a:prstGeom>
-          <a:noFill/>
-          <a:ln/>
-        </p:spPr>
-        <p:txBody>
-          <a:bodyPr wrap="square" lIns="0" tIns="0" rIns="0" bIns="0" rtlCol="0" anchor="ctr"/>
-          <a:lstStyle/>
-          <a:p>
-            <a:pPr rtl="1" algn="r" indent="0" marL="0">
-              <a:buNone/>
-            </a:pPr>
-            <a:r>
-              <a:rPr lang="en-US" sz="1600" b="1" dirty="0">
-                <a:solidFill>
-                  <a:srgbClr val="1B1F3B"/>
-                </a:solidFill>
-                <a:latin typeface="Arial" pitchFamily="34" charset="0"/>
-                <a:ea typeface="Arial" pitchFamily="34" charset="-122"/>
-                <a:cs typeface="Arial" pitchFamily="34" charset="-120"/>
-              </a:rPr>
-              <a:t>Cursor</a:t>
-            </a:r>
-            <a:endParaRPr lang="en-US" sz="1600" dirty="0"/>
-          </a:p>
-        </p:txBody>
-      </p:sp>
-      <p:sp>
-        <p:nvSpPr>
-          <p:cNvPr id="11" name="Text 9"/>
-          <p:cNvSpPr/>
-          <p:nvPr/>
-        </p:nvSpPr>
-        <p:spPr>
-          <a:xfrm>
-            <a:off x="512064" y="2606040"/>
-            <a:ext cx="3154680" cy="1280160"/>
-          </a:xfrm>
-          <a:prstGeom prst="rect">
-            <a:avLst/>
-          </a:prstGeom>
-          <a:noFill/>
-          <a:ln/>
-        </p:spPr>
-        <p:txBody>
-          <a:bodyPr wrap="square" lIns="0" tIns="0" rIns="0" bIns="0" rtlCol="0" anchor="ctr"/>
-          <a:lstStyle/>
-          <a:p>
-            <a:pPr rtl="1" algn="r" indent="0" marL="0">
-              <a:buNone/>
-            </a:pPr>
-            <a:r>
-              <a:rPr lang="en-US" sz="1250" dirty="0">
-                <a:solidFill>
-                  <a:srgbClr val="1B1F3B"/>
-                </a:solidFill>
-                <a:latin typeface="Calibri" pitchFamily="34" charset="0"/>
-                <a:ea typeface="Calibri" pitchFamily="34" charset="-122"/>
-                <a:cs typeface="Calibri" pitchFamily="34" charset="-120"/>
-              </a:rPr>
-              <a:t>IDE מלא, מסלול חינמי מוגבל (מכסת השלמות)</a:t>
-            </a:r>
-            <a:endParaRPr lang="en-US" sz="1250" dirty="0"/>
-          </a:p>
-        </p:txBody>
-      </p:sp>
-      <p:sp>
-        <p:nvSpPr>
-          <p:cNvPr id="12" name="Shape 10"/>
-          <p:cNvSpPr/>
-          <p:nvPr/>
-        </p:nvSpPr>
-        <p:spPr>
-          <a:xfrm>
-            <a:off x="548640" y="4343400"/>
-            <a:ext cx="11091672" cy="1005840"/>
-          </a:xfrm>
-          <a:prstGeom prst="roundRect">
-            <a:avLst>
-              <a:gd name="adj" fmla="val 9091"/>
-            </a:avLst>
-          </a:prstGeom>
-          <a:solidFill>
-            <a:srgbClr val="FFF6E6"/>
-          </a:solidFill>
-          <a:ln/>
-        </p:spPr>
-      </p:sp>
-      <p:sp>
-        <p:nvSpPr>
-          <p:cNvPr id="13" name="Shape 11"/>
-          <p:cNvSpPr/>
-          <p:nvPr/>
-        </p:nvSpPr>
-        <p:spPr>
-          <a:xfrm>
-            <a:off x="10332720" y="4480560"/>
-            <a:ext cx="457200" cy="457200"/>
-          </a:xfrm>
-          <a:prstGeom prst="ellipse">
-            <a:avLst/>
-          </a:prstGeom>
-          <a:solidFill>
-            <a:srgbClr val="FFB000"/>
-          </a:solidFill>
-          <a:ln/>
-        </p:spPr>
-      </p:sp>
-      <p:sp>
-        <p:nvSpPr>
-          <p:cNvPr id="14" name="Text 12"/>
-          <p:cNvSpPr/>
-          <p:nvPr/>
-        </p:nvSpPr>
-        <p:spPr>
-          <a:xfrm>
-            <a:off x="10332720" y="4480560"/>
-            <a:ext cx="457200" cy="457200"/>
-          </a:xfrm>
-          <a:prstGeom prst="rect">
-            <a:avLst/>
-          </a:prstGeom>
-          <a:noFill/>
-          <a:ln/>
-        </p:spPr>
-        <p:txBody>
-          <a:bodyPr wrap="square" lIns="0" tIns="0" rIns="0" bIns="0" rtlCol="0" anchor="ctr"/>
-          <a:lstStyle/>
-          <a:p>
-            <a:pPr algn="ctr" indent="0" marL="0">
-              <a:buNone/>
-            </a:pPr>
-            <a:r>
-              <a:rPr lang="en-US" sz="1400" b="1" dirty="0">
-                <a:solidFill>
-                  <a:srgbClr val="FFFFFF"/>
-                </a:solidFill>
-                <a:latin typeface="Arial" pitchFamily="34" charset="0"/>
-                <a:ea typeface="Arial" pitchFamily="34" charset="-122"/>
-                <a:cs typeface="Arial" pitchFamily="34" charset="-120"/>
-              </a:rPr>
-              <a:t>!</a:t>
-            </a:r>
-            <a:endParaRPr lang="en-US" sz="1400" dirty="0"/>
-          </a:p>
-        </p:txBody>
-      </p:sp>
-      <p:sp>
-        <p:nvSpPr>
-          <p:cNvPr id="15" name="Text 13"/>
-          <p:cNvSpPr/>
-          <p:nvPr/>
-        </p:nvSpPr>
-        <p:spPr>
-          <a:xfrm>
-            <a:off x="822960" y="4434840"/>
-            <a:ext cx="9326880" cy="731520"/>
-          </a:xfrm>
-          <a:prstGeom prst="rect">
-            <a:avLst/>
-          </a:prstGeom>
-          <a:noFill/>
-          <a:ln/>
-        </p:spPr>
-        <p:txBody>
-          <a:bodyPr wrap="square" lIns="0" tIns="0" rIns="0" bIns="0" rtlCol="0" anchor="ctr"/>
-          <a:lstStyle/>
-          <a:p>
-            <a:pPr rtl="1" algn="r" indent="0" marL="0">
-              <a:buNone/>
-            </a:pPr>
-            <a:r>
-              <a:rPr lang="en-US" sz="1400" b="1" dirty="0">
-                <a:solidFill>
-                  <a:srgbClr val="1B1F3B"/>
-                </a:solidFill>
-                <a:latin typeface="Arial" pitchFamily="34" charset="0"/>
-                <a:ea typeface="Arial" pitchFamily="34" charset="-122"/>
-                <a:cs typeface="Arial" pitchFamily="34" charset="-120"/>
-              </a:rPr>
-              <a:t>שוק הכלים משתנה מהר — ראו מקרה Gemini CLI → Antigravity משיעור 1</a:t>
-            </a:r>
-            <a:endParaRPr lang="en-US" sz="1400" dirty="0"/>
-          </a:p>
-        </p:txBody>
-      </p:sp>
-      <p:sp>
-        <p:nvSpPr>
-          <p:cNvPr id="16" name="Text 14"/>
+              <a:t>זה לא כלי חדש לגמרי — זה שדרוג למשהו שאתם כבר עושים</a:t>
+            </a:r>
+            <a:endParaRPr lang="en-US" sz="1800" dirty="0"/>
+          </a:p>
+        </p:txBody>
+      </p:sp>
+      <p:sp>
+        <p:nvSpPr>
+          <p:cNvPr id="6" name="Text 4"/>
           <p:cNvSpPr/>
           <p:nvPr/>
         </p:nvSpPr>
@@ -5188,7 +5315,7 @@
                 <a:ea typeface="Arial" pitchFamily="34" charset="-122"/>
                 <a:cs typeface="Arial" pitchFamily="34" charset="-120"/>
               </a:rPr>
-              <a:t>Best Practices לעבודה עם כלי Agentic (1)</a:t>
+              <a:t>כלים חינמיים להתחלה</a:t>
             </a:r>
             <a:endParaRPr lang="en-US" sz="3000" dirty="0"/>
           </a:p>
@@ -5202,11 +5329,13 @@
         </p:nvSpPr>
         <p:spPr>
           <a:xfrm>
-            <a:off x="10332720" y="1554480"/>
-            <a:ext cx="548640" cy="548640"/>
-          </a:xfrm>
-          <a:prstGeom prst="ellipse">
-            <a:avLst/>
+            <a:off x="8138160" y="1645920"/>
+            <a:ext cx="3520440" cy="2377440"/>
+          </a:xfrm>
+          <a:prstGeom prst="roundRect">
+            <a:avLst>
+              <a:gd name="adj" fmla="val 3846"/>
+            </a:avLst>
           </a:prstGeom>
           <a:solidFill>
             <a:srgbClr val="00C2A8"/>
@@ -5222,24 +5351,24 @@
         </p:nvSpPr>
         <p:spPr>
           <a:xfrm>
-            <a:off x="10332720" y="1554480"/>
-            <a:ext cx="548640" cy="548640"/>
-          </a:xfrm>
-          <a:prstGeom prst="rect">
-            <a:avLst/>
-          </a:prstGeom>
-          <a:noFill/>
-          <a:ln/>
-        </p:spPr>
-        <p:txBody>
-          <a:bodyPr wrap="square" lIns="0" tIns="0" rIns="0" bIns="0" rtlCol="0" anchor="ctr"/>
-          <a:lstStyle/>
-          <a:p>
-            <a:pPr algn="ctr" indent="0" marL="0">
-              <a:buNone/>
-            </a:pPr>
-            <a:r>
-              <a:rPr lang="en-US" sz="1400" b="1" dirty="0">
+            <a:off x="8321040" y="1828800"/>
+            <a:ext cx="3154680" cy="731520"/>
+          </a:xfrm>
+          <a:prstGeom prst="rect">
+            <a:avLst/>
+          </a:prstGeom>
+          <a:noFill/>
+          <a:ln/>
+        </p:spPr>
+        <p:txBody>
+          <a:bodyPr wrap="square" lIns="0" tIns="0" rIns="0" bIns="0" rtlCol="0" anchor="ctr"/>
+          <a:lstStyle/>
+          <a:p>
+            <a:pPr rtl="1" algn="r" indent="0" marL="0">
+              <a:buNone/>
+            </a:pPr>
+            <a:r>
+              <a:rPr lang="en-US" sz="1600" b="1" dirty="0">
                 <a:solidFill>
                   <a:srgbClr val="FFFFFF"/>
                 </a:solidFill>
@@ -5247,9 +5376,9 @@
                 <a:ea typeface="Arial" pitchFamily="34" charset="-122"/>
                 <a:cs typeface="Arial" pitchFamily="34" charset="-120"/>
               </a:rPr>
-              <a:t>1</a:t>
-            </a:r>
-            <a:endParaRPr lang="en-US" sz="1400" dirty="0"/>
+              <a:t>GitHub Copilot Free</a:t>
+            </a:r>
+            <a:endParaRPr lang="en-US" sz="1600" dirty="0"/>
           </a:p>
         </p:txBody>
       </p:sp>
@@ -5261,8 +5390,8 @@
         </p:nvSpPr>
         <p:spPr>
           <a:xfrm>
-            <a:off x="548640" y="1554480"/>
-            <a:ext cx="9509760" cy="365760"/>
+            <a:off x="8321040" y="2606040"/>
+            <a:ext cx="3154680" cy="1280160"/>
           </a:xfrm>
           <a:prstGeom prst="rect">
             <a:avLst/>
@@ -5278,7 +5407,68 @@
               <a:buNone/>
             </a:pPr>
             <a:r>
-              <a:rPr lang="en-US" sz="1800" b="1" dirty="0">
+              <a:rPr lang="en-US" sz="1250" dirty="0">
+                <a:solidFill>
+                  <a:srgbClr val="FFFFFF"/>
+                </a:solidFill>
+                <a:latin typeface="Calibri" pitchFamily="34" charset="0"/>
+                <a:ea typeface="Calibri" pitchFamily="34" charset="-122"/>
+                <a:cs typeface="Calibri" pitchFamily="34" charset="-120"/>
+              </a:rPr>
+              <a:t>מסלול חינמי רחב, ללא צורך באימות סטודנט</a:t>
+            </a:r>
+            <a:endParaRPr lang="en-US" sz="1250" dirty="0"/>
+          </a:p>
+        </p:txBody>
+      </p:sp>
+      <p:sp>
+        <p:nvSpPr>
+          <p:cNvPr id="6" name="Shape 4"/>
+          <p:cNvSpPr/>
+          <p:nvPr/>
+        </p:nvSpPr>
+        <p:spPr>
+          <a:xfrm>
+            <a:off x="4233672" y="1645920"/>
+            <a:ext cx="3520440" cy="2377440"/>
+          </a:xfrm>
+          <a:prstGeom prst="roundRect">
+            <a:avLst>
+              <a:gd name="adj" fmla="val 3846"/>
+            </a:avLst>
+          </a:prstGeom>
+          <a:solidFill>
+            <a:srgbClr val="E6FBF7"/>
+          </a:solidFill>
+          <a:ln/>
+        </p:spPr>
+      </p:sp>
+      <p:sp>
+        <p:nvSpPr>
+          <p:cNvPr id="7" name="Text 5"/>
+          <p:cNvSpPr/>
+          <p:nvPr/>
+        </p:nvSpPr>
+        <p:spPr>
+          <a:xfrm>
+            <a:off x="4416552" y="1828800"/>
+            <a:ext cx="3154680" cy="731520"/>
+          </a:xfrm>
+          <a:prstGeom prst="rect">
+            <a:avLst/>
+          </a:prstGeom>
+          <a:noFill/>
+          <a:ln/>
+        </p:spPr>
+        <p:txBody>
+          <a:bodyPr wrap="square" lIns="0" tIns="0" rIns="0" bIns="0" rtlCol="0" anchor="ctr"/>
+          <a:lstStyle/>
+          <a:p>
+            <a:pPr rtl="1" algn="r" indent="0" marL="0">
+              <a:buNone/>
+            </a:pPr>
+            <a:r>
+              <a:rPr lang="en-US" sz="1600" b="1" dirty="0">
                 <a:solidFill>
                   <a:srgbClr val="1B1F3B"/>
                 </a:solidFill>
@@ -5286,22 +5476,22 @@
                 <a:ea typeface="Arial" pitchFamily="34" charset="-122"/>
                 <a:cs typeface="Arial" pitchFamily="34" charset="-120"/>
               </a:rPr>
-              <a:t>הנחיות ברורות וספציפיות</a:t>
-            </a:r>
-            <a:endParaRPr lang="en-US" sz="1800" dirty="0"/>
-          </a:p>
-        </p:txBody>
-      </p:sp>
-      <p:sp>
-        <p:nvSpPr>
-          <p:cNvPr id="6" name="Text 4"/>
-          <p:cNvSpPr/>
-          <p:nvPr/>
-        </p:nvSpPr>
-        <p:spPr>
-          <a:xfrm>
-            <a:off x="548640" y="1938528"/>
-            <a:ext cx="9509760" cy="731520"/>
+              <a:t>GitHub Student Pack</a:t>
+            </a:r>
+            <a:endParaRPr lang="en-US" sz="1600" dirty="0"/>
+          </a:p>
+        </p:txBody>
+      </p:sp>
+      <p:sp>
+        <p:nvSpPr>
+          <p:cNvPr id="8" name="Text 6"/>
+          <p:cNvSpPr/>
+          <p:nvPr/>
+        </p:nvSpPr>
+        <p:spPr>
+          <a:xfrm>
+            <a:off x="4416552" y="2606040"/>
+            <a:ext cx="3154680" cy="1280160"/>
           </a:xfrm>
           <a:prstGeom prst="rect">
             <a:avLst/>
@@ -5317,89 +5507,91 @@
               <a:buNone/>
             </a:pPr>
             <a:r>
-              <a:rPr lang="en-US" sz="1400" dirty="0">
-                <a:solidFill>
-                  <a:srgbClr val="6B7280"/>
+              <a:rPr lang="en-US" sz="1250" dirty="0">
+                <a:solidFill>
+                  <a:srgbClr val="1B1F3B"/>
                 </a:solidFill>
                 <a:latin typeface="Calibri" pitchFamily="34" charset="0"/>
                 <a:ea typeface="Calibri" pitchFamily="34" charset="-122"/>
                 <a:cs typeface="Calibri" pitchFamily="34" charset="-120"/>
               </a:rPr>
-              <a:t>“תוסיף התחברות” עמום; “תוסיף התחברות עם Google OAuth, עם redirect לדף הבית” ברור</a:t>
-            </a:r>
-            <a:endParaRPr lang="en-US" sz="1400" dirty="0"/>
-          </a:p>
-        </p:txBody>
-      </p:sp>
-      <p:sp>
-        <p:nvSpPr>
-          <p:cNvPr id="7" name="Shape 5"/>
-          <p:cNvSpPr/>
-          <p:nvPr/>
-        </p:nvSpPr>
-        <p:spPr>
-          <a:xfrm>
-            <a:off x="10332720" y="2926080"/>
-            <a:ext cx="548640" cy="548640"/>
-          </a:xfrm>
-          <a:prstGeom prst="ellipse">
-            <a:avLst/>
+              <a:t>הרחבה למי שמאמת סטודנט (זמינות משתנה)</a:t>
+            </a:r>
+            <a:endParaRPr lang="en-US" sz="1250" dirty="0"/>
+          </a:p>
+        </p:txBody>
+      </p:sp>
+      <p:sp>
+        <p:nvSpPr>
+          <p:cNvPr id="9" name="Shape 7"/>
+          <p:cNvSpPr/>
+          <p:nvPr/>
+        </p:nvSpPr>
+        <p:spPr>
+          <a:xfrm>
+            <a:off x="329184" y="1645920"/>
+            <a:ext cx="3520440" cy="2377440"/>
+          </a:xfrm>
+          <a:prstGeom prst="roundRect">
+            <a:avLst>
+              <a:gd name="adj" fmla="val 3846"/>
+            </a:avLst>
           </a:prstGeom>
           <a:solidFill>
-            <a:srgbClr val="00C2A8"/>
+            <a:srgbClr val="E6FBF7"/>
           </a:solidFill>
           <a:ln/>
         </p:spPr>
       </p:sp>
       <p:sp>
         <p:nvSpPr>
-          <p:cNvPr id="8" name="Text 6"/>
-          <p:cNvSpPr/>
-          <p:nvPr/>
-        </p:nvSpPr>
-        <p:spPr>
-          <a:xfrm>
-            <a:off x="10332720" y="2926080"/>
-            <a:ext cx="548640" cy="548640"/>
-          </a:xfrm>
-          <a:prstGeom prst="rect">
-            <a:avLst/>
-          </a:prstGeom>
-          <a:noFill/>
-          <a:ln/>
-        </p:spPr>
-        <p:txBody>
-          <a:bodyPr wrap="square" lIns="0" tIns="0" rIns="0" bIns="0" rtlCol="0" anchor="ctr"/>
-          <a:lstStyle/>
-          <a:p>
-            <a:pPr algn="ctr" indent="0" marL="0">
-              <a:buNone/>
-            </a:pPr>
-            <a:r>
-              <a:rPr lang="en-US" sz="1400" b="1" dirty="0">
-                <a:solidFill>
-                  <a:srgbClr val="FFFFFF"/>
+          <p:cNvPr id="10" name="Text 8"/>
+          <p:cNvSpPr/>
+          <p:nvPr/>
+        </p:nvSpPr>
+        <p:spPr>
+          <a:xfrm>
+            <a:off x="512064" y="1828800"/>
+            <a:ext cx="3154680" cy="731520"/>
+          </a:xfrm>
+          <a:prstGeom prst="rect">
+            <a:avLst/>
+          </a:prstGeom>
+          <a:noFill/>
+          <a:ln/>
+        </p:spPr>
+        <p:txBody>
+          <a:bodyPr wrap="square" lIns="0" tIns="0" rIns="0" bIns="0" rtlCol="0" anchor="ctr"/>
+          <a:lstStyle/>
+          <a:p>
+            <a:pPr rtl="1" algn="r" indent="0" marL="0">
+              <a:buNone/>
+            </a:pPr>
+            <a:r>
+              <a:rPr lang="en-US" sz="1600" b="1" dirty="0">
+                <a:solidFill>
+                  <a:srgbClr val="1B1F3B"/>
                 </a:solidFill>
                 <a:latin typeface="Arial" pitchFamily="34" charset="0"/>
                 <a:ea typeface="Arial" pitchFamily="34" charset="-122"/>
                 <a:cs typeface="Arial" pitchFamily="34" charset="-120"/>
               </a:rPr>
-              <a:t>2</a:t>
-            </a:r>
-            <a:endParaRPr lang="en-US" sz="1400" dirty="0"/>
-          </a:p>
-        </p:txBody>
-      </p:sp>
-      <p:sp>
-        <p:nvSpPr>
-          <p:cNvPr id="9" name="Text 7"/>
-          <p:cNvSpPr/>
-          <p:nvPr/>
-        </p:nvSpPr>
-        <p:spPr>
-          <a:xfrm>
-            <a:off x="548640" y="2926080"/>
-            <a:ext cx="9509760" cy="365760"/>
+              <a:t>Cursor</a:t>
+            </a:r>
+            <a:endParaRPr lang="en-US" sz="1600" dirty="0"/>
+          </a:p>
+        </p:txBody>
+      </p:sp>
+      <p:sp>
+        <p:nvSpPr>
+          <p:cNvPr id="11" name="Text 9"/>
+          <p:cNvSpPr/>
+          <p:nvPr/>
+        </p:nvSpPr>
+        <p:spPr>
+          <a:xfrm>
+            <a:off x="512064" y="2606040"/>
+            <a:ext cx="3154680" cy="1280160"/>
           </a:xfrm>
           <a:prstGeom prst="rect">
             <a:avLst/>
@@ -5415,30 +5607,111 @@
               <a:buNone/>
             </a:pPr>
             <a:r>
-              <a:rPr lang="en-US" sz="1800" b="1" dirty="0">
+              <a:rPr lang="en-US" sz="1250" dirty="0">
                 <a:solidFill>
                   <a:srgbClr val="1B1F3B"/>
+                </a:solidFill>
+                <a:latin typeface="Calibri" pitchFamily="34" charset="0"/>
+                <a:ea typeface="Calibri" pitchFamily="34" charset="-122"/>
+                <a:cs typeface="Calibri" pitchFamily="34" charset="-120"/>
+              </a:rPr>
+              <a:t>IDE מלא, מסלול חינמי מוגבל (מכסת השלמות)</a:t>
+            </a:r>
+            <a:endParaRPr lang="en-US" sz="1250" dirty="0"/>
+          </a:p>
+        </p:txBody>
+      </p:sp>
+      <p:sp>
+        <p:nvSpPr>
+          <p:cNvPr id="12" name="Shape 10"/>
+          <p:cNvSpPr/>
+          <p:nvPr/>
+        </p:nvSpPr>
+        <p:spPr>
+          <a:xfrm>
+            <a:off x="548640" y="4343400"/>
+            <a:ext cx="11091672" cy="1005840"/>
+          </a:xfrm>
+          <a:prstGeom prst="roundRect">
+            <a:avLst>
+              <a:gd name="adj" fmla="val 9091"/>
+            </a:avLst>
+          </a:prstGeom>
+          <a:solidFill>
+            <a:srgbClr val="FFF6E6"/>
+          </a:solidFill>
+          <a:ln/>
+        </p:spPr>
+      </p:sp>
+      <p:sp>
+        <p:nvSpPr>
+          <p:cNvPr id="13" name="Shape 11"/>
+          <p:cNvSpPr/>
+          <p:nvPr/>
+        </p:nvSpPr>
+        <p:spPr>
+          <a:xfrm>
+            <a:off x="10332720" y="4480560"/>
+            <a:ext cx="457200" cy="457200"/>
+          </a:xfrm>
+          <a:prstGeom prst="ellipse">
+            <a:avLst/>
+          </a:prstGeom>
+          <a:solidFill>
+            <a:srgbClr val="FFB000"/>
+          </a:solidFill>
+          <a:ln/>
+        </p:spPr>
+      </p:sp>
+      <p:sp>
+        <p:nvSpPr>
+          <p:cNvPr id="14" name="Text 12"/>
+          <p:cNvSpPr/>
+          <p:nvPr/>
+        </p:nvSpPr>
+        <p:spPr>
+          <a:xfrm>
+            <a:off x="10332720" y="4480560"/>
+            <a:ext cx="457200" cy="457200"/>
+          </a:xfrm>
+          <a:prstGeom prst="rect">
+            <a:avLst/>
+          </a:prstGeom>
+          <a:noFill/>
+          <a:ln/>
+        </p:spPr>
+        <p:txBody>
+          <a:bodyPr wrap="square" lIns="0" tIns="0" rIns="0" bIns="0" rtlCol="0" anchor="ctr"/>
+          <a:lstStyle/>
+          <a:p>
+            <a:pPr algn="ctr" indent="0" marL="0">
+              <a:buNone/>
+            </a:pPr>
+            <a:r>
+              <a:rPr lang="en-US" sz="1400" b="1" dirty="0">
+                <a:solidFill>
+                  <a:srgbClr val="FFFFFF"/>
                 </a:solidFill>
                 <a:latin typeface="Arial" pitchFamily="34" charset="0"/>
                 <a:ea typeface="Arial" pitchFamily="34" charset="-122"/>
                 <a:cs typeface="Arial" pitchFamily="34" charset="-120"/>
               </a:rPr>
-              <a:t>צעדים קטנים</a:t>
-            </a:r>
-            <a:endParaRPr lang="en-US" sz="1800" dirty="0"/>
-          </a:p>
-        </p:txBody>
-      </p:sp>
-      <p:sp>
-        <p:nvSpPr>
-          <p:cNvPr id="10" name="Text 8"/>
-          <p:cNvSpPr/>
-          <p:nvPr/>
-        </p:nvSpPr>
-        <p:spPr>
-          <a:xfrm>
-            <a:off x="548640" y="3310128"/>
-            <a:ext cx="9509760" cy="731520"/>
+              <a:t>!</a:t>
+            </a:r>
+            <a:endParaRPr lang="en-US" sz="1400" dirty="0"/>
+          </a:p>
+        </p:txBody>
+      </p:sp>
+      <p:sp>
+        <p:nvSpPr>
+          <p:cNvPr id="15" name="Text 13"/>
+          <p:cNvSpPr/>
+          <p:nvPr/>
+        </p:nvSpPr>
+        <p:spPr>
+          <a:xfrm>
+            <a:off x="822960" y="4434840"/>
+            <a:ext cx="9326880" cy="731520"/>
           </a:xfrm>
           <a:prstGeom prst="rect">
             <a:avLst/>
@@ -5454,74 +5727,15 @@
               <a:buNone/>
             </a:pPr>
             <a:r>
-              <a:rPr lang="en-US" sz="1400" dirty="0">
-                <a:solidFill>
-                  <a:srgbClr val="6B7280"/>
-                </a:solidFill>
-                <a:latin typeface="Calibri" pitchFamily="34" charset="0"/>
-                <a:ea typeface="Calibri" pitchFamily="34" charset="-122"/>
-                <a:cs typeface="Calibri" pitchFamily="34" charset="-120"/>
-              </a:rPr>
-              <a:t>משימה גדולה מתפרקת לצעדים — קל יותר לבדוק תוצאה של צעד קטן</a:t>
-            </a:r>
-            <a:endParaRPr lang="en-US" sz="1400" dirty="0"/>
-          </a:p>
-        </p:txBody>
-      </p:sp>
-      <p:sp>
-        <p:nvSpPr>
-          <p:cNvPr id="11" name="Shape 9"/>
-          <p:cNvSpPr/>
-          <p:nvPr/>
-        </p:nvSpPr>
-        <p:spPr>
-          <a:xfrm>
-            <a:off x="10332720" y="4297680"/>
-            <a:ext cx="548640" cy="548640"/>
-          </a:xfrm>
-          <a:prstGeom prst="ellipse">
-            <a:avLst/>
-          </a:prstGeom>
-          <a:solidFill>
-            <a:srgbClr val="00C2A8"/>
-          </a:solidFill>
-          <a:ln/>
-        </p:spPr>
-      </p:sp>
-      <p:sp>
-        <p:nvSpPr>
-          <p:cNvPr id="12" name="Text 10"/>
-          <p:cNvSpPr/>
-          <p:nvPr/>
-        </p:nvSpPr>
-        <p:spPr>
-          <a:xfrm>
-            <a:off x="10332720" y="4297680"/>
-            <a:ext cx="548640" cy="548640"/>
-          </a:xfrm>
-          <a:prstGeom prst="rect">
-            <a:avLst/>
-          </a:prstGeom>
-          <a:noFill/>
-          <a:ln/>
-        </p:spPr>
-        <p:txBody>
-          <a:bodyPr wrap="square" lIns="0" tIns="0" rIns="0" bIns="0" rtlCol="0" anchor="ctr"/>
-          <a:lstStyle/>
-          <a:p>
-            <a:pPr algn="ctr" indent="0" marL="0">
-              <a:buNone/>
-            </a:pPr>
-            <a:r>
               <a:rPr lang="en-US" sz="1400" b="1" dirty="0">
                 <a:solidFill>
-                  <a:srgbClr val="FFFFFF"/>
+                  <a:srgbClr val="1B1F3B"/>
                 </a:solidFill>
                 <a:latin typeface="Arial" pitchFamily="34" charset="0"/>
                 <a:ea typeface="Arial" pitchFamily="34" charset="-122"/>
                 <a:cs typeface="Arial" pitchFamily="34" charset="-120"/>
               </a:rPr>
-              <a:t>3</a:t>
+              <a:t>שוק הכלים משתנה מהר — ראו מקרה Gemini CLI → Antigravity משיעור 1</a:t>
             </a:r>
             <a:endParaRPr lang="en-US" sz="1400" dirty="0"/>
           </a:p>
@@ -5529,85 +5743,7 @@
       </p:sp>
       <p:sp>
         <p:nvSpPr>
-          <p:cNvPr id="13" name="Text 11"/>
-          <p:cNvSpPr/>
-          <p:nvPr/>
-        </p:nvSpPr>
-        <p:spPr>
-          <a:xfrm>
-            <a:off x="548640" y="4297680"/>
-            <a:ext cx="9509760" cy="365760"/>
-          </a:xfrm>
-          <a:prstGeom prst="rect">
-            <a:avLst/>
-          </a:prstGeom>
-          <a:noFill/>
-          <a:ln/>
-        </p:spPr>
-        <p:txBody>
-          <a:bodyPr wrap="square" lIns="0" tIns="0" rIns="0" bIns="0" rtlCol="0" anchor="ctr"/>
-          <a:lstStyle/>
-          <a:p>
-            <a:pPr rtl="1" algn="r" indent="0" marL="0">
-              <a:buNone/>
-            </a:pPr>
-            <a:r>
-              <a:rPr lang="en-US" sz="1800" b="1" dirty="0">
-                <a:solidFill>
-                  <a:srgbClr val="1B1F3B"/>
-                </a:solidFill>
-                <a:latin typeface="Arial" pitchFamily="34" charset="0"/>
-                <a:ea typeface="Arial" pitchFamily="34" charset="-122"/>
-                <a:cs typeface="Arial" pitchFamily="34" charset="-120"/>
-              </a:rPr>
-              <a:t>בדיקת כל Diff</a:t>
-            </a:r>
-            <a:endParaRPr lang="en-US" sz="1800" dirty="0"/>
-          </a:p>
-        </p:txBody>
-      </p:sp>
-      <p:sp>
-        <p:nvSpPr>
-          <p:cNvPr id="14" name="Text 12"/>
-          <p:cNvSpPr/>
-          <p:nvPr/>
-        </p:nvSpPr>
-        <p:spPr>
-          <a:xfrm>
-            <a:off x="548640" y="4681728"/>
-            <a:ext cx="9509760" cy="731520"/>
-          </a:xfrm>
-          <a:prstGeom prst="rect">
-            <a:avLst/>
-          </a:prstGeom>
-          <a:noFill/>
-          <a:ln/>
-        </p:spPr>
-        <p:txBody>
-          <a:bodyPr wrap="square" lIns="0" tIns="0" rIns="0" bIns="0" rtlCol="0" anchor="ctr"/>
-          <a:lstStyle/>
-          <a:p>
-            <a:pPr rtl="1" algn="r" indent="0" marL="0">
-              <a:buNone/>
-            </a:pPr>
-            <a:r>
-              <a:rPr lang="en-US" sz="1400" dirty="0">
-                <a:solidFill>
-                  <a:srgbClr val="6B7280"/>
-                </a:solidFill>
-                <a:latin typeface="Calibri" pitchFamily="34" charset="0"/>
-                <a:ea typeface="Calibri" pitchFamily="34" charset="-122"/>
-                <a:cs typeface="Calibri" pitchFamily="34" charset="-120"/>
-              </a:rPr>
-              <a:t>לפני אישור שינוי, קוראים אותו. תמיד, בלי יוצא מן הכלל</a:t>
-            </a:r>
-            <a:endParaRPr lang="en-US" sz="1400" dirty="0"/>
-          </a:p>
-        </p:txBody>
-      </p:sp>
-      <p:sp>
-        <p:nvSpPr>
-          <p:cNvPr id="15" name="Text 13"/>
+          <p:cNvPr id="16" name="Text 14"/>
           <p:cNvSpPr/>
           <p:nvPr/>
         </p:nvSpPr>
@@ -5709,7 +5845,7 @@
                 <a:ea typeface="Arial" pitchFamily="34" charset="-122"/>
                 <a:cs typeface="Arial" pitchFamily="34" charset="-120"/>
               </a:rPr>
-              <a:t>Best Practices לעבודה עם כלי Agentic (2)</a:t>
+              <a:t>Best Practices לעבודה עם כלי Agentic (1)</a:t>
             </a:r>
             <a:endParaRPr lang="en-US" sz="3000" dirty="0"/>
           </a:p>
@@ -5768,7 +5904,7 @@
                 <a:ea typeface="Arial" pitchFamily="34" charset="-122"/>
                 <a:cs typeface="Arial" pitchFamily="34" charset="-120"/>
               </a:rPr>
-              <a:t>4</a:t>
+              <a:t>1</a:t>
             </a:r>
             <a:endParaRPr lang="en-US" sz="1400" dirty="0"/>
           </a:p>
@@ -5807,7 +5943,7 @@
                 <a:ea typeface="Arial" pitchFamily="34" charset="-122"/>
                 <a:cs typeface="Arial" pitchFamily="34" charset="-120"/>
               </a:rPr>
-              <a:t>Git כרשת ביטחון</a:t>
+              <a:t>הנחיות ברורות וספציפיות</a:t>
             </a:r>
             <a:endParaRPr lang="en-US" sz="1800" dirty="0"/>
           </a:p>
@@ -5846,7 +5982,7 @@
                 <a:ea typeface="Calibri" pitchFamily="34" charset="-122"/>
                 <a:cs typeface="Calibri" pitchFamily="34" charset="-120"/>
               </a:rPr>
-              <a:t>Commit לפני כל ניסוי משמעותי — תמיד אפשר לחזור אחורה</a:t>
+              <a:t>“תוסיף התחברות” עמום; “תוסיף התחברות עם Google OAuth, עם redirect לדף הבית” ברור</a:t>
             </a:r>
             <a:endParaRPr lang="en-US" sz="1400" dirty="0"/>
           </a:p>
@@ -5905,7 +6041,7 @@
                 <a:ea typeface="Arial" pitchFamily="34" charset="-122"/>
                 <a:cs typeface="Arial" pitchFamily="34" charset="-120"/>
               </a:rPr>
-              <a:t>5</a:t>
+              <a:t>2</a:t>
             </a:r>
             <a:endParaRPr lang="en-US" sz="1400" dirty="0"/>
           </a:p>
@@ -5944,7 +6080,7 @@
                 <a:ea typeface="Arial" pitchFamily="34" charset="-122"/>
                 <a:cs typeface="Arial" pitchFamily="34" charset="-120"/>
               </a:rPr>
-              <a:t>לא לסמוך בעיוורון</a:t>
+              <a:t>צעדים קטנים</a:t>
             </a:r>
             <a:endParaRPr lang="en-US" sz="1800" dirty="0"/>
           </a:p>
@@ -5983,7 +6119,7 @@
                 <a:ea typeface="Calibri" pitchFamily="34" charset="-122"/>
                 <a:cs typeface="Calibri" pitchFamily="34" charset="-120"/>
               </a:rPr>
-              <a:t>אם משהו נראה “יותר מדי חכם” או משתמש בפונקציה לא מוכרת — בודקים שהיא קיימת</a:t>
+              <a:t>משימה גדולה מתפרקת לצעדים — קל יותר לבדוק תוצאה של צעד קטן</a:t>
             </a:r>
             <a:endParaRPr lang="en-US" sz="1400" dirty="0"/>
           </a:p>
@@ -6042,7 +6178,7 @@
                 <a:ea typeface="Arial" pitchFamily="34" charset="-122"/>
                 <a:cs typeface="Arial" pitchFamily="34" charset="-120"/>
               </a:rPr>
-              <a:t>6</a:t>
+              <a:t>3</a:t>
             </a:r>
             <a:endParaRPr lang="en-US" sz="1400" dirty="0"/>
           </a:p>
@@ -6081,7 +6217,7 @@
                 <a:ea typeface="Arial" pitchFamily="34" charset="-122"/>
                 <a:cs typeface="Arial" pitchFamily="34" charset="-120"/>
               </a:rPr>
-              <a:t>איטרציה, לא ניסיון יחיד</a:t>
+              <a:t>בדיקת כל Diff</a:t>
             </a:r>
             <a:endParaRPr lang="en-US" sz="1800" dirty="0"/>
           </a:p>
@@ -6120,7 +6256,7 @@
                 <a:ea typeface="Calibri" pitchFamily="34" charset="-122"/>
                 <a:cs typeface="Calibri" pitchFamily="34" charset="-120"/>
               </a:rPr>
-              <a:t>אם התוצאה הראשונה לא מושלמת, מבקשים תיקון ממוקד — לא מתחילים מאפס</a:t>
+              <a:t>לפני אישור שינוי, קוראים אותו. תמיד, בלי יוצא מן הכלל</a:t>
             </a:r>
             <a:endParaRPr lang="en-US" sz="1400" dirty="0"/>
           </a:p>
@@ -6176,6 +6312,527 @@
 <file path=ppt/slides/slide8.xml><?xml version="1.0" encoding="utf-8"?>
 <p:sld xmlns:a="http://schemas.openxmlformats.org/drawingml/2006/main" xmlns:r="http://schemas.openxmlformats.org/officeDocument/2006/relationships" xmlns:p="http://schemas.openxmlformats.org/presentationml/2006/main">
   <p:cSld name="Slide 8">
+    <p:bg>
+      <p:bgPr>
+        <a:solidFill>
+          <a:srgbClr val="FFFFFF"/>
+        </a:solidFill>
+      </p:bgPr>
+    </p:bg>
+    <p:spTree>
+      <p:nvGrpSpPr>
+        <p:cNvPr id="1" name=""/>
+        <p:cNvGrpSpPr/>
+        <p:nvPr/>
+      </p:nvGrpSpPr>
+      <p:grpSpPr>
+        <a:xfrm>
+          <a:off x="0" y="0"/>
+          <a:ext cx="0" cy="0"/>
+          <a:chOff x="0" y="0"/>
+          <a:chExt cx="0" cy="0"/>
+        </a:xfrm>
+      </p:grpSpPr>
+      <p:sp>
+        <p:nvSpPr>
+          <p:cNvPr id="2" name="Text 0"/>
+          <p:cNvSpPr/>
+          <p:nvPr/>
+        </p:nvSpPr>
+        <p:spPr>
+          <a:xfrm>
+            <a:off x="548640" y="365760"/>
+            <a:ext cx="11091672" cy="822960"/>
+          </a:xfrm>
+          <a:prstGeom prst="rect">
+            <a:avLst/>
+          </a:prstGeom>
+          <a:noFill/>
+          <a:ln/>
+        </p:spPr>
+        <p:txBody>
+          <a:bodyPr wrap="square" lIns="0" tIns="0" rIns="0" bIns="0" rtlCol="0" anchor="ctr"/>
+          <a:lstStyle/>
+          <a:p>
+            <a:pPr rtl="1" algn="r" indent="0" marL="0">
+              <a:buNone/>
+            </a:pPr>
+            <a:r>
+              <a:rPr lang="en-US" sz="3000" b="1" dirty="0">
+                <a:solidFill>
+                  <a:srgbClr val="1B1F3B"/>
+                </a:solidFill>
+                <a:latin typeface="Arial" pitchFamily="34" charset="0"/>
+                <a:ea typeface="Arial" pitchFamily="34" charset="-122"/>
+                <a:cs typeface="Arial" pitchFamily="34" charset="-120"/>
+              </a:rPr>
+              <a:t>Best Practices לעבודה עם כלי Agentic (2)</a:t>
+            </a:r>
+            <a:endParaRPr lang="en-US" sz="3000" dirty="0"/>
+          </a:p>
+        </p:txBody>
+      </p:sp>
+      <p:sp>
+        <p:nvSpPr>
+          <p:cNvPr id="3" name="Shape 1"/>
+          <p:cNvSpPr/>
+          <p:nvPr/>
+        </p:nvSpPr>
+        <p:spPr>
+          <a:xfrm>
+            <a:off x="10332720" y="1554480"/>
+            <a:ext cx="548640" cy="548640"/>
+          </a:xfrm>
+          <a:prstGeom prst="ellipse">
+            <a:avLst/>
+          </a:prstGeom>
+          <a:solidFill>
+            <a:srgbClr val="00C2A8"/>
+          </a:solidFill>
+          <a:ln/>
+        </p:spPr>
+      </p:sp>
+      <p:sp>
+        <p:nvSpPr>
+          <p:cNvPr id="4" name="Text 2"/>
+          <p:cNvSpPr/>
+          <p:nvPr/>
+        </p:nvSpPr>
+        <p:spPr>
+          <a:xfrm>
+            <a:off x="10332720" y="1554480"/>
+            <a:ext cx="548640" cy="548640"/>
+          </a:xfrm>
+          <a:prstGeom prst="rect">
+            <a:avLst/>
+          </a:prstGeom>
+          <a:noFill/>
+          <a:ln/>
+        </p:spPr>
+        <p:txBody>
+          <a:bodyPr wrap="square" lIns="0" tIns="0" rIns="0" bIns="0" rtlCol="0" anchor="ctr"/>
+          <a:lstStyle/>
+          <a:p>
+            <a:pPr algn="ctr" indent="0" marL="0">
+              <a:buNone/>
+            </a:pPr>
+            <a:r>
+              <a:rPr lang="en-US" sz="1400" b="1" dirty="0">
+                <a:solidFill>
+                  <a:srgbClr val="FFFFFF"/>
+                </a:solidFill>
+                <a:latin typeface="Arial" pitchFamily="34" charset="0"/>
+                <a:ea typeface="Arial" pitchFamily="34" charset="-122"/>
+                <a:cs typeface="Arial" pitchFamily="34" charset="-120"/>
+              </a:rPr>
+              <a:t>4</a:t>
+            </a:r>
+            <a:endParaRPr lang="en-US" sz="1400" dirty="0"/>
+          </a:p>
+        </p:txBody>
+      </p:sp>
+      <p:sp>
+        <p:nvSpPr>
+          <p:cNvPr id="5" name="Text 3"/>
+          <p:cNvSpPr/>
+          <p:nvPr/>
+        </p:nvSpPr>
+        <p:spPr>
+          <a:xfrm>
+            <a:off x="548640" y="1554480"/>
+            <a:ext cx="9509760" cy="365760"/>
+          </a:xfrm>
+          <a:prstGeom prst="rect">
+            <a:avLst/>
+          </a:prstGeom>
+          <a:noFill/>
+          <a:ln/>
+        </p:spPr>
+        <p:txBody>
+          <a:bodyPr wrap="square" lIns="0" tIns="0" rIns="0" bIns="0" rtlCol="0" anchor="ctr"/>
+          <a:lstStyle/>
+          <a:p>
+            <a:pPr rtl="1" algn="r" indent="0" marL="0">
+              <a:buNone/>
+            </a:pPr>
+            <a:r>
+              <a:rPr lang="en-US" sz="1800" b="1" dirty="0">
+                <a:solidFill>
+                  <a:srgbClr val="1B1F3B"/>
+                </a:solidFill>
+                <a:latin typeface="Arial" pitchFamily="34" charset="0"/>
+                <a:ea typeface="Arial" pitchFamily="34" charset="-122"/>
+                <a:cs typeface="Arial" pitchFamily="34" charset="-120"/>
+              </a:rPr>
+              <a:t>Git כרשת ביטחון</a:t>
+            </a:r>
+            <a:endParaRPr lang="en-US" sz="1800" dirty="0"/>
+          </a:p>
+        </p:txBody>
+      </p:sp>
+      <p:sp>
+        <p:nvSpPr>
+          <p:cNvPr id="6" name="Text 4"/>
+          <p:cNvSpPr/>
+          <p:nvPr/>
+        </p:nvSpPr>
+        <p:spPr>
+          <a:xfrm>
+            <a:off x="548640" y="1938528"/>
+            <a:ext cx="9509760" cy="731520"/>
+          </a:xfrm>
+          <a:prstGeom prst="rect">
+            <a:avLst/>
+          </a:prstGeom>
+          <a:noFill/>
+          <a:ln/>
+        </p:spPr>
+        <p:txBody>
+          <a:bodyPr wrap="square" lIns="0" tIns="0" rIns="0" bIns="0" rtlCol="0" anchor="ctr"/>
+          <a:lstStyle/>
+          <a:p>
+            <a:pPr rtl="1" algn="r" indent="0" marL="0">
+              <a:buNone/>
+            </a:pPr>
+            <a:r>
+              <a:rPr lang="en-US" sz="1400" dirty="0">
+                <a:solidFill>
+                  <a:srgbClr val="6B7280"/>
+                </a:solidFill>
+                <a:latin typeface="Calibri" pitchFamily="34" charset="0"/>
+                <a:ea typeface="Calibri" pitchFamily="34" charset="-122"/>
+                <a:cs typeface="Calibri" pitchFamily="34" charset="-120"/>
+              </a:rPr>
+              <a:t>Commit לפני כל ניסוי משמעותי — תמיד אפשר לחזור אחורה</a:t>
+            </a:r>
+            <a:endParaRPr lang="en-US" sz="1400" dirty="0"/>
+          </a:p>
+        </p:txBody>
+      </p:sp>
+      <p:sp>
+        <p:nvSpPr>
+          <p:cNvPr id="7" name="Shape 5"/>
+          <p:cNvSpPr/>
+          <p:nvPr/>
+        </p:nvSpPr>
+        <p:spPr>
+          <a:xfrm>
+            <a:off x="10332720" y="2926080"/>
+            <a:ext cx="548640" cy="548640"/>
+          </a:xfrm>
+          <a:prstGeom prst="ellipse">
+            <a:avLst/>
+          </a:prstGeom>
+          <a:solidFill>
+            <a:srgbClr val="00C2A8"/>
+          </a:solidFill>
+          <a:ln/>
+        </p:spPr>
+      </p:sp>
+      <p:sp>
+        <p:nvSpPr>
+          <p:cNvPr id="8" name="Text 6"/>
+          <p:cNvSpPr/>
+          <p:nvPr/>
+        </p:nvSpPr>
+        <p:spPr>
+          <a:xfrm>
+            <a:off x="10332720" y="2926080"/>
+            <a:ext cx="548640" cy="548640"/>
+          </a:xfrm>
+          <a:prstGeom prst="rect">
+            <a:avLst/>
+          </a:prstGeom>
+          <a:noFill/>
+          <a:ln/>
+        </p:spPr>
+        <p:txBody>
+          <a:bodyPr wrap="square" lIns="0" tIns="0" rIns="0" bIns="0" rtlCol="0" anchor="ctr"/>
+          <a:lstStyle/>
+          <a:p>
+            <a:pPr algn="ctr" indent="0" marL="0">
+              <a:buNone/>
+            </a:pPr>
+            <a:r>
+              <a:rPr lang="en-US" sz="1400" b="1" dirty="0">
+                <a:solidFill>
+                  <a:srgbClr val="FFFFFF"/>
+                </a:solidFill>
+                <a:latin typeface="Arial" pitchFamily="34" charset="0"/>
+                <a:ea typeface="Arial" pitchFamily="34" charset="-122"/>
+                <a:cs typeface="Arial" pitchFamily="34" charset="-120"/>
+              </a:rPr>
+              <a:t>5</a:t>
+            </a:r>
+            <a:endParaRPr lang="en-US" sz="1400" dirty="0"/>
+          </a:p>
+        </p:txBody>
+      </p:sp>
+      <p:sp>
+        <p:nvSpPr>
+          <p:cNvPr id="9" name="Text 7"/>
+          <p:cNvSpPr/>
+          <p:nvPr/>
+        </p:nvSpPr>
+        <p:spPr>
+          <a:xfrm>
+            <a:off x="548640" y="2926080"/>
+            <a:ext cx="9509760" cy="365760"/>
+          </a:xfrm>
+          <a:prstGeom prst="rect">
+            <a:avLst/>
+          </a:prstGeom>
+          <a:noFill/>
+          <a:ln/>
+        </p:spPr>
+        <p:txBody>
+          <a:bodyPr wrap="square" lIns="0" tIns="0" rIns="0" bIns="0" rtlCol="0" anchor="ctr"/>
+          <a:lstStyle/>
+          <a:p>
+            <a:pPr rtl="1" algn="r" indent="0" marL="0">
+              <a:buNone/>
+            </a:pPr>
+            <a:r>
+              <a:rPr lang="en-US" sz="1800" b="1" dirty="0">
+                <a:solidFill>
+                  <a:srgbClr val="1B1F3B"/>
+                </a:solidFill>
+                <a:latin typeface="Arial" pitchFamily="34" charset="0"/>
+                <a:ea typeface="Arial" pitchFamily="34" charset="-122"/>
+                <a:cs typeface="Arial" pitchFamily="34" charset="-120"/>
+              </a:rPr>
+              <a:t>לא לסמוך בעיוורון</a:t>
+            </a:r>
+            <a:endParaRPr lang="en-US" sz="1800" dirty="0"/>
+          </a:p>
+        </p:txBody>
+      </p:sp>
+      <p:sp>
+        <p:nvSpPr>
+          <p:cNvPr id="10" name="Text 8"/>
+          <p:cNvSpPr/>
+          <p:nvPr/>
+        </p:nvSpPr>
+        <p:spPr>
+          <a:xfrm>
+            <a:off x="548640" y="3310128"/>
+            <a:ext cx="9509760" cy="731520"/>
+          </a:xfrm>
+          <a:prstGeom prst="rect">
+            <a:avLst/>
+          </a:prstGeom>
+          <a:noFill/>
+          <a:ln/>
+        </p:spPr>
+        <p:txBody>
+          <a:bodyPr wrap="square" lIns="0" tIns="0" rIns="0" bIns="0" rtlCol="0" anchor="ctr"/>
+          <a:lstStyle/>
+          <a:p>
+            <a:pPr rtl="1" algn="r" indent="0" marL="0">
+              <a:buNone/>
+            </a:pPr>
+            <a:r>
+              <a:rPr lang="en-US" sz="1400" dirty="0">
+                <a:solidFill>
+                  <a:srgbClr val="6B7280"/>
+                </a:solidFill>
+                <a:latin typeface="Calibri" pitchFamily="34" charset="0"/>
+                <a:ea typeface="Calibri" pitchFamily="34" charset="-122"/>
+                <a:cs typeface="Calibri" pitchFamily="34" charset="-120"/>
+              </a:rPr>
+              <a:t>אם משהו נראה “יותר מדי חכם” או משתמש בפונקציה לא מוכרת — בודקים שהיא קיימת</a:t>
+            </a:r>
+            <a:endParaRPr lang="en-US" sz="1400" dirty="0"/>
+          </a:p>
+        </p:txBody>
+      </p:sp>
+      <p:sp>
+        <p:nvSpPr>
+          <p:cNvPr id="11" name="Shape 9"/>
+          <p:cNvSpPr/>
+          <p:nvPr/>
+        </p:nvSpPr>
+        <p:spPr>
+          <a:xfrm>
+            <a:off x="10332720" y="4297680"/>
+            <a:ext cx="548640" cy="548640"/>
+          </a:xfrm>
+          <a:prstGeom prst="ellipse">
+            <a:avLst/>
+          </a:prstGeom>
+          <a:solidFill>
+            <a:srgbClr val="00C2A8"/>
+          </a:solidFill>
+          <a:ln/>
+        </p:spPr>
+      </p:sp>
+      <p:sp>
+        <p:nvSpPr>
+          <p:cNvPr id="12" name="Text 10"/>
+          <p:cNvSpPr/>
+          <p:nvPr/>
+        </p:nvSpPr>
+        <p:spPr>
+          <a:xfrm>
+            <a:off x="10332720" y="4297680"/>
+            <a:ext cx="548640" cy="548640"/>
+          </a:xfrm>
+          <a:prstGeom prst="rect">
+            <a:avLst/>
+          </a:prstGeom>
+          <a:noFill/>
+          <a:ln/>
+        </p:spPr>
+        <p:txBody>
+          <a:bodyPr wrap="square" lIns="0" tIns="0" rIns="0" bIns="0" rtlCol="0" anchor="ctr"/>
+          <a:lstStyle/>
+          <a:p>
+            <a:pPr algn="ctr" indent="0" marL="0">
+              <a:buNone/>
+            </a:pPr>
+            <a:r>
+              <a:rPr lang="en-US" sz="1400" b="1" dirty="0">
+                <a:solidFill>
+                  <a:srgbClr val="FFFFFF"/>
+                </a:solidFill>
+                <a:latin typeface="Arial" pitchFamily="34" charset="0"/>
+                <a:ea typeface="Arial" pitchFamily="34" charset="-122"/>
+                <a:cs typeface="Arial" pitchFamily="34" charset="-120"/>
+              </a:rPr>
+              <a:t>6</a:t>
+            </a:r>
+            <a:endParaRPr lang="en-US" sz="1400" dirty="0"/>
+          </a:p>
+        </p:txBody>
+      </p:sp>
+      <p:sp>
+        <p:nvSpPr>
+          <p:cNvPr id="13" name="Text 11"/>
+          <p:cNvSpPr/>
+          <p:nvPr/>
+        </p:nvSpPr>
+        <p:spPr>
+          <a:xfrm>
+            <a:off x="548640" y="4297680"/>
+            <a:ext cx="9509760" cy="365760"/>
+          </a:xfrm>
+          <a:prstGeom prst="rect">
+            <a:avLst/>
+          </a:prstGeom>
+          <a:noFill/>
+          <a:ln/>
+        </p:spPr>
+        <p:txBody>
+          <a:bodyPr wrap="square" lIns="0" tIns="0" rIns="0" bIns="0" rtlCol="0" anchor="ctr"/>
+          <a:lstStyle/>
+          <a:p>
+            <a:pPr rtl="1" algn="r" indent="0" marL="0">
+              <a:buNone/>
+            </a:pPr>
+            <a:r>
+              <a:rPr lang="en-US" sz="1800" b="1" dirty="0">
+                <a:solidFill>
+                  <a:srgbClr val="1B1F3B"/>
+                </a:solidFill>
+                <a:latin typeface="Arial" pitchFamily="34" charset="0"/>
+                <a:ea typeface="Arial" pitchFamily="34" charset="-122"/>
+                <a:cs typeface="Arial" pitchFamily="34" charset="-120"/>
+              </a:rPr>
+              <a:t>איטרציה, לא ניסיון יחיד</a:t>
+            </a:r>
+            <a:endParaRPr lang="en-US" sz="1800" dirty="0"/>
+          </a:p>
+        </p:txBody>
+      </p:sp>
+      <p:sp>
+        <p:nvSpPr>
+          <p:cNvPr id="14" name="Text 12"/>
+          <p:cNvSpPr/>
+          <p:nvPr/>
+        </p:nvSpPr>
+        <p:spPr>
+          <a:xfrm>
+            <a:off x="548640" y="4681728"/>
+            <a:ext cx="9509760" cy="731520"/>
+          </a:xfrm>
+          <a:prstGeom prst="rect">
+            <a:avLst/>
+          </a:prstGeom>
+          <a:noFill/>
+          <a:ln/>
+        </p:spPr>
+        <p:txBody>
+          <a:bodyPr wrap="square" lIns="0" tIns="0" rIns="0" bIns="0" rtlCol="0" anchor="ctr"/>
+          <a:lstStyle/>
+          <a:p>
+            <a:pPr rtl="1" algn="r" indent="0" marL="0">
+              <a:buNone/>
+            </a:pPr>
+            <a:r>
+              <a:rPr lang="en-US" sz="1400" dirty="0">
+                <a:solidFill>
+                  <a:srgbClr val="6B7280"/>
+                </a:solidFill>
+                <a:latin typeface="Calibri" pitchFamily="34" charset="0"/>
+                <a:ea typeface="Calibri" pitchFamily="34" charset="-122"/>
+                <a:cs typeface="Calibri" pitchFamily="34" charset="-120"/>
+              </a:rPr>
+              <a:t>אם התוצאה הראשונה לא מושלמת, מבקשים תיקון ממוקד — לא מתחילים מאפס</a:t>
+            </a:r>
+            <a:endParaRPr lang="en-US" sz="1400" dirty="0"/>
+          </a:p>
+        </p:txBody>
+      </p:sp>
+      <p:sp>
+        <p:nvSpPr>
+          <p:cNvPr id="15" name="Text 13"/>
+          <p:cNvSpPr/>
+          <p:nvPr/>
+        </p:nvSpPr>
+        <p:spPr>
+          <a:xfrm>
+            <a:off x="548640" y="6492240"/>
+            <a:ext cx="11091672" cy="274320"/>
+          </a:xfrm>
+          <a:prstGeom prst="rect">
+            <a:avLst/>
+          </a:prstGeom>
+          <a:noFill/>
+          <a:ln/>
+        </p:spPr>
+        <p:txBody>
+          <a:bodyPr wrap="square" lIns="0" tIns="0" rIns="0" bIns="0" rtlCol="0" anchor="ctr"/>
+          <a:lstStyle/>
+          <a:p>
+            <a:pPr rtl="1" algn="r" indent="0" marL="0">
+              <a:buNone/>
+            </a:pPr>
+            <a:r>
+              <a:rPr lang="en-US" sz="900" dirty="0">
+                <a:solidFill>
+                  <a:srgbClr val="A6A6B0"/>
+                </a:solidFill>
+                <a:latin typeface="Calibri" pitchFamily="34" charset="0"/>
+                <a:ea typeface="Calibri" pitchFamily="34" charset="-122"/>
+                <a:cs typeface="Calibri" pitchFamily="34" charset="-120"/>
+              </a:rPr>
+              <a:t>Vibe Coding · שיעור 2 · שקף 8</a:t>
+            </a:r>
+            <a:endParaRPr lang="en-US" sz="900" dirty="0"/>
+          </a:p>
+        </p:txBody>
+      </p:sp>
+    </p:spTree>
+  </p:cSld>
+  <p:clrMapOvr>
+    <a:masterClrMapping/>
+  </p:clrMapOvr>
+</p:sld>
+</file>
+
+<file path=ppt/slides/slide9.xml><?xml version="1.0" encoding="utf-8"?>
+<p:sld xmlns:a="http://schemas.openxmlformats.org/drawingml/2006/main" xmlns:r="http://schemas.openxmlformats.org/officeDocument/2006/relationships" xmlns:p="http://schemas.openxmlformats.org/presentationml/2006/main">
+  <p:cSld name="Slide 9">
     <p:bg>
       <p:bgPr>
         <a:solidFill>
@@ -6411,324 +7068,9 @@
                 <a:ea typeface="Calibri" pitchFamily="34" charset="-122"/>
                 <a:cs typeface="Calibri" pitchFamily="34" charset="-120"/>
               </a:rPr>
-              <a:t>Vibe Coding · שיעור 2 · שקף 8</a:t>
+              <a:t>Vibe Coding · שיעור 2 · שקף 9</a:t>
             </a:r>
             <a:endParaRPr lang="en-US" sz="900" dirty="0"/>
-          </a:p>
-        </p:txBody>
-      </p:sp>
-    </p:spTree>
-  </p:cSld>
-  <p:clrMapOvr>
-    <a:masterClrMapping/>
-  </p:clrMapOvr>
-</p:sld>
-</file>
-
-<file path=ppt/slides/slide9.xml><?xml version="1.0" encoding="utf-8"?>
-<p:sld xmlns:a="http://schemas.openxmlformats.org/drawingml/2006/main" xmlns:r="http://schemas.openxmlformats.org/officeDocument/2006/relationships" xmlns:p="http://schemas.openxmlformats.org/presentationml/2006/main">
-  <p:cSld name="Slide 9">
-    <p:bg>
-      <p:bgPr>
-        <a:solidFill>
-          <a:srgbClr val="00C2A8"/>
-        </a:solidFill>
-      </p:bgPr>
-    </p:bg>
-    <p:spTree>
-      <p:nvGrpSpPr>
-        <p:cNvPr id="1" name=""/>
-        <p:cNvGrpSpPr/>
-        <p:nvPr/>
-      </p:nvGrpSpPr>
-      <p:grpSpPr>
-        <a:xfrm>
-          <a:off x="0" y="0"/>
-          <a:ext cx="0" cy="0"/>
-          <a:chOff x="0" y="0"/>
-          <a:chExt cx="0" cy="0"/>
-        </a:xfrm>
-      </p:grpSpPr>
-      <p:sp>
-        <p:nvSpPr>
-          <p:cNvPr id="2" name="Text 0"/>
-          <p:cNvSpPr/>
-          <p:nvPr/>
-        </p:nvSpPr>
-        <p:spPr>
-          <a:xfrm>
-            <a:off x="548640" y="548640"/>
-            <a:ext cx="11091672" cy="548640"/>
-          </a:xfrm>
-          <a:prstGeom prst="rect">
-            <a:avLst/>
-          </a:prstGeom>
-          <a:noFill/>
-          <a:ln/>
-        </p:spPr>
-        <p:txBody>
-          <a:bodyPr wrap="square" lIns="0" tIns="0" rIns="0" bIns="0" rtlCol="0" anchor="ctr"/>
-          <a:lstStyle/>
-          <a:p>
-            <a:pPr algn="ctr" indent="0" marL="0">
-              <a:buNone/>
-            </a:pPr>
-            <a:r>
-              <a:rPr lang="en-US" sz="1600" i="1" dirty="0">
-                <a:solidFill>
-                  <a:srgbClr val="1B1F3B"/>
-                </a:solidFill>
-                <a:latin typeface="Calibri" pitchFamily="34" charset="0"/>
-                <a:ea typeface="Calibri" pitchFamily="34" charset="-122"/>
-                <a:cs typeface="Calibri" pitchFamily="34" charset="-120"/>
-              </a:rPr>
-              <a:t>עוברים לתרגול</a:t>
-            </a:r>
-            <a:endParaRPr lang="en-US" sz="1600" dirty="0"/>
-          </a:p>
-        </p:txBody>
-      </p:sp>
-      <p:sp>
-        <p:nvSpPr>
-          <p:cNvPr id="3" name="Text 1"/>
-          <p:cNvSpPr/>
-          <p:nvPr/>
-        </p:nvSpPr>
-        <p:spPr>
-          <a:xfrm>
-            <a:off x="548640" y="1188720"/>
-            <a:ext cx="11091672" cy="1005840"/>
-          </a:xfrm>
-          <a:prstGeom prst="rect">
-            <a:avLst/>
-          </a:prstGeom>
-          <a:noFill/>
-          <a:ln/>
-        </p:spPr>
-        <p:txBody>
-          <a:bodyPr wrap="square" lIns="0" tIns="0" rIns="0" bIns="0" rtlCol="0" anchor="ctr"/>
-          <a:lstStyle/>
-          <a:p>
-            <a:pPr rtl="1" algn="ctr" indent="0" marL="0">
-              <a:buNone/>
-            </a:pPr>
-            <a:r>
-              <a:rPr lang="en-US" sz="3200" b="1" dirty="0">
-                <a:solidFill>
-                  <a:srgbClr val="FFFFFF"/>
-                </a:solidFill>
-                <a:latin typeface="Arial" pitchFamily="34" charset="0"/>
-                <a:ea typeface="Arial" pitchFamily="34" charset="-122"/>
-                <a:cs typeface="Arial" pitchFamily="34" charset="-120"/>
-              </a:rPr>
-              <a:t>45 דקות: הקמת סביבת עבודה</a:t>
-            </a:r>
-            <a:endParaRPr lang="en-US" sz="3200" dirty="0"/>
-          </a:p>
-        </p:txBody>
-      </p:sp>
-      <p:sp>
-        <p:nvSpPr>
-          <p:cNvPr id="4" name="Text 2"/>
-          <p:cNvSpPr/>
-          <p:nvPr/>
-        </p:nvSpPr>
-        <p:spPr>
-          <a:xfrm>
-            <a:off x="822960" y="2651760"/>
-            <a:ext cx="5120640" cy="2011680"/>
-          </a:xfrm>
-          <a:prstGeom prst="rect">
-            <a:avLst/>
-          </a:prstGeom>
-          <a:noFill/>
-          <a:ln/>
-        </p:spPr>
-        <p:txBody>
-          <a:bodyPr wrap="square" lIns="0" tIns="0" rIns="0" bIns="0" rtlCol="0" anchor="ctr"/>
-          <a:lstStyle/>
-          <a:p>
-            <a:pPr algn="r" indent="0" marL="0">
-              <a:spcAft>
-                <a:spcPts val="1000"/>
-              </a:spcAft>
-              <a:buNone/>
-            </a:pPr>
-            <a:r>
-              <a:rPr lang="en-US" sz="1600" dirty="0">
-                <a:solidFill>
-                  <a:srgbClr val="FFFFFF"/>
-                </a:solidFill>
-                <a:latin typeface="Calibri" pitchFamily="34" charset="0"/>
-                <a:ea typeface="Calibri" pitchFamily="34" charset="-122"/>
-                <a:cs typeface="Calibri" pitchFamily="34" charset="-120"/>
-              </a:rPr>
-              <a:t>• VS Code + Git מותקנים</a:t>
-            </a:r>
-            <a:endParaRPr lang="en-US" sz="1600" dirty="0"/>
-          </a:p>
-          <a:p>
-            <a:pPr algn="r" indent="0" marL="0">
-              <a:spcAft>
-                <a:spcPts val="1000"/>
-              </a:spcAft>
-              <a:buNone/>
-            </a:pPr>
-            <a:r>
-              <a:rPr lang="en-US" sz="1600" dirty="0">
-                <a:solidFill>
-                  <a:srgbClr val="FFFFFF"/>
-                </a:solidFill>
-                <a:latin typeface="Calibri" pitchFamily="34" charset="0"/>
-                <a:ea typeface="Calibri" pitchFamily="34" charset="-122"/>
-                <a:cs typeface="Calibri" pitchFamily="34" charset="-120"/>
-              </a:rPr>
-              <a:t>• Repository חדש ב-GitHub</a:t>
-            </a:r>
-            <a:endParaRPr lang="en-US" sz="1600" dirty="0"/>
-          </a:p>
-          <a:p>
-            <a:pPr algn="r" indent="0" marL="0">
-              <a:spcAft>
-                <a:spcPts val="1000"/>
-              </a:spcAft>
-              <a:buNone/>
-            </a:pPr>
-            <a:r>
-              <a:rPr lang="en-US" sz="1600" dirty="0">
-                <a:solidFill>
-                  <a:srgbClr val="FFFFFF"/>
-                </a:solidFill>
-                <a:latin typeface="Calibri" pitchFamily="34" charset="0"/>
-                <a:ea typeface="Calibri" pitchFamily="34" charset="-122"/>
-                <a:cs typeface="Calibri" pitchFamily="34" charset="-120"/>
-              </a:rPr>
-              <a:t>• כלי AI חינמי מחובר</a:t>
-            </a:r>
-            <a:endParaRPr lang="en-US" sz="1600" dirty="0"/>
-          </a:p>
-          <a:p>
-            <a:pPr algn="r" indent="0" marL="0">
-              <a:spcAft>
-                <a:spcPts val="1000"/>
-              </a:spcAft>
-              <a:buNone/>
-            </a:pPr>
-            <a:r>
-              <a:rPr lang="en-US" sz="1600" dirty="0">
-                <a:solidFill>
-                  <a:srgbClr val="FFFFFF"/>
-                </a:solidFill>
-                <a:latin typeface="Calibri" pitchFamily="34" charset="0"/>
-                <a:ea typeface="Calibri" pitchFamily="34" charset="-122"/>
-                <a:cs typeface="Calibri" pitchFamily="34" charset="-120"/>
-              </a:rPr>
-              <a:t>• Commit ראשון נדחף בהצלחה</a:t>
-            </a:r>
-            <a:endParaRPr lang="en-US" sz="1600" dirty="0"/>
-          </a:p>
-        </p:txBody>
-      </p:sp>
-      <p:sp>
-        <p:nvSpPr>
-          <p:cNvPr id="5" name="Shape 3"/>
-          <p:cNvSpPr/>
-          <p:nvPr/>
-        </p:nvSpPr>
-        <p:spPr>
-          <a:xfrm>
-            <a:off x="6309360" y="2651760"/>
-            <a:ext cx="5056632" cy="2926080"/>
-          </a:xfrm>
-          <a:prstGeom prst="rect">
-            <a:avLst/>
-          </a:prstGeom>
-          <a:solidFill>
-            <a:srgbClr val="2A2F55"/>
-          </a:solidFill>
-          <a:ln w="15875">
-            <a:solidFill>
-              <a:srgbClr val="00C2A8"/>
-            </a:solidFill>
-            <a:prstDash val="dash"/>
-          </a:ln>
-        </p:spPr>
-      </p:sp>
-      <p:sp>
-        <p:nvSpPr>
-          <p:cNvPr id="6" name="Text 4"/>
-          <p:cNvSpPr/>
-          <p:nvPr/>
-        </p:nvSpPr>
-        <p:spPr>
-          <a:xfrm>
-            <a:off x="6309360" y="2651760"/>
-            <a:ext cx="5056632" cy="2926080"/>
-          </a:xfrm>
-          <a:prstGeom prst="rect">
-            <a:avLst/>
-          </a:prstGeom>
-          <a:noFill/>
-          <a:ln/>
-        </p:spPr>
-        <p:txBody>
-          <a:bodyPr wrap="square" lIns="101600" tIns="101600" rIns="101600" bIns="101600" rtlCol="0" anchor="ctr"/>
-          <a:lstStyle/>
-          <a:p>
-            <a:pPr rtl="1" algn="ctr" indent="0" marL="0">
-              <a:buNone/>
-            </a:pPr>
-            <a:r>
-              <a:rPr lang="en-US" sz="1200" i="1" dirty="0">
-                <a:solidFill>
-                  <a:srgbClr val="00C2A8"/>
-                </a:solidFill>
-                <a:latin typeface="Calibri" pitchFamily="34" charset="0"/>
-                <a:ea typeface="Calibri" pitchFamily="34" charset="-122"/>
-                <a:cs typeface="Calibri" pitchFamily="34" charset="-120"/>
-              </a:rPr>
-              <a:t>[תמונה: מסך טרמינל אחרי git push מוצלח]</a:t>
-            </a:r>
-            <a:endParaRPr lang="en-US" sz="1200" dirty="0"/>
-          </a:p>
-        </p:txBody>
-      </p:sp>
-      <p:sp>
-        <p:nvSpPr>
-          <p:cNvPr id="7" name="Text 5"/>
-          <p:cNvSpPr/>
-          <p:nvPr/>
-        </p:nvSpPr>
-        <p:spPr>
-          <a:xfrm>
-            <a:off x="548640" y="6035040"/>
-            <a:ext cx="11091672" cy="365760"/>
-          </a:xfrm>
-          <a:prstGeom prst="rect">
-            <a:avLst/>
-          </a:prstGeom>
-          <a:noFill/>
-          <a:ln/>
-        </p:spPr>
-        <p:txBody>
-          <a:bodyPr wrap="square" lIns="0" tIns="0" rIns="0" bIns="0" rtlCol="0" anchor="ctr"/>
-          <a:lstStyle/>
-          <a:p>
-            <a:pPr rtl="1" algn="ctr" indent="0" marL="0">
-              <a:buNone/>
-            </a:pPr>
-            <a:r>
-              <a:rPr lang="en-US" sz="1300" i="1" dirty="0">
-                <a:solidFill>
-                  <a:srgbClr val="1B1F3B"/>
-                </a:solidFill>
-                <a:latin typeface="Calibri" pitchFamily="34" charset="0"/>
-                <a:ea typeface="Calibri" pitchFamily="34" charset="-122"/>
-                <a:cs typeface="Calibri" pitchFamily="34" charset="-120"/>
-              </a:rPr>
-              <a:t>ראו exercises.md ו-solutions.md לפירוט מלא</a:t>
-            </a:r>
-            <a:endParaRPr lang="en-US" sz="1300" dirty="0"/>
           </a:p>
         </p:txBody>
       </p:sp>

--- a/lesson_02/lesson_02_slides.pptx
+++ b/lesson_02/lesson_02_slides.pptx
@@ -16,9 +16,14 @@
     <p:sldId id="264" r:id="rId10"/>
     <p:sldId id="265" r:id="rId11"/>
     <p:sldId id="266" r:id="rId12"/>
+    <p:sldId id="267" r:id="rId13"/>
+    <p:sldId id="268" r:id="rId14"/>
+    <p:sldId id="269" r:id="rId15"/>
+    <p:sldId id="270" r:id="rId16"/>
+    <p:sldId id="271" r:id="rId17"/>
   </p:sldIdLst>
   <p:notesMasterIdLst>
-    <p:notesMasterId r:id="rId13"/>
+    <p:notesMasterId r:id="rId18"/>
   </p:notesMasterIdLst>
   <p:sldSz cx="12192000" cy="6858000"/>
   <p:notesSz cx="6858000" cy="12192000"/>
@@ -712,6 +717,446 @@
             <a:fld id="{F7021451-1387-4CA6-816F-3879F97B5CBC}" type="slidenum">
               <a:rPr lang="en-US"/>
               <a:t>11</a:t>
+            </a:fld>
+            <a:endParaRPr lang="en-US"/>
+          </a:p>
+        </p:txBody>
+      </p:sp>
+    </p:spTree>
+    <p:extLst>
+      <p:ext uri="{BB962C8B-B14F-4D97-AF65-F5344CB8AC3E}">
+        <p14:creationId xmlns:p14="http://schemas.microsoft.com/office/powerpoint/2010/main" val="1024086991"/>
+      </p:ext>
+    </p:extLst>
+  </p:cSld>
+  <p:clrMapOvr>
+    <a:masterClrMapping/>
+  </p:clrMapOvr>
+</p:notes>
+</file>
+
+<file path=ppt/notesSlides/notesSlide12.xml><?xml version="1.0" encoding="utf-8"?>
+<p:notes xmlns:a="http://schemas.openxmlformats.org/drawingml/2006/main" xmlns:r="http://schemas.openxmlformats.org/officeDocument/2006/relationships" xmlns:p="http://schemas.openxmlformats.org/presentationml/2006/main">
+  <p:cSld>
+    <p:spTree>
+      <p:nvGrpSpPr>
+        <p:cNvPr id="1" name=""/>
+        <p:cNvGrpSpPr/>
+        <p:nvPr/>
+      </p:nvGrpSpPr>
+      <p:grpSpPr>
+        <a:xfrm>
+          <a:off x="0" y="0"/>
+          <a:ext cx="0" cy="0"/>
+          <a:chOff x="0" y="0"/>
+          <a:chExt cx="0" cy="0"/>
+        </a:xfrm>
+      </p:grpSpPr>
+      <p:sp>
+        <p:nvSpPr>
+          <p:cNvPr id="2" name="Slide Image Placeholder 1"/>
+          <p:cNvSpPr>
+            <a:spLocks noGrp="1" noRot="1" noChangeAspect="1"/>
+          </p:cNvSpPr>
+          <p:nvPr>
+            <p:ph type="sldImg"/>
+          </p:nvPr>
+        </p:nvSpPr>
+        <p:spPr/>
+      </p:sp>
+      <p:sp>
+        <p:nvSpPr>
+          <p:cNvPr id="3" name="Notes Placeholder 2"/>
+          <p:cNvSpPr>
+            <a:spLocks noGrp="1"/>
+          </p:cNvSpPr>
+          <p:nvPr>
+            <p:ph type="body" idx="1"/>
+          </p:nvPr>
+        </p:nvSpPr>
+        <p:spPr/>
+        <p:txBody>
+          <a:bodyPr/>
+          <a:lstStyle/>
+          <a:p>
+            <a:r>
+              <a:rPr lang="en-US" dirty="0"/>
+              <a:t/>
+            </a:r>
+            <a:endParaRPr lang="en-US" dirty="0"/>
+          </a:p>
+        </p:txBody>
+      </p:sp>
+      <p:sp>
+        <p:nvSpPr>
+          <p:cNvPr id="4" name="Slide Number Placeholder 3"/>
+          <p:cNvSpPr>
+            <a:spLocks noGrp="1"/>
+          </p:cNvSpPr>
+          <p:nvPr>
+            <p:ph type="sldNum" sz="quarter" idx="10"/>
+          </p:nvPr>
+        </p:nvSpPr>
+        <p:spPr/>
+        <p:txBody>
+          <a:bodyPr/>
+          <a:lstStyle/>
+          <a:p>
+            <a:fld id="{F7021451-1387-4CA6-816F-3879F97B5CBC}" type="slidenum">
+              <a:rPr lang="en-US"/>
+              <a:t>12</a:t>
+            </a:fld>
+            <a:endParaRPr lang="en-US"/>
+          </a:p>
+        </p:txBody>
+      </p:sp>
+    </p:spTree>
+    <p:extLst>
+      <p:ext uri="{BB962C8B-B14F-4D97-AF65-F5344CB8AC3E}">
+        <p14:creationId xmlns:p14="http://schemas.microsoft.com/office/powerpoint/2010/main" val="1024086991"/>
+      </p:ext>
+    </p:extLst>
+  </p:cSld>
+  <p:clrMapOvr>
+    <a:masterClrMapping/>
+  </p:clrMapOvr>
+</p:notes>
+</file>
+
+<file path=ppt/notesSlides/notesSlide13.xml><?xml version="1.0" encoding="utf-8"?>
+<p:notes xmlns:a="http://schemas.openxmlformats.org/drawingml/2006/main" xmlns:r="http://schemas.openxmlformats.org/officeDocument/2006/relationships" xmlns:p="http://schemas.openxmlformats.org/presentationml/2006/main">
+  <p:cSld>
+    <p:spTree>
+      <p:nvGrpSpPr>
+        <p:cNvPr id="1" name=""/>
+        <p:cNvGrpSpPr/>
+        <p:nvPr/>
+      </p:nvGrpSpPr>
+      <p:grpSpPr>
+        <a:xfrm>
+          <a:off x="0" y="0"/>
+          <a:ext cx="0" cy="0"/>
+          <a:chOff x="0" y="0"/>
+          <a:chExt cx="0" cy="0"/>
+        </a:xfrm>
+      </p:grpSpPr>
+      <p:sp>
+        <p:nvSpPr>
+          <p:cNvPr id="2" name="Slide Image Placeholder 1"/>
+          <p:cNvSpPr>
+            <a:spLocks noGrp="1" noRot="1" noChangeAspect="1"/>
+          </p:cNvSpPr>
+          <p:nvPr>
+            <p:ph type="sldImg"/>
+          </p:nvPr>
+        </p:nvSpPr>
+        <p:spPr/>
+      </p:sp>
+      <p:sp>
+        <p:nvSpPr>
+          <p:cNvPr id="3" name="Notes Placeholder 2"/>
+          <p:cNvSpPr>
+            <a:spLocks noGrp="1"/>
+          </p:cNvSpPr>
+          <p:nvPr>
+            <p:ph type="body" idx="1"/>
+          </p:nvPr>
+        </p:nvSpPr>
+        <p:spPr/>
+        <p:txBody>
+          <a:bodyPr/>
+          <a:lstStyle/>
+          <a:p>
+            <a:r>
+              <a:rPr lang="en-US" dirty="0"/>
+              <a:t/>
+            </a:r>
+            <a:endParaRPr lang="en-US" dirty="0"/>
+          </a:p>
+        </p:txBody>
+      </p:sp>
+      <p:sp>
+        <p:nvSpPr>
+          <p:cNvPr id="4" name="Slide Number Placeholder 3"/>
+          <p:cNvSpPr>
+            <a:spLocks noGrp="1"/>
+          </p:cNvSpPr>
+          <p:nvPr>
+            <p:ph type="sldNum" sz="quarter" idx="10"/>
+          </p:nvPr>
+        </p:nvSpPr>
+        <p:spPr/>
+        <p:txBody>
+          <a:bodyPr/>
+          <a:lstStyle/>
+          <a:p>
+            <a:fld id="{F7021451-1387-4CA6-816F-3879F97B5CBC}" type="slidenum">
+              <a:rPr lang="en-US"/>
+              <a:t>13</a:t>
+            </a:fld>
+            <a:endParaRPr lang="en-US"/>
+          </a:p>
+        </p:txBody>
+      </p:sp>
+    </p:spTree>
+    <p:extLst>
+      <p:ext uri="{BB962C8B-B14F-4D97-AF65-F5344CB8AC3E}">
+        <p14:creationId xmlns:p14="http://schemas.microsoft.com/office/powerpoint/2010/main" val="1024086991"/>
+      </p:ext>
+    </p:extLst>
+  </p:cSld>
+  <p:clrMapOvr>
+    <a:masterClrMapping/>
+  </p:clrMapOvr>
+</p:notes>
+</file>
+
+<file path=ppt/notesSlides/notesSlide14.xml><?xml version="1.0" encoding="utf-8"?>
+<p:notes xmlns:a="http://schemas.openxmlformats.org/drawingml/2006/main" xmlns:r="http://schemas.openxmlformats.org/officeDocument/2006/relationships" xmlns:p="http://schemas.openxmlformats.org/presentationml/2006/main">
+  <p:cSld>
+    <p:spTree>
+      <p:nvGrpSpPr>
+        <p:cNvPr id="1" name=""/>
+        <p:cNvGrpSpPr/>
+        <p:nvPr/>
+      </p:nvGrpSpPr>
+      <p:grpSpPr>
+        <a:xfrm>
+          <a:off x="0" y="0"/>
+          <a:ext cx="0" cy="0"/>
+          <a:chOff x="0" y="0"/>
+          <a:chExt cx="0" cy="0"/>
+        </a:xfrm>
+      </p:grpSpPr>
+      <p:sp>
+        <p:nvSpPr>
+          <p:cNvPr id="2" name="Slide Image Placeholder 1"/>
+          <p:cNvSpPr>
+            <a:spLocks noGrp="1" noRot="1" noChangeAspect="1"/>
+          </p:cNvSpPr>
+          <p:nvPr>
+            <p:ph type="sldImg"/>
+          </p:nvPr>
+        </p:nvSpPr>
+        <p:spPr/>
+      </p:sp>
+      <p:sp>
+        <p:nvSpPr>
+          <p:cNvPr id="3" name="Notes Placeholder 2"/>
+          <p:cNvSpPr>
+            <a:spLocks noGrp="1"/>
+          </p:cNvSpPr>
+          <p:nvPr>
+            <p:ph type="body" idx="1"/>
+          </p:nvPr>
+        </p:nvSpPr>
+        <p:spPr/>
+        <p:txBody>
+          <a:bodyPr/>
+          <a:lstStyle/>
+          <a:p>
+            <a:r>
+              <a:rPr lang="en-US" dirty="0"/>
+              <a:t/>
+            </a:r>
+            <a:endParaRPr lang="en-US" dirty="0"/>
+          </a:p>
+        </p:txBody>
+      </p:sp>
+      <p:sp>
+        <p:nvSpPr>
+          <p:cNvPr id="4" name="Slide Number Placeholder 3"/>
+          <p:cNvSpPr>
+            <a:spLocks noGrp="1"/>
+          </p:cNvSpPr>
+          <p:nvPr>
+            <p:ph type="sldNum" sz="quarter" idx="10"/>
+          </p:nvPr>
+        </p:nvSpPr>
+        <p:spPr/>
+        <p:txBody>
+          <a:bodyPr/>
+          <a:lstStyle/>
+          <a:p>
+            <a:fld id="{F7021451-1387-4CA6-816F-3879F97B5CBC}" type="slidenum">
+              <a:rPr lang="en-US"/>
+              <a:t>14</a:t>
+            </a:fld>
+            <a:endParaRPr lang="en-US"/>
+          </a:p>
+        </p:txBody>
+      </p:sp>
+    </p:spTree>
+    <p:extLst>
+      <p:ext uri="{BB962C8B-B14F-4D97-AF65-F5344CB8AC3E}">
+        <p14:creationId xmlns:p14="http://schemas.microsoft.com/office/powerpoint/2010/main" val="1024086991"/>
+      </p:ext>
+    </p:extLst>
+  </p:cSld>
+  <p:clrMapOvr>
+    <a:masterClrMapping/>
+  </p:clrMapOvr>
+</p:notes>
+</file>
+
+<file path=ppt/notesSlides/notesSlide15.xml><?xml version="1.0" encoding="utf-8"?>
+<p:notes xmlns:a="http://schemas.openxmlformats.org/drawingml/2006/main" xmlns:r="http://schemas.openxmlformats.org/officeDocument/2006/relationships" xmlns:p="http://schemas.openxmlformats.org/presentationml/2006/main">
+  <p:cSld>
+    <p:spTree>
+      <p:nvGrpSpPr>
+        <p:cNvPr id="1" name=""/>
+        <p:cNvGrpSpPr/>
+        <p:nvPr/>
+      </p:nvGrpSpPr>
+      <p:grpSpPr>
+        <a:xfrm>
+          <a:off x="0" y="0"/>
+          <a:ext cx="0" cy="0"/>
+          <a:chOff x="0" y="0"/>
+          <a:chExt cx="0" cy="0"/>
+        </a:xfrm>
+      </p:grpSpPr>
+      <p:sp>
+        <p:nvSpPr>
+          <p:cNvPr id="2" name="Slide Image Placeholder 1"/>
+          <p:cNvSpPr>
+            <a:spLocks noGrp="1" noRot="1" noChangeAspect="1"/>
+          </p:cNvSpPr>
+          <p:nvPr>
+            <p:ph type="sldImg"/>
+          </p:nvPr>
+        </p:nvSpPr>
+        <p:spPr/>
+      </p:sp>
+      <p:sp>
+        <p:nvSpPr>
+          <p:cNvPr id="3" name="Notes Placeholder 2"/>
+          <p:cNvSpPr>
+            <a:spLocks noGrp="1"/>
+          </p:cNvSpPr>
+          <p:nvPr>
+            <p:ph type="body" idx="1"/>
+          </p:nvPr>
+        </p:nvSpPr>
+        <p:spPr/>
+        <p:txBody>
+          <a:bodyPr/>
+          <a:lstStyle/>
+          <a:p>
+            <a:r>
+              <a:rPr lang="en-US" dirty="0"/>
+              <a:t/>
+            </a:r>
+            <a:endParaRPr lang="en-US" dirty="0"/>
+          </a:p>
+        </p:txBody>
+      </p:sp>
+      <p:sp>
+        <p:nvSpPr>
+          <p:cNvPr id="4" name="Slide Number Placeholder 3"/>
+          <p:cNvSpPr>
+            <a:spLocks noGrp="1"/>
+          </p:cNvSpPr>
+          <p:nvPr>
+            <p:ph type="sldNum" sz="quarter" idx="10"/>
+          </p:nvPr>
+        </p:nvSpPr>
+        <p:spPr/>
+        <p:txBody>
+          <a:bodyPr/>
+          <a:lstStyle/>
+          <a:p>
+            <a:fld id="{F7021451-1387-4CA6-816F-3879F97B5CBC}" type="slidenum">
+              <a:rPr lang="en-US"/>
+              <a:t>15</a:t>
+            </a:fld>
+            <a:endParaRPr lang="en-US"/>
+          </a:p>
+        </p:txBody>
+      </p:sp>
+    </p:spTree>
+    <p:extLst>
+      <p:ext uri="{BB962C8B-B14F-4D97-AF65-F5344CB8AC3E}">
+        <p14:creationId xmlns:p14="http://schemas.microsoft.com/office/powerpoint/2010/main" val="1024086991"/>
+      </p:ext>
+    </p:extLst>
+  </p:cSld>
+  <p:clrMapOvr>
+    <a:masterClrMapping/>
+  </p:clrMapOvr>
+</p:notes>
+</file>
+
+<file path=ppt/notesSlides/notesSlide16.xml><?xml version="1.0" encoding="utf-8"?>
+<p:notes xmlns:a="http://schemas.openxmlformats.org/drawingml/2006/main" xmlns:r="http://schemas.openxmlformats.org/officeDocument/2006/relationships" xmlns:p="http://schemas.openxmlformats.org/presentationml/2006/main">
+  <p:cSld>
+    <p:spTree>
+      <p:nvGrpSpPr>
+        <p:cNvPr id="1" name=""/>
+        <p:cNvGrpSpPr/>
+        <p:nvPr/>
+      </p:nvGrpSpPr>
+      <p:grpSpPr>
+        <a:xfrm>
+          <a:off x="0" y="0"/>
+          <a:ext cx="0" cy="0"/>
+          <a:chOff x="0" y="0"/>
+          <a:chExt cx="0" cy="0"/>
+        </a:xfrm>
+      </p:grpSpPr>
+      <p:sp>
+        <p:nvSpPr>
+          <p:cNvPr id="2" name="Slide Image Placeholder 1"/>
+          <p:cNvSpPr>
+            <a:spLocks noGrp="1" noRot="1" noChangeAspect="1"/>
+          </p:cNvSpPr>
+          <p:nvPr>
+            <p:ph type="sldImg"/>
+          </p:nvPr>
+        </p:nvSpPr>
+        <p:spPr/>
+      </p:sp>
+      <p:sp>
+        <p:nvSpPr>
+          <p:cNvPr id="3" name="Notes Placeholder 2"/>
+          <p:cNvSpPr>
+            <a:spLocks noGrp="1"/>
+          </p:cNvSpPr>
+          <p:nvPr>
+            <p:ph type="body" idx="1"/>
+          </p:nvPr>
+        </p:nvSpPr>
+        <p:spPr/>
+        <p:txBody>
+          <a:bodyPr/>
+          <a:lstStyle/>
+          <a:p>
+            <a:r>
+              <a:rPr lang="en-US" dirty="0"/>
+              <a:t/>
+            </a:r>
+            <a:endParaRPr lang="en-US" dirty="0"/>
+          </a:p>
+        </p:txBody>
+      </p:sp>
+      <p:sp>
+        <p:nvSpPr>
+          <p:cNvPr id="4" name="Slide Number Placeholder 3"/>
+          <p:cNvSpPr>
+            <a:spLocks noGrp="1"/>
+          </p:cNvSpPr>
+          <p:nvPr>
+            <p:ph type="sldNum" sz="quarter" idx="10"/>
+          </p:nvPr>
+        </p:nvSpPr>
+        <p:spPr/>
+        <p:txBody>
+          <a:bodyPr/>
+          <a:lstStyle/>
+          <a:p>
+            <a:fld id="{F7021451-1387-4CA6-816F-3879F97B5CBC}" type="slidenum">
+              <a:rPr lang="en-US"/>
+              <a:t>16</a:t>
             </a:fld>
             <a:endParaRPr lang="en-US"/>
           </a:p>
@@ -2101,7 +2546,7 @@
     <p:bg>
       <p:bgPr>
         <a:solidFill>
-          <a:srgbClr val="00C2A8"/>
+          <a:srgbClr val="FFFFFF"/>
         </a:solidFill>
       </p:bgPr>
     </p:bg>
@@ -2127,8 +2572,67 @@
         </p:nvSpPr>
         <p:spPr>
           <a:xfrm>
-            <a:off x="548640" y="548640"/>
-            <a:ext cx="11091672" cy="548640"/>
+            <a:off x="548640" y="365760"/>
+            <a:ext cx="11091672" cy="822960"/>
+          </a:xfrm>
+          <a:prstGeom prst="rect">
+            <a:avLst/>
+          </a:prstGeom>
+          <a:noFill/>
+          <a:ln/>
+        </p:spPr>
+        <p:txBody>
+          <a:bodyPr wrap="square" lIns="0" tIns="0" rIns="0" bIns="0" rtlCol="0" anchor="ctr"/>
+          <a:lstStyle/>
+          <a:p>
+            <a:pPr rtl="1" algn="r" indent="0" marL="0">
+              <a:buNone/>
+            </a:pPr>
+            <a:r>
+              <a:rPr lang="en-US" sz="3000" b="1" dirty="0">
+                <a:solidFill>
+                  <a:srgbClr val="1B1F3B"/>
+                </a:solidFill>
+                <a:latin typeface="Arial" pitchFamily="34" charset="0"/>
+                <a:ea typeface="Arial" pitchFamily="34" charset="-122"/>
+                <a:cs typeface="Arial" pitchFamily="34" charset="-120"/>
+              </a:rPr>
+              <a:t>Best Practices לעבודה עם כלי Agentic (1)</a:t>
+            </a:r>
+            <a:endParaRPr lang="en-US" sz="3000" dirty="0"/>
+          </a:p>
+        </p:txBody>
+      </p:sp>
+      <p:sp>
+        <p:nvSpPr>
+          <p:cNvPr id="3" name="Shape 1"/>
+          <p:cNvSpPr/>
+          <p:nvPr/>
+        </p:nvSpPr>
+        <p:spPr>
+          <a:xfrm>
+            <a:off x="10332720" y="1554480"/>
+            <a:ext cx="548640" cy="548640"/>
+          </a:xfrm>
+          <a:prstGeom prst="ellipse">
+            <a:avLst/>
+          </a:prstGeom>
+          <a:solidFill>
+            <a:srgbClr val="00C2A8"/>
+          </a:solidFill>
+          <a:ln/>
+        </p:spPr>
+      </p:sp>
+      <p:sp>
+        <p:nvSpPr>
+          <p:cNvPr id="4" name="Text 2"/>
+          <p:cNvSpPr/>
+          <p:nvPr/>
+        </p:nvSpPr>
+        <p:spPr>
+          <a:xfrm>
+            <a:off x="10332720" y="1554480"/>
+            <a:ext cx="548640" cy="548640"/>
           </a:xfrm>
           <a:prstGeom prst="rect">
             <a:avLst/>
@@ -2144,46 +2648,144 @@
               <a:buNone/>
             </a:pPr>
             <a:r>
-              <a:rPr lang="en-US" sz="1600" i="1" dirty="0">
+              <a:rPr lang="en-US" sz="1400" b="1" dirty="0">
+                <a:solidFill>
+                  <a:srgbClr val="FFFFFF"/>
+                </a:solidFill>
+                <a:latin typeface="Arial" pitchFamily="34" charset="0"/>
+                <a:ea typeface="Arial" pitchFamily="34" charset="-122"/>
+                <a:cs typeface="Arial" pitchFamily="34" charset="-120"/>
+              </a:rPr>
+              <a:t>1</a:t>
+            </a:r>
+            <a:endParaRPr lang="en-US" sz="1400" dirty="0"/>
+          </a:p>
+        </p:txBody>
+      </p:sp>
+      <p:sp>
+        <p:nvSpPr>
+          <p:cNvPr id="5" name="Text 3"/>
+          <p:cNvSpPr/>
+          <p:nvPr/>
+        </p:nvSpPr>
+        <p:spPr>
+          <a:xfrm>
+            <a:off x="548640" y="1554480"/>
+            <a:ext cx="9509760" cy="365760"/>
+          </a:xfrm>
+          <a:prstGeom prst="rect">
+            <a:avLst/>
+          </a:prstGeom>
+          <a:noFill/>
+          <a:ln/>
+        </p:spPr>
+        <p:txBody>
+          <a:bodyPr wrap="square" lIns="0" tIns="0" rIns="0" bIns="0" rtlCol="0" anchor="ctr"/>
+          <a:lstStyle/>
+          <a:p>
+            <a:pPr rtl="1" algn="r" indent="0" marL="0">
+              <a:buNone/>
+            </a:pPr>
+            <a:r>
+              <a:rPr lang="en-US" sz="1800" b="1" dirty="0">
                 <a:solidFill>
                   <a:srgbClr val="1B1F3B"/>
+                </a:solidFill>
+                <a:latin typeface="Arial" pitchFamily="34" charset="0"/>
+                <a:ea typeface="Arial" pitchFamily="34" charset="-122"/>
+                <a:cs typeface="Arial" pitchFamily="34" charset="-120"/>
+              </a:rPr>
+              <a:t>הנחיות ברורות וספציפיות</a:t>
+            </a:r>
+            <a:endParaRPr lang="en-US" sz="1800" dirty="0"/>
+          </a:p>
+        </p:txBody>
+      </p:sp>
+      <p:sp>
+        <p:nvSpPr>
+          <p:cNvPr id="6" name="Text 4"/>
+          <p:cNvSpPr/>
+          <p:nvPr/>
+        </p:nvSpPr>
+        <p:spPr>
+          <a:xfrm>
+            <a:off x="548640" y="1938528"/>
+            <a:ext cx="9509760" cy="731520"/>
+          </a:xfrm>
+          <a:prstGeom prst="rect">
+            <a:avLst/>
+          </a:prstGeom>
+          <a:noFill/>
+          <a:ln/>
+        </p:spPr>
+        <p:txBody>
+          <a:bodyPr wrap="square" lIns="0" tIns="0" rIns="0" bIns="0" rtlCol="0" anchor="ctr"/>
+          <a:lstStyle/>
+          <a:p>
+            <a:pPr rtl="1" algn="r" indent="0" marL="0">
+              <a:buNone/>
+            </a:pPr>
+            <a:r>
+              <a:rPr lang="en-US" sz="1400" dirty="0">
+                <a:solidFill>
+                  <a:srgbClr val="6B7280"/>
                 </a:solidFill>
                 <a:latin typeface="Calibri" pitchFamily="34" charset="0"/>
                 <a:ea typeface="Calibri" pitchFamily="34" charset="-122"/>
                 <a:cs typeface="Calibri" pitchFamily="34" charset="-120"/>
               </a:rPr>
-              <a:t>עוברים לתרגול</a:t>
-            </a:r>
-            <a:endParaRPr lang="en-US" sz="1600" dirty="0"/>
-          </a:p>
-        </p:txBody>
-      </p:sp>
-      <p:sp>
-        <p:nvSpPr>
-          <p:cNvPr id="3" name="Text 1"/>
-          <p:cNvSpPr/>
-          <p:nvPr/>
-        </p:nvSpPr>
-        <p:spPr>
-          <a:xfrm>
-            <a:off x="548640" y="1188720"/>
-            <a:ext cx="11091672" cy="1005840"/>
-          </a:xfrm>
-          <a:prstGeom prst="rect">
-            <a:avLst/>
-          </a:prstGeom>
-          <a:noFill/>
-          <a:ln/>
-        </p:spPr>
-        <p:txBody>
-          <a:bodyPr wrap="square" lIns="0" tIns="0" rIns="0" bIns="0" rtlCol="0" anchor="ctr"/>
-          <a:lstStyle/>
-          <a:p>
-            <a:pPr rtl="1" algn="ctr" indent="0" marL="0">
-              <a:buNone/>
-            </a:pPr>
-            <a:r>
-              <a:rPr lang="en-US" sz="3200" b="1" dirty="0">
+              <a:t>“תוסיף התחברות” עמום; “תוסיף התחברות עם Google OAuth, עם redirect לדף הבית” ברור</a:t>
+            </a:r>
+            <a:endParaRPr lang="en-US" sz="1400" dirty="0"/>
+          </a:p>
+        </p:txBody>
+      </p:sp>
+      <p:sp>
+        <p:nvSpPr>
+          <p:cNvPr id="7" name="Shape 5"/>
+          <p:cNvSpPr/>
+          <p:nvPr/>
+        </p:nvSpPr>
+        <p:spPr>
+          <a:xfrm>
+            <a:off x="10332720" y="2926080"/>
+            <a:ext cx="548640" cy="548640"/>
+          </a:xfrm>
+          <a:prstGeom prst="ellipse">
+            <a:avLst/>
+          </a:prstGeom>
+          <a:solidFill>
+            <a:srgbClr val="00C2A8"/>
+          </a:solidFill>
+          <a:ln/>
+        </p:spPr>
+      </p:sp>
+      <p:sp>
+        <p:nvSpPr>
+          <p:cNvPr id="8" name="Text 6"/>
+          <p:cNvSpPr/>
+          <p:nvPr/>
+        </p:nvSpPr>
+        <p:spPr>
+          <a:xfrm>
+            <a:off x="10332720" y="2926080"/>
+            <a:ext cx="548640" cy="548640"/>
+          </a:xfrm>
+          <a:prstGeom prst="rect">
+            <a:avLst/>
+          </a:prstGeom>
+          <a:noFill/>
+          <a:ln/>
+        </p:spPr>
+        <p:txBody>
+          <a:bodyPr wrap="square" lIns="0" tIns="0" rIns="0" bIns="0" rtlCol="0" anchor="ctr"/>
+          <a:lstStyle/>
+          <a:p>
+            <a:pPr algn="ctr" indent="0" marL="0">
+              <a:buNone/>
+            </a:pPr>
+            <a:r>
+              <a:rPr lang="en-US" sz="1400" b="1" dirty="0">
                 <a:solidFill>
                   <a:srgbClr val="FFFFFF"/>
                 </a:solidFill>
@@ -2191,214 +2793,263 @@
                 <a:ea typeface="Arial" pitchFamily="34" charset="-122"/>
                 <a:cs typeface="Arial" pitchFamily="34" charset="-120"/>
               </a:rPr>
-              <a:t>45 דקות: הקמת סביבת עבודה</a:t>
-            </a:r>
-            <a:endParaRPr lang="en-US" sz="3200" dirty="0"/>
-          </a:p>
-        </p:txBody>
-      </p:sp>
-      <p:sp>
-        <p:nvSpPr>
-          <p:cNvPr id="4" name="Text 2"/>
-          <p:cNvSpPr/>
-          <p:nvPr/>
-        </p:nvSpPr>
-        <p:spPr>
-          <a:xfrm>
-            <a:off x="822960" y="2651760"/>
-            <a:ext cx="5120640" cy="2011680"/>
-          </a:xfrm>
-          <a:prstGeom prst="rect">
-            <a:avLst/>
-          </a:prstGeom>
-          <a:noFill/>
-          <a:ln/>
-        </p:spPr>
-        <p:txBody>
-          <a:bodyPr wrap="square" lIns="0" tIns="0" rIns="0" bIns="0" rtlCol="0" anchor="ctr"/>
-          <a:lstStyle/>
-          <a:p>
-            <a:pPr algn="r" indent="0" marL="0">
-              <a:spcAft>
-                <a:spcPts val="1000"/>
-              </a:spcAft>
-              <a:buNone/>
-            </a:pPr>
-            <a:r>
-              <a:rPr lang="en-US" sz="1600" dirty="0">
-                <a:solidFill>
-                  <a:srgbClr val="FFFFFF"/>
+              <a:t>2</a:t>
+            </a:r>
+            <a:endParaRPr lang="en-US" sz="1400" dirty="0"/>
+          </a:p>
+        </p:txBody>
+      </p:sp>
+      <p:sp>
+        <p:nvSpPr>
+          <p:cNvPr id="9" name="Text 7"/>
+          <p:cNvSpPr/>
+          <p:nvPr/>
+        </p:nvSpPr>
+        <p:spPr>
+          <a:xfrm>
+            <a:off x="548640" y="2926080"/>
+            <a:ext cx="9509760" cy="365760"/>
+          </a:xfrm>
+          <a:prstGeom prst="rect">
+            <a:avLst/>
+          </a:prstGeom>
+          <a:noFill/>
+          <a:ln/>
+        </p:spPr>
+        <p:txBody>
+          <a:bodyPr wrap="square" lIns="0" tIns="0" rIns="0" bIns="0" rtlCol="0" anchor="ctr"/>
+          <a:lstStyle/>
+          <a:p>
+            <a:pPr rtl="1" algn="r" indent="0" marL="0">
+              <a:buNone/>
+            </a:pPr>
+            <a:r>
+              <a:rPr lang="en-US" sz="1800" b="1" dirty="0">
+                <a:solidFill>
+                  <a:srgbClr val="1B1F3B"/>
+                </a:solidFill>
+                <a:latin typeface="Arial" pitchFamily="34" charset="0"/>
+                <a:ea typeface="Arial" pitchFamily="34" charset="-122"/>
+                <a:cs typeface="Arial" pitchFamily="34" charset="-120"/>
+              </a:rPr>
+              <a:t>צעדים קטנים</a:t>
+            </a:r>
+            <a:endParaRPr lang="en-US" sz="1800" dirty="0"/>
+          </a:p>
+        </p:txBody>
+      </p:sp>
+      <p:sp>
+        <p:nvSpPr>
+          <p:cNvPr id="10" name="Text 8"/>
+          <p:cNvSpPr/>
+          <p:nvPr/>
+        </p:nvSpPr>
+        <p:spPr>
+          <a:xfrm>
+            <a:off x="548640" y="3310128"/>
+            <a:ext cx="9509760" cy="731520"/>
+          </a:xfrm>
+          <a:prstGeom prst="rect">
+            <a:avLst/>
+          </a:prstGeom>
+          <a:noFill/>
+          <a:ln/>
+        </p:spPr>
+        <p:txBody>
+          <a:bodyPr wrap="square" lIns="0" tIns="0" rIns="0" bIns="0" rtlCol="0" anchor="ctr"/>
+          <a:lstStyle/>
+          <a:p>
+            <a:pPr rtl="1" algn="r" indent="0" marL="0">
+              <a:buNone/>
+            </a:pPr>
+            <a:r>
+              <a:rPr lang="en-US" sz="1400" dirty="0">
+                <a:solidFill>
+                  <a:srgbClr val="6B7280"/>
                 </a:solidFill>
                 <a:latin typeface="Calibri" pitchFamily="34" charset="0"/>
                 <a:ea typeface="Calibri" pitchFamily="34" charset="-122"/>
                 <a:cs typeface="Calibri" pitchFamily="34" charset="-120"/>
               </a:rPr>
-              <a:t>• VS Code + Git מותקנים</a:t>
-            </a:r>
-            <a:endParaRPr lang="en-US" sz="1600" dirty="0"/>
-          </a:p>
-          <a:p>
-            <a:pPr algn="r" indent="0" marL="0">
-              <a:spcAft>
-                <a:spcPts val="1000"/>
-              </a:spcAft>
-              <a:buNone/>
-            </a:pPr>
-            <a:r>
-              <a:rPr lang="en-US" sz="1600" dirty="0">
+              <a:t>משימה גדולה מתפרקת לצעדים — קל יותר לבדוק תוצאה של צעד קטן</a:t>
+            </a:r>
+            <a:endParaRPr lang="en-US" sz="1400" dirty="0"/>
+          </a:p>
+        </p:txBody>
+      </p:sp>
+      <p:sp>
+        <p:nvSpPr>
+          <p:cNvPr id="11" name="Shape 9"/>
+          <p:cNvSpPr/>
+          <p:nvPr/>
+        </p:nvSpPr>
+        <p:spPr>
+          <a:xfrm>
+            <a:off x="10332720" y="4297680"/>
+            <a:ext cx="548640" cy="548640"/>
+          </a:xfrm>
+          <a:prstGeom prst="ellipse">
+            <a:avLst/>
+          </a:prstGeom>
+          <a:solidFill>
+            <a:srgbClr val="00C2A8"/>
+          </a:solidFill>
+          <a:ln/>
+        </p:spPr>
+      </p:sp>
+      <p:sp>
+        <p:nvSpPr>
+          <p:cNvPr id="12" name="Text 10"/>
+          <p:cNvSpPr/>
+          <p:nvPr/>
+        </p:nvSpPr>
+        <p:spPr>
+          <a:xfrm>
+            <a:off x="10332720" y="4297680"/>
+            <a:ext cx="548640" cy="548640"/>
+          </a:xfrm>
+          <a:prstGeom prst="rect">
+            <a:avLst/>
+          </a:prstGeom>
+          <a:noFill/>
+          <a:ln/>
+        </p:spPr>
+        <p:txBody>
+          <a:bodyPr wrap="square" lIns="0" tIns="0" rIns="0" bIns="0" rtlCol="0" anchor="ctr"/>
+          <a:lstStyle/>
+          <a:p>
+            <a:pPr algn="ctr" indent="0" marL="0">
+              <a:buNone/>
+            </a:pPr>
+            <a:r>
+              <a:rPr lang="en-US" sz="1400" b="1" dirty="0">
                 <a:solidFill>
                   <a:srgbClr val="FFFFFF"/>
+                </a:solidFill>
+                <a:latin typeface="Arial" pitchFamily="34" charset="0"/>
+                <a:ea typeface="Arial" pitchFamily="34" charset="-122"/>
+                <a:cs typeface="Arial" pitchFamily="34" charset="-120"/>
+              </a:rPr>
+              <a:t>3</a:t>
+            </a:r>
+            <a:endParaRPr lang="en-US" sz="1400" dirty="0"/>
+          </a:p>
+        </p:txBody>
+      </p:sp>
+      <p:sp>
+        <p:nvSpPr>
+          <p:cNvPr id="13" name="Text 11"/>
+          <p:cNvSpPr/>
+          <p:nvPr/>
+        </p:nvSpPr>
+        <p:spPr>
+          <a:xfrm>
+            <a:off x="548640" y="4297680"/>
+            <a:ext cx="9509760" cy="365760"/>
+          </a:xfrm>
+          <a:prstGeom prst="rect">
+            <a:avLst/>
+          </a:prstGeom>
+          <a:noFill/>
+          <a:ln/>
+        </p:spPr>
+        <p:txBody>
+          <a:bodyPr wrap="square" lIns="0" tIns="0" rIns="0" bIns="0" rtlCol="0" anchor="ctr"/>
+          <a:lstStyle/>
+          <a:p>
+            <a:pPr rtl="1" algn="r" indent="0" marL="0">
+              <a:buNone/>
+            </a:pPr>
+            <a:r>
+              <a:rPr lang="en-US" sz="1800" b="1" dirty="0">
+                <a:solidFill>
+                  <a:srgbClr val="1B1F3B"/>
+                </a:solidFill>
+                <a:latin typeface="Arial" pitchFamily="34" charset="0"/>
+                <a:ea typeface="Arial" pitchFamily="34" charset="-122"/>
+                <a:cs typeface="Arial" pitchFamily="34" charset="-120"/>
+              </a:rPr>
+              <a:t>בדיקת כל Diff</a:t>
+            </a:r>
+            <a:endParaRPr lang="en-US" sz="1800" dirty="0"/>
+          </a:p>
+        </p:txBody>
+      </p:sp>
+      <p:sp>
+        <p:nvSpPr>
+          <p:cNvPr id="14" name="Text 12"/>
+          <p:cNvSpPr/>
+          <p:nvPr/>
+        </p:nvSpPr>
+        <p:spPr>
+          <a:xfrm>
+            <a:off x="548640" y="4681728"/>
+            <a:ext cx="9509760" cy="731520"/>
+          </a:xfrm>
+          <a:prstGeom prst="rect">
+            <a:avLst/>
+          </a:prstGeom>
+          <a:noFill/>
+          <a:ln/>
+        </p:spPr>
+        <p:txBody>
+          <a:bodyPr wrap="square" lIns="0" tIns="0" rIns="0" bIns="0" rtlCol="0" anchor="ctr"/>
+          <a:lstStyle/>
+          <a:p>
+            <a:pPr rtl="1" algn="r" indent="0" marL="0">
+              <a:buNone/>
+            </a:pPr>
+            <a:r>
+              <a:rPr lang="en-US" sz="1400" dirty="0">
+                <a:solidFill>
+                  <a:srgbClr val="6B7280"/>
                 </a:solidFill>
                 <a:latin typeface="Calibri" pitchFamily="34" charset="0"/>
                 <a:ea typeface="Calibri" pitchFamily="34" charset="-122"/>
                 <a:cs typeface="Calibri" pitchFamily="34" charset="-120"/>
               </a:rPr>
-              <a:t>• Repository חדש ב-GitHub</a:t>
-            </a:r>
-            <a:endParaRPr lang="en-US" sz="1600" dirty="0"/>
-          </a:p>
-          <a:p>
-            <a:pPr algn="r" indent="0" marL="0">
-              <a:spcAft>
-                <a:spcPts val="1000"/>
-              </a:spcAft>
-              <a:buNone/>
-            </a:pPr>
-            <a:r>
-              <a:rPr lang="en-US" sz="1600" dirty="0">
-                <a:solidFill>
-                  <a:srgbClr val="FFFFFF"/>
+              <a:t>לפני אישור שינוי, קוראים אותו. תמיד, בלי יוצא מן הכלל</a:t>
+            </a:r>
+            <a:endParaRPr lang="en-US" sz="1400" dirty="0"/>
+          </a:p>
+        </p:txBody>
+      </p:sp>
+      <p:sp>
+        <p:nvSpPr>
+          <p:cNvPr id="15" name="Text 13"/>
+          <p:cNvSpPr/>
+          <p:nvPr/>
+        </p:nvSpPr>
+        <p:spPr>
+          <a:xfrm>
+            <a:off x="548640" y="6492240"/>
+            <a:ext cx="11091672" cy="274320"/>
+          </a:xfrm>
+          <a:prstGeom prst="rect">
+            <a:avLst/>
+          </a:prstGeom>
+          <a:noFill/>
+          <a:ln/>
+        </p:spPr>
+        <p:txBody>
+          <a:bodyPr wrap="square" lIns="0" tIns="0" rIns="0" bIns="0" rtlCol="0" anchor="ctr"/>
+          <a:lstStyle/>
+          <a:p>
+            <a:pPr rtl="1" algn="r" indent="0" marL="0">
+              <a:buNone/>
+            </a:pPr>
+            <a:r>
+              <a:rPr lang="en-US" sz="900" dirty="0">
+                <a:solidFill>
+                  <a:srgbClr val="A6A6B0"/>
                 </a:solidFill>
                 <a:latin typeface="Calibri" pitchFamily="34" charset="0"/>
                 <a:ea typeface="Calibri" pitchFamily="34" charset="-122"/>
                 <a:cs typeface="Calibri" pitchFamily="34" charset="-120"/>
               </a:rPr>
-              <a:t>• כלי AI חינמי מחובר</a:t>
-            </a:r>
-            <a:endParaRPr lang="en-US" sz="1600" dirty="0"/>
-          </a:p>
-          <a:p>
-            <a:pPr algn="r" indent="0" marL="0">
-              <a:spcAft>
-                <a:spcPts val="1000"/>
-              </a:spcAft>
-              <a:buNone/>
-            </a:pPr>
-            <a:r>
-              <a:rPr lang="en-US" sz="1600" dirty="0">
-                <a:solidFill>
-                  <a:srgbClr val="FFFFFF"/>
-                </a:solidFill>
-                <a:latin typeface="Calibri" pitchFamily="34" charset="0"/>
-                <a:ea typeface="Calibri" pitchFamily="34" charset="-122"/>
-                <a:cs typeface="Calibri" pitchFamily="34" charset="-120"/>
-              </a:rPr>
-              <a:t>• Commit ראשון נדחף בהצלחה</a:t>
-            </a:r>
-            <a:endParaRPr lang="en-US" sz="1600" dirty="0"/>
-          </a:p>
-        </p:txBody>
-      </p:sp>
-      <p:sp>
-        <p:nvSpPr>
-          <p:cNvPr id="5" name="Shape 3"/>
-          <p:cNvSpPr/>
-          <p:nvPr/>
-        </p:nvSpPr>
-        <p:spPr>
-          <a:xfrm>
-            <a:off x="6309360" y="2651760"/>
-            <a:ext cx="5056632" cy="2926080"/>
-          </a:xfrm>
-          <a:prstGeom prst="rect">
-            <a:avLst/>
-          </a:prstGeom>
-          <a:solidFill>
-            <a:srgbClr val="2A2F55"/>
-          </a:solidFill>
-          <a:ln w="15875">
-            <a:solidFill>
-              <a:srgbClr val="00C2A8"/>
-            </a:solidFill>
-            <a:prstDash val="dash"/>
-          </a:ln>
-        </p:spPr>
-      </p:sp>
-      <p:sp>
-        <p:nvSpPr>
-          <p:cNvPr id="6" name="Text 4"/>
-          <p:cNvSpPr/>
-          <p:nvPr/>
-        </p:nvSpPr>
-        <p:spPr>
-          <a:xfrm>
-            <a:off x="6309360" y="2651760"/>
-            <a:ext cx="5056632" cy="2926080"/>
-          </a:xfrm>
-          <a:prstGeom prst="rect">
-            <a:avLst/>
-          </a:prstGeom>
-          <a:noFill/>
-          <a:ln/>
-        </p:spPr>
-        <p:txBody>
-          <a:bodyPr wrap="square" lIns="101600" tIns="101600" rIns="101600" bIns="101600" rtlCol="0" anchor="ctr"/>
-          <a:lstStyle/>
-          <a:p>
-            <a:pPr rtl="1" algn="ctr" indent="0" marL="0">
-              <a:buNone/>
-            </a:pPr>
-            <a:r>
-              <a:rPr lang="en-US" sz="1200" i="1" dirty="0">
-                <a:solidFill>
-                  <a:srgbClr val="00C2A8"/>
-                </a:solidFill>
-                <a:latin typeface="Calibri" pitchFamily="34" charset="0"/>
-                <a:ea typeface="Calibri" pitchFamily="34" charset="-122"/>
-                <a:cs typeface="Calibri" pitchFamily="34" charset="-120"/>
-              </a:rPr>
-              <a:t>[תמונה: מסך טרמינל אחרי git push מוצלח]</a:t>
-            </a:r>
-            <a:endParaRPr lang="en-US" sz="1200" dirty="0"/>
-          </a:p>
-        </p:txBody>
-      </p:sp>
-      <p:sp>
-        <p:nvSpPr>
-          <p:cNvPr id="7" name="Text 5"/>
-          <p:cNvSpPr/>
-          <p:nvPr/>
-        </p:nvSpPr>
-        <p:spPr>
-          <a:xfrm>
-            <a:off x="548640" y="6035040"/>
-            <a:ext cx="11091672" cy="365760"/>
-          </a:xfrm>
-          <a:prstGeom prst="rect">
-            <a:avLst/>
-          </a:prstGeom>
-          <a:noFill/>
-          <a:ln/>
-        </p:spPr>
-        <p:txBody>
-          <a:bodyPr wrap="square" lIns="0" tIns="0" rIns="0" bIns="0" rtlCol="0" anchor="ctr"/>
-          <a:lstStyle/>
-          <a:p>
-            <a:pPr rtl="1" algn="ctr" indent="0" marL="0">
-              <a:buNone/>
-            </a:pPr>
-            <a:r>
-              <a:rPr lang="en-US" sz="1300" i="1" dirty="0">
-                <a:solidFill>
-                  <a:srgbClr val="1B1F3B"/>
-                </a:solidFill>
-                <a:latin typeface="Calibri" pitchFamily="34" charset="0"/>
-                <a:ea typeface="Calibri" pitchFamily="34" charset="-122"/>
-                <a:cs typeface="Calibri" pitchFamily="34" charset="-120"/>
-              </a:rPr>
-              <a:t>ראו exercises.md ו-solutions.md לפירוט מלא</a:t>
-            </a:r>
-            <a:endParaRPr lang="en-US" sz="1300" dirty="0"/>
+              <a:t>Vibe Coding · שיעור 2 · שקף 10</a:t>
+            </a:r>
+            <a:endParaRPr lang="en-US" sz="900" dirty="0"/>
           </a:p>
         </p:txBody>
       </p:sp>
@@ -2413,6 +3064,527 @@
 <file path=ppt/slides/slide11.xml><?xml version="1.0" encoding="utf-8"?>
 <p:sld xmlns:a="http://schemas.openxmlformats.org/drawingml/2006/main" xmlns:r="http://schemas.openxmlformats.org/officeDocument/2006/relationships" xmlns:p="http://schemas.openxmlformats.org/presentationml/2006/main">
   <p:cSld name="Slide 11">
+    <p:bg>
+      <p:bgPr>
+        <a:solidFill>
+          <a:srgbClr val="FFFFFF"/>
+        </a:solidFill>
+      </p:bgPr>
+    </p:bg>
+    <p:spTree>
+      <p:nvGrpSpPr>
+        <p:cNvPr id="1" name=""/>
+        <p:cNvGrpSpPr/>
+        <p:nvPr/>
+      </p:nvGrpSpPr>
+      <p:grpSpPr>
+        <a:xfrm>
+          <a:off x="0" y="0"/>
+          <a:ext cx="0" cy="0"/>
+          <a:chOff x="0" y="0"/>
+          <a:chExt cx="0" cy="0"/>
+        </a:xfrm>
+      </p:grpSpPr>
+      <p:sp>
+        <p:nvSpPr>
+          <p:cNvPr id="2" name="Text 0"/>
+          <p:cNvSpPr/>
+          <p:nvPr/>
+        </p:nvSpPr>
+        <p:spPr>
+          <a:xfrm>
+            <a:off x="548640" y="365760"/>
+            <a:ext cx="11091672" cy="822960"/>
+          </a:xfrm>
+          <a:prstGeom prst="rect">
+            <a:avLst/>
+          </a:prstGeom>
+          <a:noFill/>
+          <a:ln/>
+        </p:spPr>
+        <p:txBody>
+          <a:bodyPr wrap="square" lIns="0" tIns="0" rIns="0" bIns="0" rtlCol="0" anchor="ctr"/>
+          <a:lstStyle/>
+          <a:p>
+            <a:pPr rtl="1" algn="r" indent="0" marL="0">
+              <a:buNone/>
+            </a:pPr>
+            <a:r>
+              <a:rPr lang="en-US" sz="3000" b="1" dirty="0">
+                <a:solidFill>
+                  <a:srgbClr val="1B1F3B"/>
+                </a:solidFill>
+                <a:latin typeface="Arial" pitchFamily="34" charset="0"/>
+                <a:ea typeface="Arial" pitchFamily="34" charset="-122"/>
+                <a:cs typeface="Arial" pitchFamily="34" charset="-120"/>
+              </a:rPr>
+              <a:t>Best Practices לעבודה עם כלי Agentic (2)</a:t>
+            </a:r>
+            <a:endParaRPr lang="en-US" sz="3000" dirty="0"/>
+          </a:p>
+        </p:txBody>
+      </p:sp>
+      <p:sp>
+        <p:nvSpPr>
+          <p:cNvPr id="3" name="Shape 1"/>
+          <p:cNvSpPr/>
+          <p:nvPr/>
+        </p:nvSpPr>
+        <p:spPr>
+          <a:xfrm>
+            <a:off x="10332720" y="1554480"/>
+            <a:ext cx="548640" cy="548640"/>
+          </a:xfrm>
+          <a:prstGeom prst="ellipse">
+            <a:avLst/>
+          </a:prstGeom>
+          <a:solidFill>
+            <a:srgbClr val="00C2A8"/>
+          </a:solidFill>
+          <a:ln/>
+        </p:spPr>
+      </p:sp>
+      <p:sp>
+        <p:nvSpPr>
+          <p:cNvPr id="4" name="Text 2"/>
+          <p:cNvSpPr/>
+          <p:nvPr/>
+        </p:nvSpPr>
+        <p:spPr>
+          <a:xfrm>
+            <a:off x="10332720" y="1554480"/>
+            <a:ext cx="548640" cy="548640"/>
+          </a:xfrm>
+          <a:prstGeom prst="rect">
+            <a:avLst/>
+          </a:prstGeom>
+          <a:noFill/>
+          <a:ln/>
+        </p:spPr>
+        <p:txBody>
+          <a:bodyPr wrap="square" lIns="0" tIns="0" rIns="0" bIns="0" rtlCol="0" anchor="ctr"/>
+          <a:lstStyle/>
+          <a:p>
+            <a:pPr algn="ctr" indent="0" marL="0">
+              <a:buNone/>
+            </a:pPr>
+            <a:r>
+              <a:rPr lang="en-US" sz="1400" b="1" dirty="0">
+                <a:solidFill>
+                  <a:srgbClr val="FFFFFF"/>
+                </a:solidFill>
+                <a:latin typeface="Arial" pitchFamily="34" charset="0"/>
+                <a:ea typeface="Arial" pitchFamily="34" charset="-122"/>
+                <a:cs typeface="Arial" pitchFamily="34" charset="-120"/>
+              </a:rPr>
+              <a:t>4</a:t>
+            </a:r>
+            <a:endParaRPr lang="en-US" sz="1400" dirty="0"/>
+          </a:p>
+        </p:txBody>
+      </p:sp>
+      <p:sp>
+        <p:nvSpPr>
+          <p:cNvPr id="5" name="Text 3"/>
+          <p:cNvSpPr/>
+          <p:nvPr/>
+        </p:nvSpPr>
+        <p:spPr>
+          <a:xfrm>
+            <a:off x="548640" y="1554480"/>
+            <a:ext cx="9509760" cy="365760"/>
+          </a:xfrm>
+          <a:prstGeom prst="rect">
+            <a:avLst/>
+          </a:prstGeom>
+          <a:noFill/>
+          <a:ln/>
+        </p:spPr>
+        <p:txBody>
+          <a:bodyPr wrap="square" lIns="0" tIns="0" rIns="0" bIns="0" rtlCol="0" anchor="ctr"/>
+          <a:lstStyle/>
+          <a:p>
+            <a:pPr rtl="1" algn="r" indent="0" marL="0">
+              <a:buNone/>
+            </a:pPr>
+            <a:r>
+              <a:rPr lang="en-US" sz="1800" b="1" dirty="0">
+                <a:solidFill>
+                  <a:srgbClr val="1B1F3B"/>
+                </a:solidFill>
+                <a:latin typeface="Arial" pitchFamily="34" charset="0"/>
+                <a:ea typeface="Arial" pitchFamily="34" charset="-122"/>
+                <a:cs typeface="Arial" pitchFamily="34" charset="-120"/>
+              </a:rPr>
+              <a:t>Git כרשת ביטחון</a:t>
+            </a:r>
+            <a:endParaRPr lang="en-US" sz="1800" dirty="0"/>
+          </a:p>
+        </p:txBody>
+      </p:sp>
+      <p:sp>
+        <p:nvSpPr>
+          <p:cNvPr id="6" name="Text 4"/>
+          <p:cNvSpPr/>
+          <p:nvPr/>
+        </p:nvSpPr>
+        <p:spPr>
+          <a:xfrm>
+            <a:off x="548640" y="1938528"/>
+            <a:ext cx="9509760" cy="731520"/>
+          </a:xfrm>
+          <a:prstGeom prst="rect">
+            <a:avLst/>
+          </a:prstGeom>
+          <a:noFill/>
+          <a:ln/>
+        </p:spPr>
+        <p:txBody>
+          <a:bodyPr wrap="square" lIns="0" tIns="0" rIns="0" bIns="0" rtlCol="0" anchor="ctr"/>
+          <a:lstStyle/>
+          <a:p>
+            <a:pPr rtl="1" algn="r" indent="0" marL="0">
+              <a:buNone/>
+            </a:pPr>
+            <a:r>
+              <a:rPr lang="en-US" sz="1400" dirty="0">
+                <a:solidFill>
+                  <a:srgbClr val="6B7280"/>
+                </a:solidFill>
+                <a:latin typeface="Calibri" pitchFamily="34" charset="0"/>
+                <a:ea typeface="Calibri" pitchFamily="34" charset="-122"/>
+                <a:cs typeface="Calibri" pitchFamily="34" charset="-120"/>
+              </a:rPr>
+              <a:t>Commit לפני כל ניסוי משמעותי — תמיד אפשר לחזור אחורה</a:t>
+            </a:r>
+            <a:endParaRPr lang="en-US" sz="1400" dirty="0"/>
+          </a:p>
+        </p:txBody>
+      </p:sp>
+      <p:sp>
+        <p:nvSpPr>
+          <p:cNvPr id="7" name="Shape 5"/>
+          <p:cNvSpPr/>
+          <p:nvPr/>
+        </p:nvSpPr>
+        <p:spPr>
+          <a:xfrm>
+            <a:off x="10332720" y="2926080"/>
+            <a:ext cx="548640" cy="548640"/>
+          </a:xfrm>
+          <a:prstGeom prst="ellipse">
+            <a:avLst/>
+          </a:prstGeom>
+          <a:solidFill>
+            <a:srgbClr val="00C2A8"/>
+          </a:solidFill>
+          <a:ln/>
+        </p:spPr>
+      </p:sp>
+      <p:sp>
+        <p:nvSpPr>
+          <p:cNvPr id="8" name="Text 6"/>
+          <p:cNvSpPr/>
+          <p:nvPr/>
+        </p:nvSpPr>
+        <p:spPr>
+          <a:xfrm>
+            <a:off x="10332720" y="2926080"/>
+            <a:ext cx="548640" cy="548640"/>
+          </a:xfrm>
+          <a:prstGeom prst="rect">
+            <a:avLst/>
+          </a:prstGeom>
+          <a:noFill/>
+          <a:ln/>
+        </p:spPr>
+        <p:txBody>
+          <a:bodyPr wrap="square" lIns="0" tIns="0" rIns="0" bIns="0" rtlCol="0" anchor="ctr"/>
+          <a:lstStyle/>
+          <a:p>
+            <a:pPr algn="ctr" indent="0" marL="0">
+              <a:buNone/>
+            </a:pPr>
+            <a:r>
+              <a:rPr lang="en-US" sz="1400" b="1" dirty="0">
+                <a:solidFill>
+                  <a:srgbClr val="FFFFFF"/>
+                </a:solidFill>
+                <a:latin typeface="Arial" pitchFamily="34" charset="0"/>
+                <a:ea typeface="Arial" pitchFamily="34" charset="-122"/>
+                <a:cs typeface="Arial" pitchFamily="34" charset="-120"/>
+              </a:rPr>
+              <a:t>5</a:t>
+            </a:r>
+            <a:endParaRPr lang="en-US" sz="1400" dirty="0"/>
+          </a:p>
+        </p:txBody>
+      </p:sp>
+      <p:sp>
+        <p:nvSpPr>
+          <p:cNvPr id="9" name="Text 7"/>
+          <p:cNvSpPr/>
+          <p:nvPr/>
+        </p:nvSpPr>
+        <p:spPr>
+          <a:xfrm>
+            <a:off x="548640" y="2926080"/>
+            <a:ext cx="9509760" cy="365760"/>
+          </a:xfrm>
+          <a:prstGeom prst="rect">
+            <a:avLst/>
+          </a:prstGeom>
+          <a:noFill/>
+          <a:ln/>
+        </p:spPr>
+        <p:txBody>
+          <a:bodyPr wrap="square" lIns="0" tIns="0" rIns="0" bIns="0" rtlCol="0" anchor="ctr"/>
+          <a:lstStyle/>
+          <a:p>
+            <a:pPr rtl="1" algn="r" indent="0" marL="0">
+              <a:buNone/>
+            </a:pPr>
+            <a:r>
+              <a:rPr lang="en-US" sz="1800" b="1" dirty="0">
+                <a:solidFill>
+                  <a:srgbClr val="1B1F3B"/>
+                </a:solidFill>
+                <a:latin typeface="Arial" pitchFamily="34" charset="0"/>
+                <a:ea typeface="Arial" pitchFamily="34" charset="-122"/>
+                <a:cs typeface="Arial" pitchFamily="34" charset="-120"/>
+              </a:rPr>
+              <a:t>לא לסמוך בעיוורון</a:t>
+            </a:r>
+            <a:endParaRPr lang="en-US" sz="1800" dirty="0"/>
+          </a:p>
+        </p:txBody>
+      </p:sp>
+      <p:sp>
+        <p:nvSpPr>
+          <p:cNvPr id="10" name="Text 8"/>
+          <p:cNvSpPr/>
+          <p:nvPr/>
+        </p:nvSpPr>
+        <p:spPr>
+          <a:xfrm>
+            <a:off x="548640" y="3310128"/>
+            <a:ext cx="9509760" cy="731520"/>
+          </a:xfrm>
+          <a:prstGeom prst="rect">
+            <a:avLst/>
+          </a:prstGeom>
+          <a:noFill/>
+          <a:ln/>
+        </p:spPr>
+        <p:txBody>
+          <a:bodyPr wrap="square" lIns="0" tIns="0" rIns="0" bIns="0" rtlCol="0" anchor="ctr"/>
+          <a:lstStyle/>
+          <a:p>
+            <a:pPr rtl="1" algn="r" indent="0" marL="0">
+              <a:buNone/>
+            </a:pPr>
+            <a:r>
+              <a:rPr lang="en-US" sz="1400" dirty="0">
+                <a:solidFill>
+                  <a:srgbClr val="6B7280"/>
+                </a:solidFill>
+                <a:latin typeface="Calibri" pitchFamily="34" charset="0"/>
+                <a:ea typeface="Calibri" pitchFamily="34" charset="-122"/>
+                <a:cs typeface="Calibri" pitchFamily="34" charset="-120"/>
+              </a:rPr>
+              <a:t>אם משהו נראה “יותר מדי חכם” או משתמש בפונקציה לא מוכרת — בודקים שהיא קיימת</a:t>
+            </a:r>
+            <a:endParaRPr lang="en-US" sz="1400" dirty="0"/>
+          </a:p>
+        </p:txBody>
+      </p:sp>
+      <p:sp>
+        <p:nvSpPr>
+          <p:cNvPr id="11" name="Shape 9"/>
+          <p:cNvSpPr/>
+          <p:nvPr/>
+        </p:nvSpPr>
+        <p:spPr>
+          <a:xfrm>
+            <a:off x="10332720" y="4297680"/>
+            <a:ext cx="548640" cy="548640"/>
+          </a:xfrm>
+          <a:prstGeom prst="ellipse">
+            <a:avLst/>
+          </a:prstGeom>
+          <a:solidFill>
+            <a:srgbClr val="00C2A8"/>
+          </a:solidFill>
+          <a:ln/>
+        </p:spPr>
+      </p:sp>
+      <p:sp>
+        <p:nvSpPr>
+          <p:cNvPr id="12" name="Text 10"/>
+          <p:cNvSpPr/>
+          <p:nvPr/>
+        </p:nvSpPr>
+        <p:spPr>
+          <a:xfrm>
+            <a:off x="10332720" y="4297680"/>
+            <a:ext cx="548640" cy="548640"/>
+          </a:xfrm>
+          <a:prstGeom prst="rect">
+            <a:avLst/>
+          </a:prstGeom>
+          <a:noFill/>
+          <a:ln/>
+        </p:spPr>
+        <p:txBody>
+          <a:bodyPr wrap="square" lIns="0" tIns="0" rIns="0" bIns="0" rtlCol="0" anchor="ctr"/>
+          <a:lstStyle/>
+          <a:p>
+            <a:pPr algn="ctr" indent="0" marL="0">
+              <a:buNone/>
+            </a:pPr>
+            <a:r>
+              <a:rPr lang="en-US" sz="1400" b="1" dirty="0">
+                <a:solidFill>
+                  <a:srgbClr val="FFFFFF"/>
+                </a:solidFill>
+                <a:latin typeface="Arial" pitchFamily="34" charset="0"/>
+                <a:ea typeface="Arial" pitchFamily="34" charset="-122"/>
+                <a:cs typeface="Arial" pitchFamily="34" charset="-120"/>
+              </a:rPr>
+              <a:t>6</a:t>
+            </a:r>
+            <a:endParaRPr lang="en-US" sz="1400" dirty="0"/>
+          </a:p>
+        </p:txBody>
+      </p:sp>
+      <p:sp>
+        <p:nvSpPr>
+          <p:cNvPr id="13" name="Text 11"/>
+          <p:cNvSpPr/>
+          <p:nvPr/>
+        </p:nvSpPr>
+        <p:spPr>
+          <a:xfrm>
+            <a:off x="548640" y="4297680"/>
+            <a:ext cx="9509760" cy="365760"/>
+          </a:xfrm>
+          <a:prstGeom prst="rect">
+            <a:avLst/>
+          </a:prstGeom>
+          <a:noFill/>
+          <a:ln/>
+        </p:spPr>
+        <p:txBody>
+          <a:bodyPr wrap="square" lIns="0" tIns="0" rIns="0" bIns="0" rtlCol="0" anchor="ctr"/>
+          <a:lstStyle/>
+          <a:p>
+            <a:pPr rtl="1" algn="r" indent="0" marL="0">
+              <a:buNone/>
+            </a:pPr>
+            <a:r>
+              <a:rPr lang="en-US" sz="1800" b="1" dirty="0">
+                <a:solidFill>
+                  <a:srgbClr val="1B1F3B"/>
+                </a:solidFill>
+                <a:latin typeface="Arial" pitchFamily="34" charset="0"/>
+                <a:ea typeface="Arial" pitchFamily="34" charset="-122"/>
+                <a:cs typeface="Arial" pitchFamily="34" charset="-120"/>
+              </a:rPr>
+              <a:t>איטרציה, לא ניסיון יחיד</a:t>
+            </a:r>
+            <a:endParaRPr lang="en-US" sz="1800" dirty="0"/>
+          </a:p>
+        </p:txBody>
+      </p:sp>
+      <p:sp>
+        <p:nvSpPr>
+          <p:cNvPr id="14" name="Text 12"/>
+          <p:cNvSpPr/>
+          <p:nvPr/>
+        </p:nvSpPr>
+        <p:spPr>
+          <a:xfrm>
+            <a:off x="548640" y="4681728"/>
+            <a:ext cx="9509760" cy="731520"/>
+          </a:xfrm>
+          <a:prstGeom prst="rect">
+            <a:avLst/>
+          </a:prstGeom>
+          <a:noFill/>
+          <a:ln/>
+        </p:spPr>
+        <p:txBody>
+          <a:bodyPr wrap="square" lIns="0" tIns="0" rIns="0" bIns="0" rtlCol="0" anchor="ctr"/>
+          <a:lstStyle/>
+          <a:p>
+            <a:pPr rtl="1" algn="r" indent="0" marL="0">
+              <a:buNone/>
+            </a:pPr>
+            <a:r>
+              <a:rPr lang="en-US" sz="1400" dirty="0">
+                <a:solidFill>
+                  <a:srgbClr val="6B7280"/>
+                </a:solidFill>
+                <a:latin typeface="Calibri" pitchFamily="34" charset="0"/>
+                <a:ea typeface="Calibri" pitchFamily="34" charset="-122"/>
+                <a:cs typeface="Calibri" pitchFamily="34" charset="-120"/>
+              </a:rPr>
+              <a:t>אם התוצאה הראשונה לא מושלמת, מבקשים תיקון ממוקד — לא מתחילים מאפס</a:t>
+            </a:r>
+            <a:endParaRPr lang="en-US" sz="1400" dirty="0"/>
+          </a:p>
+        </p:txBody>
+      </p:sp>
+      <p:sp>
+        <p:nvSpPr>
+          <p:cNvPr id="15" name="Text 13"/>
+          <p:cNvSpPr/>
+          <p:nvPr/>
+        </p:nvSpPr>
+        <p:spPr>
+          <a:xfrm>
+            <a:off x="548640" y="6492240"/>
+            <a:ext cx="11091672" cy="274320"/>
+          </a:xfrm>
+          <a:prstGeom prst="rect">
+            <a:avLst/>
+          </a:prstGeom>
+          <a:noFill/>
+          <a:ln/>
+        </p:spPr>
+        <p:txBody>
+          <a:bodyPr wrap="square" lIns="0" tIns="0" rIns="0" bIns="0" rtlCol="0" anchor="ctr"/>
+          <a:lstStyle/>
+          <a:p>
+            <a:pPr rtl="1" algn="r" indent="0" marL="0">
+              <a:buNone/>
+            </a:pPr>
+            <a:r>
+              <a:rPr lang="en-US" sz="900" dirty="0">
+                <a:solidFill>
+                  <a:srgbClr val="A6A6B0"/>
+                </a:solidFill>
+                <a:latin typeface="Calibri" pitchFamily="34" charset="0"/>
+                <a:ea typeface="Calibri" pitchFamily="34" charset="-122"/>
+                <a:cs typeface="Calibri" pitchFamily="34" charset="-120"/>
+              </a:rPr>
+              <a:t>Vibe Coding · שיעור 2 · שקף 11</a:t>
+            </a:r>
+            <a:endParaRPr lang="en-US" sz="900" dirty="0"/>
+          </a:p>
+        </p:txBody>
+      </p:sp>
+    </p:spTree>
+  </p:cSld>
+  <p:clrMapOvr>
+    <a:masterClrMapping/>
+  </p:clrMapOvr>
+</p:sld>
+</file>
+
+<file path=ppt/slides/slide12.xml><?xml version="1.0" encoding="utf-8"?>
+<p:sld xmlns:a="http://schemas.openxmlformats.org/drawingml/2006/main" xmlns:r="http://schemas.openxmlformats.org/officeDocument/2006/relationships" xmlns:p="http://schemas.openxmlformats.org/presentationml/2006/main">
+  <p:cSld name="Slide 12">
     <p:bg>
       <p:bgPr>
         <a:solidFill>
@@ -2443,6 +3615,961 @@
         <p:spPr>
           <a:xfrm>
             <a:off x="548640" y="457200"/>
+            <a:ext cx="11091672" cy="640080"/>
+          </a:xfrm>
+          <a:prstGeom prst="rect">
+            <a:avLst/>
+          </a:prstGeom>
+          <a:noFill/>
+          <a:ln/>
+        </p:spPr>
+        <p:txBody>
+          <a:bodyPr wrap="square" lIns="0" tIns="0" rIns="0" bIns="0" rtlCol="0" anchor="ctr"/>
+          <a:lstStyle/>
+          <a:p>
+            <a:pPr rtl="1" algn="r" indent="0" marL="0">
+              <a:buNone/>
+            </a:pPr>
+            <a:r>
+              <a:rPr lang="en-US" sz="2800" b="1" dirty="0">
+                <a:solidFill>
+                  <a:srgbClr val="FFFFFF"/>
+                </a:solidFill>
+                <a:latin typeface="Arial" pitchFamily="34" charset="0"/>
+                <a:ea typeface="Arial" pitchFamily="34" charset="-122"/>
+                <a:cs typeface="Arial" pitchFamily="34" charset="-120"/>
+              </a:rPr>
+              <a:t>המחיר של דילוג על הכללים</a:t>
+            </a:r>
+            <a:endParaRPr lang="en-US" sz="2800" dirty="0"/>
+          </a:p>
+        </p:txBody>
+      </p:sp>
+      <p:sp>
+        <p:nvSpPr>
+          <p:cNvPr id="3" name="Shape 1"/>
+          <p:cNvSpPr/>
+          <p:nvPr/>
+        </p:nvSpPr>
+        <p:spPr>
+          <a:xfrm>
+            <a:off x="6336792" y="1554480"/>
+            <a:ext cx="5120640" cy="2560320"/>
+          </a:xfrm>
+          <a:prstGeom prst="roundRect">
+            <a:avLst>
+              <a:gd name="adj" fmla="val 4286"/>
+            </a:avLst>
+          </a:prstGeom>
+          <a:solidFill>
+            <a:srgbClr val="2A2F55"/>
+          </a:solidFill>
+          <a:ln/>
+        </p:spPr>
+      </p:sp>
+      <p:sp>
+        <p:nvSpPr>
+          <p:cNvPr id="4" name="Text 2"/>
+          <p:cNvSpPr/>
+          <p:nvPr/>
+        </p:nvSpPr>
+        <p:spPr>
+          <a:xfrm>
+            <a:off x="6336792" y="1691640"/>
+            <a:ext cx="5120640" cy="1188720"/>
+          </a:xfrm>
+          <a:prstGeom prst="rect">
+            <a:avLst/>
+          </a:prstGeom>
+          <a:noFill/>
+          <a:ln/>
+        </p:spPr>
+        <p:txBody>
+          <a:bodyPr wrap="square" lIns="0" tIns="0" rIns="0" bIns="0" rtlCol="0" anchor="ctr"/>
+          <a:lstStyle/>
+          <a:p>
+            <a:pPr algn="ctr" indent="0" marL="0">
+              <a:buNone/>
+            </a:pPr>
+            <a:r>
+              <a:rPr lang="en-US" sz="4400" b="1" dirty="0">
+                <a:solidFill>
+                  <a:srgbClr val="FFB000"/>
+                </a:solidFill>
+                <a:latin typeface="Arial" pitchFamily="34" charset="0"/>
+                <a:ea typeface="Arial" pitchFamily="34" charset="-122"/>
+                <a:cs typeface="Arial" pitchFamily="34" charset="-120"/>
+              </a:rPr>
+              <a:t>30-41%</a:t>
+            </a:r>
+            <a:endParaRPr lang="en-US" sz="4400" dirty="0"/>
+          </a:p>
+        </p:txBody>
+      </p:sp>
+      <p:sp>
+        <p:nvSpPr>
+          <p:cNvPr id="5" name="Text 3"/>
+          <p:cNvSpPr/>
+          <p:nvPr/>
+        </p:nvSpPr>
+        <p:spPr>
+          <a:xfrm>
+            <a:off x="6583680" y="2834640"/>
+            <a:ext cx="4663440" cy="1097280"/>
+          </a:xfrm>
+          <a:prstGeom prst="rect">
+            <a:avLst/>
+          </a:prstGeom>
+          <a:noFill/>
+          <a:ln/>
+        </p:spPr>
+        <p:txBody>
+          <a:bodyPr wrap="square" lIns="0" tIns="0" rIns="0" bIns="0" rtlCol="0" anchor="ctr"/>
+          <a:lstStyle/>
+          <a:p>
+            <a:pPr rtl="1" algn="ctr" indent="0" marL="0">
+              <a:buNone/>
+            </a:pPr>
+            <a:r>
+              <a:rPr lang="en-US" sz="1400" dirty="0">
+                <a:solidFill>
+                  <a:srgbClr val="FFFFFF"/>
+                </a:solidFill>
+                <a:latin typeface="Calibri" pitchFamily="34" charset="0"/>
+                <a:ea typeface="Calibri" pitchFamily="34" charset="-122"/>
+                <a:cs typeface="Calibri" pitchFamily="34" charset="-120"/>
+              </a:rPr>
+              <a:t>יותר חוב טכני כשאין תהליך מסודר</a:t>
+            </a:r>
+            <a:endParaRPr lang="en-US" sz="1400" dirty="0"/>
+          </a:p>
+        </p:txBody>
+      </p:sp>
+      <p:sp>
+        <p:nvSpPr>
+          <p:cNvPr id="6" name="Shape 4"/>
+          <p:cNvSpPr/>
+          <p:nvPr/>
+        </p:nvSpPr>
+        <p:spPr>
+          <a:xfrm>
+            <a:off x="548640" y="1554480"/>
+            <a:ext cx="5120640" cy="2560320"/>
+          </a:xfrm>
+          <a:prstGeom prst="roundRect">
+            <a:avLst>
+              <a:gd name="adj" fmla="val 4286"/>
+            </a:avLst>
+          </a:prstGeom>
+          <a:solidFill>
+            <a:srgbClr val="00C2A8"/>
+          </a:solidFill>
+          <a:ln/>
+        </p:spPr>
+      </p:sp>
+      <p:sp>
+        <p:nvSpPr>
+          <p:cNvPr id="7" name="Text 5"/>
+          <p:cNvSpPr/>
+          <p:nvPr/>
+        </p:nvSpPr>
+        <p:spPr>
+          <a:xfrm>
+            <a:off x="548640" y="1691640"/>
+            <a:ext cx="5120640" cy="1188720"/>
+          </a:xfrm>
+          <a:prstGeom prst="rect">
+            <a:avLst/>
+          </a:prstGeom>
+          <a:noFill/>
+          <a:ln/>
+        </p:spPr>
+        <p:txBody>
+          <a:bodyPr wrap="square" lIns="0" tIns="0" rIns="0" bIns="0" rtlCol="0" anchor="ctr"/>
+          <a:lstStyle/>
+          <a:p>
+            <a:pPr algn="ctr" indent="0" marL="0">
+              <a:buNone/>
+            </a:pPr>
+            <a:r>
+              <a:rPr lang="en-US" sz="4400" b="1" dirty="0">
+                <a:solidFill>
+                  <a:srgbClr val="1B1F3B"/>
+                </a:solidFill>
+                <a:latin typeface="Arial" pitchFamily="34" charset="0"/>
+                <a:ea typeface="Arial" pitchFamily="34" charset="-122"/>
+                <a:cs typeface="Arial" pitchFamily="34" charset="-120"/>
+              </a:rPr>
+              <a:t>1.7x</a:t>
+            </a:r>
+            <a:endParaRPr lang="en-US" sz="4400" dirty="0"/>
+          </a:p>
+        </p:txBody>
+      </p:sp>
+      <p:sp>
+        <p:nvSpPr>
+          <p:cNvPr id="8" name="Text 6"/>
+          <p:cNvSpPr/>
+          <p:nvPr/>
+        </p:nvSpPr>
+        <p:spPr>
+          <a:xfrm>
+            <a:off x="777240" y="2834640"/>
+            <a:ext cx="4663440" cy="1097280"/>
+          </a:xfrm>
+          <a:prstGeom prst="rect">
+            <a:avLst/>
+          </a:prstGeom>
+          <a:noFill/>
+          <a:ln/>
+        </p:spPr>
+        <p:txBody>
+          <a:bodyPr wrap="square" lIns="0" tIns="0" rIns="0" bIns="0" rtlCol="0" anchor="ctr"/>
+          <a:lstStyle/>
+          <a:p>
+            <a:pPr rtl="1" algn="ctr" indent="0" marL="0">
+              <a:buNone/>
+            </a:pPr>
+            <a:r>
+              <a:rPr lang="en-US" sz="1400" dirty="0">
+                <a:solidFill>
+                  <a:srgbClr val="1B1F3B"/>
+                </a:solidFill>
+                <a:latin typeface="Calibri" pitchFamily="34" charset="0"/>
+                <a:ea typeface="Calibri" pitchFamily="34" charset="-122"/>
+                <a:cs typeface="Calibri" pitchFamily="34" charset="-120"/>
+              </a:rPr>
+              <a:t>יותר בעיות ב-PR שנכתב ב-AI לעומת PR אנושי</a:t>
+            </a:r>
+            <a:endParaRPr lang="en-US" sz="1400" dirty="0"/>
+          </a:p>
+        </p:txBody>
+      </p:sp>
+      <p:sp>
+        <p:nvSpPr>
+          <p:cNvPr id="9" name="Text 7"/>
+          <p:cNvSpPr/>
+          <p:nvPr/>
+        </p:nvSpPr>
+        <p:spPr>
+          <a:xfrm>
+            <a:off x="548640" y="4480560"/>
+            <a:ext cx="11091672" cy="822960"/>
+          </a:xfrm>
+          <a:prstGeom prst="rect">
+            <a:avLst/>
+          </a:prstGeom>
+          <a:noFill/>
+          <a:ln/>
+        </p:spPr>
+        <p:txBody>
+          <a:bodyPr wrap="square" lIns="0" tIns="0" rIns="0" bIns="0" rtlCol="0" anchor="ctr"/>
+          <a:lstStyle/>
+          <a:p>
+            <a:pPr rtl="1" algn="r" indent="0" marL="0">
+              <a:buNone/>
+            </a:pPr>
+            <a:r>
+              <a:rPr lang="en-US" sz="1700" b="1" i="1" dirty="0">
+                <a:solidFill>
+                  <a:srgbClr val="FFFFFF"/>
+                </a:solidFill>
+                <a:latin typeface="Arial" pitchFamily="34" charset="0"/>
+                <a:ea typeface="Arial" pitchFamily="34" charset="-122"/>
+                <a:cs typeface="Arial" pitchFamily="34" charset="-120"/>
+              </a:rPr>
+              <a:t>ה-Best Practices האלה הם לא בירוקרטיה — הם ההבדל בין "AI שעוזר" ל"AI שיוצר בעיה גדולה יותר".</a:t>
+            </a:r>
+            <a:endParaRPr lang="en-US" sz="1700" dirty="0"/>
+          </a:p>
+        </p:txBody>
+      </p:sp>
+      <p:sp>
+        <p:nvSpPr>
+          <p:cNvPr id="10" name="Text 8"/>
+          <p:cNvSpPr/>
+          <p:nvPr/>
+        </p:nvSpPr>
+        <p:spPr>
+          <a:xfrm>
+            <a:off x="548640" y="6172200"/>
+            <a:ext cx="11091672" cy="274320"/>
+          </a:xfrm>
+          <a:prstGeom prst="rect">
+            <a:avLst/>
+          </a:prstGeom>
+          <a:noFill/>
+          <a:ln/>
+        </p:spPr>
+        <p:txBody>
+          <a:bodyPr wrap="square" lIns="0" tIns="0" rIns="0" bIns="0" rtlCol="0" anchor="ctr"/>
+          <a:lstStyle/>
+          <a:p>
+            <a:pPr rtl="1" algn="r" indent="0" marL="0">
+              <a:buNone/>
+            </a:pPr>
+            <a:r>
+              <a:rPr lang="en-US" sz="1000" i="1" dirty="0">
+                <a:solidFill>
+                  <a:srgbClr val="6B7280"/>
+                </a:solidFill>
+                <a:latin typeface="Calibri" pitchFamily="34" charset="0"/>
+                <a:ea typeface="Calibri" pitchFamily="34" charset="-122"/>
+                <a:cs typeface="Calibri" pitchFamily="34" charset="-120"/>
+              </a:rPr>
+              <a:t>מקור: DORA — ROI of AI-Assisted Software Development, 2026</a:t>
+            </a:r>
+            <a:endParaRPr lang="en-US" sz="1000" dirty="0"/>
+          </a:p>
+        </p:txBody>
+      </p:sp>
+      <p:sp>
+        <p:nvSpPr>
+          <p:cNvPr id="11" name="Text 9"/>
+          <p:cNvSpPr/>
+          <p:nvPr/>
+        </p:nvSpPr>
+        <p:spPr>
+          <a:xfrm>
+            <a:off x="548640" y="6492240"/>
+            <a:ext cx="11091672" cy="274320"/>
+          </a:xfrm>
+          <a:prstGeom prst="rect">
+            <a:avLst/>
+          </a:prstGeom>
+          <a:noFill/>
+          <a:ln/>
+        </p:spPr>
+        <p:txBody>
+          <a:bodyPr wrap="square" lIns="0" tIns="0" rIns="0" bIns="0" rtlCol="0" anchor="ctr"/>
+          <a:lstStyle/>
+          <a:p>
+            <a:pPr rtl="1" algn="r" indent="0" marL="0">
+              <a:buNone/>
+            </a:pPr>
+            <a:r>
+              <a:rPr lang="en-US" sz="900" dirty="0">
+                <a:solidFill>
+                  <a:srgbClr val="8891C2"/>
+                </a:solidFill>
+                <a:latin typeface="Calibri" pitchFamily="34" charset="0"/>
+                <a:ea typeface="Calibri" pitchFamily="34" charset="-122"/>
+                <a:cs typeface="Calibri" pitchFamily="34" charset="-120"/>
+              </a:rPr>
+              <a:t>Vibe Coding · שיעור 2 · שקף 12</a:t>
+            </a:r>
+            <a:endParaRPr lang="en-US" sz="900" dirty="0"/>
+          </a:p>
+        </p:txBody>
+      </p:sp>
+    </p:spTree>
+  </p:cSld>
+  <p:clrMapOvr>
+    <a:masterClrMapping/>
+  </p:clrMapOvr>
+</p:sld>
+</file>
+
+<file path=ppt/slides/slide13.xml><?xml version="1.0" encoding="utf-8"?>
+<p:sld xmlns:a="http://schemas.openxmlformats.org/drawingml/2006/main" xmlns:r="http://schemas.openxmlformats.org/officeDocument/2006/relationships" xmlns:p="http://schemas.openxmlformats.org/presentationml/2006/main">
+  <p:cSld name="Slide 13">
+    <p:bg>
+      <p:bgPr>
+        <a:solidFill>
+          <a:srgbClr val="1B1F3B"/>
+        </a:solidFill>
+      </p:bgPr>
+    </p:bg>
+    <p:spTree>
+      <p:nvGrpSpPr>
+        <p:cNvPr id="1" name=""/>
+        <p:cNvGrpSpPr/>
+        <p:nvPr/>
+      </p:nvGrpSpPr>
+      <p:grpSpPr>
+        <a:xfrm>
+          <a:off x="0" y="0"/>
+          <a:ext cx="0" cy="0"/>
+          <a:chOff x="0" y="0"/>
+          <a:chExt cx="0" cy="0"/>
+        </a:xfrm>
+      </p:grpSpPr>
+      <p:sp>
+        <p:nvSpPr>
+          <p:cNvPr id="2" name="Text 0"/>
+          <p:cNvSpPr/>
+          <p:nvPr/>
+        </p:nvSpPr>
+        <p:spPr>
+          <a:xfrm>
+            <a:off x="548640" y="457200"/>
+            <a:ext cx="11091672" cy="548640"/>
+          </a:xfrm>
+          <a:prstGeom prst="rect">
+            <a:avLst/>
+          </a:prstGeom>
+          <a:noFill/>
+          <a:ln/>
+        </p:spPr>
+        <p:txBody>
+          <a:bodyPr wrap="square" lIns="0" tIns="0" rIns="0" bIns="0" rtlCol="0" anchor="ctr"/>
+          <a:lstStyle/>
+          <a:p>
+            <a:pPr algn="ctr" indent="0" marL="0">
+              <a:buNone/>
+            </a:pPr>
+            <a:r>
+              <a:rPr lang="en-US" sz="1600" i="1" dirty="0">
+                <a:solidFill>
+                  <a:srgbClr val="00C2A8"/>
+                </a:solidFill>
+                <a:latin typeface="Calibri" pitchFamily="34" charset="0"/>
+                <a:ea typeface="Calibri" pitchFamily="34" charset="-122"/>
+                <a:cs typeface="Calibri" pitchFamily="34" charset="-120"/>
+              </a:rPr>
+              <a:t>הדגמה חיה</a:t>
+            </a:r>
+            <a:endParaRPr lang="en-US" sz="1600" dirty="0"/>
+          </a:p>
+        </p:txBody>
+      </p:sp>
+      <p:sp>
+        <p:nvSpPr>
+          <p:cNvPr id="3" name="Text 1"/>
+          <p:cNvSpPr/>
+          <p:nvPr/>
+        </p:nvSpPr>
+        <p:spPr>
+          <a:xfrm>
+            <a:off x="548640" y="1097280"/>
+            <a:ext cx="11091672" cy="1097280"/>
+          </a:xfrm>
+          <a:prstGeom prst="rect">
+            <a:avLst/>
+          </a:prstGeom>
+          <a:noFill/>
+          <a:ln/>
+        </p:spPr>
+        <p:txBody>
+          <a:bodyPr wrap="square" lIns="0" tIns="0" rIns="0" bIns="0" rtlCol="0" anchor="ctr"/>
+          <a:lstStyle/>
+          <a:p>
+            <a:pPr rtl="1" algn="ctr" indent="0" marL="0">
+              <a:buNone/>
+            </a:pPr>
+            <a:r>
+              <a:rPr lang="en-US" sz="3400" b="1" dirty="0">
+                <a:solidFill>
+                  <a:srgbClr val="FFFFFF"/>
+                </a:solidFill>
+                <a:latin typeface="Arial" pitchFamily="34" charset="0"/>
+                <a:ea typeface="Arial" pitchFamily="34" charset="-122"/>
+                <a:cs typeface="Arial" pitchFamily="34" charset="-120"/>
+              </a:rPr>
+              <a:t>פותחים session אמיתי על פרויקט קיים</a:t>
+            </a:r>
+            <a:endParaRPr lang="en-US" sz="3400" dirty="0"/>
+          </a:p>
+        </p:txBody>
+      </p:sp>
+      <p:sp>
+        <p:nvSpPr>
+          <p:cNvPr id="4" name="Text 2"/>
+          <p:cNvSpPr/>
+          <p:nvPr/>
+        </p:nvSpPr>
+        <p:spPr>
+          <a:xfrm>
+            <a:off x="548640" y="2148840"/>
+            <a:ext cx="11091672" cy="457200"/>
+          </a:xfrm>
+          <a:prstGeom prst="rect">
+            <a:avLst/>
+          </a:prstGeom>
+          <a:noFill/>
+          <a:ln/>
+        </p:spPr>
+        <p:txBody>
+          <a:bodyPr wrap="square" lIns="0" tIns="0" rIns="0" bIns="0" rtlCol="0" anchor="ctr"/>
+          <a:lstStyle/>
+          <a:p>
+            <a:pPr rtl="1" algn="ctr" indent="0" marL="0">
+              <a:buNone/>
+            </a:pPr>
+            <a:r>
+              <a:rPr lang="en-US" sz="1500" i="1" dirty="0">
+                <a:solidFill>
+                  <a:srgbClr val="CADCFC"/>
+                </a:solidFill>
+                <a:latin typeface="Calibri" pitchFamily="34" charset="0"/>
+                <a:ea typeface="Calibri" pitchFamily="34" charset="-122"/>
+                <a:cs typeface="Calibri" pitchFamily="34" charset="-120"/>
+              </a:rPr>
+              <a:t>ראו demo/prompt.md להוראות המלאות</a:t>
+            </a:r>
+            <a:endParaRPr lang="en-US" sz="1500" dirty="0"/>
+          </a:p>
+        </p:txBody>
+      </p:sp>
+      <p:sp>
+        <p:nvSpPr>
+          <p:cNvPr id="5" name="Shape 3"/>
+          <p:cNvSpPr/>
+          <p:nvPr/>
+        </p:nvSpPr>
+        <p:spPr>
+          <a:xfrm>
+            <a:off x="3200400" y="2880360"/>
+            <a:ext cx="5788152" cy="3291840"/>
+          </a:xfrm>
+          <a:prstGeom prst="rect">
+            <a:avLst/>
+          </a:prstGeom>
+          <a:solidFill>
+            <a:srgbClr val="2A2F55"/>
+          </a:solidFill>
+          <a:ln w="15875">
+            <a:solidFill>
+              <a:srgbClr val="00C2A8"/>
+            </a:solidFill>
+            <a:prstDash val="dash"/>
+          </a:ln>
+        </p:spPr>
+      </p:sp>
+      <p:sp>
+        <p:nvSpPr>
+          <p:cNvPr id="6" name="Text 4"/>
+          <p:cNvSpPr/>
+          <p:nvPr/>
+        </p:nvSpPr>
+        <p:spPr>
+          <a:xfrm>
+            <a:off x="3200400" y="2880360"/>
+            <a:ext cx="5788152" cy="3291840"/>
+          </a:xfrm>
+          <a:prstGeom prst="rect">
+            <a:avLst/>
+          </a:prstGeom>
+          <a:noFill/>
+          <a:ln/>
+        </p:spPr>
+        <p:txBody>
+          <a:bodyPr wrap="square" lIns="101600" tIns="101600" rIns="101600" bIns="101600" rtlCol="0" anchor="ctr"/>
+          <a:lstStyle/>
+          <a:p>
+            <a:pPr rtl="1" algn="ctr" indent="0" marL="0">
+              <a:buNone/>
+            </a:pPr>
+            <a:r>
+              <a:rPr lang="en-US" sz="1200" i="1" dirty="0">
+                <a:solidFill>
+                  <a:srgbClr val="00C2A8"/>
+                </a:solidFill>
+                <a:latin typeface="Calibri" pitchFamily="34" charset="0"/>
+                <a:ea typeface="Calibri" pitchFamily="34" charset="-122"/>
+                <a:cs typeface="Calibri" pitchFamily="34" charset="-120"/>
+              </a:rPr>
+              <a:t>[תמונה: מסך שיתוף — Diff מוצג לפני אישור בכלי ה-AI]</a:t>
+            </a:r>
+            <a:endParaRPr lang="en-US" sz="1200" dirty="0"/>
+          </a:p>
+        </p:txBody>
+      </p:sp>
+      <p:sp>
+        <p:nvSpPr>
+          <p:cNvPr id="7" name="Text 5"/>
+          <p:cNvSpPr/>
+          <p:nvPr/>
+        </p:nvSpPr>
+        <p:spPr>
+          <a:xfrm>
+            <a:off x="548640" y="6492240"/>
+            <a:ext cx="11091672" cy="274320"/>
+          </a:xfrm>
+          <a:prstGeom prst="rect">
+            <a:avLst/>
+          </a:prstGeom>
+          <a:noFill/>
+          <a:ln/>
+        </p:spPr>
+        <p:txBody>
+          <a:bodyPr wrap="square" lIns="0" tIns="0" rIns="0" bIns="0" rtlCol="0" anchor="ctr"/>
+          <a:lstStyle/>
+          <a:p>
+            <a:pPr rtl="1" algn="r" indent="0" marL="0">
+              <a:buNone/>
+            </a:pPr>
+            <a:r>
+              <a:rPr lang="en-US" sz="900" dirty="0">
+                <a:solidFill>
+                  <a:srgbClr val="8891C2"/>
+                </a:solidFill>
+                <a:latin typeface="Calibri" pitchFamily="34" charset="0"/>
+                <a:ea typeface="Calibri" pitchFamily="34" charset="-122"/>
+                <a:cs typeface="Calibri" pitchFamily="34" charset="-120"/>
+              </a:rPr>
+              <a:t>Vibe Coding · שיעור 2 · שקף 13</a:t>
+            </a:r>
+            <a:endParaRPr lang="en-US" sz="900" dirty="0"/>
+          </a:p>
+        </p:txBody>
+      </p:sp>
+    </p:spTree>
+  </p:cSld>
+  <p:clrMapOvr>
+    <a:masterClrMapping/>
+  </p:clrMapOvr>
+</p:sld>
+</file>
+
+<file path=ppt/slides/slide14.xml><?xml version="1.0" encoding="utf-8"?>
+<p:sld xmlns:a="http://schemas.openxmlformats.org/drawingml/2006/main" xmlns:r="http://schemas.openxmlformats.org/officeDocument/2006/relationships" xmlns:p="http://schemas.openxmlformats.org/presentationml/2006/main">
+  <p:cSld name="Slide 14">
+    <p:bg>
+      <p:bgPr>
+        <a:solidFill>
+          <a:srgbClr val="00C2A8"/>
+        </a:solidFill>
+      </p:bgPr>
+    </p:bg>
+    <p:spTree>
+      <p:nvGrpSpPr>
+        <p:cNvPr id="1" name=""/>
+        <p:cNvGrpSpPr/>
+        <p:nvPr/>
+      </p:nvGrpSpPr>
+      <p:grpSpPr>
+        <a:xfrm>
+          <a:off x="0" y="0"/>
+          <a:ext cx="0" cy="0"/>
+          <a:chOff x="0" y="0"/>
+          <a:chExt cx="0" cy="0"/>
+        </a:xfrm>
+      </p:grpSpPr>
+      <p:sp>
+        <p:nvSpPr>
+          <p:cNvPr id="2" name="Text 0"/>
+          <p:cNvSpPr/>
+          <p:nvPr/>
+        </p:nvSpPr>
+        <p:spPr>
+          <a:xfrm>
+            <a:off x="548640" y="548640"/>
+            <a:ext cx="11091672" cy="548640"/>
+          </a:xfrm>
+          <a:prstGeom prst="rect">
+            <a:avLst/>
+          </a:prstGeom>
+          <a:noFill/>
+          <a:ln/>
+        </p:spPr>
+        <p:txBody>
+          <a:bodyPr wrap="square" lIns="0" tIns="0" rIns="0" bIns="0" rtlCol="0" anchor="ctr"/>
+          <a:lstStyle/>
+          <a:p>
+            <a:pPr algn="ctr" indent="0" marL="0">
+              <a:buNone/>
+            </a:pPr>
+            <a:r>
+              <a:rPr lang="en-US" sz="1600" i="1" dirty="0">
+                <a:solidFill>
+                  <a:srgbClr val="1B1F3B"/>
+                </a:solidFill>
+                <a:latin typeface="Calibri" pitchFamily="34" charset="0"/>
+                <a:ea typeface="Calibri" pitchFamily="34" charset="-122"/>
+                <a:cs typeface="Calibri" pitchFamily="34" charset="-120"/>
+              </a:rPr>
+              <a:t>עוברים לתרגול</a:t>
+            </a:r>
+            <a:endParaRPr lang="en-US" sz="1600" dirty="0"/>
+          </a:p>
+        </p:txBody>
+      </p:sp>
+      <p:sp>
+        <p:nvSpPr>
+          <p:cNvPr id="3" name="Text 1"/>
+          <p:cNvSpPr/>
+          <p:nvPr/>
+        </p:nvSpPr>
+        <p:spPr>
+          <a:xfrm>
+            <a:off x="548640" y="1188720"/>
+            <a:ext cx="11091672" cy="1005840"/>
+          </a:xfrm>
+          <a:prstGeom prst="rect">
+            <a:avLst/>
+          </a:prstGeom>
+          <a:noFill/>
+          <a:ln/>
+        </p:spPr>
+        <p:txBody>
+          <a:bodyPr wrap="square" lIns="0" tIns="0" rIns="0" bIns="0" rtlCol="0" anchor="ctr"/>
+          <a:lstStyle/>
+          <a:p>
+            <a:pPr rtl="1" algn="ctr" indent="0" marL="0">
+              <a:buNone/>
+            </a:pPr>
+            <a:r>
+              <a:rPr lang="en-US" sz="3200" b="1" dirty="0">
+                <a:solidFill>
+                  <a:srgbClr val="FFFFFF"/>
+                </a:solidFill>
+                <a:latin typeface="Arial" pitchFamily="34" charset="0"/>
+                <a:ea typeface="Arial" pitchFamily="34" charset="-122"/>
+                <a:cs typeface="Arial" pitchFamily="34" charset="-120"/>
+              </a:rPr>
+              <a:t>45 דקות: הקמת סביבת עבודה</a:t>
+            </a:r>
+            <a:endParaRPr lang="en-US" sz="3200" dirty="0"/>
+          </a:p>
+        </p:txBody>
+      </p:sp>
+      <p:sp>
+        <p:nvSpPr>
+          <p:cNvPr id="4" name="Text 2"/>
+          <p:cNvSpPr/>
+          <p:nvPr/>
+        </p:nvSpPr>
+        <p:spPr>
+          <a:xfrm>
+            <a:off x="822960" y="2651760"/>
+            <a:ext cx="5120640" cy="2011680"/>
+          </a:xfrm>
+          <a:prstGeom prst="rect">
+            <a:avLst/>
+          </a:prstGeom>
+          <a:noFill/>
+          <a:ln/>
+        </p:spPr>
+        <p:txBody>
+          <a:bodyPr wrap="square" lIns="0" tIns="0" rIns="0" bIns="0" rtlCol="0" anchor="ctr"/>
+          <a:lstStyle/>
+          <a:p>
+            <a:pPr algn="r" indent="0" marL="0">
+              <a:spcAft>
+                <a:spcPts val="1000"/>
+              </a:spcAft>
+              <a:buNone/>
+            </a:pPr>
+            <a:r>
+              <a:rPr lang="en-US" sz="1600" dirty="0">
+                <a:solidFill>
+                  <a:srgbClr val="FFFFFF"/>
+                </a:solidFill>
+                <a:latin typeface="Calibri" pitchFamily="34" charset="0"/>
+                <a:ea typeface="Calibri" pitchFamily="34" charset="-122"/>
+                <a:cs typeface="Calibri" pitchFamily="34" charset="-120"/>
+              </a:rPr>
+              <a:t>• VS Code + Git מותקנים</a:t>
+            </a:r>
+            <a:endParaRPr lang="en-US" sz="1600" dirty="0"/>
+          </a:p>
+          <a:p>
+            <a:pPr algn="r" indent="0" marL="0">
+              <a:spcAft>
+                <a:spcPts val="1000"/>
+              </a:spcAft>
+              <a:buNone/>
+            </a:pPr>
+            <a:r>
+              <a:rPr lang="en-US" sz="1600" dirty="0">
+                <a:solidFill>
+                  <a:srgbClr val="FFFFFF"/>
+                </a:solidFill>
+                <a:latin typeface="Calibri" pitchFamily="34" charset="0"/>
+                <a:ea typeface="Calibri" pitchFamily="34" charset="-122"/>
+                <a:cs typeface="Calibri" pitchFamily="34" charset="-120"/>
+              </a:rPr>
+              <a:t>• Repository חדש ב-GitHub</a:t>
+            </a:r>
+            <a:endParaRPr lang="en-US" sz="1600" dirty="0"/>
+          </a:p>
+          <a:p>
+            <a:pPr algn="r" indent="0" marL="0">
+              <a:spcAft>
+                <a:spcPts val="1000"/>
+              </a:spcAft>
+              <a:buNone/>
+            </a:pPr>
+            <a:r>
+              <a:rPr lang="en-US" sz="1600" dirty="0">
+                <a:solidFill>
+                  <a:srgbClr val="FFFFFF"/>
+                </a:solidFill>
+                <a:latin typeface="Calibri" pitchFamily="34" charset="0"/>
+                <a:ea typeface="Calibri" pitchFamily="34" charset="-122"/>
+                <a:cs typeface="Calibri" pitchFamily="34" charset="-120"/>
+              </a:rPr>
+              <a:t>• כלי AI חינמי מחובר</a:t>
+            </a:r>
+            <a:endParaRPr lang="en-US" sz="1600" dirty="0"/>
+          </a:p>
+          <a:p>
+            <a:pPr algn="r" indent="0" marL="0">
+              <a:spcAft>
+                <a:spcPts val="1000"/>
+              </a:spcAft>
+              <a:buNone/>
+            </a:pPr>
+            <a:r>
+              <a:rPr lang="en-US" sz="1600" dirty="0">
+                <a:solidFill>
+                  <a:srgbClr val="FFFFFF"/>
+                </a:solidFill>
+                <a:latin typeface="Calibri" pitchFamily="34" charset="0"/>
+                <a:ea typeface="Calibri" pitchFamily="34" charset="-122"/>
+                <a:cs typeface="Calibri" pitchFamily="34" charset="-120"/>
+              </a:rPr>
+              <a:t>• Commit ראשון נדחף בהצלחה</a:t>
+            </a:r>
+            <a:endParaRPr lang="en-US" sz="1600" dirty="0"/>
+          </a:p>
+        </p:txBody>
+      </p:sp>
+      <p:sp>
+        <p:nvSpPr>
+          <p:cNvPr id="5" name="Shape 3"/>
+          <p:cNvSpPr/>
+          <p:nvPr/>
+        </p:nvSpPr>
+        <p:spPr>
+          <a:xfrm>
+            <a:off x="6309360" y="2651760"/>
+            <a:ext cx="5056632" cy="2926080"/>
+          </a:xfrm>
+          <a:prstGeom prst="rect">
+            <a:avLst/>
+          </a:prstGeom>
+          <a:solidFill>
+            <a:srgbClr val="2A2F55"/>
+          </a:solidFill>
+          <a:ln w="15875">
+            <a:solidFill>
+              <a:srgbClr val="00C2A8"/>
+            </a:solidFill>
+            <a:prstDash val="dash"/>
+          </a:ln>
+        </p:spPr>
+      </p:sp>
+      <p:sp>
+        <p:nvSpPr>
+          <p:cNvPr id="6" name="Text 4"/>
+          <p:cNvSpPr/>
+          <p:nvPr/>
+        </p:nvSpPr>
+        <p:spPr>
+          <a:xfrm>
+            <a:off x="6309360" y="2651760"/>
+            <a:ext cx="5056632" cy="2926080"/>
+          </a:xfrm>
+          <a:prstGeom prst="rect">
+            <a:avLst/>
+          </a:prstGeom>
+          <a:noFill/>
+          <a:ln/>
+        </p:spPr>
+        <p:txBody>
+          <a:bodyPr wrap="square" lIns="101600" tIns="101600" rIns="101600" bIns="101600" rtlCol="0" anchor="ctr"/>
+          <a:lstStyle/>
+          <a:p>
+            <a:pPr rtl="1" algn="ctr" indent="0" marL="0">
+              <a:buNone/>
+            </a:pPr>
+            <a:r>
+              <a:rPr lang="en-US" sz="1200" i="1" dirty="0">
+                <a:solidFill>
+                  <a:srgbClr val="00C2A8"/>
+                </a:solidFill>
+                <a:latin typeface="Calibri" pitchFamily="34" charset="0"/>
+                <a:ea typeface="Calibri" pitchFamily="34" charset="-122"/>
+                <a:cs typeface="Calibri" pitchFamily="34" charset="-120"/>
+              </a:rPr>
+              <a:t>[תמונה: מסך טרמינל אחרי git push מוצלח]</a:t>
+            </a:r>
+            <a:endParaRPr lang="en-US" sz="1200" dirty="0"/>
+          </a:p>
+        </p:txBody>
+      </p:sp>
+      <p:sp>
+        <p:nvSpPr>
+          <p:cNvPr id="7" name="Text 5"/>
+          <p:cNvSpPr/>
+          <p:nvPr/>
+        </p:nvSpPr>
+        <p:spPr>
+          <a:xfrm>
+            <a:off x="548640" y="6035040"/>
+            <a:ext cx="11091672" cy="365760"/>
+          </a:xfrm>
+          <a:prstGeom prst="rect">
+            <a:avLst/>
+          </a:prstGeom>
+          <a:noFill/>
+          <a:ln/>
+        </p:spPr>
+        <p:txBody>
+          <a:bodyPr wrap="square" lIns="0" tIns="0" rIns="0" bIns="0" rtlCol="0" anchor="ctr"/>
+          <a:lstStyle/>
+          <a:p>
+            <a:pPr rtl="1" algn="ctr" indent="0" marL="0">
+              <a:buNone/>
+            </a:pPr>
+            <a:r>
+              <a:rPr lang="en-US" sz="1300" i="1" dirty="0">
+                <a:solidFill>
+                  <a:srgbClr val="1B1F3B"/>
+                </a:solidFill>
+                <a:latin typeface="Calibri" pitchFamily="34" charset="0"/>
+                <a:ea typeface="Calibri" pitchFamily="34" charset="-122"/>
+                <a:cs typeface="Calibri" pitchFamily="34" charset="-120"/>
+              </a:rPr>
+              <a:t>ראו exercises.md ו-solutions.md לפירוט מלא</a:t>
+            </a:r>
+            <a:endParaRPr lang="en-US" sz="1300" dirty="0"/>
+          </a:p>
+        </p:txBody>
+      </p:sp>
+    </p:spTree>
+  </p:cSld>
+  <p:clrMapOvr>
+    <a:masterClrMapping/>
+  </p:clrMapOvr>
+</p:sld>
+</file>
+
+<file path=ppt/slides/slide15.xml><?xml version="1.0" encoding="utf-8"?>
+<p:sld xmlns:a="http://schemas.openxmlformats.org/drawingml/2006/main" xmlns:r="http://schemas.openxmlformats.org/officeDocument/2006/relationships" xmlns:p="http://schemas.openxmlformats.org/presentationml/2006/main">
+  <p:cSld name="Slide 15">
+    <p:bg>
+      <p:bgPr>
+        <a:solidFill>
+          <a:srgbClr val="1B1F3B"/>
+        </a:solidFill>
+      </p:bgPr>
+    </p:bg>
+    <p:spTree>
+      <p:nvGrpSpPr>
+        <p:cNvPr id="1" name=""/>
+        <p:cNvGrpSpPr/>
+        <p:nvPr/>
+      </p:nvGrpSpPr>
+      <p:grpSpPr>
+        <a:xfrm>
+          <a:off x="0" y="0"/>
+          <a:ext cx="0" cy="0"/>
+          <a:chOff x="0" y="0"/>
+          <a:chExt cx="0" cy="0"/>
+        </a:xfrm>
+      </p:grpSpPr>
+      <p:sp>
+        <p:nvSpPr>
+          <p:cNvPr id="2" name="Text 0"/>
+          <p:cNvSpPr/>
+          <p:nvPr/>
+        </p:nvSpPr>
+        <p:spPr>
+          <a:xfrm>
+            <a:off x="548640" y="457200"/>
             <a:ext cx="11091672" cy="731520"/>
           </a:xfrm>
           <a:prstGeom prst="rect">
@@ -2864,6 +4991,277 @@
               <a:t>Context Engineering — איך ״מזינים״ לכלי את מה שהוא צריך לדעת</a:t>
             </a:r>
             <a:endParaRPr lang="en-US" sz="1800" dirty="0"/>
+          </a:p>
+        </p:txBody>
+      </p:sp>
+    </p:spTree>
+  </p:cSld>
+  <p:clrMapOvr>
+    <a:masterClrMapping/>
+  </p:clrMapOvr>
+</p:sld>
+</file>
+
+<file path=ppt/slides/slide16.xml><?xml version="1.0" encoding="utf-8"?>
+<p:sld xmlns:a="http://schemas.openxmlformats.org/drawingml/2006/main" xmlns:r="http://schemas.openxmlformats.org/officeDocument/2006/relationships" xmlns:p="http://schemas.openxmlformats.org/presentationml/2006/main">
+  <p:cSld name="Slide 16">
+    <p:bg>
+      <p:bgPr>
+        <a:solidFill>
+          <a:srgbClr val="FFFFFF"/>
+        </a:solidFill>
+      </p:bgPr>
+    </p:bg>
+    <p:spTree>
+      <p:nvGrpSpPr>
+        <p:cNvPr id="1" name=""/>
+        <p:cNvGrpSpPr/>
+        <p:nvPr/>
+      </p:nvGrpSpPr>
+      <p:grpSpPr>
+        <a:xfrm>
+          <a:off x="0" y="0"/>
+          <a:ext cx="0" cy="0"/>
+          <a:chOff x="0" y="0"/>
+          <a:chExt cx="0" cy="0"/>
+        </a:xfrm>
+      </p:grpSpPr>
+      <p:sp>
+        <p:nvSpPr>
+          <p:cNvPr id="2" name="Text 0"/>
+          <p:cNvSpPr/>
+          <p:nvPr/>
+        </p:nvSpPr>
+        <p:spPr>
+          <a:xfrm>
+            <a:off x="548640" y="365760"/>
+            <a:ext cx="11091672" cy="822960"/>
+          </a:xfrm>
+          <a:prstGeom prst="rect">
+            <a:avLst/>
+          </a:prstGeom>
+          <a:noFill/>
+          <a:ln/>
+        </p:spPr>
+        <p:txBody>
+          <a:bodyPr wrap="square" lIns="0" tIns="0" rIns="0" bIns="0" rtlCol="0" anchor="ctr"/>
+          <a:lstStyle/>
+          <a:p>
+            <a:pPr rtl="1" algn="r" indent="0" marL="0">
+              <a:buNone/>
+            </a:pPr>
+            <a:r>
+              <a:rPr lang="en-US" sz="3000" b="1" dirty="0">
+                <a:solidFill>
+                  <a:srgbClr val="1B1F3B"/>
+                </a:solidFill>
+                <a:latin typeface="Arial" pitchFamily="34" charset="0"/>
+                <a:ea typeface="Arial" pitchFamily="34" charset="-122"/>
+                <a:cs typeface="Arial" pitchFamily="34" charset="-120"/>
+              </a:rPr>
+              <a:t>מקורות</a:t>
+            </a:r>
+            <a:endParaRPr lang="en-US" sz="3000" dirty="0"/>
+          </a:p>
+        </p:txBody>
+      </p:sp>
+      <p:sp>
+        <p:nvSpPr>
+          <p:cNvPr id="3" name="Text 1"/>
+          <p:cNvSpPr/>
+          <p:nvPr/>
+        </p:nvSpPr>
+        <p:spPr>
+          <a:xfrm>
+            <a:off x="548640" y="1645920"/>
+            <a:ext cx="11091672" cy="2743200"/>
+          </a:xfrm>
+          <a:prstGeom prst="rect">
+            <a:avLst/>
+          </a:prstGeom>
+          <a:noFill/>
+          <a:ln/>
+        </p:spPr>
+        <p:txBody>
+          <a:bodyPr wrap="square" lIns="0" tIns="0" rIns="0" bIns="0" rtlCol="0" anchor="ctr"/>
+          <a:lstStyle/>
+          <a:p>
+            <a:pPr algn="r" indent="0" marL="0">
+              <a:spcAft>
+                <a:spcPts val="1400"/>
+              </a:spcAft>
+              <a:buNone/>
+            </a:pPr>
+            <a:r>
+              <a:rPr lang="en-US" sz="1600" dirty="0">
+                <a:solidFill>
+                  <a:srgbClr val="1B1F3B"/>
+                </a:solidFill>
+                <a:latin typeface="Calibri" pitchFamily="34" charset="0"/>
+                <a:ea typeface="Calibri" pitchFamily="34" charset="-122"/>
+                <a:cs typeface="Calibri" pitchFamily="34" charset="-120"/>
+              </a:rPr>
+              <a:t>Kinsta &amp; Skillademia — GitHub Statistics 2026</a:t>
+            </a:r>
+            <a:endParaRPr lang="en-US" sz="1600" dirty="0"/>
+          </a:p>
+          <a:p>
+            <a:pPr algn="r" indent="0" marL="0">
+              <a:spcAft>
+                <a:spcPts val="1400"/>
+              </a:spcAft>
+              <a:buNone/>
+            </a:pPr>
+            <a:r>
+              <a:rPr lang="en-US" sz="1600" dirty="0">
+                <a:solidFill>
+                  <a:srgbClr val="1B1F3B"/>
+                </a:solidFill>
+                <a:latin typeface="Calibri" pitchFamily="34" charset="0"/>
+                <a:ea typeface="Calibri" pitchFamily="34" charset="-122"/>
+                <a:cs typeface="Calibri" pitchFamily="34" charset="-120"/>
+              </a:rPr>
+              <a:t>DigitalApplied &amp; MorphLLM — Benchmark Guides 2026 (SWE-bench, Terminal-Bench)</a:t>
+            </a:r>
+            <a:endParaRPr lang="en-US" sz="1600" dirty="0"/>
+          </a:p>
+          <a:p>
+            <a:pPr algn="r" indent="0" marL="0">
+              <a:spcAft>
+                <a:spcPts val="1400"/>
+              </a:spcAft>
+              <a:buNone/>
+            </a:pPr>
+            <a:r>
+              <a:rPr lang="en-US" sz="1600" dirty="0">
+                <a:solidFill>
+                  <a:srgbClr val="1B1F3B"/>
+                </a:solidFill>
+                <a:latin typeface="Calibri" pitchFamily="34" charset="0"/>
+                <a:ea typeface="Calibri" pitchFamily="34" charset="-122"/>
+                <a:cs typeface="Calibri" pitchFamily="34" charset="-120"/>
+              </a:rPr>
+              <a:t>Stack Overflow Developer Survey 2025</a:t>
+            </a:r>
+            <a:endParaRPr lang="en-US" sz="1600" dirty="0"/>
+          </a:p>
+          <a:p>
+            <a:pPr algn="r" indent="0" marL="0">
+              <a:spcAft>
+                <a:spcPts val="1400"/>
+              </a:spcAft>
+              <a:buNone/>
+            </a:pPr>
+            <a:r>
+              <a:rPr lang="en-US" sz="1600" dirty="0">
+                <a:solidFill>
+                  <a:srgbClr val="1B1F3B"/>
+                </a:solidFill>
+                <a:latin typeface="Calibri" pitchFamily="34" charset="0"/>
+                <a:ea typeface="Calibri" pitchFamily="34" charset="-122"/>
+                <a:cs typeface="Calibri" pitchFamily="34" charset="-120"/>
+              </a:rPr>
+              <a:t>index.dev — Developer Productivity Statistics 2026</a:t>
+            </a:r>
+            <a:endParaRPr lang="en-US" sz="1600" dirty="0"/>
+          </a:p>
+          <a:p>
+            <a:pPr algn="r" indent="0" marL="0">
+              <a:spcAft>
+                <a:spcPts val="1400"/>
+              </a:spcAft>
+              <a:buNone/>
+            </a:pPr>
+            <a:r>
+              <a:rPr lang="en-US" sz="1600" dirty="0">
+                <a:solidFill>
+                  <a:srgbClr val="1B1F3B"/>
+                </a:solidFill>
+                <a:latin typeface="Calibri" pitchFamily="34" charset="0"/>
+                <a:ea typeface="Calibri" pitchFamily="34" charset="-122"/>
+                <a:cs typeface="Calibri" pitchFamily="34" charset="-120"/>
+              </a:rPr>
+              <a:t>DORA — ROI of AI-Assisted Software Development, 2026</a:t>
+            </a:r>
+            <a:endParaRPr lang="en-US" sz="1600" dirty="0"/>
+          </a:p>
+        </p:txBody>
+      </p:sp>
+      <p:sp>
+        <p:nvSpPr>
+          <p:cNvPr id="4" name="Text 2"/>
+          <p:cNvSpPr/>
+          <p:nvPr/>
+        </p:nvSpPr>
+        <p:spPr>
+          <a:xfrm>
+            <a:off x="548640" y="5212080"/>
+            <a:ext cx="11091672" cy="548640"/>
+          </a:xfrm>
+          <a:prstGeom prst="rect">
+            <a:avLst/>
+          </a:prstGeom>
+          <a:noFill/>
+          <a:ln/>
+        </p:spPr>
+        <p:txBody>
+          <a:bodyPr wrap="square" lIns="0" tIns="0" rIns="0" bIns="0" rtlCol="0" anchor="ctr"/>
+          <a:lstStyle/>
+          <a:p>
+            <a:pPr rtl="1" algn="r" indent="0" marL="0">
+              <a:buNone/>
+            </a:pPr>
+            <a:r>
+              <a:rPr lang="en-US" sz="1300" i="1" dirty="0">
+                <a:solidFill>
+                  <a:srgbClr val="6B7280"/>
+                </a:solidFill>
+                <a:latin typeface="Calibri" pitchFamily="34" charset="0"/>
+                <a:ea typeface="Calibri" pitchFamily="34" charset="-122"/>
+                <a:cs typeface="Calibri" pitchFamily="34" charset="-120"/>
+              </a:rPr>
+              <a:t>פירוט מלא וקישורים: references.md — כל הנתונים נבדקו ביולי 2026 ועשויים להשתנות</a:t>
+            </a:r>
+            <a:endParaRPr lang="en-US" sz="1300" dirty="0"/>
+          </a:p>
+        </p:txBody>
+      </p:sp>
+      <p:sp>
+        <p:nvSpPr>
+          <p:cNvPr id="5" name="Text 3"/>
+          <p:cNvSpPr/>
+          <p:nvPr/>
+        </p:nvSpPr>
+        <p:spPr>
+          <a:xfrm>
+            <a:off x="548640" y="6492240"/>
+            <a:ext cx="11091672" cy="274320"/>
+          </a:xfrm>
+          <a:prstGeom prst="rect">
+            <a:avLst/>
+          </a:prstGeom>
+          <a:noFill/>
+          <a:ln/>
+        </p:spPr>
+        <p:txBody>
+          <a:bodyPr wrap="square" lIns="0" tIns="0" rIns="0" bIns="0" rtlCol="0" anchor="ctr"/>
+          <a:lstStyle/>
+          <a:p>
+            <a:pPr rtl="1" algn="r" indent="0" marL="0">
+              <a:buNone/>
+            </a:pPr>
+            <a:r>
+              <a:rPr lang="en-US" sz="900" dirty="0">
+                <a:solidFill>
+                  <a:srgbClr val="A6A6B0"/>
+                </a:solidFill>
+                <a:latin typeface="Calibri" pitchFamily="34" charset="0"/>
+                <a:ea typeface="Calibri" pitchFamily="34" charset="-122"/>
+                <a:cs typeface="Calibri" pitchFamily="34" charset="-120"/>
+              </a:rPr>
+              <a:t>Vibe Coding · שיעור 2 · שקף 16</a:t>
+            </a:r>
+            <a:endParaRPr lang="en-US" sz="900" dirty="0"/>
           </a:p>
         </p:txBody>
       </p:sp>
@@ -3578,7 +5976,7 @@
                 <a:ea typeface="Arial" pitchFamily="34" charset="-122"/>
                 <a:cs typeface="Arial" pitchFamily="34" charset="-120"/>
               </a:rPr>
-              <a:t>מה הופך כלי ל״אג'נטי״?</a:t>
+              <a:t>GitHub בקנה מידה</a:t>
             </a:r>
             <a:endParaRPr lang="en-US" sz="3000" dirty="0"/>
           </a:p>
@@ -3592,34 +5990,12 @@
         </p:nvSpPr>
         <p:spPr>
           <a:xfrm>
-            <a:off x="6336792" y="1737360"/>
-            <a:ext cx="5120640" cy="3566160"/>
+            <a:off x="8915400" y="1737360"/>
+            <a:ext cx="2468880" cy="2651760"/>
           </a:xfrm>
           <a:prstGeom prst="roundRect">
             <a:avLst>
-              <a:gd name="adj" fmla="val 3077"/>
-            </a:avLst>
-          </a:prstGeom>
-          <a:solidFill>
-            <a:srgbClr val="F2F2F2"/>
-          </a:solidFill>
-          <a:ln/>
-        </p:spPr>
-      </p:sp>
-      <p:sp>
-        <p:nvSpPr>
-          <p:cNvPr id="4" name="Shape 2"/>
-          <p:cNvSpPr/>
-          <p:nvPr/>
-        </p:nvSpPr>
-        <p:spPr>
-          <a:xfrm>
-            <a:off x="548640" y="1737360"/>
-            <a:ext cx="5120640" cy="3566160"/>
-          </a:xfrm>
-          <a:prstGeom prst="roundRect">
-            <a:avLst>
-              <a:gd name="adj" fmla="val 3077"/>
+              <a:gd name="adj" fmla="val 3704"/>
             </a:avLst>
           </a:prstGeom>
           <a:solidFill>
@@ -3630,30 +6006,30 @@
       </p:sp>
       <p:sp>
         <p:nvSpPr>
-          <p:cNvPr id="5" name="Text 3"/>
-          <p:cNvSpPr/>
-          <p:nvPr/>
-        </p:nvSpPr>
-        <p:spPr>
-          <a:xfrm>
-            <a:off x="822960" y="1965960"/>
-            <a:ext cx="4572000" cy="457200"/>
-          </a:xfrm>
-          <a:prstGeom prst="rect">
-            <a:avLst/>
-          </a:prstGeom>
-          <a:noFill/>
-          <a:ln/>
-        </p:spPr>
-        <p:txBody>
-          <a:bodyPr wrap="square" lIns="0" tIns="0" rIns="0" bIns="0" rtlCol="0" anchor="ctr"/>
-          <a:lstStyle/>
-          <a:p>
-            <a:pPr rtl="1" algn="r" indent="0" marL="0">
-              <a:buNone/>
-            </a:pPr>
-            <a:r>
-              <a:rPr lang="en-US" sz="1800" b="1" dirty="0">
+          <p:cNvPr id="4" name="Text 2"/>
+          <p:cNvSpPr/>
+          <p:nvPr/>
+        </p:nvSpPr>
+        <p:spPr>
+          <a:xfrm>
+            <a:off x="8915400" y="1874520"/>
+            <a:ext cx="2468880" cy="1965960"/>
+          </a:xfrm>
+          <a:prstGeom prst="rect">
+            <a:avLst/>
+          </a:prstGeom>
+          <a:noFill/>
+          <a:ln/>
+        </p:spPr>
+        <p:txBody>
+          <a:bodyPr wrap="square" lIns="0" tIns="0" rIns="0" bIns="0" rtlCol="0" anchor="b"/>
+          <a:lstStyle/>
+          <a:p>
+            <a:pPr algn="ctr" indent="0" marL="0">
+              <a:buNone/>
+            </a:pPr>
+            <a:r>
+              <a:rPr lang="en-US" sz="3800" b="1" dirty="0">
                 <a:solidFill>
                   <a:srgbClr val="00C2A8"/>
                 </a:solidFill>
@@ -3661,41 +6037,38 @@
                 <a:ea typeface="Arial" pitchFamily="34" charset="-122"/>
                 <a:cs typeface="Arial" pitchFamily="34" charset="-120"/>
               </a:rPr>
-              <a:t>כלי Agentic (Claude Code)</a:t>
-            </a:r>
-            <a:endParaRPr lang="en-US" sz="1800" dirty="0"/>
-          </a:p>
-        </p:txBody>
-      </p:sp>
-      <p:sp>
-        <p:nvSpPr>
-          <p:cNvPr id="6" name="Text 4"/>
-          <p:cNvSpPr/>
-          <p:nvPr/>
-        </p:nvSpPr>
-        <p:spPr>
-          <a:xfrm>
-            <a:off x="822960" y="2514600"/>
-            <a:ext cx="4572000" cy="2651760"/>
-          </a:xfrm>
-          <a:prstGeom prst="rect">
-            <a:avLst/>
-          </a:prstGeom>
-          <a:noFill/>
-          <a:ln/>
-        </p:spPr>
-        <p:txBody>
-          <a:bodyPr wrap="square" lIns="0" tIns="0" rIns="0" bIns="0" rtlCol="0" anchor="ctr"/>
-          <a:lstStyle/>
-          <a:p>
-            <a:pPr algn="r" indent="0" marL="0">
-              <a:spcAft>
-                <a:spcPts val="1000"/>
-              </a:spcAft>
-              <a:buNone/>
-            </a:pPr>
-            <a:r>
-              <a:rPr lang="en-US" sz="1400" dirty="0">
+              <a:t>180M+</a:t>
+            </a:r>
+            <a:endParaRPr lang="en-US" sz="3800" dirty="0"/>
+          </a:p>
+        </p:txBody>
+      </p:sp>
+      <p:sp>
+        <p:nvSpPr>
+          <p:cNvPr id="5" name="Text 3"/>
+          <p:cNvSpPr/>
+          <p:nvPr/>
+        </p:nvSpPr>
+        <p:spPr>
+          <a:xfrm>
+            <a:off x="9052560" y="3794760"/>
+            <a:ext cx="2194560" cy="548640"/>
+          </a:xfrm>
+          <a:prstGeom prst="rect">
+            <a:avLst/>
+          </a:prstGeom>
+          <a:noFill/>
+          <a:ln/>
+        </p:spPr>
+        <p:txBody>
+          <a:bodyPr wrap="square" lIns="0" tIns="0" rIns="0" bIns="0" rtlCol="0" anchor="t"/>
+          <a:lstStyle/>
+          <a:p>
+            <a:pPr rtl="1" algn="ctr" indent="0" marL="0">
+              <a:buNone/>
+            </a:pPr>
+            <a:r>
+              <a:rPr lang="en-US" sz="1250" dirty="0">
                 <a:solidFill>
                   <a:srgbClr val="1B1F3B"/>
                 </a:solidFill>
@@ -3703,19 +6076,99 @@
                 <a:ea typeface="Calibri" pitchFamily="34" charset="-122"/>
                 <a:cs typeface="Calibri" pitchFamily="34" charset="-120"/>
               </a:rPr>
-              <a:t>• מקבל משימה ברמה גבוהה</a:t>
-            </a:r>
-            <a:endParaRPr lang="en-US" sz="1400" dirty="0"/>
-          </a:p>
-          <a:p>
-            <a:pPr algn="r" indent="0" marL="0">
-              <a:spcAft>
-                <a:spcPts val="1000"/>
-              </a:spcAft>
-              <a:buNone/>
-            </a:pPr>
-            <a:r>
-              <a:rPr lang="en-US" sz="1400" dirty="0">
+              <a:t>מפתחים רשומים (36M+ הצטרפו בשנה האחרונה)</a:t>
+            </a:r>
+            <a:endParaRPr lang="en-US" sz="1250" dirty="0"/>
+          </a:p>
+        </p:txBody>
+      </p:sp>
+      <p:sp>
+        <p:nvSpPr>
+          <p:cNvPr id="6" name="Shape 4"/>
+          <p:cNvSpPr/>
+          <p:nvPr/>
+        </p:nvSpPr>
+        <p:spPr>
+          <a:xfrm>
+            <a:off x="6245352" y="1737360"/>
+            <a:ext cx="2468880" cy="2651760"/>
+          </a:xfrm>
+          <a:prstGeom prst="roundRect">
+            <a:avLst>
+              <a:gd name="adj" fmla="val 3704"/>
+            </a:avLst>
+          </a:prstGeom>
+          <a:solidFill>
+            <a:srgbClr val="E6FBF7"/>
+          </a:solidFill>
+          <a:ln/>
+        </p:spPr>
+      </p:sp>
+      <p:sp>
+        <p:nvSpPr>
+          <p:cNvPr id="7" name="Text 5"/>
+          <p:cNvSpPr/>
+          <p:nvPr/>
+        </p:nvSpPr>
+        <p:spPr>
+          <a:xfrm>
+            <a:off x="6245352" y="1874520"/>
+            <a:ext cx="2468880" cy="1965960"/>
+          </a:xfrm>
+          <a:prstGeom prst="rect">
+            <a:avLst/>
+          </a:prstGeom>
+          <a:noFill/>
+          <a:ln/>
+        </p:spPr>
+        <p:txBody>
+          <a:bodyPr wrap="square" lIns="0" tIns="0" rIns="0" bIns="0" rtlCol="0" anchor="b"/>
+          <a:lstStyle/>
+          <a:p>
+            <a:pPr algn="ctr" indent="0" marL="0">
+              <a:buNone/>
+            </a:pPr>
+            <a:r>
+              <a:rPr lang="en-US" sz="3800" b="1" dirty="0">
+                <a:solidFill>
+                  <a:srgbClr val="00C2A8"/>
+                </a:solidFill>
+                <a:latin typeface="Arial" pitchFamily="34" charset="0"/>
+                <a:ea typeface="Arial" pitchFamily="34" charset="-122"/>
+                <a:cs typeface="Arial" pitchFamily="34" charset="-120"/>
+              </a:rPr>
+              <a:t>630M+</a:t>
+            </a:r>
+            <a:endParaRPr lang="en-US" sz="3800" dirty="0"/>
+          </a:p>
+        </p:txBody>
+      </p:sp>
+      <p:sp>
+        <p:nvSpPr>
+          <p:cNvPr id="8" name="Text 6"/>
+          <p:cNvSpPr/>
+          <p:nvPr/>
+        </p:nvSpPr>
+        <p:spPr>
+          <a:xfrm>
+            <a:off x="6382512" y="3794760"/>
+            <a:ext cx="2194560" cy="548640"/>
+          </a:xfrm>
+          <a:prstGeom prst="rect">
+            <a:avLst/>
+          </a:prstGeom>
+          <a:noFill/>
+          <a:ln/>
+        </p:spPr>
+        <p:txBody>
+          <a:bodyPr wrap="square" lIns="0" tIns="0" rIns="0" bIns="0" rtlCol="0" anchor="t"/>
+          <a:lstStyle/>
+          <a:p>
+            <a:pPr rtl="1" algn="ctr" indent="0" marL="0">
+              <a:buNone/>
+            </a:pPr>
+            <a:r>
+              <a:rPr lang="en-US" sz="1250" dirty="0">
                 <a:solidFill>
                   <a:srgbClr val="1B1F3B"/>
                 </a:solidFill>
@@ -3723,19 +6176,99 @@
                 <a:ea typeface="Calibri" pitchFamily="34" charset="-122"/>
                 <a:cs typeface="Calibri" pitchFamily="34" charset="-120"/>
               </a:rPr>
-              <a:t>• קורא קבצים, כותב במספר מקומות</a:t>
-            </a:r>
-            <a:endParaRPr lang="en-US" sz="1400" dirty="0"/>
-          </a:p>
-          <a:p>
-            <a:pPr algn="r" indent="0" marL="0">
-              <a:spcAft>
-                <a:spcPts val="1000"/>
-              </a:spcAft>
-              <a:buNone/>
-            </a:pPr>
-            <a:r>
-              <a:rPr lang="en-US" sz="1400" dirty="0">
+              <a:t>Repositories</a:t>
+            </a:r>
+            <a:endParaRPr lang="en-US" sz="1250" dirty="0"/>
+          </a:p>
+        </p:txBody>
+      </p:sp>
+      <p:sp>
+        <p:nvSpPr>
+          <p:cNvPr id="9" name="Shape 7"/>
+          <p:cNvSpPr/>
+          <p:nvPr/>
+        </p:nvSpPr>
+        <p:spPr>
+          <a:xfrm>
+            <a:off x="3575304" y="1737360"/>
+            <a:ext cx="2468880" cy="2651760"/>
+          </a:xfrm>
+          <a:prstGeom prst="roundRect">
+            <a:avLst>
+              <a:gd name="adj" fmla="val 3704"/>
+            </a:avLst>
+          </a:prstGeom>
+          <a:solidFill>
+            <a:srgbClr val="E6FBF7"/>
+          </a:solidFill>
+          <a:ln/>
+        </p:spPr>
+      </p:sp>
+      <p:sp>
+        <p:nvSpPr>
+          <p:cNvPr id="10" name="Text 8"/>
+          <p:cNvSpPr/>
+          <p:nvPr/>
+        </p:nvSpPr>
+        <p:spPr>
+          <a:xfrm>
+            <a:off x="3575304" y="1874520"/>
+            <a:ext cx="2468880" cy="1965960"/>
+          </a:xfrm>
+          <a:prstGeom prst="rect">
+            <a:avLst/>
+          </a:prstGeom>
+          <a:noFill/>
+          <a:ln/>
+        </p:spPr>
+        <p:txBody>
+          <a:bodyPr wrap="square" lIns="0" tIns="0" rIns="0" bIns="0" rtlCol="0" anchor="b"/>
+          <a:lstStyle/>
+          <a:p>
+            <a:pPr algn="ctr" indent="0" marL="0">
+              <a:buNone/>
+            </a:pPr>
+            <a:r>
+              <a:rPr lang="en-US" sz="3800" b="1" dirty="0">
+                <a:solidFill>
+                  <a:srgbClr val="00C2A8"/>
+                </a:solidFill>
+                <a:latin typeface="Arial" pitchFamily="34" charset="0"/>
+                <a:ea typeface="Arial" pitchFamily="34" charset="-122"/>
+                <a:cs typeface="Arial" pitchFamily="34" charset="-120"/>
+              </a:rPr>
+              <a:t>43.2M</a:t>
+            </a:r>
+            <a:endParaRPr lang="en-US" sz="3800" dirty="0"/>
+          </a:p>
+        </p:txBody>
+      </p:sp>
+      <p:sp>
+        <p:nvSpPr>
+          <p:cNvPr id="11" name="Text 9"/>
+          <p:cNvSpPr/>
+          <p:nvPr/>
+        </p:nvSpPr>
+        <p:spPr>
+          <a:xfrm>
+            <a:off x="3712464" y="3794760"/>
+            <a:ext cx="2194560" cy="548640"/>
+          </a:xfrm>
+          <a:prstGeom prst="rect">
+            <a:avLst/>
+          </a:prstGeom>
+          <a:noFill/>
+          <a:ln/>
+        </p:spPr>
+        <p:txBody>
+          <a:bodyPr wrap="square" lIns="0" tIns="0" rIns="0" bIns="0" rtlCol="0" anchor="t"/>
+          <a:lstStyle/>
+          <a:p>
+            <a:pPr rtl="1" algn="ctr" indent="0" marL="0">
+              <a:buNone/>
+            </a:pPr>
+            <a:r>
+              <a:rPr lang="en-US" sz="1250" dirty="0">
                 <a:solidFill>
                   <a:srgbClr val="1B1F3B"/>
                 </a:solidFill>
@@ -3743,19 +6276,99 @@
                 <a:ea typeface="Calibri" pitchFamily="34" charset="-122"/>
                 <a:cs typeface="Calibri" pitchFamily="34" charset="-120"/>
               </a:rPr>
-              <a:t>• מריץ בדיקות ומתקן את עצמו</a:t>
-            </a:r>
-            <a:endParaRPr lang="en-US" sz="1400" dirty="0"/>
-          </a:p>
-          <a:p>
-            <a:pPr algn="r" indent="0" marL="0">
-              <a:spcAft>
-                <a:spcPts val="1000"/>
-              </a:spcAft>
-              <a:buNone/>
-            </a:pPr>
-            <a:r>
-              <a:rPr lang="en-US" sz="1400" dirty="0">
+              <a:t>Pull Requests נמזגים בכל חודש</a:t>
+            </a:r>
+            <a:endParaRPr lang="en-US" sz="1250" dirty="0"/>
+          </a:p>
+        </p:txBody>
+      </p:sp>
+      <p:sp>
+        <p:nvSpPr>
+          <p:cNvPr id="12" name="Shape 10"/>
+          <p:cNvSpPr/>
+          <p:nvPr/>
+        </p:nvSpPr>
+        <p:spPr>
+          <a:xfrm>
+            <a:off x="905256" y="1737360"/>
+            <a:ext cx="2468880" cy="2651760"/>
+          </a:xfrm>
+          <a:prstGeom prst="roundRect">
+            <a:avLst>
+              <a:gd name="adj" fmla="val 3704"/>
+            </a:avLst>
+          </a:prstGeom>
+          <a:solidFill>
+            <a:srgbClr val="E6FBF7"/>
+          </a:solidFill>
+          <a:ln/>
+        </p:spPr>
+      </p:sp>
+      <p:sp>
+        <p:nvSpPr>
+          <p:cNvPr id="13" name="Text 11"/>
+          <p:cNvSpPr/>
+          <p:nvPr/>
+        </p:nvSpPr>
+        <p:spPr>
+          <a:xfrm>
+            <a:off x="905256" y="1874520"/>
+            <a:ext cx="2468880" cy="1965960"/>
+          </a:xfrm>
+          <a:prstGeom prst="rect">
+            <a:avLst/>
+          </a:prstGeom>
+          <a:noFill/>
+          <a:ln/>
+        </p:spPr>
+        <p:txBody>
+          <a:bodyPr wrap="square" lIns="0" tIns="0" rIns="0" bIns="0" rtlCol="0" anchor="b"/>
+          <a:lstStyle/>
+          <a:p>
+            <a:pPr algn="ctr" indent="0" marL="0">
+              <a:buNone/>
+            </a:pPr>
+            <a:r>
+              <a:rPr lang="en-US" sz="3800" b="1" dirty="0">
+                <a:solidFill>
+                  <a:srgbClr val="00C2A8"/>
+                </a:solidFill>
+                <a:latin typeface="Arial" pitchFamily="34" charset="0"/>
+                <a:ea typeface="Arial" pitchFamily="34" charset="-122"/>
+                <a:cs typeface="Arial" pitchFamily="34" charset="-120"/>
+              </a:rPr>
+              <a:t>92%</a:t>
+            </a:r>
+            <a:endParaRPr lang="en-US" sz="3800" dirty="0"/>
+          </a:p>
+        </p:txBody>
+      </p:sp>
+      <p:sp>
+        <p:nvSpPr>
+          <p:cNvPr id="14" name="Text 12"/>
+          <p:cNvSpPr/>
+          <p:nvPr/>
+        </p:nvSpPr>
+        <p:spPr>
+          <a:xfrm>
+            <a:off x="1042416" y="3794760"/>
+            <a:ext cx="2194560" cy="548640"/>
+          </a:xfrm>
+          <a:prstGeom prst="rect">
+            <a:avLst/>
+          </a:prstGeom>
+          <a:noFill/>
+          <a:ln/>
+        </p:spPr>
+        <p:txBody>
+          <a:bodyPr wrap="square" lIns="0" tIns="0" rIns="0" bIns="0" rtlCol="0" anchor="t"/>
+          <a:lstStyle/>
+          <a:p>
+            <a:pPr rtl="1" algn="ctr" indent="0" marL="0">
+              <a:buNone/>
+            </a:pPr>
+            <a:r>
+              <a:rPr lang="en-US" sz="1250" dirty="0">
                 <a:solidFill>
                   <a:srgbClr val="1B1F3B"/>
                 </a:solidFill>
@@ -3763,22 +6376,22 @@
                 <a:ea typeface="Calibri" pitchFamily="34" charset="-122"/>
                 <a:cs typeface="Calibri" pitchFamily="34" charset="-120"/>
               </a:rPr>
-              <a:t>• שותף לביצוע משימה</a:t>
-            </a:r>
-            <a:endParaRPr lang="en-US" sz="1400" dirty="0"/>
-          </a:p>
-        </p:txBody>
-      </p:sp>
-      <p:sp>
-        <p:nvSpPr>
-          <p:cNvPr id="7" name="Text 5"/>
-          <p:cNvSpPr/>
-          <p:nvPr/>
-        </p:nvSpPr>
-        <p:spPr>
-          <a:xfrm>
-            <a:off x="6611112" y="1965960"/>
-            <a:ext cx="4572000" cy="457200"/>
+              <a:t>מחברות Fortune 100 משתמשות ב-GitHub Enterprise</a:t>
+            </a:r>
+            <a:endParaRPr lang="en-US" sz="1250" dirty="0"/>
+          </a:p>
+        </p:txBody>
+      </p:sp>
+      <p:sp>
+        <p:nvSpPr>
+          <p:cNvPr id="15" name="Text 13"/>
+          <p:cNvSpPr/>
+          <p:nvPr/>
+        </p:nvSpPr>
+        <p:spPr>
+          <a:xfrm>
+            <a:off x="548640" y="4754880"/>
+            <a:ext cx="11091672" cy="640080"/>
           </a:xfrm>
           <a:prstGeom prst="rect">
             <a:avLst/>
@@ -3794,49 +6407,46 @@
               <a:buNone/>
             </a:pPr>
             <a:r>
-              <a:rPr lang="en-US" sz="1800" b="1" dirty="0">
-                <a:solidFill>
-                  <a:srgbClr val="6B7280"/>
+              <a:rPr lang="en-US" sz="1600" b="1" i="1" dirty="0">
+                <a:solidFill>
+                  <a:srgbClr val="1B1F3B"/>
                 </a:solidFill>
                 <a:latin typeface="Arial" pitchFamily="34" charset="0"/>
                 <a:ea typeface="Arial" pitchFamily="34" charset="-122"/>
                 <a:cs typeface="Arial" pitchFamily="34" charset="-120"/>
               </a:rPr>
-              <a:t>Autocomplete בסיסי</a:t>
-            </a:r>
-            <a:endParaRPr lang="en-US" sz="1800" dirty="0"/>
-          </a:p>
-        </p:txBody>
-      </p:sp>
-      <p:sp>
-        <p:nvSpPr>
-          <p:cNvPr id="8" name="Text 6"/>
-          <p:cNvSpPr/>
-          <p:nvPr/>
-        </p:nvSpPr>
-        <p:spPr>
-          <a:xfrm>
-            <a:off x="6611112" y="2514600"/>
-            <a:ext cx="4572000" cy="2651760"/>
-          </a:xfrm>
-          <a:prstGeom prst="rect">
-            <a:avLst/>
-          </a:prstGeom>
-          <a:noFill/>
-          <a:ln/>
-        </p:spPr>
-        <p:txBody>
-          <a:bodyPr wrap="square" lIns="0" tIns="0" rIns="0" bIns="0" rtlCol="0" anchor="ctr"/>
-          <a:lstStyle/>
-          <a:p>
-            <a:pPr algn="r" indent="0" marL="0">
-              <a:spcAft>
-                <a:spcPts val="1000"/>
-              </a:spcAft>
-              <a:buNone/>
-            </a:pPr>
-            <a:r>
-              <a:rPr lang="en-US" sz="1400" dirty="0">
+              <a:t>זו לא "עוד פלטפורמה" — זו התשתית של התעשייה.</a:t>
+            </a:r>
+            <a:endParaRPr lang="en-US" sz="1600" dirty="0"/>
+          </a:p>
+        </p:txBody>
+      </p:sp>
+      <p:sp>
+        <p:nvSpPr>
+          <p:cNvPr id="16" name="Text 14"/>
+          <p:cNvSpPr/>
+          <p:nvPr/>
+        </p:nvSpPr>
+        <p:spPr>
+          <a:xfrm>
+            <a:off x="548640" y="6172200"/>
+            <a:ext cx="11091672" cy="274320"/>
+          </a:xfrm>
+          <a:prstGeom prst="rect">
+            <a:avLst/>
+          </a:prstGeom>
+          <a:noFill/>
+          <a:ln/>
+        </p:spPr>
+        <p:txBody>
+          <a:bodyPr wrap="square" lIns="0" tIns="0" rIns="0" bIns="0" rtlCol="0" anchor="ctr"/>
+          <a:lstStyle/>
+          <a:p>
+            <a:pPr rtl="1" algn="r" indent="0" marL="0">
+              <a:buNone/>
+            </a:pPr>
+            <a:r>
+              <a:rPr lang="en-US" sz="1000" i="1" dirty="0">
                 <a:solidFill>
                   <a:srgbClr val="6B7280"/>
                 </a:solidFill>
@@ -3844,94 +6454,15 @@
                 <a:ea typeface="Calibri" pitchFamily="34" charset="-122"/>
                 <a:cs typeface="Calibri" pitchFamily="34" charset="-120"/>
               </a:rPr>
-              <a:t>• משלים שורה/פונקציה בודדת</a:t>
-            </a:r>
-            <a:endParaRPr lang="en-US" sz="1400" dirty="0"/>
-          </a:p>
-          <a:p>
-            <a:pPr algn="r" indent="0" marL="0">
-              <a:spcAft>
-                <a:spcPts val="1000"/>
-              </a:spcAft>
-              <a:buNone/>
-            </a:pPr>
-            <a:r>
-              <a:rPr lang="en-US" sz="1400" dirty="0">
-                <a:solidFill>
-                  <a:srgbClr val="6B7280"/>
-                </a:solidFill>
-                <a:latin typeface="Calibri" pitchFamily="34" charset="0"/>
-                <a:ea typeface="Calibri" pitchFamily="34" charset="-122"/>
-                <a:cs typeface="Calibri" pitchFamily="34" charset="-120"/>
-              </a:rPr>
-              <a:t>• פועל לפי הקשר מקומי בלבד</a:t>
-            </a:r>
-            <a:endParaRPr lang="en-US" sz="1400" dirty="0"/>
-          </a:p>
-          <a:p>
-            <a:pPr algn="r" indent="0" marL="0">
-              <a:spcAft>
-                <a:spcPts val="1000"/>
-              </a:spcAft>
-              <a:buNone/>
-            </a:pPr>
-            <a:r>
-              <a:rPr lang="en-US" sz="1400" dirty="0">
-                <a:solidFill>
-                  <a:srgbClr val="6B7280"/>
-                </a:solidFill>
-                <a:latin typeface="Calibri" pitchFamily="34" charset="0"/>
-                <a:ea typeface="Calibri" pitchFamily="34" charset="-122"/>
-                <a:cs typeface="Calibri" pitchFamily="34" charset="-120"/>
-              </a:rPr>
-              <a:t>• אתם מחליטים הכל</a:t>
-            </a:r>
-            <a:endParaRPr lang="en-US" sz="1400" dirty="0"/>
-          </a:p>
-        </p:txBody>
-      </p:sp>
-      <p:sp>
-        <p:nvSpPr>
-          <p:cNvPr id="9" name="Text 7"/>
-          <p:cNvSpPr/>
-          <p:nvPr/>
-        </p:nvSpPr>
-        <p:spPr>
-          <a:xfrm>
-            <a:off x="548640" y="5486400"/>
-            <a:ext cx="11091672" cy="548640"/>
-          </a:xfrm>
-          <a:prstGeom prst="rect">
-            <a:avLst/>
-          </a:prstGeom>
-          <a:noFill/>
-          <a:ln/>
-        </p:spPr>
-        <p:txBody>
-          <a:bodyPr wrap="square" lIns="0" tIns="0" rIns="0" bIns="0" rtlCol="0" anchor="ctr"/>
-          <a:lstStyle/>
-          <a:p>
-            <a:pPr rtl="1" algn="r" indent="0" marL="0">
-              <a:buNone/>
-            </a:pPr>
-            <a:r>
-              <a:rPr lang="en-US" sz="1700" b="1" i="1" dirty="0">
-                <a:solidFill>
-                  <a:srgbClr val="1B1F3B"/>
-                </a:solidFill>
-                <a:latin typeface="Arial" pitchFamily="34" charset="0"/>
-                <a:ea typeface="Arial" pitchFamily="34" charset="-122"/>
-                <a:cs typeface="Arial" pitchFamily="34" charset="-120"/>
-              </a:rPr>
-              <a:t>ההבדל: עוזר הקלדה מול שותף לביצוע משימה.</a:t>
-            </a:r>
-            <a:endParaRPr lang="en-US" sz="1700" dirty="0"/>
-          </a:p>
-        </p:txBody>
-      </p:sp>
-      <p:sp>
-        <p:nvSpPr>
-          <p:cNvPr id="10" name="Text 8"/>
+              <a:t>מקור: Kinsta, Skillademia — GitHub Statistics 2026</a:t>
+            </a:r>
+            <a:endParaRPr lang="en-US" sz="1000" dirty="0"/>
+          </a:p>
+        </p:txBody>
+      </p:sp>
+      <p:sp>
+        <p:nvSpPr>
+          <p:cNvPr id="17" name="Text 15"/>
           <p:cNvSpPr/>
           <p:nvPr/>
         </p:nvSpPr>
@@ -4033,7 +6564,7 @@
                 <a:ea typeface="Arial" pitchFamily="34" charset="-122"/>
                 <a:cs typeface="Arial" pitchFamily="34" charset="-120"/>
               </a:rPr>
-              <a:t>Claude Code — איך זה עובד בפועל</a:t>
+              <a:t>מה הופך כלי ל״אג'נטי״?</a:t>
             </a:r>
             <a:endParaRPr lang="en-US" sz="3000" dirty="0"/>
           </a:p>
@@ -4047,12 +6578,34 @@
         </p:nvSpPr>
         <p:spPr>
           <a:xfrm>
-            <a:off x="548640" y="2011680"/>
-            <a:ext cx="1965960" cy="1554480"/>
+            <a:off x="6336792" y="1737360"/>
+            <a:ext cx="5120640" cy="3566160"/>
           </a:xfrm>
           <a:prstGeom prst="roundRect">
             <a:avLst>
-              <a:gd name="adj" fmla="val 5882"/>
+              <a:gd name="adj" fmla="val 3077"/>
+            </a:avLst>
+          </a:prstGeom>
+          <a:solidFill>
+            <a:srgbClr val="F2F2F2"/>
+          </a:solidFill>
+          <a:ln/>
+        </p:spPr>
+      </p:sp>
+      <p:sp>
+        <p:nvSpPr>
+          <p:cNvPr id="4" name="Shape 2"/>
+          <p:cNvSpPr/>
+          <p:nvPr/>
+        </p:nvSpPr>
+        <p:spPr>
+          <a:xfrm>
+            <a:off x="548640" y="1737360"/>
+            <a:ext cx="5120640" cy="3566160"/>
+          </a:xfrm>
+          <a:prstGeom prst="roundRect">
+            <a:avLst>
+              <a:gd name="adj" fmla="val 3077"/>
             </a:avLst>
           </a:prstGeom>
           <a:solidFill>
@@ -4063,106 +6616,292 @@
       </p:sp>
       <p:sp>
         <p:nvSpPr>
-          <p:cNvPr id="4" name="Shape 2"/>
-          <p:cNvSpPr/>
-          <p:nvPr/>
-        </p:nvSpPr>
-        <p:spPr>
-          <a:xfrm>
-            <a:off x="1261872" y="2148840"/>
-            <a:ext cx="502920" cy="502920"/>
-          </a:xfrm>
-          <a:prstGeom prst="ellipse">
-            <a:avLst/>
-          </a:prstGeom>
-          <a:solidFill>
-            <a:srgbClr val="00C2A8"/>
-          </a:solidFill>
-          <a:ln/>
-        </p:spPr>
-      </p:sp>
-      <p:sp>
-        <p:nvSpPr>
           <p:cNvPr id="5" name="Text 3"/>
           <p:cNvSpPr/>
           <p:nvPr/>
         </p:nvSpPr>
         <p:spPr>
           <a:xfrm>
-            <a:off x="1261872" y="2148840"/>
-            <a:ext cx="502920" cy="502920"/>
-          </a:xfrm>
-          <a:prstGeom prst="rect">
-            <a:avLst/>
-          </a:prstGeom>
-          <a:noFill/>
-          <a:ln/>
-        </p:spPr>
-        <p:txBody>
-          <a:bodyPr wrap="square" lIns="0" tIns="0" rIns="0" bIns="0" rtlCol="0" anchor="ctr"/>
-          <a:lstStyle/>
-          <a:p>
-            <a:pPr algn="ctr" indent="0" marL="0">
-              <a:buNone/>
-            </a:pPr>
-            <a:r>
-              <a:rPr lang="en-US" sz="1400" b="1" dirty="0">
-                <a:solidFill>
-                  <a:srgbClr val="FFFFFF"/>
+            <a:off x="822960" y="1965960"/>
+            <a:ext cx="4572000" cy="457200"/>
+          </a:xfrm>
+          <a:prstGeom prst="rect">
+            <a:avLst/>
+          </a:prstGeom>
+          <a:noFill/>
+          <a:ln/>
+        </p:spPr>
+        <p:txBody>
+          <a:bodyPr wrap="square" lIns="0" tIns="0" rIns="0" bIns="0" rtlCol="0" anchor="ctr"/>
+          <a:lstStyle/>
+          <a:p>
+            <a:pPr rtl="1" algn="r" indent="0" marL="0">
+              <a:buNone/>
+            </a:pPr>
+            <a:r>
+              <a:rPr lang="en-US" sz="1800" b="1" dirty="0">
+                <a:solidFill>
+                  <a:srgbClr val="00C2A8"/>
                 </a:solidFill>
                 <a:latin typeface="Arial" pitchFamily="34" charset="0"/>
                 <a:ea typeface="Arial" pitchFamily="34" charset="-122"/>
                 <a:cs typeface="Arial" pitchFamily="34" charset="-120"/>
               </a:rPr>
-              <a:t>1</a:t>
+              <a:t>כלי Agentic (Claude Code)</a:t>
+            </a:r>
+            <a:endParaRPr lang="en-US" sz="1800" dirty="0"/>
+          </a:p>
+        </p:txBody>
+      </p:sp>
+      <p:sp>
+        <p:nvSpPr>
+          <p:cNvPr id="6" name="Text 4"/>
+          <p:cNvSpPr/>
+          <p:nvPr/>
+        </p:nvSpPr>
+        <p:spPr>
+          <a:xfrm>
+            <a:off x="822960" y="2514600"/>
+            <a:ext cx="4572000" cy="2651760"/>
+          </a:xfrm>
+          <a:prstGeom prst="rect">
+            <a:avLst/>
+          </a:prstGeom>
+          <a:noFill/>
+          <a:ln/>
+        </p:spPr>
+        <p:txBody>
+          <a:bodyPr wrap="square" lIns="0" tIns="0" rIns="0" bIns="0" rtlCol="0" anchor="ctr"/>
+          <a:lstStyle/>
+          <a:p>
+            <a:pPr algn="r" indent="0" marL="0">
+              <a:spcAft>
+                <a:spcPts val="1000"/>
+              </a:spcAft>
+              <a:buNone/>
+            </a:pPr>
+            <a:r>
+              <a:rPr lang="en-US" sz="1400" dirty="0">
+                <a:solidFill>
+                  <a:srgbClr val="1B1F3B"/>
+                </a:solidFill>
+                <a:latin typeface="Calibri" pitchFamily="34" charset="0"/>
+                <a:ea typeface="Calibri" pitchFamily="34" charset="-122"/>
+                <a:cs typeface="Calibri" pitchFamily="34" charset="-120"/>
+              </a:rPr>
+              <a:t>• מקבל משימה ברמה גבוהה</a:t>
             </a:r>
             <a:endParaRPr lang="en-US" sz="1400" dirty="0"/>
           </a:p>
-        </p:txBody>
-      </p:sp>
-      <p:sp>
-        <p:nvSpPr>
-          <p:cNvPr id="6" name="Text 4"/>
-          <p:cNvSpPr/>
-          <p:nvPr/>
-        </p:nvSpPr>
-        <p:spPr>
-          <a:xfrm>
-            <a:off x="548640" y="2880360"/>
-            <a:ext cx="1965960" cy="594360"/>
-          </a:xfrm>
-          <a:prstGeom prst="rect">
-            <a:avLst/>
-          </a:prstGeom>
-          <a:noFill/>
-          <a:ln/>
-        </p:spPr>
-        <p:txBody>
-          <a:bodyPr wrap="square" lIns="25400" tIns="25400" rIns="25400" bIns="25400" rtlCol="0" anchor="t"/>
-          <a:lstStyle/>
-          <a:p>
-            <a:pPr algn="ctr" indent="0" marL="0">
-              <a:buNone/>
-            </a:pPr>
-            <a:r>
-              <a:rPr lang="en-US" sz="1300" b="1" dirty="0">
+          <a:p>
+            <a:pPr algn="r" indent="0" marL="0">
+              <a:spcAft>
+                <a:spcPts val="1000"/>
+              </a:spcAft>
+              <a:buNone/>
+            </a:pPr>
+            <a:r>
+              <a:rPr lang="en-US" sz="1400" dirty="0">
                 <a:solidFill>
                   <a:srgbClr val="1B1F3B"/>
+                </a:solidFill>
+                <a:latin typeface="Calibri" pitchFamily="34" charset="0"/>
+                <a:ea typeface="Calibri" pitchFamily="34" charset="-122"/>
+                <a:cs typeface="Calibri" pitchFamily="34" charset="-120"/>
+              </a:rPr>
+              <a:t>• קורא קבצים, כותב במספר מקומות</a:t>
+            </a:r>
+            <a:endParaRPr lang="en-US" sz="1400" dirty="0"/>
+          </a:p>
+          <a:p>
+            <a:pPr algn="r" indent="0" marL="0">
+              <a:spcAft>
+                <a:spcPts val="1000"/>
+              </a:spcAft>
+              <a:buNone/>
+            </a:pPr>
+            <a:r>
+              <a:rPr lang="en-US" sz="1400" dirty="0">
+                <a:solidFill>
+                  <a:srgbClr val="1B1F3B"/>
+                </a:solidFill>
+                <a:latin typeface="Calibri" pitchFamily="34" charset="0"/>
+                <a:ea typeface="Calibri" pitchFamily="34" charset="-122"/>
+                <a:cs typeface="Calibri" pitchFamily="34" charset="-120"/>
+              </a:rPr>
+              <a:t>• מריץ בדיקות ומתקן את עצמו</a:t>
+            </a:r>
+            <a:endParaRPr lang="en-US" sz="1400" dirty="0"/>
+          </a:p>
+          <a:p>
+            <a:pPr algn="r" indent="0" marL="0">
+              <a:spcAft>
+                <a:spcPts val="1000"/>
+              </a:spcAft>
+              <a:buNone/>
+            </a:pPr>
+            <a:r>
+              <a:rPr lang="en-US" sz="1400" dirty="0">
+                <a:solidFill>
+                  <a:srgbClr val="1B1F3B"/>
+                </a:solidFill>
+                <a:latin typeface="Calibri" pitchFamily="34" charset="0"/>
+                <a:ea typeface="Calibri" pitchFamily="34" charset="-122"/>
+                <a:cs typeface="Calibri" pitchFamily="34" charset="-120"/>
+              </a:rPr>
+              <a:t>• שותף לביצוע משימה</a:t>
+            </a:r>
+            <a:endParaRPr lang="en-US" sz="1400" dirty="0"/>
+          </a:p>
+        </p:txBody>
+      </p:sp>
+      <p:sp>
+        <p:nvSpPr>
+          <p:cNvPr id="7" name="Text 5"/>
+          <p:cNvSpPr/>
+          <p:nvPr/>
+        </p:nvSpPr>
+        <p:spPr>
+          <a:xfrm>
+            <a:off x="6611112" y="1965960"/>
+            <a:ext cx="4572000" cy="457200"/>
+          </a:xfrm>
+          <a:prstGeom prst="rect">
+            <a:avLst/>
+          </a:prstGeom>
+          <a:noFill/>
+          <a:ln/>
+        </p:spPr>
+        <p:txBody>
+          <a:bodyPr wrap="square" lIns="0" tIns="0" rIns="0" bIns="0" rtlCol="0" anchor="ctr"/>
+          <a:lstStyle/>
+          <a:p>
+            <a:pPr rtl="1" algn="r" indent="0" marL="0">
+              <a:buNone/>
+            </a:pPr>
+            <a:r>
+              <a:rPr lang="en-US" sz="1800" b="1" dirty="0">
+                <a:solidFill>
+                  <a:srgbClr val="6B7280"/>
                 </a:solidFill>
                 <a:latin typeface="Arial" pitchFamily="34" charset="0"/>
                 <a:ea typeface="Arial" pitchFamily="34" charset="-122"/>
                 <a:cs typeface="Arial" pitchFamily="34" charset="-120"/>
               </a:rPr>
-              <a:t>פתיחת</a:t>
-            </a:r>
-            <a:endParaRPr lang="en-US" sz="1300" dirty="0"/>
-          </a:p>
-          <a:p>
-            <a:pPr algn="ctr" indent="0" marL="0">
-              <a:buNone/>
-            </a:pPr>
-            <a:r>
-              <a:rPr lang="en-US" sz="1300" b="1" dirty="0">
+              <a:t>Autocomplete בסיסי</a:t>
+            </a:r>
+            <a:endParaRPr lang="en-US" sz="1800" dirty="0"/>
+          </a:p>
+        </p:txBody>
+      </p:sp>
+      <p:sp>
+        <p:nvSpPr>
+          <p:cNvPr id="8" name="Text 6"/>
+          <p:cNvSpPr/>
+          <p:nvPr/>
+        </p:nvSpPr>
+        <p:spPr>
+          <a:xfrm>
+            <a:off x="6611112" y="2514600"/>
+            <a:ext cx="4572000" cy="2651760"/>
+          </a:xfrm>
+          <a:prstGeom prst="rect">
+            <a:avLst/>
+          </a:prstGeom>
+          <a:noFill/>
+          <a:ln/>
+        </p:spPr>
+        <p:txBody>
+          <a:bodyPr wrap="square" lIns="0" tIns="0" rIns="0" bIns="0" rtlCol="0" anchor="ctr"/>
+          <a:lstStyle/>
+          <a:p>
+            <a:pPr algn="r" indent="0" marL="0">
+              <a:spcAft>
+                <a:spcPts val="1000"/>
+              </a:spcAft>
+              <a:buNone/>
+            </a:pPr>
+            <a:r>
+              <a:rPr lang="en-US" sz="1400" dirty="0">
+                <a:solidFill>
+                  <a:srgbClr val="6B7280"/>
+                </a:solidFill>
+                <a:latin typeface="Calibri" pitchFamily="34" charset="0"/>
+                <a:ea typeface="Calibri" pitchFamily="34" charset="-122"/>
+                <a:cs typeface="Calibri" pitchFamily="34" charset="-120"/>
+              </a:rPr>
+              <a:t>• משלים שורה/פונקציה בודדת</a:t>
+            </a:r>
+            <a:endParaRPr lang="en-US" sz="1400" dirty="0"/>
+          </a:p>
+          <a:p>
+            <a:pPr algn="r" indent="0" marL="0">
+              <a:spcAft>
+                <a:spcPts val="1000"/>
+              </a:spcAft>
+              <a:buNone/>
+            </a:pPr>
+            <a:r>
+              <a:rPr lang="en-US" sz="1400" dirty="0">
+                <a:solidFill>
+                  <a:srgbClr val="6B7280"/>
+                </a:solidFill>
+                <a:latin typeface="Calibri" pitchFamily="34" charset="0"/>
+                <a:ea typeface="Calibri" pitchFamily="34" charset="-122"/>
+                <a:cs typeface="Calibri" pitchFamily="34" charset="-120"/>
+              </a:rPr>
+              <a:t>• פועל לפי הקשר מקומי בלבד</a:t>
+            </a:r>
+            <a:endParaRPr lang="en-US" sz="1400" dirty="0"/>
+          </a:p>
+          <a:p>
+            <a:pPr algn="r" indent="0" marL="0">
+              <a:spcAft>
+                <a:spcPts val="1000"/>
+              </a:spcAft>
+              <a:buNone/>
+            </a:pPr>
+            <a:r>
+              <a:rPr lang="en-US" sz="1400" dirty="0">
+                <a:solidFill>
+                  <a:srgbClr val="6B7280"/>
+                </a:solidFill>
+                <a:latin typeface="Calibri" pitchFamily="34" charset="0"/>
+                <a:ea typeface="Calibri" pitchFamily="34" charset="-122"/>
+                <a:cs typeface="Calibri" pitchFamily="34" charset="-120"/>
+              </a:rPr>
+              <a:t>• אתם מחליטים הכל</a:t>
+            </a:r>
+            <a:endParaRPr lang="en-US" sz="1400" dirty="0"/>
+          </a:p>
+        </p:txBody>
+      </p:sp>
+      <p:sp>
+        <p:nvSpPr>
+          <p:cNvPr id="9" name="Text 7"/>
+          <p:cNvSpPr/>
+          <p:nvPr/>
+        </p:nvSpPr>
+        <p:spPr>
+          <a:xfrm>
+            <a:off x="548640" y="5486400"/>
+            <a:ext cx="11091672" cy="548640"/>
+          </a:xfrm>
+          <a:prstGeom prst="rect">
+            <a:avLst/>
+          </a:prstGeom>
+          <a:noFill/>
+          <a:ln/>
+        </p:spPr>
+        <p:txBody>
+          <a:bodyPr wrap="square" lIns="0" tIns="0" rIns="0" bIns="0" rtlCol="0" anchor="ctr"/>
+          <a:lstStyle/>
+          <a:p>
+            <a:pPr rtl="1" algn="r" indent="0" marL="0">
+              <a:buNone/>
+            </a:pPr>
+            <a:r>
+              <a:rPr lang="en-US" sz="1700" b="1" i="1" dirty="0">
                 <a:solidFill>
                   <a:srgbClr val="1B1F3B"/>
                 </a:solidFill>
@@ -4170,797 +6909,15 @@
                 <a:ea typeface="Arial" pitchFamily="34" charset="-122"/>
                 <a:cs typeface="Arial" pitchFamily="34" charset="-120"/>
               </a:rPr>
-              <a:t>Session</a:t>
-            </a:r>
-            <a:endParaRPr lang="en-US" sz="1300" dirty="0"/>
-          </a:p>
-        </p:txBody>
-      </p:sp>
-      <p:sp>
-        <p:nvSpPr>
-          <p:cNvPr id="7" name="Text 5"/>
-          <p:cNvSpPr/>
-          <p:nvPr/>
-        </p:nvSpPr>
-        <p:spPr>
-          <a:xfrm>
-            <a:off x="2514600" y="2011680"/>
-            <a:ext cx="320040" cy="1554480"/>
-          </a:xfrm>
-          <a:prstGeom prst="rect">
-            <a:avLst/>
-          </a:prstGeom>
-          <a:noFill/>
-          <a:ln/>
-        </p:spPr>
-        <p:txBody>
-          <a:bodyPr wrap="square" lIns="0" tIns="0" rIns="0" bIns="0" rtlCol="0" anchor="ctr"/>
-          <a:lstStyle/>
-          <a:p>
-            <a:pPr algn="ctr" indent="0" marL="0">
-              <a:buNone/>
-            </a:pPr>
-            <a:r>
-              <a:rPr lang="en-US" sz="2000" b="1" dirty="0">
-                <a:solidFill>
-                  <a:srgbClr val="6B7280"/>
-                </a:solidFill>
-                <a:latin typeface="Arial" pitchFamily="34" charset="0"/>
-                <a:ea typeface="Arial" pitchFamily="34" charset="-122"/>
-                <a:cs typeface="Arial" pitchFamily="34" charset="-120"/>
-              </a:rPr>
-              <a:t>←</a:t>
-            </a:r>
-            <a:endParaRPr lang="en-US" sz="2000" dirty="0"/>
-          </a:p>
-        </p:txBody>
-      </p:sp>
-      <p:sp>
-        <p:nvSpPr>
-          <p:cNvPr id="8" name="Shape 6"/>
-          <p:cNvSpPr/>
-          <p:nvPr/>
-        </p:nvSpPr>
-        <p:spPr>
-          <a:xfrm>
-            <a:off x="2679192" y="2011680"/>
-            <a:ext cx="1965960" cy="1554480"/>
-          </a:xfrm>
-          <a:prstGeom prst="roundRect">
-            <a:avLst>
-              <a:gd name="adj" fmla="val 5882"/>
-            </a:avLst>
-          </a:prstGeom>
-          <a:solidFill>
-            <a:srgbClr val="E6FBF7"/>
-          </a:solidFill>
-          <a:ln/>
-        </p:spPr>
-      </p:sp>
-      <p:sp>
-        <p:nvSpPr>
-          <p:cNvPr id="9" name="Shape 7"/>
-          <p:cNvSpPr/>
-          <p:nvPr/>
-        </p:nvSpPr>
-        <p:spPr>
-          <a:xfrm>
-            <a:off x="3392424" y="2148840"/>
-            <a:ext cx="502920" cy="502920"/>
-          </a:xfrm>
-          <a:prstGeom prst="ellipse">
-            <a:avLst/>
-          </a:prstGeom>
-          <a:solidFill>
-            <a:srgbClr val="00C2A8"/>
-          </a:solidFill>
-          <a:ln/>
-        </p:spPr>
+              <a:t>ההבדל: עוזר הקלדה מול שותף לביצוע משימה.</a:t>
+            </a:r>
+            <a:endParaRPr lang="en-US" sz="1700" dirty="0"/>
+          </a:p>
+        </p:txBody>
       </p:sp>
       <p:sp>
         <p:nvSpPr>
           <p:cNvPr id="10" name="Text 8"/>
-          <p:cNvSpPr/>
-          <p:nvPr/>
-        </p:nvSpPr>
-        <p:spPr>
-          <a:xfrm>
-            <a:off x="3392424" y="2148840"/>
-            <a:ext cx="502920" cy="502920"/>
-          </a:xfrm>
-          <a:prstGeom prst="rect">
-            <a:avLst/>
-          </a:prstGeom>
-          <a:noFill/>
-          <a:ln/>
-        </p:spPr>
-        <p:txBody>
-          <a:bodyPr wrap="square" lIns="0" tIns="0" rIns="0" bIns="0" rtlCol="0" anchor="ctr"/>
-          <a:lstStyle/>
-          <a:p>
-            <a:pPr algn="ctr" indent="0" marL="0">
-              <a:buNone/>
-            </a:pPr>
-            <a:r>
-              <a:rPr lang="en-US" sz="1400" b="1" dirty="0">
-                <a:solidFill>
-                  <a:srgbClr val="FFFFFF"/>
-                </a:solidFill>
-                <a:latin typeface="Arial" pitchFamily="34" charset="0"/>
-                <a:ea typeface="Arial" pitchFamily="34" charset="-122"/>
-                <a:cs typeface="Arial" pitchFamily="34" charset="-120"/>
-              </a:rPr>
-              <a:t>2</a:t>
-            </a:r>
-            <a:endParaRPr lang="en-US" sz="1400" dirty="0"/>
-          </a:p>
-        </p:txBody>
-      </p:sp>
-      <p:sp>
-        <p:nvSpPr>
-          <p:cNvPr id="11" name="Text 9"/>
-          <p:cNvSpPr/>
-          <p:nvPr/>
-        </p:nvSpPr>
-        <p:spPr>
-          <a:xfrm>
-            <a:off x="2679192" y="2880360"/>
-            <a:ext cx="1965960" cy="594360"/>
-          </a:xfrm>
-          <a:prstGeom prst="rect">
-            <a:avLst/>
-          </a:prstGeom>
-          <a:noFill/>
-          <a:ln/>
-        </p:spPr>
-        <p:txBody>
-          <a:bodyPr wrap="square" lIns="25400" tIns="25400" rIns="25400" bIns="25400" rtlCol="0" anchor="t"/>
-          <a:lstStyle/>
-          <a:p>
-            <a:pPr algn="ctr" indent="0" marL="0">
-              <a:buNone/>
-            </a:pPr>
-            <a:r>
-              <a:rPr lang="en-US" sz="1300" b="1" dirty="0">
-                <a:solidFill>
-                  <a:srgbClr val="1B1F3B"/>
-                </a:solidFill>
-                <a:latin typeface="Arial" pitchFamily="34" charset="0"/>
-                <a:ea typeface="Arial" pitchFamily="34" charset="-122"/>
-                <a:cs typeface="Arial" pitchFamily="34" charset="-120"/>
-              </a:rPr>
-              <a:t>הנחיה</a:t>
-            </a:r>
-            <a:endParaRPr lang="en-US" sz="1300" dirty="0"/>
-          </a:p>
-          <a:p>
-            <a:pPr algn="ctr" indent="0" marL="0">
-              <a:buNone/>
-            </a:pPr>
-            <a:r>
-              <a:rPr lang="en-US" sz="1300" b="1" dirty="0">
-                <a:solidFill>
-                  <a:srgbClr val="1B1F3B"/>
-                </a:solidFill>
-                <a:latin typeface="Arial" pitchFamily="34" charset="0"/>
-                <a:ea typeface="Arial" pitchFamily="34" charset="-122"/>
-                <a:cs typeface="Arial" pitchFamily="34" charset="-120"/>
-              </a:rPr>
-              <a:t>ברורה</a:t>
-            </a:r>
-            <a:endParaRPr lang="en-US" sz="1300" dirty="0"/>
-          </a:p>
-        </p:txBody>
-      </p:sp>
-      <p:sp>
-        <p:nvSpPr>
-          <p:cNvPr id="12" name="Text 10"/>
-          <p:cNvSpPr/>
-          <p:nvPr/>
-        </p:nvSpPr>
-        <p:spPr>
-          <a:xfrm>
-            <a:off x="4645152" y="2011680"/>
-            <a:ext cx="320040" cy="1554480"/>
-          </a:xfrm>
-          <a:prstGeom prst="rect">
-            <a:avLst/>
-          </a:prstGeom>
-          <a:noFill/>
-          <a:ln/>
-        </p:spPr>
-        <p:txBody>
-          <a:bodyPr wrap="square" lIns="0" tIns="0" rIns="0" bIns="0" rtlCol="0" anchor="ctr"/>
-          <a:lstStyle/>
-          <a:p>
-            <a:pPr algn="ctr" indent="0" marL="0">
-              <a:buNone/>
-            </a:pPr>
-            <a:r>
-              <a:rPr lang="en-US" sz="2000" b="1" dirty="0">
-                <a:solidFill>
-                  <a:srgbClr val="6B7280"/>
-                </a:solidFill>
-                <a:latin typeface="Arial" pitchFamily="34" charset="0"/>
-                <a:ea typeface="Arial" pitchFamily="34" charset="-122"/>
-                <a:cs typeface="Arial" pitchFamily="34" charset="-120"/>
-              </a:rPr>
-              <a:t>←</a:t>
-            </a:r>
-            <a:endParaRPr lang="en-US" sz="2000" dirty="0"/>
-          </a:p>
-        </p:txBody>
-      </p:sp>
-      <p:sp>
-        <p:nvSpPr>
-          <p:cNvPr id="13" name="Shape 11"/>
-          <p:cNvSpPr/>
-          <p:nvPr/>
-        </p:nvSpPr>
-        <p:spPr>
-          <a:xfrm>
-            <a:off x="4809744" y="2011680"/>
-            <a:ext cx="1965960" cy="1554480"/>
-          </a:xfrm>
-          <a:prstGeom prst="roundRect">
-            <a:avLst>
-              <a:gd name="adj" fmla="val 5882"/>
-            </a:avLst>
-          </a:prstGeom>
-          <a:solidFill>
-            <a:srgbClr val="E6FBF7"/>
-          </a:solidFill>
-          <a:ln/>
-        </p:spPr>
-      </p:sp>
-      <p:sp>
-        <p:nvSpPr>
-          <p:cNvPr id="14" name="Shape 12"/>
-          <p:cNvSpPr/>
-          <p:nvPr/>
-        </p:nvSpPr>
-        <p:spPr>
-          <a:xfrm>
-            <a:off x="5522976" y="2148840"/>
-            <a:ext cx="502920" cy="502920"/>
-          </a:xfrm>
-          <a:prstGeom prst="ellipse">
-            <a:avLst/>
-          </a:prstGeom>
-          <a:solidFill>
-            <a:srgbClr val="00C2A8"/>
-          </a:solidFill>
-          <a:ln/>
-        </p:spPr>
-      </p:sp>
-      <p:sp>
-        <p:nvSpPr>
-          <p:cNvPr id="15" name="Text 13"/>
-          <p:cNvSpPr/>
-          <p:nvPr/>
-        </p:nvSpPr>
-        <p:spPr>
-          <a:xfrm>
-            <a:off x="5522976" y="2148840"/>
-            <a:ext cx="502920" cy="502920"/>
-          </a:xfrm>
-          <a:prstGeom prst="rect">
-            <a:avLst/>
-          </a:prstGeom>
-          <a:noFill/>
-          <a:ln/>
-        </p:spPr>
-        <p:txBody>
-          <a:bodyPr wrap="square" lIns="0" tIns="0" rIns="0" bIns="0" rtlCol="0" anchor="ctr"/>
-          <a:lstStyle/>
-          <a:p>
-            <a:pPr algn="ctr" indent="0" marL="0">
-              <a:buNone/>
-            </a:pPr>
-            <a:r>
-              <a:rPr lang="en-US" sz="1400" b="1" dirty="0">
-                <a:solidFill>
-                  <a:srgbClr val="FFFFFF"/>
-                </a:solidFill>
-                <a:latin typeface="Arial" pitchFamily="34" charset="0"/>
-                <a:ea typeface="Arial" pitchFamily="34" charset="-122"/>
-                <a:cs typeface="Arial" pitchFamily="34" charset="-120"/>
-              </a:rPr>
-              <a:t>3</a:t>
-            </a:r>
-            <a:endParaRPr lang="en-US" sz="1400" dirty="0"/>
-          </a:p>
-        </p:txBody>
-      </p:sp>
-      <p:sp>
-        <p:nvSpPr>
-          <p:cNvPr id="16" name="Text 14"/>
-          <p:cNvSpPr/>
-          <p:nvPr/>
-        </p:nvSpPr>
-        <p:spPr>
-          <a:xfrm>
-            <a:off x="4809744" y="2880360"/>
-            <a:ext cx="1965960" cy="594360"/>
-          </a:xfrm>
-          <a:prstGeom prst="rect">
-            <a:avLst/>
-          </a:prstGeom>
-          <a:noFill/>
-          <a:ln/>
-        </p:spPr>
-        <p:txBody>
-          <a:bodyPr wrap="square" lIns="25400" tIns="25400" rIns="25400" bIns="25400" rtlCol="0" anchor="t"/>
-          <a:lstStyle/>
-          <a:p>
-            <a:pPr algn="ctr" indent="0" marL="0">
-              <a:buNone/>
-            </a:pPr>
-            <a:r>
-              <a:rPr lang="en-US" sz="1300" b="1" dirty="0">
-                <a:solidFill>
-                  <a:srgbClr val="1B1F3B"/>
-                </a:solidFill>
-                <a:latin typeface="Arial" pitchFamily="34" charset="0"/>
-                <a:ea typeface="Arial" pitchFamily="34" charset="-122"/>
-                <a:cs typeface="Arial" pitchFamily="34" charset="-120"/>
-              </a:rPr>
-              <a:t>תוכנית /</a:t>
-            </a:r>
-            <a:endParaRPr lang="en-US" sz="1300" dirty="0"/>
-          </a:p>
-          <a:p>
-            <a:pPr algn="ctr" indent="0" marL="0">
-              <a:buNone/>
-            </a:pPr>
-            <a:r>
-              <a:rPr lang="en-US" sz="1300" b="1" dirty="0">
-                <a:solidFill>
-                  <a:srgbClr val="1B1F3B"/>
-                </a:solidFill>
-                <a:latin typeface="Arial" pitchFamily="34" charset="0"/>
-                <a:ea typeface="Arial" pitchFamily="34" charset="-122"/>
-                <a:cs typeface="Arial" pitchFamily="34" charset="-120"/>
-              </a:rPr>
-              <a:t>פעולה</a:t>
-            </a:r>
-            <a:endParaRPr lang="en-US" sz="1300" dirty="0"/>
-          </a:p>
-        </p:txBody>
-      </p:sp>
-      <p:sp>
-        <p:nvSpPr>
-          <p:cNvPr id="17" name="Text 15"/>
-          <p:cNvSpPr/>
-          <p:nvPr/>
-        </p:nvSpPr>
-        <p:spPr>
-          <a:xfrm>
-            <a:off x="6775704" y="2011680"/>
-            <a:ext cx="320040" cy="1554480"/>
-          </a:xfrm>
-          <a:prstGeom prst="rect">
-            <a:avLst/>
-          </a:prstGeom>
-          <a:noFill/>
-          <a:ln/>
-        </p:spPr>
-        <p:txBody>
-          <a:bodyPr wrap="square" lIns="0" tIns="0" rIns="0" bIns="0" rtlCol="0" anchor="ctr"/>
-          <a:lstStyle/>
-          <a:p>
-            <a:pPr algn="ctr" indent="0" marL="0">
-              <a:buNone/>
-            </a:pPr>
-            <a:r>
-              <a:rPr lang="en-US" sz="2000" b="1" dirty="0">
-                <a:solidFill>
-                  <a:srgbClr val="6B7280"/>
-                </a:solidFill>
-                <a:latin typeface="Arial" pitchFamily="34" charset="0"/>
-                <a:ea typeface="Arial" pitchFamily="34" charset="-122"/>
-                <a:cs typeface="Arial" pitchFamily="34" charset="-120"/>
-              </a:rPr>
-              <a:t>←</a:t>
-            </a:r>
-            <a:endParaRPr lang="en-US" sz="2000" dirty="0"/>
-          </a:p>
-        </p:txBody>
-      </p:sp>
-      <p:sp>
-        <p:nvSpPr>
-          <p:cNvPr id="18" name="Shape 16"/>
-          <p:cNvSpPr/>
-          <p:nvPr/>
-        </p:nvSpPr>
-        <p:spPr>
-          <a:xfrm>
-            <a:off x="6940296" y="2011680"/>
-            <a:ext cx="1965960" cy="1554480"/>
-          </a:xfrm>
-          <a:prstGeom prst="roundRect">
-            <a:avLst>
-              <a:gd name="adj" fmla="val 5882"/>
-            </a:avLst>
-          </a:prstGeom>
-          <a:solidFill>
-            <a:srgbClr val="FFF6E6"/>
-          </a:solidFill>
-          <a:ln/>
-        </p:spPr>
-      </p:sp>
-      <p:sp>
-        <p:nvSpPr>
-          <p:cNvPr id="19" name="Shape 17"/>
-          <p:cNvSpPr/>
-          <p:nvPr/>
-        </p:nvSpPr>
-        <p:spPr>
-          <a:xfrm>
-            <a:off x="7653528" y="2148840"/>
-            <a:ext cx="502920" cy="502920"/>
-          </a:xfrm>
-          <a:prstGeom prst="ellipse">
-            <a:avLst/>
-          </a:prstGeom>
-          <a:solidFill>
-            <a:srgbClr val="FFB000"/>
-          </a:solidFill>
-          <a:ln/>
-        </p:spPr>
-      </p:sp>
-      <p:sp>
-        <p:nvSpPr>
-          <p:cNvPr id="20" name="Text 18"/>
-          <p:cNvSpPr/>
-          <p:nvPr/>
-        </p:nvSpPr>
-        <p:spPr>
-          <a:xfrm>
-            <a:off x="7653528" y="2148840"/>
-            <a:ext cx="502920" cy="502920"/>
-          </a:xfrm>
-          <a:prstGeom prst="rect">
-            <a:avLst/>
-          </a:prstGeom>
-          <a:noFill/>
-          <a:ln/>
-        </p:spPr>
-        <p:txBody>
-          <a:bodyPr wrap="square" lIns="0" tIns="0" rIns="0" bIns="0" rtlCol="0" anchor="ctr"/>
-          <a:lstStyle/>
-          <a:p>
-            <a:pPr algn="ctr" indent="0" marL="0">
-              <a:buNone/>
-            </a:pPr>
-            <a:r>
-              <a:rPr lang="en-US" sz="1400" b="1" dirty="0">
-                <a:solidFill>
-                  <a:srgbClr val="FFFFFF"/>
-                </a:solidFill>
-                <a:latin typeface="Arial" pitchFamily="34" charset="0"/>
-                <a:ea typeface="Arial" pitchFamily="34" charset="-122"/>
-                <a:cs typeface="Arial" pitchFamily="34" charset="-120"/>
-              </a:rPr>
-              <a:t>4</a:t>
-            </a:r>
-            <a:endParaRPr lang="en-US" sz="1400" dirty="0"/>
-          </a:p>
-        </p:txBody>
-      </p:sp>
-      <p:sp>
-        <p:nvSpPr>
-          <p:cNvPr id="21" name="Text 19"/>
-          <p:cNvSpPr/>
-          <p:nvPr/>
-        </p:nvSpPr>
-        <p:spPr>
-          <a:xfrm>
-            <a:off x="6940296" y="2880360"/>
-            <a:ext cx="1965960" cy="594360"/>
-          </a:xfrm>
-          <a:prstGeom prst="rect">
-            <a:avLst/>
-          </a:prstGeom>
-          <a:noFill/>
-          <a:ln/>
-        </p:spPr>
-        <p:txBody>
-          <a:bodyPr wrap="square" lIns="25400" tIns="25400" rIns="25400" bIns="25400" rtlCol="0" anchor="t"/>
-          <a:lstStyle/>
-          <a:p>
-            <a:pPr algn="ctr" indent="0" marL="0">
-              <a:buNone/>
-            </a:pPr>
-            <a:r>
-              <a:rPr lang="en-US" sz="1300" b="1" dirty="0">
-                <a:solidFill>
-                  <a:srgbClr val="1B1F3B"/>
-                </a:solidFill>
-                <a:latin typeface="Arial" pitchFamily="34" charset="0"/>
-                <a:ea typeface="Arial" pitchFamily="34" charset="-122"/>
-                <a:cs typeface="Arial" pitchFamily="34" charset="-120"/>
-              </a:rPr>
-              <a:t>בדיקת</a:t>
-            </a:r>
-            <a:endParaRPr lang="en-US" sz="1300" dirty="0"/>
-          </a:p>
-          <a:p>
-            <a:pPr algn="ctr" indent="0" marL="0">
-              <a:buNone/>
-            </a:pPr>
-            <a:r>
-              <a:rPr lang="en-US" sz="1300" b="1" dirty="0">
-                <a:solidFill>
-                  <a:srgbClr val="1B1F3B"/>
-                </a:solidFill>
-                <a:latin typeface="Arial" pitchFamily="34" charset="0"/>
-                <a:ea typeface="Arial" pitchFamily="34" charset="-122"/>
-                <a:cs typeface="Arial" pitchFamily="34" charset="-120"/>
-              </a:rPr>
-              <a:t>Diff</a:t>
-            </a:r>
-            <a:endParaRPr lang="en-US" sz="1300" dirty="0"/>
-          </a:p>
-        </p:txBody>
-      </p:sp>
-      <p:sp>
-        <p:nvSpPr>
-          <p:cNvPr id="22" name="Text 20"/>
-          <p:cNvSpPr/>
-          <p:nvPr/>
-        </p:nvSpPr>
-        <p:spPr>
-          <a:xfrm>
-            <a:off x="8906256" y="2011680"/>
-            <a:ext cx="320040" cy="1554480"/>
-          </a:xfrm>
-          <a:prstGeom prst="rect">
-            <a:avLst/>
-          </a:prstGeom>
-          <a:noFill/>
-          <a:ln/>
-        </p:spPr>
-        <p:txBody>
-          <a:bodyPr wrap="square" lIns="0" tIns="0" rIns="0" bIns="0" rtlCol="0" anchor="ctr"/>
-          <a:lstStyle/>
-          <a:p>
-            <a:pPr algn="ctr" indent="0" marL="0">
-              <a:buNone/>
-            </a:pPr>
-            <a:r>
-              <a:rPr lang="en-US" sz="2000" b="1" dirty="0">
-                <a:solidFill>
-                  <a:srgbClr val="6B7280"/>
-                </a:solidFill>
-                <a:latin typeface="Arial" pitchFamily="34" charset="0"/>
-                <a:ea typeface="Arial" pitchFamily="34" charset="-122"/>
-                <a:cs typeface="Arial" pitchFamily="34" charset="-120"/>
-              </a:rPr>
-              <a:t>←</a:t>
-            </a:r>
-            <a:endParaRPr lang="en-US" sz="2000" dirty="0"/>
-          </a:p>
-        </p:txBody>
-      </p:sp>
-      <p:sp>
-        <p:nvSpPr>
-          <p:cNvPr id="23" name="Shape 21"/>
-          <p:cNvSpPr/>
-          <p:nvPr/>
-        </p:nvSpPr>
-        <p:spPr>
-          <a:xfrm>
-            <a:off x="9070848" y="2011680"/>
-            <a:ext cx="1965960" cy="1554480"/>
-          </a:xfrm>
-          <a:prstGeom prst="roundRect">
-            <a:avLst>
-              <a:gd name="adj" fmla="val 5882"/>
-            </a:avLst>
-          </a:prstGeom>
-          <a:solidFill>
-            <a:srgbClr val="E6FBF7"/>
-          </a:solidFill>
-          <a:ln/>
-        </p:spPr>
-      </p:sp>
-      <p:sp>
-        <p:nvSpPr>
-          <p:cNvPr id="24" name="Shape 22"/>
-          <p:cNvSpPr/>
-          <p:nvPr/>
-        </p:nvSpPr>
-        <p:spPr>
-          <a:xfrm>
-            <a:off x="9784080" y="2148840"/>
-            <a:ext cx="502920" cy="502920"/>
-          </a:xfrm>
-          <a:prstGeom prst="ellipse">
-            <a:avLst/>
-          </a:prstGeom>
-          <a:solidFill>
-            <a:srgbClr val="00C2A8"/>
-          </a:solidFill>
-          <a:ln/>
-        </p:spPr>
-      </p:sp>
-      <p:sp>
-        <p:nvSpPr>
-          <p:cNvPr id="25" name="Text 23"/>
-          <p:cNvSpPr/>
-          <p:nvPr/>
-        </p:nvSpPr>
-        <p:spPr>
-          <a:xfrm>
-            <a:off x="9784080" y="2148840"/>
-            <a:ext cx="502920" cy="502920"/>
-          </a:xfrm>
-          <a:prstGeom prst="rect">
-            <a:avLst/>
-          </a:prstGeom>
-          <a:noFill/>
-          <a:ln/>
-        </p:spPr>
-        <p:txBody>
-          <a:bodyPr wrap="square" lIns="0" tIns="0" rIns="0" bIns="0" rtlCol="0" anchor="ctr"/>
-          <a:lstStyle/>
-          <a:p>
-            <a:pPr algn="ctr" indent="0" marL="0">
-              <a:buNone/>
-            </a:pPr>
-            <a:r>
-              <a:rPr lang="en-US" sz="1400" b="1" dirty="0">
-                <a:solidFill>
-                  <a:srgbClr val="FFFFFF"/>
-                </a:solidFill>
-                <a:latin typeface="Arial" pitchFamily="34" charset="0"/>
-                <a:ea typeface="Arial" pitchFamily="34" charset="-122"/>
-                <a:cs typeface="Arial" pitchFamily="34" charset="-120"/>
-              </a:rPr>
-              <a:t>5</a:t>
-            </a:r>
-            <a:endParaRPr lang="en-US" sz="1400" dirty="0"/>
-          </a:p>
-        </p:txBody>
-      </p:sp>
-      <p:sp>
-        <p:nvSpPr>
-          <p:cNvPr id="26" name="Text 24"/>
-          <p:cNvSpPr/>
-          <p:nvPr/>
-        </p:nvSpPr>
-        <p:spPr>
-          <a:xfrm>
-            <a:off x="9070848" y="2880360"/>
-            <a:ext cx="1965960" cy="594360"/>
-          </a:xfrm>
-          <a:prstGeom prst="rect">
-            <a:avLst/>
-          </a:prstGeom>
-          <a:noFill/>
-          <a:ln/>
-        </p:spPr>
-        <p:txBody>
-          <a:bodyPr wrap="square" lIns="25400" tIns="25400" rIns="25400" bIns="25400" rtlCol="0" anchor="t"/>
-          <a:lstStyle/>
-          <a:p>
-            <a:pPr algn="ctr" indent="0" marL="0">
-              <a:buNone/>
-            </a:pPr>
-            <a:r>
-              <a:rPr lang="en-US" sz="1300" b="1" dirty="0">
-                <a:solidFill>
-                  <a:srgbClr val="1B1F3B"/>
-                </a:solidFill>
-                <a:latin typeface="Arial" pitchFamily="34" charset="0"/>
-                <a:ea typeface="Arial" pitchFamily="34" charset="-122"/>
-                <a:cs typeface="Arial" pitchFamily="34" charset="-120"/>
-              </a:rPr>
-              <a:t>צעד</a:t>
-            </a:r>
-            <a:endParaRPr lang="en-US" sz="1300" dirty="0"/>
-          </a:p>
-          <a:p>
-            <a:pPr algn="ctr" indent="0" marL="0">
-              <a:buNone/>
-            </a:pPr>
-            <a:r>
-              <a:rPr lang="en-US" sz="1300" b="1" dirty="0">
-                <a:solidFill>
-                  <a:srgbClr val="1B1F3B"/>
-                </a:solidFill>
-                <a:latin typeface="Arial" pitchFamily="34" charset="0"/>
-                <a:ea typeface="Arial" pitchFamily="34" charset="-122"/>
-                <a:cs typeface="Arial" pitchFamily="34" charset="-120"/>
-              </a:rPr>
-              <a:t>הבא</a:t>
-            </a:r>
-            <a:endParaRPr lang="en-US" sz="1300" dirty="0"/>
-          </a:p>
-        </p:txBody>
-      </p:sp>
-      <p:sp>
-        <p:nvSpPr>
-          <p:cNvPr id="27" name="Text 25"/>
-          <p:cNvSpPr/>
-          <p:nvPr/>
-        </p:nvSpPr>
-        <p:spPr>
-          <a:xfrm>
-            <a:off x="548640" y="4023360"/>
-            <a:ext cx="11091672" cy="457200"/>
-          </a:xfrm>
-          <a:prstGeom prst="rect">
-            <a:avLst/>
-          </a:prstGeom>
-          <a:noFill/>
-          <a:ln/>
-        </p:spPr>
-        <p:txBody>
-          <a:bodyPr wrap="square" lIns="0" tIns="0" rIns="0" bIns="0" rtlCol="0" anchor="ctr"/>
-          <a:lstStyle/>
-          <a:p>
-            <a:pPr rtl="1" algn="r" indent="0" marL="0">
-              <a:buNone/>
-            </a:pPr>
-            <a:r>
-              <a:rPr lang="en-US" sz="1500" i="1" dirty="0">
-                <a:solidFill>
-                  <a:srgbClr val="FFB000"/>
-                </a:solidFill>
-                <a:latin typeface="Calibri" pitchFamily="34" charset="0"/>
-                <a:ea typeface="Calibri" pitchFamily="34" charset="-122"/>
-                <a:cs typeface="Calibri" pitchFamily="34" charset="-120"/>
-              </a:rPr>
-              <a:t>בדיקת ה-Diff היא לא אופציונלית — זה השלב שבו אתם עדיין בשליטה</a:t>
-            </a:r>
-            <a:endParaRPr lang="en-US" sz="1500" dirty="0"/>
-          </a:p>
-        </p:txBody>
-      </p:sp>
-      <p:sp>
-        <p:nvSpPr>
-          <p:cNvPr id="28" name="Text 26"/>
-          <p:cNvSpPr/>
-          <p:nvPr/>
-        </p:nvSpPr>
-        <p:spPr>
-          <a:xfrm>
-            <a:off x="548640" y="4937760"/>
-            <a:ext cx="11091672" cy="457200"/>
-          </a:xfrm>
-          <a:prstGeom prst="rect">
-            <a:avLst/>
-          </a:prstGeom>
-          <a:noFill/>
-          <a:ln/>
-        </p:spPr>
-        <p:txBody>
-          <a:bodyPr wrap="square" lIns="0" tIns="0" rIns="0" bIns="0" rtlCol="0" anchor="ctr"/>
-          <a:lstStyle/>
-          <a:p>
-            <a:pPr rtl="1" algn="r" indent="0" marL="0">
-              <a:buNone/>
-            </a:pPr>
-            <a:r>
-              <a:rPr lang="en-US" sz="1600" b="1" dirty="0">
-                <a:solidFill>
-                  <a:srgbClr val="00C2A8"/>
-                </a:solidFill>
-                <a:latin typeface="Arial" pitchFamily="34" charset="0"/>
-                <a:ea typeface="Arial" pitchFamily="34" charset="-122"/>
-                <a:cs typeface="Arial" pitchFamily="34" charset="-120"/>
-              </a:rPr>
-              <a:t>זה בדיוק שלבים 4-6 מה-Workflow שלמדנו בשיעור 1</a:t>
-            </a:r>
-            <a:endParaRPr lang="en-US" sz="1600" dirty="0"/>
-          </a:p>
-        </p:txBody>
-      </p:sp>
-      <p:sp>
-        <p:nvSpPr>
-          <p:cNvPr id="29" name="Text 27"/>
           <p:cNvSpPr/>
           <p:nvPr/>
         </p:nvSpPr>
@@ -5011,7 +6968,7 @@
     <p:bg>
       <p:bgPr>
         <a:solidFill>
-          <a:srgbClr val="E6FBF7"/>
+          <a:srgbClr val="FFFFFF"/>
         </a:solidFill>
       </p:bgPr>
     </p:bg>
@@ -5062,7 +7019,7 @@
                 <a:ea typeface="Arial" pitchFamily="34" charset="-122"/>
                 <a:cs typeface="Arial" pitchFamily="34" charset="-120"/>
               </a:rPr>
-              <a:t>אתם כבר עובדים ליד AI</a:t>
+              <a:t>המרוץ לבנצ'מארק</a:t>
             </a:r>
             <a:endParaRPr lang="en-US" sz="3000" dirty="0"/>
           </a:p>
@@ -5070,33 +7027,91 @@
       </p:sp>
       <p:sp>
         <p:nvSpPr>
-          <p:cNvPr id="3" name="Text 1"/>
-          <p:cNvSpPr/>
-          <p:nvPr/>
-        </p:nvSpPr>
-        <p:spPr>
-          <a:xfrm>
-            <a:off x="548640" y="1737360"/>
-            <a:ext cx="11091672" cy="2011680"/>
-          </a:xfrm>
-          <a:prstGeom prst="rect">
-            <a:avLst/>
-          </a:prstGeom>
-          <a:noFill/>
-          <a:ln/>
-        </p:spPr>
-        <p:txBody>
-          <a:bodyPr wrap="square" lIns="0" tIns="0" rIns="0" bIns="0" rtlCol="0" anchor="ctr"/>
-          <a:lstStyle/>
-          <a:p>
-            <a:pPr algn="r" indent="0" marL="0">
-              <a:spcAft>
-                <a:spcPts val="1400"/>
-              </a:spcAft>
-              <a:buNone/>
-            </a:pPr>
-            <a:r>
-              <a:rPr lang="en-US" sz="1700" dirty="0">
+          <p:cNvPr id="3" name="Shape 1"/>
+          <p:cNvSpPr/>
+          <p:nvPr/>
+        </p:nvSpPr>
+        <p:spPr>
+          <a:xfrm>
+            <a:off x="6336792" y="1737360"/>
+            <a:ext cx="5120640" cy="2103120"/>
+          </a:xfrm>
+          <a:prstGeom prst="roundRect">
+            <a:avLst>
+              <a:gd name="adj" fmla="val 4348"/>
+            </a:avLst>
+          </a:prstGeom>
+          <a:solidFill>
+            <a:srgbClr val="E6FBF7"/>
+          </a:solidFill>
+          <a:ln/>
+        </p:spPr>
+      </p:sp>
+      <p:sp>
+        <p:nvSpPr>
+          <p:cNvPr id="4" name="Text 2"/>
+          <p:cNvSpPr/>
+          <p:nvPr/>
+        </p:nvSpPr>
+        <p:spPr>
+          <a:xfrm>
+            <a:off x="6336792" y="1874520"/>
+            <a:ext cx="5120640" cy="1417320"/>
+          </a:xfrm>
+          <a:prstGeom prst="rect">
+            <a:avLst/>
+          </a:prstGeom>
+          <a:noFill/>
+          <a:ln/>
+        </p:spPr>
+        <p:txBody>
+          <a:bodyPr wrap="square" lIns="0" tIns="0" rIns="0" bIns="0" rtlCol="0" anchor="b"/>
+          <a:lstStyle/>
+          <a:p>
+            <a:pPr algn="ctr" indent="0" marL="0">
+              <a:buNone/>
+            </a:pPr>
+            <a:r>
+              <a:rPr lang="en-US" sz="4400" b="1" dirty="0">
+                <a:solidFill>
+                  <a:srgbClr val="00C2A8"/>
+                </a:solidFill>
+                <a:latin typeface="Arial" pitchFamily="34" charset="0"/>
+                <a:ea typeface="Arial" pitchFamily="34" charset="-122"/>
+                <a:cs typeface="Arial" pitchFamily="34" charset="-120"/>
+              </a:rPr>
+              <a:t>80.8%</a:t>
+            </a:r>
+            <a:endParaRPr lang="en-US" sz="4400" dirty="0"/>
+          </a:p>
+        </p:txBody>
+      </p:sp>
+      <p:sp>
+        <p:nvSpPr>
+          <p:cNvPr id="5" name="Text 3"/>
+          <p:cNvSpPr/>
+          <p:nvPr/>
+        </p:nvSpPr>
+        <p:spPr>
+          <a:xfrm>
+            <a:off x="6473952" y="3246120"/>
+            <a:ext cx="4846320" cy="548640"/>
+          </a:xfrm>
+          <a:prstGeom prst="rect">
+            <a:avLst/>
+          </a:prstGeom>
+          <a:noFill/>
+          <a:ln/>
+        </p:spPr>
+        <p:txBody>
+          <a:bodyPr wrap="square" lIns="0" tIns="0" rIns="0" bIns="0" rtlCol="0" anchor="t"/>
+          <a:lstStyle/>
+          <a:p>
+            <a:pPr rtl="1" algn="ctr" indent="0" marL="0">
+              <a:buNone/>
+            </a:pPr>
+            <a:r>
+              <a:rPr lang="en-US" sz="1250" dirty="0">
                 <a:solidFill>
                   <a:srgbClr val="1B1F3B"/>
                 </a:solidFill>
@@ -5104,19 +7119,99 @@
                 <a:ea typeface="Calibri" pitchFamily="34" charset="-122"/>
                 <a:cs typeface="Calibri" pitchFamily="34" charset="-120"/>
               </a:rPr>
-              <a:t>• רובכם כבר משתמשים ב-ChatGPT/Claude לכתיבת קוד עזר למחקר</a:t>
-            </a:r>
-            <a:endParaRPr lang="en-US" sz="1700" dirty="0"/>
-          </a:p>
-          <a:p>
-            <a:pPr algn="r" indent="0" marL="0">
-              <a:spcAft>
-                <a:spcPts val="1400"/>
-              </a:spcAft>
-              <a:buNone/>
-            </a:pPr>
-            <a:r>
-              <a:rPr lang="en-US" sz="1700" dirty="0">
+              <a:t>Claude Code ב-SWE-bench Verified</a:t>
+            </a:r>
+            <a:endParaRPr lang="en-US" sz="1250" dirty="0"/>
+          </a:p>
+        </p:txBody>
+      </p:sp>
+      <p:sp>
+        <p:nvSpPr>
+          <p:cNvPr id="6" name="Shape 4"/>
+          <p:cNvSpPr/>
+          <p:nvPr/>
+        </p:nvSpPr>
+        <p:spPr>
+          <a:xfrm>
+            <a:off x="548640" y="1737360"/>
+            <a:ext cx="5120640" cy="2103120"/>
+          </a:xfrm>
+          <a:prstGeom prst="roundRect">
+            <a:avLst>
+              <a:gd name="adj" fmla="val 4348"/>
+            </a:avLst>
+          </a:prstGeom>
+          <a:solidFill>
+            <a:srgbClr val="E6FBF7"/>
+          </a:solidFill>
+          <a:ln/>
+        </p:spPr>
+      </p:sp>
+      <p:sp>
+        <p:nvSpPr>
+          <p:cNvPr id="7" name="Text 5"/>
+          <p:cNvSpPr/>
+          <p:nvPr/>
+        </p:nvSpPr>
+        <p:spPr>
+          <a:xfrm>
+            <a:off x="548640" y="1874520"/>
+            <a:ext cx="5120640" cy="1417320"/>
+          </a:xfrm>
+          <a:prstGeom prst="rect">
+            <a:avLst/>
+          </a:prstGeom>
+          <a:noFill/>
+          <a:ln/>
+        </p:spPr>
+        <p:txBody>
+          <a:bodyPr wrap="square" lIns="0" tIns="0" rIns="0" bIns="0" rtlCol="0" anchor="b"/>
+          <a:lstStyle/>
+          <a:p>
+            <a:pPr algn="ctr" indent="0" marL="0">
+              <a:buNone/>
+            </a:pPr>
+            <a:r>
+              <a:rPr lang="en-US" sz="3600" b="1" dirty="0">
+                <a:solidFill>
+                  <a:srgbClr val="00C2A8"/>
+                </a:solidFill>
+                <a:latin typeface="Arial" pitchFamily="34" charset="0"/>
+                <a:ea typeface="Arial" pitchFamily="34" charset="-122"/>
+                <a:cs typeface="Arial" pitchFamily="34" charset="-120"/>
+              </a:rPr>
+              <a:t>78.9-83.1%</a:t>
+            </a:r>
+            <a:endParaRPr lang="en-US" sz="3600" dirty="0"/>
+          </a:p>
+        </p:txBody>
+      </p:sp>
+      <p:sp>
+        <p:nvSpPr>
+          <p:cNvPr id="8" name="Text 6"/>
+          <p:cNvSpPr/>
+          <p:nvPr/>
+        </p:nvSpPr>
+        <p:spPr>
+          <a:xfrm>
+            <a:off x="685800" y="3246120"/>
+            <a:ext cx="4846320" cy="548640"/>
+          </a:xfrm>
+          <a:prstGeom prst="rect">
+            <a:avLst/>
+          </a:prstGeom>
+          <a:noFill/>
+          <a:ln/>
+        </p:spPr>
+        <p:txBody>
+          <a:bodyPr wrap="square" lIns="0" tIns="0" rIns="0" bIns="0" rtlCol="0" anchor="t"/>
+          <a:lstStyle/>
+          <a:p>
+            <a:pPr rtl="1" algn="ctr" indent="0" marL="0">
+              <a:buNone/>
+            </a:pPr>
+            <a:r>
+              <a:rPr lang="en-US" sz="1250" dirty="0">
                 <a:solidFill>
                   <a:srgbClr val="1B1F3B"/>
                 </a:solidFill>
@@ -5124,96 +7219,174 @@
                 <a:ea typeface="Calibri" pitchFamily="34" charset="-122"/>
                 <a:cs typeface="Calibri" pitchFamily="34" charset="-120"/>
               </a:rPr>
-              <a:t>• מה עשיתם עם הקוד שקיבלתם? העתקתם-הדבקתם לקובץ</a:t>
-            </a:r>
-            <a:endParaRPr lang="en-US" sz="1700" dirty="0"/>
-          </a:p>
-          <a:p>
-            <a:pPr algn="r" indent="0" marL="0">
-              <a:spcAft>
-                <a:spcPts val="1400"/>
-              </a:spcAft>
-              <a:buNone/>
-            </a:pPr>
-            <a:r>
-              <a:rPr lang="en-US" sz="1700" dirty="0">
+              <a:t>Claude Code ב-Terminal-Bench 2.1 (טווח לפי מודל)</a:t>
+            </a:r>
+            <a:endParaRPr lang="en-US" sz="1250" dirty="0"/>
+          </a:p>
+        </p:txBody>
+      </p:sp>
+      <p:sp>
+        <p:nvSpPr>
+          <p:cNvPr id="9" name="Shape 7"/>
+          <p:cNvSpPr/>
+          <p:nvPr/>
+        </p:nvSpPr>
+        <p:spPr>
+          <a:xfrm>
+            <a:off x="548640" y="4114800"/>
+            <a:ext cx="11091672" cy="1645920"/>
+          </a:xfrm>
+          <a:prstGeom prst="roundRect">
+            <a:avLst>
+              <a:gd name="adj" fmla="val 5556"/>
+            </a:avLst>
+          </a:prstGeom>
+          <a:solidFill>
+            <a:srgbClr val="FFF6E6"/>
+          </a:solidFill>
+          <a:ln/>
+        </p:spPr>
+      </p:sp>
+      <p:sp>
+        <p:nvSpPr>
+          <p:cNvPr id="10" name="Shape 8"/>
+          <p:cNvSpPr/>
+          <p:nvPr/>
+        </p:nvSpPr>
+        <p:spPr>
+          <a:xfrm>
+            <a:off x="10332720" y="4297680"/>
+            <a:ext cx="457200" cy="457200"/>
+          </a:xfrm>
+          <a:prstGeom prst="ellipse">
+            <a:avLst/>
+          </a:prstGeom>
+          <a:solidFill>
+            <a:srgbClr val="FFB000"/>
+          </a:solidFill>
+          <a:ln/>
+        </p:spPr>
+      </p:sp>
+      <p:sp>
+        <p:nvSpPr>
+          <p:cNvPr id="11" name="Text 9"/>
+          <p:cNvSpPr/>
+          <p:nvPr/>
+        </p:nvSpPr>
+        <p:spPr>
+          <a:xfrm>
+            <a:off x="10332720" y="4297680"/>
+            <a:ext cx="457200" cy="457200"/>
+          </a:xfrm>
+          <a:prstGeom prst="rect">
+            <a:avLst/>
+          </a:prstGeom>
+          <a:noFill/>
+          <a:ln/>
+        </p:spPr>
+        <p:txBody>
+          <a:bodyPr wrap="square" lIns="0" tIns="0" rIns="0" bIns="0" rtlCol="0" anchor="ctr"/>
+          <a:lstStyle/>
+          <a:p>
+            <a:pPr algn="ctr" indent="0" marL="0">
+              <a:buNone/>
+            </a:pPr>
+            <a:r>
+              <a:rPr lang="en-US" sz="1400" b="1" dirty="0">
+                <a:solidFill>
+                  <a:srgbClr val="FFFFFF"/>
+                </a:solidFill>
+                <a:latin typeface="Arial" pitchFamily="34" charset="0"/>
+                <a:ea typeface="Arial" pitchFamily="34" charset="-122"/>
+                <a:cs typeface="Arial" pitchFamily="34" charset="-120"/>
+              </a:rPr>
+              <a:t>!</a:t>
+            </a:r>
+            <a:endParaRPr lang="en-US" sz="1400" dirty="0"/>
+          </a:p>
+        </p:txBody>
+      </p:sp>
+      <p:sp>
+        <p:nvSpPr>
+          <p:cNvPr id="12" name="Text 10"/>
+          <p:cNvSpPr/>
+          <p:nvPr/>
+        </p:nvSpPr>
+        <p:spPr>
+          <a:xfrm>
+            <a:off x="822960" y="4251960"/>
+            <a:ext cx="9326880" cy="1371600"/>
+          </a:xfrm>
+          <a:prstGeom prst="rect">
+            <a:avLst/>
+          </a:prstGeom>
+          <a:noFill/>
+          <a:ln/>
+        </p:spPr>
+        <p:txBody>
+          <a:bodyPr wrap="square" lIns="0" tIns="0" rIns="0" bIns="0" rtlCol="0" anchor="ctr"/>
+          <a:lstStyle/>
+          <a:p>
+            <a:pPr rtl="1" algn="r" indent="0" marL="0">
+              <a:buNone/>
+            </a:pPr>
+            <a:r>
+              <a:rPr lang="en-US" sz="1400" b="1" dirty="0">
                 <a:solidFill>
                   <a:srgbClr val="1B1F3B"/>
+                </a:solidFill>
+                <a:latin typeface="Arial" pitchFamily="34" charset="0"/>
+                <a:ea typeface="Arial" pitchFamily="34" charset="-122"/>
+                <a:cs typeface="Arial" pitchFamily="34" charset="-120"/>
+              </a:rPr>
+              <a:t>אזהרת מתודולוגיה: יש 5 גרסאות שונות של SWE-bench, ושונות של 10-20 נקודות בין הרצות זהות. תמיד בדקו מתודולוגיה לפני שסומכים על מספר בנצ'מארק בודד.</a:t>
+            </a:r>
+            <a:endParaRPr lang="en-US" sz="1400" dirty="0"/>
+          </a:p>
+        </p:txBody>
+      </p:sp>
+      <p:sp>
+        <p:nvSpPr>
+          <p:cNvPr id="13" name="Text 11"/>
+          <p:cNvSpPr/>
+          <p:nvPr/>
+        </p:nvSpPr>
+        <p:spPr>
+          <a:xfrm>
+            <a:off x="548640" y="6172200"/>
+            <a:ext cx="11091672" cy="274320"/>
+          </a:xfrm>
+          <a:prstGeom prst="rect">
+            <a:avLst/>
+          </a:prstGeom>
+          <a:noFill/>
+          <a:ln/>
+        </p:spPr>
+        <p:txBody>
+          <a:bodyPr wrap="square" lIns="0" tIns="0" rIns="0" bIns="0" rtlCol="0" anchor="ctr"/>
+          <a:lstStyle/>
+          <a:p>
+            <a:pPr rtl="1" algn="r" indent="0" marL="0">
+              <a:buNone/>
+            </a:pPr>
+            <a:r>
+              <a:rPr lang="en-US" sz="1000" i="1" dirty="0">
+                <a:solidFill>
+                  <a:srgbClr val="6B7280"/>
                 </a:solidFill>
                 <a:latin typeface="Calibri" pitchFamily="34" charset="0"/>
                 <a:ea typeface="Calibri" pitchFamily="34" charset="-122"/>
                 <a:cs typeface="Calibri" pitchFamily="34" charset="-120"/>
               </a:rPr>
-              <a:t>• כלי אג'נטי עושה בדיוק את זה — רק כותב ישירות, וקורא את הפרויקט קודם</a:t>
-            </a:r>
-            <a:endParaRPr lang="en-US" sz="1700" dirty="0"/>
-          </a:p>
-        </p:txBody>
-      </p:sp>
-      <p:sp>
-        <p:nvSpPr>
-          <p:cNvPr id="4" name="Shape 2"/>
-          <p:cNvSpPr/>
-          <p:nvPr/>
-        </p:nvSpPr>
-        <p:spPr>
-          <a:xfrm>
-            <a:off x="548640" y="4023360"/>
-            <a:ext cx="11091672" cy="1188720"/>
-          </a:xfrm>
-          <a:prstGeom prst="roundRect">
-            <a:avLst>
-              <a:gd name="adj" fmla="val 7692"/>
-            </a:avLst>
-          </a:prstGeom>
-          <a:solidFill>
-            <a:srgbClr val="1B1F3B"/>
-          </a:solidFill>
-          <a:ln/>
-        </p:spPr>
-      </p:sp>
-      <p:sp>
-        <p:nvSpPr>
-          <p:cNvPr id="5" name="Text 3"/>
-          <p:cNvSpPr/>
-          <p:nvPr/>
-        </p:nvSpPr>
-        <p:spPr>
-          <a:xfrm>
-            <a:off x="822960" y="4023360"/>
-            <a:ext cx="10543032" cy="1188720"/>
-          </a:xfrm>
-          <a:prstGeom prst="rect">
-            <a:avLst/>
-          </a:prstGeom>
-          <a:noFill/>
-          <a:ln/>
-        </p:spPr>
-        <p:txBody>
-          <a:bodyPr wrap="square" lIns="0" tIns="0" rIns="0" bIns="0" rtlCol="0" anchor="ctr"/>
-          <a:lstStyle/>
-          <a:p>
-            <a:pPr rtl="1" algn="r" indent="0" marL="0">
-              <a:buNone/>
-            </a:pPr>
-            <a:r>
-              <a:rPr lang="en-US" sz="1800" b="1" i="1" dirty="0">
-                <a:solidFill>
-                  <a:srgbClr val="00C2A8"/>
-                </a:solidFill>
-                <a:latin typeface="Arial" pitchFamily="34" charset="0"/>
-                <a:ea typeface="Arial" pitchFamily="34" charset="-122"/>
-                <a:cs typeface="Arial" pitchFamily="34" charset="-120"/>
-              </a:rPr>
-              <a:t>זה לא כלי חדש לגמרי — זה שדרוג למשהו שאתם כבר עושים</a:t>
-            </a:r>
-            <a:endParaRPr lang="en-US" sz="1800" dirty="0"/>
-          </a:p>
-        </p:txBody>
-      </p:sp>
-      <p:sp>
-        <p:nvSpPr>
-          <p:cNvPr id="6" name="Text 4"/>
+              <a:t>מקור: DigitalApplied, MorphLLM — 2026</a:t>
+            </a:r>
+            <a:endParaRPr lang="en-US" sz="1000" dirty="0"/>
+          </a:p>
+        </p:txBody>
+      </p:sp>
+      <p:sp>
+        <p:nvSpPr>
+          <p:cNvPr id="14" name="Text 12"/>
           <p:cNvSpPr/>
           <p:nvPr/>
         </p:nvSpPr>
@@ -5315,7 +7488,7 @@
                 <a:ea typeface="Arial" pitchFamily="34" charset="-122"/>
                 <a:cs typeface="Arial" pitchFamily="34" charset="-120"/>
               </a:rPr>
-              <a:t>כלים חינמיים להתחלה</a:t>
+              <a:t>Claude Code — איך זה עובד בפועל</a:t>
             </a:r>
             <a:endParaRPr lang="en-US" sz="3000" dirty="0"/>
           </a:p>
@@ -5329,13 +7502,33 @@
         </p:nvSpPr>
         <p:spPr>
           <a:xfrm>
-            <a:off x="8138160" y="1645920"/>
-            <a:ext cx="3520440" cy="2377440"/>
+            <a:off x="548640" y="2011680"/>
+            <a:ext cx="1965960" cy="1554480"/>
           </a:xfrm>
           <a:prstGeom prst="roundRect">
             <a:avLst>
-              <a:gd name="adj" fmla="val 3846"/>
+              <a:gd name="adj" fmla="val 5882"/>
             </a:avLst>
+          </a:prstGeom>
+          <a:solidFill>
+            <a:srgbClr val="E6FBF7"/>
+          </a:solidFill>
+          <a:ln/>
+        </p:spPr>
+      </p:sp>
+      <p:sp>
+        <p:nvSpPr>
+          <p:cNvPr id="4" name="Shape 2"/>
+          <p:cNvSpPr/>
+          <p:nvPr/>
+        </p:nvSpPr>
+        <p:spPr>
+          <a:xfrm>
+            <a:off x="1261872" y="2148840"/>
+            <a:ext cx="502920" cy="502920"/>
+          </a:xfrm>
+          <a:prstGeom prst="ellipse">
+            <a:avLst/>
           </a:prstGeom>
           <a:solidFill>
             <a:srgbClr val="00C2A8"/>
@@ -5345,30 +7538,30 @@
       </p:sp>
       <p:sp>
         <p:nvSpPr>
-          <p:cNvPr id="4" name="Text 2"/>
-          <p:cNvSpPr/>
-          <p:nvPr/>
-        </p:nvSpPr>
-        <p:spPr>
-          <a:xfrm>
-            <a:off x="8321040" y="1828800"/>
-            <a:ext cx="3154680" cy="731520"/>
-          </a:xfrm>
-          <a:prstGeom prst="rect">
-            <a:avLst/>
-          </a:prstGeom>
-          <a:noFill/>
-          <a:ln/>
-        </p:spPr>
-        <p:txBody>
-          <a:bodyPr wrap="square" lIns="0" tIns="0" rIns="0" bIns="0" rtlCol="0" anchor="ctr"/>
-          <a:lstStyle/>
-          <a:p>
-            <a:pPr rtl="1" algn="r" indent="0" marL="0">
-              <a:buNone/>
-            </a:pPr>
-            <a:r>
-              <a:rPr lang="en-US" sz="1600" b="1" dirty="0">
+          <p:cNvPr id="5" name="Text 3"/>
+          <p:cNvSpPr/>
+          <p:nvPr/>
+        </p:nvSpPr>
+        <p:spPr>
+          <a:xfrm>
+            <a:off x="1261872" y="2148840"/>
+            <a:ext cx="502920" cy="502920"/>
+          </a:xfrm>
+          <a:prstGeom prst="rect">
+            <a:avLst/>
+          </a:prstGeom>
+          <a:noFill/>
+          <a:ln/>
+        </p:spPr>
+        <p:txBody>
+          <a:bodyPr wrap="square" lIns="0" tIns="0" rIns="0" bIns="0" rtlCol="0" anchor="ctr"/>
+          <a:lstStyle/>
+          <a:p>
+            <a:pPr algn="ctr" indent="0" marL="0">
+              <a:buNone/>
+            </a:pPr>
+            <a:r>
+              <a:rPr lang="en-US" sz="1400" b="1" dirty="0">
                 <a:solidFill>
                   <a:srgbClr val="FFFFFF"/>
                 </a:solidFill>
@@ -5376,22 +7569,782 @@
                 <a:ea typeface="Arial" pitchFamily="34" charset="-122"/>
                 <a:cs typeface="Arial" pitchFamily="34" charset="-120"/>
               </a:rPr>
-              <a:t>GitHub Copilot Free</a:t>
-            </a:r>
-            <a:endParaRPr lang="en-US" sz="1600" dirty="0"/>
-          </a:p>
-        </p:txBody>
-      </p:sp>
-      <p:sp>
-        <p:nvSpPr>
-          <p:cNvPr id="5" name="Text 3"/>
-          <p:cNvSpPr/>
-          <p:nvPr/>
-        </p:nvSpPr>
-        <p:spPr>
-          <a:xfrm>
-            <a:off x="8321040" y="2606040"/>
-            <a:ext cx="3154680" cy="1280160"/>
+              <a:t>1</a:t>
+            </a:r>
+            <a:endParaRPr lang="en-US" sz="1400" dirty="0"/>
+          </a:p>
+        </p:txBody>
+      </p:sp>
+      <p:sp>
+        <p:nvSpPr>
+          <p:cNvPr id="6" name="Text 4"/>
+          <p:cNvSpPr/>
+          <p:nvPr/>
+        </p:nvSpPr>
+        <p:spPr>
+          <a:xfrm>
+            <a:off x="548640" y="2880360"/>
+            <a:ext cx="1965960" cy="594360"/>
+          </a:xfrm>
+          <a:prstGeom prst="rect">
+            <a:avLst/>
+          </a:prstGeom>
+          <a:noFill/>
+          <a:ln/>
+        </p:spPr>
+        <p:txBody>
+          <a:bodyPr wrap="square" lIns="25400" tIns="25400" rIns="25400" bIns="25400" rtlCol="0" anchor="t"/>
+          <a:lstStyle/>
+          <a:p>
+            <a:pPr algn="ctr" indent="0" marL="0">
+              <a:buNone/>
+            </a:pPr>
+            <a:r>
+              <a:rPr lang="en-US" sz="1300" b="1" dirty="0">
+                <a:solidFill>
+                  <a:srgbClr val="1B1F3B"/>
+                </a:solidFill>
+                <a:latin typeface="Arial" pitchFamily="34" charset="0"/>
+                <a:ea typeface="Arial" pitchFamily="34" charset="-122"/>
+                <a:cs typeface="Arial" pitchFamily="34" charset="-120"/>
+              </a:rPr>
+              <a:t>פתיחת</a:t>
+            </a:r>
+            <a:endParaRPr lang="en-US" sz="1300" dirty="0"/>
+          </a:p>
+          <a:p>
+            <a:pPr algn="ctr" indent="0" marL="0">
+              <a:buNone/>
+            </a:pPr>
+            <a:r>
+              <a:rPr lang="en-US" sz="1300" b="1" dirty="0">
+                <a:solidFill>
+                  <a:srgbClr val="1B1F3B"/>
+                </a:solidFill>
+                <a:latin typeface="Arial" pitchFamily="34" charset="0"/>
+                <a:ea typeface="Arial" pitchFamily="34" charset="-122"/>
+                <a:cs typeface="Arial" pitchFamily="34" charset="-120"/>
+              </a:rPr>
+              <a:t>Session</a:t>
+            </a:r>
+            <a:endParaRPr lang="en-US" sz="1300" dirty="0"/>
+          </a:p>
+        </p:txBody>
+      </p:sp>
+      <p:sp>
+        <p:nvSpPr>
+          <p:cNvPr id="7" name="Text 5"/>
+          <p:cNvSpPr/>
+          <p:nvPr/>
+        </p:nvSpPr>
+        <p:spPr>
+          <a:xfrm>
+            <a:off x="2514600" y="2011680"/>
+            <a:ext cx="320040" cy="1554480"/>
+          </a:xfrm>
+          <a:prstGeom prst="rect">
+            <a:avLst/>
+          </a:prstGeom>
+          <a:noFill/>
+          <a:ln/>
+        </p:spPr>
+        <p:txBody>
+          <a:bodyPr wrap="square" lIns="0" tIns="0" rIns="0" bIns="0" rtlCol="0" anchor="ctr"/>
+          <a:lstStyle/>
+          <a:p>
+            <a:pPr algn="ctr" indent="0" marL="0">
+              <a:buNone/>
+            </a:pPr>
+            <a:r>
+              <a:rPr lang="en-US" sz="2000" b="1" dirty="0">
+                <a:solidFill>
+                  <a:srgbClr val="6B7280"/>
+                </a:solidFill>
+                <a:latin typeface="Arial" pitchFamily="34" charset="0"/>
+                <a:ea typeface="Arial" pitchFamily="34" charset="-122"/>
+                <a:cs typeface="Arial" pitchFamily="34" charset="-120"/>
+              </a:rPr>
+              <a:t>←</a:t>
+            </a:r>
+            <a:endParaRPr lang="en-US" sz="2000" dirty="0"/>
+          </a:p>
+        </p:txBody>
+      </p:sp>
+      <p:sp>
+        <p:nvSpPr>
+          <p:cNvPr id="8" name="Shape 6"/>
+          <p:cNvSpPr/>
+          <p:nvPr/>
+        </p:nvSpPr>
+        <p:spPr>
+          <a:xfrm>
+            <a:off x="2679192" y="2011680"/>
+            <a:ext cx="1965960" cy="1554480"/>
+          </a:xfrm>
+          <a:prstGeom prst="roundRect">
+            <a:avLst>
+              <a:gd name="adj" fmla="val 5882"/>
+            </a:avLst>
+          </a:prstGeom>
+          <a:solidFill>
+            <a:srgbClr val="E6FBF7"/>
+          </a:solidFill>
+          <a:ln/>
+        </p:spPr>
+      </p:sp>
+      <p:sp>
+        <p:nvSpPr>
+          <p:cNvPr id="9" name="Shape 7"/>
+          <p:cNvSpPr/>
+          <p:nvPr/>
+        </p:nvSpPr>
+        <p:spPr>
+          <a:xfrm>
+            <a:off x="3392424" y="2148840"/>
+            <a:ext cx="502920" cy="502920"/>
+          </a:xfrm>
+          <a:prstGeom prst="ellipse">
+            <a:avLst/>
+          </a:prstGeom>
+          <a:solidFill>
+            <a:srgbClr val="00C2A8"/>
+          </a:solidFill>
+          <a:ln/>
+        </p:spPr>
+      </p:sp>
+      <p:sp>
+        <p:nvSpPr>
+          <p:cNvPr id="10" name="Text 8"/>
+          <p:cNvSpPr/>
+          <p:nvPr/>
+        </p:nvSpPr>
+        <p:spPr>
+          <a:xfrm>
+            <a:off x="3392424" y="2148840"/>
+            <a:ext cx="502920" cy="502920"/>
+          </a:xfrm>
+          <a:prstGeom prst="rect">
+            <a:avLst/>
+          </a:prstGeom>
+          <a:noFill/>
+          <a:ln/>
+        </p:spPr>
+        <p:txBody>
+          <a:bodyPr wrap="square" lIns="0" tIns="0" rIns="0" bIns="0" rtlCol="0" anchor="ctr"/>
+          <a:lstStyle/>
+          <a:p>
+            <a:pPr algn="ctr" indent="0" marL="0">
+              <a:buNone/>
+            </a:pPr>
+            <a:r>
+              <a:rPr lang="en-US" sz="1400" b="1" dirty="0">
+                <a:solidFill>
+                  <a:srgbClr val="FFFFFF"/>
+                </a:solidFill>
+                <a:latin typeface="Arial" pitchFamily="34" charset="0"/>
+                <a:ea typeface="Arial" pitchFamily="34" charset="-122"/>
+                <a:cs typeface="Arial" pitchFamily="34" charset="-120"/>
+              </a:rPr>
+              <a:t>2</a:t>
+            </a:r>
+            <a:endParaRPr lang="en-US" sz="1400" dirty="0"/>
+          </a:p>
+        </p:txBody>
+      </p:sp>
+      <p:sp>
+        <p:nvSpPr>
+          <p:cNvPr id="11" name="Text 9"/>
+          <p:cNvSpPr/>
+          <p:nvPr/>
+        </p:nvSpPr>
+        <p:spPr>
+          <a:xfrm>
+            <a:off x="2679192" y="2880360"/>
+            <a:ext cx="1965960" cy="594360"/>
+          </a:xfrm>
+          <a:prstGeom prst="rect">
+            <a:avLst/>
+          </a:prstGeom>
+          <a:noFill/>
+          <a:ln/>
+        </p:spPr>
+        <p:txBody>
+          <a:bodyPr wrap="square" lIns="25400" tIns="25400" rIns="25400" bIns="25400" rtlCol="0" anchor="t"/>
+          <a:lstStyle/>
+          <a:p>
+            <a:pPr algn="ctr" indent="0" marL="0">
+              <a:buNone/>
+            </a:pPr>
+            <a:r>
+              <a:rPr lang="en-US" sz="1300" b="1" dirty="0">
+                <a:solidFill>
+                  <a:srgbClr val="1B1F3B"/>
+                </a:solidFill>
+                <a:latin typeface="Arial" pitchFamily="34" charset="0"/>
+                <a:ea typeface="Arial" pitchFamily="34" charset="-122"/>
+                <a:cs typeface="Arial" pitchFamily="34" charset="-120"/>
+              </a:rPr>
+              <a:t>הנחיה</a:t>
+            </a:r>
+            <a:endParaRPr lang="en-US" sz="1300" dirty="0"/>
+          </a:p>
+          <a:p>
+            <a:pPr algn="ctr" indent="0" marL="0">
+              <a:buNone/>
+            </a:pPr>
+            <a:r>
+              <a:rPr lang="en-US" sz="1300" b="1" dirty="0">
+                <a:solidFill>
+                  <a:srgbClr val="1B1F3B"/>
+                </a:solidFill>
+                <a:latin typeface="Arial" pitchFamily="34" charset="0"/>
+                <a:ea typeface="Arial" pitchFamily="34" charset="-122"/>
+                <a:cs typeface="Arial" pitchFamily="34" charset="-120"/>
+              </a:rPr>
+              <a:t>ברורה</a:t>
+            </a:r>
+            <a:endParaRPr lang="en-US" sz="1300" dirty="0"/>
+          </a:p>
+        </p:txBody>
+      </p:sp>
+      <p:sp>
+        <p:nvSpPr>
+          <p:cNvPr id="12" name="Text 10"/>
+          <p:cNvSpPr/>
+          <p:nvPr/>
+        </p:nvSpPr>
+        <p:spPr>
+          <a:xfrm>
+            <a:off x="4645152" y="2011680"/>
+            <a:ext cx="320040" cy="1554480"/>
+          </a:xfrm>
+          <a:prstGeom prst="rect">
+            <a:avLst/>
+          </a:prstGeom>
+          <a:noFill/>
+          <a:ln/>
+        </p:spPr>
+        <p:txBody>
+          <a:bodyPr wrap="square" lIns="0" tIns="0" rIns="0" bIns="0" rtlCol="0" anchor="ctr"/>
+          <a:lstStyle/>
+          <a:p>
+            <a:pPr algn="ctr" indent="0" marL="0">
+              <a:buNone/>
+            </a:pPr>
+            <a:r>
+              <a:rPr lang="en-US" sz="2000" b="1" dirty="0">
+                <a:solidFill>
+                  <a:srgbClr val="6B7280"/>
+                </a:solidFill>
+                <a:latin typeface="Arial" pitchFamily="34" charset="0"/>
+                <a:ea typeface="Arial" pitchFamily="34" charset="-122"/>
+                <a:cs typeface="Arial" pitchFamily="34" charset="-120"/>
+              </a:rPr>
+              <a:t>←</a:t>
+            </a:r>
+            <a:endParaRPr lang="en-US" sz="2000" dirty="0"/>
+          </a:p>
+        </p:txBody>
+      </p:sp>
+      <p:sp>
+        <p:nvSpPr>
+          <p:cNvPr id="13" name="Shape 11"/>
+          <p:cNvSpPr/>
+          <p:nvPr/>
+        </p:nvSpPr>
+        <p:spPr>
+          <a:xfrm>
+            <a:off x="4809744" y="2011680"/>
+            <a:ext cx="1965960" cy="1554480"/>
+          </a:xfrm>
+          <a:prstGeom prst="roundRect">
+            <a:avLst>
+              <a:gd name="adj" fmla="val 5882"/>
+            </a:avLst>
+          </a:prstGeom>
+          <a:solidFill>
+            <a:srgbClr val="E6FBF7"/>
+          </a:solidFill>
+          <a:ln/>
+        </p:spPr>
+      </p:sp>
+      <p:sp>
+        <p:nvSpPr>
+          <p:cNvPr id="14" name="Shape 12"/>
+          <p:cNvSpPr/>
+          <p:nvPr/>
+        </p:nvSpPr>
+        <p:spPr>
+          <a:xfrm>
+            <a:off x="5522976" y="2148840"/>
+            <a:ext cx="502920" cy="502920"/>
+          </a:xfrm>
+          <a:prstGeom prst="ellipse">
+            <a:avLst/>
+          </a:prstGeom>
+          <a:solidFill>
+            <a:srgbClr val="00C2A8"/>
+          </a:solidFill>
+          <a:ln/>
+        </p:spPr>
+      </p:sp>
+      <p:sp>
+        <p:nvSpPr>
+          <p:cNvPr id="15" name="Text 13"/>
+          <p:cNvSpPr/>
+          <p:nvPr/>
+        </p:nvSpPr>
+        <p:spPr>
+          <a:xfrm>
+            <a:off x="5522976" y="2148840"/>
+            <a:ext cx="502920" cy="502920"/>
+          </a:xfrm>
+          <a:prstGeom prst="rect">
+            <a:avLst/>
+          </a:prstGeom>
+          <a:noFill/>
+          <a:ln/>
+        </p:spPr>
+        <p:txBody>
+          <a:bodyPr wrap="square" lIns="0" tIns="0" rIns="0" bIns="0" rtlCol="0" anchor="ctr"/>
+          <a:lstStyle/>
+          <a:p>
+            <a:pPr algn="ctr" indent="0" marL="0">
+              <a:buNone/>
+            </a:pPr>
+            <a:r>
+              <a:rPr lang="en-US" sz="1400" b="1" dirty="0">
+                <a:solidFill>
+                  <a:srgbClr val="FFFFFF"/>
+                </a:solidFill>
+                <a:latin typeface="Arial" pitchFamily="34" charset="0"/>
+                <a:ea typeface="Arial" pitchFamily="34" charset="-122"/>
+                <a:cs typeface="Arial" pitchFamily="34" charset="-120"/>
+              </a:rPr>
+              <a:t>3</a:t>
+            </a:r>
+            <a:endParaRPr lang="en-US" sz="1400" dirty="0"/>
+          </a:p>
+        </p:txBody>
+      </p:sp>
+      <p:sp>
+        <p:nvSpPr>
+          <p:cNvPr id="16" name="Text 14"/>
+          <p:cNvSpPr/>
+          <p:nvPr/>
+        </p:nvSpPr>
+        <p:spPr>
+          <a:xfrm>
+            <a:off x="4809744" y="2880360"/>
+            <a:ext cx="1965960" cy="594360"/>
+          </a:xfrm>
+          <a:prstGeom prst="rect">
+            <a:avLst/>
+          </a:prstGeom>
+          <a:noFill/>
+          <a:ln/>
+        </p:spPr>
+        <p:txBody>
+          <a:bodyPr wrap="square" lIns="25400" tIns="25400" rIns="25400" bIns="25400" rtlCol="0" anchor="t"/>
+          <a:lstStyle/>
+          <a:p>
+            <a:pPr algn="ctr" indent="0" marL="0">
+              <a:buNone/>
+            </a:pPr>
+            <a:r>
+              <a:rPr lang="en-US" sz="1300" b="1" dirty="0">
+                <a:solidFill>
+                  <a:srgbClr val="1B1F3B"/>
+                </a:solidFill>
+                <a:latin typeface="Arial" pitchFamily="34" charset="0"/>
+                <a:ea typeface="Arial" pitchFamily="34" charset="-122"/>
+                <a:cs typeface="Arial" pitchFamily="34" charset="-120"/>
+              </a:rPr>
+              <a:t>תוכנית /</a:t>
+            </a:r>
+            <a:endParaRPr lang="en-US" sz="1300" dirty="0"/>
+          </a:p>
+          <a:p>
+            <a:pPr algn="ctr" indent="0" marL="0">
+              <a:buNone/>
+            </a:pPr>
+            <a:r>
+              <a:rPr lang="en-US" sz="1300" b="1" dirty="0">
+                <a:solidFill>
+                  <a:srgbClr val="1B1F3B"/>
+                </a:solidFill>
+                <a:latin typeface="Arial" pitchFamily="34" charset="0"/>
+                <a:ea typeface="Arial" pitchFamily="34" charset="-122"/>
+                <a:cs typeface="Arial" pitchFamily="34" charset="-120"/>
+              </a:rPr>
+              <a:t>פעולה</a:t>
+            </a:r>
+            <a:endParaRPr lang="en-US" sz="1300" dirty="0"/>
+          </a:p>
+        </p:txBody>
+      </p:sp>
+      <p:sp>
+        <p:nvSpPr>
+          <p:cNvPr id="17" name="Text 15"/>
+          <p:cNvSpPr/>
+          <p:nvPr/>
+        </p:nvSpPr>
+        <p:spPr>
+          <a:xfrm>
+            <a:off x="6775704" y="2011680"/>
+            <a:ext cx="320040" cy="1554480"/>
+          </a:xfrm>
+          <a:prstGeom prst="rect">
+            <a:avLst/>
+          </a:prstGeom>
+          <a:noFill/>
+          <a:ln/>
+        </p:spPr>
+        <p:txBody>
+          <a:bodyPr wrap="square" lIns="0" tIns="0" rIns="0" bIns="0" rtlCol="0" anchor="ctr"/>
+          <a:lstStyle/>
+          <a:p>
+            <a:pPr algn="ctr" indent="0" marL="0">
+              <a:buNone/>
+            </a:pPr>
+            <a:r>
+              <a:rPr lang="en-US" sz="2000" b="1" dirty="0">
+                <a:solidFill>
+                  <a:srgbClr val="6B7280"/>
+                </a:solidFill>
+                <a:latin typeface="Arial" pitchFamily="34" charset="0"/>
+                <a:ea typeface="Arial" pitchFamily="34" charset="-122"/>
+                <a:cs typeface="Arial" pitchFamily="34" charset="-120"/>
+              </a:rPr>
+              <a:t>←</a:t>
+            </a:r>
+            <a:endParaRPr lang="en-US" sz="2000" dirty="0"/>
+          </a:p>
+        </p:txBody>
+      </p:sp>
+      <p:sp>
+        <p:nvSpPr>
+          <p:cNvPr id="18" name="Shape 16"/>
+          <p:cNvSpPr/>
+          <p:nvPr/>
+        </p:nvSpPr>
+        <p:spPr>
+          <a:xfrm>
+            <a:off x="6940296" y="2011680"/>
+            <a:ext cx="1965960" cy="1554480"/>
+          </a:xfrm>
+          <a:prstGeom prst="roundRect">
+            <a:avLst>
+              <a:gd name="adj" fmla="val 5882"/>
+            </a:avLst>
+          </a:prstGeom>
+          <a:solidFill>
+            <a:srgbClr val="FFF6E6"/>
+          </a:solidFill>
+          <a:ln/>
+        </p:spPr>
+      </p:sp>
+      <p:sp>
+        <p:nvSpPr>
+          <p:cNvPr id="19" name="Shape 17"/>
+          <p:cNvSpPr/>
+          <p:nvPr/>
+        </p:nvSpPr>
+        <p:spPr>
+          <a:xfrm>
+            <a:off x="7653528" y="2148840"/>
+            <a:ext cx="502920" cy="502920"/>
+          </a:xfrm>
+          <a:prstGeom prst="ellipse">
+            <a:avLst/>
+          </a:prstGeom>
+          <a:solidFill>
+            <a:srgbClr val="FFB000"/>
+          </a:solidFill>
+          <a:ln/>
+        </p:spPr>
+      </p:sp>
+      <p:sp>
+        <p:nvSpPr>
+          <p:cNvPr id="20" name="Text 18"/>
+          <p:cNvSpPr/>
+          <p:nvPr/>
+        </p:nvSpPr>
+        <p:spPr>
+          <a:xfrm>
+            <a:off x="7653528" y="2148840"/>
+            <a:ext cx="502920" cy="502920"/>
+          </a:xfrm>
+          <a:prstGeom prst="rect">
+            <a:avLst/>
+          </a:prstGeom>
+          <a:noFill/>
+          <a:ln/>
+        </p:spPr>
+        <p:txBody>
+          <a:bodyPr wrap="square" lIns="0" tIns="0" rIns="0" bIns="0" rtlCol="0" anchor="ctr"/>
+          <a:lstStyle/>
+          <a:p>
+            <a:pPr algn="ctr" indent="0" marL="0">
+              <a:buNone/>
+            </a:pPr>
+            <a:r>
+              <a:rPr lang="en-US" sz="1400" b="1" dirty="0">
+                <a:solidFill>
+                  <a:srgbClr val="FFFFFF"/>
+                </a:solidFill>
+                <a:latin typeface="Arial" pitchFamily="34" charset="0"/>
+                <a:ea typeface="Arial" pitchFamily="34" charset="-122"/>
+                <a:cs typeface="Arial" pitchFamily="34" charset="-120"/>
+              </a:rPr>
+              <a:t>4</a:t>
+            </a:r>
+            <a:endParaRPr lang="en-US" sz="1400" dirty="0"/>
+          </a:p>
+        </p:txBody>
+      </p:sp>
+      <p:sp>
+        <p:nvSpPr>
+          <p:cNvPr id="21" name="Text 19"/>
+          <p:cNvSpPr/>
+          <p:nvPr/>
+        </p:nvSpPr>
+        <p:spPr>
+          <a:xfrm>
+            <a:off x="6940296" y="2880360"/>
+            <a:ext cx="1965960" cy="594360"/>
+          </a:xfrm>
+          <a:prstGeom prst="rect">
+            <a:avLst/>
+          </a:prstGeom>
+          <a:noFill/>
+          <a:ln/>
+        </p:spPr>
+        <p:txBody>
+          <a:bodyPr wrap="square" lIns="25400" tIns="25400" rIns="25400" bIns="25400" rtlCol="0" anchor="t"/>
+          <a:lstStyle/>
+          <a:p>
+            <a:pPr algn="ctr" indent="0" marL="0">
+              <a:buNone/>
+            </a:pPr>
+            <a:r>
+              <a:rPr lang="en-US" sz="1300" b="1" dirty="0">
+                <a:solidFill>
+                  <a:srgbClr val="1B1F3B"/>
+                </a:solidFill>
+                <a:latin typeface="Arial" pitchFamily="34" charset="0"/>
+                <a:ea typeface="Arial" pitchFamily="34" charset="-122"/>
+                <a:cs typeface="Arial" pitchFamily="34" charset="-120"/>
+              </a:rPr>
+              <a:t>בדיקת</a:t>
+            </a:r>
+            <a:endParaRPr lang="en-US" sz="1300" dirty="0"/>
+          </a:p>
+          <a:p>
+            <a:pPr algn="ctr" indent="0" marL="0">
+              <a:buNone/>
+            </a:pPr>
+            <a:r>
+              <a:rPr lang="en-US" sz="1300" b="1" dirty="0">
+                <a:solidFill>
+                  <a:srgbClr val="1B1F3B"/>
+                </a:solidFill>
+                <a:latin typeface="Arial" pitchFamily="34" charset="0"/>
+                <a:ea typeface="Arial" pitchFamily="34" charset="-122"/>
+                <a:cs typeface="Arial" pitchFamily="34" charset="-120"/>
+              </a:rPr>
+              <a:t>Diff</a:t>
+            </a:r>
+            <a:endParaRPr lang="en-US" sz="1300" dirty="0"/>
+          </a:p>
+        </p:txBody>
+      </p:sp>
+      <p:sp>
+        <p:nvSpPr>
+          <p:cNvPr id="22" name="Text 20"/>
+          <p:cNvSpPr/>
+          <p:nvPr/>
+        </p:nvSpPr>
+        <p:spPr>
+          <a:xfrm>
+            <a:off x="8906256" y="2011680"/>
+            <a:ext cx="320040" cy="1554480"/>
+          </a:xfrm>
+          <a:prstGeom prst="rect">
+            <a:avLst/>
+          </a:prstGeom>
+          <a:noFill/>
+          <a:ln/>
+        </p:spPr>
+        <p:txBody>
+          <a:bodyPr wrap="square" lIns="0" tIns="0" rIns="0" bIns="0" rtlCol="0" anchor="ctr"/>
+          <a:lstStyle/>
+          <a:p>
+            <a:pPr algn="ctr" indent="0" marL="0">
+              <a:buNone/>
+            </a:pPr>
+            <a:r>
+              <a:rPr lang="en-US" sz="2000" b="1" dirty="0">
+                <a:solidFill>
+                  <a:srgbClr val="6B7280"/>
+                </a:solidFill>
+                <a:latin typeface="Arial" pitchFamily="34" charset="0"/>
+                <a:ea typeface="Arial" pitchFamily="34" charset="-122"/>
+                <a:cs typeface="Arial" pitchFamily="34" charset="-120"/>
+              </a:rPr>
+              <a:t>←</a:t>
+            </a:r>
+            <a:endParaRPr lang="en-US" sz="2000" dirty="0"/>
+          </a:p>
+        </p:txBody>
+      </p:sp>
+      <p:sp>
+        <p:nvSpPr>
+          <p:cNvPr id="23" name="Shape 21"/>
+          <p:cNvSpPr/>
+          <p:nvPr/>
+        </p:nvSpPr>
+        <p:spPr>
+          <a:xfrm>
+            <a:off x="9070848" y="2011680"/>
+            <a:ext cx="1965960" cy="1554480"/>
+          </a:xfrm>
+          <a:prstGeom prst="roundRect">
+            <a:avLst>
+              <a:gd name="adj" fmla="val 5882"/>
+            </a:avLst>
+          </a:prstGeom>
+          <a:solidFill>
+            <a:srgbClr val="E6FBF7"/>
+          </a:solidFill>
+          <a:ln/>
+        </p:spPr>
+      </p:sp>
+      <p:sp>
+        <p:nvSpPr>
+          <p:cNvPr id="24" name="Shape 22"/>
+          <p:cNvSpPr/>
+          <p:nvPr/>
+        </p:nvSpPr>
+        <p:spPr>
+          <a:xfrm>
+            <a:off x="9784080" y="2148840"/>
+            <a:ext cx="502920" cy="502920"/>
+          </a:xfrm>
+          <a:prstGeom prst="ellipse">
+            <a:avLst/>
+          </a:prstGeom>
+          <a:solidFill>
+            <a:srgbClr val="00C2A8"/>
+          </a:solidFill>
+          <a:ln/>
+        </p:spPr>
+      </p:sp>
+      <p:sp>
+        <p:nvSpPr>
+          <p:cNvPr id="25" name="Text 23"/>
+          <p:cNvSpPr/>
+          <p:nvPr/>
+        </p:nvSpPr>
+        <p:spPr>
+          <a:xfrm>
+            <a:off x="9784080" y="2148840"/>
+            <a:ext cx="502920" cy="502920"/>
+          </a:xfrm>
+          <a:prstGeom prst="rect">
+            <a:avLst/>
+          </a:prstGeom>
+          <a:noFill/>
+          <a:ln/>
+        </p:spPr>
+        <p:txBody>
+          <a:bodyPr wrap="square" lIns="0" tIns="0" rIns="0" bIns="0" rtlCol="0" anchor="ctr"/>
+          <a:lstStyle/>
+          <a:p>
+            <a:pPr algn="ctr" indent="0" marL="0">
+              <a:buNone/>
+            </a:pPr>
+            <a:r>
+              <a:rPr lang="en-US" sz="1400" b="1" dirty="0">
+                <a:solidFill>
+                  <a:srgbClr val="FFFFFF"/>
+                </a:solidFill>
+                <a:latin typeface="Arial" pitchFamily="34" charset="0"/>
+                <a:ea typeface="Arial" pitchFamily="34" charset="-122"/>
+                <a:cs typeface="Arial" pitchFamily="34" charset="-120"/>
+              </a:rPr>
+              <a:t>5</a:t>
+            </a:r>
+            <a:endParaRPr lang="en-US" sz="1400" dirty="0"/>
+          </a:p>
+        </p:txBody>
+      </p:sp>
+      <p:sp>
+        <p:nvSpPr>
+          <p:cNvPr id="26" name="Text 24"/>
+          <p:cNvSpPr/>
+          <p:nvPr/>
+        </p:nvSpPr>
+        <p:spPr>
+          <a:xfrm>
+            <a:off x="9070848" y="2880360"/>
+            <a:ext cx="1965960" cy="594360"/>
+          </a:xfrm>
+          <a:prstGeom prst="rect">
+            <a:avLst/>
+          </a:prstGeom>
+          <a:noFill/>
+          <a:ln/>
+        </p:spPr>
+        <p:txBody>
+          <a:bodyPr wrap="square" lIns="25400" tIns="25400" rIns="25400" bIns="25400" rtlCol="0" anchor="t"/>
+          <a:lstStyle/>
+          <a:p>
+            <a:pPr algn="ctr" indent="0" marL="0">
+              <a:buNone/>
+            </a:pPr>
+            <a:r>
+              <a:rPr lang="en-US" sz="1300" b="1" dirty="0">
+                <a:solidFill>
+                  <a:srgbClr val="1B1F3B"/>
+                </a:solidFill>
+                <a:latin typeface="Arial" pitchFamily="34" charset="0"/>
+                <a:ea typeface="Arial" pitchFamily="34" charset="-122"/>
+                <a:cs typeface="Arial" pitchFamily="34" charset="-120"/>
+              </a:rPr>
+              <a:t>צעד</a:t>
+            </a:r>
+            <a:endParaRPr lang="en-US" sz="1300" dirty="0"/>
+          </a:p>
+          <a:p>
+            <a:pPr algn="ctr" indent="0" marL="0">
+              <a:buNone/>
+            </a:pPr>
+            <a:r>
+              <a:rPr lang="en-US" sz="1300" b="1" dirty="0">
+                <a:solidFill>
+                  <a:srgbClr val="1B1F3B"/>
+                </a:solidFill>
+                <a:latin typeface="Arial" pitchFamily="34" charset="0"/>
+                <a:ea typeface="Arial" pitchFamily="34" charset="-122"/>
+                <a:cs typeface="Arial" pitchFamily="34" charset="-120"/>
+              </a:rPr>
+              <a:t>הבא</a:t>
+            </a:r>
+            <a:endParaRPr lang="en-US" sz="1300" dirty="0"/>
+          </a:p>
+        </p:txBody>
+      </p:sp>
+      <p:sp>
+        <p:nvSpPr>
+          <p:cNvPr id="27" name="Text 25"/>
+          <p:cNvSpPr/>
+          <p:nvPr/>
+        </p:nvSpPr>
+        <p:spPr>
+          <a:xfrm>
+            <a:off x="548640" y="4023360"/>
+            <a:ext cx="11091672" cy="457200"/>
           </a:xfrm>
           <a:prstGeom prst="rect">
             <a:avLst/>
@@ -5407,52 +8360,30 @@
               <a:buNone/>
             </a:pPr>
             <a:r>
-              <a:rPr lang="en-US" sz="1250" dirty="0">
-                <a:solidFill>
-                  <a:srgbClr val="FFFFFF"/>
+              <a:rPr lang="en-US" sz="1500" i="1" dirty="0">
+                <a:solidFill>
+                  <a:srgbClr val="FFB000"/>
                 </a:solidFill>
                 <a:latin typeface="Calibri" pitchFamily="34" charset="0"/>
                 <a:ea typeface="Calibri" pitchFamily="34" charset="-122"/>
                 <a:cs typeface="Calibri" pitchFamily="34" charset="-120"/>
               </a:rPr>
-              <a:t>מסלול חינמי רחב, ללא צורך באימות סטודנט</a:t>
-            </a:r>
-            <a:endParaRPr lang="en-US" sz="1250" dirty="0"/>
-          </a:p>
-        </p:txBody>
-      </p:sp>
-      <p:sp>
-        <p:nvSpPr>
-          <p:cNvPr id="6" name="Shape 4"/>
-          <p:cNvSpPr/>
-          <p:nvPr/>
-        </p:nvSpPr>
-        <p:spPr>
-          <a:xfrm>
-            <a:off x="4233672" y="1645920"/>
-            <a:ext cx="3520440" cy="2377440"/>
-          </a:xfrm>
-          <a:prstGeom prst="roundRect">
-            <a:avLst>
-              <a:gd name="adj" fmla="val 3846"/>
-            </a:avLst>
-          </a:prstGeom>
-          <a:solidFill>
-            <a:srgbClr val="E6FBF7"/>
-          </a:solidFill>
-          <a:ln/>
-        </p:spPr>
-      </p:sp>
-      <p:sp>
-        <p:nvSpPr>
-          <p:cNvPr id="7" name="Text 5"/>
-          <p:cNvSpPr/>
-          <p:nvPr/>
-        </p:nvSpPr>
-        <p:spPr>
-          <a:xfrm>
-            <a:off x="4416552" y="1828800"/>
-            <a:ext cx="3154680" cy="731520"/>
+              <a:t>בדיקת ה-Diff היא לא אופציונלית — זה השלב שבו אתם עדיין בשליטה</a:t>
+            </a:r>
+            <a:endParaRPr lang="en-US" sz="1500" dirty="0"/>
+          </a:p>
+        </p:txBody>
+      </p:sp>
+      <p:sp>
+        <p:nvSpPr>
+          <p:cNvPr id="28" name="Text 26"/>
+          <p:cNvSpPr/>
+          <p:nvPr/>
+        </p:nvSpPr>
+        <p:spPr>
+          <a:xfrm>
+            <a:off x="548640" y="4937760"/>
+            <a:ext cx="11091672" cy="457200"/>
           </a:xfrm>
           <a:prstGeom prst="rect">
             <a:avLst/>
@@ -5470,13 +8401,13 @@
             <a:r>
               <a:rPr lang="en-US" sz="1600" b="1" dirty="0">
                 <a:solidFill>
-                  <a:srgbClr val="1B1F3B"/>
+                  <a:srgbClr val="00C2A8"/>
                 </a:solidFill>
                 <a:latin typeface="Arial" pitchFamily="34" charset="0"/>
                 <a:ea typeface="Arial" pitchFamily="34" charset="-122"/>
                 <a:cs typeface="Arial" pitchFamily="34" charset="-120"/>
               </a:rPr>
-              <a:t>GitHub Student Pack</a:t>
+              <a:t>זה בדיוק שלבים 4-6 מה-Workflow שלמדנו בשיעור 1</a:t>
             </a:r>
             <a:endParaRPr lang="en-US" sz="1600" dirty="0"/>
           </a:p>
@@ -5484,266 +8415,7 @@
       </p:sp>
       <p:sp>
         <p:nvSpPr>
-          <p:cNvPr id="8" name="Text 6"/>
-          <p:cNvSpPr/>
-          <p:nvPr/>
-        </p:nvSpPr>
-        <p:spPr>
-          <a:xfrm>
-            <a:off x="4416552" y="2606040"/>
-            <a:ext cx="3154680" cy="1280160"/>
-          </a:xfrm>
-          <a:prstGeom prst="rect">
-            <a:avLst/>
-          </a:prstGeom>
-          <a:noFill/>
-          <a:ln/>
-        </p:spPr>
-        <p:txBody>
-          <a:bodyPr wrap="square" lIns="0" tIns="0" rIns="0" bIns="0" rtlCol="0" anchor="ctr"/>
-          <a:lstStyle/>
-          <a:p>
-            <a:pPr rtl="1" algn="r" indent="0" marL="0">
-              <a:buNone/>
-            </a:pPr>
-            <a:r>
-              <a:rPr lang="en-US" sz="1250" dirty="0">
-                <a:solidFill>
-                  <a:srgbClr val="1B1F3B"/>
-                </a:solidFill>
-                <a:latin typeface="Calibri" pitchFamily="34" charset="0"/>
-                <a:ea typeface="Calibri" pitchFamily="34" charset="-122"/>
-                <a:cs typeface="Calibri" pitchFamily="34" charset="-120"/>
-              </a:rPr>
-              <a:t>הרחבה למי שמאמת סטודנט (זמינות משתנה)</a:t>
-            </a:r>
-            <a:endParaRPr lang="en-US" sz="1250" dirty="0"/>
-          </a:p>
-        </p:txBody>
-      </p:sp>
-      <p:sp>
-        <p:nvSpPr>
-          <p:cNvPr id="9" name="Shape 7"/>
-          <p:cNvSpPr/>
-          <p:nvPr/>
-        </p:nvSpPr>
-        <p:spPr>
-          <a:xfrm>
-            <a:off x="329184" y="1645920"/>
-            <a:ext cx="3520440" cy="2377440"/>
-          </a:xfrm>
-          <a:prstGeom prst="roundRect">
-            <a:avLst>
-              <a:gd name="adj" fmla="val 3846"/>
-            </a:avLst>
-          </a:prstGeom>
-          <a:solidFill>
-            <a:srgbClr val="E6FBF7"/>
-          </a:solidFill>
-          <a:ln/>
-        </p:spPr>
-      </p:sp>
-      <p:sp>
-        <p:nvSpPr>
-          <p:cNvPr id="10" name="Text 8"/>
-          <p:cNvSpPr/>
-          <p:nvPr/>
-        </p:nvSpPr>
-        <p:spPr>
-          <a:xfrm>
-            <a:off x="512064" y="1828800"/>
-            <a:ext cx="3154680" cy="731520"/>
-          </a:xfrm>
-          <a:prstGeom prst="rect">
-            <a:avLst/>
-          </a:prstGeom>
-          <a:noFill/>
-          <a:ln/>
-        </p:spPr>
-        <p:txBody>
-          <a:bodyPr wrap="square" lIns="0" tIns="0" rIns="0" bIns="0" rtlCol="0" anchor="ctr"/>
-          <a:lstStyle/>
-          <a:p>
-            <a:pPr rtl="1" algn="r" indent="0" marL="0">
-              <a:buNone/>
-            </a:pPr>
-            <a:r>
-              <a:rPr lang="en-US" sz="1600" b="1" dirty="0">
-                <a:solidFill>
-                  <a:srgbClr val="1B1F3B"/>
-                </a:solidFill>
-                <a:latin typeface="Arial" pitchFamily="34" charset="0"/>
-                <a:ea typeface="Arial" pitchFamily="34" charset="-122"/>
-                <a:cs typeface="Arial" pitchFamily="34" charset="-120"/>
-              </a:rPr>
-              <a:t>Cursor</a:t>
-            </a:r>
-            <a:endParaRPr lang="en-US" sz="1600" dirty="0"/>
-          </a:p>
-        </p:txBody>
-      </p:sp>
-      <p:sp>
-        <p:nvSpPr>
-          <p:cNvPr id="11" name="Text 9"/>
-          <p:cNvSpPr/>
-          <p:nvPr/>
-        </p:nvSpPr>
-        <p:spPr>
-          <a:xfrm>
-            <a:off x="512064" y="2606040"/>
-            <a:ext cx="3154680" cy="1280160"/>
-          </a:xfrm>
-          <a:prstGeom prst="rect">
-            <a:avLst/>
-          </a:prstGeom>
-          <a:noFill/>
-          <a:ln/>
-        </p:spPr>
-        <p:txBody>
-          <a:bodyPr wrap="square" lIns="0" tIns="0" rIns="0" bIns="0" rtlCol="0" anchor="ctr"/>
-          <a:lstStyle/>
-          <a:p>
-            <a:pPr rtl="1" algn="r" indent="0" marL="0">
-              <a:buNone/>
-            </a:pPr>
-            <a:r>
-              <a:rPr lang="en-US" sz="1250" dirty="0">
-                <a:solidFill>
-                  <a:srgbClr val="1B1F3B"/>
-                </a:solidFill>
-                <a:latin typeface="Calibri" pitchFamily="34" charset="0"/>
-                <a:ea typeface="Calibri" pitchFamily="34" charset="-122"/>
-                <a:cs typeface="Calibri" pitchFamily="34" charset="-120"/>
-              </a:rPr>
-              <a:t>IDE מלא, מסלול חינמי מוגבל (מכסת השלמות)</a:t>
-            </a:r>
-            <a:endParaRPr lang="en-US" sz="1250" dirty="0"/>
-          </a:p>
-        </p:txBody>
-      </p:sp>
-      <p:sp>
-        <p:nvSpPr>
-          <p:cNvPr id="12" name="Shape 10"/>
-          <p:cNvSpPr/>
-          <p:nvPr/>
-        </p:nvSpPr>
-        <p:spPr>
-          <a:xfrm>
-            <a:off x="548640" y="4343400"/>
-            <a:ext cx="11091672" cy="1005840"/>
-          </a:xfrm>
-          <a:prstGeom prst="roundRect">
-            <a:avLst>
-              <a:gd name="adj" fmla="val 9091"/>
-            </a:avLst>
-          </a:prstGeom>
-          <a:solidFill>
-            <a:srgbClr val="FFF6E6"/>
-          </a:solidFill>
-          <a:ln/>
-        </p:spPr>
-      </p:sp>
-      <p:sp>
-        <p:nvSpPr>
-          <p:cNvPr id="13" name="Shape 11"/>
-          <p:cNvSpPr/>
-          <p:nvPr/>
-        </p:nvSpPr>
-        <p:spPr>
-          <a:xfrm>
-            <a:off x="10332720" y="4480560"/>
-            <a:ext cx="457200" cy="457200"/>
-          </a:xfrm>
-          <a:prstGeom prst="ellipse">
-            <a:avLst/>
-          </a:prstGeom>
-          <a:solidFill>
-            <a:srgbClr val="FFB000"/>
-          </a:solidFill>
-          <a:ln/>
-        </p:spPr>
-      </p:sp>
-      <p:sp>
-        <p:nvSpPr>
-          <p:cNvPr id="14" name="Text 12"/>
-          <p:cNvSpPr/>
-          <p:nvPr/>
-        </p:nvSpPr>
-        <p:spPr>
-          <a:xfrm>
-            <a:off x="10332720" y="4480560"/>
-            <a:ext cx="457200" cy="457200"/>
-          </a:xfrm>
-          <a:prstGeom prst="rect">
-            <a:avLst/>
-          </a:prstGeom>
-          <a:noFill/>
-          <a:ln/>
-        </p:spPr>
-        <p:txBody>
-          <a:bodyPr wrap="square" lIns="0" tIns="0" rIns="0" bIns="0" rtlCol="0" anchor="ctr"/>
-          <a:lstStyle/>
-          <a:p>
-            <a:pPr algn="ctr" indent="0" marL="0">
-              <a:buNone/>
-            </a:pPr>
-            <a:r>
-              <a:rPr lang="en-US" sz="1400" b="1" dirty="0">
-                <a:solidFill>
-                  <a:srgbClr val="FFFFFF"/>
-                </a:solidFill>
-                <a:latin typeface="Arial" pitchFamily="34" charset="0"/>
-                <a:ea typeface="Arial" pitchFamily="34" charset="-122"/>
-                <a:cs typeface="Arial" pitchFamily="34" charset="-120"/>
-              </a:rPr>
-              <a:t>!</a:t>
-            </a:r>
-            <a:endParaRPr lang="en-US" sz="1400" dirty="0"/>
-          </a:p>
-        </p:txBody>
-      </p:sp>
-      <p:sp>
-        <p:nvSpPr>
-          <p:cNvPr id="15" name="Text 13"/>
-          <p:cNvSpPr/>
-          <p:nvPr/>
-        </p:nvSpPr>
-        <p:spPr>
-          <a:xfrm>
-            <a:off x="822960" y="4434840"/>
-            <a:ext cx="9326880" cy="731520"/>
-          </a:xfrm>
-          <a:prstGeom prst="rect">
-            <a:avLst/>
-          </a:prstGeom>
-          <a:noFill/>
-          <a:ln/>
-        </p:spPr>
-        <p:txBody>
-          <a:bodyPr wrap="square" lIns="0" tIns="0" rIns="0" bIns="0" rtlCol="0" anchor="ctr"/>
-          <a:lstStyle/>
-          <a:p>
-            <a:pPr rtl="1" algn="r" indent="0" marL="0">
-              <a:buNone/>
-            </a:pPr>
-            <a:r>
-              <a:rPr lang="en-US" sz="1400" b="1" dirty="0">
-                <a:solidFill>
-                  <a:srgbClr val="1B1F3B"/>
-                </a:solidFill>
-                <a:latin typeface="Arial" pitchFamily="34" charset="0"/>
-                <a:ea typeface="Arial" pitchFamily="34" charset="-122"/>
-                <a:cs typeface="Arial" pitchFamily="34" charset="-120"/>
-              </a:rPr>
-              <a:t>שוק הכלים משתנה מהר — ראו מקרה Gemini CLI → Antigravity משיעור 1</a:t>
-            </a:r>
-            <a:endParaRPr lang="en-US" sz="1400" dirty="0"/>
-          </a:p>
-        </p:txBody>
-      </p:sp>
-      <p:sp>
-        <p:nvSpPr>
-          <p:cNvPr id="16" name="Text 14"/>
+          <p:cNvPr id="29" name="Text 27"/>
           <p:cNvSpPr/>
           <p:nvPr/>
         </p:nvSpPr>
@@ -5794,7 +8466,7 @@
     <p:bg>
       <p:bgPr>
         <a:solidFill>
-          <a:srgbClr val="FFFFFF"/>
+          <a:srgbClr val="E6FBF7"/>
         </a:solidFill>
       </p:bgPr>
     </p:bg>
@@ -5845,7 +8517,7 @@
                 <a:ea typeface="Arial" pitchFamily="34" charset="-122"/>
                 <a:cs typeface="Arial" pitchFamily="34" charset="-120"/>
               </a:rPr>
-              <a:t>Best Practices לעבודה עם כלי Agentic (1)</a:t>
+              <a:t>אתם כבר עובדים ליד AI</a:t>
             </a:r>
             <a:endParaRPr lang="en-US" sz="3000" dirty="0"/>
           </a:p>
@@ -5853,97 +8525,142 @@
       </p:sp>
       <p:sp>
         <p:nvSpPr>
-          <p:cNvPr id="3" name="Shape 1"/>
-          <p:cNvSpPr/>
-          <p:nvPr/>
-        </p:nvSpPr>
-        <p:spPr>
-          <a:xfrm>
-            <a:off x="10332720" y="1554480"/>
-            <a:ext cx="548640" cy="548640"/>
-          </a:xfrm>
-          <a:prstGeom prst="ellipse">
-            <a:avLst/>
+          <p:cNvPr id="3" name="Text 1"/>
+          <p:cNvSpPr/>
+          <p:nvPr/>
+        </p:nvSpPr>
+        <p:spPr>
+          <a:xfrm>
+            <a:off x="548640" y="1737360"/>
+            <a:ext cx="11091672" cy="2011680"/>
+          </a:xfrm>
+          <a:prstGeom prst="rect">
+            <a:avLst/>
+          </a:prstGeom>
+          <a:noFill/>
+          <a:ln/>
+        </p:spPr>
+        <p:txBody>
+          <a:bodyPr wrap="square" lIns="0" tIns="0" rIns="0" bIns="0" rtlCol="0" anchor="ctr"/>
+          <a:lstStyle/>
+          <a:p>
+            <a:pPr algn="r" indent="0" marL="0">
+              <a:spcAft>
+                <a:spcPts val="1400"/>
+              </a:spcAft>
+              <a:buNone/>
+            </a:pPr>
+            <a:r>
+              <a:rPr lang="en-US" sz="1700" dirty="0">
+                <a:solidFill>
+                  <a:srgbClr val="1B1F3B"/>
+                </a:solidFill>
+                <a:latin typeface="Calibri" pitchFamily="34" charset="0"/>
+                <a:ea typeface="Calibri" pitchFamily="34" charset="-122"/>
+                <a:cs typeface="Calibri" pitchFamily="34" charset="-120"/>
+              </a:rPr>
+              <a:t>• רובכם כבר משתמשים ב-ChatGPT/Claude לכתיבת קוד עזר למחקר</a:t>
+            </a:r>
+            <a:endParaRPr lang="en-US" sz="1700" dirty="0"/>
+          </a:p>
+          <a:p>
+            <a:pPr algn="r" indent="0" marL="0">
+              <a:spcAft>
+                <a:spcPts val="1400"/>
+              </a:spcAft>
+              <a:buNone/>
+            </a:pPr>
+            <a:r>
+              <a:rPr lang="en-US" sz="1700" dirty="0">
+                <a:solidFill>
+                  <a:srgbClr val="1B1F3B"/>
+                </a:solidFill>
+                <a:latin typeface="Calibri" pitchFamily="34" charset="0"/>
+                <a:ea typeface="Calibri" pitchFamily="34" charset="-122"/>
+                <a:cs typeface="Calibri" pitchFamily="34" charset="-120"/>
+              </a:rPr>
+              <a:t>• מה עשיתם עם הקוד שקיבלתם? העתקתם-הדבקתם לקובץ</a:t>
+            </a:r>
+            <a:endParaRPr lang="en-US" sz="1700" dirty="0"/>
+          </a:p>
+          <a:p>
+            <a:pPr algn="r" indent="0" marL="0">
+              <a:spcAft>
+                <a:spcPts val="1400"/>
+              </a:spcAft>
+              <a:buNone/>
+            </a:pPr>
+            <a:r>
+              <a:rPr lang="en-US" sz="1700" dirty="0">
+                <a:solidFill>
+                  <a:srgbClr val="1B1F3B"/>
+                </a:solidFill>
+                <a:latin typeface="Calibri" pitchFamily="34" charset="0"/>
+                <a:ea typeface="Calibri" pitchFamily="34" charset="-122"/>
+                <a:cs typeface="Calibri" pitchFamily="34" charset="-120"/>
+              </a:rPr>
+              <a:t>• כלי אג'נטי עושה בדיוק את זה — רק כותב ישירות, וקורא את הפרויקט קודם</a:t>
+            </a:r>
+            <a:endParaRPr lang="en-US" sz="1700" dirty="0"/>
+          </a:p>
+        </p:txBody>
+      </p:sp>
+      <p:sp>
+        <p:nvSpPr>
+          <p:cNvPr id="4" name="Shape 2"/>
+          <p:cNvSpPr/>
+          <p:nvPr/>
+        </p:nvSpPr>
+        <p:spPr>
+          <a:xfrm>
+            <a:off x="548640" y="4023360"/>
+            <a:ext cx="11091672" cy="1188720"/>
+          </a:xfrm>
+          <a:prstGeom prst="roundRect">
+            <a:avLst>
+              <a:gd name="adj" fmla="val 7692"/>
+            </a:avLst>
           </a:prstGeom>
           <a:solidFill>
-            <a:srgbClr val="00C2A8"/>
+            <a:srgbClr val="1B1F3B"/>
           </a:solidFill>
           <a:ln/>
         </p:spPr>
       </p:sp>
       <p:sp>
         <p:nvSpPr>
-          <p:cNvPr id="4" name="Text 2"/>
-          <p:cNvSpPr/>
-          <p:nvPr/>
-        </p:nvSpPr>
-        <p:spPr>
-          <a:xfrm>
-            <a:off x="10332720" y="1554480"/>
-            <a:ext cx="548640" cy="548640"/>
-          </a:xfrm>
-          <a:prstGeom prst="rect">
-            <a:avLst/>
-          </a:prstGeom>
-          <a:noFill/>
-          <a:ln/>
-        </p:spPr>
-        <p:txBody>
-          <a:bodyPr wrap="square" lIns="0" tIns="0" rIns="0" bIns="0" rtlCol="0" anchor="ctr"/>
-          <a:lstStyle/>
-          <a:p>
-            <a:pPr algn="ctr" indent="0" marL="0">
-              <a:buNone/>
-            </a:pPr>
-            <a:r>
-              <a:rPr lang="en-US" sz="1400" b="1" dirty="0">
-                <a:solidFill>
-                  <a:srgbClr val="FFFFFF"/>
+          <p:cNvPr id="5" name="Text 3"/>
+          <p:cNvSpPr/>
+          <p:nvPr/>
+        </p:nvSpPr>
+        <p:spPr>
+          <a:xfrm>
+            <a:off x="822960" y="4023360"/>
+            <a:ext cx="10543032" cy="1188720"/>
+          </a:xfrm>
+          <a:prstGeom prst="rect">
+            <a:avLst/>
+          </a:prstGeom>
+          <a:noFill/>
+          <a:ln/>
+        </p:spPr>
+        <p:txBody>
+          <a:bodyPr wrap="square" lIns="0" tIns="0" rIns="0" bIns="0" rtlCol="0" anchor="ctr"/>
+          <a:lstStyle/>
+          <a:p>
+            <a:pPr rtl="1" algn="r" indent="0" marL="0">
+              <a:buNone/>
+            </a:pPr>
+            <a:r>
+              <a:rPr lang="en-US" sz="1800" b="1" i="1" dirty="0">
+                <a:solidFill>
+                  <a:srgbClr val="00C2A8"/>
                 </a:solidFill>
                 <a:latin typeface="Arial" pitchFamily="34" charset="0"/>
                 <a:ea typeface="Arial" pitchFamily="34" charset="-122"/>
                 <a:cs typeface="Arial" pitchFamily="34" charset="-120"/>
               </a:rPr>
-              <a:t>1</a:t>
-            </a:r>
-            <a:endParaRPr lang="en-US" sz="1400" dirty="0"/>
-          </a:p>
-        </p:txBody>
-      </p:sp>
-      <p:sp>
-        <p:nvSpPr>
-          <p:cNvPr id="5" name="Text 3"/>
-          <p:cNvSpPr/>
-          <p:nvPr/>
-        </p:nvSpPr>
-        <p:spPr>
-          <a:xfrm>
-            <a:off x="548640" y="1554480"/>
-            <a:ext cx="9509760" cy="365760"/>
-          </a:xfrm>
-          <a:prstGeom prst="rect">
-            <a:avLst/>
-          </a:prstGeom>
-          <a:noFill/>
-          <a:ln/>
-        </p:spPr>
-        <p:txBody>
-          <a:bodyPr wrap="square" lIns="0" tIns="0" rIns="0" bIns="0" rtlCol="0" anchor="ctr"/>
-          <a:lstStyle/>
-          <a:p>
-            <a:pPr rtl="1" algn="r" indent="0" marL="0">
-              <a:buNone/>
-            </a:pPr>
-            <a:r>
-              <a:rPr lang="en-US" sz="1800" b="1" dirty="0">
-                <a:solidFill>
-                  <a:srgbClr val="1B1F3B"/>
-                </a:solidFill>
-                <a:latin typeface="Arial" pitchFamily="34" charset="0"/>
-                <a:ea typeface="Arial" pitchFamily="34" charset="-122"/>
-                <a:cs typeface="Arial" pitchFamily="34" charset="-120"/>
-              </a:rPr>
-              <a:t>הנחיות ברורות וספציפיות</a:t>
+              <a:t>זה לא כלי חדש לגמרי — זה שדרוג למשהו שאתם כבר עושים</a:t>
             </a:r>
             <a:endParaRPr lang="en-US" sz="1800" dirty="0"/>
           </a:p>
@@ -5952,319 +8669,6 @@
       <p:sp>
         <p:nvSpPr>
           <p:cNvPr id="6" name="Text 4"/>
-          <p:cNvSpPr/>
-          <p:nvPr/>
-        </p:nvSpPr>
-        <p:spPr>
-          <a:xfrm>
-            <a:off x="548640" y="1938528"/>
-            <a:ext cx="9509760" cy="731520"/>
-          </a:xfrm>
-          <a:prstGeom prst="rect">
-            <a:avLst/>
-          </a:prstGeom>
-          <a:noFill/>
-          <a:ln/>
-        </p:spPr>
-        <p:txBody>
-          <a:bodyPr wrap="square" lIns="0" tIns="0" rIns="0" bIns="0" rtlCol="0" anchor="ctr"/>
-          <a:lstStyle/>
-          <a:p>
-            <a:pPr rtl="1" algn="r" indent="0" marL="0">
-              <a:buNone/>
-            </a:pPr>
-            <a:r>
-              <a:rPr lang="en-US" sz="1400" dirty="0">
-                <a:solidFill>
-                  <a:srgbClr val="6B7280"/>
-                </a:solidFill>
-                <a:latin typeface="Calibri" pitchFamily="34" charset="0"/>
-                <a:ea typeface="Calibri" pitchFamily="34" charset="-122"/>
-                <a:cs typeface="Calibri" pitchFamily="34" charset="-120"/>
-              </a:rPr>
-              <a:t>“תוסיף התחברות” עמום; “תוסיף התחברות עם Google OAuth, עם redirect לדף הבית” ברור</a:t>
-            </a:r>
-            <a:endParaRPr lang="en-US" sz="1400" dirty="0"/>
-          </a:p>
-        </p:txBody>
-      </p:sp>
-      <p:sp>
-        <p:nvSpPr>
-          <p:cNvPr id="7" name="Shape 5"/>
-          <p:cNvSpPr/>
-          <p:nvPr/>
-        </p:nvSpPr>
-        <p:spPr>
-          <a:xfrm>
-            <a:off x="10332720" y="2926080"/>
-            <a:ext cx="548640" cy="548640"/>
-          </a:xfrm>
-          <a:prstGeom prst="ellipse">
-            <a:avLst/>
-          </a:prstGeom>
-          <a:solidFill>
-            <a:srgbClr val="00C2A8"/>
-          </a:solidFill>
-          <a:ln/>
-        </p:spPr>
-      </p:sp>
-      <p:sp>
-        <p:nvSpPr>
-          <p:cNvPr id="8" name="Text 6"/>
-          <p:cNvSpPr/>
-          <p:nvPr/>
-        </p:nvSpPr>
-        <p:spPr>
-          <a:xfrm>
-            <a:off x="10332720" y="2926080"/>
-            <a:ext cx="548640" cy="548640"/>
-          </a:xfrm>
-          <a:prstGeom prst="rect">
-            <a:avLst/>
-          </a:prstGeom>
-          <a:noFill/>
-          <a:ln/>
-        </p:spPr>
-        <p:txBody>
-          <a:bodyPr wrap="square" lIns="0" tIns="0" rIns="0" bIns="0" rtlCol="0" anchor="ctr"/>
-          <a:lstStyle/>
-          <a:p>
-            <a:pPr algn="ctr" indent="0" marL="0">
-              <a:buNone/>
-            </a:pPr>
-            <a:r>
-              <a:rPr lang="en-US" sz="1400" b="1" dirty="0">
-                <a:solidFill>
-                  <a:srgbClr val="FFFFFF"/>
-                </a:solidFill>
-                <a:latin typeface="Arial" pitchFamily="34" charset="0"/>
-                <a:ea typeface="Arial" pitchFamily="34" charset="-122"/>
-                <a:cs typeface="Arial" pitchFamily="34" charset="-120"/>
-              </a:rPr>
-              <a:t>2</a:t>
-            </a:r>
-            <a:endParaRPr lang="en-US" sz="1400" dirty="0"/>
-          </a:p>
-        </p:txBody>
-      </p:sp>
-      <p:sp>
-        <p:nvSpPr>
-          <p:cNvPr id="9" name="Text 7"/>
-          <p:cNvSpPr/>
-          <p:nvPr/>
-        </p:nvSpPr>
-        <p:spPr>
-          <a:xfrm>
-            <a:off x="548640" y="2926080"/>
-            <a:ext cx="9509760" cy="365760"/>
-          </a:xfrm>
-          <a:prstGeom prst="rect">
-            <a:avLst/>
-          </a:prstGeom>
-          <a:noFill/>
-          <a:ln/>
-        </p:spPr>
-        <p:txBody>
-          <a:bodyPr wrap="square" lIns="0" tIns="0" rIns="0" bIns="0" rtlCol="0" anchor="ctr"/>
-          <a:lstStyle/>
-          <a:p>
-            <a:pPr rtl="1" algn="r" indent="0" marL="0">
-              <a:buNone/>
-            </a:pPr>
-            <a:r>
-              <a:rPr lang="en-US" sz="1800" b="1" dirty="0">
-                <a:solidFill>
-                  <a:srgbClr val="1B1F3B"/>
-                </a:solidFill>
-                <a:latin typeface="Arial" pitchFamily="34" charset="0"/>
-                <a:ea typeface="Arial" pitchFamily="34" charset="-122"/>
-                <a:cs typeface="Arial" pitchFamily="34" charset="-120"/>
-              </a:rPr>
-              <a:t>צעדים קטנים</a:t>
-            </a:r>
-            <a:endParaRPr lang="en-US" sz="1800" dirty="0"/>
-          </a:p>
-        </p:txBody>
-      </p:sp>
-      <p:sp>
-        <p:nvSpPr>
-          <p:cNvPr id="10" name="Text 8"/>
-          <p:cNvSpPr/>
-          <p:nvPr/>
-        </p:nvSpPr>
-        <p:spPr>
-          <a:xfrm>
-            <a:off x="548640" y="3310128"/>
-            <a:ext cx="9509760" cy="731520"/>
-          </a:xfrm>
-          <a:prstGeom prst="rect">
-            <a:avLst/>
-          </a:prstGeom>
-          <a:noFill/>
-          <a:ln/>
-        </p:spPr>
-        <p:txBody>
-          <a:bodyPr wrap="square" lIns="0" tIns="0" rIns="0" bIns="0" rtlCol="0" anchor="ctr"/>
-          <a:lstStyle/>
-          <a:p>
-            <a:pPr rtl="1" algn="r" indent="0" marL="0">
-              <a:buNone/>
-            </a:pPr>
-            <a:r>
-              <a:rPr lang="en-US" sz="1400" dirty="0">
-                <a:solidFill>
-                  <a:srgbClr val="6B7280"/>
-                </a:solidFill>
-                <a:latin typeface="Calibri" pitchFamily="34" charset="0"/>
-                <a:ea typeface="Calibri" pitchFamily="34" charset="-122"/>
-                <a:cs typeface="Calibri" pitchFamily="34" charset="-120"/>
-              </a:rPr>
-              <a:t>משימה גדולה מתפרקת לצעדים — קל יותר לבדוק תוצאה של צעד קטן</a:t>
-            </a:r>
-            <a:endParaRPr lang="en-US" sz="1400" dirty="0"/>
-          </a:p>
-        </p:txBody>
-      </p:sp>
-      <p:sp>
-        <p:nvSpPr>
-          <p:cNvPr id="11" name="Shape 9"/>
-          <p:cNvSpPr/>
-          <p:nvPr/>
-        </p:nvSpPr>
-        <p:spPr>
-          <a:xfrm>
-            <a:off x="10332720" y="4297680"/>
-            <a:ext cx="548640" cy="548640"/>
-          </a:xfrm>
-          <a:prstGeom prst="ellipse">
-            <a:avLst/>
-          </a:prstGeom>
-          <a:solidFill>
-            <a:srgbClr val="00C2A8"/>
-          </a:solidFill>
-          <a:ln/>
-        </p:spPr>
-      </p:sp>
-      <p:sp>
-        <p:nvSpPr>
-          <p:cNvPr id="12" name="Text 10"/>
-          <p:cNvSpPr/>
-          <p:nvPr/>
-        </p:nvSpPr>
-        <p:spPr>
-          <a:xfrm>
-            <a:off x="10332720" y="4297680"/>
-            <a:ext cx="548640" cy="548640"/>
-          </a:xfrm>
-          <a:prstGeom prst="rect">
-            <a:avLst/>
-          </a:prstGeom>
-          <a:noFill/>
-          <a:ln/>
-        </p:spPr>
-        <p:txBody>
-          <a:bodyPr wrap="square" lIns="0" tIns="0" rIns="0" bIns="0" rtlCol="0" anchor="ctr"/>
-          <a:lstStyle/>
-          <a:p>
-            <a:pPr algn="ctr" indent="0" marL="0">
-              <a:buNone/>
-            </a:pPr>
-            <a:r>
-              <a:rPr lang="en-US" sz="1400" b="1" dirty="0">
-                <a:solidFill>
-                  <a:srgbClr val="FFFFFF"/>
-                </a:solidFill>
-                <a:latin typeface="Arial" pitchFamily="34" charset="0"/>
-                <a:ea typeface="Arial" pitchFamily="34" charset="-122"/>
-                <a:cs typeface="Arial" pitchFamily="34" charset="-120"/>
-              </a:rPr>
-              <a:t>3</a:t>
-            </a:r>
-            <a:endParaRPr lang="en-US" sz="1400" dirty="0"/>
-          </a:p>
-        </p:txBody>
-      </p:sp>
-      <p:sp>
-        <p:nvSpPr>
-          <p:cNvPr id="13" name="Text 11"/>
-          <p:cNvSpPr/>
-          <p:nvPr/>
-        </p:nvSpPr>
-        <p:spPr>
-          <a:xfrm>
-            <a:off x="548640" y="4297680"/>
-            <a:ext cx="9509760" cy="365760"/>
-          </a:xfrm>
-          <a:prstGeom prst="rect">
-            <a:avLst/>
-          </a:prstGeom>
-          <a:noFill/>
-          <a:ln/>
-        </p:spPr>
-        <p:txBody>
-          <a:bodyPr wrap="square" lIns="0" tIns="0" rIns="0" bIns="0" rtlCol="0" anchor="ctr"/>
-          <a:lstStyle/>
-          <a:p>
-            <a:pPr rtl="1" algn="r" indent="0" marL="0">
-              <a:buNone/>
-            </a:pPr>
-            <a:r>
-              <a:rPr lang="en-US" sz="1800" b="1" dirty="0">
-                <a:solidFill>
-                  <a:srgbClr val="1B1F3B"/>
-                </a:solidFill>
-                <a:latin typeface="Arial" pitchFamily="34" charset="0"/>
-                <a:ea typeface="Arial" pitchFamily="34" charset="-122"/>
-                <a:cs typeface="Arial" pitchFamily="34" charset="-120"/>
-              </a:rPr>
-              <a:t>בדיקת כל Diff</a:t>
-            </a:r>
-            <a:endParaRPr lang="en-US" sz="1800" dirty="0"/>
-          </a:p>
-        </p:txBody>
-      </p:sp>
-      <p:sp>
-        <p:nvSpPr>
-          <p:cNvPr id="14" name="Text 12"/>
-          <p:cNvSpPr/>
-          <p:nvPr/>
-        </p:nvSpPr>
-        <p:spPr>
-          <a:xfrm>
-            <a:off x="548640" y="4681728"/>
-            <a:ext cx="9509760" cy="731520"/>
-          </a:xfrm>
-          <a:prstGeom prst="rect">
-            <a:avLst/>
-          </a:prstGeom>
-          <a:noFill/>
-          <a:ln/>
-        </p:spPr>
-        <p:txBody>
-          <a:bodyPr wrap="square" lIns="0" tIns="0" rIns="0" bIns="0" rtlCol="0" anchor="ctr"/>
-          <a:lstStyle/>
-          <a:p>
-            <a:pPr rtl="1" algn="r" indent="0" marL="0">
-              <a:buNone/>
-            </a:pPr>
-            <a:r>
-              <a:rPr lang="en-US" sz="1400" dirty="0">
-                <a:solidFill>
-                  <a:srgbClr val="6B7280"/>
-                </a:solidFill>
-                <a:latin typeface="Calibri" pitchFamily="34" charset="0"/>
-                <a:ea typeface="Calibri" pitchFamily="34" charset="-122"/>
-                <a:cs typeface="Calibri" pitchFamily="34" charset="-120"/>
-              </a:rPr>
-              <a:t>לפני אישור שינוי, קוראים אותו. תמיד, בלי יוצא מן הכלל</a:t>
-            </a:r>
-            <a:endParaRPr lang="en-US" sz="1400" dirty="0"/>
-          </a:p>
-        </p:txBody>
-      </p:sp>
-      <p:sp>
-        <p:nvSpPr>
-          <p:cNvPr id="15" name="Text 13"/>
           <p:cNvSpPr/>
           <p:nvPr/>
         </p:nvSpPr>
@@ -6366,7 +8770,7 @@
                 <a:ea typeface="Arial" pitchFamily="34" charset="-122"/>
                 <a:cs typeface="Arial" pitchFamily="34" charset="-120"/>
               </a:rPr>
-              <a:t>Best Practices לעבודה עם כלי Agentic (2)</a:t>
+              <a:t>מי משתמש במה, בפועל</a:t>
             </a:r>
             <a:endParaRPr lang="en-US" sz="3000" dirty="0"/>
           </a:p>
@@ -6374,58 +8778,38 @@
       </p:sp>
       <p:sp>
         <p:nvSpPr>
-          <p:cNvPr id="3" name="Shape 1"/>
-          <p:cNvSpPr/>
-          <p:nvPr/>
-        </p:nvSpPr>
-        <p:spPr>
-          <a:xfrm>
-            <a:off x="10332720" y="1554480"/>
-            <a:ext cx="548640" cy="548640"/>
-          </a:xfrm>
-          <a:prstGeom prst="ellipse">
-            <a:avLst/>
-          </a:prstGeom>
-          <a:solidFill>
-            <a:srgbClr val="00C2A8"/>
-          </a:solidFill>
-          <a:ln/>
-        </p:spPr>
-      </p:sp>
-      <p:sp>
-        <p:nvSpPr>
-          <p:cNvPr id="4" name="Text 2"/>
-          <p:cNvSpPr/>
-          <p:nvPr/>
-        </p:nvSpPr>
-        <p:spPr>
-          <a:xfrm>
-            <a:off x="10332720" y="1554480"/>
-            <a:ext cx="548640" cy="548640"/>
-          </a:xfrm>
-          <a:prstGeom prst="rect">
-            <a:avLst/>
-          </a:prstGeom>
-          <a:noFill/>
-          <a:ln/>
-        </p:spPr>
-        <p:txBody>
-          <a:bodyPr wrap="square" lIns="0" tIns="0" rIns="0" bIns="0" rtlCol="0" anchor="ctr"/>
-          <a:lstStyle/>
-          <a:p>
-            <a:pPr algn="ctr" indent="0" marL="0">
+          <p:cNvPr id="3" name="Text 1"/>
+          <p:cNvSpPr/>
+          <p:nvPr/>
+        </p:nvSpPr>
+        <p:spPr>
+          <a:xfrm>
+            <a:off x="7772400" y="1645920"/>
+            <a:ext cx="2743200" cy="457200"/>
+          </a:xfrm>
+          <a:prstGeom prst="rect">
+            <a:avLst/>
+          </a:prstGeom>
+          <a:noFill/>
+          <a:ln/>
+        </p:spPr>
+        <p:txBody>
+          <a:bodyPr wrap="square" lIns="0" tIns="0" rIns="0" bIns="0" rtlCol="0" anchor="ctr"/>
+          <a:lstStyle/>
+          <a:p>
+            <a:pPr rtl="1" algn="r" indent="0" marL="0">
               <a:buNone/>
             </a:pPr>
             <a:r>
               <a:rPr lang="en-US" sz="1400" b="1" dirty="0">
                 <a:solidFill>
-                  <a:srgbClr val="FFFFFF"/>
+                  <a:srgbClr val="6B7280"/>
                 </a:solidFill>
                 <a:latin typeface="Arial" pitchFamily="34" charset="0"/>
                 <a:ea typeface="Arial" pitchFamily="34" charset="-122"/>
                 <a:cs typeface="Arial" pitchFamily="34" charset="-120"/>
               </a:rPr>
-              <a:t>4</a:t>
+              <a:t>כלי</a:t>
             </a:r>
             <a:endParaRPr lang="en-US" sz="1400" dirty="0"/>
           </a:p>
@@ -6433,40 +8817,79 @@
       </p:sp>
       <p:sp>
         <p:nvSpPr>
-          <p:cNvPr id="5" name="Text 3"/>
-          <p:cNvSpPr/>
-          <p:nvPr/>
-        </p:nvSpPr>
-        <p:spPr>
-          <a:xfrm>
-            <a:off x="548640" y="1554480"/>
-            <a:ext cx="9509760" cy="365760"/>
-          </a:xfrm>
-          <a:prstGeom prst="rect">
-            <a:avLst/>
-          </a:prstGeom>
-          <a:noFill/>
-          <a:ln/>
-        </p:spPr>
-        <p:txBody>
-          <a:bodyPr wrap="square" lIns="0" tIns="0" rIns="0" bIns="0" rtlCol="0" anchor="ctr"/>
-          <a:lstStyle/>
-          <a:p>
-            <a:pPr rtl="1" algn="r" indent="0" marL="0">
-              <a:buNone/>
-            </a:pPr>
-            <a:r>
-              <a:rPr lang="en-US" sz="1800" b="1" dirty="0">
-                <a:solidFill>
-                  <a:srgbClr val="1B1F3B"/>
+          <p:cNvPr id="4" name="Text 2"/>
+          <p:cNvSpPr/>
+          <p:nvPr/>
+        </p:nvSpPr>
+        <p:spPr>
+          <a:xfrm>
+            <a:off x="4114800" y="1645920"/>
+            <a:ext cx="3383280" cy="457200"/>
+          </a:xfrm>
+          <a:prstGeom prst="rect">
+            <a:avLst/>
+          </a:prstGeom>
+          <a:noFill/>
+          <a:ln/>
+        </p:spPr>
+        <p:txBody>
+          <a:bodyPr wrap="square" lIns="0" tIns="0" rIns="0" bIns="0" rtlCol="0" anchor="ctr"/>
+          <a:lstStyle/>
+          <a:p>
+            <a:pPr rtl="1" algn="ctr" indent="0" marL="0">
+              <a:buNone/>
+            </a:pPr>
+            <a:r>
+              <a:rPr lang="en-US" sz="1400" b="1" dirty="0">
+                <a:solidFill>
+                  <a:srgbClr val="6B7280"/>
                 </a:solidFill>
                 <a:latin typeface="Arial" pitchFamily="34" charset="0"/>
                 <a:ea typeface="Arial" pitchFamily="34" charset="-122"/>
                 <a:cs typeface="Arial" pitchFamily="34" charset="-120"/>
               </a:rPr>
-              <a:t>Git כרשת ביטחון</a:t>
-            </a:r>
-            <a:endParaRPr lang="en-US" sz="1800" dirty="0"/>
+              <a:t>נתח שימוש כללי</a:t>
+            </a:r>
+            <a:endParaRPr lang="en-US" sz="1400" dirty="0"/>
+          </a:p>
+        </p:txBody>
+      </p:sp>
+      <p:sp>
+        <p:nvSpPr>
+          <p:cNvPr id="5" name="Text 3"/>
+          <p:cNvSpPr/>
+          <p:nvPr/>
+        </p:nvSpPr>
+        <p:spPr>
+          <a:xfrm>
+            <a:off x="548640" y="1645920"/>
+            <a:ext cx="3383280" cy="457200"/>
+          </a:xfrm>
+          <a:prstGeom prst="rect">
+            <a:avLst/>
+          </a:prstGeom>
+          <a:noFill/>
+          <a:ln/>
+        </p:spPr>
+        <p:txBody>
+          <a:bodyPr wrap="square" lIns="0" tIns="0" rIns="0" bIns="0" rtlCol="0" anchor="ctr"/>
+          <a:lstStyle/>
+          <a:p>
+            <a:pPr rtl="1" algn="ctr" indent="0" marL="0">
+              <a:buNone/>
+            </a:pPr>
+            <a:r>
+              <a:rPr lang="en-US" sz="1400" b="1" dirty="0">
+                <a:solidFill>
+                  <a:srgbClr val="6B7280"/>
+                </a:solidFill>
+                <a:latin typeface="Arial" pitchFamily="34" charset="0"/>
+                <a:ea typeface="Arial" pitchFamily="34" charset="-122"/>
+                <a:cs typeface="Arial" pitchFamily="34" charset="-120"/>
+              </a:rPr>
+              <a:t>ככלי ראשי (Agentic)</a:t>
+            </a:r>
+            <a:endParaRPr lang="en-US" sz="1400" dirty="0"/>
           </a:p>
         </p:txBody>
       </p:sp>
@@ -6478,8 +8901,8 @@
         </p:nvSpPr>
         <p:spPr>
           <a:xfrm>
-            <a:off x="548640" y="1938528"/>
-            <a:ext cx="9509760" cy="731520"/>
+            <a:off x="7772400" y="2194560"/>
+            <a:ext cx="2743200" cy="548640"/>
           </a:xfrm>
           <a:prstGeom prst="rect">
             <a:avLst/>
@@ -6495,7 +8918,536 @@
               <a:buNone/>
             </a:pPr>
             <a:r>
-              <a:rPr lang="en-US" sz="1400" dirty="0">
+              <a:rPr lang="en-US" sz="1500" b="1" dirty="0">
+                <a:solidFill>
+                  <a:srgbClr val="1B1F3B"/>
+                </a:solidFill>
+                <a:latin typeface="Arial" pitchFamily="34" charset="0"/>
+                <a:ea typeface="Arial" pitchFamily="34" charset="-122"/>
+                <a:cs typeface="Arial" pitchFamily="34" charset="-120"/>
+              </a:rPr>
+              <a:t>ChatGPT</a:t>
+            </a:r>
+            <a:endParaRPr lang="en-US" sz="1500" dirty="0"/>
+          </a:p>
+        </p:txBody>
+      </p:sp>
+      <p:sp>
+        <p:nvSpPr>
+          <p:cNvPr id="7" name="Text 5"/>
+          <p:cNvSpPr/>
+          <p:nvPr/>
+        </p:nvSpPr>
+        <p:spPr>
+          <a:xfrm>
+            <a:off x="4114800" y="2194560"/>
+            <a:ext cx="3383280" cy="548640"/>
+          </a:xfrm>
+          <a:prstGeom prst="rect">
+            <a:avLst/>
+          </a:prstGeom>
+          <a:noFill/>
+          <a:ln/>
+        </p:spPr>
+        <p:txBody>
+          <a:bodyPr wrap="square" lIns="0" tIns="0" rIns="0" bIns="0" rtlCol="0" anchor="ctr"/>
+          <a:lstStyle/>
+          <a:p>
+            <a:pPr algn="ctr" indent="0" marL="0">
+              <a:buNone/>
+            </a:pPr>
+            <a:r>
+              <a:rPr lang="en-US" sz="1500" dirty="0">
+                <a:solidFill>
+                  <a:srgbClr val="1B1F3B"/>
+                </a:solidFill>
+                <a:latin typeface="Arial" pitchFamily="34" charset="0"/>
+                <a:ea typeface="Arial" pitchFamily="34" charset="-122"/>
+                <a:cs typeface="Arial" pitchFamily="34" charset="-120"/>
+              </a:rPr>
+              <a:t>82%</a:t>
+            </a:r>
+            <a:endParaRPr lang="en-US" sz="1500" dirty="0"/>
+          </a:p>
+        </p:txBody>
+      </p:sp>
+      <p:sp>
+        <p:nvSpPr>
+          <p:cNvPr id="8" name="Text 6"/>
+          <p:cNvSpPr/>
+          <p:nvPr/>
+        </p:nvSpPr>
+        <p:spPr>
+          <a:xfrm>
+            <a:off x="548640" y="2194560"/>
+            <a:ext cx="3383280" cy="548640"/>
+          </a:xfrm>
+          <a:prstGeom prst="rect">
+            <a:avLst/>
+          </a:prstGeom>
+          <a:noFill/>
+          <a:ln/>
+        </p:spPr>
+        <p:txBody>
+          <a:bodyPr wrap="square" lIns="0" tIns="0" rIns="0" bIns="0" rtlCol="0" anchor="ctr"/>
+          <a:lstStyle/>
+          <a:p>
+            <a:pPr algn="ctr" indent="0" marL="0">
+              <a:buNone/>
+            </a:pPr>
+            <a:r>
+              <a:rPr lang="en-US" sz="1500" dirty="0">
+                <a:solidFill>
+                  <a:srgbClr val="1B1F3B"/>
+                </a:solidFill>
+                <a:latin typeface="Arial" pitchFamily="34" charset="0"/>
+                <a:ea typeface="Arial" pitchFamily="34" charset="-122"/>
+                <a:cs typeface="Arial" pitchFamily="34" charset="-120"/>
+              </a:rPr>
+              <a:t>—</a:t>
+            </a:r>
+            <a:endParaRPr lang="en-US" sz="1500" dirty="0"/>
+          </a:p>
+        </p:txBody>
+      </p:sp>
+      <p:sp>
+        <p:nvSpPr>
+          <p:cNvPr id="9" name="Text 7"/>
+          <p:cNvSpPr/>
+          <p:nvPr/>
+        </p:nvSpPr>
+        <p:spPr>
+          <a:xfrm>
+            <a:off x="7772400" y="2971800"/>
+            <a:ext cx="2743200" cy="548640"/>
+          </a:xfrm>
+          <a:prstGeom prst="rect">
+            <a:avLst/>
+          </a:prstGeom>
+          <a:noFill/>
+          <a:ln/>
+        </p:spPr>
+        <p:txBody>
+          <a:bodyPr wrap="square" lIns="0" tIns="0" rIns="0" bIns="0" rtlCol="0" anchor="ctr"/>
+          <a:lstStyle/>
+          <a:p>
+            <a:pPr rtl="1" algn="r" indent="0" marL="0">
+              <a:buNone/>
+            </a:pPr>
+            <a:r>
+              <a:rPr lang="en-US" sz="1500" b="1" dirty="0">
+                <a:solidFill>
+                  <a:srgbClr val="1B1F3B"/>
+                </a:solidFill>
+                <a:latin typeface="Arial" pitchFamily="34" charset="0"/>
+                <a:ea typeface="Arial" pitchFamily="34" charset="-122"/>
+                <a:cs typeface="Arial" pitchFamily="34" charset="-120"/>
+              </a:rPr>
+              <a:t>GitHub Copilot</a:t>
+            </a:r>
+            <a:endParaRPr lang="en-US" sz="1500" dirty="0"/>
+          </a:p>
+        </p:txBody>
+      </p:sp>
+      <p:sp>
+        <p:nvSpPr>
+          <p:cNvPr id="10" name="Text 8"/>
+          <p:cNvSpPr/>
+          <p:nvPr/>
+        </p:nvSpPr>
+        <p:spPr>
+          <a:xfrm>
+            <a:off x="4114800" y="2971800"/>
+            <a:ext cx="3383280" cy="548640"/>
+          </a:xfrm>
+          <a:prstGeom prst="rect">
+            <a:avLst/>
+          </a:prstGeom>
+          <a:noFill/>
+          <a:ln/>
+        </p:spPr>
+        <p:txBody>
+          <a:bodyPr wrap="square" lIns="0" tIns="0" rIns="0" bIns="0" rtlCol="0" anchor="ctr"/>
+          <a:lstStyle/>
+          <a:p>
+            <a:pPr algn="ctr" indent="0" marL="0">
+              <a:buNone/>
+            </a:pPr>
+            <a:r>
+              <a:rPr lang="en-US" sz="1500" dirty="0">
+                <a:solidFill>
+                  <a:srgbClr val="1B1F3B"/>
+                </a:solidFill>
+                <a:latin typeface="Arial" pitchFamily="34" charset="0"/>
+                <a:ea typeface="Arial" pitchFamily="34" charset="-122"/>
+                <a:cs typeface="Arial" pitchFamily="34" charset="-120"/>
+              </a:rPr>
+              <a:t>68%</a:t>
+            </a:r>
+            <a:endParaRPr lang="en-US" sz="1500" dirty="0"/>
+          </a:p>
+        </p:txBody>
+      </p:sp>
+      <p:sp>
+        <p:nvSpPr>
+          <p:cNvPr id="11" name="Text 9"/>
+          <p:cNvSpPr/>
+          <p:nvPr/>
+        </p:nvSpPr>
+        <p:spPr>
+          <a:xfrm>
+            <a:off x="548640" y="2971800"/>
+            <a:ext cx="3383280" cy="548640"/>
+          </a:xfrm>
+          <a:prstGeom prst="rect">
+            <a:avLst/>
+          </a:prstGeom>
+          <a:noFill/>
+          <a:ln/>
+        </p:spPr>
+        <p:txBody>
+          <a:bodyPr wrap="square" lIns="0" tIns="0" rIns="0" bIns="0" rtlCol="0" anchor="ctr"/>
+          <a:lstStyle/>
+          <a:p>
+            <a:pPr algn="ctr" indent="0" marL="0">
+              <a:buNone/>
+            </a:pPr>
+            <a:r>
+              <a:rPr lang="en-US" sz="1500" dirty="0">
+                <a:solidFill>
+                  <a:srgbClr val="1B1F3B"/>
+                </a:solidFill>
+                <a:latin typeface="Arial" pitchFamily="34" charset="0"/>
+                <a:ea typeface="Arial" pitchFamily="34" charset="-122"/>
+                <a:cs typeface="Arial" pitchFamily="34" charset="-120"/>
+              </a:rPr>
+              <a:t>—</a:t>
+            </a:r>
+            <a:endParaRPr lang="en-US" sz="1500" dirty="0"/>
+          </a:p>
+        </p:txBody>
+      </p:sp>
+      <p:sp>
+        <p:nvSpPr>
+          <p:cNvPr id="12" name="Text 10"/>
+          <p:cNvSpPr/>
+          <p:nvPr/>
+        </p:nvSpPr>
+        <p:spPr>
+          <a:xfrm>
+            <a:off x="7772400" y="3749040"/>
+            <a:ext cx="2743200" cy="548640"/>
+          </a:xfrm>
+          <a:prstGeom prst="rect">
+            <a:avLst/>
+          </a:prstGeom>
+          <a:noFill/>
+          <a:ln/>
+        </p:spPr>
+        <p:txBody>
+          <a:bodyPr wrap="square" lIns="0" tIns="0" rIns="0" bIns="0" rtlCol="0" anchor="ctr"/>
+          <a:lstStyle/>
+          <a:p>
+            <a:pPr rtl="1" algn="r" indent="0" marL="0">
+              <a:buNone/>
+            </a:pPr>
+            <a:r>
+              <a:rPr lang="en-US" sz="1500" b="1" dirty="0">
+                <a:solidFill>
+                  <a:srgbClr val="1B1F3B"/>
+                </a:solidFill>
+                <a:latin typeface="Arial" pitchFamily="34" charset="0"/>
+                <a:ea typeface="Arial" pitchFamily="34" charset="-122"/>
+                <a:cs typeface="Arial" pitchFamily="34" charset="-120"/>
+              </a:rPr>
+              <a:t>Cursor</a:t>
+            </a:r>
+            <a:endParaRPr lang="en-US" sz="1500" dirty="0"/>
+          </a:p>
+        </p:txBody>
+      </p:sp>
+      <p:sp>
+        <p:nvSpPr>
+          <p:cNvPr id="13" name="Text 11"/>
+          <p:cNvSpPr/>
+          <p:nvPr/>
+        </p:nvSpPr>
+        <p:spPr>
+          <a:xfrm>
+            <a:off x="4114800" y="3749040"/>
+            <a:ext cx="3383280" cy="548640"/>
+          </a:xfrm>
+          <a:prstGeom prst="rect">
+            <a:avLst/>
+          </a:prstGeom>
+          <a:noFill/>
+          <a:ln/>
+        </p:spPr>
+        <p:txBody>
+          <a:bodyPr wrap="square" lIns="0" tIns="0" rIns="0" bIns="0" rtlCol="0" anchor="ctr"/>
+          <a:lstStyle/>
+          <a:p>
+            <a:pPr algn="ctr" indent="0" marL="0">
+              <a:buNone/>
+            </a:pPr>
+            <a:r>
+              <a:rPr lang="en-US" sz="1500" dirty="0">
+                <a:solidFill>
+                  <a:srgbClr val="1B1F3B"/>
+                </a:solidFill>
+                <a:latin typeface="Arial" pitchFamily="34" charset="0"/>
+                <a:ea typeface="Arial" pitchFamily="34" charset="-122"/>
+                <a:cs typeface="Arial" pitchFamily="34" charset="-120"/>
+              </a:rPr>
+              <a:t>18%</a:t>
+            </a:r>
+            <a:endParaRPr lang="en-US" sz="1500" dirty="0"/>
+          </a:p>
+        </p:txBody>
+      </p:sp>
+      <p:sp>
+        <p:nvSpPr>
+          <p:cNvPr id="14" name="Text 12"/>
+          <p:cNvSpPr/>
+          <p:nvPr/>
+        </p:nvSpPr>
+        <p:spPr>
+          <a:xfrm>
+            <a:off x="548640" y="3749040"/>
+            <a:ext cx="3383280" cy="548640"/>
+          </a:xfrm>
+          <a:prstGeom prst="rect">
+            <a:avLst/>
+          </a:prstGeom>
+          <a:noFill/>
+          <a:ln/>
+        </p:spPr>
+        <p:txBody>
+          <a:bodyPr wrap="square" lIns="0" tIns="0" rIns="0" bIns="0" rtlCol="0" anchor="ctr"/>
+          <a:lstStyle/>
+          <a:p>
+            <a:pPr algn="ctr" indent="0" marL="0">
+              <a:buNone/>
+            </a:pPr>
+            <a:r>
+              <a:rPr lang="en-US" sz="1500" dirty="0">
+                <a:solidFill>
+                  <a:srgbClr val="1B1F3B"/>
+                </a:solidFill>
+                <a:latin typeface="Arial" pitchFamily="34" charset="0"/>
+                <a:ea typeface="Arial" pitchFamily="34" charset="-122"/>
+                <a:cs typeface="Arial" pitchFamily="34" charset="-120"/>
+              </a:rPr>
+              <a:t>24%</a:t>
+            </a:r>
+            <a:endParaRPr lang="en-US" sz="1500" dirty="0"/>
+          </a:p>
+        </p:txBody>
+      </p:sp>
+      <p:sp>
+        <p:nvSpPr>
+          <p:cNvPr id="15" name="Shape 13"/>
+          <p:cNvSpPr/>
+          <p:nvPr/>
+        </p:nvSpPr>
+        <p:spPr>
+          <a:xfrm>
+            <a:off x="548640" y="4453128"/>
+            <a:ext cx="10725912" cy="685800"/>
+          </a:xfrm>
+          <a:prstGeom prst="roundRect">
+            <a:avLst>
+              <a:gd name="adj" fmla="val 10667"/>
+            </a:avLst>
+          </a:prstGeom>
+          <a:solidFill>
+            <a:srgbClr val="E6FBF7"/>
+          </a:solidFill>
+          <a:ln/>
+        </p:spPr>
+      </p:sp>
+      <p:sp>
+        <p:nvSpPr>
+          <p:cNvPr id="16" name="Text 14"/>
+          <p:cNvSpPr/>
+          <p:nvPr/>
+        </p:nvSpPr>
+        <p:spPr>
+          <a:xfrm>
+            <a:off x="7772400" y="4526280"/>
+            <a:ext cx="2743200" cy="548640"/>
+          </a:xfrm>
+          <a:prstGeom prst="rect">
+            <a:avLst/>
+          </a:prstGeom>
+          <a:noFill/>
+          <a:ln/>
+        </p:spPr>
+        <p:txBody>
+          <a:bodyPr wrap="square" lIns="0" tIns="0" rIns="0" bIns="0" rtlCol="0" anchor="ctr"/>
+          <a:lstStyle/>
+          <a:p>
+            <a:pPr rtl="1" algn="r" indent="0" marL="0">
+              <a:buNone/>
+            </a:pPr>
+            <a:r>
+              <a:rPr lang="en-US" sz="1500" b="1" dirty="0">
+                <a:solidFill>
+                  <a:srgbClr val="1B1F3B"/>
+                </a:solidFill>
+                <a:latin typeface="Arial" pitchFamily="34" charset="0"/>
+                <a:ea typeface="Arial" pitchFamily="34" charset="-122"/>
+                <a:cs typeface="Arial" pitchFamily="34" charset="-120"/>
+              </a:rPr>
+              <a:t>Claude Code</a:t>
+            </a:r>
+            <a:endParaRPr lang="en-US" sz="1500" dirty="0"/>
+          </a:p>
+        </p:txBody>
+      </p:sp>
+      <p:sp>
+        <p:nvSpPr>
+          <p:cNvPr id="17" name="Text 15"/>
+          <p:cNvSpPr/>
+          <p:nvPr/>
+        </p:nvSpPr>
+        <p:spPr>
+          <a:xfrm>
+            <a:off x="4114800" y="4526280"/>
+            <a:ext cx="3383280" cy="548640"/>
+          </a:xfrm>
+          <a:prstGeom prst="rect">
+            <a:avLst/>
+          </a:prstGeom>
+          <a:noFill/>
+          <a:ln/>
+        </p:spPr>
+        <p:txBody>
+          <a:bodyPr wrap="square" lIns="0" tIns="0" rIns="0" bIns="0" rtlCol="0" anchor="ctr"/>
+          <a:lstStyle/>
+          <a:p>
+            <a:pPr algn="ctr" indent="0" marL="0">
+              <a:buNone/>
+            </a:pPr>
+            <a:r>
+              <a:rPr lang="en-US" sz="1500" dirty="0">
+                <a:solidFill>
+                  <a:srgbClr val="1B1F3B"/>
+                </a:solidFill>
+                <a:latin typeface="Arial" pitchFamily="34" charset="0"/>
+                <a:ea typeface="Arial" pitchFamily="34" charset="-122"/>
+                <a:cs typeface="Arial" pitchFamily="34" charset="-120"/>
+              </a:rPr>
+              <a:t>10%</a:t>
+            </a:r>
+            <a:endParaRPr lang="en-US" sz="1500" dirty="0"/>
+          </a:p>
+        </p:txBody>
+      </p:sp>
+      <p:sp>
+        <p:nvSpPr>
+          <p:cNvPr id="18" name="Text 16"/>
+          <p:cNvSpPr/>
+          <p:nvPr/>
+        </p:nvSpPr>
+        <p:spPr>
+          <a:xfrm>
+            <a:off x="548640" y="4526280"/>
+            <a:ext cx="3383280" cy="548640"/>
+          </a:xfrm>
+          <a:prstGeom prst="rect">
+            <a:avLst/>
+          </a:prstGeom>
+          <a:noFill/>
+          <a:ln/>
+        </p:spPr>
+        <p:txBody>
+          <a:bodyPr wrap="square" lIns="0" tIns="0" rIns="0" bIns="0" rtlCol="0" anchor="ctr"/>
+          <a:lstStyle/>
+          <a:p>
+            <a:pPr algn="ctr" indent="0" marL="0">
+              <a:buNone/>
+            </a:pPr>
+            <a:r>
+              <a:rPr lang="en-US" sz="1500" b="1" dirty="0">
+                <a:solidFill>
+                  <a:srgbClr val="00C2A8"/>
+                </a:solidFill>
+                <a:latin typeface="Arial" pitchFamily="34" charset="0"/>
+                <a:ea typeface="Arial" pitchFamily="34" charset="-122"/>
+                <a:cs typeface="Arial" pitchFamily="34" charset="-120"/>
+              </a:rPr>
+              <a:t>28%</a:t>
+            </a:r>
+            <a:endParaRPr lang="en-US" sz="1500" dirty="0"/>
+          </a:p>
+        </p:txBody>
+      </p:sp>
+      <p:sp>
+        <p:nvSpPr>
+          <p:cNvPr id="19" name="Text 17"/>
+          <p:cNvSpPr/>
+          <p:nvPr/>
+        </p:nvSpPr>
+        <p:spPr>
+          <a:xfrm>
+            <a:off x="548640" y="5532120"/>
+            <a:ext cx="11091672" cy="457200"/>
+          </a:xfrm>
+          <a:prstGeom prst="rect">
+            <a:avLst/>
+          </a:prstGeom>
+          <a:noFill/>
+          <a:ln/>
+        </p:spPr>
+        <p:txBody>
+          <a:bodyPr wrap="square" lIns="0" tIns="0" rIns="0" bIns="0" rtlCol="0" anchor="ctr"/>
+          <a:lstStyle/>
+          <a:p>
+            <a:pPr rtl="1" algn="r" indent="0" marL="0">
+              <a:buNone/>
+            </a:pPr>
+            <a:r>
+              <a:rPr lang="en-US" sz="1400" b="1" i="1" dirty="0">
+                <a:solidFill>
+                  <a:srgbClr val="1B1F3B"/>
+                </a:solidFill>
+                <a:latin typeface="Arial" pitchFamily="34" charset="0"/>
+                <a:ea typeface="Arial" pitchFamily="34" charset="-122"/>
+                <a:cs typeface="Arial" pitchFamily="34" charset="-120"/>
+              </a:rPr>
+              <a:t>אין "כלי אחד נכון" — יש כלי נגיש, ויש כלי שמוביל בקרב מומחים</a:t>
+            </a:r>
+            <a:endParaRPr lang="en-US" sz="1400" dirty="0"/>
+          </a:p>
+        </p:txBody>
+      </p:sp>
+      <p:sp>
+        <p:nvSpPr>
+          <p:cNvPr id="20" name="Text 18"/>
+          <p:cNvSpPr/>
+          <p:nvPr/>
+        </p:nvSpPr>
+        <p:spPr>
+          <a:xfrm>
+            <a:off x="548640" y="6172200"/>
+            <a:ext cx="11091672" cy="274320"/>
+          </a:xfrm>
+          <a:prstGeom prst="rect">
+            <a:avLst/>
+          </a:prstGeom>
+          <a:noFill/>
+          <a:ln/>
+        </p:spPr>
+        <p:txBody>
+          <a:bodyPr wrap="square" lIns="0" tIns="0" rIns="0" bIns="0" rtlCol="0" anchor="ctr"/>
+          <a:lstStyle/>
+          <a:p>
+            <a:pPr rtl="1" algn="r" indent="0" marL="0">
+              <a:buNone/>
+            </a:pPr>
+            <a:r>
+              <a:rPr lang="en-US" sz="1000" i="1" dirty="0">
                 <a:solidFill>
                   <a:srgbClr val="6B7280"/>
                 </a:solidFill>
@@ -6503,289 +9455,15 @@
                 <a:ea typeface="Calibri" pitchFamily="34" charset="-122"/>
                 <a:cs typeface="Calibri" pitchFamily="34" charset="-120"/>
               </a:rPr>
-              <a:t>Commit לפני כל ניסוי משמעותי — תמיד אפשר לחזור אחורה</a:t>
-            </a:r>
-            <a:endParaRPr lang="en-US" sz="1400" dirty="0"/>
-          </a:p>
-        </p:txBody>
-      </p:sp>
-      <p:sp>
-        <p:nvSpPr>
-          <p:cNvPr id="7" name="Shape 5"/>
-          <p:cNvSpPr/>
-          <p:nvPr/>
-        </p:nvSpPr>
-        <p:spPr>
-          <a:xfrm>
-            <a:off x="10332720" y="2926080"/>
-            <a:ext cx="548640" cy="548640"/>
-          </a:xfrm>
-          <a:prstGeom prst="ellipse">
-            <a:avLst/>
-          </a:prstGeom>
-          <a:solidFill>
-            <a:srgbClr val="00C2A8"/>
-          </a:solidFill>
-          <a:ln/>
-        </p:spPr>
-      </p:sp>
-      <p:sp>
-        <p:nvSpPr>
-          <p:cNvPr id="8" name="Text 6"/>
-          <p:cNvSpPr/>
-          <p:nvPr/>
-        </p:nvSpPr>
-        <p:spPr>
-          <a:xfrm>
-            <a:off x="10332720" y="2926080"/>
-            <a:ext cx="548640" cy="548640"/>
-          </a:xfrm>
-          <a:prstGeom prst="rect">
-            <a:avLst/>
-          </a:prstGeom>
-          <a:noFill/>
-          <a:ln/>
-        </p:spPr>
-        <p:txBody>
-          <a:bodyPr wrap="square" lIns="0" tIns="0" rIns="0" bIns="0" rtlCol="0" anchor="ctr"/>
-          <a:lstStyle/>
-          <a:p>
-            <a:pPr algn="ctr" indent="0" marL="0">
-              <a:buNone/>
-            </a:pPr>
-            <a:r>
-              <a:rPr lang="en-US" sz="1400" b="1" dirty="0">
-                <a:solidFill>
-                  <a:srgbClr val="FFFFFF"/>
-                </a:solidFill>
-                <a:latin typeface="Arial" pitchFamily="34" charset="0"/>
-                <a:ea typeface="Arial" pitchFamily="34" charset="-122"/>
-                <a:cs typeface="Arial" pitchFamily="34" charset="-120"/>
-              </a:rPr>
-              <a:t>5</a:t>
-            </a:r>
-            <a:endParaRPr lang="en-US" sz="1400" dirty="0"/>
-          </a:p>
-        </p:txBody>
-      </p:sp>
-      <p:sp>
-        <p:nvSpPr>
-          <p:cNvPr id="9" name="Text 7"/>
-          <p:cNvSpPr/>
-          <p:nvPr/>
-        </p:nvSpPr>
-        <p:spPr>
-          <a:xfrm>
-            <a:off x="548640" y="2926080"/>
-            <a:ext cx="9509760" cy="365760"/>
-          </a:xfrm>
-          <a:prstGeom prst="rect">
-            <a:avLst/>
-          </a:prstGeom>
-          <a:noFill/>
-          <a:ln/>
-        </p:spPr>
-        <p:txBody>
-          <a:bodyPr wrap="square" lIns="0" tIns="0" rIns="0" bIns="0" rtlCol="0" anchor="ctr"/>
-          <a:lstStyle/>
-          <a:p>
-            <a:pPr rtl="1" algn="r" indent="0" marL="0">
-              <a:buNone/>
-            </a:pPr>
-            <a:r>
-              <a:rPr lang="en-US" sz="1800" b="1" dirty="0">
-                <a:solidFill>
-                  <a:srgbClr val="1B1F3B"/>
-                </a:solidFill>
-                <a:latin typeface="Arial" pitchFamily="34" charset="0"/>
-                <a:ea typeface="Arial" pitchFamily="34" charset="-122"/>
-                <a:cs typeface="Arial" pitchFamily="34" charset="-120"/>
-              </a:rPr>
-              <a:t>לא לסמוך בעיוורון</a:t>
-            </a:r>
-            <a:endParaRPr lang="en-US" sz="1800" dirty="0"/>
-          </a:p>
-        </p:txBody>
-      </p:sp>
-      <p:sp>
-        <p:nvSpPr>
-          <p:cNvPr id="10" name="Text 8"/>
-          <p:cNvSpPr/>
-          <p:nvPr/>
-        </p:nvSpPr>
-        <p:spPr>
-          <a:xfrm>
-            <a:off x="548640" y="3310128"/>
-            <a:ext cx="9509760" cy="731520"/>
-          </a:xfrm>
-          <a:prstGeom prst="rect">
-            <a:avLst/>
-          </a:prstGeom>
-          <a:noFill/>
-          <a:ln/>
-        </p:spPr>
-        <p:txBody>
-          <a:bodyPr wrap="square" lIns="0" tIns="0" rIns="0" bIns="0" rtlCol="0" anchor="ctr"/>
-          <a:lstStyle/>
-          <a:p>
-            <a:pPr rtl="1" algn="r" indent="0" marL="0">
-              <a:buNone/>
-            </a:pPr>
-            <a:r>
-              <a:rPr lang="en-US" sz="1400" dirty="0">
-                <a:solidFill>
-                  <a:srgbClr val="6B7280"/>
-                </a:solidFill>
-                <a:latin typeface="Calibri" pitchFamily="34" charset="0"/>
-                <a:ea typeface="Calibri" pitchFamily="34" charset="-122"/>
-                <a:cs typeface="Calibri" pitchFamily="34" charset="-120"/>
-              </a:rPr>
-              <a:t>אם משהו נראה “יותר מדי חכם” או משתמש בפונקציה לא מוכרת — בודקים שהיא קיימת</a:t>
-            </a:r>
-            <a:endParaRPr lang="en-US" sz="1400" dirty="0"/>
-          </a:p>
-        </p:txBody>
-      </p:sp>
-      <p:sp>
-        <p:nvSpPr>
-          <p:cNvPr id="11" name="Shape 9"/>
-          <p:cNvSpPr/>
-          <p:nvPr/>
-        </p:nvSpPr>
-        <p:spPr>
-          <a:xfrm>
-            <a:off x="10332720" y="4297680"/>
-            <a:ext cx="548640" cy="548640"/>
-          </a:xfrm>
-          <a:prstGeom prst="ellipse">
-            <a:avLst/>
-          </a:prstGeom>
-          <a:solidFill>
-            <a:srgbClr val="00C2A8"/>
-          </a:solidFill>
-          <a:ln/>
-        </p:spPr>
-      </p:sp>
-      <p:sp>
-        <p:nvSpPr>
-          <p:cNvPr id="12" name="Text 10"/>
-          <p:cNvSpPr/>
-          <p:nvPr/>
-        </p:nvSpPr>
-        <p:spPr>
-          <a:xfrm>
-            <a:off x="10332720" y="4297680"/>
-            <a:ext cx="548640" cy="548640"/>
-          </a:xfrm>
-          <a:prstGeom prst="rect">
-            <a:avLst/>
-          </a:prstGeom>
-          <a:noFill/>
-          <a:ln/>
-        </p:spPr>
-        <p:txBody>
-          <a:bodyPr wrap="square" lIns="0" tIns="0" rIns="0" bIns="0" rtlCol="0" anchor="ctr"/>
-          <a:lstStyle/>
-          <a:p>
-            <a:pPr algn="ctr" indent="0" marL="0">
-              <a:buNone/>
-            </a:pPr>
-            <a:r>
-              <a:rPr lang="en-US" sz="1400" b="1" dirty="0">
-                <a:solidFill>
-                  <a:srgbClr val="FFFFFF"/>
-                </a:solidFill>
-                <a:latin typeface="Arial" pitchFamily="34" charset="0"/>
-                <a:ea typeface="Arial" pitchFamily="34" charset="-122"/>
-                <a:cs typeface="Arial" pitchFamily="34" charset="-120"/>
-              </a:rPr>
-              <a:t>6</a:t>
-            </a:r>
-            <a:endParaRPr lang="en-US" sz="1400" dirty="0"/>
-          </a:p>
-        </p:txBody>
-      </p:sp>
-      <p:sp>
-        <p:nvSpPr>
-          <p:cNvPr id="13" name="Text 11"/>
-          <p:cNvSpPr/>
-          <p:nvPr/>
-        </p:nvSpPr>
-        <p:spPr>
-          <a:xfrm>
-            <a:off x="548640" y="4297680"/>
-            <a:ext cx="9509760" cy="365760"/>
-          </a:xfrm>
-          <a:prstGeom prst="rect">
-            <a:avLst/>
-          </a:prstGeom>
-          <a:noFill/>
-          <a:ln/>
-        </p:spPr>
-        <p:txBody>
-          <a:bodyPr wrap="square" lIns="0" tIns="0" rIns="0" bIns="0" rtlCol="0" anchor="ctr"/>
-          <a:lstStyle/>
-          <a:p>
-            <a:pPr rtl="1" algn="r" indent="0" marL="0">
-              <a:buNone/>
-            </a:pPr>
-            <a:r>
-              <a:rPr lang="en-US" sz="1800" b="1" dirty="0">
-                <a:solidFill>
-                  <a:srgbClr val="1B1F3B"/>
-                </a:solidFill>
-                <a:latin typeface="Arial" pitchFamily="34" charset="0"/>
-                <a:ea typeface="Arial" pitchFamily="34" charset="-122"/>
-                <a:cs typeface="Arial" pitchFamily="34" charset="-120"/>
-              </a:rPr>
-              <a:t>איטרציה, לא ניסיון יחיד</a:t>
-            </a:r>
-            <a:endParaRPr lang="en-US" sz="1800" dirty="0"/>
-          </a:p>
-        </p:txBody>
-      </p:sp>
-      <p:sp>
-        <p:nvSpPr>
-          <p:cNvPr id="14" name="Text 12"/>
-          <p:cNvSpPr/>
-          <p:nvPr/>
-        </p:nvSpPr>
-        <p:spPr>
-          <a:xfrm>
-            <a:off x="548640" y="4681728"/>
-            <a:ext cx="9509760" cy="731520"/>
-          </a:xfrm>
-          <a:prstGeom prst="rect">
-            <a:avLst/>
-          </a:prstGeom>
-          <a:noFill/>
-          <a:ln/>
-        </p:spPr>
-        <p:txBody>
-          <a:bodyPr wrap="square" lIns="0" tIns="0" rIns="0" bIns="0" rtlCol="0" anchor="ctr"/>
-          <a:lstStyle/>
-          <a:p>
-            <a:pPr rtl="1" algn="r" indent="0" marL="0">
-              <a:buNone/>
-            </a:pPr>
-            <a:r>
-              <a:rPr lang="en-US" sz="1400" dirty="0">
-                <a:solidFill>
-                  <a:srgbClr val="6B7280"/>
-                </a:solidFill>
-                <a:latin typeface="Calibri" pitchFamily="34" charset="0"/>
-                <a:ea typeface="Calibri" pitchFamily="34" charset="-122"/>
-                <a:cs typeface="Calibri" pitchFamily="34" charset="-120"/>
-              </a:rPr>
-              <a:t>אם התוצאה הראשונה לא מושלמת, מבקשים תיקון ממוקד — לא מתחילים מאפס</a:t>
-            </a:r>
-            <a:endParaRPr lang="en-US" sz="1400" dirty="0"/>
-          </a:p>
-        </p:txBody>
-      </p:sp>
-      <p:sp>
-        <p:nvSpPr>
-          <p:cNvPr id="15" name="Text 13"/>
+              <a:t>מקור: Stack Overflow Developer Survey 2025 · index.dev 2026</a:t>
+            </a:r>
+            <a:endParaRPr lang="en-US" sz="1000" dirty="0"/>
+          </a:p>
+        </p:txBody>
+      </p:sp>
+      <p:sp>
+        <p:nvSpPr>
+          <p:cNvPr id="21" name="Text 19"/>
           <p:cNvSpPr/>
           <p:nvPr/>
         </p:nvSpPr>
@@ -6836,7 +9514,7 @@
     <p:bg>
       <p:bgPr>
         <a:solidFill>
-          <a:srgbClr val="1B1F3B"/>
+          <a:srgbClr val="FFFFFF"/>
         </a:solidFill>
       </p:bgPr>
     </p:bg>
@@ -6862,182 +9540,460 @@
         </p:nvSpPr>
         <p:spPr>
           <a:xfrm>
-            <a:off x="548640" y="457200"/>
-            <a:ext cx="11091672" cy="548640"/>
-          </a:xfrm>
-          <a:prstGeom prst="rect">
-            <a:avLst/>
-          </a:prstGeom>
-          <a:noFill/>
-          <a:ln/>
-        </p:spPr>
-        <p:txBody>
-          <a:bodyPr wrap="square" lIns="0" tIns="0" rIns="0" bIns="0" rtlCol="0" anchor="ctr"/>
-          <a:lstStyle/>
-          <a:p>
-            <a:pPr algn="ctr" indent="0" marL="0">
-              <a:buNone/>
-            </a:pPr>
-            <a:r>
-              <a:rPr lang="en-US" sz="1600" i="1" dirty="0">
-                <a:solidFill>
-                  <a:srgbClr val="00C2A8"/>
+            <a:off x="548640" y="365760"/>
+            <a:ext cx="11091672" cy="822960"/>
+          </a:xfrm>
+          <a:prstGeom prst="rect">
+            <a:avLst/>
+          </a:prstGeom>
+          <a:noFill/>
+          <a:ln/>
+        </p:spPr>
+        <p:txBody>
+          <a:bodyPr wrap="square" lIns="0" tIns="0" rIns="0" bIns="0" rtlCol="0" anchor="ctr"/>
+          <a:lstStyle/>
+          <a:p>
+            <a:pPr rtl="1" algn="r" indent="0" marL="0">
+              <a:buNone/>
+            </a:pPr>
+            <a:r>
+              <a:rPr lang="en-US" sz="3000" b="1" dirty="0">
+                <a:solidFill>
+                  <a:srgbClr val="1B1F3B"/>
+                </a:solidFill>
+                <a:latin typeface="Arial" pitchFamily="34" charset="0"/>
+                <a:ea typeface="Arial" pitchFamily="34" charset="-122"/>
+                <a:cs typeface="Arial" pitchFamily="34" charset="-120"/>
+              </a:rPr>
+              <a:t>כלים חינמיים להתחלה</a:t>
+            </a:r>
+            <a:endParaRPr lang="en-US" sz="3000" dirty="0"/>
+          </a:p>
+        </p:txBody>
+      </p:sp>
+      <p:sp>
+        <p:nvSpPr>
+          <p:cNvPr id="3" name="Shape 1"/>
+          <p:cNvSpPr/>
+          <p:nvPr/>
+        </p:nvSpPr>
+        <p:spPr>
+          <a:xfrm>
+            <a:off x="8138160" y="1645920"/>
+            <a:ext cx="3520440" cy="2377440"/>
+          </a:xfrm>
+          <a:prstGeom prst="roundRect">
+            <a:avLst>
+              <a:gd name="adj" fmla="val 3846"/>
+            </a:avLst>
+          </a:prstGeom>
+          <a:solidFill>
+            <a:srgbClr val="00C2A8"/>
+          </a:solidFill>
+          <a:ln/>
+        </p:spPr>
+      </p:sp>
+      <p:sp>
+        <p:nvSpPr>
+          <p:cNvPr id="4" name="Text 2"/>
+          <p:cNvSpPr/>
+          <p:nvPr/>
+        </p:nvSpPr>
+        <p:spPr>
+          <a:xfrm>
+            <a:off x="8321040" y="1828800"/>
+            <a:ext cx="3154680" cy="731520"/>
+          </a:xfrm>
+          <a:prstGeom prst="rect">
+            <a:avLst/>
+          </a:prstGeom>
+          <a:noFill/>
+          <a:ln/>
+        </p:spPr>
+        <p:txBody>
+          <a:bodyPr wrap="square" lIns="0" tIns="0" rIns="0" bIns="0" rtlCol="0" anchor="ctr"/>
+          <a:lstStyle/>
+          <a:p>
+            <a:pPr rtl="1" algn="r" indent="0" marL="0">
+              <a:buNone/>
+            </a:pPr>
+            <a:r>
+              <a:rPr lang="en-US" sz="1600" b="1" dirty="0">
+                <a:solidFill>
+                  <a:srgbClr val="FFFFFF"/>
+                </a:solidFill>
+                <a:latin typeface="Arial" pitchFamily="34" charset="0"/>
+                <a:ea typeface="Arial" pitchFamily="34" charset="-122"/>
+                <a:cs typeface="Arial" pitchFamily="34" charset="-120"/>
+              </a:rPr>
+              <a:t>GitHub Copilot Free</a:t>
+            </a:r>
+            <a:endParaRPr lang="en-US" sz="1600" dirty="0"/>
+          </a:p>
+        </p:txBody>
+      </p:sp>
+      <p:sp>
+        <p:nvSpPr>
+          <p:cNvPr id="5" name="Text 3"/>
+          <p:cNvSpPr/>
+          <p:nvPr/>
+        </p:nvSpPr>
+        <p:spPr>
+          <a:xfrm>
+            <a:off x="8321040" y="2606040"/>
+            <a:ext cx="3154680" cy="1280160"/>
+          </a:xfrm>
+          <a:prstGeom prst="rect">
+            <a:avLst/>
+          </a:prstGeom>
+          <a:noFill/>
+          <a:ln/>
+        </p:spPr>
+        <p:txBody>
+          <a:bodyPr wrap="square" lIns="0" tIns="0" rIns="0" bIns="0" rtlCol="0" anchor="ctr"/>
+          <a:lstStyle/>
+          <a:p>
+            <a:pPr rtl="1" algn="r" indent="0" marL="0">
+              <a:buNone/>
+            </a:pPr>
+            <a:r>
+              <a:rPr lang="en-US" sz="1250" dirty="0">
+                <a:solidFill>
+                  <a:srgbClr val="FFFFFF"/>
                 </a:solidFill>
                 <a:latin typeface="Calibri" pitchFamily="34" charset="0"/>
                 <a:ea typeface="Calibri" pitchFamily="34" charset="-122"/>
                 <a:cs typeface="Calibri" pitchFamily="34" charset="-120"/>
               </a:rPr>
-              <a:t>הדגמה חיה</a:t>
-            </a:r>
-            <a:endParaRPr lang="en-US" sz="1600" dirty="0"/>
-          </a:p>
-        </p:txBody>
-      </p:sp>
-      <p:sp>
-        <p:nvSpPr>
-          <p:cNvPr id="3" name="Text 1"/>
-          <p:cNvSpPr/>
-          <p:nvPr/>
-        </p:nvSpPr>
-        <p:spPr>
-          <a:xfrm>
-            <a:off x="548640" y="1097280"/>
-            <a:ext cx="11091672" cy="1097280"/>
-          </a:xfrm>
-          <a:prstGeom prst="rect">
-            <a:avLst/>
-          </a:prstGeom>
-          <a:noFill/>
-          <a:ln/>
-        </p:spPr>
-        <p:txBody>
-          <a:bodyPr wrap="square" lIns="0" tIns="0" rIns="0" bIns="0" rtlCol="0" anchor="ctr"/>
-          <a:lstStyle/>
-          <a:p>
-            <a:pPr rtl="1" algn="ctr" indent="0" marL="0">
-              <a:buNone/>
-            </a:pPr>
-            <a:r>
-              <a:rPr lang="en-US" sz="3400" b="1" dirty="0">
-                <a:solidFill>
-                  <a:srgbClr val="FFFFFF"/>
+              <a:t>מסלול חינמי רחב, ללא צורך באימות סטודנט</a:t>
+            </a:r>
+            <a:endParaRPr lang="en-US" sz="1250" dirty="0"/>
+          </a:p>
+        </p:txBody>
+      </p:sp>
+      <p:sp>
+        <p:nvSpPr>
+          <p:cNvPr id="6" name="Shape 4"/>
+          <p:cNvSpPr/>
+          <p:nvPr/>
+        </p:nvSpPr>
+        <p:spPr>
+          <a:xfrm>
+            <a:off x="4233672" y="1645920"/>
+            <a:ext cx="3520440" cy="2377440"/>
+          </a:xfrm>
+          <a:prstGeom prst="roundRect">
+            <a:avLst>
+              <a:gd name="adj" fmla="val 3846"/>
+            </a:avLst>
+          </a:prstGeom>
+          <a:solidFill>
+            <a:srgbClr val="E6FBF7"/>
+          </a:solidFill>
+          <a:ln/>
+        </p:spPr>
+      </p:sp>
+      <p:sp>
+        <p:nvSpPr>
+          <p:cNvPr id="7" name="Text 5"/>
+          <p:cNvSpPr/>
+          <p:nvPr/>
+        </p:nvSpPr>
+        <p:spPr>
+          <a:xfrm>
+            <a:off x="4416552" y="1828800"/>
+            <a:ext cx="3154680" cy="731520"/>
+          </a:xfrm>
+          <a:prstGeom prst="rect">
+            <a:avLst/>
+          </a:prstGeom>
+          <a:noFill/>
+          <a:ln/>
+        </p:spPr>
+        <p:txBody>
+          <a:bodyPr wrap="square" lIns="0" tIns="0" rIns="0" bIns="0" rtlCol="0" anchor="ctr"/>
+          <a:lstStyle/>
+          <a:p>
+            <a:pPr rtl="1" algn="r" indent="0" marL="0">
+              <a:buNone/>
+            </a:pPr>
+            <a:r>
+              <a:rPr lang="en-US" sz="1600" b="1" dirty="0">
+                <a:solidFill>
+                  <a:srgbClr val="1B1F3B"/>
                 </a:solidFill>
                 <a:latin typeface="Arial" pitchFamily="34" charset="0"/>
                 <a:ea typeface="Arial" pitchFamily="34" charset="-122"/>
                 <a:cs typeface="Arial" pitchFamily="34" charset="-120"/>
               </a:rPr>
-              <a:t>פותחים session אמיתי על פרויקט קיים</a:t>
-            </a:r>
-            <a:endParaRPr lang="en-US" sz="3400" dirty="0"/>
-          </a:p>
-        </p:txBody>
-      </p:sp>
-      <p:sp>
-        <p:nvSpPr>
-          <p:cNvPr id="4" name="Text 2"/>
-          <p:cNvSpPr/>
-          <p:nvPr/>
-        </p:nvSpPr>
-        <p:spPr>
-          <a:xfrm>
-            <a:off x="548640" y="2148840"/>
-            <a:ext cx="11091672" cy="457200"/>
-          </a:xfrm>
-          <a:prstGeom prst="rect">
-            <a:avLst/>
-          </a:prstGeom>
-          <a:noFill/>
-          <a:ln/>
-        </p:spPr>
-        <p:txBody>
-          <a:bodyPr wrap="square" lIns="0" tIns="0" rIns="0" bIns="0" rtlCol="0" anchor="ctr"/>
-          <a:lstStyle/>
-          <a:p>
-            <a:pPr rtl="1" algn="ctr" indent="0" marL="0">
-              <a:buNone/>
-            </a:pPr>
-            <a:r>
-              <a:rPr lang="en-US" sz="1500" i="1" dirty="0">
-                <a:solidFill>
-                  <a:srgbClr val="CADCFC"/>
+              <a:t>GitHub Student Pack</a:t>
+            </a:r>
+            <a:endParaRPr lang="en-US" sz="1600" dirty="0"/>
+          </a:p>
+        </p:txBody>
+      </p:sp>
+      <p:sp>
+        <p:nvSpPr>
+          <p:cNvPr id="8" name="Text 6"/>
+          <p:cNvSpPr/>
+          <p:nvPr/>
+        </p:nvSpPr>
+        <p:spPr>
+          <a:xfrm>
+            <a:off x="4416552" y="2606040"/>
+            <a:ext cx="3154680" cy="1280160"/>
+          </a:xfrm>
+          <a:prstGeom prst="rect">
+            <a:avLst/>
+          </a:prstGeom>
+          <a:noFill/>
+          <a:ln/>
+        </p:spPr>
+        <p:txBody>
+          <a:bodyPr wrap="square" lIns="0" tIns="0" rIns="0" bIns="0" rtlCol="0" anchor="ctr"/>
+          <a:lstStyle/>
+          <a:p>
+            <a:pPr rtl="1" algn="r" indent="0" marL="0">
+              <a:buNone/>
+            </a:pPr>
+            <a:r>
+              <a:rPr lang="en-US" sz="1250" dirty="0">
+                <a:solidFill>
+                  <a:srgbClr val="1B1F3B"/>
                 </a:solidFill>
                 <a:latin typeface="Calibri" pitchFamily="34" charset="0"/>
                 <a:ea typeface="Calibri" pitchFamily="34" charset="-122"/>
                 <a:cs typeface="Calibri" pitchFamily="34" charset="-120"/>
               </a:rPr>
-              <a:t>ראו demo/prompt.md להוראות המלאות</a:t>
-            </a:r>
-            <a:endParaRPr lang="en-US" sz="1500" dirty="0"/>
-          </a:p>
-        </p:txBody>
-      </p:sp>
-      <p:sp>
-        <p:nvSpPr>
-          <p:cNvPr id="5" name="Shape 3"/>
-          <p:cNvSpPr/>
-          <p:nvPr/>
-        </p:nvSpPr>
-        <p:spPr>
-          <a:xfrm>
-            <a:off x="3200400" y="2880360"/>
-            <a:ext cx="5788152" cy="3291840"/>
-          </a:xfrm>
-          <a:prstGeom prst="rect">
-            <a:avLst/>
+              <a:t>הרחבה למי שמאמת סטודנט (זמינות משתנה)</a:t>
+            </a:r>
+            <a:endParaRPr lang="en-US" sz="1250" dirty="0"/>
+          </a:p>
+        </p:txBody>
+      </p:sp>
+      <p:sp>
+        <p:nvSpPr>
+          <p:cNvPr id="9" name="Shape 7"/>
+          <p:cNvSpPr/>
+          <p:nvPr/>
+        </p:nvSpPr>
+        <p:spPr>
+          <a:xfrm>
+            <a:off x="329184" y="1645920"/>
+            <a:ext cx="3520440" cy="2377440"/>
+          </a:xfrm>
+          <a:prstGeom prst="roundRect">
+            <a:avLst>
+              <a:gd name="adj" fmla="val 3846"/>
+            </a:avLst>
           </a:prstGeom>
           <a:solidFill>
-            <a:srgbClr val="2A2F55"/>
+            <a:srgbClr val="E6FBF7"/>
           </a:solidFill>
-          <a:ln w="15875">
-            <a:solidFill>
-              <a:srgbClr val="00C2A8"/>
-            </a:solidFill>
-            <a:prstDash val="dash"/>
-          </a:ln>
-        </p:spPr>
-      </p:sp>
-      <p:sp>
-        <p:nvSpPr>
-          <p:cNvPr id="6" name="Text 4"/>
-          <p:cNvSpPr/>
-          <p:nvPr/>
-        </p:nvSpPr>
-        <p:spPr>
-          <a:xfrm>
-            <a:off x="3200400" y="2880360"/>
-            <a:ext cx="5788152" cy="3291840"/>
-          </a:xfrm>
-          <a:prstGeom prst="rect">
-            <a:avLst/>
-          </a:prstGeom>
-          <a:noFill/>
-          <a:ln/>
-        </p:spPr>
-        <p:txBody>
-          <a:bodyPr wrap="square" lIns="101600" tIns="101600" rIns="101600" bIns="101600" rtlCol="0" anchor="ctr"/>
-          <a:lstStyle/>
-          <a:p>
-            <a:pPr rtl="1" algn="ctr" indent="0" marL="0">
-              <a:buNone/>
-            </a:pPr>
-            <a:r>
-              <a:rPr lang="en-US" sz="1200" i="1" dirty="0">
-                <a:solidFill>
-                  <a:srgbClr val="00C2A8"/>
+          <a:ln/>
+        </p:spPr>
+      </p:sp>
+      <p:sp>
+        <p:nvSpPr>
+          <p:cNvPr id="10" name="Text 8"/>
+          <p:cNvSpPr/>
+          <p:nvPr/>
+        </p:nvSpPr>
+        <p:spPr>
+          <a:xfrm>
+            <a:off x="512064" y="1828800"/>
+            <a:ext cx="3154680" cy="731520"/>
+          </a:xfrm>
+          <a:prstGeom prst="rect">
+            <a:avLst/>
+          </a:prstGeom>
+          <a:noFill/>
+          <a:ln/>
+        </p:spPr>
+        <p:txBody>
+          <a:bodyPr wrap="square" lIns="0" tIns="0" rIns="0" bIns="0" rtlCol="0" anchor="ctr"/>
+          <a:lstStyle/>
+          <a:p>
+            <a:pPr rtl="1" algn="r" indent="0" marL="0">
+              <a:buNone/>
+            </a:pPr>
+            <a:r>
+              <a:rPr lang="en-US" sz="1600" b="1" dirty="0">
+                <a:solidFill>
+                  <a:srgbClr val="1B1F3B"/>
+                </a:solidFill>
+                <a:latin typeface="Arial" pitchFamily="34" charset="0"/>
+                <a:ea typeface="Arial" pitchFamily="34" charset="-122"/>
+                <a:cs typeface="Arial" pitchFamily="34" charset="-120"/>
+              </a:rPr>
+              <a:t>Cursor</a:t>
+            </a:r>
+            <a:endParaRPr lang="en-US" sz="1600" dirty="0"/>
+          </a:p>
+        </p:txBody>
+      </p:sp>
+      <p:sp>
+        <p:nvSpPr>
+          <p:cNvPr id="11" name="Text 9"/>
+          <p:cNvSpPr/>
+          <p:nvPr/>
+        </p:nvSpPr>
+        <p:spPr>
+          <a:xfrm>
+            <a:off x="512064" y="2606040"/>
+            <a:ext cx="3154680" cy="1280160"/>
+          </a:xfrm>
+          <a:prstGeom prst="rect">
+            <a:avLst/>
+          </a:prstGeom>
+          <a:noFill/>
+          <a:ln/>
+        </p:spPr>
+        <p:txBody>
+          <a:bodyPr wrap="square" lIns="0" tIns="0" rIns="0" bIns="0" rtlCol="0" anchor="ctr"/>
+          <a:lstStyle/>
+          <a:p>
+            <a:pPr rtl="1" algn="r" indent="0" marL="0">
+              <a:buNone/>
+            </a:pPr>
+            <a:r>
+              <a:rPr lang="en-US" sz="1250" dirty="0">
+                <a:solidFill>
+                  <a:srgbClr val="1B1F3B"/>
                 </a:solidFill>
                 <a:latin typeface="Calibri" pitchFamily="34" charset="0"/>
                 <a:ea typeface="Calibri" pitchFamily="34" charset="-122"/>
                 <a:cs typeface="Calibri" pitchFamily="34" charset="-120"/>
               </a:rPr>
-              <a:t>[תמונה: מסך שיתוף — Diff מוצג לפני אישור בכלי ה-AI]</a:t>
-            </a:r>
-            <a:endParaRPr lang="en-US" sz="1200" dirty="0"/>
-          </a:p>
-        </p:txBody>
-      </p:sp>
-      <p:sp>
-        <p:nvSpPr>
-          <p:cNvPr id="7" name="Text 5"/>
+              <a:t>IDE מלא, מסלול חינמי מוגבל (מכסת השלמות)</a:t>
+            </a:r>
+            <a:endParaRPr lang="en-US" sz="1250" dirty="0"/>
+          </a:p>
+        </p:txBody>
+      </p:sp>
+      <p:sp>
+        <p:nvSpPr>
+          <p:cNvPr id="12" name="Shape 10"/>
+          <p:cNvSpPr/>
+          <p:nvPr/>
+        </p:nvSpPr>
+        <p:spPr>
+          <a:xfrm>
+            <a:off x="548640" y="4343400"/>
+            <a:ext cx="11091672" cy="1005840"/>
+          </a:xfrm>
+          <a:prstGeom prst="roundRect">
+            <a:avLst>
+              <a:gd name="adj" fmla="val 9091"/>
+            </a:avLst>
+          </a:prstGeom>
+          <a:solidFill>
+            <a:srgbClr val="FFF6E6"/>
+          </a:solidFill>
+          <a:ln/>
+        </p:spPr>
+      </p:sp>
+      <p:sp>
+        <p:nvSpPr>
+          <p:cNvPr id="13" name="Shape 11"/>
+          <p:cNvSpPr/>
+          <p:nvPr/>
+        </p:nvSpPr>
+        <p:spPr>
+          <a:xfrm>
+            <a:off x="10332720" y="4480560"/>
+            <a:ext cx="457200" cy="457200"/>
+          </a:xfrm>
+          <a:prstGeom prst="ellipse">
+            <a:avLst/>
+          </a:prstGeom>
+          <a:solidFill>
+            <a:srgbClr val="FFB000"/>
+          </a:solidFill>
+          <a:ln/>
+        </p:spPr>
+      </p:sp>
+      <p:sp>
+        <p:nvSpPr>
+          <p:cNvPr id="14" name="Text 12"/>
+          <p:cNvSpPr/>
+          <p:nvPr/>
+        </p:nvSpPr>
+        <p:spPr>
+          <a:xfrm>
+            <a:off x="10332720" y="4480560"/>
+            <a:ext cx="457200" cy="457200"/>
+          </a:xfrm>
+          <a:prstGeom prst="rect">
+            <a:avLst/>
+          </a:prstGeom>
+          <a:noFill/>
+          <a:ln/>
+        </p:spPr>
+        <p:txBody>
+          <a:bodyPr wrap="square" lIns="0" tIns="0" rIns="0" bIns="0" rtlCol="0" anchor="ctr"/>
+          <a:lstStyle/>
+          <a:p>
+            <a:pPr algn="ctr" indent="0" marL="0">
+              <a:buNone/>
+            </a:pPr>
+            <a:r>
+              <a:rPr lang="en-US" sz="1400" b="1" dirty="0">
+                <a:solidFill>
+                  <a:srgbClr val="FFFFFF"/>
+                </a:solidFill>
+                <a:latin typeface="Arial" pitchFamily="34" charset="0"/>
+                <a:ea typeface="Arial" pitchFamily="34" charset="-122"/>
+                <a:cs typeface="Arial" pitchFamily="34" charset="-120"/>
+              </a:rPr>
+              <a:t>!</a:t>
+            </a:r>
+            <a:endParaRPr lang="en-US" sz="1400" dirty="0"/>
+          </a:p>
+        </p:txBody>
+      </p:sp>
+      <p:sp>
+        <p:nvSpPr>
+          <p:cNvPr id="15" name="Text 13"/>
+          <p:cNvSpPr/>
+          <p:nvPr/>
+        </p:nvSpPr>
+        <p:spPr>
+          <a:xfrm>
+            <a:off x="822960" y="4434840"/>
+            <a:ext cx="9326880" cy="731520"/>
+          </a:xfrm>
+          <a:prstGeom prst="rect">
+            <a:avLst/>
+          </a:prstGeom>
+          <a:noFill/>
+          <a:ln/>
+        </p:spPr>
+        <p:txBody>
+          <a:bodyPr wrap="square" lIns="0" tIns="0" rIns="0" bIns="0" rtlCol="0" anchor="ctr"/>
+          <a:lstStyle/>
+          <a:p>
+            <a:pPr rtl="1" algn="r" indent="0" marL="0">
+              <a:buNone/>
+            </a:pPr>
+            <a:r>
+              <a:rPr lang="en-US" sz="1400" b="1" dirty="0">
+                <a:solidFill>
+                  <a:srgbClr val="1B1F3B"/>
+                </a:solidFill>
+                <a:latin typeface="Arial" pitchFamily="34" charset="0"/>
+                <a:ea typeface="Arial" pitchFamily="34" charset="-122"/>
+                <a:cs typeface="Arial" pitchFamily="34" charset="-120"/>
+              </a:rPr>
+              <a:t>שוק הכלים משתנה מהר — ראו מקרה Gemini CLI → Antigravity משיעור 1</a:t>
+            </a:r>
+            <a:endParaRPr lang="en-US" sz="1400" dirty="0"/>
+          </a:p>
+        </p:txBody>
+      </p:sp>
+      <p:sp>
+        <p:nvSpPr>
+          <p:cNvPr id="16" name="Text 14"/>
           <p:cNvSpPr/>
           <p:nvPr/>
         </p:nvSpPr>
@@ -7062,7 +10018,7 @@
             <a:r>
               <a:rPr lang="en-US" sz="900" dirty="0">
                 <a:solidFill>
-                  <a:srgbClr val="8891C2"/>
+                  <a:srgbClr val="A6A6B0"/>
                 </a:solidFill>
                 <a:latin typeface="Calibri" pitchFamily="34" charset="0"/>
                 <a:ea typeface="Calibri" pitchFamily="34" charset="-122"/>

--- a/lesson_02/lesson_02_slides.pptx
+++ b/lesson_02/lesson_02_slides.pptx
@@ -2704,7 +2704,7 @@
           <a:bodyPr wrap="square" lIns="0" tIns="0" rIns="0" bIns="0" rtlCol="0" anchor="ctr"/>
           <a:lstStyle/>
           <a:p>
-            <a:pPr algn="r" indent="0" marL="0">
+            <a:pPr rtl="1" algn="r" indent="0" marL="0">
               <a:spcAft>
                 <a:spcPts val="1000"/>
               </a:spcAft>
@@ -2724,7 +2724,7 @@
             <a:endParaRPr lang="en-US" sz="1400" dirty="0"/>
           </a:p>
           <a:p>
-            <a:pPr algn="r" indent="0" marL="0">
+            <a:pPr rtl="1" algn="r" indent="0" marL="0">
               <a:spcAft>
                 <a:spcPts val="1000"/>
               </a:spcAft>
@@ -2744,7 +2744,7 @@
             <a:endParaRPr lang="en-US" sz="1400" dirty="0"/>
           </a:p>
           <a:p>
-            <a:pPr algn="r" indent="0" marL="0">
+            <a:pPr rtl="1" algn="r" indent="0" marL="0">
               <a:spcAft>
                 <a:spcPts val="1000"/>
               </a:spcAft>
@@ -2764,7 +2764,7 @@
             <a:endParaRPr lang="en-US" sz="1400" dirty="0"/>
           </a:p>
           <a:p>
-            <a:pPr algn="r" indent="0" marL="0">
+            <a:pPr rtl="1" algn="r" indent="0" marL="0">
               <a:spcAft>
                 <a:spcPts val="1000"/>
               </a:spcAft>
@@ -3061,7 +3061,7 @@
           <a:bodyPr wrap="square" lIns="25400" tIns="25400" rIns="25400" bIns="25400" rtlCol="0" anchor="t"/>
           <a:lstStyle/>
           <a:p>
-            <a:pPr algn="ctr" indent="0" marL="0">
+            <a:pPr rtl="1" algn="ctr" indent="0" marL="0">
               <a:buNone/>
             </a:pPr>
             <a:r>
@@ -3078,7 +3078,7 @@
             <a:endParaRPr lang="en-US" sz="1300" dirty="0"/>
           </a:p>
           <a:p>
-            <a:pPr algn="ctr" indent="0" marL="0">
+            <a:pPr rtl="1" algn="ctr" indent="0" marL="0">
               <a:buNone/>
             </a:pPr>
             <a:r>
@@ -3237,7 +3237,7 @@
           <a:bodyPr wrap="square" lIns="25400" tIns="25400" rIns="25400" bIns="25400" rtlCol="0" anchor="t"/>
           <a:lstStyle/>
           <a:p>
-            <a:pPr algn="ctr" indent="0" marL="0">
+            <a:pPr rtl="1" algn="ctr" indent="0" marL="0">
               <a:buNone/>
             </a:pPr>
             <a:r>
@@ -3254,7 +3254,7 @@
             <a:endParaRPr lang="en-US" sz="1300" dirty="0"/>
           </a:p>
           <a:p>
-            <a:pPr algn="ctr" indent="0" marL="0">
+            <a:pPr rtl="1" algn="ctr" indent="0" marL="0">
               <a:buNone/>
             </a:pPr>
             <a:r>
@@ -3413,7 +3413,7 @@
           <a:bodyPr wrap="square" lIns="25400" tIns="25400" rIns="25400" bIns="25400" rtlCol="0" anchor="t"/>
           <a:lstStyle/>
           <a:p>
-            <a:pPr algn="ctr" indent="0" marL="0">
+            <a:pPr rtl="1" algn="ctr" indent="0" marL="0">
               <a:buNone/>
             </a:pPr>
             <a:r>
@@ -3430,7 +3430,7 @@
             <a:endParaRPr lang="en-US" sz="1300" dirty="0"/>
           </a:p>
           <a:p>
-            <a:pPr algn="ctr" indent="0" marL="0">
+            <a:pPr rtl="1" algn="ctr" indent="0" marL="0">
               <a:buNone/>
             </a:pPr>
             <a:r>
@@ -3589,7 +3589,7 @@
           <a:bodyPr wrap="square" lIns="25400" tIns="25400" rIns="25400" bIns="25400" rtlCol="0" anchor="t"/>
           <a:lstStyle/>
           <a:p>
-            <a:pPr algn="ctr" indent="0" marL="0">
+            <a:pPr rtl="1" algn="ctr" indent="0" marL="0">
               <a:buNone/>
             </a:pPr>
             <a:r>
@@ -3606,7 +3606,7 @@
             <a:endParaRPr lang="en-US" sz="1300" dirty="0"/>
           </a:p>
           <a:p>
-            <a:pPr algn="ctr" indent="0" marL="0">
+            <a:pPr rtl="1" algn="ctr" indent="0" marL="0">
               <a:buNone/>
             </a:pPr>
             <a:r>
@@ -3765,7 +3765,7 @@
           <a:bodyPr wrap="square" lIns="25400" tIns="25400" rIns="25400" bIns="25400" rtlCol="0" anchor="t"/>
           <a:lstStyle/>
           <a:p>
-            <a:pPr algn="ctr" indent="0" marL="0">
+            <a:pPr rtl="1" algn="ctr" indent="0" marL="0">
               <a:buNone/>
             </a:pPr>
             <a:r>
@@ -3782,7 +3782,7 @@
             <a:endParaRPr lang="en-US" sz="1300" dirty="0"/>
           </a:p>
           <a:p>
-            <a:pPr algn="ctr" indent="0" marL="0">
+            <a:pPr rtl="1" algn="ctr" indent="0" marL="0">
               <a:buNone/>
             </a:pPr>
             <a:r>
@@ -4009,7 +4009,7 @@
           <a:bodyPr wrap="square" lIns="0" tIns="0" rIns="0" bIns="0" rtlCol="0" anchor="ctr"/>
           <a:lstStyle/>
           <a:p>
-            <a:pPr algn="r" indent="0" marL="0">
+            <a:pPr rtl="1" algn="r" indent="0" marL="0">
               <a:spcAft>
                 <a:spcPts val="1400"/>
               </a:spcAft>
@@ -4029,7 +4029,7 @@
             <a:endParaRPr lang="en-US" sz="1700" dirty="0"/>
           </a:p>
           <a:p>
-            <a:pPr algn="r" indent="0" marL="0">
+            <a:pPr rtl="1" algn="r" indent="0" marL="0">
               <a:spcAft>
                 <a:spcPts val="1400"/>
               </a:spcAft>
@@ -4049,7 +4049,7 @@
             <a:endParaRPr lang="en-US" sz="1700" dirty="0"/>
           </a:p>
           <a:p>
-            <a:pPr algn="r" indent="0" marL="0">
+            <a:pPr rtl="1" algn="r" indent="0" marL="0">
               <a:spcAft>
                 <a:spcPts val="1400"/>
               </a:spcAft>
@@ -4418,7 +4418,7 @@
           <a:bodyPr wrap="square" lIns="0" tIns="0" rIns="0" bIns="0" rtlCol="0" anchor="ctr"/>
           <a:lstStyle/>
           <a:p>
-            <a:pPr algn="ctr" indent="0" marL="0">
+            <a:pPr rtl="1" algn="ctr" indent="0" marL="0">
               <a:buNone/>
             </a:pPr>
             <a:r>
@@ -4457,7 +4457,7 @@
           <a:bodyPr wrap="square" lIns="0" tIns="0" rIns="0" bIns="0" rtlCol="0" anchor="ctr"/>
           <a:lstStyle/>
           <a:p>
-            <a:pPr algn="ctr" indent="0" marL="0">
+            <a:pPr rtl="1" algn="ctr" indent="0" marL="0">
               <a:buNone/>
             </a:pPr>
             <a:r>
@@ -4535,7 +4535,7 @@
           <a:bodyPr wrap="square" lIns="0" tIns="0" rIns="0" bIns="0" rtlCol="0" anchor="ctr"/>
           <a:lstStyle/>
           <a:p>
-            <a:pPr algn="ctr" indent="0" marL="0">
+            <a:pPr rtl="1" algn="ctr" indent="0" marL="0">
               <a:buNone/>
             </a:pPr>
             <a:r>
@@ -4574,7 +4574,7 @@
           <a:bodyPr wrap="square" lIns="0" tIns="0" rIns="0" bIns="0" rtlCol="0" anchor="ctr"/>
           <a:lstStyle/>
           <a:p>
-            <a:pPr algn="ctr" indent="0" marL="0">
+            <a:pPr rtl="1" algn="ctr" indent="0" marL="0">
               <a:buNone/>
             </a:pPr>
             <a:r>
@@ -4652,7 +4652,7 @@
           <a:bodyPr wrap="square" lIns="0" tIns="0" rIns="0" bIns="0" rtlCol="0" anchor="ctr"/>
           <a:lstStyle/>
           <a:p>
-            <a:pPr algn="ctr" indent="0" marL="0">
+            <a:pPr rtl="1" algn="ctr" indent="0" marL="0">
               <a:buNone/>
             </a:pPr>
             <a:r>
@@ -4691,7 +4691,7 @@
           <a:bodyPr wrap="square" lIns="0" tIns="0" rIns="0" bIns="0" rtlCol="0" anchor="ctr"/>
           <a:lstStyle/>
           <a:p>
-            <a:pPr algn="ctr" indent="0" marL="0">
+            <a:pPr rtl="1" algn="ctr" indent="0" marL="0">
               <a:buNone/>
             </a:pPr>
             <a:r>
@@ -4791,7 +4791,7 @@
           <a:bodyPr wrap="square" lIns="0" tIns="0" rIns="0" bIns="0" rtlCol="0" anchor="ctr"/>
           <a:lstStyle/>
           <a:p>
-            <a:pPr algn="ctr" indent="0" marL="0">
+            <a:pPr rtl="1" algn="ctr" indent="0" marL="0">
               <a:buNone/>
             </a:pPr>
             <a:r>
@@ -4830,7 +4830,7 @@
           <a:bodyPr wrap="square" lIns="0" tIns="0" rIns="0" bIns="0" rtlCol="0" anchor="ctr"/>
           <a:lstStyle/>
           <a:p>
-            <a:pPr algn="ctr" indent="0" marL="0">
+            <a:pPr rtl="1" algn="ctr" indent="0" marL="0">
               <a:buNone/>
             </a:pPr>
             <a:r>
@@ -6651,7 +6651,7 @@
           <a:bodyPr wrap="square" lIns="0" tIns="0" rIns="0" bIns="0" rtlCol="0" anchor="ctr"/>
           <a:lstStyle/>
           <a:p>
-            <a:pPr algn="ctr" indent="0" marL="0">
+            <a:pPr rtl="1" algn="ctr" indent="0" marL="0">
               <a:buNone/>
             </a:pPr>
             <a:r>
@@ -6751,7 +6751,7 @@
           <a:bodyPr wrap="square" lIns="0" tIns="0" rIns="0" bIns="0" rtlCol="0" anchor="ctr"/>
           <a:lstStyle/>
           <a:p>
-            <a:pPr algn="ctr" indent="0" marL="0">
+            <a:pPr rtl="1" algn="ctr" indent="0" marL="0">
               <a:buNone/>
             </a:pPr>
             <a:r>
@@ -6978,7 +6978,7 @@
           <a:bodyPr wrap="square" lIns="0" tIns="0" rIns="0" bIns="0" rtlCol="0" anchor="ctr"/>
           <a:lstStyle/>
           <a:p>
-            <a:pPr algn="ctr" indent="0" marL="0">
+            <a:pPr rtl="1" algn="ctr" indent="0" marL="0">
               <a:buNone/>
             </a:pPr>
             <a:r>
@@ -7230,7 +7230,7 @@
           <a:bodyPr wrap="square" lIns="0" tIns="0" rIns="0" bIns="0" rtlCol="0" anchor="ctr"/>
           <a:lstStyle/>
           <a:p>
-            <a:pPr algn="ctr" indent="0" marL="0">
+            <a:pPr rtl="1" algn="ctr" indent="0" marL="0">
               <a:buNone/>
             </a:pPr>
             <a:r>
@@ -7308,7 +7308,7 @@
           <a:bodyPr wrap="square" lIns="0" tIns="0" rIns="0" bIns="0" rtlCol="0" anchor="ctr"/>
           <a:lstStyle/>
           <a:p>
-            <a:pPr algn="r" indent="0" marL="0">
+            <a:pPr rtl="1" algn="r" indent="0" marL="0">
               <a:spcAft>
                 <a:spcPts val="1000"/>
               </a:spcAft>
@@ -7328,7 +7328,7 @@
             <a:endParaRPr lang="en-US" sz="1600" dirty="0"/>
           </a:p>
           <a:p>
-            <a:pPr algn="r" indent="0" marL="0">
+            <a:pPr rtl="1" algn="r" indent="0" marL="0">
               <a:spcAft>
                 <a:spcPts val="1000"/>
               </a:spcAft>
@@ -7348,7 +7348,7 @@
             <a:endParaRPr lang="en-US" sz="1600" dirty="0"/>
           </a:p>
           <a:p>
-            <a:pPr algn="r" indent="0" marL="0">
+            <a:pPr rtl="1" algn="r" indent="0" marL="0">
               <a:spcAft>
                 <a:spcPts val="1000"/>
               </a:spcAft>
@@ -7368,7 +7368,7 @@
             <a:endParaRPr lang="en-US" sz="1600" dirty="0"/>
           </a:p>
           <a:p>
-            <a:pPr algn="r" indent="0" marL="0">
+            <a:pPr rtl="1" algn="r" indent="0" marL="0">
               <a:spcAft>
                 <a:spcPts val="1000"/>
               </a:spcAft>
@@ -8049,7 +8049,7 @@
           <a:bodyPr wrap="square" lIns="0" tIns="0" rIns="0" bIns="0" rtlCol="0" anchor="ctr"/>
           <a:lstStyle/>
           <a:p>
-            <a:pPr algn="r" indent="0" marL="0">
+            <a:pPr rtl="1" algn="r" indent="0" marL="0">
               <a:spcAft>
                 <a:spcPts val="1400"/>
               </a:spcAft>
@@ -8069,7 +8069,7 @@
             <a:endParaRPr lang="en-US" sz="1700" dirty="0"/>
           </a:p>
           <a:p>
-            <a:pPr algn="r" indent="0" marL="0">
+            <a:pPr rtl="1" algn="r" indent="0" marL="0">
               <a:spcAft>
                 <a:spcPts val="1400"/>
               </a:spcAft>
@@ -8089,7 +8089,7 @@
             <a:endParaRPr lang="en-US" sz="1700" dirty="0"/>
           </a:p>
           <a:p>
-            <a:pPr algn="r" indent="0" marL="0">
+            <a:pPr rtl="1" algn="r" indent="0" marL="0">
               <a:spcAft>
                 <a:spcPts val="1400"/>
               </a:spcAft>
@@ -8109,7 +8109,7 @@
             <a:endParaRPr lang="en-US" sz="1700" dirty="0"/>
           </a:p>
           <a:p>
-            <a:pPr algn="r" indent="0" marL="0">
+            <a:pPr rtl="1" algn="r" indent="0" marL="0">
               <a:spcAft>
                 <a:spcPts val="1400"/>
               </a:spcAft>
@@ -8325,7 +8325,7 @@
           <a:bodyPr wrap="square" lIns="0" tIns="0" rIns="0" bIns="0" rtlCol="0" anchor="ctr"/>
           <a:lstStyle/>
           <a:p>
-            <a:pPr algn="r" indent="0" marL="0">
+            <a:pPr rtl="1" algn="r" indent="0" marL="0">
               <a:spcAft>
                 <a:spcPts val="1400"/>
               </a:spcAft>
@@ -8345,7 +8345,7 @@
             <a:endParaRPr lang="en-US" sz="1600" dirty="0"/>
           </a:p>
           <a:p>
-            <a:pPr algn="r" indent="0" marL="0">
+            <a:pPr rtl="1" algn="r" indent="0" marL="0">
               <a:spcAft>
                 <a:spcPts val="1400"/>
               </a:spcAft>
@@ -8365,7 +8365,7 @@
             <a:endParaRPr lang="en-US" sz="1600" dirty="0"/>
           </a:p>
           <a:p>
-            <a:pPr algn="r" indent="0" marL="0">
+            <a:pPr rtl="1" algn="r" indent="0" marL="0">
               <a:spcAft>
                 <a:spcPts val="1400"/>
               </a:spcAft>
@@ -8385,7 +8385,7 @@
             <a:endParaRPr lang="en-US" sz="1600" dirty="0"/>
           </a:p>
           <a:p>
-            <a:pPr algn="r" indent="0" marL="0">
+            <a:pPr rtl="1" algn="r" indent="0" marL="0">
               <a:spcAft>
                 <a:spcPts val="1400"/>
               </a:spcAft>
@@ -8405,7 +8405,7 @@
             <a:endParaRPr lang="en-US" sz="1600" dirty="0"/>
           </a:p>
           <a:p>
-            <a:pPr algn="r" indent="0" marL="0">
+            <a:pPr rtl="1" algn="r" indent="0" marL="0">
               <a:spcAft>
                 <a:spcPts val="1400"/>
               </a:spcAft>
@@ -8596,7 +8596,7 @@
           <a:bodyPr wrap="square" lIns="0" tIns="0" rIns="0" bIns="0" rtlCol="0" anchor="ctr"/>
           <a:lstStyle/>
           <a:p>
-            <a:pPr algn="r" indent="0" marL="0">
+            <a:pPr rtl="1" algn="r" indent="0" marL="0">
               <a:spcAft>
                 <a:spcPts val="1400"/>
               </a:spcAft>
@@ -8616,7 +8616,7 @@
             <a:endParaRPr lang="en-US" sz="1700" dirty="0"/>
           </a:p>
           <a:p>
-            <a:pPr algn="r" indent="0" marL="0">
+            <a:pPr rtl="1" algn="r" indent="0" marL="0">
               <a:spcAft>
                 <a:spcPts val="1400"/>
               </a:spcAft>
@@ -8636,7 +8636,7 @@
             <a:endParaRPr lang="en-US" sz="1700" dirty="0"/>
           </a:p>
           <a:p>
-            <a:pPr algn="r" indent="0" marL="0">
+            <a:pPr rtl="1" algn="r" indent="0" marL="0">
               <a:spcAft>
                 <a:spcPts val="1400"/>
               </a:spcAft>
@@ -8852,7 +8852,7 @@
           <a:bodyPr wrap="square" lIns="0" tIns="0" rIns="0" bIns="0" rtlCol="0" anchor="ctr"/>
           <a:lstStyle/>
           <a:p>
-            <a:pPr algn="r" indent="0" marL="0">
+            <a:pPr rtl="1" algn="r" indent="0" marL="0">
               <a:spcAft>
                 <a:spcPts val="1400"/>
               </a:spcAft>
@@ -8872,7 +8872,7 @@
             <a:endParaRPr lang="en-US" sz="1700" dirty="0"/>
           </a:p>
           <a:p>
-            <a:pPr algn="r" indent="0" marL="0">
+            <a:pPr rtl="1" algn="r" indent="0" marL="0">
               <a:spcAft>
                 <a:spcPts val="1400"/>
               </a:spcAft>
@@ -8892,7 +8892,7 @@
             <a:endParaRPr lang="en-US" sz="1700" dirty="0"/>
           </a:p>
           <a:p>
-            <a:pPr algn="r" indent="0" marL="0">
+            <a:pPr rtl="1" algn="r" indent="0" marL="0">
               <a:spcAft>
                 <a:spcPts val="1400"/>
               </a:spcAft>
@@ -9169,7 +9169,7 @@
           <a:bodyPr wrap="square" lIns="0" tIns="0" rIns="0" bIns="0" rtlCol="0" anchor="ctr"/>
           <a:lstStyle/>
           <a:p>
-            <a:pPr algn="r" indent="0" marL="0">
+            <a:pPr rtl="1" algn="r" indent="0" marL="0">
               <a:spcAft>
                 <a:spcPts val="1400"/>
               </a:spcAft>
@@ -9189,7 +9189,7 @@
             <a:endParaRPr lang="en-US" sz="1700" dirty="0"/>
           </a:p>
           <a:p>
-            <a:pPr algn="r" indent="0" marL="0">
+            <a:pPr rtl="1" algn="r" indent="0" marL="0">
               <a:spcAft>
                 <a:spcPts val="1400"/>
               </a:spcAft>
@@ -9209,7 +9209,7 @@
             <a:endParaRPr lang="en-US" sz="1700" dirty="0"/>
           </a:p>
           <a:p>
-            <a:pPr algn="r" indent="0" marL="0">
+            <a:pPr rtl="1" algn="r" indent="0" marL="0">
               <a:spcAft>
                 <a:spcPts val="1400"/>
               </a:spcAft>
@@ -9229,7 +9229,7 @@
             <a:endParaRPr lang="en-US" sz="1700" dirty="0"/>
           </a:p>
           <a:p>
-            <a:pPr algn="r" indent="0" marL="0">
+            <a:pPr rtl="1" algn="r" indent="0" marL="0">
               <a:spcAft>
                 <a:spcPts val="1400"/>
               </a:spcAft>
@@ -10033,7 +10033,7 @@
           <a:bodyPr wrap="square" lIns="0" tIns="0" rIns="0" bIns="0" rtlCol="0" anchor="ctr"/>
           <a:lstStyle/>
           <a:p>
-            <a:pPr algn="r" indent="0" marL="0">
+            <a:pPr rtl="1" algn="r" indent="0" marL="0">
               <a:spcAft>
                 <a:spcPts val="1400"/>
               </a:spcAft>
@@ -10053,7 +10053,7 @@
             <a:endParaRPr lang="en-US" sz="1700" dirty="0"/>
           </a:p>
           <a:p>
-            <a:pPr algn="r" indent="0" marL="0">
+            <a:pPr rtl="1" algn="r" indent="0" marL="0">
               <a:spcAft>
                 <a:spcPts val="1400"/>
               </a:spcAft>
@@ -10073,7 +10073,7 @@
             <a:endParaRPr lang="en-US" sz="1700" dirty="0"/>
           </a:p>
           <a:p>
-            <a:pPr algn="r" indent="0" marL="0">
+            <a:pPr rtl="1" algn="r" indent="0" marL="0">
               <a:spcAft>
                 <a:spcPts val="1400"/>
               </a:spcAft>
@@ -10372,7 +10372,7 @@
           <a:bodyPr wrap="square" lIns="0" tIns="0" rIns="0" bIns="0" rtlCol="0" anchor="ctr"/>
           <a:lstStyle/>
           <a:p>
-            <a:pPr algn="r" indent="0" marL="0">
+            <a:pPr rtl="1" algn="r" indent="0" marL="0">
               <a:spcAft>
                 <a:spcPts val="1000"/>
               </a:spcAft>
@@ -10392,7 +10392,7 @@
             <a:endParaRPr lang="en-US" sz="1400" dirty="0"/>
           </a:p>
           <a:p>
-            <a:pPr algn="r" indent="0" marL="0">
+            <a:pPr rtl="1" algn="r" indent="0" marL="0">
               <a:spcAft>
                 <a:spcPts val="1000"/>
               </a:spcAft>
@@ -10412,7 +10412,7 @@
             <a:endParaRPr lang="en-US" sz="1400" dirty="0"/>
           </a:p>
           <a:p>
-            <a:pPr algn="r" indent="0" marL="0">
+            <a:pPr rtl="1" algn="r" indent="0" marL="0">
               <a:spcAft>
                 <a:spcPts val="1000"/>
               </a:spcAft>
@@ -10432,7 +10432,7 @@
             <a:endParaRPr lang="en-US" sz="1400" dirty="0"/>
           </a:p>
           <a:p>
-            <a:pPr algn="r" indent="0" marL="0">
+            <a:pPr rtl="1" algn="r" indent="0" marL="0">
               <a:spcAft>
                 <a:spcPts val="1000"/>
               </a:spcAft>
@@ -10513,7 +10513,7 @@
           <a:bodyPr wrap="square" lIns="0" tIns="0" rIns="0" bIns="0" rtlCol="0" anchor="ctr"/>
           <a:lstStyle/>
           <a:p>
-            <a:pPr algn="r" indent="0" marL="0">
+            <a:pPr rtl="1" algn="r" indent="0" marL="0">
               <a:spcAft>
                 <a:spcPts val="1000"/>
               </a:spcAft>
@@ -10533,7 +10533,7 @@
             <a:endParaRPr lang="en-US" sz="1400" dirty="0"/>
           </a:p>
           <a:p>
-            <a:pPr algn="r" indent="0" marL="0">
+            <a:pPr rtl="1" algn="r" indent="0" marL="0">
               <a:spcAft>
                 <a:spcPts val="1000"/>
               </a:spcAft>
@@ -10553,7 +10553,7 @@
             <a:endParaRPr lang="en-US" sz="1400" dirty="0"/>
           </a:p>
           <a:p>
-            <a:pPr algn="r" indent="0" marL="0">
+            <a:pPr rtl="1" algn="r" indent="0" marL="0">
               <a:spcAft>
                 <a:spcPts val="1000"/>
               </a:spcAft>

--- a/lesson_02/lesson_02_slides.pptx
+++ b/lesson_02/lesson_02_slides.pptx
@@ -4980,7 +4980,43 @@
                 <a:ea typeface="Calibri" pitchFamily="34" charset="-122"/>
                 <a:cs typeface="Calibri" pitchFamily="34" charset="-120"/>
               </a:rPr>
-              <a:t> — למי שמאמת חשבון סטודנט, מקבל הרחבה (בכפוף לזמינות הרשמה שמשתנה מעת לעת)</a:t>
+              <a:t> — חבילת הטבות לסטודנטים מאומתים; הרשמה חדשה להטבת </a:t>
+            </a:r>
+            <a:pPr rtl="1" algn="r" marL="228600" indent="-228600">
+              <a:spcAft>
+                <a:spcPts val="1000"/>
+              </a:spcAft>
+              <a:buSzPct val="100000"/>
+              <a:buChar char="•"/>
+            </a:pPr>
+            <a:r>
+              <a:rPr lang="en-US" sz="1900" b="1" dirty="0">
+                <a:solidFill>
+                  <a:srgbClr val="1B1F3B"/>
+                </a:solidFill>
+                <a:latin typeface="Calibri" pitchFamily="34" charset="0"/>
+                <a:ea typeface="Calibri" pitchFamily="34" charset="-122"/>
+                <a:cs typeface="Calibri" pitchFamily="34" charset="-120"/>
+              </a:rPr>
+              <a:t>Copilot Student</a:t>
+            </a:r>
+            <a:pPr rtl="1" algn="r" marL="228600" indent="-228600">
+              <a:spcAft>
+                <a:spcPts val="1000"/>
+              </a:spcAft>
+              <a:buSzPct val="100000"/>
+              <a:buChar char="•"/>
+            </a:pPr>
+            <a:r>
+              <a:rPr lang="en-US" sz="1900" dirty="0">
+                <a:solidFill>
+                  <a:srgbClr val="1B1F3B"/>
+                </a:solidFill>
+                <a:latin typeface="Calibri" pitchFamily="34" charset="0"/>
+                <a:ea typeface="Calibri" pitchFamily="34" charset="-122"/>
+                <a:cs typeface="Calibri" pitchFamily="34" charset="-120"/>
+              </a:rPr>
+              <a:t> (מסלול מורחב יותר מ-Copilot Free הרגיל) מושהית מאפריל 2026 בשל עומס על תשתית agentic — מי שכבר אומת קודם ממשיך לקבל אותה, וחברי Pack חדשים מקבלים כרגע את Copilot Free הרגיל</a:t>
             </a:r>
             <a:endParaRPr lang="en-US" sz="1900" dirty="0"/>
           </a:p>

--- a/lesson_02/lesson_02_slides.pptx
+++ b/lesson_02/lesson_02_slides.pptx
@@ -29,9 +29,14 @@
     <p:sldId id="277" r:id="rId23"/>
     <p:sldId id="278" r:id="rId24"/>
     <p:sldId id="279" r:id="rId25"/>
+    <p:sldId id="280" r:id="rId26"/>
+    <p:sldId id="281" r:id="rId27"/>
+    <p:sldId id="282" r:id="rId28"/>
+    <p:sldId id="283" r:id="rId29"/>
+    <p:sldId id="284" r:id="rId30"/>
   </p:sldIdLst>
   <p:notesMasterIdLst>
-    <p:notesMasterId r:id="rId26"/>
+    <p:notesMasterId r:id="rId31"/>
   </p:notesMasterIdLst>
   <p:sldSz cx="12192000" cy="6858000"/>
   <p:notesSz cx="6858000" cy="12192000"/>
@@ -1957,6 +1962,446 @@
             <a:fld id="{F7021451-1387-4CA6-816F-3879F97B5CBC}" type="slidenum">
               <a:rPr lang="en-US"/>
               <a:t>24</a:t>
+            </a:fld>
+            <a:endParaRPr lang="en-US"/>
+          </a:p>
+        </p:txBody>
+      </p:sp>
+    </p:spTree>
+    <p:extLst>
+      <p:ext uri="{BB962C8B-B14F-4D97-AF65-F5344CB8AC3E}">
+        <p14:creationId xmlns:p14="http://schemas.microsoft.com/office/powerpoint/2010/main" val="1024086991"/>
+      </p:ext>
+    </p:extLst>
+  </p:cSld>
+  <p:clrMapOvr>
+    <a:masterClrMapping/>
+  </p:clrMapOvr>
+</p:notes>
+</file>
+
+<file path=ppt/notesSlides/notesSlide25.xml><?xml version="1.0" encoding="utf-8"?>
+<p:notes xmlns:a="http://schemas.openxmlformats.org/drawingml/2006/main" xmlns:r="http://schemas.openxmlformats.org/officeDocument/2006/relationships" xmlns:p="http://schemas.openxmlformats.org/presentationml/2006/main">
+  <p:cSld>
+    <p:spTree>
+      <p:nvGrpSpPr>
+        <p:cNvPr id="1" name=""/>
+        <p:cNvGrpSpPr/>
+        <p:nvPr/>
+      </p:nvGrpSpPr>
+      <p:grpSpPr>
+        <a:xfrm>
+          <a:off x="0" y="0"/>
+          <a:ext cx="0" cy="0"/>
+          <a:chOff x="0" y="0"/>
+          <a:chExt cx="0" cy="0"/>
+        </a:xfrm>
+      </p:grpSpPr>
+      <p:sp>
+        <p:nvSpPr>
+          <p:cNvPr id="2" name="Slide Image Placeholder 1"/>
+          <p:cNvSpPr>
+            <a:spLocks noGrp="1" noRot="1" noChangeAspect="1"/>
+          </p:cNvSpPr>
+          <p:nvPr>
+            <p:ph type="sldImg"/>
+          </p:nvPr>
+        </p:nvSpPr>
+        <p:spPr/>
+      </p:sp>
+      <p:sp>
+        <p:nvSpPr>
+          <p:cNvPr id="3" name="Notes Placeholder 2"/>
+          <p:cNvSpPr>
+            <a:spLocks noGrp="1"/>
+          </p:cNvSpPr>
+          <p:nvPr>
+            <p:ph type="body" idx="1"/>
+          </p:nvPr>
+        </p:nvSpPr>
+        <p:spPr/>
+        <p:txBody>
+          <a:bodyPr/>
+          <a:lstStyle/>
+          <a:p>
+            <a:r>
+              <a:rPr lang="en-US" dirty="0"/>
+              <a:t/>
+            </a:r>
+            <a:endParaRPr lang="en-US" dirty="0"/>
+          </a:p>
+        </p:txBody>
+      </p:sp>
+      <p:sp>
+        <p:nvSpPr>
+          <p:cNvPr id="4" name="Slide Number Placeholder 3"/>
+          <p:cNvSpPr>
+            <a:spLocks noGrp="1"/>
+          </p:cNvSpPr>
+          <p:nvPr>
+            <p:ph type="sldNum" sz="quarter" idx="10"/>
+          </p:nvPr>
+        </p:nvSpPr>
+        <p:spPr/>
+        <p:txBody>
+          <a:bodyPr/>
+          <a:lstStyle/>
+          <a:p>
+            <a:fld id="{F7021451-1387-4CA6-816F-3879F97B5CBC}" type="slidenum">
+              <a:rPr lang="en-US"/>
+              <a:t>25</a:t>
+            </a:fld>
+            <a:endParaRPr lang="en-US"/>
+          </a:p>
+        </p:txBody>
+      </p:sp>
+    </p:spTree>
+    <p:extLst>
+      <p:ext uri="{BB962C8B-B14F-4D97-AF65-F5344CB8AC3E}">
+        <p14:creationId xmlns:p14="http://schemas.microsoft.com/office/powerpoint/2010/main" val="1024086991"/>
+      </p:ext>
+    </p:extLst>
+  </p:cSld>
+  <p:clrMapOvr>
+    <a:masterClrMapping/>
+  </p:clrMapOvr>
+</p:notes>
+</file>
+
+<file path=ppt/notesSlides/notesSlide26.xml><?xml version="1.0" encoding="utf-8"?>
+<p:notes xmlns:a="http://schemas.openxmlformats.org/drawingml/2006/main" xmlns:r="http://schemas.openxmlformats.org/officeDocument/2006/relationships" xmlns:p="http://schemas.openxmlformats.org/presentationml/2006/main">
+  <p:cSld>
+    <p:spTree>
+      <p:nvGrpSpPr>
+        <p:cNvPr id="1" name=""/>
+        <p:cNvGrpSpPr/>
+        <p:nvPr/>
+      </p:nvGrpSpPr>
+      <p:grpSpPr>
+        <a:xfrm>
+          <a:off x="0" y="0"/>
+          <a:ext cx="0" cy="0"/>
+          <a:chOff x="0" y="0"/>
+          <a:chExt cx="0" cy="0"/>
+        </a:xfrm>
+      </p:grpSpPr>
+      <p:sp>
+        <p:nvSpPr>
+          <p:cNvPr id="2" name="Slide Image Placeholder 1"/>
+          <p:cNvSpPr>
+            <a:spLocks noGrp="1" noRot="1" noChangeAspect="1"/>
+          </p:cNvSpPr>
+          <p:nvPr>
+            <p:ph type="sldImg"/>
+          </p:nvPr>
+        </p:nvSpPr>
+        <p:spPr/>
+      </p:sp>
+      <p:sp>
+        <p:nvSpPr>
+          <p:cNvPr id="3" name="Notes Placeholder 2"/>
+          <p:cNvSpPr>
+            <a:spLocks noGrp="1"/>
+          </p:cNvSpPr>
+          <p:nvPr>
+            <p:ph type="body" idx="1"/>
+          </p:nvPr>
+        </p:nvSpPr>
+        <p:spPr/>
+        <p:txBody>
+          <a:bodyPr/>
+          <a:lstStyle/>
+          <a:p>
+            <a:r>
+              <a:rPr lang="en-US" dirty="0"/>
+              <a:t/>
+            </a:r>
+            <a:endParaRPr lang="en-US" dirty="0"/>
+          </a:p>
+        </p:txBody>
+      </p:sp>
+      <p:sp>
+        <p:nvSpPr>
+          <p:cNvPr id="4" name="Slide Number Placeholder 3"/>
+          <p:cNvSpPr>
+            <a:spLocks noGrp="1"/>
+          </p:cNvSpPr>
+          <p:nvPr>
+            <p:ph type="sldNum" sz="quarter" idx="10"/>
+          </p:nvPr>
+        </p:nvSpPr>
+        <p:spPr/>
+        <p:txBody>
+          <a:bodyPr/>
+          <a:lstStyle/>
+          <a:p>
+            <a:fld id="{F7021451-1387-4CA6-816F-3879F97B5CBC}" type="slidenum">
+              <a:rPr lang="en-US"/>
+              <a:t>26</a:t>
+            </a:fld>
+            <a:endParaRPr lang="en-US"/>
+          </a:p>
+        </p:txBody>
+      </p:sp>
+    </p:spTree>
+    <p:extLst>
+      <p:ext uri="{BB962C8B-B14F-4D97-AF65-F5344CB8AC3E}">
+        <p14:creationId xmlns:p14="http://schemas.microsoft.com/office/powerpoint/2010/main" val="1024086991"/>
+      </p:ext>
+    </p:extLst>
+  </p:cSld>
+  <p:clrMapOvr>
+    <a:masterClrMapping/>
+  </p:clrMapOvr>
+</p:notes>
+</file>
+
+<file path=ppt/notesSlides/notesSlide27.xml><?xml version="1.0" encoding="utf-8"?>
+<p:notes xmlns:a="http://schemas.openxmlformats.org/drawingml/2006/main" xmlns:r="http://schemas.openxmlformats.org/officeDocument/2006/relationships" xmlns:p="http://schemas.openxmlformats.org/presentationml/2006/main">
+  <p:cSld>
+    <p:spTree>
+      <p:nvGrpSpPr>
+        <p:cNvPr id="1" name=""/>
+        <p:cNvGrpSpPr/>
+        <p:nvPr/>
+      </p:nvGrpSpPr>
+      <p:grpSpPr>
+        <a:xfrm>
+          <a:off x="0" y="0"/>
+          <a:ext cx="0" cy="0"/>
+          <a:chOff x="0" y="0"/>
+          <a:chExt cx="0" cy="0"/>
+        </a:xfrm>
+      </p:grpSpPr>
+      <p:sp>
+        <p:nvSpPr>
+          <p:cNvPr id="2" name="Slide Image Placeholder 1"/>
+          <p:cNvSpPr>
+            <a:spLocks noGrp="1" noRot="1" noChangeAspect="1"/>
+          </p:cNvSpPr>
+          <p:nvPr>
+            <p:ph type="sldImg"/>
+          </p:nvPr>
+        </p:nvSpPr>
+        <p:spPr/>
+      </p:sp>
+      <p:sp>
+        <p:nvSpPr>
+          <p:cNvPr id="3" name="Notes Placeholder 2"/>
+          <p:cNvSpPr>
+            <a:spLocks noGrp="1"/>
+          </p:cNvSpPr>
+          <p:nvPr>
+            <p:ph type="body" idx="1"/>
+          </p:nvPr>
+        </p:nvSpPr>
+        <p:spPr/>
+        <p:txBody>
+          <a:bodyPr/>
+          <a:lstStyle/>
+          <a:p>
+            <a:r>
+              <a:rPr lang="en-US" dirty="0"/>
+              <a:t/>
+            </a:r>
+            <a:endParaRPr lang="en-US" dirty="0"/>
+          </a:p>
+        </p:txBody>
+      </p:sp>
+      <p:sp>
+        <p:nvSpPr>
+          <p:cNvPr id="4" name="Slide Number Placeholder 3"/>
+          <p:cNvSpPr>
+            <a:spLocks noGrp="1"/>
+          </p:cNvSpPr>
+          <p:nvPr>
+            <p:ph type="sldNum" sz="quarter" idx="10"/>
+          </p:nvPr>
+        </p:nvSpPr>
+        <p:spPr/>
+        <p:txBody>
+          <a:bodyPr/>
+          <a:lstStyle/>
+          <a:p>
+            <a:fld id="{F7021451-1387-4CA6-816F-3879F97B5CBC}" type="slidenum">
+              <a:rPr lang="en-US"/>
+              <a:t>27</a:t>
+            </a:fld>
+            <a:endParaRPr lang="en-US"/>
+          </a:p>
+        </p:txBody>
+      </p:sp>
+    </p:spTree>
+    <p:extLst>
+      <p:ext uri="{BB962C8B-B14F-4D97-AF65-F5344CB8AC3E}">
+        <p14:creationId xmlns:p14="http://schemas.microsoft.com/office/powerpoint/2010/main" val="1024086991"/>
+      </p:ext>
+    </p:extLst>
+  </p:cSld>
+  <p:clrMapOvr>
+    <a:masterClrMapping/>
+  </p:clrMapOvr>
+</p:notes>
+</file>
+
+<file path=ppt/notesSlides/notesSlide28.xml><?xml version="1.0" encoding="utf-8"?>
+<p:notes xmlns:a="http://schemas.openxmlformats.org/drawingml/2006/main" xmlns:r="http://schemas.openxmlformats.org/officeDocument/2006/relationships" xmlns:p="http://schemas.openxmlformats.org/presentationml/2006/main">
+  <p:cSld>
+    <p:spTree>
+      <p:nvGrpSpPr>
+        <p:cNvPr id="1" name=""/>
+        <p:cNvGrpSpPr/>
+        <p:nvPr/>
+      </p:nvGrpSpPr>
+      <p:grpSpPr>
+        <a:xfrm>
+          <a:off x="0" y="0"/>
+          <a:ext cx="0" cy="0"/>
+          <a:chOff x="0" y="0"/>
+          <a:chExt cx="0" cy="0"/>
+        </a:xfrm>
+      </p:grpSpPr>
+      <p:sp>
+        <p:nvSpPr>
+          <p:cNvPr id="2" name="Slide Image Placeholder 1"/>
+          <p:cNvSpPr>
+            <a:spLocks noGrp="1" noRot="1" noChangeAspect="1"/>
+          </p:cNvSpPr>
+          <p:nvPr>
+            <p:ph type="sldImg"/>
+          </p:nvPr>
+        </p:nvSpPr>
+        <p:spPr/>
+      </p:sp>
+      <p:sp>
+        <p:nvSpPr>
+          <p:cNvPr id="3" name="Notes Placeholder 2"/>
+          <p:cNvSpPr>
+            <a:spLocks noGrp="1"/>
+          </p:cNvSpPr>
+          <p:nvPr>
+            <p:ph type="body" idx="1"/>
+          </p:nvPr>
+        </p:nvSpPr>
+        <p:spPr/>
+        <p:txBody>
+          <a:bodyPr/>
+          <a:lstStyle/>
+          <a:p>
+            <a:r>
+              <a:rPr lang="en-US" dirty="0"/>
+              <a:t/>
+            </a:r>
+            <a:endParaRPr lang="en-US" dirty="0"/>
+          </a:p>
+        </p:txBody>
+      </p:sp>
+      <p:sp>
+        <p:nvSpPr>
+          <p:cNvPr id="4" name="Slide Number Placeholder 3"/>
+          <p:cNvSpPr>
+            <a:spLocks noGrp="1"/>
+          </p:cNvSpPr>
+          <p:nvPr>
+            <p:ph type="sldNum" sz="quarter" idx="10"/>
+          </p:nvPr>
+        </p:nvSpPr>
+        <p:spPr/>
+        <p:txBody>
+          <a:bodyPr/>
+          <a:lstStyle/>
+          <a:p>
+            <a:fld id="{F7021451-1387-4CA6-816F-3879F97B5CBC}" type="slidenum">
+              <a:rPr lang="en-US"/>
+              <a:t>28</a:t>
+            </a:fld>
+            <a:endParaRPr lang="en-US"/>
+          </a:p>
+        </p:txBody>
+      </p:sp>
+    </p:spTree>
+    <p:extLst>
+      <p:ext uri="{BB962C8B-B14F-4D97-AF65-F5344CB8AC3E}">
+        <p14:creationId xmlns:p14="http://schemas.microsoft.com/office/powerpoint/2010/main" val="1024086991"/>
+      </p:ext>
+    </p:extLst>
+  </p:cSld>
+  <p:clrMapOvr>
+    <a:masterClrMapping/>
+  </p:clrMapOvr>
+</p:notes>
+</file>
+
+<file path=ppt/notesSlides/notesSlide29.xml><?xml version="1.0" encoding="utf-8"?>
+<p:notes xmlns:a="http://schemas.openxmlformats.org/drawingml/2006/main" xmlns:r="http://schemas.openxmlformats.org/officeDocument/2006/relationships" xmlns:p="http://schemas.openxmlformats.org/presentationml/2006/main">
+  <p:cSld>
+    <p:spTree>
+      <p:nvGrpSpPr>
+        <p:cNvPr id="1" name=""/>
+        <p:cNvGrpSpPr/>
+        <p:nvPr/>
+      </p:nvGrpSpPr>
+      <p:grpSpPr>
+        <a:xfrm>
+          <a:off x="0" y="0"/>
+          <a:ext cx="0" cy="0"/>
+          <a:chOff x="0" y="0"/>
+          <a:chExt cx="0" cy="0"/>
+        </a:xfrm>
+      </p:grpSpPr>
+      <p:sp>
+        <p:nvSpPr>
+          <p:cNvPr id="2" name="Slide Image Placeholder 1"/>
+          <p:cNvSpPr>
+            <a:spLocks noGrp="1" noRot="1" noChangeAspect="1"/>
+          </p:cNvSpPr>
+          <p:nvPr>
+            <p:ph type="sldImg"/>
+          </p:nvPr>
+        </p:nvSpPr>
+        <p:spPr/>
+      </p:sp>
+      <p:sp>
+        <p:nvSpPr>
+          <p:cNvPr id="3" name="Notes Placeholder 2"/>
+          <p:cNvSpPr>
+            <a:spLocks noGrp="1"/>
+          </p:cNvSpPr>
+          <p:nvPr>
+            <p:ph type="body" idx="1"/>
+          </p:nvPr>
+        </p:nvSpPr>
+        <p:spPr/>
+        <p:txBody>
+          <a:bodyPr/>
+          <a:lstStyle/>
+          <a:p>
+            <a:r>
+              <a:rPr lang="en-US" dirty="0"/>
+              <a:t/>
+            </a:r>
+            <a:endParaRPr lang="en-US" dirty="0"/>
+          </a:p>
+        </p:txBody>
+      </p:sp>
+      <p:sp>
+        <p:nvSpPr>
+          <p:cNvPr id="4" name="Slide Number Placeholder 3"/>
+          <p:cNvSpPr>
+            <a:spLocks noGrp="1"/>
+          </p:cNvSpPr>
+          <p:nvPr>
+            <p:ph type="sldNum" sz="quarter" idx="10"/>
+          </p:nvPr>
+        </p:nvSpPr>
+        <p:spPr/>
+        <p:txBody>
+          <a:bodyPr/>
+          <a:lstStyle/>
+          <a:p>
+            <a:fld id="{F7021451-1387-4CA6-816F-3879F97B5CBC}" type="slidenum">
+              <a:rPr lang="en-US"/>
+              <a:t>29</a:t>
             </a:fld>
             <a:endParaRPr lang="en-US"/>
           </a:p>
@@ -3288,7 +3733,7 @@
                 <a:ea typeface="Arial" pitchFamily="34" charset="-122"/>
                 <a:cs typeface="Arial" pitchFamily="34" charset="-120"/>
               </a:rPr>
-              <a:t>המרוץ לבנצ'מארק: המספרים</a:t>
+              <a:t>איך מודדים "כמה טוב" כלי אג'נטי?</a:t>
             </a:r>
             <a:endParaRPr lang="en-US" sz="2800" dirty="0"/>
           </a:p>
@@ -3302,7 +3747,46 @@
         </p:nvSpPr>
         <p:spPr>
           <a:xfrm>
-            <a:off x="548640" y="1234440"/>
+            <a:off x="548640" y="1024128"/>
+            <a:ext cx="11091672" cy="411480"/>
+          </a:xfrm>
+          <a:prstGeom prst="rect">
+            <a:avLst/>
+          </a:prstGeom>
+          <a:noFill/>
+          <a:ln/>
+        </p:spPr>
+        <p:txBody>
+          <a:bodyPr wrap="square" lIns="0" tIns="0" rIns="0" bIns="0" rtlCol="0" anchor="ctr"/>
+          <a:lstStyle/>
+          <a:p>
+            <a:pPr rtl="1" algn="r" indent="0" marL="0">
+              <a:buNone/>
+            </a:pPr>
+            <a:r>
+              <a:rPr lang="en-US" sz="1700" i="1" dirty="0">
+                <a:solidFill>
+                  <a:srgbClr val="6B7280"/>
+                </a:solidFill>
+                <a:latin typeface="Calibri" pitchFamily="34" charset="0"/>
+                <a:ea typeface="Calibri" pitchFamily="34" charset="-122"/>
+                <a:cs typeface="Calibri" pitchFamily="34" charset="-120"/>
+              </a:rPr>
+              <a:t>השאלה: איך משווים בין כלי AI שונים בצורה אובייקטיבית?</a:t>
+            </a:r>
+            <a:endParaRPr lang="en-US" sz="1700" dirty="0"/>
+          </a:p>
+        </p:txBody>
+      </p:sp>
+      <p:sp>
+        <p:nvSpPr>
+          <p:cNvPr id="4" name="Text 2"/>
+          <p:cNvSpPr/>
+          <p:nvPr/>
+        </p:nvSpPr>
+        <p:spPr>
+          <a:xfrm>
+            <a:off x="548640" y="1508760"/>
             <a:ext cx="11091672" cy="3931920"/>
           </a:xfrm>
           <a:prstGeom prst="rect">
@@ -3323,6 +3807,24 @@
               <a:buChar char="•"/>
             </a:pPr>
             <a:r>
+              <a:rPr lang="en-US" sz="1900" dirty="0">
+                <a:solidFill>
+                  <a:srgbClr val="1B1F3B"/>
+                </a:solidFill>
+                <a:latin typeface="Calibri" pitchFamily="34" charset="0"/>
+                <a:ea typeface="Calibri" pitchFamily="34" charset="-122"/>
+                <a:cs typeface="Calibri" pitchFamily="34" charset="-120"/>
+              </a:rPr>
+              <a:t>הדרך המקצועית היא בנצ'מארקים (מבחני השוואה סטנדרטיים): </a:t>
+            </a:r>
+            <a:pPr rtl="1" algn="r" marL="228600" indent="-228600">
+              <a:spcAft>
+                <a:spcPts val="1000"/>
+              </a:spcAft>
+              <a:buSzPct val="100000"/>
+              <a:buChar char="•"/>
+            </a:pPr>
+            <a:r>
               <a:rPr lang="en-US" sz="1900" b="1" dirty="0">
                 <a:solidFill>
                   <a:srgbClr val="1B1F3B"/>
@@ -3331,7 +3833,7 @@
                 <a:ea typeface="Calibri" pitchFamily="34" charset="-122"/>
                 <a:cs typeface="Calibri" pitchFamily="34" charset="-120"/>
               </a:rPr>
-              <a:t>80.8%</a:t>
+              <a:t>SWE-bench</a:t>
             </a:r>
             <a:pPr rtl="1" algn="r" marL="228600" indent="-228600">
               <a:spcAft>
@@ -3349,7 +3851,43 @@
                 <a:ea typeface="Calibri" pitchFamily="34" charset="-122"/>
                 <a:cs typeface="Calibri" pitchFamily="34" charset="-120"/>
               </a:rPr>
-              <a:t> — התוצאה של Claude Code ב-SWE-bench Verified (הגרסה ה"מנוקה" של הבנצ'מארק)</a:t>
+              <a:t> (בעיות תכנות אמיתיות שנאספו מ-GitHub) ו-</a:t>
+            </a:r>
+            <a:pPr rtl="1" algn="r" marL="228600" indent="-228600">
+              <a:spcAft>
+                <a:spcPts val="1000"/>
+              </a:spcAft>
+              <a:buSzPct val="100000"/>
+              <a:buChar char="•"/>
+            </a:pPr>
+            <a:r>
+              <a:rPr lang="en-US" sz="1900" b="1" dirty="0">
+                <a:solidFill>
+                  <a:srgbClr val="1B1F3B"/>
+                </a:solidFill>
+                <a:latin typeface="Calibri" pitchFamily="34" charset="0"/>
+                <a:ea typeface="Calibri" pitchFamily="34" charset="-122"/>
+                <a:cs typeface="Calibri" pitchFamily="34" charset="-120"/>
+              </a:rPr>
+              <a:t>Terminal-Bench</a:t>
+            </a:r>
+            <a:pPr rtl="1" algn="r" marL="228600" indent="-228600">
+              <a:spcAft>
+                <a:spcPts val="1000"/>
+              </a:spcAft>
+              <a:buSzPct val="100000"/>
+              <a:buChar char="•"/>
+            </a:pPr>
+            <a:r>
+              <a:rPr lang="en-US" sz="1900" dirty="0">
+                <a:solidFill>
+                  <a:srgbClr val="1B1F3B"/>
+                </a:solidFill>
+                <a:latin typeface="Calibri" pitchFamily="34" charset="0"/>
+                <a:ea typeface="Calibri" pitchFamily="34" charset="-122"/>
+                <a:cs typeface="Calibri" pitchFamily="34" charset="-120"/>
+              </a:rPr>
+              <a:t> (משימות טרמינל/שורת-פקודה מורכבות)</a:t>
             </a:r>
             <a:endParaRPr lang="en-US" sz="1900" dirty="0"/>
           </a:p>
@@ -3370,7 +3908,7 @@
                 <a:ea typeface="Calibri" pitchFamily="34" charset="-122"/>
                 <a:cs typeface="Calibri" pitchFamily="34" charset="-120"/>
               </a:rPr>
-              <a:t>78.9%-83.1%</a:t>
+              <a:t>אזהרה מקצועית:</a:t>
             </a:r>
             <a:pPr rtl="1" algn="r" marL="228600" indent="-228600">
               <a:spcAft>
@@ -3388,7 +3926,7 @@
                 <a:ea typeface="Calibri" pitchFamily="34" charset="-122"/>
                 <a:cs typeface="Calibri" pitchFamily="34" charset="-120"/>
               </a:rPr>
-              <a:t> — טווח התוצאות של Claude Code ב-Terminal-Bench 2.1, תלוי בגרסת המודל</a:t>
+              <a:t> יש היום חמש גרסאות שונות של SWE-bench (Original, Verified, Pro, Multilingual, Live), וההשוואה ביניהן לא תמיד הוגנת</a:t>
             </a:r>
             <a:endParaRPr lang="en-US" sz="1900" dirty="0"/>
           </a:p>
@@ -3409,7 +3947,7 @@
                 <a:ea typeface="Calibri" pitchFamily="34" charset="-122"/>
                 <a:cs typeface="Calibri" pitchFamily="34" charset="-120"/>
               </a:rPr>
-              <a:t>כפי שראינו בשקף הקודם — המספרים האלה חשובים, אבל </a:t>
+              <a:t>אפילו על אותם משקלי מודל בדיוק, יש שונות (Variance) של 10-20 נקודות אחוז, בהתאם ל-</a:t>
             </a:r>
             <a:pPr rtl="1" algn="r" marL="228600" indent="-228600">
               <a:spcAft>
@@ -3427,7 +3965,7 @@
                 <a:ea typeface="Calibri" pitchFamily="34" charset="-122"/>
                 <a:cs typeface="Calibri" pitchFamily="34" charset="-120"/>
               </a:rPr>
-              <a:t>רק</a:t>
+              <a:t>Harness</a:t>
             </a:r>
             <a:pPr rtl="1" algn="r" marL="228600" indent="-228600">
               <a:spcAft>
@@ -3445,7 +3983,7 @@
                 <a:ea typeface="Calibri" pitchFamily="34" charset="-122"/>
                 <a:cs typeface="Calibri" pitchFamily="34" charset="-120"/>
               </a:rPr>
-              <a:t> ביחד עם אזהרת המתודולוגיה, לא בלעדיה</a:t>
+              <a:t> (התשתית הטכנית שמריצה את הבדיקה בפועל)</a:t>
             </a:r>
             <a:endParaRPr lang="en-US" sz="1900" dirty="0"/>
           </a:p>
@@ -3453,13 +3991,13 @@
       </p:sp>
       <p:sp>
         <p:nvSpPr>
-          <p:cNvPr id="4" name="Shape 2"/>
-          <p:cNvSpPr/>
-          <p:nvPr/>
-        </p:nvSpPr>
-        <p:spPr>
-          <a:xfrm>
-            <a:off x="548640" y="5303520"/>
+          <p:cNvPr id="5" name="Shape 3"/>
+          <p:cNvSpPr/>
+          <p:nvPr/>
+        </p:nvSpPr>
+        <p:spPr>
+          <a:xfrm>
+            <a:off x="548640" y="5577840"/>
             <a:ext cx="11091672" cy="0"/>
           </a:xfrm>
           <a:prstGeom prst="line">
@@ -3476,14 +4014,14 @@
       </p:sp>
       <p:sp>
         <p:nvSpPr>
-          <p:cNvPr id="5" name="Text 3"/>
-          <p:cNvSpPr/>
-          <p:nvPr/>
-        </p:nvSpPr>
-        <p:spPr>
-          <a:xfrm>
-            <a:off x="548640" y="5394960"/>
-            <a:ext cx="11091672" cy="868680"/>
+          <p:cNvPr id="6" name="Text 4"/>
+          <p:cNvSpPr/>
+          <p:nvPr/>
+        </p:nvSpPr>
+        <p:spPr>
+          <a:xfrm>
+            <a:off x="548640" y="5669280"/>
+            <a:ext cx="11091672" cy="621792"/>
           </a:xfrm>
           <a:prstGeom prst="rect">
             <a:avLst/>
@@ -3507,48 +4045,9 @@
                 <a:ea typeface="Arial" pitchFamily="34" charset="-122"/>
                 <a:cs typeface="Arial" pitchFamily="34" charset="-120"/>
               </a:rPr>
-              <a:t>✔ מה עושים בפועל: מספר בנצ'מארק בודד הוא נקודת התחלה לבדיקה, לא מסקנה סופית.</a:t>
+              <a:t>✔ מה עושים בפועל: תמיד בודקים את המתודולוגיה מאחורי מספר בנצ'מארק לפני שסומכים עליו — בדיוק כמו שבודקים מתודולוגיה לפני שסומכים על הערכת מודל בכל הקשר אחר שאתם מכירים.</a:t>
             </a:r>
             <a:endParaRPr lang="en-US" sz="1700" dirty="0"/>
-          </a:p>
-        </p:txBody>
-      </p:sp>
-      <p:sp>
-        <p:nvSpPr>
-          <p:cNvPr id="6" name="Text 4"/>
-          <p:cNvSpPr/>
-          <p:nvPr/>
-        </p:nvSpPr>
-        <p:spPr>
-          <a:xfrm>
-            <a:off x="548640" y="6172200"/>
-            <a:ext cx="11091672" cy="274320"/>
-          </a:xfrm>
-          <a:prstGeom prst="rect">
-            <a:avLst/>
-          </a:prstGeom>
-          <a:noFill/>
-          <a:ln/>
-        </p:spPr>
-        <p:txBody>
-          <a:bodyPr wrap="square" lIns="0" tIns="0" rIns="0" bIns="0" rtlCol="0" anchor="ctr"/>
-          <a:lstStyle/>
-          <a:p>
-            <a:pPr rtl="1" algn="r" indent="0" marL="0">
-              <a:buNone/>
-            </a:pPr>
-            <a:r>
-              <a:rPr lang="en-US" sz="1000" i="1" dirty="0">
-                <a:solidFill>
-                  <a:srgbClr val="6B7280"/>
-                </a:solidFill>
-                <a:latin typeface="Calibri" pitchFamily="34" charset="0"/>
-                <a:ea typeface="Calibri" pitchFamily="34" charset="-122"/>
-                <a:cs typeface="Calibri" pitchFamily="34" charset="-120"/>
-              </a:rPr>
-              <a:t>מקור: DigitalApplied, MorphLLM — 2026</a:t>
-            </a:r>
-            <a:endParaRPr lang="en-US" sz="1000" dirty="0"/>
           </a:p>
         </p:txBody>
       </p:sp>
@@ -3656,7 +4155,7 @@
                 <a:ea typeface="Arial" pitchFamily="34" charset="-122"/>
                 <a:cs typeface="Arial" pitchFamily="34" charset="-120"/>
               </a:rPr>
-              <a:t>Claude Code — איך זה עובד בפועל</a:t>
+              <a:t>המרוץ לבנצ'מארק: המספרים</a:t>
             </a:r>
             <a:endParaRPr lang="en-US" sz="2800" dirty="0"/>
           </a:p>
@@ -3670,46 +4169,7 @@
         </p:nvSpPr>
         <p:spPr>
           <a:xfrm>
-            <a:off x="548640" y="1024128"/>
-            <a:ext cx="11091672" cy="411480"/>
-          </a:xfrm>
-          <a:prstGeom prst="rect">
-            <a:avLst/>
-          </a:prstGeom>
-          <a:noFill/>
-          <a:ln/>
-        </p:spPr>
-        <p:txBody>
-          <a:bodyPr wrap="square" lIns="0" tIns="0" rIns="0" bIns="0" rtlCol="0" anchor="ctr"/>
-          <a:lstStyle/>
-          <a:p>
-            <a:pPr rtl="1" algn="r" indent="0" marL="0">
-              <a:buNone/>
-            </a:pPr>
-            <a:r>
-              <a:rPr lang="en-US" sz="1700" i="1" dirty="0">
-                <a:solidFill>
-                  <a:srgbClr val="6B7280"/>
-                </a:solidFill>
-                <a:latin typeface="Calibri" pitchFamily="34" charset="0"/>
-                <a:ea typeface="Calibri" pitchFamily="34" charset="-122"/>
-                <a:cs typeface="Calibri" pitchFamily="34" charset="-120"/>
-              </a:rPr>
-              <a:t>השאלה: אז איך בפועל נראית עבודה מול כלי אג'נטי, צעד-צעד?</a:t>
-            </a:r>
-            <a:endParaRPr lang="en-US" sz="1700" dirty="0"/>
-          </a:p>
-        </p:txBody>
-      </p:sp>
-      <p:sp>
-        <p:nvSpPr>
-          <p:cNvPr id="4" name="Text 2"/>
-          <p:cNvSpPr/>
-          <p:nvPr/>
-        </p:nvSpPr>
-        <p:spPr>
-          <a:xfrm>
-            <a:off x="548640" y="1508760"/>
+            <a:off x="548640" y="1234440"/>
             <a:ext cx="11091672" cy="3931920"/>
           </a:xfrm>
           <a:prstGeom prst="rect">
@@ -3738,7 +4198,7 @@
                 <a:ea typeface="Calibri" pitchFamily="34" charset="-122"/>
                 <a:cs typeface="Calibri" pitchFamily="34" charset="-120"/>
               </a:rPr>
-              <a:t>1. פתיחת Session</a:t>
+              <a:t>80.8%</a:t>
             </a:r>
             <a:pPr rtl="1" algn="r" marL="228600" indent="-228600">
               <a:spcAft>
@@ -3756,7 +4216,7 @@
                 <a:ea typeface="Calibri" pitchFamily="34" charset="-122"/>
                 <a:cs typeface="Calibri" pitchFamily="34" charset="-120"/>
               </a:rPr>
-              <a:t> (חיבור פעיל אחד מול כלי ה-AI, מתחילתו ועד סופו) — מהטרמינל, או כתוסף בתוך VS Code</a:t>
+              <a:t> — התוצאה של Claude Code ב-SWE-bench Verified (הגרסה ה"מנוקה" של הבנצ'מארק)</a:t>
             </a:r>
             <a:endParaRPr lang="en-US" sz="1900" dirty="0"/>
           </a:p>
@@ -3777,7 +4237,7 @@
                 <a:ea typeface="Calibri" pitchFamily="34" charset="-122"/>
                 <a:cs typeface="Calibri" pitchFamily="34" charset="-120"/>
               </a:rPr>
-              <a:t>2. הנחיה ברורה וספציפית</a:t>
+              <a:t>78.9%-83.1%</a:t>
             </a:r>
             <a:pPr rtl="1" algn="r" marL="228600" indent="-228600">
               <a:spcAft>
@@ -3795,7 +4255,7 @@
                 <a:ea typeface="Calibri" pitchFamily="34" charset="-122"/>
                 <a:cs typeface="Calibri" pitchFamily="34" charset="-120"/>
               </a:rPr>
-              <a:t> — אומרים בדיוק מה רוצים</a:t>
+              <a:t> — טווח התוצאות של Claude Code ב-Terminal-Bench 2.1, תלוי בגרסת המודל</a:t>
             </a:r>
             <a:endParaRPr lang="en-US" sz="1900" dirty="0"/>
           </a:p>
@@ -3808,6 +4268,24 @@
               <a:buChar char="•"/>
             </a:pPr>
             <a:r>
+              <a:rPr lang="en-US" sz="1900" dirty="0">
+                <a:solidFill>
+                  <a:srgbClr val="1B1F3B"/>
+                </a:solidFill>
+                <a:latin typeface="Calibri" pitchFamily="34" charset="0"/>
+                <a:ea typeface="Calibri" pitchFamily="34" charset="-122"/>
+                <a:cs typeface="Calibri" pitchFamily="34" charset="-120"/>
+              </a:rPr>
+              <a:t>כפי שראינו בשקף הקודם — המספרים האלה חשובים, אבל </a:t>
+            </a:r>
+            <a:pPr rtl="1" algn="r" marL="228600" indent="-228600">
+              <a:spcAft>
+                <a:spcPts val="1000"/>
+              </a:spcAft>
+              <a:buSzPct val="100000"/>
+              <a:buChar char="•"/>
+            </a:pPr>
+            <a:r>
               <a:rPr lang="en-US" sz="1900" b="1" dirty="0">
                 <a:solidFill>
                   <a:srgbClr val="1B1F3B"/>
@@ -3816,7 +4294,7 @@
                 <a:ea typeface="Calibri" pitchFamily="34" charset="-122"/>
                 <a:cs typeface="Calibri" pitchFamily="34" charset="-120"/>
               </a:rPr>
-              <a:t>3. הכלי מציג תוכנית או מתחיל לפעול</a:t>
+              <a:t>רק</a:t>
             </a:r>
             <a:pPr rtl="1" algn="r" marL="228600" indent="-228600">
               <a:spcAft>
@@ -3834,117 +4312,21 @@
                 <a:ea typeface="Calibri" pitchFamily="34" charset="-122"/>
                 <a:cs typeface="Calibri" pitchFamily="34" charset="-120"/>
               </a:rPr>
-              <a:t> — קורא קבצים, כותב קוד</a:t>
+              <a:t> ביחד עם אזהרת המתודולוגיה, לא בלעדיה</a:t>
             </a:r>
             <a:endParaRPr lang="en-US" sz="1900" dirty="0"/>
           </a:p>
-          <a:p>
-            <a:pPr rtl="1" algn="r" marL="228600" indent="-228600">
-              <a:spcAft>
-                <a:spcPts val="1000"/>
-              </a:spcAft>
-              <a:buSzPct val="100000"/>
-              <a:buChar char="•"/>
-            </a:pPr>
-            <a:r>
-              <a:rPr lang="en-US" sz="1900" b="1" dirty="0">
-                <a:solidFill>
-                  <a:srgbClr val="1B1F3B"/>
-                </a:solidFill>
-                <a:latin typeface="Calibri" pitchFamily="34" charset="0"/>
-                <a:ea typeface="Calibri" pitchFamily="34" charset="-122"/>
-                <a:cs typeface="Calibri" pitchFamily="34" charset="-120"/>
-              </a:rPr>
-              <a:t>4. בודקים כל Diff</a:t>
-            </a:r>
-            <a:pPr rtl="1" algn="r" marL="228600" indent="-228600">
-              <a:spcAft>
-                <a:spcPts val="1000"/>
-              </a:spcAft>
-              <a:buSzPct val="100000"/>
-              <a:buChar char="•"/>
-            </a:pPr>
-            <a:r>
-              <a:rPr lang="en-US" sz="1900" dirty="0">
-                <a:solidFill>
-                  <a:srgbClr val="1B1F3B"/>
-                </a:solidFill>
-                <a:latin typeface="Calibri" pitchFamily="34" charset="0"/>
-                <a:ea typeface="Calibri" pitchFamily="34" charset="-122"/>
-                <a:cs typeface="Calibri" pitchFamily="34" charset="-120"/>
-              </a:rPr>
-              <a:t> (תצוגה שמראה בדיוק אילו שורות קוד השתנו, נוספו, או נמחקו) </a:t>
-            </a:r>
-            <a:pPr rtl="1" algn="r" marL="228600" indent="-228600">
-              <a:spcAft>
-                <a:spcPts val="1000"/>
-              </a:spcAft>
-              <a:buSzPct val="100000"/>
-              <a:buChar char="•"/>
-            </a:pPr>
-            <a:r>
-              <a:rPr lang="en-US" sz="1900" b="1" dirty="0">
-                <a:solidFill>
-                  <a:srgbClr val="1B1F3B"/>
-                </a:solidFill>
-                <a:latin typeface="Calibri" pitchFamily="34" charset="0"/>
-                <a:ea typeface="Calibri" pitchFamily="34" charset="-122"/>
-                <a:cs typeface="Calibri" pitchFamily="34" charset="-120"/>
-              </a:rPr>
-              <a:t>לפני שמאשרים</a:t>
-            </a:r>
-            <a:endParaRPr lang="en-US" sz="1900" dirty="0"/>
-          </a:p>
-          <a:p>
-            <a:pPr rtl="1" algn="r" marL="228600" indent="-228600">
-              <a:spcAft>
-                <a:spcPts val="1000"/>
-              </a:spcAft>
-              <a:buSzPct val="100000"/>
-              <a:buChar char="•"/>
-            </a:pPr>
-            <a:r>
-              <a:rPr lang="en-US" sz="1900" b="1" dirty="0">
-                <a:solidFill>
-                  <a:srgbClr val="1B1F3B"/>
-                </a:solidFill>
-                <a:latin typeface="Calibri" pitchFamily="34" charset="0"/>
-                <a:ea typeface="Calibri" pitchFamily="34" charset="-122"/>
-                <a:cs typeface="Calibri" pitchFamily="34" charset="-120"/>
-              </a:rPr>
-              <a:t>5. ממשיכים לצעד הבא</a:t>
-            </a:r>
-            <a:pPr rtl="1" algn="r" marL="228600" indent="-228600">
-              <a:spcAft>
-                <a:spcPts val="1000"/>
-              </a:spcAft>
-              <a:buSzPct val="100000"/>
-              <a:buChar char="•"/>
-            </a:pPr>
-            <a:r>
-              <a:rPr lang="en-US" sz="1900" dirty="0">
-                <a:solidFill>
-                  <a:srgbClr val="1B1F3B"/>
-                </a:solidFill>
-                <a:latin typeface="Calibri" pitchFamily="34" charset="0"/>
-                <a:ea typeface="Calibri" pitchFamily="34" charset="-122"/>
-                <a:cs typeface="Calibri" pitchFamily="34" charset="-120"/>
-              </a:rPr>
-              <a:t>, או חוזרים לשלב 2 אם צריך תיקון</a:t>
-            </a:r>
-            <a:endParaRPr lang="en-US" sz="1900" dirty="0"/>
-          </a:p>
-        </p:txBody>
-      </p:sp>
-      <p:sp>
-        <p:nvSpPr>
-          <p:cNvPr id="5" name="Shape 3"/>
-          <p:cNvSpPr/>
-          <p:nvPr/>
-        </p:nvSpPr>
-        <p:spPr>
-          <a:xfrm>
-            <a:off x="548640" y="5577840"/>
+        </p:txBody>
+      </p:sp>
+      <p:sp>
+        <p:nvSpPr>
+          <p:cNvPr id="4" name="Shape 2"/>
+          <p:cNvSpPr/>
+          <p:nvPr/>
+        </p:nvSpPr>
+        <p:spPr>
+          <a:xfrm>
+            <a:off x="548640" y="5303520"/>
             <a:ext cx="11091672" cy="0"/>
           </a:xfrm>
           <a:prstGeom prst="line">
@@ -3961,14 +4343,14 @@
       </p:sp>
       <p:sp>
         <p:nvSpPr>
-          <p:cNvPr id="6" name="Text 4"/>
-          <p:cNvSpPr/>
-          <p:nvPr/>
-        </p:nvSpPr>
-        <p:spPr>
-          <a:xfrm>
-            <a:off x="548640" y="5669280"/>
-            <a:ext cx="11091672" cy="868680"/>
+          <p:cNvPr id="5" name="Text 3"/>
+          <p:cNvSpPr/>
+          <p:nvPr/>
+        </p:nvSpPr>
+        <p:spPr>
+          <a:xfrm>
+            <a:off x="548640" y="5394960"/>
+            <a:ext cx="11091672" cy="457200"/>
           </a:xfrm>
           <a:prstGeom prst="rect">
             <a:avLst/>
@@ -3992,9 +4374,48 @@
                 <a:ea typeface="Arial" pitchFamily="34" charset="-122"/>
                 <a:cs typeface="Arial" pitchFamily="34" charset="-120"/>
               </a:rPr>
-              <a:t>✔ מה עושים בפועל: זה בדיוק החיבור לשלבים 4-6 מה-Workflow שלמדנו בשיעור 1 (תכנון עם AI → מימוש עם AI → Code Review) — היום אתם עושים את זה בפועל, לא רק רואים הדגמה.</a:t>
+              <a:t>✔ מה עושים בפועל: מספר בנצ'מארק בודד הוא נקודת התחלה לבדיקה, לא מסקנה סופית.</a:t>
             </a:r>
             <a:endParaRPr lang="en-US" sz="1700" dirty="0"/>
+          </a:p>
+        </p:txBody>
+      </p:sp>
+      <p:sp>
+        <p:nvSpPr>
+          <p:cNvPr id="6" name="Text 4"/>
+          <p:cNvSpPr/>
+          <p:nvPr/>
+        </p:nvSpPr>
+        <p:spPr>
+          <a:xfrm>
+            <a:off x="548640" y="5961888"/>
+            <a:ext cx="11091672" cy="274320"/>
+          </a:xfrm>
+          <a:prstGeom prst="rect">
+            <a:avLst/>
+          </a:prstGeom>
+          <a:noFill/>
+          <a:ln/>
+        </p:spPr>
+        <p:txBody>
+          <a:bodyPr wrap="square" lIns="0" tIns="0" rIns="0" bIns="0" rtlCol="0" anchor="ctr"/>
+          <a:lstStyle/>
+          <a:p>
+            <a:pPr rtl="1" algn="r" indent="0" marL="0">
+              <a:buNone/>
+            </a:pPr>
+            <a:r>
+              <a:rPr lang="en-US" sz="1000" i="1" dirty="0">
+                <a:solidFill>
+                  <a:srgbClr val="6B7280"/>
+                </a:solidFill>
+                <a:latin typeface="Calibri" pitchFamily="34" charset="0"/>
+                <a:ea typeface="Calibri" pitchFamily="34" charset="-122"/>
+                <a:cs typeface="Calibri" pitchFamily="34" charset="-120"/>
+              </a:rPr>
+              <a:t>מקור: DigitalApplied, MorphLLM — 2026</a:t>
+            </a:r>
+            <a:endParaRPr lang="en-US" sz="1000" dirty="0"/>
           </a:p>
         </p:txBody>
       </p:sp>
@@ -4102,7 +4523,7 @@
                 <a:ea typeface="Arial" pitchFamily="34" charset="-122"/>
                 <a:cs typeface="Arial" pitchFamily="34" charset="-120"/>
               </a:rPr>
-              <a:t>אתם כבר עובדים ליד AI</a:t>
+              <a:t>לוחות תוצאות חיים — לפתיחה בכיתה</a:t>
             </a:r>
             <a:endParaRPr lang="en-US" sz="2800" dirty="0"/>
           </a:p>
@@ -4141,7 +4562,7 @@
                 <a:ea typeface="Calibri" pitchFamily="34" charset="-122"/>
                 <a:cs typeface="Calibri" pitchFamily="34" charset="-120"/>
               </a:rPr>
-              <a:t>השאלה: זה נשמע מסובך — האם אתם באמת מתחילים מאפס?</a:t>
+              <a:t>השאלה: איך רואים את זה לא כטקסט על שקף, אלא כמשהו אמיתי ומתעדכן?</a:t>
             </a:r>
             <a:endParaRPr lang="en-US" sz="1700" dirty="0"/>
           </a:p>
@@ -4156,18 +4577,36 @@
         <p:spPr>
           <a:xfrm>
             <a:off x="548640" y="1508760"/>
-            <a:ext cx="11091672" cy="3931920"/>
-          </a:xfrm>
-          <a:prstGeom prst="rect">
-            <a:avLst/>
-          </a:prstGeom>
-          <a:noFill/>
-          <a:ln/>
-        </p:spPr>
-        <p:txBody>
-          <a:bodyPr wrap="square" lIns="0" tIns="0" rIns="0" bIns="0" rtlCol="0" anchor="ctr"/>
-          <a:lstStyle/>
-          <a:p>
+            <a:ext cx="11091672" cy="3712464"/>
+          </a:xfrm>
+          <a:prstGeom prst="rect">
+            <a:avLst/>
+          </a:prstGeom>
+          <a:noFill/>
+          <a:ln/>
+        </p:spPr>
+        <p:txBody>
+          <a:bodyPr wrap="square" lIns="0" tIns="0" rIns="0" bIns="0" rtlCol="0" anchor="ctr"/>
+          <a:lstStyle/>
+          <a:p>
+            <a:pPr rtl="1" algn="r" marL="228600" indent="-228600">
+              <a:spcAft>
+                <a:spcPts val="1000"/>
+              </a:spcAft>
+              <a:buSzPct val="100000"/>
+              <a:buChar char="•"/>
+            </a:pPr>
+            <a:r>
+              <a:rPr lang="en-US" sz="1900" dirty="0">
+                <a:solidFill>
+                  <a:srgbClr val="1B1F3B"/>
+                </a:solidFill>
+                <a:latin typeface="Calibri" pitchFamily="34" charset="0"/>
+                <a:ea typeface="Calibri" pitchFamily="34" charset="-122"/>
+                <a:cs typeface="Calibri" pitchFamily="34" charset="-120"/>
+              </a:rPr>
+              <a:t>לוח SWE-bench Verified (התוצאות המדויקות שראינו בשקף הקודם): </a:t>
+            </a:r>
             <a:pPr rtl="1" algn="r" marL="228600" indent="-228600">
               <a:spcAft>
                 <a:spcPts val="1000"/>
@@ -4184,8 +4623,11 @@
                 <a:ea typeface="Calibri" pitchFamily="34" charset="-122"/>
                 <a:cs typeface="Calibri" pitchFamily="34" charset="-120"/>
               </a:rPr>
-              <a:t>פעילות:</a:t>
-            </a:r>
+              <a:t>swebench.com/verified.html</a:t>
+            </a:r>
+            <a:endParaRPr lang="en-US" sz="1900" dirty="0"/>
+          </a:p>
+          <a:p>
             <a:pPr rtl="1" algn="r" marL="228600" indent="-228600">
               <a:spcAft>
                 <a:spcPts val="1000"/>
@@ -4202,7 +4644,25 @@
                 <a:ea typeface="Calibri" pitchFamily="34" charset="-122"/>
                 <a:cs typeface="Calibri" pitchFamily="34" charset="-120"/>
               </a:rPr>
-              <a:t> מי מכם כבר השתמש ב-ChatGPT או Claude כדי לכתוב סקריפט לניקוי דאטה, או פונקציית עזר למודל? מה עשיתם עם הקוד שקיבלתם בסוף?</a:t>
+              <a:t>לוח Terminal-Bench 2.1: </a:t>
+            </a:r>
+            <a:pPr rtl="1" algn="r" marL="228600" indent="-228600">
+              <a:spcAft>
+                <a:spcPts val="1000"/>
+              </a:spcAft>
+              <a:buSzPct val="100000"/>
+              <a:buChar char="•"/>
+            </a:pPr>
+            <a:r>
+              <a:rPr lang="en-US" sz="1900" b="1" dirty="0">
+                <a:solidFill>
+                  <a:srgbClr val="1B1F3B"/>
+                </a:solidFill>
+                <a:latin typeface="Calibri" pitchFamily="34" charset="0"/>
+                <a:ea typeface="Calibri" pitchFamily="34" charset="-122"/>
+                <a:cs typeface="Calibri" pitchFamily="34" charset="-120"/>
+              </a:rPr>
+              <a:t>tbench.ai/leaderboard/terminal-bench/2.1</a:t>
             </a:r>
             <a:endParaRPr lang="en-US" sz="1900" dirty="0"/>
           </a:p>
@@ -4223,31 +4683,10 @@
                 <a:ea typeface="Calibri" pitchFamily="34" charset="-122"/>
                 <a:cs typeface="Calibri" pitchFamily="34" charset="-120"/>
               </a:rPr>
-              <a:t>ברוב הכיתות: התשובה היא העתק-הדבק לקובץ בעצמכם</a:t>
+              <a:t>שני הלוחות מתעדכנים באופן שוטף — המספר שראיתם בשקף הקודם עשוי כבר להיות לא הכי עדכני ברגע שאתם קוראים את זה</a:t>
             </a:r>
             <a:endParaRPr lang="en-US" sz="1900" dirty="0"/>
           </a:p>
-          <a:p>
-            <a:pPr rtl="1" algn="r" marL="228600" indent="-228600">
-              <a:spcAft>
-                <a:spcPts val="1000"/>
-              </a:spcAft>
-              <a:buSzPct val="100000"/>
-              <a:buChar char="•"/>
-            </a:pPr>
-            <a:r>
-              <a:rPr lang="en-US" sz="1900" dirty="0">
-                <a:solidFill>
-                  <a:srgbClr val="1B1F3B"/>
-                </a:solidFill>
-                <a:latin typeface="Calibri" pitchFamily="34" charset="0"/>
-                <a:ea typeface="Calibri" pitchFamily="34" charset="-122"/>
-                <a:cs typeface="Calibri" pitchFamily="34" charset="-120"/>
-              </a:rPr>
-              <a:t>כלי אג'נטי עושה בדיוק את זה בשבילכם — רק כותב ישירות לקבצים, וגם קורא את שאר הפרויקט קודם כדי להבין הקשר</a:t>
-            </a:r>
-            <a:endParaRPr lang="en-US" sz="1900" dirty="0"/>
-          </a:p>
         </p:txBody>
       </p:sp>
       <p:sp>
@@ -4258,7 +4697,7 @@
         </p:nvSpPr>
         <p:spPr>
           <a:xfrm>
-            <a:off x="548640" y="5577840"/>
+            <a:off x="548640" y="5358384"/>
             <a:ext cx="11091672" cy="0"/>
           </a:xfrm>
           <a:prstGeom prst="line">
@@ -4281,8 +4720,8 @@
         </p:nvSpPr>
         <p:spPr>
           <a:xfrm>
-            <a:off x="548640" y="5669280"/>
-            <a:ext cx="11091672" cy="868680"/>
+            <a:off x="548640" y="5449824"/>
+            <a:ext cx="11091672" cy="932688"/>
           </a:xfrm>
           <a:prstGeom prst="rect">
             <a:avLst/>
@@ -4306,7 +4745,35 @@
                 <a:ea typeface="Arial" pitchFamily="34" charset="-122"/>
                 <a:cs typeface="Arial" pitchFamily="34" charset="-120"/>
               </a:rPr>
-              <a:t>✔ מה עושים בפועל: זה לא כלי חדש לגמרי — זה שדרוג למשהו שאתם כבר עושים, רק עם פחות חיכוך והרבה יותר הקשר.</a:t>
+              <a:t>✔ מה עושים בפועל: המרצה פותח את שני הלינקים בדפדפן מול הכיתה. </a:t>
+            </a:r>
+            <a:pPr rtl="1" algn="r" indent="0" marL="0">
+              <a:buNone/>
+            </a:pPr>
+            <a:r>
+              <a:rPr lang="en-US" sz="1700" b="1" dirty="0">
+                <a:solidFill>
+                  <a:srgbClr val="00A88A"/>
+                </a:solidFill>
+                <a:latin typeface="Arial" pitchFamily="34" charset="0"/>
+                <a:ea typeface="Arial" pitchFamily="34" charset="-122"/>
+                <a:cs typeface="Arial" pitchFamily="34" charset="-120"/>
+              </a:rPr>
+              <a:t>פעילות (הרימו יד):</a:t>
+            </a:r>
+            <a:pPr rtl="1" algn="r" indent="0" marL="0">
+              <a:buNone/>
+            </a:pPr>
+            <a:r>
+              <a:rPr lang="en-US" sz="1700" dirty="0">
+                <a:solidFill>
+                  <a:srgbClr val="00A88A"/>
+                </a:solidFill>
+                <a:latin typeface="Arial" pitchFamily="34" charset="0"/>
+                <a:ea typeface="Arial" pitchFamily="34" charset="-122"/>
+                <a:cs typeface="Arial" pitchFamily="34" charset="-120"/>
+              </a:rPr>
+              <a:t> לפני שפותחים — מי בטוח שהמודל שהיה מוביל בזמן הכנת השקף עדיין מוביל היום? זו ההדגמה הכי טובה לאזהרת המתודולוגיה מהשקף הקודם: המספרים משתנים ממש מתחת לרגליים.</a:t>
             </a:r>
             <a:endParaRPr lang="en-US" sz="1700" dirty="0"/>
           </a:p>
@@ -4416,7 +4883,7 @@
                 <a:ea typeface="Arial" pitchFamily="34" charset="-122"/>
                 <a:cs typeface="Arial" pitchFamily="34" charset="-120"/>
               </a:rPr>
-              <a:t>מי משתמש במה, בפועל</a:t>
+              <a:t>בנצ'מארק שני: לא רק "עובד/לא עובד"</a:t>
             </a:r>
             <a:endParaRPr lang="en-US" sz="2800" dirty="0"/>
           </a:p>
@@ -4430,8 +4897,47 @@
         </p:nvSpPr>
         <p:spPr>
           <a:xfrm>
-            <a:off x="548640" y="1234440"/>
-            <a:ext cx="11091672" cy="3931920"/>
+            <a:off x="548640" y="1024128"/>
+            <a:ext cx="11091672" cy="411480"/>
+          </a:xfrm>
+          <a:prstGeom prst="rect">
+            <a:avLst/>
+          </a:prstGeom>
+          <a:noFill/>
+          <a:ln/>
+        </p:spPr>
+        <p:txBody>
+          <a:bodyPr wrap="square" lIns="0" tIns="0" rIns="0" bIns="0" rtlCol="0" anchor="ctr"/>
+          <a:lstStyle/>
+          <a:p>
+            <a:pPr rtl="1" algn="r" indent="0" marL="0">
+              <a:buNone/>
+            </a:pPr>
+            <a:r>
+              <a:rPr lang="en-US" sz="1700" i="1" dirty="0">
+                <a:solidFill>
+                  <a:srgbClr val="6B7280"/>
+                </a:solidFill>
+                <a:latin typeface="Calibri" pitchFamily="34" charset="0"/>
+                <a:ea typeface="Calibri" pitchFamily="34" charset="-122"/>
+                <a:cs typeface="Calibri" pitchFamily="34" charset="-120"/>
+              </a:rPr>
+              <a:t>השאלה: SWE-bench בודק אם הפתרון נכון — אבל איך בודקים כמה זמן כלי יכול להתמיד במשימה בלי עזרה?</a:t>
+            </a:r>
+            <a:endParaRPr lang="en-US" sz="1700" dirty="0"/>
+          </a:p>
+        </p:txBody>
+      </p:sp>
+      <p:sp>
+        <p:nvSpPr>
+          <p:cNvPr id="4" name="Text 2"/>
+          <p:cNvSpPr/>
+          <p:nvPr/>
+        </p:nvSpPr>
+        <p:spPr>
+          <a:xfrm>
+            <a:off x="548640" y="1508760"/>
+            <a:ext cx="11091672" cy="3730752"/>
           </a:xfrm>
           <a:prstGeom prst="rect">
             <a:avLst/>
@@ -4459,7 +4965,7 @@
                 <a:ea typeface="Calibri" pitchFamily="34" charset="-122"/>
                 <a:cs typeface="Calibri" pitchFamily="34" charset="-120"/>
               </a:rPr>
-              <a:t>ChatGPT</a:t>
+              <a:t>METR</a:t>
             </a:r>
             <a:pPr rtl="1" algn="r" marL="228600" indent="-228600">
               <a:spcAft>
@@ -4477,7 +4983,43 @@
                 <a:ea typeface="Calibri" pitchFamily="34" charset="-122"/>
                 <a:cs typeface="Calibri" pitchFamily="34" charset="-120"/>
               </a:rPr>
-              <a:t> — 82% נתח שימוש כללי לעזרה בקוד (הכלי הכי נפוץ)</a:t>
+              <a:t> (ארגון מחקר שמפרסם מדדי יכולת עצמאית של סוכני AI) מודד </a:t>
+            </a:r>
+            <a:pPr rtl="1" algn="r" marL="228600" indent="-228600">
+              <a:spcAft>
+                <a:spcPts val="1000"/>
+              </a:spcAft>
+              <a:buSzPct val="100000"/>
+              <a:buChar char="•"/>
+            </a:pPr>
+            <a:r>
+              <a:rPr lang="en-US" sz="1900" b="1" dirty="0">
+                <a:solidFill>
+                  <a:srgbClr val="1B1F3B"/>
+                </a:solidFill>
+                <a:latin typeface="Calibri" pitchFamily="34" charset="0"/>
+                <a:ea typeface="Calibri" pitchFamily="34" charset="-122"/>
+                <a:cs typeface="Calibri" pitchFamily="34" charset="-120"/>
+              </a:rPr>
+              <a:t>"אופק זמן" (Time Horizon)</a:t>
+            </a:r>
+            <a:pPr rtl="1" algn="r" marL="228600" indent="-228600">
+              <a:spcAft>
+                <a:spcPts val="1000"/>
+              </a:spcAft>
+              <a:buSzPct val="100000"/>
+              <a:buChar char="•"/>
+            </a:pPr>
+            <a:r>
+              <a:rPr lang="en-US" sz="1900" dirty="0">
+                <a:solidFill>
+                  <a:srgbClr val="1B1F3B"/>
+                </a:solidFill>
+                <a:latin typeface="Calibri" pitchFamily="34" charset="0"/>
+                <a:ea typeface="Calibri" pitchFamily="34" charset="-122"/>
+                <a:cs typeface="Calibri" pitchFamily="34" charset="-120"/>
+              </a:rPr>
+              <a:t>: משך המשימה (לפי זמן שלוקח למומחה אנושי) שבו למודל יש 50% סיכוי להצליח, ללא התערבות</a:t>
             </a:r>
             <a:endParaRPr lang="en-US" sz="1900" dirty="0"/>
           </a:p>
@@ -4490,6 +5032,27 @@
               <a:buChar char="•"/>
             </a:pPr>
             <a:r>
+              <a:rPr lang="en-US" sz="1900" dirty="0">
+                <a:solidFill>
+                  <a:srgbClr val="1B1F3B"/>
+                </a:solidFill>
+                <a:latin typeface="Calibri" pitchFamily="34" charset="0"/>
+                <a:ea typeface="Calibri" pitchFamily="34" charset="-122"/>
+                <a:cs typeface="Calibri" pitchFamily="34" charset="-120"/>
+              </a:rPr>
+              <a:t>זה שונה מ-SWE-bench: שם בודקים "האם הפתרון הספציפי הזה נכון", כאן בודקים "כמה זמן הכלי יכול להתמיד לבד לפני שהוא נתקע או טועה"</a:t>
+            </a:r>
+            <a:endParaRPr lang="en-US" sz="1900" dirty="0"/>
+          </a:p>
+          <a:p>
+            <a:pPr rtl="1" algn="r" marL="228600" indent="-228600">
+              <a:spcAft>
+                <a:spcPts val="1000"/>
+              </a:spcAft>
+              <a:buSzPct val="100000"/>
+              <a:buChar char="•"/>
+            </a:pPr>
+            <a:r>
               <a:rPr lang="en-US" sz="1900" b="1" dirty="0">
                 <a:solidFill>
                   <a:srgbClr val="1B1F3B"/>
@@ -4498,7 +5061,7 @@
                 <a:ea typeface="Calibri" pitchFamily="34" charset="-122"/>
                 <a:cs typeface="Calibri" pitchFamily="34" charset="-120"/>
               </a:rPr>
-              <a:t>GitHub Copilot</a:t>
+              <a:t>הנתון:</a:t>
             </a:r>
             <a:pPr rtl="1" algn="r" marL="228600" indent="-228600">
               <a:spcAft>
@@ -4516,174 +5079,21 @@
                 <a:ea typeface="Calibri" pitchFamily="34" charset="-122"/>
                 <a:cs typeface="Calibri" pitchFamily="34" charset="-120"/>
               </a:rPr>
-              <a:t> — 68% נתח שימוש כללי</a:t>
+              <a:t> אופק הזמן הכפיל את עצמו בערך כל 4 חודשים בשנים האחרונות; במודלים המובילים באמצע 2026 האופק הגיע לכ-12 שעות (לשם השוואה: Claude 3.7 Sonnet, מ-2025, עמד על כ-50 דקות בלבד)</a:t>
             </a:r>
             <a:endParaRPr lang="en-US" sz="1900" dirty="0"/>
           </a:p>
-          <a:p>
-            <a:pPr rtl="1" algn="r" marL="228600" indent="-228600">
-              <a:spcAft>
-                <a:spcPts val="1000"/>
-              </a:spcAft>
-              <a:buSzPct val="100000"/>
-              <a:buChar char="•"/>
-            </a:pPr>
-            <a:r>
-              <a:rPr lang="en-US" sz="1900" dirty="0">
-                <a:solidFill>
-                  <a:srgbClr val="1B1F3B"/>
-                </a:solidFill>
-                <a:latin typeface="Calibri" pitchFamily="34" charset="0"/>
-                <a:ea typeface="Calibri" pitchFamily="34" charset="-122"/>
-                <a:cs typeface="Calibri" pitchFamily="34" charset="-120"/>
-              </a:rPr>
-              <a:t>מבין ה-IDE-ים הממוקדי-AI: </a:t>
-            </a:r>
-            <a:pPr rtl="1" algn="r" marL="228600" indent="-228600">
-              <a:spcAft>
-                <a:spcPts val="1000"/>
-              </a:spcAft>
-              <a:buSzPct val="100000"/>
-              <a:buChar char="•"/>
-            </a:pPr>
-            <a:r>
-              <a:rPr lang="en-US" sz="1900" b="1" dirty="0">
-                <a:solidFill>
-                  <a:srgbClr val="1B1F3B"/>
-                </a:solidFill>
-                <a:latin typeface="Calibri" pitchFamily="34" charset="0"/>
-                <a:ea typeface="Calibri" pitchFamily="34" charset="-122"/>
-                <a:cs typeface="Calibri" pitchFamily="34" charset="-120"/>
-              </a:rPr>
-              <a:t>Cursor</a:t>
-            </a:r>
-            <a:pPr rtl="1" algn="r" marL="228600" indent="-228600">
-              <a:spcAft>
-                <a:spcPts val="1000"/>
-              </a:spcAft>
-              <a:buSzPct val="100000"/>
-              <a:buChar char="•"/>
-            </a:pPr>
-            <a:r>
-              <a:rPr lang="en-US" sz="1900" dirty="0">
-                <a:solidFill>
-                  <a:srgbClr val="1B1F3B"/>
-                </a:solidFill>
-                <a:latin typeface="Calibri" pitchFamily="34" charset="0"/>
-                <a:ea typeface="Calibri" pitchFamily="34" charset="-122"/>
-                <a:cs typeface="Calibri" pitchFamily="34" charset="-120"/>
-              </a:rPr>
-              <a:t> (עורך קוד עם AI מובנה) — 18% נתח שימוש כללי, אך 24% כ"כלי ראשי" בקרב מי שכבר עובד אג'נטית</a:t>
-            </a:r>
-            <a:endParaRPr lang="en-US" sz="1900" dirty="0"/>
-          </a:p>
-          <a:p>
-            <a:pPr rtl="1" algn="r" marL="228600" indent="-228600">
-              <a:spcAft>
-                <a:spcPts val="1000"/>
-              </a:spcAft>
-              <a:buSzPct val="100000"/>
-              <a:buChar char="•"/>
-            </a:pPr>
-            <a:r>
-              <a:rPr lang="en-US" sz="1900" b="1" dirty="0">
-                <a:solidFill>
-                  <a:srgbClr val="1B1F3B"/>
-                </a:solidFill>
-                <a:latin typeface="Calibri" pitchFamily="34" charset="0"/>
-                <a:ea typeface="Calibri" pitchFamily="34" charset="-122"/>
-                <a:cs typeface="Calibri" pitchFamily="34" charset="-120"/>
-              </a:rPr>
-              <a:t>Claude Code</a:t>
-            </a:r>
-            <a:pPr rtl="1" algn="r" marL="228600" indent="-228600">
-              <a:spcAft>
-                <a:spcPts val="1000"/>
-              </a:spcAft>
-              <a:buSzPct val="100000"/>
-              <a:buChar char="•"/>
-            </a:pPr>
-            <a:r>
-              <a:rPr lang="en-US" sz="1900" dirty="0">
-                <a:solidFill>
-                  <a:srgbClr val="1B1F3B"/>
-                </a:solidFill>
-                <a:latin typeface="Calibri" pitchFamily="34" charset="0"/>
-                <a:ea typeface="Calibri" pitchFamily="34" charset="-122"/>
-                <a:cs typeface="Calibri" pitchFamily="34" charset="-120"/>
-              </a:rPr>
-              <a:t> — 10% נתח שימוש כללי, אך </a:t>
-            </a:r>
-            <a:pPr rtl="1" algn="r" marL="228600" indent="-228600">
-              <a:spcAft>
-                <a:spcPts val="1000"/>
-              </a:spcAft>
-              <a:buSzPct val="100000"/>
-              <a:buChar char="•"/>
-            </a:pPr>
-            <a:r>
-              <a:rPr lang="en-US" sz="1900" b="1" dirty="0">
-                <a:solidFill>
-                  <a:srgbClr val="1B1F3B"/>
-                </a:solidFill>
-                <a:latin typeface="Calibri" pitchFamily="34" charset="0"/>
-                <a:ea typeface="Calibri" pitchFamily="34" charset="-122"/>
-                <a:cs typeface="Calibri" pitchFamily="34" charset="-120"/>
-              </a:rPr>
-              <a:t>28%</a:t>
-            </a:r>
-            <a:pPr rtl="1" algn="r" marL="228600" indent="-228600">
-              <a:spcAft>
-                <a:spcPts val="1000"/>
-              </a:spcAft>
-              <a:buSzPct val="100000"/>
-              <a:buChar char="•"/>
-            </a:pPr>
-            <a:r>
-              <a:rPr lang="en-US" sz="1900" dirty="0">
-                <a:solidFill>
-                  <a:srgbClr val="1B1F3B"/>
-                </a:solidFill>
-                <a:latin typeface="Calibri" pitchFamily="34" charset="0"/>
-                <a:ea typeface="Calibri" pitchFamily="34" charset="-122"/>
-                <a:cs typeface="Calibri" pitchFamily="34" charset="-120"/>
-              </a:rPr>
-              <a:t> כ"כלי ראשי" בקרב מי שכבר עובד אג'נטית — כלומר מי שבחר להתמקצע בעבודה אג'נטית מלאה נוטה לבחור בו דווקא</a:t>
-            </a:r>
-            <a:endParaRPr lang="en-US" sz="1900" dirty="0"/>
-          </a:p>
-          <a:p>
-            <a:pPr rtl="1" algn="r" marL="228600" indent="-228600">
-              <a:spcAft>
-                <a:spcPts val="1000"/>
-              </a:spcAft>
-              <a:buSzPct val="100000"/>
-              <a:buChar char="•"/>
-            </a:pPr>
-            <a:r>
-              <a:rPr lang="en-US" sz="1900" dirty="0">
-                <a:solidFill>
-                  <a:srgbClr val="1B1F3B"/>
-                </a:solidFill>
-                <a:latin typeface="Calibri" pitchFamily="34" charset="0"/>
-                <a:ea typeface="Calibri" pitchFamily="34" charset="-122"/>
-                <a:cs typeface="Calibri" pitchFamily="34" charset="-120"/>
-              </a:rPr>
-              <a:t>(ChatGPT ו-Copilot לא נמדדו בקטגוריית "כלי ראשי אג'נטי" כי הם משמשים בעיקר כעזר כללי, לא כסביבת עבודה אג'נטית מלאה)</a:t>
-            </a:r>
-            <a:endParaRPr lang="en-US" sz="1900" dirty="0"/>
-          </a:p>
-        </p:txBody>
-      </p:sp>
-      <p:sp>
-        <p:nvSpPr>
-          <p:cNvPr id="4" name="Shape 2"/>
-          <p:cNvSpPr/>
-          <p:nvPr/>
-        </p:nvSpPr>
-        <p:spPr>
-          <a:xfrm>
-            <a:off x="548640" y="5303520"/>
+        </p:txBody>
+      </p:sp>
+      <p:sp>
+        <p:nvSpPr>
+          <p:cNvPr id="5" name="Shape 3"/>
+          <p:cNvSpPr/>
+          <p:nvPr/>
+        </p:nvSpPr>
+        <p:spPr>
+          <a:xfrm>
+            <a:off x="548640" y="5376672"/>
             <a:ext cx="11091672" cy="0"/>
           </a:xfrm>
           <a:prstGeom prst="line">
@@ -4700,14 +5110,14 @@
       </p:sp>
       <p:sp>
         <p:nvSpPr>
-          <p:cNvPr id="5" name="Text 3"/>
-          <p:cNvSpPr/>
-          <p:nvPr/>
-        </p:nvSpPr>
-        <p:spPr>
-          <a:xfrm>
-            <a:off x="548640" y="5394960"/>
-            <a:ext cx="11091672" cy="868680"/>
+          <p:cNvPr id="6" name="Text 4"/>
+          <p:cNvSpPr/>
+          <p:nvPr/>
+        </p:nvSpPr>
+        <p:spPr>
+          <a:xfrm>
+            <a:off x="548640" y="5468112"/>
+            <a:ext cx="11091672" cy="621792"/>
           </a:xfrm>
           <a:prstGeom prst="rect">
             <a:avLst/>
@@ -4731,7 +5141,7 @@
                 <a:ea typeface="Arial" pitchFamily="34" charset="-122"/>
                 <a:cs typeface="Arial" pitchFamily="34" charset="-120"/>
               </a:rPr>
-              <a:t>✔ מה עושים בפועל: אין "כלי אחד נכון" — הקורס מלמד עם Claude Code כי הוא מייצג היטב את העבודה האג'נטית המלאה, אבל ה-Workflow שתלמדו עובד בכל אחד מהכלים האלה.</a:t>
+              <a:t>✔ מה עושים בפועל: שני סוגי הבנצ'מארק משלימים זה את זה — אחד אומר "האם זה נכון", השני אומר "כמה הוא יכול להתמיד לבד". כשמעריכים כלי AI (בקורס הזה או בעתיד המקצועי שלכם), שווה לשאול את שתי השאלות, לא רק אחת.</a:t>
             </a:r>
             <a:endParaRPr lang="en-US" sz="1700" dirty="0"/>
           </a:p>
@@ -4739,13 +5149,13 @@
       </p:sp>
       <p:sp>
         <p:nvSpPr>
-          <p:cNvPr id="6" name="Text 4"/>
-          <p:cNvSpPr/>
-          <p:nvPr/>
-        </p:nvSpPr>
-        <p:spPr>
-          <a:xfrm>
-            <a:off x="548640" y="6172200"/>
+          <p:cNvPr id="7" name="Text 5"/>
+          <p:cNvSpPr/>
+          <p:nvPr/>
+        </p:nvSpPr>
+        <p:spPr>
+          <a:xfrm>
+            <a:off x="548640" y="6199632"/>
             <a:ext cx="11091672" cy="274320"/>
           </a:xfrm>
           <a:prstGeom prst="rect">
@@ -4770,7 +5180,7 @@
                 <a:ea typeface="Calibri" pitchFamily="34" charset="-122"/>
                 <a:cs typeface="Calibri" pitchFamily="34" charset="-120"/>
               </a:rPr>
-              <a:t>מקור: Stack Overflow Developer Survey (סקר שנתי בקרב מפתחים, מבית אתר Stack Overflow) 2025 · index.dev 2026</a:t>
+              <a:t>מקור: metr.org/time-horizons</a:t>
             </a:r>
             <a:endParaRPr lang="en-US" sz="1000" dirty="0"/>
           </a:p>
@@ -4778,7 +5188,7 @@
       </p:sp>
       <p:sp>
         <p:nvSpPr>
-          <p:cNvPr id="7" name="Text 5"/>
+          <p:cNvPr id="8" name="Text 6"/>
           <p:cNvSpPr/>
           <p:nvPr/>
         </p:nvSpPr>
@@ -4880,7 +5290,7 @@
                 <a:ea typeface="Arial" pitchFamily="34" charset="-122"/>
                 <a:cs typeface="Arial" pitchFamily="34" charset="-120"/>
               </a:rPr>
-              <a:t>כלים חינמיים להתחלה</a:t>
+              <a:t>Claude Code — איך זה עובד בפועל</a:t>
             </a:r>
             <a:endParaRPr lang="en-US" sz="2800" dirty="0"/>
           </a:p>
@@ -4894,7 +5304,46 @@
         </p:nvSpPr>
         <p:spPr>
           <a:xfrm>
-            <a:off x="548640" y="1234440"/>
+            <a:off x="548640" y="1024128"/>
+            <a:ext cx="11091672" cy="411480"/>
+          </a:xfrm>
+          <a:prstGeom prst="rect">
+            <a:avLst/>
+          </a:prstGeom>
+          <a:noFill/>
+          <a:ln/>
+        </p:spPr>
+        <p:txBody>
+          <a:bodyPr wrap="square" lIns="0" tIns="0" rIns="0" bIns="0" rtlCol="0" anchor="ctr"/>
+          <a:lstStyle/>
+          <a:p>
+            <a:pPr rtl="1" algn="r" indent="0" marL="0">
+              <a:buNone/>
+            </a:pPr>
+            <a:r>
+              <a:rPr lang="en-US" sz="1700" i="1" dirty="0">
+                <a:solidFill>
+                  <a:srgbClr val="6B7280"/>
+                </a:solidFill>
+                <a:latin typeface="Calibri" pitchFamily="34" charset="0"/>
+                <a:ea typeface="Calibri" pitchFamily="34" charset="-122"/>
+                <a:cs typeface="Calibri" pitchFamily="34" charset="-120"/>
+              </a:rPr>
+              <a:t>השאלה: אז איך בפועל נראית עבודה מול כלי אג'נטי, צעד-צעד?</a:t>
+            </a:r>
+            <a:endParaRPr lang="en-US" sz="1700" dirty="0"/>
+          </a:p>
+        </p:txBody>
+      </p:sp>
+      <p:sp>
+        <p:nvSpPr>
+          <p:cNvPr id="4" name="Text 2"/>
+          <p:cNvSpPr/>
+          <p:nvPr/>
+        </p:nvSpPr>
+        <p:spPr>
+          <a:xfrm>
+            <a:off x="548640" y="1508760"/>
             <a:ext cx="11091672" cy="3931920"/>
           </a:xfrm>
           <a:prstGeom prst="rect">
@@ -4923,7 +5372,7 @@
                 <a:ea typeface="Calibri" pitchFamily="34" charset="-122"/>
                 <a:cs typeface="Calibri" pitchFamily="34" charset="-120"/>
               </a:rPr>
-              <a:t>GitHub Copilot Free</a:t>
+              <a:t>1. פתיחת Session</a:t>
             </a:r>
             <a:pPr rtl="1" algn="r" marL="228600" indent="-228600">
               <a:spcAft>
@@ -4941,7 +5390,7 @@
                 <a:ea typeface="Calibri" pitchFamily="34" charset="-122"/>
                 <a:cs typeface="Calibri" pitchFamily="34" charset="-120"/>
               </a:rPr>
-              <a:t> — מסלול חינמי רחב, ללא צורך באימות סטודנט, זמין ישירות ב-VS Code — נקודת הכניסה הפשוטה ביותר</a:t>
+              <a:t> (חיבור פעיל אחד מול כלי ה-AI, מתחילתו ועד סופו) — מהטרמינל, או כתוסף בתוך VS Code</a:t>
             </a:r>
             <a:endParaRPr lang="en-US" sz="1900" dirty="0"/>
           </a:p>
@@ -4962,7 +5411,7 @@
                 <a:ea typeface="Calibri" pitchFamily="34" charset="-122"/>
                 <a:cs typeface="Calibri" pitchFamily="34" charset="-120"/>
               </a:rPr>
-              <a:t>GitHub Student Developer Pack</a:t>
+              <a:t>2. הנחיה ברורה וספציפית</a:t>
             </a:r>
             <a:pPr rtl="1" algn="r" marL="228600" indent="-228600">
               <a:spcAft>
@@ -4980,8 +5429,11 @@
                 <a:ea typeface="Calibri" pitchFamily="34" charset="-122"/>
                 <a:cs typeface="Calibri" pitchFamily="34" charset="-120"/>
               </a:rPr>
-              <a:t> — חבילת הטבות לסטודנטים מאומתים; הרשמה חדשה להטבת </a:t>
-            </a:r>
+              <a:t> — אומרים בדיוק מה רוצים</a:t>
+            </a:r>
+            <a:endParaRPr lang="en-US" sz="1900" dirty="0"/>
+          </a:p>
+          <a:p>
             <a:pPr rtl="1" algn="r" marL="228600" indent="-228600">
               <a:spcAft>
                 <a:spcPts val="1000"/>
@@ -4998,7 +5450,7 @@
                 <a:ea typeface="Calibri" pitchFamily="34" charset="-122"/>
                 <a:cs typeface="Calibri" pitchFamily="34" charset="-120"/>
               </a:rPr>
-              <a:t>Copilot Student</a:t>
+              <a:t>3. הכלי מציג תוכנית או מתחיל לפעול</a:t>
             </a:r>
             <a:pPr rtl="1" algn="r" marL="228600" indent="-228600">
               <a:spcAft>
@@ -5016,7 +5468,7 @@
                 <a:ea typeface="Calibri" pitchFamily="34" charset="-122"/>
                 <a:cs typeface="Calibri" pitchFamily="34" charset="-120"/>
               </a:rPr>
-              <a:t> (מסלול מורחב יותר מ-Copilot Free הרגיל) מושהית מאפריל 2026 בשל עומס על תשתית agentic — מי שכבר אומת קודם ממשיך לקבל אותה, וחברי Pack חדשים מקבלים כרגע את Copilot Free הרגיל</a:t>
+              <a:t> — קורא קבצים, כותב קוד</a:t>
             </a:r>
             <a:endParaRPr lang="en-US" sz="1900" dirty="0"/>
           </a:p>
@@ -5037,7 +5489,7 @@
                 <a:ea typeface="Calibri" pitchFamily="34" charset="-122"/>
                 <a:cs typeface="Calibri" pitchFamily="34" charset="-120"/>
               </a:rPr>
-              <a:t>Cursor</a:t>
+              <a:t>4. בודקים כל Diff</a:t>
             </a:r>
             <a:pPr rtl="1" algn="r" marL="228600" indent="-228600">
               <a:spcAft>
@@ -5055,21 +5507,78 @@
                 <a:ea typeface="Calibri" pitchFamily="34" charset="-122"/>
                 <a:cs typeface="Calibri" pitchFamily="34" charset="-120"/>
               </a:rPr>
-              <a:t> — IDE מלא מבוסס AI, עם מסלול חינמי מוגבל (מכסת השלמות בסיסית)</a:t>
+              <a:t> (תצוגה שמראה בדיוק אילו שורות קוד השתנו, נוספו, או נמחקו) </a:t>
+            </a:r>
+            <a:pPr rtl="1" algn="r" marL="228600" indent="-228600">
+              <a:spcAft>
+                <a:spcPts val="1000"/>
+              </a:spcAft>
+              <a:buSzPct val="100000"/>
+              <a:buChar char="•"/>
+            </a:pPr>
+            <a:r>
+              <a:rPr lang="en-US" sz="1900" b="1" dirty="0">
+                <a:solidFill>
+                  <a:srgbClr val="1B1F3B"/>
+                </a:solidFill>
+                <a:latin typeface="Calibri" pitchFamily="34" charset="0"/>
+                <a:ea typeface="Calibri" pitchFamily="34" charset="-122"/>
+                <a:cs typeface="Calibri" pitchFamily="34" charset="-120"/>
+              </a:rPr>
+              <a:t>לפני שמאשרים</a:t>
             </a:r>
             <a:endParaRPr lang="en-US" sz="1900" dirty="0"/>
           </a:p>
-        </p:txBody>
-      </p:sp>
-      <p:sp>
-        <p:nvSpPr>
-          <p:cNvPr id="4" name="Shape 2"/>
-          <p:cNvSpPr/>
-          <p:nvPr/>
-        </p:nvSpPr>
-        <p:spPr>
-          <a:xfrm>
-            <a:off x="548640" y="5303520"/>
+          <a:p>
+            <a:pPr rtl="1" algn="r" marL="228600" indent="-228600">
+              <a:spcAft>
+                <a:spcPts val="1000"/>
+              </a:spcAft>
+              <a:buSzPct val="100000"/>
+              <a:buChar char="•"/>
+            </a:pPr>
+            <a:r>
+              <a:rPr lang="en-US" sz="1900" b="1" dirty="0">
+                <a:solidFill>
+                  <a:srgbClr val="1B1F3B"/>
+                </a:solidFill>
+                <a:latin typeface="Calibri" pitchFamily="34" charset="0"/>
+                <a:ea typeface="Calibri" pitchFamily="34" charset="-122"/>
+                <a:cs typeface="Calibri" pitchFamily="34" charset="-120"/>
+              </a:rPr>
+              <a:t>5. ממשיכים לצעד הבא</a:t>
+            </a:r>
+            <a:pPr rtl="1" algn="r" marL="228600" indent="-228600">
+              <a:spcAft>
+                <a:spcPts val="1000"/>
+              </a:spcAft>
+              <a:buSzPct val="100000"/>
+              <a:buChar char="•"/>
+            </a:pPr>
+            <a:r>
+              <a:rPr lang="en-US" sz="1900" dirty="0">
+                <a:solidFill>
+                  <a:srgbClr val="1B1F3B"/>
+                </a:solidFill>
+                <a:latin typeface="Calibri" pitchFamily="34" charset="0"/>
+                <a:ea typeface="Calibri" pitchFamily="34" charset="-122"/>
+                <a:cs typeface="Calibri" pitchFamily="34" charset="-120"/>
+              </a:rPr>
+              <a:t>, או חוזרים לשלב 2 אם צריך תיקון</a:t>
+            </a:r>
+            <a:endParaRPr lang="en-US" sz="1900" dirty="0"/>
+          </a:p>
+        </p:txBody>
+      </p:sp>
+      <p:sp>
+        <p:nvSpPr>
+          <p:cNvPr id="5" name="Shape 3"/>
+          <p:cNvSpPr/>
+          <p:nvPr/>
+        </p:nvSpPr>
+        <p:spPr>
+          <a:xfrm>
+            <a:off x="548640" y="5577840"/>
             <a:ext cx="11091672" cy="0"/>
           </a:xfrm>
           <a:prstGeom prst="line">
@@ -5086,14 +5595,14 @@
       </p:sp>
       <p:sp>
         <p:nvSpPr>
-          <p:cNvPr id="5" name="Text 3"/>
-          <p:cNvSpPr/>
-          <p:nvPr/>
-        </p:nvSpPr>
-        <p:spPr>
-          <a:xfrm>
-            <a:off x="548640" y="5394960"/>
-            <a:ext cx="11091672" cy="868680"/>
+          <p:cNvPr id="6" name="Text 4"/>
+          <p:cNvSpPr/>
+          <p:nvPr/>
+        </p:nvSpPr>
+        <p:spPr>
+          <a:xfrm>
+            <a:off x="548640" y="5669280"/>
+            <a:ext cx="11091672" cy="621792"/>
           </a:xfrm>
           <a:prstGeom prst="rect">
             <a:avLst/>
@@ -5117,7 +5626,7 @@
                 <a:ea typeface="Arial" pitchFamily="34" charset="-122"/>
                 <a:cs typeface="Arial" pitchFamily="34" charset="-120"/>
               </a:rPr>
-              <a:t>✔ מה עושים בפועל: שוק הכלים והמסלולים החינמיים משתנה מהר מאוד — בשיעור 1 ראינו איך Gemini CLI החינמי נסגר תוך פחות משנה. תמיד בודקים סטטוס עדכני קרוב למועד השימוש בפועל.</a:t>
+              <a:t>✔ מה עושים בפועל: זה בדיוק החיבור לשלבים 4-6 מה-Workflow שלמדנו בשיעור 1 (תכנון עם AI → מימוש עם AI → Code Review) — היום אתם עושים את זה בפועל, לא רק רואים הדגמה.</a:t>
             </a:r>
             <a:endParaRPr lang="en-US" sz="1700" dirty="0"/>
           </a:p>
@@ -5125,7 +5634,7 @@
       </p:sp>
       <p:sp>
         <p:nvSpPr>
-          <p:cNvPr id="6" name="Text 4"/>
+          <p:cNvPr id="7" name="Text 5"/>
           <p:cNvSpPr/>
           <p:nvPr/>
         </p:nvSpPr>
@@ -5227,7 +5736,7 @@
                 <a:ea typeface="Arial" pitchFamily="34" charset="-122"/>
                 <a:cs typeface="Arial" pitchFamily="34" charset="-120"/>
               </a:rPr>
-              <a:t>Best Practices לעבודה עם כלי Agentic (חלק א׳)</a:t>
+              <a:t>אתם כבר עובדים ליד AI</a:t>
             </a:r>
             <a:endParaRPr lang="en-US" sz="2800" dirty="0"/>
           </a:p>
@@ -5241,7 +5750,46 @@
         </p:nvSpPr>
         <p:spPr>
           <a:xfrm>
-            <a:off x="548640" y="1234440"/>
+            <a:off x="548640" y="1024128"/>
+            <a:ext cx="11091672" cy="411480"/>
+          </a:xfrm>
+          <a:prstGeom prst="rect">
+            <a:avLst/>
+          </a:prstGeom>
+          <a:noFill/>
+          <a:ln/>
+        </p:spPr>
+        <p:txBody>
+          <a:bodyPr wrap="square" lIns="0" tIns="0" rIns="0" bIns="0" rtlCol="0" anchor="ctr"/>
+          <a:lstStyle/>
+          <a:p>
+            <a:pPr rtl="1" algn="r" indent="0" marL="0">
+              <a:buNone/>
+            </a:pPr>
+            <a:r>
+              <a:rPr lang="en-US" sz="1700" i="1" dirty="0">
+                <a:solidFill>
+                  <a:srgbClr val="6B7280"/>
+                </a:solidFill>
+                <a:latin typeface="Calibri" pitchFamily="34" charset="0"/>
+                <a:ea typeface="Calibri" pitchFamily="34" charset="-122"/>
+                <a:cs typeface="Calibri" pitchFamily="34" charset="-120"/>
+              </a:rPr>
+              <a:t>השאלה: זה נשמע מסובך — האם אתם באמת מתחילים מאפס?</a:t>
+            </a:r>
+            <a:endParaRPr lang="en-US" sz="1700" dirty="0"/>
+          </a:p>
+        </p:txBody>
+      </p:sp>
+      <p:sp>
+        <p:nvSpPr>
+          <p:cNvPr id="4" name="Text 2"/>
+          <p:cNvSpPr/>
+          <p:nvPr/>
+        </p:nvSpPr>
+        <p:spPr>
+          <a:xfrm>
+            <a:off x="548640" y="1508760"/>
             <a:ext cx="11091672" cy="3931920"/>
           </a:xfrm>
           <a:prstGeom prst="rect">
@@ -5270,7 +5818,7 @@
                 <a:ea typeface="Calibri" pitchFamily="34" charset="-122"/>
                 <a:cs typeface="Calibri" pitchFamily="34" charset="-120"/>
               </a:rPr>
-              <a:t>1. הנחיות ברורות וספציפיות</a:t>
+              <a:t>פעילות:</a:t>
             </a:r>
             <a:pPr rtl="1" algn="r" marL="228600" indent="-228600">
               <a:spcAft>
@@ -5288,26 +5836,11 @@
                 <a:ea typeface="Calibri" pitchFamily="34" charset="-122"/>
                 <a:cs typeface="Calibri" pitchFamily="34" charset="-120"/>
               </a:rPr>
-              <a:t> — "תוסיף התחברות" עמום מדי; "תוסיף התחברות עם Google </a:t>
-            </a:r>
-            <a:pPr rtl="1" algn="r" marL="228600" indent="-228600">
-              <a:spcAft>
-                <a:spcPts val="1000"/>
-              </a:spcAft>
-              <a:buSzPct val="100000"/>
-              <a:buChar char="•"/>
-            </a:pPr>
-            <a:r>
-              <a:rPr lang="en-US" sz="1900" b="1" dirty="0">
-                <a:solidFill>
-                  <a:srgbClr val="1B1F3B"/>
-                </a:solidFill>
-                <a:latin typeface="Calibri" pitchFamily="34" charset="0"/>
-                <a:ea typeface="Calibri" pitchFamily="34" charset="-122"/>
-                <a:cs typeface="Calibri" pitchFamily="34" charset="-120"/>
-              </a:rPr>
-              <a:t>OAuth</a:t>
-            </a:r>
+              <a:t> מי מכם כבר השתמש ב-ChatGPT או Claude כדי לכתוב סקריפט לניקוי דאטה, או פונקציית עזר למודל? מה עשיתם עם הקוד שקיבלתם בסוף?</a:t>
+            </a:r>
+            <a:endParaRPr lang="en-US" sz="1900" dirty="0"/>
+          </a:p>
+          <a:p>
             <a:pPr rtl="1" algn="r" marL="228600" indent="-228600">
               <a:spcAft>
                 <a:spcPts val="1000"/>
@@ -5324,7 +5857,7 @@
                 <a:ea typeface="Calibri" pitchFamily="34" charset="-122"/>
                 <a:cs typeface="Calibri" pitchFamily="34" charset="-120"/>
               </a:rPr>
-              <a:t> (פרוטוקול התחברות מאובטח דרך חשבון קיים), עם Redirect (הפניה אוטומטית) לדף הבית אחרי הצלחה" ברור וממוקד</a:t>
+              <a:t>ברוב הכיתות: התשובה היא העתק-הדבק לקובץ בעצמכם</a:t>
             </a:r>
             <a:endParaRPr lang="en-US" sz="1900" dirty="0"/>
           </a:p>
@@ -5337,24 +5870,6 @@
               <a:buChar char="•"/>
             </a:pPr>
             <a:r>
-              <a:rPr lang="en-US" sz="1900" b="1" dirty="0">
-                <a:solidFill>
-                  <a:srgbClr val="1B1F3B"/>
-                </a:solidFill>
-                <a:latin typeface="Calibri" pitchFamily="34" charset="0"/>
-                <a:ea typeface="Calibri" pitchFamily="34" charset="-122"/>
-                <a:cs typeface="Calibri" pitchFamily="34" charset="-120"/>
-              </a:rPr>
-              <a:t>2. צעדים קטנים</a:t>
-            </a:r>
-            <a:pPr rtl="1" algn="r" marL="228600" indent="-228600">
-              <a:spcAft>
-                <a:spcPts val="1000"/>
-              </a:spcAft>
-              <a:buSzPct val="100000"/>
-              <a:buChar char="•"/>
-            </a:pPr>
-            <a:r>
               <a:rPr lang="en-US" sz="1900" dirty="0">
                 <a:solidFill>
                   <a:srgbClr val="1B1F3B"/>
@@ -5363,60 +5878,21 @@
                 <a:ea typeface="Calibri" pitchFamily="34" charset="-122"/>
                 <a:cs typeface="Calibri" pitchFamily="34" charset="-120"/>
               </a:rPr>
-              <a:t> — משימה גדולה מתפרקת לצעדים; קל יותר לבדוק תוצאה של צעד קטן מאשר של שינוי ענק</a:t>
+              <a:t>כלי אג'נטי עושה בדיוק את זה בשבילכם — רק כותב ישירות לקבצים, וגם קורא את שאר הפרויקט קודם כדי להבין הקשר</a:t>
             </a:r>
             <a:endParaRPr lang="en-US" sz="1900" dirty="0"/>
           </a:p>
-          <a:p>
-            <a:pPr rtl="1" algn="r" marL="228600" indent="-228600">
-              <a:spcAft>
-                <a:spcPts val="1000"/>
-              </a:spcAft>
-              <a:buSzPct val="100000"/>
-              <a:buChar char="•"/>
-            </a:pPr>
-            <a:r>
-              <a:rPr lang="en-US" sz="1900" b="1" dirty="0">
-                <a:solidFill>
-                  <a:srgbClr val="1B1F3B"/>
-                </a:solidFill>
-                <a:latin typeface="Calibri" pitchFamily="34" charset="0"/>
-                <a:ea typeface="Calibri" pitchFamily="34" charset="-122"/>
-                <a:cs typeface="Calibri" pitchFamily="34" charset="-120"/>
-              </a:rPr>
-              <a:t>3. בדיקת כל Diff</a:t>
-            </a:r>
-            <a:pPr rtl="1" algn="r" marL="228600" indent="-228600">
-              <a:spcAft>
-                <a:spcPts val="1000"/>
-              </a:spcAft>
-              <a:buSzPct val="100000"/>
-              <a:buChar char="•"/>
-            </a:pPr>
-            <a:r>
-              <a:rPr lang="en-US" sz="1900" dirty="0">
-                <a:solidFill>
-                  <a:srgbClr val="1B1F3B"/>
-                </a:solidFill>
-                <a:latin typeface="Calibri" pitchFamily="34" charset="0"/>
-                <a:ea typeface="Calibri" pitchFamily="34" charset="-122"/>
-                <a:cs typeface="Calibri" pitchFamily="34" charset="-120"/>
-              </a:rPr>
-              <a:t> — לפני אישור שינוי, קוראים אותו. תמיד, בלי יוצא מן הכלל</a:t>
-            </a:r>
-            <a:endParaRPr lang="en-US" sz="1900" dirty="0"/>
-          </a:p>
-        </p:txBody>
-      </p:sp>
-      <p:sp>
-        <p:nvSpPr>
-          <p:cNvPr id="4" name="Shape 2"/>
-          <p:cNvSpPr/>
-          <p:nvPr/>
-        </p:nvSpPr>
-        <p:spPr>
-          <a:xfrm>
-            <a:off x="548640" y="5303520"/>
+        </p:txBody>
+      </p:sp>
+      <p:sp>
+        <p:nvSpPr>
+          <p:cNvPr id="5" name="Shape 3"/>
+          <p:cNvSpPr/>
+          <p:nvPr/>
+        </p:nvSpPr>
+        <p:spPr>
+          <a:xfrm>
+            <a:off x="548640" y="5577840"/>
             <a:ext cx="11091672" cy="0"/>
           </a:xfrm>
           <a:prstGeom prst="line">
@@ -5433,14 +5909,14 @@
       </p:sp>
       <p:sp>
         <p:nvSpPr>
-          <p:cNvPr id="5" name="Text 3"/>
-          <p:cNvSpPr/>
-          <p:nvPr/>
-        </p:nvSpPr>
-        <p:spPr>
-          <a:xfrm>
-            <a:off x="548640" y="5394960"/>
-            <a:ext cx="11091672" cy="868680"/>
+          <p:cNvPr id="6" name="Text 4"/>
+          <p:cNvSpPr/>
+          <p:nvPr/>
+        </p:nvSpPr>
+        <p:spPr>
+          <a:xfrm>
+            <a:off x="548640" y="5669280"/>
+            <a:ext cx="11091672" cy="457200"/>
           </a:xfrm>
           <a:prstGeom prst="rect">
             <a:avLst/>
@@ -5464,7 +5940,7 @@
                 <a:ea typeface="Arial" pitchFamily="34" charset="-122"/>
                 <a:cs typeface="Arial" pitchFamily="34" charset="-120"/>
               </a:rPr>
-              <a:t>✔ מה עושים בפועל: שלושת הכללים האלה (וגם השלושה בשקף הבא) הם מה שמבדיל שימוש מקצועי מ"ניסוי מקרי".</a:t>
+              <a:t>✔ מה עושים בפועל: זה לא כלי חדש לגמרי — זה שדרוג למשהו שאתם כבר עושים, רק עם פחות חיכוך והרבה יותר הקשר.</a:t>
             </a:r>
             <a:endParaRPr lang="en-US" sz="1700" dirty="0"/>
           </a:p>
@@ -5472,7 +5948,7 @@
       </p:sp>
       <p:sp>
         <p:nvSpPr>
-          <p:cNvPr id="6" name="Text 4"/>
+          <p:cNvPr id="7" name="Text 5"/>
           <p:cNvSpPr/>
           <p:nvPr/>
         </p:nvSpPr>
@@ -5574,7 +6050,7 @@
                 <a:ea typeface="Arial" pitchFamily="34" charset="-122"/>
                 <a:cs typeface="Arial" pitchFamily="34" charset="-120"/>
               </a:rPr>
-              <a:t>Best Practices לעבודה עם כלי Agentic (חלק ב׳)</a:t>
+              <a:t>מי משתמש במה, בפועל</a:t>
             </a:r>
             <a:endParaRPr lang="en-US" sz="2800" dirty="0"/>
           </a:p>
@@ -5617,7 +6093,7 @@
                 <a:ea typeface="Calibri" pitchFamily="34" charset="-122"/>
                 <a:cs typeface="Calibri" pitchFamily="34" charset="-120"/>
               </a:rPr>
-              <a:t>4. Git כרשת ביטחון</a:t>
+              <a:t>ChatGPT</a:t>
             </a:r>
             <a:pPr rtl="1" algn="r" marL="228600" indent="-228600">
               <a:spcAft>
@@ -5635,7 +6111,7 @@
                 <a:ea typeface="Calibri" pitchFamily="34" charset="-122"/>
                 <a:cs typeface="Calibri" pitchFamily="34" charset="-120"/>
               </a:rPr>
-              <a:t> — Commit לפני כל ניסוי משמעותי</a:t>
+              <a:t> — 82% נתח שימוש כללי לעזרה בקוד (הכלי הכי נפוץ)</a:t>
             </a:r>
             <a:endParaRPr lang="en-US" sz="1900" dirty="0"/>
           </a:p>
@@ -5656,7 +6132,7 @@
                 <a:ea typeface="Calibri" pitchFamily="34" charset="-122"/>
                 <a:cs typeface="Calibri" pitchFamily="34" charset="-120"/>
               </a:rPr>
-              <a:t>5. לא לסמוך בעיוורון</a:t>
+              <a:t>GitHub Copilot</a:t>
             </a:r>
             <a:pPr rtl="1" algn="r" marL="228600" indent="-228600">
               <a:spcAft>
@@ -5674,7 +6150,7 @@
                 <a:ea typeface="Calibri" pitchFamily="34" charset="-122"/>
                 <a:cs typeface="Calibri" pitchFamily="34" charset="-120"/>
               </a:rPr>
-              <a:t> — אם משהו נראה "יותר מדי חכם", או משתמש בפונקציה שלא הכרתם — בודקים שהיא אכן קיימת (זוכרים את Hallucination משיעור 1?)</a:t>
+              <a:t> — 68% נתח שימוש כללי</a:t>
             </a:r>
             <a:endParaRPr lang="en-US" sz="1900" dirty="0"/>
           </a:p>
@@ -5687,6 +6163,24 @@
               <a:buChar char="•"/>
             </a:pPr>
             <a:r>
+              <a:rPr lang="en-US" sz="1900" dirty="0">
+                <a:solidFill>
+                  <a:srgbClr val="1B1F3B"/>
+                </a:solidFill>
+                <a:latin typeface="Calibri" pitchFamily="34" charset="0"/>
+                <a:ea typeface="Calibri" pitchFamily="34" charset="-122"/>
+                <a:cs typeface="Calibri" pitchFamily="34" charset="-120"/>
+              </a:rPr>
+              <a:t>מבין ה-IDE-ים הממוקדי-AI: </a:t>
+            </a:r>
+            <a:pPr rtl="1" algn="r" marL="228600" indent="-228600">
+              <a:spcAft>
+                <a:spcPts val="1000"/>
+              </a:spcAft>
+              <a:buSzPct val="100000"/>
+              <a:buChar char="•"/>
+            </a:pPr>
+            <a:r>
               <a:rPr lang="en-US" sz="1900" b="1" dirty="0">
                 <a:solidFill>
                   <a:srgbClr val="1B1F3B"/>
@@ -5695,7 +6189,7 @@
                 <a:ea typeface="Calibri" pitchFamily="34" charset="-122"/>
                 <a:cs typeface="Calibri" pitchFamily="34" charset="-120"/>
               </a:rPr>
-              <a:t>6. איטרציה, לא ניסיון יחיד</a:t>
+              <a:t>Cursor</a:t>
             </a:r>
             <a:pPr rtl="1" algn="r" marL="228600" indent="-228600">
               <a:spcAft>
@@ -5713,7 +6207,103 @@
                 <a:ea typeface="Calibri" pitchFamily="34" charset="-122"/>
                 <a:cs typeface="Calibri" pitchFamily="34" charset="-120"/>
               </a:rPr>
-              <a:t> — אם התוצאה הראשונה לא מושלמת, מבקשים תיקון ממוקד, לא מתחילים מאפס</a:t>
+              <a:t> (עורך קוד עם AI מובנה) — 18% נתח שימוש כללי, אך 24% כ"כלי ראשי" בקרב מי שכבר עובד אג'נטית</a:t>
+            </a:r>
+            <a:endParaRPr lang="en-US" sz="1900" dirty="0"/>
+          </a:p>
+          <a:p>
+            <a:pPr rtl="1" algn="r" marL="228600" indent="-228600">
+              <a:spcAft>
+                <a:spcPts val="1000"/>
+              </a:spcAft>
+              <a:buSzPct val="100000"/>
+              <a:buChar char="•"/>
+            </a:pPr>
+            <a:r>
+              <a:rPr lang="en-US" sz="1900" b="1" dirty="0">
+                <a:solidFill>
+                  <a:srgbClr val="1B1F3B"/>
+                </a:solidFill>
+                <a:latin typeface="Calibri" pitchFamily="34" charset="0"/>
+                <a:ea typeface="Calibri" pitchFamily="34" charset="-122"/>
+                <a:cs typeface="Calibri" pitchFamily="34" charset="-120"/>
+              </a:rPr>
+              <a:t>Claude Code</a:t>
+            </a:r>
+            <a:pPr rtl="1" algn="r" marL="228600" indent="-228600">
+              <a:spcAft>
+                <a:spcPts val="1000"/>
+              </a:spcAft>
+              <a:buSzPct val="100000"/>
+              <a:buChar char="•"/>
+            </a:pPr>
+            <a:r>
+              <a:rPr lang="en-US" sz="1900" dirty="0">
+                <a:solidFill>
+                  <a:srgbClr val="1B1F3B"/>
+                </a:solidFill>
+                <a:latin typeface="Calibri" pitchFamily="34" charset="0"/>
+                <a:ea typeface="Calibri" pitchFamily="34" charset="-122"/>
+                <a:cs typeface="Calibri" pitchFamily="34" charset="-120"/>
+              </a:rPr>
+              <a:t> — 10% נתח שימוש כללי, אך </a:t>
+            </a:r>
+            <a:pPr rtl="1" algn="r" marL="228600" indent="-228600">
+              <a:spcAft>
+                <a:spcPts val="1000"/>
+              </a:spcAft>
+              <a:buSzPct val="100000"/>
+              <a:buChar char="•"/>
+            </a:pPr>
+            <a:r>
+              <a:rPr lang="en-US" sz="1900" b="1" dirty="0">
+                <a:solidFill>
+                  <a:srgbClr val="1B1F3B"/>
+                </a:solidFill>
+                <a:latin typeface="Calibri" pitchFamily="34" charset="0"/>
+                <a:ea typeface="Calibri" pitchFamily="34" charset="-122"/>
+                <a:cs typeface="Calibri" pitchFamily="34" charset="-120"/>
+              </a:rPr>
+              <a:t>28%</a:t>
+            </a:r>
+            <a:pPr rtl="1" algn="r" marL="228600" indent="-228600">
+              <a:spcAft>
+                <a:spcPts val="1000"/>
+              </a:spcAft>
+              <a:buSzPct val="100000"/>
+              <a:buChar char="•"/>
+            </a:pPr>
+            <a:r>
+              <a:rPr lang="en-US" sz="1900" dirty="0">
+                <a:solidFill>
+                  <a:srgbClr val="1B1F3B"/>
+                </a:solidFill>
+                <a:latin typeface="Calibri" pitchFamily="34" charset="0"/>
+                <a:ea typeface="Calibri" pitchFamily="34" charset="-122"/>
+                <a:cs typeface="Calibri" pitchFamily="34" charset="-120"/>
+              </a:rPr>
+              <a:t> כ"כלי ראשי" בקרב מי שכבר עובד אג'נטית — כלומר מי שבחר להתמקצע בעבודה אג'נטית מלאה נוטה לבחור בו דווקא</a:t>
+            </a:r>
+            <a:endParaRPr lang="en-US" sz="1900" dirty="0"/>
+          </a:p>
+          <a:p>
+            <a:pPr rtl="1" algn="r" marL="228600" indent="-228600">
+              <a:spcAft>
+                <a:spcPts val="1000"/>
+              </a:spcAft>
+              <a:buSzPct val="100000"/>
+              <a:buChar char="•"/>
+            </a:pPr>
+            <a:r>
+              <a:rPr lang="en-US" sz="1900" dirty="0">
+                <a:solidFill>
+                  <a:srgbClr val="1B1F3B"/>
+                </a:solidFill>
+                <a:latin typeface="Calibri" pitchFamily="34" charset="0"/>
+                <a:ea typeface="Calibri" pitchFamily="34" charset="-122"/>
+                <a:cs typeface="Calibri" pitchFamily="34" charset="-120"/>
+              </a:rPr>
+              <a:t>(ChatGPT ו-Copilot לא נמדדו בקטגוריית "כלי ראשי אג'נטי" כי הם משמשים בעיקר כעזר כללי, לא כסביבת עבודה אג'נטית מלאה)</a:t>
             </a:r>
             <a:endParaRPr lang="en-US" sz="1900" dirty="0"/>
           </a:p>
@@ -5751,7 +6341,7 @@
         <p:spPr>
           <a:xfrm>
             <a:off x="548640" y="5394960"/>
-            <a:ext cx="11091672" cy="868680"/>
+            <a:ext cx="11091672" cy="621792"/>
           </a:xfrm>
           <a:prstGeom prst="rect">
             <a:avLst/>
@@ -5775,7 +6365,7 @@
                 <a:ea typeface="Arial" pitchFamily="34" charset="-122"/>
                 <a:cs typeface="Arial" pitchFamily="34" charset="-120"/>
               </a:rPr>
-              <a:t>✔ מה עושים בפועל: בשקף הבא נראה שיש לזה גם מחיר מדיד, לא רק "עצה טובה".</a:t>
+              <a:t>✔ מה עושים בפועל: אין "כלי אחד נכון" — הקורס מלמד עם Claude Code כי הוא מייצג היטב את העבודה האג'נטית המלאה, אבל ה-Workflow שתלמדו עובד בכל אחד מהכלים האלה.</a:t>
             </a:r>
             <a:endParaRPr lang="en-US" sz="1700" dirty="0"/>
           </a:p>
@@ -5784,6 +6374,45 @@
       <p:sp>
         <p:nvSpPr>
           <p:cNvPr id="6" name="Text 4"/>
+          <p:cNvSpPr/>
+          <p:nvPr/>
+        </p:nvSpPr>
+        <p:spPr>
+          <a:xfrm>
+            <a:off x="548640" y="6126480"/>
+            <a:ext cx="11091672" cy="274320"/>
+          </a:xfrm>
+          <a:prstGeom prst="rect">
+            <a:avLst/>
+          </a:prstGeom>
+          <a:noFill/>
+          <a:ln/>
+        </p:spPr>
+        <p:txBody>
+          <a:bodyPr wrap="square" lIns="0" tIns="0" rIns="0" bIns="0" rtlCol="0" anchor="ctr"/>
+          <a:lstStyle/>
+          <a:p>
+            <a:pPr rtl="1" algn="r" indent="0" marL="0">
+              <a:buNone/>
+            </a:pPr>
+            <a:r>
+              <a:rPr lang="en-US" sz="1000" i="1" dirty="0">
+                <a:solidFill>
+                  <a:srgbClr val="6B7280"/>
+                </a:solidFill>
+                <a:latin typeface="Calibri" pitchFamily="34" charset="0"/>
+                <a:ea typeface="Calibri" pitchFamily="34" charset="-122"/>
+                <a:cs typeface="Calibri" pitchFamily="34" charset="-120"/>
+              </a:rPr>
+              <a:t>מקור: Stack Overflow Developer Survey (סקר שנתי בקרב מפתחים, מבית אתר Stack Overflow) 2025 — survey.stackoverflow.co/2025 · index.dev 2026</a:t>
+            </a:r>
+            <a:endParaRPr lang="en-US" sz="1000" dirty="0"/>
+          </a:p>
+        </p:txBody>
+      </p:sp>
+      <p:sp>
+        <p:nvSpPr>
+          <p:cNvPr id="7" name="Text 5"/>
           <p:cNvSpPr/>
           <p:nvPr/>
         </p:nvSpPr>
@@ -5885,7 +6514,7 @@
                 <a:ea typeface="Arial" pitchFamily="34" charset="-122"/>
                 <a:cs typeface="Arial" pitchFamily="34" charset="-120"/>
               </a:rPr>
-              <a:t>המחיר של דילוג על הכללים</a:t>
+              <a:t>כלים חינמיים להתחלה</a:t>
             </a:r>
             <a:endParaRPr lang="en-US" sz="2800" dirty="0"/>
           </a:p>
@@ -5900,18 +6529,36 @@
         <p:spPr>
           <a:xfrm>
             <a:off x="548640" y="1234440"/>
-            <a:ext cx="11091672" cy="3931920"/>
-          </a:xfrm>
-          <a:prstGeom prst="rect">
-            <a:avLst/>
-          </a:prstGeom>
-          <a:noFill/>
-          <a:ln/>
-        </p:spPr>
-        <p:txBody>
-          <a:bodyPr wrap="square" lIns="0" tIns="0" rIns="0" bIns="0" rtlCol="0" anchor="ctr"/>
-          <a:lstStyle/>
-          <a:p>
+            <a:ext cx="11091672" cy="3675888"/>
+          </a:xfrm>
+          <a:prstGeom prst="rect">
+            <a:avLst/>
+          </a:prstGeom>
+          <a:noFill/>
+          <a:ln/>
+        </p:spPr>
+        <p:txBody>
+          <a:bodyPr wrap="square" lIns="0" tIns="0" rIns="0" bIns="0" rtlCol="0" anchor="ctr"/>
+          <a:lstStyle/>
+          <a:p>
+            <a:pPr rtl="1" algn="r" marL="228600" indent="-228600">
+              <a:spcAft>
+                <a:spcPts val="1000"/>
+              </a:spcAft>
+              <a:buSzPct val="100000"/>
+              <a:buChar char="•"/>
+            </a:pPr>
+            <a:r>
+              <a:rPr lang="en-US" sz="1900" b="1" dirty="0">
+                <a:solidFill>
+                  <a:srgbClr val="1B1F3B"/>
+                </a:solidFill>
+                <a:latin typeface="Calibri" pitchFamily="34" charset="0"/>
+                <a:ea typeface="Calibri" pitchFamily="34" charset="-122"/>
+                <a:cs typeface="Calibri" pitchFamily="34" charset="-120"/>
+              </a:rPr>
+              <a:t>GitHub Copilot Free</a:t>
+            </a:r>
             <a:pPr rtl="1" algn="r" marL="228600" indent="-228600">
               <a:spcAft>
                 <a:spcPts val="1000"/>
@@ -5928,8 +6575,11 @@
                 <a:ea typeface="Calibri" pitchFamily="34" charset="-122"/>
                 <a:cs typeface="Calibri" pitchFamily="34" charset="-120"/>
               </a:rPr>
-              <a:t>דו"ח </a:t>
-            </a:r>
+              <a:t> — מסלול חינמי רחב, ללא צורך באימות סטודנט, זמין ישירות ב-VS Code — נקודת הכניסה הפשוטה ביותר. כולל גם מצב Agent (לא רק השלמות), עם בחירת מודל אוטומטית ומכסה חודשית (docs.github.com/.../plans)</a:t>
+            </a:r>
+            <a:endParaRPr lang="en-US" sz="1900" dirty="0"/>
+          </a:p>
+          <a:p>
             <a:pPr rtl="1" algn="r" marL="228600" indent="-228600">
               <a:spcAft>
                 <a:spcPts val="1000"/>
@@ -5946,7 +6596,7 @@
                 <a:ea typeface="Calibri" pitchFamily="34" charset="-122"/>
                 <a:cs typeface="Calibri" pitchFamily="34" charset="-120"/>
               </a:rPr>
-              <a:t>DORA</a:t>
+              <a:t>GitHub Student Developer Pack</a:t>
             </a:r>
             <a:pPr rtl="1" algn="r" marL="228600" indent="-228600">
               <a:spcAft>
@@ -5964,7 +6614,7 @@
                 <a:ea typeface="Calibri" pitchFamily="34" charset="-122"/>
                 <a:cs typeface="Calibri" pitchFamily="34" charset="-120"/>
               </a:rPr>
-              <a:t> (מחקר שנתי מוביל על תהליכי פיתוח תוכנה, מבית Google — הכרנו בשיעור 1) מצא: אימוץ AI בלי תהליך עבודה מסודר (בדיוק הכללים משני השקפים הקודמים) מוביל ל-</a:t>
+              <a:t> — חבילת הטבות לסטודנטים מאומתים; הרשמה חדשה להטבת </a:t>
             </a:r>
             <a:pPr rtl="1" algn="r" marL="228600" indent="-228600">
               <a:spcAft>
@@ -5982,7 +6632,7 @@
                 <a:ea typeface="Calibri" pitchFamily="34" charset="-122"/>
                 <a:cs typeface="Calibri" pitchFamily="34" charset="-120"/>
               </a:rPr>
-              <a:t>30-41%</a:t>
+              <a:t>Copilot Student</a:t>
             </a:r>
             <a:pPr rtl="1" algn="r" marL="228600" indent="-228600">
               <a:spcAft>
@@ -6000,8 +6650,11 @@
                 <a:ea typeface="Calibri" pitchFamily="34" charset="-122"/>
                 <a:cs typeface="Calibri" pitchFamily="34" charset="-120"/>
               </a:rPr>
-              <a:t> יותר </a:t>
-            </a:r>
+              <a:t> (מסלול מורחב יותר מ-Copilot Free הרגיל) מושהית מאפריל 2026 בשל עומס על תשתית Agentic — מי שכבר אומת קודם ממשיך לקבל אותה, וחברי Pack חדשים מקבלים כרגע את Copilot Free הרגיל (education.github.com/pack)</a:t>
+            </a:r>
+            <a:endParaRPr lang="en-US" sz="1900" dirty="0"/>
+          </a:p>
+          <a:p>
             <a:pPr rtl="1" algn="r" marL="228600" indent="-228600">
               <a:spcAft>
                 <a:spcPts val="1000"/>
@@ -6018,7 +6671,7 @@
                 <a:ea typeface="Calibri" pitchFamily="34" charset="-122"/>
                 <a:cs typeface="Calibri" pitchFamily="34" charset="-120"/>
               </a:rPr>
-              <a:t>חוב טכני</a:t>
+              <a:t>Cursor</a:t>
             </a:r>
             <a:pPr rtl="1" algn="r" marL="228600" indent="-228600">
               <a:spcAft>
@@ -6036,67 +6689,10 @@
                 <a:ea typeface="Calibri" pitchFamily="34" charset="-122"/>
                 <a:cs typeface="Calibri" pitchFamily="34" charset="-120"/>
               </a:rPr>
-              <a:t> (עבודה "מהירה" עכשיו שדורשת תיקון יקר יותר בהמשך), לעומת עבודה עם תהליך מסודר</a:t>
+              <a:t> — IDE מלא מבוסס AI, עם מסלול חינמי מוגבל (Agent requests מוגבל + מכסת השלמות בסיסית, בלי כרטיס אשראי) — cursor.com/pricing</a:t>
             </a:r>
             <a:endParaRPr lang="en-US" sz="1900" dirty="0"/>
           </a:p>
-          <a:p>
-            <a:pPr rtl="1" algn="r" marL="228600" indent="-228600">
-              <a:spcAft>
-                <a:spcPts val="1000"/>
-              </a:spcAft>
-              <a:buSzPct val="100000"/>
-              <a:buChar char="•"/>
-            </a:pPr>
-            <a:r>
-              <a:rPr lang="en-US" sz="1900" dirty="0">
-                <a:solidFill>
-                  <a:srgbClr val="1B1F3B"/>
-                </a:solidFill>
-                <a:latin typeface="Calibri" pitchFamily="34" charset="0"/>
-                <a:ea typeface="Calibri" pitchFamily="34" charset="-122"/>
-                <a:cs typeface="Calibri" pitchFamily="34" charset="-120"/>
-              </a:rPr>
-              <a:t>בקשות שילוב קוד (Pull Requests) שנכתבו על ידי AI נושאות </a:t>
-            </a:r>
-            <a:pPr rtl="1" algn="r" marL="228600" indent="-228600">
-              <a:spcAft>
-                <a:spcPts val="1000"/>
-              </a:spcAft>
-              <a:buSzPct val="100000"/>
-              <a:buChar char="•"/>
-            </a:pPr>
-            <a:r>
-              <a:rPr lang="en-US" sz="1900" b="1" dirty="0">
-                <a:solidFill>
-                  <a:srgbClr val="1B1F3B"/>
-                </a:solidFill>
-                <a:latin typeface="Calibri" pitchFamily="34" charset="0"/>
-                <a:ea typeface="Calibri" pitchFamily="34" charset="-122"/>
-                <a:cs typeface="Calibri" pitchFamily="34" charset="-120"/>
-              </a:rPr>
-              <a:t>פי 1.7</a:t>
-            </a:r>
-            <a:pPr rtl="1" algn="r" marL="228600" indent="-228600">
-              <a:spcAft>
-                <a:spcPts val="1000"/>
-              </a:spcAft>
-              <a:buSzPct val="100000"/>
-              <a:buChar char="•"/>
-            </a:pPr>
-            <a:r>
-              <a:rPr lang="en-US" sz="1900" dirty="0">
-                <a:solidFill>
-                  <a:srgbClr val="1B1F3B"/>
-                </a:solidFill>
-                <a:latin typeface="Calibri" pitchFamily="34" charset="0"/>
-                <a:ea typeface="Calibri" pitchFamily="34" charset="-122"/>
-                <a:cs typeface="Calibri" pitchFamily="34" charset="-120"/>
-              </a:rPr>
-              <a:t> יותר בעיות מ-PR שכתב בן אדם</a:t>
-            </a:r>
-            <a:endParaRPr lang="en-US" sz="1900" dirty="0"/>
-          </a:p>
         </p:txBody>
       </p:sp>
       <p:sp>
@@ -6107,7 +6703,7 @@
         </p:nvSpPr>
         <p:spPr>
           <a:xfrm>
-            <a:off x="548640" y="5303520"/>
+            <a:off x="548640" y="5047488"/>
             <a:ext cx="11091672" cy="0"/>
           </a:xfrm>
           <a:prstGeom prst="line">
@@ -6130,8 +6726,8 @@
         </p:nvSpPr>
         <p:spPr>
           <a:xfrm>
-            <a:off x="548640" y="5394960"/>
-            <a:ext cx="11091672" cy="868680"/>
+            <a:off x="548640" y="5138928"/>
+            <a:ext cx="11091672" cy="1243584"/>
           </a:xfrm>
           <a:prstGeom prst="rect">
             <a:avLst/>
@@ -6155,54 +6751,43 @@
                 <a:ea typeface="Arial" pitchFamily="34" charset="-122"/>
                 <a:cs typeface="Arial" pitchFamily="34" charset="-120"/>
               </a:rPr>
-              <a:t>✔ מה עושים בפועל: ה-Best Practices משני השקפים הקודמים הם לא בירוקרטיה — הם ההבדל בין "AI שעוזר" ל"AI שיוצר בעיה גדולה יותר ממה שפתר".</a:t>
-            </a:r>
-            <a:endParaRPr lang="en-US" sz="1700" dirty="0"/>
-          </a:p>
-        </p:txBody>
-      </p:sp>
-      <p:sp>
-        <p:nvSpPr>
-          <p:cNvPr id="6" name="Text 4"/>
-          <p:cNvSpPr/>
-          <p:nvPr/>
-        </p:nvSpPr>
-        <p:spPr>
-          <a:xfrm>
-            <a:off x="548640" y="6172200"/>
-            <a:ext cx="11091672" cy="274320"/>
-          </a:xfrm>
-          <a:prstGeom prst="rect">
-            <a:avLst/>
-          </a:prstGeom>
-          <a:noFill/>
-          <a:ln/>
-        </p:spPr>
-        <p:txBody>
-          <a:bodyPr wrap="square" lIns="0" tIns="0" rIns="0" bIns="0" rtlCol="0" anchor="ctr"/>
-          <a:lstStyle/>
-          <a:p>
+              <a:t>✔ מה עושים בפועל: שוק הכלים והמסלולים החינמיים משתנה מהר מאוד — בשיעור 1 ראינו איך Gemini CLI החינמי נסגר תוך פחות משנה. </a:t>
+            </a:r>
             <a:pPr rtl="1" algn="r" indent="0" marL="0">
               <a:buNone/>
             </a:pPr>
             <a:r>
-              <a:rPr lang="en-US" sz="1000" i="1" dirty="0">
-                <a:solidFill>
-                  <a:srgbClr val="6B7280"/>
-                </a:solidFill>
-                <a:latin typeface="Calibri" pitchFamily="34" charset="0"/>
-                <a:ea typeface="Calibri" pitchFamily="34" charset="-122"/>
-                <a:cs typeface="Calibri" pitchFamily="34" charset="-120"/>
-              </a:rPr>
-              <a:t>מקור: DORA — ROI of AI-Assisted Software Development, 2026</a:t>
-            </a:r>
-            <a:endParaRPr lang="en-US" sz="1000" dirty="0"/>
-          </a:p>
-        </p:txBody>
-      </p:sp>
-      <p:sp>
-        <p:nvSpPr>
-          <p:cNvPr id="7" name="Text 5"/>
+              <a:rPr lang="en-US" sz="1700" b="1" dirty="0">
+                <a:solidFill>
+                  <a:srgbClr val="00A88A"/>
+                </a:solidFill>
+                <a:latin typeface="Arial" pitchFamily="34" charset="0"/>
+                <a:ea typeface="Arial" pitchFamily="34" charset="-122"/>
+                <a:cs typeface="Arial" pitchFamily="34" charset="-120"/>
+              </a:rPr>
+              <a:t>פעילות (2 דקות):</a:t>
+            </a:r>
+            <a:pPr rtl="1" algn="r" indent="0" marL="0">
+              <a:buNone/>
+            </a:pPr>
+            <a:r>
+              <a:rPr lang="en-US" sz="1700" dirty="0">
+                <a:solidFill>
+                  <a:srgbClr val="00A88A"/>
+                </a:solidFill>
+                <a:latin typeface="Arial" pitchFamily="34" charset="0"/>
+                <a:ea typeface="Arial" pitchFamily="34" charset="-122"/>
+                <a:cs typeface="Arial" pitchFamily="34" charset="-120"/>
+              </a:rPr>
+              <a:t> המרצה פותח את שני הלינקים (cursor.com/pricing ו-docs.github.com/.../plans) בכיתה בזמן אמת — האם המחירים/המכסות עדיין תואמים למה שכתוב כאן? זו לא רק הדגמה, זו ההרגל המקצועי עצמו: תמיד בודקים סטטוס עדכני קרוב למועד השימוש בפועל.</a:t>
+            </a:r>
+            <a:endParaRPr lang="en-US" sz="1700" dirty="0"/>
+          </a:p>
+        </p:txBody>
+      </p:sp>
+      <p:sp>
+        <p:nvSpPr>
+          <p:cNvPr id="6" name="Text 4"/>
           <p:cNvSpPr/>
           <p:nvPr/>
         </p:nvSpPr>
@@ -6304,7 +6889,7 @@
                 <a:ea typeface="Arial" pitchFamily="34" charset="-122"/>
                 <a:cs typeface="Arial" pitchFamily="34" charset="-120"/>
               </a:rPr>
-              <a:t>הדגמה חיה (חלק א׳): Autocomplete מול Agentic</a:t>
+              <a:t>Best Practices לעבודה עם כלי Agentic (חלק א׳)</a:t>
             </a:r>
             <a:endParaRPr lang="en-US" sz="2800" dirty="0"/>
           </a:p>
@@ -6339,6 +6924,24 @@
               <a:buChar char="•"/>
             </a:pPr>
             <a:r>
+              <a:rPr lang="en-US" sz="1900" b="1" dirty="0">
+                <a:solidFill>
+                  <a:srgbClr val="1B1F3B"/>
+                </a:solidFill>
+                <a:latin typeface="Calibri" pitchFamily="34" charset="0"/>
+                <a:ea typeface="Calibri" pitchFamily="34" charset="-122"/>
+                <a:cs typeface="Calibri" pitchFamily="34" charset="-120"/>
+              </a:rPr>
+              <a:t>1. הנחיות ברורות וספציפיות</a:t>
+            </a:r>
+            <a:pPr rtl="1" algn="r" marL="228600" indent="-228600">
+              <a:spcAft>
+                <a:spcPts val="1000"/>
+              </a:spcAft>
+              <a:buSzPct val="100000"/>
+              <a:buChar char="•"/>
+            </a:pPr>
+            <a:r>
               <a:rPr lang="en-US" sz="1900" dirty="0">
                 <a:solidFill>
                   <a:srgbClr val="1B1F3B"/>
@@ -6347,7 +6950,43 @@
                 <a:ea typeface="Calibri" pitchFamily="34" charset="-122"/>
                 <a:cs typeface="Calibri" pitchFamily="34" charset="-120"/>
               </a:rPr>
-              <a:t>20-25 דקות. פותחים session אמיתי מול קוד קיים — פרויקט ה-Todo App שבנינו יחד בשיעור 1</a:t>
+              <a:t> — "תוסיף התחברות" עמום מדי; "תוסיף התחברות עם Google </a:t>
+            </a:r>
+            <a:pPr rtl="1" algn="r" marL="228600" indent="-228600">
+              <a:spcAft>
+                <a:spcPts val="1000"/>
+              </a:spcAft>
+              <a:buSzPct val="100000"/>
+              <a:buChar char="•"/>
+            </a:pPr>
+            <a:r>
+              <a:rPr lang="en-US" sz="1900" b="1" dirty="0">
+                <a:solidFill>
+                  <a:srgbClr val="1B1F3B"/>
+                </a:solidFill>
+                <a:latin typeface="Calibri" pitchFamily="34" charset="0"/>
+                <a:ea typeface="Calibri" pitchFamily="34" charset="-122"/>
+                <a:cs typeface="Calibri" pitchFamily="34" charset="-120"/>
+              </a:rPr>
+              <a:t>OAuth</a:t>
+            </a:r>
+            <a:pPr rtl="1" algn="r" marL="228600" indent="-228600">
+              <a:spcAft>
+                <a:spcPts val="1000"/>
+              </a:spcAft>
+              <a:buSzPct val="100000"/>
+              <a:buChar char="•"/>
+            </a:pPr>
+            <a:r>
+              <a:rPr lang="en-US" sz="1900" dirty="0">
+                <a:solidFill>
+                  <a:srgbClr val="1B1F3B"/>
+                </a:solidFill>
+                <a:latin typeface="Calibri" pitchFamily="34" charset="0"/>
+                <a:ea typeface="Calibri" pitchFamily="34" charset="-122"/>
+                <a:cs typeface="Calibri" pitchFamily="34" charset="-120"/>
+              </a:rPr>
+              <a:t> (פרוטוקול התחברות מאובטח דרך חשבון קיים), עם Redirect (הפניה אוטומטית) לדף הבית אחרי הצלחה" ברור וממוקד</a:t>
             </a:r>
             <a:endParaRPr lang="en-US" sz="1900" dirty="0"/>
           </a:p>
@@ -6368,7 +7007,7 @@
                 <a:ea typeface="Calibri" pitchFamily="34" charset="-122"/>
                 <a:cs typeface="Calibri" pitchFamily="34" charset="-120"/>
               </a:rPr>
-              <a:t>שלב 1 — Autocomplete (לא אג'נטי):</a:t>
+              <a:t>2. צעדים קטנים</a:t>
             </a:r>
             <a:pPr rtl="1" algn="r" marL="228600" indent="-228600">
               <a:spcAft>
@@ -6386,7 +7025,7 @@
                 <a:ea typeface="Calibri" pitchFamily="34" charset="-122"/>
                 <a:cs typeface="Calibri" pitchFamily="34" charset="-120"/>
               </a:rPr>
-              <a:t> המרצה מקליד בעצמו בתוך `index.html`, למשל תוך כדי הוספת פונקציה חדשה, ונותן לכלי להשלים שורה אחת בלבד. הדגש: "זה עוזר, אבל אני עדיין מחליט כל דבר."</a:t>
+              <a:t> — משימה גדולה מתפרקת לצעדים; קל יותר לבדוק תוצאה של צעד קטן מאשר של שינוי ענק</a:t>
             </a:r>
             <a:endParaRPr lang="en-US" sz="1900" dirty="0"/>
           </a:p>
@@ -6407,7 +7046,7 @@
                 <a:ea typeface="Calibri" pitchFamily="34" charset="-122"/>
                 <a:cs typeface="Calibri" pitchFamily="34" charset="-120"/>
               </a:rPr>
-              <a:t>שלב 2 — שימוש אג'נטי אמיתי:</a:t>
+              <a:t>3. בדיקת כל Diff</a:t>
             </a:r>
             <a:pPr rtl="1" algn="r" marL="228600" indent="-228600">
               <a:spcAft>
@@ -6425,7 +7064,7 @@
                 <a:ea typeface="Calibri" pitchFamily="34" charset="-122"/>
                 <a:cs typeface="Calibri" pitchFamily="34" charset="-120"/>
               </a:rPr>
-              <a:t> פותחים session אג'נטי מלא (Claude Code / Cursor Agent Mode) על אותה תיקייה, ומקלידים את הפרומפט שבשקף הבא</a:t>
+              <a:t> — לפני אישור שינוי, קוראים אותו. תמיד, בלי יוצא מן הכלל</a:t>
             </a:r>
             <a:endParaRPr lang="en-US" sz="1900" dirty="0"/>
           </a:p>
@@ -6463,7 +7102,7 @@
         <p:spPr>
           <a:xfrm>
             <a:off x="548640" y="5394960"/>
-            <a:ext cx="11091672" cy="868680"/>
+            <a:ext cx="11091672" cy="457200"/>
           </a:xfrm>
           <a:prstGeom prst="rect">
             <a:avLst/>
@@ -6487,7 +7126,7 @@
                 <a:ea typeface="Arial" pitchFamily="34" charset="-122"/>
                 <a:cs typeface="Arial" pitchFamily="34" charset="-120"/>
               </a:rPr>
-              <a:t>✔ מה עושים בפועל: הניגוד בין שני השלבים הוא הנקודה הפדגוגית המרכזית — לתת לכיתה לראות בעיניים את ההבדל, לא רק לשמוע עליו.</a:t>
+              <a:t>✔ מה עושים בפועל: שלושת הכללים האלה (וגם השלושה בשקף הבא) הם מה שמבדיל שימוש מקצועי מ"ניסוי מקרי".</a:t>
             </a:r>
             <a:endParaRPr lang="en-US" sz="1700" dirty="0"/>
           </a:p>
@@ -6572,86 +7211,24 @@
         </p:nvSpPr>
         <p:spPr>
           <a:xfrm>
-            <a:off x="548640" y="502920"/>
-            <a:ext cx="11091672" cy="365760"/>
-          </a:xfrm>
-          <a:prstGeom prst="rect">
-            <a:avLst/>
-          </a:prstGeom>
-          <a:noFill/>
-          <a:ln/>
-        </p:spPr>
-        <p:txBody>
-          <a:bodyPr wrap="square" lIns="0" tIns="0" rIns="0" bIns="0" rtlCol="0" anchor="ctr"/>
-          <a:lstStyle/>
-          <a:p>
-            <a:pPr rtl="1" algn="ctr" indent="0" marL="0">
+            <a:off x="548640" y="320040"/>
+            <a:ext cx="11091672" cy="685800"/>
+          </a:xfrm>
+          <a:prstGeom prst="rect">
+            <a:avLst/>
+          </a:prstGeom>
+          <a:noFill/>
+          <a:ln/>
+        </p:spPr>
+        <p:txBody>
+          <a:bodyPr wrap="square" lIns="0" tIns="0" rIns="0" bIns="0" rtlCol="0" anchor="ctr"/>
+          <a:lstStyle/>
+          <a:p>
+            <a:pPr rtl="1" algn="r" indent="0" marL="0">
               <a:buNone/>
             </a:pPr>
             <a:r>
-              <a:rPr lang="en-US" sz="1500" i="1" dirty="0">
-                <a:solidFill>
-                  <a:srgbClr val="00A88A"/>
-                </a:solidFill>
-                <a:latin typeface="Calibri" pitchFamily="34" charset="0"/>
-                <a:ea typeface="Calibri" pitchFamily="34" charset="-122"/>
-                <a:cs typeface="Calibri" pitchFamily="34" charset="-120"/>
-              </a:rPr>
-              <a:t>הדגמה חיה (חלק ב׳)</a:t>
-            </a:r>
-            <a:endParaRPr lang="en-US" sz="1500" dirty="0"/>
-          </a:p>
-        </p:txBody>
-      </p:sp>
-      <p:sp>
-        <p:nvSpPr>
-          <p:cNvPr id="3" name="Shape 1"/>
-          <p:cNvSpPr/>
-          <p:nvPr/>
-        </p:nvSpPr>
-        <p:spPr>
-          <a:xfrm>
-            <a:off x="4718304" y="914400"/>
-            <a:ext cx="2743200" cy="0"/>
-          </a:xfrm>
-          <a:prstGeom prst="line">
-            <a:avLst/>
-          </a:prstGeom>
-          <a:noFill/>
-          <a:ln w="19050">
-            <a:solidFill>
-              <a:srgbClr val="00A88A"/>
-            </a:solidFill>
-            <a:prstDash val="solid"/>
-          </a:ln>
-        </p:spPr>
-      </p:sp>
-      <p:sp>
-        <p:nvSpPr>
-          <p:cNvPr id="4" name="Text 2"/>
-          <p:cNvSpPr/>
-          <p:nvPr/>
-        </p:nvSpPr>
-        <p:spPr>
-          <a:xfrm>
-            <a:off x="548640" y="1051560"/>
-            <a:ext cx="11091672" cy="685800"/>
-          </a:xfrm>
-          <a:prstGeom prst="rect">
-            <a:avLst/>
-          </a:prstGeom>
-          <a:noFill/>
-          <a:ln/>
-        </p:spPr>
-        <p:txBody>
-          <a:bodyPr wrap="square" lIns="0" tIns="0" rIns="0" bIns="0" rtlCol="0" anchor="ctr"/>
-          <a:lstStyle/>
-          <a:p>
-            <a:pPr rtl="1" algn="ctr" indent="0" marL="0">
-              <a:buNone/>
-            </a:pPr>
-            <a:r>
-              <a:rPr lang="en-US" sz="2600" b="1" dirty="0">
+              <a:rPr lang="en-US" sz="2800" b="1" dirty="0">
                 <a:solidFill>
                   <a:srgbClr val="1B1F3B"/>
                 </a:solidFill>
@@ -6659,71 +7236,167 @@
                 <a:ea typeface="Arial" pitchFamily="34" charset="-122"/>
                 <a:cs typeface="Arial" pitchFamily="34" charset="-120"/>
               </a:rPr>
-              <a:t>פרומפט אג'נטי מלא</a:t>
-            </a:r>
-            <a:endParaRPr lang="en-US" sz="2600" dirty="0"/>
-          </a:p>
-        </p:txBody>
-      </p:sp>
-      <p:sp>
-        <p:nvSpPr>
-          <p:cNvPr id="5" name="Text 3"/>
-          <p:cNvSpPr/>
-          <p:nvPr/>
-        </p:nvSpPr>
-        <p:spPr>
-          <a:xfrm>
-            <a:off x="548640" y="1737360"/>
-            <a:ext cx="11091672" cy="685800"/>
-          </a:xfrm>
-          <a:prstGeom prst="rect">
-            <a:avLst/>
-          </a:prstGeom>
-          <a:noFill/>
-          <a:ln/>
-        </p:spPr>
-        <p:txBody>
-          <a:bodyPr wrap="square" lIns="0" tIns="0" rIns="0" bIns="0" rtlCol="0" anchor="ctr"/>
-          <a:lstStyle/>
-          <a:p>
-            <a:pPr rtl="1" algn="ctr" indent="0" marL="0">
-              <a:buNone/>
-            </a:pPr>
-            <a:r>
-              <a:rPr lang="en-US" sz="1400" i="1" dirty="0">
-                <a:solidFill>
-                  <a:srgbClr val="6B7280"/>
-                </a:solidFill>
-                <a:latin typeface="Calibri" pitchFamily="34" charset="0"/>
-                <a:ea typeface="Calibri" pitchFamily="34" charset="-122"/>
-                <a:cs typeface="Calibri" pitchFamily="34" charset="-120"/>
-              </a:rPr>
-              <a:t>אחרי הדגמת Autocomplete בשלב 1, מקלידים את זה מול הכיתה:</a:t>
-            </a:r>
-            <a:endParaRPr lang="en-US" sz="1400" dirty="0"/>
-          </a:p>
-        </p:txBody>
-      </p:sp>
-      <p:sp>
-        <p:nvSpPr>
-          <p:cNvPr id="6" name="Shape 4"/>
-          <p:cNvSpPr/>
-          <p:nvPr/>
-        </p:nvSpPr>
-        <p:spPr>
-          <a:xfrm>
-            <a:off x="548640" y="2606040"/>
-            <a:ext cx="11091672" cy="1600200"/>
-          </a:xfrm>
-          <a:prstGeom prst="roundRect">
-            <a:avLst>
-              <a:gd name="adj" fmla="val 3429"/>
-            </a:avLst>
-          </a:prstGeom>
-          <a:solidFill>
-            <a:srgbClr val="F6F6F8"/>
-          </a:solidFill>
-          <a:ln w="12700">
+              <a:t>Best Practices לעבודה עם כלי Agentic (חלק ב׳)</a:t>
+            </a:r>
+            <a:endParaRPr lang="en-US" sz="2800" dirty="0"/>
+          </a:p>
+        </p:txBody>
+      </p:sp>
+      <p:sp>
+        <p:nvSpPr>
+          <p:cNvPr id="3" name="Text 1"/>
+          <p:cNvSpPr/>
+          <p:nvPr/>
+        </p:nvSpPr>
+        <p:spPr>
+          <a:xfrm>
+            <a:off x="548640" y="1234440"/>
+            <a:ext cx="11091672" cy="3931920"/>
+          </a:xfrm>
+          <a:prstGeom prst="rect">
+            <a:avLst/>
+          </a:prstGeom>
+          <a:noFill/>
+          <a:ln/>
+        </p:spPr>
+        <p:txBody>
+          <a:bodyPr wrap="square" lIns="0" tIns="0" rIns="0" bIns="0" rtlCol="0" anchor="ctr"/>
+          <a:lstStyle/>
+          <a:p>
+            <a:pPr rtl="1" algn="r" marL="228600" indent="-228600">
+              <a:spcAft>
+                <a:spcPts val="1000"/>
+              </a:spcAft>
+              <a:buSzPct val="100000"/>
+              <a:buChar char="•"/>
+            </a:pPr>
+            <a:r>
+              <a:rPr lang="en-US" sz="1900" b="1" dirty="0">
+                <a:solidFill>
+                  <a:srgbClr val="1B1F3B"/>
+                </a:solidFill>
+                <a:latin typeface="Calibri" pitchFamily="34" charset="0"/>
+                <a:ea typeface="Calibri" pitchFamily="34" charset="-122"/>
+                <a:cs typeface="Calibri" pitchFamily="34" charset="-120"/>
+              </a:rPr>
+              <a:t>4. Git כרשת ביטחון</a:t>
+            </a:r>
+            <a:pPr rtl="1" algn="r" marL="228600" indent="-228600">
+              <a:spcAft>
+                <a:spcPts val="1000"/>
+              </a:spcAft>
+              <a:buSzPct val="100000"/>
+              <a:buChar char="•"/>
+            </a:pPr>
+            <a:r>
+              <a:rPr lang="en-US" sz="1900" dirty="0">
+                <a:solidFill>
+                  <a:srgbClr val="1B1F3B"/>
+                </a:solidFill>
+                <a:latin typeface="Calibri" pitchFamily="34" charset="0"/>
+                <a:ea typeface="Calibri" pitchFamily="34" charset="-122"/>
+                <a:cs typeface="Calibri" pitchFamily="34" charset="-120"/>
+              </a:rPr>
+              <a:t> — Commit לפני כל ניסוי משמעותי</a:t>
+            </a:r>
+            <a:endParaRPr lang="en-US" sz="1900" dirty="0"/>
+          </a:p>
+          <a:p>
+            <a:pPr rtl="1" algn="r" marL="228600" indent="-228600">
+              <a:spcAft>
+                <a:spcPts val="1000"/>
+              </a:spcAft>
+              <a:buSzPct val="100000"/>
+              <a:buChar char="•"/>
+            </a:pPr>
+            <a:r>
+              <a:rPr lang="en-US" sz="1900" b="1" dirty="0">
+                <a:solidFill>
+                  <a:srgbClr val="1B1F3B"/>
+                </a:solidFill>
+                <a:latin typeface="Calibri" pitchFamily="34" charset="0"/>
+                <a:ea typeface="Calibri" pitchFamily="34" charset="-122"/>
+                <a:cs typeface="Calibri" pitchFamily="34" charset="-120"/>
+              </a:rPr>
+              <a:t>5. לא לסמוך בעיוורון</a:t>
+            </a:r>
+            <a:pPr rtl="1" algn="r" marL="228600" indent="-228600">
+              <a:spcAft>
+                <a:spcPts val="1000"/>
+              </a:spcAft>
+              <a:buSzPct val="100000"/>
+              <a:buChar char="•"/>
+            </a:pPr>
+            <a:r>
+              <a:rPr lang="en-US" sz="1900" dirty="0">
+                <a:solidFill>
+                  <a:srgbClr val="1B1F3B"/>
+                </a:solidFill>
+                <a:latin typeface="Calibri" pitchFamily="34" charset="0"/>
+                <a:ea typeface="Calibri" pitchFamily="34" charset="-122"/>
+                <a:cs typeface="Calibri" pitchFamily="34" charset="-120"/>
+              </a:rPr>
+              <a:t> — אם משהו נראה "יותר מדי חכם", או משתמש בפונקציה שלא הכרתם — בודקים שהיא אכן קיימת (זוכרים את Hallucination משיעור 1?)</a:t>
+            </a:r>
+            <a:endParaRPr lang="en-US" sz="1900" dirty="0"/>
+          </a:p>
+          <a:p>
+            <a:pPr rtl="1" algn="r" marL="228600" indent="-228600">
+              <a:spcAft>
+                <a:spcPts val="1000"/>
+              </a:spcAft>
+              <a:buSzPct val="100000"/>
+              <a:buChar char="•"/>
+            </a:pPr>
+            <a:r>
+              <a:rPr lang="en-US" sz="1900" b="1" dirty="0">
+                <a:solidFill>
+                  <a:srgbClr val="1B1F3B"/>
+                </a:solidFill>
+                <a:latin typeface="Calibri" pitchFamily="34" charset="0"/>
+                <a:ea typeface="Calibri" pitchFamily="34" charset="-122"/>
+                <a:cs typeface="Calibri" pitchFamily="34" charset="-120"/>
+              </a:rPr>
+              <a:t>6. איטרציה, לא ניסיון יחיד</a:t>
+            </a:r>
+            <a:pPr rtl="1" algn="r" marL="228600" indent="-228600">
+              <a:spcAft>
+                <a:spcPts val="1000"/>
+              </a:spcAft>
+              <a:buSzPct val="100000"/>
+              <a:buChar char="•"/>
+            </a:pPr>
+            <a:r>
+              <a:rPr lang="en-US" sz="1900" dirty="0">
+                <a:solidFill>
+                  <a:srgbClr val="1B1F3B"/>
+                </a:solidFill>
+                <a:latin typeface="Calibri" pitchFamily="34" charset="0"/>
+                <a:ea typeface="Calibri" pitchFamily="34" charset="-122"/>
+                <a:cs typeface="Calibri" pitchFamily="34" charset="-120"/>
+              </a:rPr>
+              <a:t> — אם התוצאה הראשונה לא מושלמת, מבקשים תיקון ממוקד, לא מתחילים מאפס</a:t>
+            </a:r>
+            <a:endParaRPr lang="en-US" sz="1900" dirty="0"/>
+          </a:p>
+        </p:txBody>
+      </p:sp>
+      <p:sp>
+        <p:nvSpPr>
+          <p:cNvPr id="4" name="Shape 2"/>
+          <p:cNvSpPr/>
+          <p:nvPr/>
+        </p:nvSpPr>
+        <p:spPr>
+          <a:xfrm>
+            <a:off x="548640" y="5303520"/>
+            <a:ext cx="11091672" cy="0"/>
+          </a:xfrm>
+          <a:prstGeom prst="line">
+            <a:avLst/>
+          </a:prstGeom>
+          <a:noFill/>
+          <a:ln w="9525">
             <a:solidFill>
               <a:srgbClr val="B8B8C8"/>
             </a:solidFill>
@@ -6733,14 +7406,14 @@
       </p:sp>
       <p:sp>
         <p:nvSpPr>
-          <p:cNvPr id="7" name="Text 5"/>
-          <p:cNvSpPr/>
-          <p:nvPr/>
-        </p:nvSpPr>
-        <p:spPr>
-          <a:xfrm>
-            <a:off x="777240" y="2743200"/>
-            <a:ext cx="10634472" cy="1325880"/>
+          <p:cNvPr id="5" name="Text 3"/>
+          <p:cNvSpPr/>
+          <p:nvPr/>
+        </p:nvSpPr>
+        <p:spPr>
+          <a:xfrm>
+            <a:off x="548640" y="5394960"/>
+            <a:ext cx="11091672" cy="457200"/>
           </a:xfrm>
           <a:prstGeom prst="rect">
             <a:avLst/>
@@ -6756,80 +7429,7 @@
               <a:buNone/>
             </a:pPr>
             <a:r>
-              <a:rPr lang="en-US" sz="1300" dirty="0">
-                <a:solidFill>
-                  <a:srgbClr val="1B1F3B"/>
-                </a:solidFill>
-                <a:latin typeface="Courier New" pitchFamily="34" charset="0"/>
-                <a:ea typeface="Courier New" pitchFamily="34" charset="-122"/>
-                <a:cs typeface="Courier New" pitchFamily="34" charset="-120"/>
-              </a:rPr>
-              <a:t>תוסיף לאפליקציית ה-Todo הזו שדה "עדיפות" לכל משימה (נמוכה/בינונית/גבוהה),</a:t>
-            </a:r>
-            <a:endParaRPr lang="en-US" sz="1300" dirty="0"/>
-          </a:p>
-          <a:p>
-            <a:pPr rtl="1" algn="r" indent="0" marL="0">
-              <a:buNone/>
-            </a:pPr>
-            <a:r>
-              <a:rPr lang="en-US" sz="1300" dirty="0">
-                <a:solidFill>
-                  <a:srgbClr val="1B1F3B"/>
-                </a:solidFill>
-                <a:latin typeface="Courier New" pitchFamily="34" charset="0"/>
-                <a:ea typeface="Courier New" pitchFamily="34" charset="-122"/>
-                <a:cs typeface="Courier New" pitchFamily="34" charset="-120"/>
-              </a:rPr>
-              <a:t>עם צבע רקע שונה לכל רמת עדיפות ברשימה. תשמור על אותו סגנון קוד שכבר קיים</a:t>
-            </a:r>
-            <a:endParaRPr lang="en-US" sz="1300" dirty="0"/>
-          </a:p>
-          <a:p>
-            <a:pPr rtl="1" algn="r" indent="0" marL="0">
-              <a:buNone/>
-            </a:pPr>
-            <a:r>
-              <a:rPr lang="en-US" sz="1300" dirty="0">
-                <a:solidFill>
-                  <a:srgbClr val="1B1F3B"/>
-                </a:solidFill>
-                <a:latin typeface="Courier New" pitchFamily="34" charset="0"/>
-                <a:ea typeface="Courier New" pitchFamily="34" charset="-122"/>
-                <a:cs typeface="Courier New" pitchFamily="34" charset="-120"/>
-              </a:rPr>
-              <a:t>בקובץ.</a:t>
-            </a:r>
-            <a:endParaRPr lang="en-US" sz="1300" dirty="0"/>
-          </a:p>
-        </p:txBody>
-      </p:sp>
-      <p:sp>
-        <p:nvSpPr>
-          <p:cNvPr id="8" name="Text 6"/>
-          <p:cNvSpPr/>
-          <p:nvPr/>
-        </p:nvSpPr>
-        <p:spPr>
-          <a:xfrm>
-            <a:off x="548640" y="4416552"/>
-            <a:ext cx="11091672" cy="274320"/>
-          </a:xfrm>
-          <a:prstGeom prst="rect">
-            <a:avLst/>
-          </a:prstGeom>
-          <a:noFill/>
-          <a:ln/>
-        </p:spPr>
-        <p:txBody>
-          <a:bodyPr wrap="square" lIns="0" tIns="0" rIns="0" bIns="0" rtlCol="0" anchor="ctr"/>
-          <a:lstStyle/>
-          <a:p>
-            <a:pPr rtl="1" algn="r" indent="0" marL="0">
-              <a:buNone/>
-            </a:pPr>
-            <a:r>
-              <a:rPr lang="en-US" sz="1300" b="1" dirty="0">
+              <a:rPr lang="en-US" sz="1700" dirty="0">
                 <a:solidFill>
                   <a:srgbClr val="00A88A"/>
                 </a:solidFill>
@@ -6837,81 +7437,15 @@
                 <a:ea typeface="Arial" pitchFamily="34" charset="-122"/>
                 <a:cs typeface="Arial" pitchFamily="34" charset="-120"/>
               </a:rPr>
-              <a:t>לפני האישור, עוצרים ובודקים מול הכיתה:</a:t>
-            </a:r>
-            <a:endParaRPr lang="en-US" sz="1300" dirty="0"/>
-          </a:p>
-        </p:txBody>
-      </p:sp>
-      <p:sp>
-        <p:nvSpPr>
-          <p:cNvPr id="9" name="Shape 7"/>
-          <p:cNvSpPr/>
-          <p:nvPr/>
-        </p:nvSpPr>
-        <p:spPr>
-          <a:xfrm>
-            <a:off x="548640" y="4709160"/>
-            <a:ext cx="11091672" cy="1325880"/>
-          </a:xfrm>
-          <a:prstGeom prst="roundRect">
-            <a:avLst>
-              <a:gd name="adj" fmla="val 4138"/>
-            </a:avLst>
-          </a:prstGeom>
-          <a:solidFill>
-            <a:srgbClr val="F6F6F8"/>
-          </a:solidFill>
-          <a:ln w="12700">
-            <a:solidFill>
-              <a:srgbClr val="B8B8C8"/>
-            </a:solidFill>
-            <a:prstDash val="solid"/>
-          </a:ln>
-        </p:spPr>
-      </p:sp>
-      <p:sp>
-        <p:nvSpPr>
-          <p:cNvPr id="10" name="Text 8"/>
-          <p:cNvSpPr/>
-          <p:nvPr/>
-        </p:nvSpPr>
-        <p:spPr>
-          <a:xfrm>
-            <a:off x="777240" y="4846320"/>
-            <a:ext cx="10634472" cy="1051560"/>
-          </a:xfrm>
-          <a:prstGeom prst="rect">
-            <a:avLst/>
-          </a:prstGeom>
-          <a:noFill/>
-          <a:ln/>
-        </p:spPr>
-        <p:txBody>
-          <a:bodyPr wrap="square" lIns="0" tIns="0" rIns="0" bIns="0" rtlCol="0" anchor="ctr"/>
-          <a:lstStyle/>
-          <a:p>
-            <a:pPr rtl="1" algn="r" indent="0" marL="0">
-              <a:buNone/>
-            </a:pPr>
-            <a:r>
-              <a:rPr lang="en-US" sz="1300" dirty="0">
-                <a:solidFill>
-                  <a:srgbClr val="1B1F3B"/>
-                </a:solidFill>
-                <a:latin typeface="Courier New" pitchFamily="34" charset="0"/>
-                <a:ea typeface="Courier New" pitchFamily="34" charset="-122"/>
-                <a:cs typeface="Courier New" pitchFamily="34" charset="-120"/>
-              </a:rPr>
-              <a:t>עוצרים לפני אישור השינוי, ובודקים ביחד את ה-Diff שהתקבל: אילו שורות נוספו, אילו השתנו. שני דברים לשים לב אליהם: (א) האם הכלי "קרא" את הקוד הקיים לפני שהוסיף (שמר על מוסכמות שמות קיימות)? (ב) האם הכלי הציע לשנות משהו לא קשור (Scope Creep — "זחילת היקף", הרחבה לא מתוכננת של המשימה)? אם כן — זו הזדמנות להראות איך דוחים חלק מהצעה ומאשרים רק את מה שרלוונטי.</a:t>
-            </a:r>
-            <a:endParaRPr lang="en-US" sz="1300" dirty="0"/>
-          </a:p>
-        </p:txBody>
-      </p:sp>
-      <p:sp>
-        <p:nvSpPr>
-          <p:cNvPr id="11" name="Text 9"/>
+              <a:t>✔ מה עושים בפועל: בשקף הבא נראה שיש לזה גם מחיר מדיד, לא רק "עצה טובה".</a:t>
+            </a:r>
+            <a:endParaRPr lang="en-US" sz="1700" dirty="0"/>
+          </a:p>
+        </p:txBody>
+      </p:sp>
+      <p:sp>
+        <p:nvSpPr>
+          <p:cNvPr id="6" name="Text 4"/>
           <p:cNvSpPr/>
           <p:nvPr/>
         </p:nvSpPr>
@@ -7232,7 +7766,7 @@
         <p:spPr>
           <a:xfrm>
             <a:off x="548640" y="5669280"/>
-            <a:ext cx="11091672" cy="868680"/>
+            <a:ext cx="11091672" cy="621792"/>
           </a:xfrm>
           <a:prstGeom prst="rect">
             <a:avLst/>
@@ -7366,7 +7900,7 @@
                 <a:ea typeface="Arial" pitchFamily="34" charset="-122"/>
                 <a:cs typeface="Arial" pitchFamily="34" charset="-120"/>
               </a:rPr>
-              <a:t>עוברים לתרגול: הקמת סביבה (חלק א׳ — המשימה)</a:t>
+              <a:t>תרגול בזוגות: לתקן הנחיה מעורפלת</a:t>
             </a:r>
             <a:endParaRPr lang="en-US" sz="2800" dirty="0"/>
           </a:p>
@@ -7380,46 +7914,7 @@
         </p:nvSpPr>
         <p:spPr>
           <a:xfrm>
-            <a:off x="548640" y="1024128"/>
-            <a:ext cx="11091672" cy="411480"/>
-          </a:xfrm>
-          <a:prstGeom prst="rect">
-            <a:avLst/>
-          </a:prstGeom>
-          <a:noFill/>
-          <a:ln/>
-        </p:spPr>
-        <p:txBody>
-          <a:bodyPr wrap="square" lIns="0" tIns="0" rIns="0" bIns="0" rtlCol="0" anchor="ctr"/>
-          <a:lstStyle/>
-          <a:p>
-            <a:pPr rtl="1" algn="r" indent="0" marL="0">
-              <a:buNone/>
-            </a:pPr>
-            <a:r>
-              <a:rPr lang="en-US" sz="1700" i="1" dirty="0">
-                <a:solidFill>
-                  <a:srgbClr val="6B7280"/>
-                </a:solidFill>
-                <a:latin typeface="Calibri" pitchFamily="34" charset="0"/>
-                <a:ea typeface="Calibri" pitchFamily="34" charset="-122"/>
-                <a:cs typeface="Calibri" pitchFamily="34" charset="-120"/>
-              </a:rPr>
-              <a:t>השאלה: מה המטרה של 45 הדקות האלה?</a:t>
-            </a:r>
-            <a:endParaRPr lang="en-US" sz="1700" dirty="0"/>
-          </a:p>
-        </p:txBody>
-      </p:sp>
-      <p:sp>
-        <p:nvSpPr>
-          <p:cNvPr id="4" name="Text 2"/>
-          <p:cNvSpPr/>
-          <p:nvPr/>
-        </p:nvSpPr>
-        <p:spPr>
-          <a:xfrm>
-            <a:off x="548640" y="1508760"/>
+            <a:off x="548640" y="1234440"/>
             <a:ext cx="11091672" cy="3931920"/>
           </a:xfrm>
           <a:prstGeom prst="rect">
@@ -7440,6 +7935,24 @@
               <a:buChar char="•"/>
             </a:pPr>
             <a:r>
+              <a:rPr lang="en-US" sz="1900" b="1" dirty="0">
+                <a:solidFill>
+                  <a:srgbClr val="1B1F3B"/>
+                </a:solidFill>
+                <a:latin typeface="Calibri" pitchFamily="34" charset="0"/>
+                <a:ea typeface="Calibri" pitchFamily="34" charset="-122"/>
+                <a:cs typeface="Calibri" pitchFamily="34" charset="-120"/>
+              </a:rPr>
+              <a:t>המשימה (3 דקות בזוגות):</a:t>
+            </a:r>
+            <a:pPr rtl="1" algn="r" marL="228600" indent="-228600">
+              <a:spcAft>
+                <a:spcPts val="1000"/>
+              </a:spcAft>
+              <a:buSzPct val="100000"/>
+              <a:buChar char="•"/>
+            </a:pPr>
+            <a:r>
               <a:rPr lang="en-US" sz="1900" dirty="0">
                 <a:solidFill>
                   <a:srgbClr val="1B1F3B"/>
@@ -7448,63 +7961,21 @@
                 <a:ea typeface="Calibri" pitchFamily="34" charset="-122"/>
                 <a:cs typeface="Calibri" pitchFamily="34" charset="-120"/>
               </a:rPr>
-              <a:t>להקים סביבת עבודה אישית שתלווה אתכם לאורך כל הסמסטר, ולבצע בה פעולה אמיתית ראשונה עם כלי AI</a:t>
+              <a:t> אחד/אחת בזוג כותב/ת בכוונה הנחיה מעורפלת לכלי AI (למשל: "תשפר את הקוד", "תתקן את הבאג", "תוסיף אבטחה"). השני/ה כותב/ת אותה מחדש לפי כלל 1 (הנחיות ברורות וספציפיות) — כמו הדוגמה מהשקף הקודם.</a:t>
             </a:r>
             <a:endParaRPr lang="en-US" sz="1900" dirty="0"/>
           </a:p>
-          <a:p>
-            <a:pPr rtl="1" algn="r" marL="228600" indent="-228600">
-              <a:spcAft>
-                <a:spcPts val="1000"/>
-              </a:spcAft>
-              <a:buSzPct val="100000"/>
-              <a:buChar char="•"/>
-            </a:pPr>
-            <a:r>
-              <a:rPr lang="en-US" sz="1900" dirty="0">
-                <a:solidFill>
-                  <a:srgbClr val="1B1F3B"/>
-                </a:solidFill>
-                <a:latin typeface="Calibri" pitchFamily="34" charset="0"/>
-                <a:ea typeface="Calibri" pitchFamily="34" charset="-122"/>
-                <a:cs typeface="Calibri" pitchFamily="34" charset="-120"/>
-              </a:rPr>
-              <a:t>המשימה: מתקינים VS Code + Git, יוצרים Repository חדש בשם `my-vibe-coding-env` ב-GitHub, משכפלים אותו למחשב (`git clone`), ומפעילים כלי AI חינמי (Copilot Free או שקול)</a:t>
-            </a:r>
-            <a:endParaRPr lang="en-US" sz="1900" dirty="0"/>
-          </a:p>
-          <a:p>
-            <a:pPr rtl="1" algn="r" marL="228600" indent="-228600">
-              <a:spcAft>
-                <a:spcPts val="1000"/>
-              </a:spcAft>
-              <a:buSzPct val="100000"/>
-              <a:buChar char="•"/>
-            </a:pPr>
-            <a:r>
-              <a:rPr lang="en-US" sz="1900" dirty="0">
-                <a:solidFill>
-                  <a:srgbClr val="1B1F3B"/>
-                </a:solidFill>
-                <a:latin typeface="Calibri" pitchFamily="34" charset="0"/>
-                <a:ea typeface="Calibri" pitchFamily="34" charset="-122"/>
-                <a:cs typeface="Calibri" pitchFamily="34" charset="-120"/>
-              </a:rPr>
-              <a:t>אז מבקשים מה-AI ליצור קובץ `hello.py` (או `hello.js`) שמדפיס הודעת פתיחה אישית — זו הפעולה האג'נטית הראשונה שלכם בקורס</a:t>
-            </a:r>
-            <a:endParaRPr lang="en-US" sz="1900" dirty="0"/>
-          </a:p>
-        </p:txBody>
-      </p:sp>
-      <p:sp>
-        <p:nvSpPr>
-          <p:cNvPr id="5" name="Shape 3"/>
-          <p:cNvSpPr/>
-          <p:nvPr/>
-        </p:nvSpPr>
-        <p:spPr>
-          <a:xfrm>
-            <a:off x="548640" y="5577840"/>
+        </p:txBody>
+      </p:sp>
+      <p:sp>
+        <p:nvSpPr>
+          <p:cNvPr id="4" name="Shape 2"/>
+          <p:cNvSpPr/>
+          <p:nvPr/>
+        </p:nvSpPr>
+        <p:spPr>
+          <a:xfrm>
+            <a:off x="548640" y="5303520"/>
             <a:ext cx="11091672" cy="0"/>
           </a:xfrm>
           <a:prstGeom prst="line">
@@ -7521,14 +7992,14 @@
       </p:sp>
       <p:sp>
         <p:nvSpPr>
-          <p:cNvPr id="6" name="Text 4"/>
-          <p:cNvSpPr/>
-          <p:nvPr/>
-        </p:nvSpPr>
-        <p:spPr>
-          <a:xfrm>
-            <a:off x="548640" y="5669280"/>
-            <a:ext cx="11091672" cy="868680"/>
+          <p:cNvPr id="5" name="Text 3"/>
+          <p:cNvSpPr/>
+          <p:nvPr/>
+        </p:nvSpPr>
+        <p:spPr>
+          <a:xfrm>
+            <a:off x="548640" y="5394960"/>
+            <a:ext cx="11091672" cy="621792"/>
           </a:xfrm>
           <a:prstGeom prst="rect">
             <a:avLst/>
@@ -7552,7 +8023,7 @@
                 <a:ea typeface="Arial" pitchFamily="34" charset="-122"/>
                 <a:cs typeface="Arial" pitchFamily="34" charset="-120"/>
               </a:rPr>
-              <a:t>✔ מה עושים בפועל: אם משהו בהתקנה לא עובד — זה בדיוק סוג הבעיה ש-AI טוב בפתרון שלה. מעתיקים את הודעת השגיאה המדויקת ושואלים את כלי ה-AI "מה השגיאה הזו אומרת ואיך פותרים אותה?" — זה תרגול לגיטימי, לא "רמאות".</a:t>
+              <a:t>✔ מה עושים בפועל: אחרי 3 דקות, 2-3 זוגות מקריאים בקול את ההנחיה ה"לפני" וה"אחרי". מטרת התרגיל: להרגיש בעצמכם למה כלי AI "מנחש" כשההנחיה עמומה — לא רק לשמוע את זה כעצה.</a:t>
             </a:r>
             <a:endParaRPr lang="en-US" sz="1700" dirty="0"/>
           </a:p>
@@ -7560,7 +8031,7 @@
       </p:sp>
       <p:sp>
         <p:nvSpPr>
-          <p:cNvPr id="7" name="Text 5"/>
+          <p:cNvPr id="6" name="Text 4"/>
           <p:cNvSpPr/>
           <p:nvPr/>
         </p:nvSpPr>
@@ -7637,86 +8108,24 @@
         </p:nvSpPr>
         <p:spPr>
           <a:xfrm>
-            <a:off x="548640" y="502920"/>
-            <a:ext cx="11091672" cy="365760"/>
-          </a:xfrm>
-          <a:prstGeom prst="rect">
-            <a:avLst/>
-          </a:prstGeom>
-          <a:noFill/>
-          <a:ln/>
-        </p:spPr>
-        <p:txBody>
-          <a:bodyPr wrap="square" lIns="0" tIns="0" rIns="0" bIns="0" rtlCol="0" anchor="ctr"/>
-          <a:lstStyle/>
-          <a:p>
-            <a:pPr rtl="1" algn="ctr" indent="0" marL="0">
+            <a:off x="548640" y="320040"/>
+            <a:ext cx="11091672" cy="685800"/>
+          </a:xfrm>
+          <a:prstGeom prst="rect">
+            <a:avLst/>
+          </a:prstGeom>
+          <a:noFill/>
+          <a:ln/>
+        </p:spPr>
+        <p:txBody>
+          <a:bodyPr wrap="square" lIns="0" tIns="0" rIns="0" bIns="0" rtlCol="0" anchor="ctr"/>
+          <a:lstStyle/>
+          <a:p>
+            <a:pPr rtl="1" algn="r" indent="0" marL="0">
               <a:buNone/>
             </a:pPr>
             <a:r>
-              <a:rPr lang="en-US" sz="1500" i="1" dirty="0">
-                <a:solidFill>
-                  <a:srgbClr val="00A88A"/>
-                </a:solidFill>
-                <a:latin typeface="Calibri" pitchFamily="34" charset="0"/>
-                <a:ea typeface="Calibri" pitchFamily="34" charset="-122"/>
-                <a:cs typeface="Calibri" pitchFamily="34" charset="-120"/>
-              </a:rPr>
-              <a:t>עוברים לתרגול (חלק ב׳)</a:t>
-            </a:r>
-            <a:endParaRPr lang="en-US" sz="1500" dirty="0"/>
-          </a:p>
-        </p:txBody>
-      </p:sp>
-      <p:sp>
-        <p:nvSpPr>
-          <p:cNvPr id="3" name="Shape 1"/>
-          <p:cNvSpPr/>
-          <p:nvPr/>
-        </p:nvSpPr>
-        <p:spPr>
-          <a:xfrm>
-            <a:off x="4718304" y="914400"/>
-            <a:ext cx="2743200" cy="0"/>
-          </a:xfrm>
-          <a:prstGeom prst="line">
-            <a:avLst/>
-          </a:prstGeom>
-          <a:noFill/>
-          <a:ln w="19050">
-            <a:solidFill>
-              <a:srgbClr val="00A88A"/>
-            </a:solidFill>
-            <a:prstDash val="solid"/>
-          </a:ln>
-        </p:spPr>
-      </p:sp>
-      <p:sp>
-        <p:nvSpPr>
-          <p:cNvPr id="4" name="Text 2"/>
-          <p:cNvSpPr/>
-          <p:nvPr/>
-        </p:nvSpPr>
-        <p:spPr>
-          <a:xfrm>
-            <a:off x="548640" y="1051560"/>
-            <a:ext cx="11091672" cy="685800"/>
-          </a:xfrm>
-          <a:prstGeom prst="rect">
-            <a:avLst/>
-          </a:prstGeom>
-          <a:noFill/>
-          <a:ln/>
-        </p:spPr>
-        <p:txBody>
-          <a:bodyPr wrap="square" lIns="0" tIns="0" rIns="0" bIns="0" rtlCol="0" anchor="ctr"/>
-          <a:lstStyle/>
-          <a:p>
-            <a:pPr rtl="1" algn="ctr" indent="0" marL="0">
-              <a:buNone/>
-            </a:pPr>
-            <a:r>
-              <a:rPr lang="en-US" sz="2600" b="1" dirty="0">
+              <a:rPr lang="en-US" sz="2800" b="1" dirty="0">
                 <a:solidFill>
                   <a:srgbClr val="1B1F3B"/>
                 </a:solidFill>
@@ -7724,71 +8133,236 @@
                 <a:ea typeface="Arial" pitchFamily="34" charset="-122"/>
                 <a:cs typeface="Arial" pitchFamily="34" charset="-120"/>
               </a:rPr>
-              <a:t>פרומפט פתיחה לתרגול</a:t>
-            </a:r>
-            <a:endParaRPr lang="en-US" sz="2600" dirty="0"/>
-          </a:p>
-        </p:txBody>
-      </p:sp>
-      <p:sp>
-        <p:nvSpPr>
-          <p:cNvPr id="5" name="Text 3"/>
-          <p:cNvSpPr/>
-          <p:nvPr/>
-        </p:nvSpPr>
-        <p:spPr>
-          <a:xfrm>
-            <a:off x="548640" y="1737360"/>
-            <a:ext cx="11091672" cy="685800"/>
-          </a:xfrm>
-          <a:prstGeom prst="rect">
-            <a:avLst/>
-          </a:prstGeom>
-          <a:noFill/>
-          <a:ln/>
-        </p:spPr>
-        <p:txBody>
-          <a:bodyPr wrap="square" lIns="0" tIns="0" rIns="0" bIns="0" rtlCol="0" anchor="ctr"/>
-          <a:lstStyle/>
-          <a:p>
-            <a:pPr rtl="1" algn="ctr" indent="0" marL="0">
-              <a:buNone/>
-            </a:pPr>
-            <a:r>
-              <a:rPr lang="en-US" sz="1400" i="1" dirty="0">
-                <a:solidFill>
-                  <a:srgbClr val="6B7280"/>
-                </a:solidFill>
-                <a:latin typeface="Calibri" pitchFamily="34" charset="0"/>
-                <a:ea typeface="Calibri" pitchFamily="34" charset="-122"/>
-                <a:cs typeface="Calibri" pitchFamily="34" charset="-120"/>
-              </a:rPr>
-              <a:t>התחילו מכאן, והתאימו את השם שלכם:</a:t>
-            </a:r>
-            <a:endParaRPr lang="en-US" sz="1400" dirty="0"/>
-          </a:p>
-        </p:txBody>
-      </p:sp>
-      <p:sp>
-        <p:nvSpPr>
-          <p:cNvPr id="6" name="Shape 4"/>
-          <p:cNvSpPr/>
-          <p:nvPr/>
-        </p:nvSpPr>
-        <p:spPr>
-          <a:xfrm>
-            <a:off x="548640" y="2606040"/>
-            <a:ext cx="11091672" cy="3429000"/>
-          </a:xfrm>
-          <a:prstGeom prst="roundRect">
-            <a:avLst>
-              <a:gd name="adj" fmla="val 1600"/>
-            </a:avLst>
-          </a:prstGeom>
-          <a:solidFill>
-            <a:srgbClr val="F6F6F8"/>
-          </a:solidFill>
-          <a:ln w="12700">
+              <a:t>המחיר של דילוג על הכללים</a:t>
+            </a:r>
+            <a:endParaRPr lang="en-US" sz="2800" dirty="0"/>
+          </a:p>
+        </p:txBody>
+      </p:sp>
+      <p:sp>
+        <p:nvSpPr>
+          <p:cNvPr id="3" name="Text 1"/>
+          <p:cNvSpPr/>
+          <p:nvPr/>
+        </p:nvSpPr>
+        <p:spPr>
+          <a:xfrm>
+            <a:off x="548640" y="1234440"/>
+            <a:ext cx="11091672" cy="3931920"/>
+          </a:xfrm>
+          <a:prstGeom prst="rect">
+            <a:avLst/>
+          </a:prstGeom>
+          <a:noFill/>
+          <a:ln/>
+        </p:spPr>
+        <p:txBody>
+          <a:bodyPr wrap="square" lIns="0" tIns="0" rIns="0" bIns="0" rtlCol="0" anchor="ctr"/>
+          <a:lstStyle/>
+          <a:p>
+            <a:pPr rtl="1" algn="r" marL="228600" indent="-228600">
+              <a:spcAft>
+                <a:spcPts val="1000"/>
+              </a:spcAft>
+              <a:buSzPct val="100000"/>
+              <a:buChar char="•"/>
+            </a:pPr>
+            <a:r>
+              <a:rPr lang="en-US" sz="1900" dirty="0">
+                <a:solidFill>
+                  <a:srgbClr val="1B1F3B"/>
+                </a:solidFill>
+                <a:latin typeface="Calibri" pitchFamily="34" charset="0"/>
+                <a:ea typeface="Calibri" pitchFamily="34" charset="-122"/>
+                <a:cs typeface="Calibri" pitchFamily="34" charset="-120"/>
+              </a:rPr>
+              <a:t>דו"ח </a:t>
+            </a:r>
+            <a:pPr rtl="1" algn="r" marL="228600" indent="-228600">
+              <a:spcAft>
+                <a:spcPts val="1000"/>
+              </a:spcAft>
+              <a:buSzPct val="100000"/>
+              <a:buChar char="•"/>
+            </a:pPr>
+            <a:r>
+              <a:rPr lang="en-US" sz="1900" b="1" dirty="0">
+                <a:solidFill>
+                  <a:srgbClr val="1B1F3B"/>
+                </a:solidFill>
+                <a:latin typeface="Calibri" pitchFamily="34" charset="0"/>
+                <a:ea typeface="Calibri" pitchFamily="34" charset="-122"/>
+                <a:cs typeface="Calibri" pitchFamily="34" charset="-120"/>
+              </a:rPr>
+              <a:t>DORA</a:t>
+            </a:r>
+            <a:pPr rtl="1" algn="r" marL="228600" indent="-228600">
+              <a:spcAft>
+                <a:spcPts val="1000"/>
+              </a:spcAft>
+              <a:buSzPct val="100000"/>
+              <a:buChar char="•"/>
+            </a:pPr>
+            <a:r>
+              <a:rPr lang="en-US" sz="1900" dirty="0">
+                <a:solidFill>
+                  <a:srgbClr val="1B1F3B"/>
+                </a:solidFill>
+                <a:latin typeface="Calibri" pitchFamily="34" charset="0"/>
+                <a:ea typeface="Calibri" pitchFamily="34" charset="-122"/>
+                <a:cs typeface="Calibri" pitchFamily="34" charset="-120"/>
+              </a:rPr>
+              <a:t> (מחקר שנתי מוביל על תהליכי פיתוח תוכנה, מבית Google — הכרנו בשיעור 1) מצא: אימוץ AI בלי תהליך עבודה מסודר (בדיוק הכללים משני השקפים הקודמים) מוביל ל-</a:t>
+            </a:r>
+            <a:pPr rtl="1" algn="r" marL="228600" indent="-228600">
+              <a:spcAft>
+                <a:spcPts val="1000"/>
+              </a:spcAft>
+              <a:buSzPct val="100000"/>
+              <a:buChar char="•"/>
+            </a:pPr>
+            <a:r>
+              <a:rPr lang="en-US" sz="1900" b="1" dirty="0">
+                <a:solidFill>
+                  <a:srgbClr val="1B1F3B"/>
+                </a:solidFill>
+                <a:latin typeface="Calibri" pitchFamily="34" charset="0"/>
+                <a:ea typeface="Calibri" pitchFamily="34" charset="-122"/>
+                <a:cs typeface="Calibri" pitchFamily="34" charset="-120"/>
+              </a:rPr>
+              <a:t>30-41%</a:t>
+            </a:r>
+            <a:pPr rtl="1" algn="r" marL="228600" indent="-228600">
+              <a:spcAft>
+                <a:spcPts val="1000"/>
+              </a:spcAft>
+              <a:buSzPct val="100000"/>
+              <a:buChar char="•"/>
+            </a:pPr>
+            <a:r>
+              <a:rPr lang="en-US" sz="1900" dirty="0">
+                <a:solidFill>
+                  <a:srgbClr val="1B1F3B"/>
+                </a:solidFill>
+                <a:latin typeface="Calibri" pitchFamily="34" charset="0"/>
+                <a:ea typeface="Calibri" pitchFamily="34" charset="-122"/>
+                <a:cs typeface="Calibri" pitchFamily="34" charset="-120"/>
+              </a:rPr>
+              <a:t> יותר </a:t>
+            </a:r>
+            <a:pPr rtl="1" algn="r" marL="228600" indent="-228600">
+              <a:spcAft>
+                <a:spcPts val="1000"/>
+              </a:spcAft>
+              <a:buSzPct val="100000"/>
+              <a:buChar char="•"/>
+            </a:pPr>
+            <a:r>
+              <a:rPr lang="en-US" sz="1900" b="1" dirty="0">
+                <a:solidFill>
+                  <a:srgbClr val="1B1F3B"/>
+                </a:solidFill>
+                <a:latin typeface="Calibri" pitchFamily="34" charset="0"/>
+                <a:ea typeface="Calibri" pitchFamily="34" charset="-122"/>
+                <a:cs typeface="Calibri" pitchFamily="34" charset="-120"/>
+              </a:rPr>
+              <a:t>חוב טכני</a:t>
+            </a:r>
+            <a:pPr rtl="1" algn="r" marL="228600" indent="-228600">
+              <a:spcAft>
+                <a:spcPts val="1000"/>
+              </a:spcAft>
+              <a:buSzPct val="100000"/>
+              <a:buChar char="•"/>
+            </a:pPr>
+            <a:r>
+              <a:rPr lang="en-US" sz="1900" dirty="0">
+                <a:solidFill>
+                  <a:srgbClr val="1B1F3B"/>
+                </a:solidFill>
+                <a:latin typeface="Calibri" pitchFamily="34" charset="0"/>
+                <a:ea typeface="Calibri" pitchFamily="34" charset="-122"/>
+                <a:cs typeface="Calibri" pitchFamily="34" charset="-120"/>
+              </a:rPr>
+              <a:t> (עבודה "מהירה" עכשיו שדורשת תיקון יקר יותר בהמשך), לעומת עבודה עם תהליך מסודר</a:t>
+            </a:r>
+            <a:endParaRPr lang="en-US" sz="1900" dirty="0"/>
+          </a:p>
+          <a:p>
+            <a:pPr rtl="1" algn="r" marL="228600" indent="-228600">
+              <a:spcAft>
+                <a:spcPts val="1000"/>
+              </a:spcAft>
+              <a:buSzPct val="100000"/>
+              <a:buChar char="•"/>
+            </a:pPr>
+            <a:r>
+              <a:rPr lang="en-US" sz="1900" dirty="0">
+                <a:solidFill>
+                  <a:srgbClr val="1B1F3B"/>
+                </a:solidFill>
+                <a:latin typeface="Calibri" pitchFamily="34" charset="0"/>
+                <a:ea typeface="Calibri" pitchFamily="34" charset="-122"/>
+                <a:cs typeface="Calibri" pitchFamily="34" charset="-120"/>
+              </a:rPr>
+              <a:t>בקשות שילוב קוד (Pull Requests) שנכתבו על ידי AI נושאות </a:t>
+            </a:r>
+            <a:pPr rtl="1" algn="r" marL="228600" indent="-228600">
+              <a:spcAft>
+                <a:spcPts val="1000"/>
+              </a:spcAft>
+              <a:buSzPct val="100000"/>
+              <a:buChar char="•"/>
+            </a:pPr>
+            <a:r>
+              <a:rPr lang="en-US" sz="1900" b="1" dirty="0">
+                <a:solidFill>
+                  <a:srgbClr val="1B1F3B"/>
+                </a:solidFill>
+                <a:latin typeface="Calibri" pitchFamily="34" charset="0"/>
+                <a:ea typeface="Calibri" pitchFamily="34" charset="-122"/>
+                <a:cs typeface="Calibri" pitchFamily="34" charset="-120"/>
+              </a:rPr>
+              <a:t>פי 1.7</a:t>
+            </a:r>
+            <a:pPr rtl="1" algn="r" marL="228600" indent="-228600">
+              <a:spcAft>
+                <a:spcPts val="1000"/>
+              </a:spcAft>
+              <a:buSzPct val="100000"/>
+              <a:buChar char="•"/>
+            </a:pPr>
+            <a:r>
+              <a:rPr lang="en-US" sz="1900" dirty="0">
+                <a:solidFill>
+                  <a:srgbClr val="1B1F3B"/>
+                </a:solidFill>
+                <a:latin typeface="Calibri" pitchFamily="34" charset="0"/>
+                <a:ea typeface="Calibri" pitchFamily="34" charset="-122"/>
+                <a:cs typeface="Calibri" pitchFamily="34" charset="-120"/>
+              </a:rPr>
+              <a:t> יותר בעיות מ-PR שכתב בן אדם</a:t>
+            </a:r>
+            <a:endParaRPr lang="en-US" sz="1900" dirty="0"/>
+          </a:p>
+        </p:txBody>
+      </p:sp>
+      <p:sp>
+        <p:nvSpPr>
+          <p:cNvPr id="4" name="Shape 2"/>
+          <p:cNvSpPr/>
+          <p:nvPr/>
+        </p:nvSpPr>
+        <p:spPr>
+          <a:xfrm>
+            <a:off x="548640" y="5303520"/>
+            <a:ext cx="11091672" cy="0"/>
+          </a:xfrm>
+          <a:prstGeom prst="line">
+            <a:avLst/>
+          </a:prstGeom>
+          <a:noFill/>
+          <a:ln w="9525">
             <a:solidFill>
               <a:srgbClr val="B8B8C8"/>
             </a:solidFill>
@@ -7798,14 +8372,14 @@
       </p:sp>
       <p:sp>
         <p:nvSpPr>
-          <p:cNvPr id="7" name="Text 5"/>
-          <p:cNvSpPr/>
-          <p:nvPr/>
-        </p:nvSpPr>
-        <p:spPr>
-          <a:xfrm>
-            <a:off x="777240" y="2743200"/>
-            <a:ext cx="10634472" cy="3154680"/>
+          <p:cNvPr id="5" name="Text 3"/>
+          <p:cNvSpPr/>
+          <p:nvPr/>
+        </p:nvSpPr>
+        <p:spPr>
+          <a:xfrm>
+            <a:off x="548640" y="5394960"/>
+            <a:ext cx="11091672" cy="621792"/>
           </a:xfrm>
           <a:prstGeom prst="rect">
             <a:avLst/>
@@ -7821,40 +8395,62 @@
               <a:buNone/>
             </a:pPr>
             <a:r>
-              <a:rPr lang="en-US" sz="1300" dirty="0">
-                <a:solidFill>
-                  <a:srgbClr val="1B1F3B"/>
-                </a:solidFill>
-                <a:latin typeface="Courier New" pitchFamily="34" charset="0"/>
-                <a:ea typeface="Courier New" pitchFamily="34" charset="-122"/>
-                <a:cs typeface="Courier New" pitchFamily="34" charset="-120"/>
-              </a:rPr>
-              <a:t>תיצור קובץ hello.py שמדפיס "שלום מ-Vibe Coding, שיעור 2!" ואת השם שלי</a:t>
-            </a:r>
-            <a:endParaRPr lang="en-US" sz="1300" dirty="0"/>
-          </a:p>
+              <a:rPr lang="en-US" sz="1700" dirty="0">
+                <a:solidFill>
+                  <a:srgbClr val="00A88A"/>
+                </a:solidFill>
+                <a:latin typeface="Arial" pitchFamily="34" charset="0"/>
+                <a:ea typeface="Arial" pitchFamily="34" charset="-122"/>
+                <a:cs typeface="Arial" pitchFamily="34" charset="-120"/>
+              </a:rPr>
+              <a:t>✔ מה עושים בפועל: ה-Best Practices משני השקפים הקודמים הם לא בירוקרטיה — הם ההבדל בין "AI שעוזר" ל"AI שיוצר בעיה גדולה יותר ממה שפתר".</a:t>
+            </a:r>
+            <a:endParaRPr lang="en-US" sz="1700" dirty="0"/>
+          </a:p>
+        </p:txBody>
+      </p:sp>
+      <p:sp>
+        <p:nvSpPr>
+          <p:cNvPr id="6" name="Text 4"/>
+          <p:cNvSpPr/>
+          <p:nvPr/>
+        </p:nvSpPr>
+        <p:spPr>
+          <a:xfrm>
+            <a:off x="548640" y="6126480"/>
+            <a:ext cx="11091672" cy="274320"/>
+          </a:xfrm>
+          <a:prstGeom prst="rect">
+            <a:avLst/>
+          </a:prstGeom>
+          <a:noFill/>
+          <a:ln/>
+        </p:spPr>
+        <p:txBody>
+          <a:bodyPr wrap="square" lIns="0" tIns="0" rIns="0" bIns="0" rtlCol="0" anchor="ctr"/>
+          <a:lstStyle/>
           <a:p>
             <a:pPr rtl="1" algn="r" indent="0" marL="0">
               <a:buNone/>
             </a:pPr>
             <a:r>
-              <a:rPr lang="en-US" sz="1300" dirty="0">
-                <a:solidFill>
-                  <a:srgbClr val="1B1F3B"/>
-                </a:solidFill>
-                <a:latin typeface="Courier New" pitchFamily="34" charset="0"/>
-                <a:ea typeface="Courier New" pitchFamily="34" charset="-122"/>
-                <a:cs typeface="Courier New" pitchFamily="34" charset="-120"/>
-              </a:rPr>
-              <a:t>[השם שלכם]. תוסיף גם הדפסה של התאריך הנוכחי.</a:t>
-            </a:r>
-            <a:endParaRPr lang="en-US" sz="1300" dirty="0"/>
-          </a:p>
-        </p:txBody>
-      </p:sp>
-      <p:sp>
-        <p:nvSpPr>
-          <p:cNvPr id="8" name="Text 6"/>
+              <a:rPr lang="en-US" sz="1000" i="1" dirty="0">
+                <a:solidFill>
+                  <a:srgbClr val="6B7280"/>
+                </a:solidFill>
+                <a:latin typeface="Calibri" pitchFamily="34" charset="0"/>
+                <a:ea typeface="Calibri" pitchFamily="34" charset="-122"/>
+                <a:cs typeface="Calibri" pitchFamily="34" charset="-120"/>
+              </a:rPr>
+              <a:t>מקור: DORA — ROI of AI-Assisted Software Development, 2026</a:t>
+            </a:r>
+            <a:endParaRPr lang="en-US" sz="1000" dirty="0"/>
+          </a:p>
+        </p:txBody>
+      </p:sp>
+      <p:sp>
+        <p:nvSpPr>
+          <p:cNvPr id="7" name="Text 5"/>
           <p:cNvSpPr/>
           <p:nvPr/>
         </p:nvSpPr>
@@ -7956,7 +8552,7 @@
                 <a:ea typeface="Arial" pitchFamily="34" charset="-122"/>
                 <a:cs typeface="Arial" pitchFamily="34" charset="-120"/>
               </a:rPr>
-              <a:t>עוברים לתרגול: מתי סיימתם? (חלק ג׳)</a:t>
+              <a:t>מקרה בוחן: כשמדלגים על Review בפועל</a:t>
             </a:r>
             <a:endParaRPr lang="en-US" sz="2800" dirty="0"/>
           </a:p>
@@ -7995,7 +8591,7 @@
                 <a:ea typeface="Calibri" pitchFamily="34" charset="-122"/>
                 <a:cs typeface="Calibri" pitchFamily="34" charset="-120"/>
               </a:rPr>
-              <a:t>השאלה: איך יודעים שהתרגול הושלם בהצלחה?</a:t>
+              <a:t>השאלה: זה נשמע תיאורטי — האם יש דוגמה אמיתית וגדולה למחיר הזה?</a:t>
             </a:r>
             <a:endParaRPr lang="en-US" sz="1700" dirty="0"/>
           </a:p>
@@ -8010,7 +8606,7 @@
         <p:spPr>
           <a:xfrm>
             <a:off x="548640" y="1508760"/>
-            <a:ext cx="11091672" cy="3931920"/>
+            <a:ext cx="11091672" cy="3730752"/>
           </a:xfrm>
           <a:prstGeom prst="rect">
             <a:avLst/>
@@ -8038,7 +8634,43 @@
                 <a:ea typeface="Calibri" pitchFamily="34" charset="-122"/>
                 <a:cs typeface="Calibri" pitchFamily="34" charset="-120"/>
               </a:rPr>
-              <a:t>VS Code מותקן ופתוח על תיקיית הפרויקט</a:t>
+              <a:t>במרץ 2026, אתר המסחר של </a:t>
+            </a:r>
+            <a:pPr rtl="1" algn="r" marL="228600" indent="-228600">
+              <a:spcAft>
+                <a:spcPts val="1000"/>
+              </a:spcAft>
+              <a:buSzPct val="100000"/>
+              <a:buChar char="•"/>
+            </a:pPr>
+            <a:r>
+              <a:rPr lang="en-US" sz="1900" b="1" dirty="0">
+                <a:solidFill>
+                  <a:srgbClr val="1B1F3B"/>
+                </a:solidFill>
+                <a:latin typeface="Calibri" pitchFamily="34" charset="0"/>
+                <a:ea typeface="Calibri" pitchFamily="34" charset="-122"/>
+                <a:cs typeface="Calibri" pitchFamily="34" charset="-120"/>
+              </a:rPr>
+              <a:t>Amazon</a:t>
+            </a:r>
+            <a:pPr rtl="1" algn="r" marL="228600" indent="-228600">
+              <a:spcAft>
+                <a:spcPts val="1000"/>
+              </a:spcAft>
+              <a:buSzPct val="100000"/>
+              <a:buChar char="•"/>
+            </a:pPr>
+            <a:r>
+              <a:rPr lang="en-US" sz="1900" dirty="0">
+                <a:solidFill>
+                  <a:srgbClr val="1B1F3B"/>
+                </a:solidFill>
+                <a:latin typeface="Calibri" pitchFamily="34" charset="0"/>
+                <a:ea typeface="Calibri" pitchFamily="34" charset="-122"/>
+                <a:cs typeface="Calibri" pitchFamily="34" charset="-120"/>
+              </a:rPr>
+              <a:t> עבר שני תקלות חמורות תוך שלושה ימים: ב-2 במרץ קריסה של כ-6 שעות (כ-1.6 מיליון שגיאות אתר, כ-120,000 הזמנות אבודות), וב-5 במרץ קריסה חמורה עוד יותר — ירידה של 99% בהזמנות בצפון אמריקה ביחס לקצב הרגיל, כ-6.3 מיליון הזמנות אבודות</a:t>
             </a:r>
             <a:endParaRPr lang="en-US" sz="1900" dirty="0"/>
           </a:p>
@@ -8059,7 +8691,43 @@
                 <a:ea typeface="Calibri" pitchFamily="34" charset="-122"/>
                 <a:cs typeface="Calibri" pitchFamily="34" charset="-120"/>
               </a:rPr>
-              <a:t>Git מותקן, וה-Repository `my-vibe-coding-env` קיים ב-GitHub</a:t>
+              <a:t>לפי דיווחי Amazon עצמה, הגורם המרכזי לתקלה השנייה היה </a:t>
+            </a:r>
+            <a:pPr rtl="1" algn="r" marL="228600" indent="-228600">
+              <a:spcAft>
+                <a:spcPts val="1000"/>
+              </a:spcAft>
+              <a:buSzPct val="100000"/>
+              <a:buChar char="•"/>
+            </a:pPr>
+            <a:r>
+              <a:rPr lang="en-US" sz="1900" b="1" dirty="0">
+                <a:solidFill>
+                  <a:srgbClr val="1B1F3B"/>
+                </a:solidFill>
+                <a:latin typeface="Calibri" pitchFamily="34" charset="0"/>
+                <a:ea typeface="Calibri" pitchFamily="34" charset="-122"/>
+                <a:cs typeface="Calibri" pitchFamily="34" charset="-120"/>
+              </a:rPr>
+              <a:t>שינוי קוד שעבר לייצור בלי תהליך אישור ותיעוד פורמלי</a:t>
+            </a:r>
+            <a:pPr rtl="1" algn="r" marL="228600" indent="-228600">
+              <a:spcAft>
+                <a:spcPts val="1000"/>
+              </a:spcAft>
+              <a:buSzPct val="100000"/>
+              <a:buChar char="•"/>
+            </a:pPr>
+            <a:r>
+              <a:rPr lang="en-US" sz="1900" dirty="0">
+                <a:solidFill>
+                  <a:srgbClr val="1B1F3B"/>
+                </a:solidFill>
+                <a:latin typeface="Calibri" pitchFamily="34" charset="0"/>
+                <a:ea typeface="Calibri" pitchFamily="34" charset="-122"/>
+                <a:cs typeface="Calibri" pitchFamily="34" charset="-120"/>
+              </a:rPr>
+              <a:t> — בדיוק סוג הדילוג-על-Review שדיברנו עליו. Amazon הבהירה שרק תקלה אחת בכלל נגעה לכלי AI, ושם הסיבה הייתה תקלה אנושית בתהליך</a:t>
             </a:r>
             <a:endParaRPr lang="en-US" sz="1900" dirty="0"/>
           </a:p>
@@ -8072,6 +8740,24 @@
               <a:buChar char="•"/>
             </a:pPr>
             <a:r>
+              <a:rPr lang="en-US" sz="1900" b="1" dirty="0">
+                <a:solidFill>
+                  <a:srgbClr val="1B1F3B"/>
+                </a:solidFill>
+                <a:latin typeface="Calibri" pitchFamily="34" charset="0"/>
+                <a:ea typeface="Calibri" pitchFamily="34" charset="-122"/>
+                <a:cs typeface="Calibri" pitchFamily="34" charset="-120"/>
+              </a:rPr>
+              <a:t>התגובה של Amazon:</a:t>
+            </a:r>
+            <a:pPr rtl="1" algn="r" marL="228600" indent="-228600">
+              <a:spcAft>
+                <a:spcPts val="1000"/>
+              </a:spcAft>
+              <a:buSzPct val="100000"/>
+              <a:buChar char="•"/>
+            </a:pPr>
+            <a:r>
               <a:rPr lang="en-US" sz="1900" dirty="0">
                 <a:solidFill>
                   <a:srgbClr val="1B1F3B"/>
@@ -8080,88 +8766,10 @@
                 <a:ea typeface="Calibri" pitchFamily="34" charset="-122"/>
                 <a:cs typeface="Calibri" pitchFamily="34" charset="-120"/>
               </a:rPr>
-              <a:t>כלי AI חינמי מותקן ופעיל (Copilot Free או שקול)</a:t>
+              <a:t> "איפוס בטיחות קוד" בן 90 יום על כ-335 מערכות קריטיות — כל שינוי דורש עכשיו אישור שני אנשים, תיעוד פורמלי, ובדיקות אוטומטיות מחמירות יותר; שינויי קוד שנוצרו בעזרת AI דורשים ספציפית גם חתימה של מהנדס בכיר</a:t>
             </a:r>
             <a:endParaRPr lang="en-US" sz="1900" dirty="0"/>
           </a:p>
-          <a:p>
-            <a:pPr rtl="1" algn="r" marL="228600" indent="-228600">
-              <a:spcAft>
-                <a:spcPts val="1000"/>
-              </a:spcAft>
-              <a:buSzPct val="100000"/>
-              <a:buChar char="•"/>
-            </a:pPr>
-            <a:r>
-              <a:rPr lang="en-US" sz="1900" dirty="0">
-                <a:solidFill>
-                  <a:srgbClr val="1B1F3B"/>
-                </a:solidFill>
-                <a:latin typeface="Calibri" pitchFamily="34" charset="0"/>
-                <a:ea typeface="Calibri" pitchFamily="34" charset="-122"/>
-                <a:cs typeface="Calibri" pitchFamily="34" charset="-120"/>
-              </a:rPr>
-              <a:t>קובץ `hello.py`/`hello.js` נוצר בעזרת AI, נבדק, ורץ בהצלחה</a:t>
-            </a:r>
-            <a:endParaRPr lang="en-US" sz="1900" dirty="0"/>
-          </a:p>
-          <a:p>
-            <a:pPr rtl="1" algn="r" marL="228600" indent="-228600">
-              <a:spcAft>
-                <a:spcPts val="1000"/>
-              </a:spcAft>
-              <a:buSzPct val="100000"/>
-              <a:buChar char="•"/>
-            </a:pPr>
-            <a:r>
-              <a:rPr lang="en-US" sz="1900" dirty="0">
-                <a:solidFill>
-                  <a:srgbClr val="1B1F3B"/>
-                </a:solidFill>
-                <a:latin typeface="Calibri" pitchFamily="34" charset="0"/>
-                <a:ea typeface="Calibri" pitchFamily="34" charset="-122"/>
-                <a:cs typeface="Calibri" pitchFamily="34" charset="-120"/>
-              </a:rPr>
-              <a:t>בוצע Commit אחד לפחות, ונדחף (</a:t>
-            </a:r>
-            <a:pPr rtl="1" algn="r" marL="228600" indent="-228600">
-              <a:spcAft>
-                <a:spcPts val="1000"/>
-              </a:spcAft>
-              <a:buSzPct val="100000"/>
-              <a:buChar char="•"/>
-            </a:pPr>
-            <a:r>
-              <a:rPr lang="en-US" sz="1900" b="1" dirty="0">
-                <a:solidFill>
-                  <a:srgbClr val="1B1F3B"/>
-                </a:solidFill>
-                <a:latin typeface="Calibri" pitchFamily="34" charset="0"/>
-                <a:ea typeface="Calibri" pitchFamily="34" charset="-122"/>
-                <a:cs typeface="Calibri" pitchFamily="34" charset="-120"/>
-              </a:rPr>
-              <a:t>Push</a:t>
-            </a:r>
-            <a:pPr rtl="1" algn="r" marL="228600" indent="-228600">
-              <a:spcAft>
-                <a:spcPts val="1000"/>
-              </a:spcAft>
-              <a:buSzPct val="100000"/>
-              <a:buChar char="•"/>
-            </a:pPr>
-            <a:r>
-              <a:rPr lang="en-US" sz="1900" dirty="0">
-                <a:solidFill>
-                  <a:srgbClr val="1B1F3B"/>
-                </a:solidFill>
-                <a:latin typeface="Calibri" pitchFamily="34" charset="0"/>
-                <a:ea typeface="Calibri" pitchFamily="34" charset="-122"/>
-                <a:cs typeface="Calibri" pitchFamily="34" charset="-120"/>
-              </a:rPr>
-              <a:t> — העלאה מהמחשב המקומי לשרת המרוחק) ל-GitHub בהצלחה</a:t>
-            </a:r>
-            <a:endParaRPr lang="en-US" sz="1900" dirty="0"/>
-          </a:p>
         </p:txBody>
       </p:sp>
       <p:sp>
@@ -8172,7 +8780,7 @@
         </p:nvSpPr>
         <p:spPr>
           <a:xfrm>
-            <a:off x="548640" y="5577840"/>
+            <a:off x="548640" y="5376672"/>
             <a:ext cx="11091672" cy="0"/>
           </a:xfrm>
           <a:prstGeom prst="line">
@@ -8195,8 +8803,8 @@
         </p:nvSpPr>
         <p:spPr>
           <a:xfrm>
-            <a:off x="548640" y="5669280"/>
-            <a:ext cx="11091672" cy="868680"/>
+            <a:off x="548640" y="5468112"/>
+            <a:ext cx="11091672" cy="621792"/>
           </a:xfrm>
           <a:prstGeom prst="rect">
             <a:avLst/>
@@ -8220,7 +8828,7 @@
                 <a:ea typeface="Arial" pitchFamily="34" charset="-122"/>
                 <a:cs typeface="Arial" pitchFamily="34" charset="-120"/>
               </a:rPr>
-              <a:t>✔ מה עושים בפועל: הבעיה הכי נפוצה בתרגול הזה היא אימות/הרשאות מול GitHub (HTTPS Token או SSH key — שתי שיטות שונות להוכיח שאתם באמת אתם). אם נתקעתם כאן — זה בדיוק המקום לבקש עזרה מהמרצה או מ-AI, זה לא קשור ליכולת התכנות שלכם.</a:t>
+              <a:t>✔ מה עושים בפועל: גם ענקית כמו Amazon נדרשה לחזק בדיוק את הכללים שלמדתם היום — לא כי AI "רע", אלא כי דילוג על Review הוא הסיכון האמיתי, עם או בלי AI.</a:t>
             </a:r>
             <a:endParaRPr lang="en-US" sz="1700" dirty="0"/>
           </a:p>
@@ -8229,6 +8837,45 @@
       <p:sp>
         <p:nvSpPr>
           <p:cNvPr id="7" name="Text 5"/>
+          <p:cNvSpPr/>
+          <p:nvPr/>
+        </p:nvSpPr>
+        <p:spPr>
+          <a:xfrm>
+            <a:off x="548640" y="6199632"/>
+            <a:ext cx="11091672" cy="274320"/>
+          </a:xfrm>
+          <a:prstGeom prst="rect">
+            <a:avLst/>
+          </a:prstGeom>
+          <a:noFill/>
+          <a:ln/>
+        </p:spPr>
+        <p:txBody>
+          <a:bodyPr wrap="square" lIns="0" tIns="0" rIns="0" bIns="0" rtlCol="0" anchor="ctr"/>
+          <a:lstStyle/>
+          <a:p>
+            <a:pPr rtl="1" algn="r" indent="0" marL="0">
+              <a:buNone/>
+            </a:pPr>
+            <a:r>
+              <a:rPr lang="en-US" sz="1000" i="1" dirty="0">
+                <a:solidFill>
+                  <a:srgbClr val="6B7280"/>
+                </a:solidFill>
+                <a:latin typeface="Calibri" pitchFamily="34" charset="0"/>
+                <a:ea typeface="Calibri" pitchFamily="34" charset="-122"/>
+                <a:cs typeface="Calibri" pitchFamily="34" charset="-120"/>
+              </a:rPr>
+              <a:t>מקור: Yahoo Tech, Digital Trends — מרץ 2026</a:t>
+            </a:r>
+            <a:endParaRPr lang="en-US" sz="1000" dirty="0"/>
+          </a:p>
+        </p:txBody>
+      </p:sp>
+      <p:sp>
+        <p:nvSpPr>
+          <p:cNvPr id="8" name="Text 6"/>
           <p:cNvSpPr/>
           <p:nvPr/>
         </p:nvSpPr>
@@ -8330,7 +8977,7 @@
                 <a:ea typeface="Arial" pitchFamily="34" charset="-122"/>
                 <a:cs typeface="Arial" pitchFamily="34" charset="-120"/>
               </a:rPr>
-              <a:t>סיכום</a:t>
+              <a:t>הדגמה חיה (חלק א׳): Autocomplete מול Agentic</a:t>
             </a:r>
             <a:endParaRPr lang="en-US" sz="2800" dirty="0"/>
           </a:p>
@@ -8344,22 +8991,22 @@
         </p:nvSpPr>
         <p:spPr>
           <a:xfrm>
-            <a:off x="548640" y="1371600"/>
-            <a:ext cx="11091672" cy="2011680"/>
-          </a:xfrm>
-          <a:prstGeom prst="rect">
-            <a:avLst/>
-          </a:prstGeom>
-          <a:noFill/>
-          <a:ln/>
-        </p:spPr>
-        <p:txBody>
-          <a:bodyPr wrap="square" lIns="0" tIns="0" rIns="0" bIns="0" rtlCol="0" anchor="ctr"/>
-          <a:lstStyle/>
-          <a:p>
-            <a:pPr rtl="1" algn="r" marL="228600" indent="-228600">
-              <a:spcAft>
-                <a:spcPts val="1200"/>
+            <a:off x="548640" y="1234440"/>
+            <a:ext cx="11091672" cy="3931920"/>
+          </a:xfrm>
+          <a:prstGeom prst="rect">
+            <a:avLst/>
+          </a:prstGeom>
+          <a:noFill/>
+          <a:ln/>
+        </p:spPr>
+        <p:txBody>
+          <a:bodyPr wrap="square" lIns="0" tIns="0" rIns="0" bIns="0" rtlCol="0" anchor="ctr"/>
+          <a:lstStyle/>
+          <a:p>
+            <a:pPr rtl="1" algn="r" marL="228600" indent="-228600">
+              <a:spcAft>
+                <a:spcPts val="1000"/>
               </a:spcAft>
               <a:buSzPct val="100000"/>
               <a:buChar char="•"/>
@@ -8373,14 +9020,32 @@
                 <a:ea typeface="Calibri" pitchFamily="34" charset="-122"/>
                 <a:cs typeface="Calibri" pitchFamily="34" charset="-120"/>
               </a:rPr>
-              <a:t>VS Code + Git + GitHub = השולחן שעליו עובדים לאורך כל הקורס</a:t>
+              <a:t>20-25 דקות. פותחים session אמיתי מול קוד קיים — פרויקט ה-Todo App שבנינו יחד בשיעור 1</a:t>
             </a:r>
             <a:endParaRPr lang="en-US" sz="1900" dirty="0"/>
           </a:p>
           <a:p>
             <a:pPr rtl="1" algn="r" marL="228600" indent="-228600">
               <a:spcAft>
-                <a:spcPts val="1200"/>
+                <a:spcPts val="1000"/>
+              </a:spcAft>
+              <a:buSzPct val="100000"/>
+              <a:buChar char="•"/>
+            </a:pPr>
+            <a:r>
+              <a:rPr lang="en-US" sz="1900" b="1" dirty="0">
+                <a:solidFill>
+                  <a:srgbClr val="1B1F3B"/>
+                </a:solidFill>
+                <a:latin typeface="Calibri" pitchFamily="34" charset="0"/>
+                <a:ea typeface="Calibri" pitchFamily="34" charset="-122"/>
+                <a:cs typeface="Calibri" pitchFamily="34" charset="-120"/>
+              </a:rPr>
+              <a:t>שלב 1 — Autocomplete (לא אג'נטי):</a:t>
+            </a:r>
+            <a:pPr rtl="1" algn="r" marL="228600" indent="-228600">
+              <a:spcAft>
+                <a:spcPts val="1000"/>
               </a:spcAft>
               <a:buSzPct val="100000"/>
               <a:buChar char="•"/>
@@ -8394,14 +9059,32 @@
                 <a:ea typeface="Calibri" pitchFamily="34" charset="-122"/>
                 <a:cs typeface="Calibri" pitchFamily="34" charset="-120"/>
               </a:rPr>
-              <a:t>Agentic ≠ Autocomplete — זה שותף לביצוע משימה, לא רק עוזר הקלדה (וזוכרים: תמיד בודקים Diff לפני אישור)</a:t>
+              <a:t> המרצה מקליד בעצמו בתוך `index.html`, למשל תוך כדי הוספת פונקציה חדשה, ונותן לכלי להשלים שורה אחת בלבד. הדגש: "זה עוזר, אבל אני עדיין מחליט כל דבר."</a:t>
             </a:r>
             <a:endParaRPr lang="en-US" sz="1900" dirty="0"/>
           </a:p>
           <a:p>
             <a:pPr rtl="1" algn="r" marL="228600" indent="-228600">
               <a:spcAft>
-                <a:spcPts val="1200"/>
+                <a:spcPts val="1000"/>
+              </a:spcAft>
+              <a:buSzPct val="100000"/>
+              <a:buChar char="•"/>
+            </a:pPr>
+            <a:r>
+              <a:rPr lang="en-US" sz="1900" b="1" dirty="0">
+                <a:solidFill>
+                  <a:srgbClr val="1B1F3B"/>
+                </a:solidFill>
+                <a:latin typeface="Calibri" pitchFamily="34" charset="0"/>
+                <a:ea typeface="Calibri" pitchFamily="34" charset="-122"/>
+                <a:cs typeface="Calibri" pitchFamily="34" charset="-120"/>
+              </a:rPr>
+              <a:t>שלב 2 — שימוש אג'נטי אמיתי:</a:t>
+            </a:r>
+            <a:pPr rtl="1" algn="r" marL="228600" indent="-228600">
+              <a:spcAft>
+                <a:spcPts val="1000"/>
               </a:spcAft>
               <a:buSzPct val="100000"/>
               <a:buChar char="•"/>
@@ -8415,7 +9098,7 @@
                 <a:ea typeface="Calibri" pitchFamily="34" charset="-122"/>
                 <a:cs typeface="Calibri" pitchFamily="34" charset="-120"/>
               </a:rPr>
-              <a:t>יש נקודת כניסה חינמית לכל הכלים שלמדנו היום — אין תירוץ לא להתחיל</a:t>
+              <a:t> פותחים session אג'נטי מלא (Claude Code / Cursor Agent Mode) על אותה תיקייה, ומקלידים את הפרומפט שבשקף הבא</a:t>
             </a:r>
             <a:endParaRPr lang="en-US" sz="1900" dirty="0"/>
           </a:p>
@@ -8429,7 +9112,7 @@
         </p:nvSpPr>
         <p:spPr>
           <a:xfrm>
-            <a:off x="548640" y="3657600"/>
+            <a:off x="548640" y="5303520"/>
             <a:ext cx="11091672" cy="0"/>
           </a:xfrm>
           <a:prstGeom prst="line">
@@ -8452,8 +9135,8 @@
         </p:nvSpPr>
         <p:spPr>
           <a:xfrm>
-            <a:off x="548640" y="3840480"/>
-            <a:ext cx="11091672" cy="548640"/>
+            <a:off x="548640" y="5394960"/>
+            <a:ext cx="11091672" cy="621792"/>
           </a:xfrm>
           <a:prstGeom prst="rect">
             <a:avLst/>
@@ -8469,29 +9152,15 @@
               <a:buNone/>
             </a:pPr>
             <a:r>
-              <a:rPr lang="en-US" sz="1700" b="1" dirty="0">
-                <a:solidFill>
-                  <a:srgbClr val="1B1F3B"/>
+              <a:rPr lang="en-US" sz="1700" dirty="0">
+                <a:solidFill>
+                  <a:srgbClr val="00A88A"/>
                 </a:solidFill>
                 <a:latin typeface="Arial" pitchFamily="34" charset="0"/>
                 <a:ea typeface="Arial" pitchFamily="34" charset="-122"/>
                 <a:cs typeface="Arial" pitchFamily="34" charset="-120"/>
               </a:rPr>
-              <a:t>שבוע הבא: </a:t>
-            </a:r>
-            <a:pPr rtl="1" algn="r" indent="0" marL="0">
-              <a:buNone/>
-            </a:pPr>
-            <a:r>
-              <a:rPr lang="en-US" sz="1700" dirty="0">
-                <a:solidFill>
-                  <a:srgbClr val="1B1F3B"/>
-                </a:solidFill>
-                <a:latin typeface="Arial" pitchFamily="34" charset="0"/>
-                <a:ea typeface="Arial" pitchFamily="34" charset="-122"/>
-                <a:cs typeface="Arial" pitchFamily="34" charset="-120"/>
-              </a:rPr>
-              <a:t>Context Engineering — איך "מזינים" לכלי את מה שהוא צריך לדעת על הפרויקט שלכם</a:t>
+              <a:t>✔ מה עושים בפועל: הניגוד בין שני השלבים הוא הנקודה הפדגוגית המרכזית — לתת לכיתה לראות בעיניים את ההבדל, לא רק לשמוע עליו.</a:t>
             </a:r>
             <a:endParaRPr lang="en-US" sz="1700" dirty="0"/>
           </a:p>
@@ -8500,45 +9169,6 @@
       <p:sp>
         <p:nvSpPr>
           <p:cNvPr id="6" name="Text 4"/>
-          <p:cNvSpPr/>
-          <p:nvPr/>
-        </p:nvSpPr>
-        <p:spPr>
-          <a:xfrm>
-            <a:off x="548640" y="4480560"/>
-            <a:ext cx="11091672" cy="457200"/>
-          </a:xfrm>
-          <a:prstGeom prst="rect">
-            <a:avLst/>
-          </a:prstGeom>
-          <a:noFill/>
-          <a:ln/>
-        </p:spPr>
-        <p:txBody>
-          <a:bodyPr wrap="square" lIns="0" tIns="0" rIns="0" bIns="0" rtlCol="0" anchor="ctr"/>
-          <a:lstStyle/>
-          <a:p>
-            <a:pPr rtl="1" algn="r" indent="0" marL="0">
-              <a:buNone/>
-            </a:pPr>
-            <a:r>
-              <a:rPr lang="en-US" sz="1300" i="1" dirty="0">
-                <a:solidFill>
-                  <a:srgbClr val="6B7280"/>
-                </a:solidFill>
-                <a:latin typeface="Calibri" pitchFamily="34" charset="0"/>
-                <a:ea typeface="Calibri" pitchFamily="34" charset="-122"/>
-                <a:cs typeface="Calibri" pitchFamily="34" charset="-120"/>
-              </a:rPr>
-              <a:t>בהמשך הקורס: עבודה עם קוד קיים (שבוע 4) · Agents (שבוע 5) · תכנון לפני קוד (שבוע 6) · עד פריסה מלאה בענן ואבטחה (שבועות 11-12)</a:t>
-            </a:r>
-            <a:endParaRPr lang="en-US" sz="1300" dirty="0"/>
-          </a:p>
-        </p:txBody>
-      </p:sp>
-      <p:sp>
-        <p:nvSpPr>
-          <p:cNvPr id="7" name="Text 5"/>
           <p:cNvSpPr/>
           <p:nvPr/>
         </p:nvSpPr>
@@ -8615,7 +9245,69 @@
         </p:nvSpPr>
         <p:spPr>
           <a:xfrm>
-            <a:off x="548640" y="320040"/>
+            <a:off x="548640" y="502920"/>
+            <a:ext cx="11091672" cy="365760"/>
+          </a:xfrm>
+          <a:prstGeom prst="rect">
+            <a:avLst/>
+          </a:prstGeom>
+          <a:noFill/>
+          <a:ln/>
+        </p:spPr>
+        <p:txBody>
+          <a:bodyPr wrap="square" lIns="0" tIns="0" rIns="0" bIns="0" rtlCol="0" anchor="ctr"/>
+          <a:lstStyle/>
+          <a:p>
+            <a:pPr rtl="1" algn="ctr" indent="0" marL="0">
+              <a:buNone/>
+            </a:pPr>
+            <a:r>
+              <a:rPr lang="en-US" sz="1500" i="1" dirty="0">
+                <a:solidFill>
+                  <a:srgbClr val="00A88A"/>
+                </a:solidFill>
+                <a:latin typeface="Calibri" pitchFamily="34" charset="0"/>
+                <a:ea typeface="Calibri" pitchFamily="34" charset="-122"/>
+                <a:cs typeface="Calibri" pitchFamily="34" charset="-120"/>
+              </a:rPr>
+              <a:t>הדגמה חיה (חלק ב׳)</a:t>
+            </a:r>
+            <a:endParaRPr lang="en-US" sz="1500" dirty="0"/>
+          </a:p>
+        </p:txBody>
+      </p:sp>
+      <p:sp>
+        <p:nvSpPr>
+          <p:cNvPr id="3" name="Shape 1"/>
+          <p:cNvSpPr/>
+          <p:nvPr/>
+        </p:nvSpPr>
+        <p:spPr>
+          <a:xfrm>
+            <a:off x="4718304" y="914400"/>
+            <a:ext cx="2743200" cy="0"/>
+          </a:xfrm>
+          <a:prstGeom prst="line">
+            <a:avLst/>
+          </a:prstGeom>
+          <a:noFill/>
+          <a:ln w="19050">
+            <a:solidFill>
+              <a:srgbClr val="00A88A"/>
+            </a:solidFill>
+            <a:prstDash val="solid"/>
+          </a:ln>
+        </p:spPr>
+      </p:sp>
+      <p:sp>
+        <p:nvSpPr>
+          <p:cNvPr id="4" name="Text 2"/>
+          <p:cNvSpPr/>
+          <p:nvPr/>
+        </p:nvSpPr>
+        <p:spPr>
+          <a:xfrm>
+            <a:off x="548640" y="1051560"/>
             <a:ext cx="11091672" cy="685800"/>
           </a:xfrm>
           <a:prstGeom prst="rect">
@@ -8628,11 +9320,11 @@
           <a:bodyPr wrap="square" lIns="0" tIns="0" rIns="0" bIns="0" rtlCol="0" anchor="ctr"/>
           <a:lstStyle/>
           <a:p>
-            <a:pPr rtl="1" algn="r" indent="0" marL="0">
+            <a:pPr rtl="1" algn="ctr" indent="0" marL="0">
               <a:buNone/>
             </a:pPr>
             <a:r>
-              <a:rPr lang="en-US" sz="2800" b="1" dirty="0">
+              <a:rPr lang="en-US" sz="2600" b="1" dirty="0">
                 <a:solidFill>
                   <a:srgbClr val="1B1F3B"/>
                 </a:solidFill>
@@ -8640,22 +9332,88 @@
                 <a:ea typeface="Arial" pitchFamily="34" charset="-122"/>
                 <a:cs typeface="Arial" pitchFamily="34" charset="-120"/>
               </a:rPr>
-              <a:t>מקורות</a:t>
-            </a:r>
-            <a:endParaRPr lang="en-US" sz="2800" dirty="0"/>
-          </a:p>
-        </p:txBody>
-      </p:sp>
-      <p:sp>
-        <p:nvSpPr>
-          <p:cNvPr id="3" name="Text 1"/>
-          <p:cNvSpPr/>
-          <p:nvPr/>
-        </p:nvSpPr>
-        <p:spPr>
-          <a:xfrm>
-            <a:off x="548640" y="1463040"/>
-            <a:ext cx="11091672" cy="1280160"/>
+              <a:t>פרומפט אג'נטי מלא</a:t>
+            </a:r>
+            <a:endParaRPr lang="en-US" sz="2600" dirty="0"/>
+          </a:p>
+        </p:txBody>
+      </p:sp>
+      <p:sp>
+        <p:nvSpPr>
+          <p:cNvPr id="5" name="Text 3"/>
+          <p:cNvSpPr/>
+          <p:nvPr/>
+        </p:nvSpPr>
+        <p:spPr>
+          <a:xfrm>
+            <a:off x="548640" y="1737360"/>
+            <a:ext cx="11091672" cy="685800"/>
+          </a:xfrm>
+          <a:prstGeom prst="rect">
+            <a:avLst/>
+          </a:prstGeom>
+          <a:noFill/>
+          <a:ln/>
+        </p:spPr>
+        <p:txBody>
+          <a:bodyPr wrap="square" lIns="0" tIns="0" rIns="0" bIns="0" rtlCol="0" anchor="ctr"/>
+          <a:lstStyle/>
+          <a:p>
+            <a:pPr rtl="1" algn="ctr" indent="0" marL="0">
+              <a:buNone/>
+            </a:pPr>
+            <a:r>
+              <a:rPr lang="en-US" sz="1400" i="1" dirty="0">
+                <a:solidFill>
+                  <a:srgbClr val="6B7280"/>
+                </a:solidFill>
+                <a:latin typeface="Calibri" pitchFamily="34" charset="0"/>
+                <a:ea typeface="Calibri" pitchFamily="34" charset="-122"/>
+                <a:cs typeface="Calibri" pitchFamily="34" charset="-120"/>
+              </a:rPr>
+              <a:t>אחרי הדגמת Autocomplete בשלב 1, מקלידים את זה מול הכיתה:</a:t>
+            </a:r>
+            <a:endParaRPr lang="en-US" sz="1400" dirty="0"/>
+          </a:p>
+        </p:txBody>
+      </p:sp>
+      <p:sp>
+        <p:nvSpPr>
+          <p:cNvPr id="6" name="Shape 4"/>
+          <p:cNvSpPr/>
+          <p:nvPr/>
+        </p:nvSpPr>
+        <p:spPr>
+          <a:xfrm>
+            <a:off x="548640" y="2606040"/>
+            <a:ext cx="11091672" cy="1600200"/>
+          </a:xfrm>
+          <a:prstGeom prst="roundRect">
+            <a:avLst>
+              <a:gd name="adj" fmla="val 3429"/>
+            </a:avLst>
+          </a:prstGeom>
+          <a:solidFill>
+            <a:srgbClr val="F6F6F8"/>
+          </a:solidFill>
+          <a:ln w="12700">
+            <a:solidFill>
+              <a:srgbClr val="B8B8C8"/>
+            </a:solidFill>
+            <a:prstDash val="solid"/>
+          </a:ln>
+        </p:spPr>
+      </p:sp>
+      <p:sp>
+        <p:nvSpPr>
+          <p:cNvPr id="7" name="Text 5"/>
+          <p:cNvSpPr/>
+          <p:nvPr/>
+        </p:nvSpPr>
+        <p:spPr>
+          <a:xfrm>
+            <a:off x="777240" y="2743200"/>
+            <a:ext cx="10634472" cy="1325880"/>
           </a:xfrm>
           <a:prstGeom prst="rect">
             <a:avLst/>
@@ -8671,62 +9429,162 @@
               <a:buNone/>
             </a:pPr>
             <a:r>
-              <a:rPr lang="en-US" sz="1500" dirty="0">
-                <a:solidFill>
-                  <a:srgbClr val="1B1F3B"/>
-                </a:solidFill>
-                <a:latin typeface="Calibri" pitchFamily="34" charset="0"/>
-                <a:ea typeface="Calibri" pitchFamily="34" charset="-122"/>
-                <a:cs typeface="Calibri" pitchFamily="34" charset="-120"/>
-              </a:rPr>
-              <a:t>Kinsta &amp; Skillademia — GitHub Statistics 2026 · DigitalApplied &amp; MorphLLM — Benchmark Guides 2026 · Stack Overflow Developer Survey 2025 · index.dev 2026 · DORA — ROI of AI-Assisted Software Development, 2026</a:t>
-            </a:r>
-            <a:endParaRPr lang="en-US" sz="1500" dirty="0"/>
-          </a:p>
-        </p:txBody>
-      </p:sp>
-      <p:sp>
-        <p:nvSpPr>
-          <p:cNvPr id="4" name="Text 2"/>
-          <p:cNvSpPr/>
-          <p:nvPr/>
-        </p:nvSpPr>
-        <p:spPr>
-          <a:xfrm>
-            <a:off x="548640" y="2743200"/>
-            <a:ext cx="11091672" cy="365760"/>
-          </a:xfrm>
-          <a:prstGeom prst="rect">
-            <a:avLst/>
-          </a:prstGeom>
-          <a:noFill/>
-          <a:ln/>
-        </p:spPr>
-        <p:txBody>
-          <a:bodyPr wrap="square" lIns="0" tIns="0" rIns="0" bIns="0" rtlCol="0" anchor="ctr"/>
-          <a:lstStyle/>
+              <a:rPr lang="en-US" sz="1300" dirty="0">
+                <a:solidFill>
+                  <a:srgbClr val="1B1F3B"/>
+                </a:solidFill>
+                <a:latin typeface="Courier New" pitchFamily="34" charset="0"/>
+                <a:ea typeface="Courier New" pitchFamily="34" charset="-122"/>
+                <a:cs typeface="Courier New" pitchFamily="34" charset="-120"/>
+              </a:rPr>
+              <a:t>תוסיף לאפליקציית ה-Todo הזו שדה "עדיפות" לכל משימה (נמוכה/בינונית/גבוהה),</a:t>
+            </a:r>
+            <a:endParaRPr lang="en-US" sz="1300" dirty="0"/>
+          </a:p>
           <a:p>
             <a:pPr rtl="1" algn="r" indent="0" marL="0">
               <a:buNone/>
             </a:pPr>
             <a:r>
-              <a:rPr lang="en-US" sz="1200" i="1" dirty="0">
-                <a:solidFill>
-                  <a:srgbClr val="6B7280"/>
-                </a:solidFill>
-                <a:latin typeface="Calibri" pitchFamily="34" charset="0"/>
-                <a:ea typeface="Calibri" pitchFamily="34" charset="-122"/>
-                <a:cs typeface="Calibri" pitchFamily="34" charset="-120"/>
-              </a:rPr>
-              <a:t>פירוט מלא: references.md — כל הנתונים נבדקו ביולי 2026 ועשויים להשתנות</a:t>
-            </a:r>
-            <a:endParaRPr lang="en-US" sz="1200" dirty="0"/>
-          </a:p>
-        </p:txBody>
-      </p:sp>
-      <p:sp>
-        <p:nvSpPr>
-          <p:cNvPr id="5" name="Text 3"/>
+              <a:rPr lang="en-US" sz="1300" dirty="0">
+                <a:solidFill>
+                  <a:srgbClr val="1B1F3B"/>
+                </a:solidFill>
+                <a:latin typeface="Courier New" pitchFamily="34" charset="0"/>
+                <a:ea typeface="Courier New" pitchFamily="34" charset="-122"/>
+                <a:cs typeface="Courier New" pitchFamily="34" charset="-120"/>
+              </a:rPr>
+              <a:t>עם צבע רקע שונה לכל רמת עדיפות ברשימה. תשמור על אותו סגנון קוד שכבר קיים</a:t>
+            </a:r>
+            <a:endParaRPr lang="en-US" sz="1300" dirty="0"/>
+          </a:p>
+          <a:p>
+            <a:pPr rtl="1" algn="r" indent="0" marL="0">
+              <a:buNone/>
+            </a:pPr>
+            <a:r>
+              <a:rPr lang="en-US" sz="1300" dirty="0">
+                <a:solidFill>
+                  <a:srgbClr val="1B1F3B"/>
+                </a:solidFill>
+                <a:latin typeface="Courier New" pitchFamily="34" charset="0"/>
+                <a:ea typeface="Courier New" pitchFamily="34" charset="-122"/>
+                <a:cs typeface="Courier New" pitchFamily="34" charset="-120"/>
+              </a:rPr>
+              <a:t>בקובץ.</a:t>
+            </a:r>
+            <a:endParaRPr lang="en-US" sz="1300" dirty="0"/>
+          </a:p>
+        </p:txBody>
+      </p:sp>
+      <p:sp>
+        <p:nvSpPr>
+          <p:cNvPr id="8" name="Text 6"/>
+          <p:cNvSpPr/>
+          <p:nvPr/>
+        </p:nvSpPr>
+        <p:spPr>
+          <a:xfrm>
+            <a:off x="548640" y="4416552"/>
+            <a:ext cx="11091672" cy="274320"/>
+          </a:xfrm>
+          <a:prstGeom prst="rect">
+            <a:avLst/>
+          </a:prstGeom>
+          <a:noFill/>
+          <a:ln/>
+        </p:spPr>
+        <p:txBody>
+          <a:bodyPr wrap="square" lIns="0" tIns="0" rIns="0" bIns="0" rtlCol="0" anchor="ctr"/>
+          <a:lstStyle/>
+          <a:p>
+            <a:pPr rtl="1" algn="r" indent="0" marL="0">
+              <a:buNone/>
+            </a:pPr>
+            <a:r>
+              <a:rPr lang="en-US" sz="1300" b="1" dirty="0">
+                <a:solidFill>
+                  <a:srgbClr val="00A88A"/>
+                </a:solidFill>
+                <a:latin typeface="Arial" pitchFamily="34" charset="0"/>
+                <a:ea typeface="Arial" pitchFamily="34" charset="-122"/>
+                <a:cs typeface="Arial" pitchFamily="34" charset="-120"/>
+              </a:rPr>
+              <a:t>לפני האישור, עוצרים ובודקים מול הכיתה:</a:t>
+            </a:r>
+            <a:endParaRPr lang="en-US" sz="1300" dirty="0"/>
+          </a:p>
+        </p:txBody>
+      </p:sp>
+      <p:sp>
+        <p:nvSpPr>
+          <p:cNvPr id="9" name="Shape 7"/>
+          <p:cNvSpPr/>
+          <p:nvPr/>
+        </p:nvSpPr>
+        <p:spPr>
+          <a:xfrm>
+            <a:off x="548640" y="4709160"/>
+            <a:ext cx="11091672" cy="1325880"/>
+          </a:xfrm>
+          <a:prstGeom prst="roundRect">
+            <a:avLst>
+              <a:gd name="adj" fmla="val 4138"/>
+            </a:avLst>
+          </a:prstGeom>
+          <a:solidFill>
+            <a:srgbClr val="F6F6F8"/>
+          </a:solidFill>
+          <a:ln w="12700">
+            <a:solidFill>
+              <a:srgbClr val="B8B8C8"/>
+            </a:solidFill>
+            <a:prstDash val="solid"/>
+          </a:ln>
+        </p:spPr>
+      </p:sp>
+      <p:sp>
+        <p:nvSpPr>
+          <p:cNvPr id="10" name="Text 8"/>
+          <p:cNvSpPr/>
+          <p:nvPr/>
+        </p:nvSpPr>
+        <p:spPr>
+          <a:xfrm>
+            <a:off x="777240" y="4846320"/>
+            <a:ext cx="10634472" cy="1051560"/>
+          </a:xfrm>
+          <a:prstGeom prst="rect">
+            <a:avLst/>
+          </a:prstGeom>
+          <a:noFill/>
+          <a:ln/>
+        </p:spPr>
+        <p:txBody>
+          <a:bodyPr wrap="square" lIns="0" tIns="0" rIns="0" bIns="0" rtlCol="0" anchor="ctr"/>
+          <a:lstStyle/>
+          <a:p>
+            <a:pPr rtl="1" algn="r" indent="0" marL="0">
+              <a:buNone/>
+            </a:pPr>
+            <a:r>
+              <a:rPr lang="en-US" sz="1300" dirty="0">
+                <a:solidFill>
+                  <a:srgbClr val="1B1F3B"/>
+                </a:solidFill>
+                <a:latin typeface="Courier New" pitchFamily="34" charset="0"/>
+                <a:ea typeface="Courier New" pitchFamily="34" charset="-122"/>
+                <a:cs typeface="Courier New" pitchFamily="34" charset="-120"/>
+              </a:rPr>
+              <a:t>עוצרים לפני אישור השינוי, ובודקים ביחד את ה-Diff שהתקבל: אילו שורות נוספו, אילו השתנו. שני דברים לשים לב אליהם: (א) האם הכלי "קרא" את הקוד הקיים לפני שהוסיף (שמר על מוסכמות שמות קיימות)? (ב) האם הכלי הציע לשנות משהו לא קשור (Scope Creep — "זחילת היקף", הרחבה לא מתוכננת של המשימה)? אם כן — זו הזדמנות להראות איך דוחים חלק מהצעה ומאשרים רק את מה שרלוונטי.</a:t>
+            </a:r>
+            <a:endParaRPr lang="en-US" sz="1300" dirty="0"/>
+          </a:p>
+        </p:txBody>
+      </p:sp>
+      <p:sp>
+        <p:nvSpPr>
+          <p:cNvPr id="11" name="Text 9"/>
           <p:cNvSpPr/>
           <p:nvPr/>
         </p:nvSpPr>
@@ -8758,6 +9616,1468 @@
                 <a:cs typeface="Calibri" pitchFamily="34" charset="-120"/>
               </a:rPr>
               <a:t>Vibe Coding · שיעור 2 · שקף 24</a:t>
+            </a:r>
+            <a:endParaRPr lang="en-US" sz="900" dirty="0"/>
+          </a:p>
+        </p:txBody>
+      </p:sp>
+    </p:spTree>
+  </p:cSld>
+  <p:clrMapOvr>
+    <a:masterClrMapping/>
+  </p:clrMapOvr>
+</p:sld>
+</file>
+
+<file path=ppt/slides/slide25.xml><?xml version="1.0" encoding="utf-8"?>
+<p:sld xmlns:a="http://schemas.openxmlformats.org/drawingml/2006/main" xmlns:r="http://schemas.openxmlformats.org/officeDocument/2006/relationships" xmlns:p="http://schemas.openxmlformats.org/presentationml/2006/main">
+  <p:cSld name="Slide 25">
+    <p:bg>
+      <p:bgPr>
+        <a:solidFill>
+          <a:srgbClr val="FFFFFF"/>
+        </a:solidFill>
+      </p:bgPr>
+    </p:bg>
+    <p:spTree>
+      <p:nvGrpSpPr>
+        <p:cNvPr id="1" name=""/>
+        <p:cNvGrpSpPr/>
+        <p:nvPr/>
+      </p:nvGrpSpPr>
+      <p:grpSpPr>
+        <a:xfrm>
+          <a:off x="0" y="0"/>
+          <a:ext cx="0" cy="0"/>
+          <a:chOff x="0" y="0"/>
+          <a:chExt cx="0" cy="0"/>
+        </a:xfrm>
+      </p:grpSpPr>
+      <p:sp>
+        <p:nvSpPr>
+          <p:cNvPr id="2" name="Text 0"/>
+          <p:cNvSpPr/>
+          <p:nvPr/>
+        </p:nvSpPr>
+        <p:spPr>
+          <a:xfrm>
+            <a:off x="548640" y="320040"/>
+            <a:ext cx="11091672" cy="685800"/>
+          </a:xfrm>
+          <a:prstGeom prst="rect">
+            <a:avLst/>
+          </a:prstGeom>
+          <a:noFill/>
+          <a:ln/>
+        </p:spPr>
+        <p:txBody>
+          <a:bodyPr wrap="square" lIns="0" tIns="0" rIns="0" bIns="0" rtlCol="0" anchor="ctr"/>
+          <a:lstStyle/>
+          <a:p>
+            <a:pPr rtl="1" algn="r" indent="0" marL="0">
+              <a:buNone/>
+            </a:pPr>
+            <a:r>
+              <a:rPr lang="en-US" sz="2800" b="1" dirty="0">
+                <a:solidFill>
+                  <a:srgbClr val="1B1F3B"/>
+                </a:solidFill>
+                <a:latin typeface="Arial" pitchFamily="34" charset="0"/>
+                <a:ea typeface="Arial" pitchFamily="34" charset="-122"/>
+                <a:cs typeface="Arial" pitchFamily="34" charset="-120"/>
+              </a:rPr>
+              <a:t>עוברים לתרגול: הקמת סביבה (חלק א׳ — המשימה)</a:t>
+            </a:r>
+            <a:endParaRPr lang="en-US" sz="2800" dirty="0"/>
+          </a:p>
+        </p:txBody>
+      </p:sp>
+      <p:sp>
+        <p:nvSpPr>
+          <p:cNvPr id="3" name="Text 1"/>
+          <p:cNvSpPr/>
+          <p:nvPr/>
+        </p:nvSpPr>
+        <p:spPr>
+          <a:xfrm>
+            <a:off x="548640" y="1024128"/>
+            <a:ext cx="11091672" cy="411480"/>
+          </a:xfrm>
+          <a:prstGeom prst="rect">
+            <a:avLst/>
+          </a:prstGeom>
+          <a:noFill/>
+          <a:ln/>
+        </p:spPr>
+        <p:txBody>
+          <a:bodyPr wrap="square" lIns="0" tIns="0" rIns="0" bIns="0" rtlCol="0" anchor="ctr"/>
+          <a:lstStyle/>
+          <a:p>
+            <a:pPr rtl="1" algn="r" indent="0" marL="0">
+              <a:buNone/>
+            </a:pPr>
+            <a:r>
+              <a:rPr lang="en-US" sz="1700" i="1" dirty="0">
+                <a:solidFill>
+                  <a:srgbClr val="6B7280"/>
+                </a:solidFill>
+                <a:latin typeface="Calibri" pitchFamily="34" charset="0"/>
+                <a:ea typeface="Calibri" pitchFamily="34" charset="-122"/>
+                <a:cs typeface="Calibri" pitchFamily="34" charset="-120"/>
+              </a:rPr>
+              <a:t>השאלה: מה המטרה של 45 הדקות האלה?</a:t>
+            </a:r>
+            <a:endParaRPr lang="en-US" sz="1700" dirty="0"/>
+          </a:p>
+        </p:txBody>
+      </p:sp>
+      <p:sp>
+        <p:nvSpPr>
+          <p:cNvPr id="4" name="Text 2"/>
+          <p:cNvSpPr/>
+          <p:nvPr/>
+        </p:nvSpPr>
+        <p:spPr>
+          <a:xfrm>
+            <a:off x="548640" y="1508760"/>
+            <a:ext cx="11091672" cy="3931920"/>
+          </a:xfrm>
+          <a:prstGeom prst="rect">
+            <a:avLst/>
+          </a:prstGeom>
+          <a:noFill/>
+          <a:ln/>
+        </p:spPr>
+        <p:txBody>
+          <a:bodyPr wrap="square" lIns="0" tIns="0" rIns="0" bIns="0" rtlCol="0" anchor="ctr"/>
+          <a:lstStyle/>
+          <a:p>
+            <a:pPr rtl="1" algn="r" marL="228600" indent="-228600">
+              <a:spcAft>
+                <a:spcPts val="1000"/>
+              </a:spcAft>
+              <a:buSzPct val="100000"/>
+              <a:buChar char="•"/>
+            </a:pPr>
+            <a:r>
+              <a:rPr lang="en-US" sz="1900" dirty="0">
+                <a:solidFill>
+                  <a:srgbClr val="1B1F3B"/>
+                </a:solidFill>
+                <a:latin typeface="Calibri" pitchFamily="34" charset="0"/>
+                <a:ea typeface="Calibri" pitchFamily="34" charset="-122"/>
+                <a:cs typeface="Calibri" pitchFamily="34" charset="-120"/>
+              </a:rPr>
+              <a:t>להקים סביבת עבודה אישית שתלווה אתכם לאורך כל הסמסטר, ולבצע בה פעולה אמיתית ראשונה עם כלי AI</a:t>
+            </a:r>
+            <a:endParaRPr lang="en-US" sz="1900" dirty="0"/>
+          </a:p>
+          <a:p>
+            <a:pPr rtl="1" algn="r" marL="228600" indent="-228600">
+              <a:spcAft>
+                <a:spcPts val="1000"/>
+              </a:spcAft>
+              <a:buSzPct val="100000"/>
+              <a:buChar char="•"/>
+            </a:pPr>
+            <a:r>
+              <a:rPr lang="en-US" sz="1900" dirty="0">
+                <a:solidFill>
+                  <a:srgbClr val="1B1F3B"/>
+                </a:solidFill>
+                <a:latin typeface="Calibri" pitchFamily="34" charset="0"/>
+                <a:ea typeface="Calibri" pitchFamily="34" charset="-122"/>
+                <a:cs typeface="Calibri" pitchFamily="34" charset="-120"/>
+              </a:rPr>
+              <a:t>המשימה: מתקינים VS Code + Git, יוצרים Repository חדש בשם `my-vibe-coding-env` ב-GitHub, משכפלים אותו למחשב (`git clone`), ומפעילים כלי AI חינמי (Copilot Free או שקול)</a:t>
+            </a:r>
+            <a:endParaRPr lang="en-US" sz="1900" dirty="0"/>
+          </a:p>
+          <a:p>
+            <a:pPr rtl="1" algn="r" marL="228600" indent="-228600">
+              <a:spcAft>
+                <a:spcPts val="1000"/>
+              </a:spcAft>
+              <a:buSzPct val="100000"/>
+              <a:buChar char="•"/>
+            </a:pPr>
+            <a:r>
+              <a:rPr lang="en-US" sz="1900" dirty="0">
+                <a:solidFill>
+                  <a:srgbClr val="1B1F3B"/>
+                </a:solidFill>
+                <a:latin typeface="Calibri" pitchFamily="34" charset="0"/>
+                <a:ea typeface="Calibri" pitchFamily="34" charset="-122"/>
+                <a:cs typeface="Calibri" pitchFamily="34" charset="-120"/>
+              </a:rPr>
+              <a:t>אז מבקשים מה-AI ליצור קובץ `hello.py` (או `hello.js`) שמדפיס הודעת פתיחה אישית — זו הפעולה האג'נטית הראשונה שלכם בקורס</a:t>
+            </a:r>
+            <a:endParaRPr lang="en-US" sz="1900" dirty="0"/>
+          </a:p>
+        </p:txBody>
+      </p:sp>
+      <p:sp>
+        <p:nvSpPr>
+          <p:cNvPr id="5" name="Shape 3"/>
+          <p:cNvSpPr/>
+          <p:nvPr/>
+        </p:nvSpPr>
+        <p:spPr>
+          <a:xfrm>
+            <a:off x="548640" y="5577840"/>
+            <a:ext cx="11091672" cy="0"/>
+          </a:xfrm>
+          <a:prstGeom prst="line">
+            <a:avLst/>
+          </a:prstGeom>
+          <a:noFill/>
+          <a:ln w="9525">
+            <a:solidFill>
+              <a:srgbClr val="B8B8C8"/>
+            </a:solidFill>
+            <a:prstDash val="solid"/>
+          </a:ln>
+        </p:spPr>
+      </p:sp>
+      <p:sp>
+        <p:nvSpPr>
+          <p:cNvPr id="6" name="Text 4"/>
+          <p:cNvSpPr/>
+          <p:nvPr/>
+        </p:nvSpPr>
+        <p:spPr>
+          <a:xfrm>
+            <a:off x="548640" y="5669280"/>
+            <a:ext cx="11091672" cy="621792"/>
+          </a:xfrm>
+          <a:prstGeom prst="rect">
+            <a:avLst/>
+          </a:prstGeom>
+          <a:noFill/>
+          <a:ln/>
+        </p:spPr>
+        <p:txBody>
+          <a:bodyPr wrap="square" lIns="0" tIns="0" rIns="0" bIns="0" rtlCol="0" anchor="ctr"/>
+          <a:lstStyle/>
+          <a:p>
+            <a:pPr rtl="1" algn="r" indent="0" marL="0">
+              <a:buNone/>
+            </a:pPr>
+            <a:r>
+              <a:rPr lang="en-US" sz="1700" dirty="0">
+                <a:solidFill>
+                  <a:srgbClr val="00A88A"/>
+                </a:solidFill>
+                <a:latin typeface="Arial" pitchFamily="34" charset="0"/>
+                <a:ea typeface="Arial" pitchFamily="34" charset="-122"/>
+                <a:cs typeface="Arial" pitchFamily="34" charset="-120"/>
+              </a:rPr>
+              <a:t>✔ מה עושים בפועל: אם משהו בהתקנה לא עובד — זה בדיוק סוג הבעיה ש-AI טוב בפתרון שלה. מעתיקים את הודעת השגיאה המדויקת ושואלים את כלי ה-AI "מה השגיאה הזו אומרת ואיך פותרים אותה?" — זה תרגול לגיטימי, לא "רמאות".</a:t>
+            </a:r>
+            <a:endParaRPr lang="en-US" sz="1700" dirty="0"/>
+          </a:p>
+        </p:txBody>
+      </p:sp>
+      <p:sp>
+        <p:nvSpPr>
+          <p:cNvPr id="7" name="Text 5"/>
+          <p:cNvSpPr/>
+          <p:nvPr/>
+        </p:nvSpPr>
+        <p:spPr>
+          <a:xfrm>
+            <a:off x="548640" y="6492240"/>
+            <a:ext cx="11091672" cy="274320"/>
+          </a:xfrm>
+          <a:prstGeom prst="rect">
+            <a:avLst/>
+          </a:prstGeom>
+          <a:noFill/>
+          <a:ln/>
+        </p:spPr>
+        <p:txBody>
+          <a:bodyPr wrap="square" lIns="0" tIns="0" rIns="0" bIns="0" rtlCol="0" anchor="ctr"/>
+          <a:lstStyle/>
+          <a:p>
+            <a:pPr rtl="1" algn="r" indent="0" marL="0">
+              <a:buNone/>
+            </a:pPr>
+            <a:r>
+              <a:rPr lang="en-US" sz="900" dirty="0">
+                <a:solidFill>
+                  <a:srgbClr val="A6A6B0"/>
+                </a:solidFill>
+                <a:latin typeface="Calibri" pitchFamily="34" charset="0"/>
+                <a:ea typeface="Calibri" pitchFamily="34" charset="-122"/>
+                <a:cs typeface="Calibri" pitchFamily="34" charset="-120"/>
+              </a:rPr>
+              <a:t>Vibe Coding · שיעור 2 · שקף 25</a:t>
+            </a:r>
+            <a:endParaRPr lang="en-US" sz="900" dirty="0"/>
+          </a:p>
+        </p:txBody>
+      </p:sp>
+    </p:spTree>
+  </p:cSld>
+  <p:clrMapOvr>
+    <a:masterClrMapping/>
+  </p:clrMapOvr>
+</p:sld>
+</file>
+
+<file path=ppt/slides/slide26.xml><?xml version="1.0" encoding="utf-8"?>
+<p:sld xmlns:a="http://schemas.openxmlformats.org/drawingml/2006/main" xmlns:r="http://schemas.openxmlformats.org/officeDocument/2006/relationships" xmlns:p="http://schemas.openxmlformats.org/presentationml/2006/main">
+  <p:cSld name="Slide 26">
+    <p:bg>
+      <p:bgPr>
+        <a:solidFill>
+          <a:srgbClr val="FFFFFF"/>
+        </a:solidFill>
+      </p:bgPr>
+    </p:bg>
+    <p:spTree>
+      <p:nvGrpSpPr>
+        <p:cNvPr id="1" name=""/>
+        <p:cNvGrpSpPr/>
+        <p:nvPr/>
+      </p:nvGrpSpPr>
+      <p:grpSpPr>
+        <a:xfrm>
+          <a:off x="0" y="0"/>
+          <a:ext cx="0" cy="0"/>
+          <a:chOff x="0" y="0"/>
+          <a:chExt cx="0" cy="0"/>
+        </a:xfrm>
+      </p:grpSpPr>
+      <p:sp>
+        <p:nvSpPr>
+          <p:cNvPr id="2" name="Text 0"/>
+          <p:cNvSpPr/>
+          <p:nvPr/>
+        </p:nvSpPr>
+        <p:spPr>
+          <a:xfrm>
+            <a:off x="548640" y="502920"/>
+            <a:ext cx="11091672" cy="365760"/>
+          </a:xfrm>
+          <a:prstGeom prst="rect">
+            <a:avLst/>
+          </a:prstGeom>
+          <a:noFill/>
+          <a:ln/>
+        </p:spPr>
+        <p:txBody>
+          <a:bodyPr wrap="square" lIns="0" tIns="0" rIns="0" bIns="0" rtlCol="0" anchor="ctr"/>
+          <a:lstStyle/>
+          <a:p>
+            <a:pPr rtl="1" algn="ctr" indent="0" marL="0">
+              <a:buNone/>
+            </a:pPr>
+            <a:r>
+              <a:rPr lang="en-US" sz="1500" i="1" dirty="0">
+                <a:solidFill>
+                  <a:srgbClr val="00A88A"/>
+                </a:solidFill>
+                <a:latin typeface="Calibri" pitchFamily="34" charset="0"/>
+                <a:ea typeface="Calibri" pitchFamily="34" charset="-122"/>
+                <a:cs typeface="Calibri" pitchFamily="34" charset="-120"/>
+              </a:rPr>
+              <a:t>עוברים לתרגול (חלק ב׳)</a:t>
+            </a:r>
+            <a:endParaRPr lang="en-US" sz="1500" dirty="0"/>
+          </a:p>
+        </p:txBody>
+      </p:sp>
+      <p:sp>
+        <p:nvSpPr>
+          <p:cNvPr id="3" name="Shape 1"/>
+          <p:cNvSpPr/>
+          <p:nvPr/>
+        </p:nvSpPr>
+        <p:spPr>
+          <a:xfrm>
+            <a:off x="4718304" y="914400"/>
+            <a:ext cx="2743200" cy="0"/>
+          </a:xfrm>
+          <a:prstGeom prst="line">
+            <a:avLst/>
+          </a:prstGeom>
+          <a:noFill/>
+          <a:ln w="19050">
+            <a:solidFill>
+              <a:srgbClr val="00A88A"/>
+            </a:solidFill>
+            <a:prstDash val="solid"/>
+          </a:ln>
+        </p:spPr>
+      </p:sp>
+      <p:sp>
+        <p:nvSpPr>
+          <p:cNvPr id="4" name="Text 2"/>
+          <p:cNvSpPr/>
+          <p:nvPr/>
+        </p:nvSpPr>
+        <p:spPr>
+          <a:xfrm>
+            <a:off x="548640" y="1051560"/>
+            <a:ext cx="11091672" cy="685800"/>
+          </a:xfrm>
+          <a:prstGeom prst="rect">
+            <a:avLst/>
+          </a:prstGeom>
+          <a:noFill/>
+          <a:ln/>
+        </p:spPr>
+        <p:txBody>
+          <a:bodyPr wrap="square" lIns="0" tIns="0" rIns="0" bIns="0" rtlCol="0" anchor="ctr"/>
+          <a:lstStyle/>
+          <a:p>
+            <a:pPr rtl="1" algn="ctr" indent="0" marL="0">
+              <a:buNone/>
+            </a:pPr>
+            <a:r>
+              <a:rPr lang="en-US" sz="2600" b="1" dirty="0">
+                <a:solidFill>
+                  <a:srgbClr val="1B1F3B"/>
+                </a:solidFill>
+                <a:latin typeface="Arial" pitchFamily="34" charset="0"/>
+                <a:ea typeface="Arial" pitchFamily="34" charset="-122"/>
+                <a:cs typeface="Arial" pitchFamily="34" charset="-120"/>
+              </a:rPr>
+              <a:t>פרומפט פתיחה לתרגול</a:t>
+            </a:r>
+            <a:endParaRPr lang="en-US" sz="2600" dirty="0"/>
+          </a:p>
+        </p:txBody>
+      </p:sp>
+      <p:sp>
+        <p:nvSpPr>
+          <p:cNvPr id="5" name="Text 3"/>
+          <p:cNvSpPr/>
+          <p:nvPr/>
+        </p:nvSpPr>
+        <p:spPr>
+          <a:xfrm>
+            <a:off x="548640" y="1737360"/>
+            <a:ext cx="11091672" cy="685800"/>
+          </a:xfrm>
+          <a:prstGeom prst="rect">
+            <a:avLst/>
+          </a:prstGeom>
+          <a:noFill/>
+          <a:ln/>
+        </p:spPr>
+        <p:txBody>
+          <a:bodyPr wrap="square" lIns="0" tIns="0" rIns="0" bIns="0" rtlCol="0" anchor="ctr"/>
+          <a:lstStyle/>
+          <a:p>
+            <a:pPr rtl="1" algn="ctr" indent="0" marL="0">
+              <a:buNone/>
+            </a:pPr>
+            <a:r>
+              <a:rPr lang="en-US" sz="1400" i="1" dirty="0">
+                <a:solidFill>
+                  <a:srgbClr val="6B7280"/>
+                </a:solidFill>
+                <a:latin typeface="Calibri" pitchFamily="34" charset="0"/>
+                <a:ea typeface="Calibri" pitchFamily="34" charset="-122"/>
+                <a:cs typeface="Calibri" pitchFamily="34" charset="-120"/>
+              </a:rPr>
+              <a:t>התחילו מכאן, והתאימו את השם שלכם:</a:t>
+            </a:r>
+            <a:endParaRPr lang="en-US" sz="1400" dirty="0"/>
+          </a:p>
+        </p:txBody>
+      </p:sp>
+      <p:sp>
+        <p:nvSpPr>
+          <p:cNvPr id="6" name="Shape 4"/>
+          <p:cNvSpPr/>
+          <p:nvPr/>
+        </p:nvSpPr>
+        <p:spPr>
+          <a:xfrm>
+            <a:off x="548640" y="2606040"/>
+            <a:ext cx="11091672" cy="3429000"/>
+          </a:xfrm>
+          <a:prstGeom prst="roundRect">
+            <a:avLst>
+              <a:gd name="adj" fmla="val 1600"/>
+            </a:avLst>
+          </a:prstGeom>
+          <a:solidFill>
+            <a:srgbClr val="F6F6F8"/>
+          </a:solidFill>
+          <a:ln w="12700">
+            <a:solidFill>
+              <a:srgbClr val="B8B8C8"/>
+            </a:solidFill>
+            <a:prstDash val="solid"/>
+          </a:ln>
+        </p:spPr>
+      </p:sp>
+      <p:sp>
+        <p:nvSpPr>
+          <p:cNvPr id="7" name="Text 5"/>
+          <p:cNvSpPr/>
+          <p:nvPr/>
+        </p:nvSpPr>
+        <p:spPr>
+          <a:xfrm>
+            <a:off x="777240" y="2743200"/>
+            <a:ext cx="10634472" cy="3154680"/>
+          </a:xfrm>
+          <a:prstGeom prst="rect">
+            <a:avLst/>
+          </a:prstGeom>
+          <a:noFill/>
+          <a:ln/>
+        </p:spPr>
+        <p:txBody>
+          <a:bodyPr wrap="square" lIns="0" tIns="0" rIns="0" bIns="0" rtlCol="0" anchor="ctr"/>
+          <a:lstStyle/>
+          <a:p>
+            <a:pPr rtl="1" algn="r" indent="0" marL="0">
+              <a:buNone/>
+            </a:pPr>
+            <a:r>
+              <a:rPr lang="en-US" sz="1300" dirty="0">
+                <a:solidFill>
+                  <a:srgbClr val="1B1F3B"/>
+                </a:solidFill>
+                <a:latin typeface="Courier New" pitchFamily="34" charset="0"/>
+                <a:ea typeface="Courier New" pitchFamily="34" charset="-122"/>
+                <a:cs typeface="Courier New" pitchFamily="34" charset="-120"/>
+              </a:rPr>
+              <a:t>תיצור קובץ hello.py שמדפיס "שלום מ-Vibe Coding, שיעור 2!" ואת השם שלי</a:t>
+            </a:r>
+            <a:endParaRPr lang="en-US" sz="1300" dirty="0"/>
+          </a:p>
+          <a:p>
+            <a:pPr rtl="1" algn="r" indent="0" marL="0">
+              <a:buNone/>
+            </a:pPr>
+            <a:r>
+              <a:rPr lang="en-US" sz="1300" dirty="0">
+                <a:solidFill>
+                  <a:srgbClr val="1B1F3B"/>
+                </a:solidFill>
+                <a:latin typeface="Courier New" pitchFamily="34" charset="0"/>
+                <a:ea typeface="Courier New" pitchFamily="34" charset="-122"/>
+                <a:cs typeface="Courier New" pitchFamily="34" charset="-120"/>
+              </a:rPr>
+              <a:t>[השם שלכם]. תוסיף גם הדפסה של התאריך הנוכחי.</a:t>
+            </a:r>
+            <a:endParaRPr lang="en-US" sz="1300" dirty="0"/>
+          </a:p>
+        </p:txBody>
+      </p:sp>
+      <p:sp>
+        <p:nvSpPr>
+          <p:cNvPr id="8" name="Text 6"/>
+          <p:cNvSpPr/>
+          <p:nvPr/>
+        </p:nvSpPr>
+        <p:spPr>
+          <a:xfrm>
+            <a:off x="548640" y="6492240"/>
+            <a:ext cx="11091672" cy="274320"/>
+          </a:xfrm>
+          <a:prstGeom prst="rect">
+            <a:avLst/>
+          </a:prstGeom>
+          <a:noFill/>
+          <a:ln/>
+        </p:spPr>
+        <p:txBody>
+          <a:bodyPr wrap="square" lIns="0" tIns="0" rIns="0" bIns="0" rtlCol="0" anchor="ctr"/>
+          <a:lstStyle/>
+          <a:p>
+            <a:pPr rtl="1" algn="r" indent="0" marL="0">
+              <a:buNone/>
+            </a:pPr>
+            <a:r>
+              <a:rPr lang="en-US" sz="900" dirty="0">
+                <a:solidFill>
+                  <a:srgbClr val="A6A6B0"/>
+                </a:solidFill>
+                <a:latin typeface="Calibri" pitchFamily="34" charset="0"/>
+                <a:ea typeface="Calibri" pitchFamily="34" charset="-122"/>
+                <a:cs typeface="Calibri" pitchFamily="34" charset="-120"/>
+              </a:rPr>
+              <a:t>Vibe Coding · שיעור 2 · שקף 26</a:t>
+            </a:r>
+            <a:endParaRPr lang="en-US" sz="900" dirty="0"/>
+          </a:p>
+        </p:txBody>
+      </p:sp>
+    </p:spTree>
+  </p:cSld>
+  <p:clrMapOvr>
+    <a:masterClrMapping/>
+  </p:clrMapOvr>
+</p:sld>
+</file>
+
+<file path=ppt/slides/slide27.xml><?xml version="1.0" encoding="utf-8"?>
+<p:sld xmlns:a="http://schemas.openxmlformats.org/drawingml/2006/main" xmlns:r="http://schemas.openxmlformats.org/officeDocument/2006/relationships" xmlns:p="http://schemas.openxmlformats.org/presentationml/2006/main">
+  <p:cSld name="Slide 27">
+    <p:bg>
+      <p:bgPr>
+        <a:solidFill>
+          <a:srgbClr val="FFFFFF"/>
+        </a:solidFill>
+      </p:bgPr>
+    </p:bg>
+    <p:spTree>
+      <p:nvGrpSpPr>
+        <p:cNvPr id="1" name=""/>
+        <p:cNvGrpSpPr/>
+        <p:nvPr/>
+      </p:nvGrpSpPr>
+      <p:grpSpPr>
+        <a:xfrm>
+          <a:off x="0" y="0"/>
+          <a:ext cx="0" cy="0"/>
+          <a:chOff x="0" y="0"/>
+          <a:chExt cx="0" cy="0"/>
+        </a:xfrm>
+      </p:grpSpPr>
+      <p:sp>
+        <p:nvSpPr>
+          <p:cNvPr id="2" name="Text 0"/>
+          <p:cNvSpPr/>
+          <p:nvPr/>
+        </p:nvSpPr>
+        <p:spPr>
+          <a:xfrm>
+            <a:off x="548640" y="320040"/>
+            <a:ext cx="11091672" cy="685800"/>
+          </a:xfrm>
+          <a:prstGeom prst="rect">
+            <a:avLst/>
+          </a:prstGeom>
+          <a:noFill/>
+          <a:ln/>
+        </p:spPr>
+        <p:txBody>
+          <a:bodyPr wrap="square" lIns="0" tIns="0" rIns="0" bIns="0" rtlCol="0" anchor="ctr"/>
+          <a:lstStyle/>
+          <a:p>
+            <a:pPr rtl="1" algn="r" indent="0" marL="0">
+              <a:buNone/>
+            </a:pPr>
+            <a:r>
+              <a:rPr lang="en-US" sz="2800" b="1" dirty="0">
+                <a:solidFill>
+                  <a:srgbClr val="1B1F3B"/>
+                </a:solidFill>
+                <a:latin typeface="Arial" pitchFamily="34" charset="0"/>
+                <a:ea typeface="Arial" pitchFamily="34" charset="-122"/>
+                <a:cs typeface="Arial" pitchFamily="34" charset="-120"/>
+              </a:rPr>
+              <a:t>עוברים לתרגול: מתי סיימתם? (חלק ג׳)</a:t>
+            </a:r>
+            <a:endParaRPr lang="en-US" sz="2800" dirty="0"/>
+          </a:p>
+        </p:txBody>
+      </p:sp>
+      <p:sp>
+        <p:nvSpPr>
+          <p:cNvPr id="3" name="Text 1"/>
+          <p:cNvSpPr/>
+          <p:nvPr/>
+        </p:nvSpPr>
+        <p:spPr>
+          <a:xfrm>
+            <a:off x="548640" y="1024128"/>
+            <a:ext cx="11091672" cy="411480"/>
+          </a:xfrm>
+          <a:prstGeom prst="rect">
+            <a:avLst/>
+          </a:prstGeom>
+          <a:noFill/>
+          <a:ln/>
+        </p:spPr>
+        <p:txBody>
+          <a:bodyPr wrap="square" lIns="0" tIns="0" rIns="0" bIns="0" rtlCol="0" anchor="ctr"/>
+          <a:lstStyle/>
+          <a:p>
+            <a:pPr rtl="1" algn="r" indent="0" marL="0">
+              <a:buNone/>
+            </a:pPr>
+            <a:r>
+              <a:rPr lang="en-US" sz="1700" i="1" dirty="0">
+                <a:solidFill>
+                  <a:srgbClr val="6B7280"/>
+                </a:solidFill>
+                <a:latin typeface="Calibri" pitchFamily="34" charset="0"/>
+                <a:ea typeface="Calibri" pitchFamily="34" charset="-122"/>
+                <a:cs typeface="Calibri" pitchFamily="34" charset="-120"/>
+              </a:rPr>
+              <a:t>השאלה: איך יודעים שהתרגול הושלם בהצלחה?</a:t>
+            </a:r>
+            <a:endParaRPr lang="en-US" sz="1700" dirty="0"/>
+          </a:p>
+        </p:txBody>
+      </p:sp>
+      <p:sp>
+        <p:nvSpPr>
+          <p:cNvPr id="4" name="Text 2"/>
+          <p:cNvSpPr/>
+          <p:nvPr/>
+        </p:nvSpPr>
+        <p:spPr>
+          <a:xfrm>
+            <a:off x="548640" y="1508760"/>
+            <a:ext cx="11091672" cy="3712464"/>
+          </a:xfrm>
+          <a:prstGeom prst="rect">
+            <a:avLst/>
+          </a:prstGeom>
+          <a:noFill/>
+          <a:ln/>
+        </p:spPr>
+        <p:txBody>
+          <a:bodyPr wrap="square" lIns="0" tIns="0" rIns="0" bIns="0" rtlCol="0" anchor="ctr"/>
+          <a:lstStyle/>
+          <a:p>
+            <a:pPr rtl="1" algn="r" marL="228600" indent="-228600">
+              <a:spcAft>
+                <a:spcPts val="1000"/>
+              </a:spcAft>
+              <a:buSzPct val="100000"/>
+              <a:buChar char="•"/>
+            </a:pPr>
+            <a:r>
+              <a:rPr lang="en-US" sz="1900" dirty="0">
+                <a:solidFill>
+                  <a:srgbClr val="1B1F3B"/>
+                </a:solidFill>
+                <a:latin typeface="Calibri" pitchFamily="34" charset="0"/>
+                <a:ea typeface="Calibri" pitchFamily="34" charset="-122"/>
+                <a:cs typeface="Calibri" pitchFamily="34" charset="-120"/>
+              </a:rPr>
+              <a:t>VS Code מותקן ופתוח על תיקיית הפרויקט</a:t>
+            </a:r>
+            <a:endParaRPr lang="en-US" sz="1900" dirty="0"/>
+          </a:p>
+          <a:p>
+            <a:pPr rtl="1" algn="r" marL="228600" indent="-228600">
+              <a:spcAft>
+                <a:spcPts val="1000"/>
+              </a:spcAft>
+              <a:buSzPct val="100000"/>
+              <a:buChar char="•"/>
+            </a:pPr>
+            <a:r>
+              <a:rPr lang="en-US" sz="1900" dirty="0">
+                <a:solidFill>
+                  <a:srgbClr val="1B1F3B"/>
+                </a:solidFill>
+                <a:latin typeface="Calibri" pitchFamily="34" charset="0"/>
+                <a:ea typeface="Calibri" pitchFamily="34" charset="-122"/>
+                <a:cs typeface="Calibri" pitchFamily="34" charset="-120"/>
+              </a:rPr>
+              <a:t>Git מותקן, וה-Repository `my-vibe-coding-env` קיים ב-GitHub</a:t>
+            </a:r>
+            <a:endParaRPr lang="en-US" sz="1900" dirty="0"/>
+          </a:p>
+          <a:p>
+            <a:pPr rtl="1" algn="r" marL="228600" indent="-228600">
+              <a:spcAft>
+                <a:spcPts val="1000"/>
+              </a:spcAft>
+              <a:buSzPct val="100000"/>
+              <a:buChar char="•"/>
+            </a:pPr>
+            <a:r>
+              <a:rPr lang="en-US" sz="1900" dirty="0">
+                <a:solidFill>
+                  <a:srgbClr val="1B1F3B"/>
+                </a:solidFill>
+                <a:latin typeface="Calibri" pitchFamily="34" charset="0"/>
+                <a:ea typeface="Calibri" pitchFamily="34" charset="-122"/>
+                <a:cs typeface="Calibri" pitchFamily="34" charset="-120"/>
+              </a:rPr>
+              <a:t>כלי AI חינמי מותקן ופעיל (Copilot Free או שקול)</a:t>
+            </a:r>
+            <a:endParaRPr lang="en-US" sz="1900" dirty="0"/>
+          </a:p>
+          <a:p>
+            <a:pPr rtl="1" algn="r" marL="228600" indent="-228600">
+              <a:spcAft>
+                <a:spcPts val="1000"/>
+              </a:spcAft>
+              <a:buSzPct val="100000"/>
+              <a:buChar char="•"/>
+            </a:pPr>
+            <a:r>
+              <a:rPr lang="en-US" sz="1900" dirty="0">
+                <a:solidFill>
+                  <a:srgbClr val="1B1F3B"/>
+                </a:solidFill>
+                <a:latin typeface="Calibri" pitchFamily="34" charset="0"/>
+                <a:ea typeface="Calibri" pitchFamily="34" charset="-122"/>
+                <a:cs typeface="Calibri" pitchFamily="34" charset="-120"/>
+              </a:rPr>
+              <a:t>קובץ `hello.py`/`hello.js` נוצר בעזרת AI, נבדק, ורץ בהצלחה</a:t>
+            </a:r>
+            <a:endParaRPr lang="en-US" sz="1900" dirty="0"/>
+          </a:p>
+          <a:p>
+            <a:pPr rtl="1" algn="r" marL="228600" indent="-228600">
+              <a:spcAft>
+                <a:spcPts val="1000"/>
+              </a:spcAft>
+              <a:buSzPct val="100000"/>
+              <a:buChar char="•"/>
+            </a:pPr>
+            <a:r>
+              <a:rPr lang="en-US" sz="1900" dirty="0">
+                <a:solidFill>
+                  <a:srgbClr val="1B1F3B"/>
+                </a:solidFill>
+                <a:latin typeface="Calibri" pitchFamily="34" charset="0"/>
+                <a:ea typeface="Calibri" pitchFamily="34" charset="-122"/>
+                <a:cs typeface="Calibri" pitchFamily="34" charset="-120"/>
+              </a:rPr>
+              <a:t>בוצע Commit אחד לפחות, ונדחף (</a:t>
+            </a:r>
+            <a:pPr rtl="1" algn="r" marL="228600" indent="-228600">
+              <a:spcAft>
+                <a:spcPts val="1000"/>
+              </a:spcAft>
+              <a:buSzPct val="100000"/>
+              <a:buChar char="•"/>
+            </a:pPr>
+            <a:r>
+              <a:rPr lang="en-US" sz="1900" b="1" dirty="0">
+                <a:solidFill>
+                  <a:srgbClr val="1B1F3B"/>
+                </a:solidFill>
+                <a:latin typeface="Calibri" pitchFamily="34" charset="0"/>
+                <a:ea typeface="Calibri" pitchFamily="34" charset="-122"/>
+                <a:cs typeface="Calibri" pitchFamily="34" charset="-120"/>
+              </a:rPr>
+              <a:t>Push</a:t>
+            </a:r>
+            <a:pPr rtl="1" algn="r" marL="228600" indent="-228600">
+              <a:spcAft>
+                <a:spcPts val="1000"/>
+              </a:spcAft>
+              <a:buSzPct val="100000"/>
+              <a:buChar char="•"/>
+            </a:pPr>
+            <a:r>
+              <a:rPr lang="en-US" sz="1900" dirty="0">
+                <a:solidFill>
+                  <a:srgbClr val="1B1F3B"/>
+                </a:solidFill>
+                <a:latin typeface="Calibri" pitchFamily="34" charset="0"/>
+                <a:ea typeface="Calibri" pitchFamily="34" charset="-122"/>
+                <a:cs typeface="Calibri" pitchFamily="34" charset="-120"/>
+              </a:rPr>
+              <a:t> — העלאה מהמחשב המקומי לשרת המרוחק) ל-GitHub בהצלחה</a:t>
+            </a:r>
+            <a:endParaRPr lang="en-US" sz="1900" dirty="0"/>
+          </a:p>
+        </p:txBody>
+      </p:sp>
+      <p:sp>
+        <p:nvSpPr>
+          <p:cNvPr id="5" name="Shape 3"/>
+          <p:cNvSpPr/>
+          <p:nvPr/>
+        </p:nvSpPr>
+        <p:spPr>
+          <a:xfrm>
+            <a:off x="548640" y="5358384"/>
+            <a:ext cx="11091672" cy="0"/>
+          </a:xfrm>
+          <a:prstGeom prst="line">
+            <a:avLst/>
+          </a:prstGeom>
+          <a:noFill/>
+          <a:ln w="9525">
+            <a:solidFill>
+              <a:srgbClr val="B8B8C8"/>
+            </a:solidFill>
+            <a:prstDash val="solid"/>
+          </a:ln>
+        </p:spPr>
+      </p:sp>
+      <p:sp>
+        <p:nvSpPr>
+          <p:cNvPr id="6" name="Text 4"/>
+          <p:cNvSpPr/>
+          <p:nvPr/>
+        </p:nvSpPr>
+        <p:spPr>
+          <a:xfrm>
+            <a:off x="548640" y="5449824"/>
+            <a:ext cx="11091672" cy="932688"/>
+          </a:xfrm>
+          <a:prstGeom prst="rect">
+            <a:avLst/>
+          </a:prstGeom>
+          <a:noFill/>
+          <a:ln/>
+        </p:spPr>
+        <p:txBody>
+          <a:bodyPr wrap="square" lIns="0" tIns="0" rIns="0" bIns="0" rtlCol="0" anchor="ctr"/>
+          <a:lstStyle/>
+          <a:p>
+            <a:pPr rtl="1" algn="r" indent="0" marL="0">
+              <a:buNone/>
+            </a:pPr>
+            <a:r>
+              <a:rPr lang="en-US" sz="1700" dirty="0">
+                <a:solidFill>
+                  <a:srgbClr val="00A88A"/>
+                </a:solidFill>
+                <a:latin typeface="Arial" pitchFamily="34" charset="0"/>
+                <a:ea typeface="Arial" pitchFamily="34" charset="-122"/>
+                <a:cs typeface="Arial" pitchFamily="34" charset="-120"/>
+              </a:rPr>
+              <a:t>✔ מה עושים בפועל: הבעיה הכי נפוצה בתרגול הזה היא אימות/הרשאות מול GitHub (HTTPS Token או SSH key — שתי שיטות שונות להוכיח שאתם באמת אתם). אם נתקעתם כאן — זה בדיוק המקום לבקש עזרה מהמרצה או מ-AI, זה לא קשור ליכולת התכנות שלכם.</a:t>
+            </a:r>
+            <a:endParaRPr lang="en-US" sz="1700" dirty="0"/>
+          </a:p>
+        </p:txBody>
+      </p:sp>
+      <p:sp>
+        <p:nvSpPr>
+          <p:cNvPr id="7" name="Text 5"/>
+          <p:cNvSpPr/>
+          <p:nvPr/>
+        </p:nvSpPr>
+        <p:spPr>
+          <a:xfrm>
+            <a:off x="548640" y="6492240"/>
+            <a:ext cx="11091672" cy="274320"/>
+          </a:xfrm>
+          <a:prstGeom prst="rect">
+            <a:avLst/>
+          </a:prstGeom>
+          <a:noFill/>
+          <a:ln/>
+        </p:spPr>
+        <p:txBody>
+          <a:bodyPr wrap="square" lIns="0" tIns="0" rIns="0" bIns="0" rtlCol="0" anchor="ctr"/>
+          <a:lstStyle/>
+          <a:p>
+            <a:pPr rtl="1" algn="r" indent="0" marL="0">
+              <a:buNone/>
+            </a:pPr>
+            <a:r>
+              <a:rPr lang="en-US" sz="900" dirty="0">
+                <a:solidFill>
+                  <a:srgbClr val="A6A6B0"/>
+                </a:solidFill>
+                <a:latin typeface="Calibri" pitchFamily="34" charset="0"/>
+                <a:ea typeface="Calibri" pitchFamily="34" charset="-122"/>
+                <a:cs typeface="Calibri" pitchFamily="34" charset="-120"/>
+              </a:rPr>
+              <a:t>Vibe Coding · שיעור 2 · שקף 27</a:t>
+            </a:r>
+            <a:endParaRPr lang="en-US" sz="900" dirty="0"/>
+          </a:p>
+        </p:txBody>
+      </p:sp>
+    </p:spTree>
+  </p:cSld>
+  <p:clrMapOvr>
+    <a:masterClrMapping/>
+  </p:clrMapOvr>
+</p:sld>
+</file>
+
+<file path=ppt/slides/slide28.xml><?xml version="1.0" encoding="utf-8"?>
+<p:sld xmlns:a="http://schemas.openxmlformats.org/drawingml/2006/main" xmlns:r="http://schemas.openxmlformats.org/officeDocument/2006/relationships" xmlns:p="http://schemas.openxmlformats.org/presentationml/2006/main">
+  <p:cSld name="Slide 28">
+    <p:bg>
+      <p:bgPr>
+        <a:solidFill>
+          <a:srgbClr val="FFFFFF"/>
+        </a:solidFill>
+      </p:bgPr>
+    </p:bg>
+    <p:spTree>
+      <p:nvGrpSpPr>
+        <p:cNvPr id="1" name=""/>
+        <p:cNvGrpSpPr/>
+        <p:nvPr/>
+      </p:nvGrpSpPr>
+      <p:grpSpPr>
+        <a:xfrm>
+          <a:off x="0" y="0"/>
+          <a:ext cx="0" cy="0"/>
+          <a:chOff x="0" y="0"/>
+          <a:chExt cx="0" cy="0"/>
+        </a:xfrm>
+      </p:grpSpPr>
+      <p:sp>
+        <p:nvSpPr>
+          <p:cNvPr id="2" name="Text 0"/>
+          <p:cNvSpPr/>
+          <p:nvPr/>
+        </p:nvSpPr>
+        <p:spPr>
+          <a:xfrm>
+            <a:off x="548640" y="320040"/>
+            <a:ext cx="11091672" cy="685800"/>
+          </a:xfrm>
+          <a:prstGeom prst="rect">
+            <a:avLst/>
+          </a:prstGeom>
+          <a:noFill/>
+          <a:ln/>
+        </p:spPr>
+        <p:txBody>
+          <a:bodyPr wrap="square" lIns="0" tIns="0" rIns="0" bIns="0" rtlCol="0" anchor="ctr"/>
+          <a:lstStyle/>
+          <a:p>
+            <a:pPr rtl="1" algn="r" indent="0" marL="0">
+              <a:buNone/>
+            </a:pPr>
+            <a:r>
+              <a:rPr lang="en-US" sz="2800" b="1" dirty="0">
+                <a:solidFill>
+                  <a:srgbClr val="1B1F3B"/>
+                </a:solidFill>
+                <a:latin typeface="Arial" pitchFamily="34" charset="0"/>
+                <a:ea typeface="Arial" pitchFamily="34" charset="-122"/>
+                <a:cs typeface="Arial" pitchFamily="34" charset="-120"/>
+              </a:rPr>
+              <a:t>סיכום</a:t>
+            </a:r>
+            <a:endParaRPr lang="en-US" sz="2800" dirty="0"/>
+          </a:p>
+        </p:txBody>
+      </p:sp>
+      <p:sp>
+        <p:nvSpPr>
+          <p:cNvPr id="3" name="Text 1"/>
+          <p:cNvSpPr/>
+          <p:nvPr/>
+        </p:nvSpPr>
+        <p:spPr>
+          <a:xfrm>
+            <a:off x="548640" y="1371600"/>
+            <a:ext cx="11091672" cy="2011680"/>
+          </a:xfrm>
+          <a:prstGeom prst="rect">
+            <a:avLst/>
+          </a:prstGeom>
+          <a:noFill/>
+          <a:ln/>
+        </p:spPr>
+        <p:txBody>
+          <a:bodyPr wrap="square" lIns="0" tIns="0" rIns="0" bIns="0" rtlCol="0" anchor="ctr"/>
+          <a:lstStyle/>
+          <a:p>
+            <a:pPr rtl="1" algn="r" marL="228600" indent="-228600">
+              <a:spcAft>
+                <a:spcPts val="1200"/>
+              </a:spcAft>
+              <a:buSzPct val="100000"/>
+              <a:buChar char="•"/>
+            </a:pPr>
+            <a:r>
+              <a:rPr lang="en-US" sz="1900" dirty="0">
+                <a:solidFill>
+                  <a:srgbClr val="1B1F3B"/>
+                </a:solidFill>
+                <a:latin typeface="Calibri" pitchFamily="34" charset="0"/>
+                <a:ea typeface="Calibri" pitchFamily="34" charset="-122"/>
+                <a:cs typeface="Calibri" pitchFamily="34" charset="-120"/>
+              </a:rPr>
+              <a:t>VS Code + Git + GitHub = השולחן שעליו עובדים לאורך כל הקורס</a:t>
+            </a:r>
+            <a:endParaRPr lang="en-US" sz="1900" dirty="0"/>
+          </a:p>
+          <a:p>
+            <a:pPr rtl="1" algn="r" marL="228600" indent="-228600">
+              <a:spcAft>
+                <a:spcPts val="1200"/>
+              </a:spcAft>
+              <a:buSzPct val="100000"/>
+              <a:buChar char="•"/>
+            </a:pPr>
+            <a:r>
+              <a:rPr lang="en-US" sz="1900" dirty="0">
+                <a:solidFill>
+                  <a:srgbClr val="1B1F3B"/>
+                </a:solidFill>
+                <a:latin typeface="Calibri" pitchFamily="34" charset="0"/>
+                <a:ea typeface="Calibri" pitchFamily="34" charset="-122"/>
+                <a:cs typeface="Calibri" pitchFamily="34" charset="-120"/>
+              </a:rPr>
+              <a:t>Agentic ≠ Autocomplete — זה שותף לביצוע משימה, לא רק עוזר הקלדה (וזוכרים: תמיד בודקים Diff לפני אישור)</a:t>
+            </a:r>
+            <a:endParaRPr lang="en-US" sz="1900" dirty="0"/>
+          </a:p>
+          <a:p>
+            <a:pPr rtl="1" algn="r" marL="228600" indent="-228600">
+              <a:spcAft>
+                <a:spcPts val="1200"/>
+              </a:spcAft>
+              <a:buSzPct val="100000"/>
+              <a:buChar char="•"/>
+            </a:pPr>
+            <a:r>
+              <a:rPr lang="en-US" sz="1900" dirty="0">
+                <a:solidFill>
+                  <a:srgbClr val="1B1F3B"/>
+                </a:solidFill>
+                <a:latin typeface="Calibri" pitchFamily="34" charset="0"/>
+                <a:ea typeface="Calibri" pitchFamily="34" charset="-122"/>
+                <a:cs typeface="Calibri" pitchFamily="34" charset="-120"/>
+              </a:rPr>
+              <a:t>יש נקודת כניסה חינמית לכל הכלים שלמדנו היום — אין תירוץ לא להתחיל</a:t>
+            </a:r>
+            <a:endParaRPr lang="en-US" sz="1900" dirty="0"/>
+          </a:p>
+        </p:txBody>
+      </p:sp>
+      <p:sp>
+        <p:nvSpPr>
+          <p:cNvPr id="4" name="Shape 2"/>
+          <p:cNvSpPr/>
+          <p:nvPr/>
+        </p:nvSpPr>
+        <p:spPr>
+          <a:xfrm>
+            <a:off x="548640" y="3657600"/>
+            <a:ext cx="11091672" cy="0"/>
+          </a:xfrm>
+          <a:prstGeom prst="line">
+            <a:avLst/>
+          </a:prstGeom>
+          <a:noFill/>
+          <a:ln w="9525">
+            <a:solidFill>
+              <a:srgbClr val="B8B8C8"/>
+            </a:solidFill>
+            <a:prstDash val="solid"/>
+          </a:ln>
+        </p:spPr>
+      </p:sp>
+      <p:sp>
+        <p:nvSpPr>
+          <p:cNvPr id="5" name="Text 3"/>
+          <p:cNvSpPr/>
+          <p:nvPr/>
+        </p:nvSpPr>
+        <p:spPr>
+          <a:xfrm>
+            <a:off x="548640" y="3840480"/>
+            <a:ext cx="11091672" cy="548640"/>
+          </a:xfrm>
+          <a:prstGeom prst="rect">
+            <a:avLst/>
+          </a:prstGeom>
+          <a:noFill/>
+          <a:ln/>
+        </p:spPr>
+        <p:txBody>
+          <a:bodyPr wrap="square" lIns="0" tIns="0" rIns="0" bIns="0" rtlCol="0" anchor="ctr"/>
+          <a:lstStyle/>
+          <a:p>
+            <a:pPr rtl="1" algn="r" indent="0" marL="0">
+              <a:buNone/>
+            </a:pPr>
+            <a:r>
+              <a:rPr lang="en-US" sz="1700" b="1" dirty="0">
+                <a:solidFill>
+                  <a:srgbClr val="1B1F3B"/>
+                </a:solidFill>
+                <a:latin typeface="Arial" pitchFamily="34" charset="0"/>
+                <a:ea typeface="Arial" pitchFamily="34" charset="-122"/>
+                <a:cs typeface="Arial" pitchFamily="34" charset="-120"/>
+              </a:rPr>
+              <a:t>שבוע הבא: </a:t>
+            </a:r>
+            <a:pPr rtl="1" algn="r" indent="0" marL="0">
+              <a:buNone/>
+            </a:pPr>
+            <a:r>
+              <a:rPr lang="en-US" sz="1700" dirty="0">
+                <a:solidFill>
+                  <a:srgbClr val="1B1F3B"/>
+                </a:solidFill>
+                <a:latin typeface="Arial" pitchFamily="34" charset="0"/>
+                <a:ea typeface="Arial" pitchFamily="34" charset="-122"/>
+                <a:cs typeface="Arial" pitchFamily="34" charset="-120"/>
+              </a:rPr>
+              <a:t>Context Engineering — איך "מזינים" לכלי את מה שהוא צריך לדעת על הפרויקט שלכם</a:t>
+            </a:r>
+            <a:endParaRPr lang="en-US" sz="1700" dirty="0"/>
+          </a:p>
+        </p:txBody>
+      </p:sp>
+      <p:sp>
+        <p:nvSpPr>
+          <p:cNvPr id="6" name="Text 4"/>
+          <p:cNvSpPr/>
+          <p:nvPr/>
+        </p:nvSpPr>
+        <p:spPr>
+          <a:xfrm>
+            <a:off x="548640" y="4480560"/>
+            <a:ext cx="11091672" cy="457200"/>
+          </a:xfrm>
+          <a:prstGeom prst="rect">
+            <a:avLst/>
+          </a:prstGeom>
+          <a:noFill/>
+          <a:ln/>
+        </p:spPr>
+        <p:txBody>
+          <a:bodyPr wrap="square" lIns="0" tIns="0" rIns="0" bIns="0" rtlCol="0" anchor="ctr"/>
+          <a:lstStyle/>
+          <a:p>
+            <a:pPr rtl="1" algn="r" indent="0" marL="0">
+              <a:buNone/>
+            </a:pPr>
+            <a:r>
+              <a:rPr lang="en-US" sz="1300" i="1" dirty="0">
+                <a:solidFill>
+                  <a:srgbClr val="6B7280"/>
+                </a:solidFill>
+                <a:latin typeface="Calibri" pitchFamily="34" charset="0"/>
+                <a:ea typeface="Calibri" pitchFamily="34" charset="-122"/>
+                <a:cs typeface="Calibri" pitchFamily="34" charset="-120"/>
+              </a:rPr>
+              <a:t>בהמשך הקורס: עבודה עם קוד קיים (שבוע 4) · Agents (שבוע 5) · תכנון לפני קוד (שבוע 6) · עד פריסה מלאה בענן ואבטחה (שבועות 11-12)</a:t>
+            </a:r>
+            <a:endParaRPr lang="en-US" sz="1300" dirty="0"/>
+          </a:p>
+        </p:txBody>
+      </p:sp>
+      <p:sp>
+        <p:nvSpPr>
+          <p:cNvPr id="7" name="Text 5"/>
+          <p:cNvSpPr/>
+          <p:nvPr/>
+        </p:nvSpPr>
+        <p:spPr>
+          <a:xfrm>
+            <a:off x="548640" y="6492240"/>
+            <a:ext cx="11091672" cy="274320"/>
+          </a:xfrm>
+          <a:prstGeom prst="rect">
+            <a:avLst/>
+          </a:prstGeom>
+          <a:noFill/>
+          <a:ln/>
+        </p:spPr>
+        <p:txBody>
+          <a:bodyPr wrap="square" lIns="0" tIns="0" rIns="0" bIns="0" rtlCol="0" anchor="ctr"/>
+          <a:lstStyle/>
+          <a:p>
+            <a:pPr rtl="1" algn="r" indent="0" marL="0">
+              <a:buNone/>
+            </a:pPr>
+            <a:r>
+              <a:rPr lang="en-US" sz="900" dirty="0">
+                <a:solidFill>
+                  <a:srgbClr val="A6A6B0"/>
+                </a:solidFill>
+                <a:latin typeface="Calibri" pitchFamily="34" charset="0"/>
+                <a:ea typeface="Calibri" pitchFamily="34" charset="-122"/>
+                <a:cs typeface="Calibri" pitchFamily="34" charset="-120"/>
+              </a:rPr>
+              <a:t>Vibe Coding · שיעור 2 · שקף 28</a:t>
+            </a:r>
+            <a:endParaRPr lang="en-US" sz="900" dirty="0"/>
+          </a:p>
+        </p:txBody>
+      </p:sp>
+    </p:spTree>
+  </p:cSld>
+  <p:clrMapOvr>
+    <a:masterClrMapping/>
+  </p:clrMapOvr>
+</p:sld>
+</file>
+
+<file path=ppt/slides/slide29.xml><?xml version="1.0" encoding="utf-8"?>
+<p:sld xmlns:a="http://schemas.openxmlformats.org/drawingml/2006/main" xmlns:r="http://schemas.openxmlformats.org/officeDocument/2006/relationships" xmlns:p="http://schemas.openxmlformats.org/presentationml/2006/main">
+  <p:cSld name="Slide 29">
+    <p:bg>
+      <p:bgPr>
+        <a:solidFill>
+          <a:srgbClr val="FFFFFF"/>
+        </a:solidFill>
+      </p:bgPr>
+    </p:bg>
+    <p:spTree>
+      <p:nvGrpSpPr>
+        <p:cNvPr id="1" name=""/>
+        <p:cNvGrpSpPr/>
+        <p:nvPr/>
+      </p:nvGrpSpPr>
+      <p:grpSpPr>
+        <a:xfrm>
+          <a:off x="0" y="0"/>
+          <a:ext cx="0" cy="0"/>
+          <a:chOff x="0" y="0"/>
+          <a:chExt cx="0" cy="0"/>
+        </a:xfrm>
+      </p:grpSpPr>
+      <p:sp>
+        <p:nvSpPr>
+          <p:cNvPr id="2" name="Text 0"/>
+          <p:cNvSpPr/>
+          <p:nvPr/>
+        </p:nvSpPr>
+        <p:spPr>
+          <a:xfrm>
+            <a:off x="548640" y="320040"/>
+            <a:ext cx="11091672" cy="685800"/>
+          </a:xfrm>
+          <a:prstGeom prst="rect">
+            <a:avLst/>
+          </a:prstGeom>
+          <a:noFill/>
+          <a:ln/>
+        </p:spPr>
+        <p:txBody>
+          <a:bodyPr wrap="square" lIns="0" tIns="0" rIns="0" bIns="0" rtlCol="0" anchor="ctr"/>
+          <a:lstStyle/>
+          <a:p>
+            <a:pPr rtl="1" algn="r" indent="0" marL="0">
+              <a:buNone/>
+            </a:pPr>
+            <a:r>
+              <a:rPr lang="en-US" sz="2800" b="1" dirty="0">
+                <a:solidFill>
+                  <a:srgbClr val="1B1F3B"/>
+                </a:solidFill>
+                <a:latin typeface="Arial" pitchFamily="34" charset="0"/>
+                <a:ea typeface="Arial" pitchFamily="34" charset="-122"/>
+                <a:cs typeface="Arial" pitchFamily="34" charset="-120"/>
+              </a:rPr>
+              <a:t>מקורות</a:t>
+            </a:r>
+            <a:endParaRPr lang="en-US" sz="2800" dirty="0"/>
+          </a:p>
+        </p:txBody>
+      </p:sp>
+      <p:sp>
+        <p:nvSpPr>
+          <p:cNvPr id="3" name="Text 1"/>
+          <p:cNvSpPr/>
+          <p:nvPr/>
+        </p:nvSpPr>
+        <p:spPr>
+          <a:xfrm>
+            <a:off x="548640" y="1371600"/>
+            <a:ext cx="11091672" cy="2377440"/>
+          </a:xfrm>
+          <a:prstGeom prst="rect">
+            <a:avLst/>
+          </a:prstGeom>
+          <a:noFill/>
+          <a:ln/>
+        </p:spPr>
+        <p:txBody>
+          <a:bodyPr wrap="square" lIns="0" tIns="0" rIns="0" bIns="0" rtlCol="0" anchor="ctr"/>
+          <a:lstStyle/>
+          <a:p>
+            <a:pPr rtl="1" algn="r" indent="0" marL="0">
+              <a:buNone/>
+            </a:pPr>
+            <a:r>
+              <a:rPr lang="en-US" sz="1500" dirty="0">
+                <a:solidFill>
+                  <a:srgbClr val="1B1F3B"/>
+                </a:solidFill>
+                <a:latin typeface="Calibri" pitchFamily="34" charset="0"/>
+                <a:ea typeface="Calibri" pitchFamily="34" charset="-122"/>
+                <a:cs typeface="Calibri" pitchFamily="34" charset="-120"/>
+              </a:rPr>
+              <a:t>Kinsta &amp; Skillademia — GitHub Statistics 2026 · DigitalApplied &amp; MorphLLM — Benchmark Guides 2026 · swebench.com · tbench.ai · metr.org/time-horizons · Stack Overflow Developer Survey 2025 (survey.stackoverflow.co/2025) · index.dev 2026 · DORA — ROI of AI-Assisted Software Development, 2026 · cursor.com/pricing · docs.github.com/copilot/plans · education.github.com/pack · Yahoo Tech / Digital Trends (מקרה Amazon, מרץ 2026)</a:t>
+            </a:r>
+            <a:endParaRPr lang="en-US" sz="1500" dirty="0"/>
+          </a:p>
+        </p:txBody>
+      </p:sp>
+      <p:sp>
+        <p:nvSpPr>
+          <p:cNvPr id="4" name="Text 2"/>
+          <p:cNvSpPr/>
+          <p:nvPr/>
+        </p:nvSpPr>
+        <p:spPr>
+          <a:xfrm>
+            <a:off x="548640" y="3931920"/>
+            <a:ext cx="11091672" cy="365760"/>
+          </a:xfrm>
+          <a:prstGeom prst="rect">
+            <a:avLst/>
+          </a:prstGeom>
+          <a:noFill/>
+          <a:ln/>
+        </p:spPr>
+        <p:txBody>
+          <a:bodyPr wrap="square" lIns="0" tIns="0" rIns="0" bIns="0" rtlCol="0" anchor="ctr"/>
+          <a:lstStyle/>
+          <a:p>
+            <a:pPr rtl="1" algn="r" indent="0" marL="0">
+              <a:buNone/>
+            </a:pPr>
+            <a:r>
+              <a:rPr lang="en-US" sz="1200" i="1" dirty="0">
+                <a:solidFill>
+                  <a:srgbClr val="6B7280"/>
+                </a:solidFill>
+                <a:latin typeface="Calibri" pitchFamily="34" charset="0"/>
+                <a:ea typeface="Calibri" pitchFamily="34" charset="-122"/>
+                <a:cs typeface="Calibri" pitchFamily="34" charset="-120"/>
+              </a:rPr>
+              <a:t>פירוט מלא: references.md — כל הנתונים נבדקו ביולי 2026 ועשויים להשתנות</a:t>
+            </a:r>
+            <a:endParaRPr lang="en-US" sz="1200" dirty="0"/>
+          </a:p>
+        </p:txBody>
+      </p:sp>
+      <p:sp>
+        <p:nvSpPr>
+          <p:cNvPr id="5" name="Text 3"/>
+          <p:cNvSpPr/>
+          <p:nvPr/>
+        </p:nvSpPr>
+        <p:spPr>
+          <a:xfrm>
+            <a:off x="548640" y="6492240"/>
+            <a:ext cx="11091672" cy="274320"/>
+          </a:xfrm>
+          <a:prstGeom prst="rect">
+            <a:avLst/>
+          </a:prstGeom>
+          <a:noFill/>
+          <a:ln/>
+        </p:spPr>
+        <p:txBody>
+          <a:bodyPr wrap="square" lIns="0" tIns="0" rIns="0" bIns="0" rtlCol="0" anchor="ctr"/>
+          <a:lstStyle/>
+          <a:p>
+            <a:pPr rtl="1" algn="r" indent="0" marL="0">
+              <a:buNone/>
+            </a:pPr>
+            <a:r>
+              <a:rPr lang="en-US" sz="900" dirty="0">
+                <a:solidFill>
+                  <a:srgbClr val="A6A6B0"/>
+                </a:solidFill>
+                <a:latin typeface="Calibri" pitchFamily="34" charset="0"/>
+                <a:ea typeface="Calibri" pitchFamily="34" charset="-122"/>
+                <a:cs typeface="Calibri" pitchFamily="34" charset="-120"/>
+              </a:rPr>
+              <a:t>Vibe Coding · שיעור 2 · שקף 29</a:t>
             </a:r>
             <a:endParaRPr lang="en-US" sz="900" dirty="0"/>
           </a:p>
@@ -8987,7 +11307,7 @@
         <p:spPr>
           <a:xfrm>
             <a:off x="548640" y="5669280"/>
-            <a:ext cx="11091672" cy="868680"/>
+            <a:ext cx="11091672" cy="621792"/>
           </a:xfrm>
           <a:prstGeom prst="rect">
             <a:avLst/>
@@ -9412,7 +11732,7 @@
         <p:spPr>
           <a:xfrm>
             <a:off x="548640" y="5669280"/>
-            <a:ext cx="11091672" cy="868680"/>
+            <a:ext cx="11091672" cy="621792"/>
           </a:xfrm>
           <a:prstGeom prst="rect">
             <a:avLst/>
@@ -9804,7 +12124,7 @@
         <p:spPr>
           <a:xfrm>
             <a:off x="548640" y="5669280"/>
-            <a:ext cx="11091672" cy="868680"/>
+            <a:ext cx="11091672" cy="621792"/>
           </a:xfrm>
           <a:prstGeom prst="rect">
             <a:avLst/>
@@ -10190,7 +12510,7 @@
         <p:spPr>
           <a:xfrm>
             <a:off x="548640" y="5394960"/>
-            <a:ext cx="11091672" cy="868680"/>
+            <a:ext cx="11091672" cy="457200"/>
           </a:xfrm>
           <a:prstGeom prst="rect">
             <a:avLst/>
@@ -10228,7 +12548,7 @@
         </p:nvSpPr>
         <p:spPr>
           <a:xfrm>
-            <a:off x="548640" y="6172200"/>
+            <a:off x="548640" y="5961888"/>
             <a:ext cx="11091672" cy="274320"/>
           </a:xfrm>
           <a:prstGeom prst="rect">
@@ -10561,7 +12881,7 @@
         <p:spPr>
           <a:xfrm>
             <a:off x="548640" y="5669280"/>
-            <a:ext cx="11091672" cy="868680"/>
+            <a:ext cx="11091672" cy="457200"/>
           </a:xfrm>
           <a:prstGeom prst="rect">
             <a:avLst/>
@@ -10911,7 +13231,7 @@
         <p:spPr>
           <a:xfrm>
             <a:off x="548640" y="5669280"/>
-            <a:ext cx="11091672" cy="868680"/>
+            <a:ext cx="11091672" cy="457200"/>
           </a:xfrm>
           <a:prstGeom prst="rect">
             <a:avLst/>
@@ -11045,7 +13365,7 @@
                 <a:ea typeface="Arial" pitchFamily="34" charset="-122"/>
                 <a:cs typeface="Arial" pitchFamily="34" charset="-120"/>
               </a:rPr>
-              <a:t>איך מודדים "כמה טוב" כלי אג'נטי?</a:t>
+              <a:t>פעילות בזוגות: Autocomplete או Agentic?</a:t>
             </a:r>
             <a:endParaRPr lang="en-US" sz="2800" dirty="0"/>
           </a:p>
@@ -11059,46 +13379,7 @@
         </p:nvSpPr>
         <p:spPr>
           <a:xfrm>
-            <a:off x="548640" y="1024128"/>
-            <a:ext cx="11091672" cy="411480"/>
-          </a:xfrm>
-          <a:prstGeom prst="rect">
-            <a:avLst/>
-          </a:prstGeom>
-          <a:noFill/>
-          <a:ln/>
-        </p:spPr>
-        <p:txBody>
-          <a:bodyPr wrap="square" lIns="0" tIns="0" rIns="0" bIns="0" rtlCol="0" anchor="ctr"/>
-          <a:lstStyle/>
-          <a:p>
-            <a:pPr rtl="1" algn="r" indent="0" marL="0">
-              <a:buNone/>
-            </a:pPr>
-            <a:r>
-              <a:rPr lang="en-US" sz="1700" i="1" dirty="0">
-                <a:solidFill>
-                  <a:srgbClr val="6B7280"/>
-                </a:solidFill>
-                <a:latin typeface="Calibri" pitchFamily="34" charset="0"/>
-                <a:ea typeface="Calibri" pitchFamily="34" charset="-122"/>
-                <a:cs typeface="Calibri" pitchFamily="34" charset="-120"/>
-              </a:rPr>
-              <a:t>השאלה: איך משווים בין כלי AI שונים בצורה אובייקטיבית?</a:t>
-            </a:r>
-            <a:endParaRPr lang="en-US" sz="1700" dirty="0"/>
-          </a:p>
-        </p:txBody>
-      </p:sp>
-      <p:sp>
-        <p:nvSpPr>
-          <p:cNvPr id="4" name="Text 2"/>
-          <p:cNvSpPr/>
-          <p:nvPr/>
-        </p:nvSpPr>
-        <p:spPr>
-          <a:xfrm>
-            <a:off x="548640" y="1508760"/>
+            <a:off x="548640" y="1234440"/>
             <a:ext cx="11091672" cy="3931920"/>
           </a:xfrm>
           <a:prstGeom prst="rect">
@@ -11119,6 +13400,24 @@
               <a:buChar char="•"/>
             </a:pPr>
             <a:r>
+              <a:rPr lang="en-US" sz="1900" b="1" dirty="0">
+                <a:solidFill>
+                  <a:srgbClr val="1B1F3B"/>
+                </a:solidFill>
+                <a:latin typeface="Calibri" pitchFamily="34" charset="0"/>
+                <a:ea typeface="Calibri" pitchFamily="34" charset="-122"/>
+                <a:cs typeface="Calibri" pitchFamily="34" charset="-120"/>
+              </a:rPr>
+              <a:t>המשימה (2-3 דקות בזוגות):</a:t>
+            </a:r>
+            <a:pPr rtl="1" algn="r" marL="228600" indent="-228600">
+              <a:spcAft>
+                <a:spcPts val="1000"/>
+              </a:spcAft>
+              <a:buSzPct val="100000"/>
+              <a:buChar char="•"/>
+            </a:pPr>
+            <a:r>
               <a:rPr lang="en-US" sz="1900" dirty="0">
                 <a:solidFill>
                   <a:srgbClr val="1B1F3B"/>
@@ -11127,8 +13426,11 @@
                 <a:ea typeface="Calibri" pitchFamily="34" charset="-122"/>
                 <a:cs typeface="Calibri" pitchFamily="34" charset="-120"/>
               </a:rPr>
-              <a:t>הדרך המקצועית היא בנצ'מארקים (מבחני השוואה סטנדרטיים): </a:t>
-            </a:r>
+              <a:t> לכל אחת מהמשימות הבאות, קבעו יחד — מספיק Autocomplete בסיסי, או צריך כלי Agentic מלא? נמקו.</a:t>
+            </a:r>
+            <a:endParaRPr lang="en-US" sz="1900" dirty="0"/>
+          </a:p>
+          <a:p>
             <a:pPr rtl="1" algn="r" marL="228600" indent="-228600">
               <a:spcAft>
                 <a:spcPts val="1000"/>
@@ -11145,7 +13447,7 @@
                 <a:ea typeface="Calibri" pitchFamily="34" charset="-122"/>
                 <a:cs typeface="Calibri" pitchFamily="34" charset="-120"/>
               </a:rPr>
-              <a:t>SWE-bench</a:t>
+              <a:t>1.</a:t>
             </a:r>
             <a:pPr rtl="1" algn="r" marL="228600" indent="-228600">
               <a:spcAft>
@@ -11163,8 +13465,11 @@
                 <a:ea typeface="Calibri" pitchFamily="34" charset="-122"/>
                 <a:cs typeface="Calibri" pitchFamily="34" charset="-120"/>
               </a:rPr>
-              <a:t> (בעיות תכנות אמיתיות שנאספו מ-GitHub) ו-</a:t>
-            </a:r>
+              <a:t> להשלים שם משתנה שכבר התחלתם להקליד</a:t>
+            </a:r>
+            <a:endParaRPr lang="en-US" sz="1900" dirty="0"/>
+          </a:p>
+          <a:p>
             <a:pPr rtl="1" algn="r" marL="228600" indent="-228600">
               <a:spcAft>
                 <a:spcPts val="1000"/>
@@ -11181,7 +13486,7 @@
                 <a:ea typeface="Calibri" pitchFamily="34" charset="-122"/>
                 <a:cs typeface="Calibri" pitchFamily="34" charset="-120"/>
               </a:rPr>
-              <a:t>Terminal-Bench</a:t>
+              <a:t>2.</a:t>
             </a:r>
             <a:pPr rtl="1" algn="r" marL="228600" indent="-228600">
               <a:spcAft>
@@ -11199,7 +13504,7 @@
                 <a:ea typeface="Calibri" pitchFamily="34" charset="-122"/>
                 <a:cs typeface="Calibri" pitchFamily="34" charset="-120"/>
               </a:rPr>
-              <a:t> (משימות טרמינל/שורת-פקודה מורכבות)</a:t>
+              <a:t> להוסיף מסך "התחברות" שלם לאפליקציה, כולל שמירה במסד נתונים</a:t>
             </a:r>
             <a:endParaRPr lang="en-US" sz="1900" dirty="0"/>
           </a:p>
@@ -11220,7 +13525,7 @@
                 <a:ea typeface="Calibri" pitchFamily="34" charset="-122"/>
                 <a:cs typeface="Calibri" pitchFamily="34" charset="-120"/>
               </a:rPr>
-              <a:t>אזהרה מקצועית:</a:t>
+              <a:t>3.</a:t>
             </a:r>
             <a:pPr rtl="1" algn="r" marL="228600" indent="-228600">
               <a:spcAft>
@@ -11238,7 +13543,7 @@
                 <a:ea typeface="Calibri" pitchFamily="34" charset="-122"/>
                 <a:cs typeface="Calibri" pitchFamily="34" charset="-120"/>
               </a:rPr>
-              <a:t> יש היום חמש גרסאות שונות של SWE-bench (Original, Verified, Pro, Multilingual, Live), וההשוואה ביניהן לא תמיד הוגנת</a:t>
+              <a:t> לתקן שגיאת הזחה (Indentation) בשורה בודדת</a:t>
             </a:r>
             <a:endParaRPr lang="en-US" sz="1900" dirty="0"/>
           </a:p>
@@ -11251,6 +13556,24 @@
               <a:buChar char="•"/>
             </a:pPr>
             <a:r>
+              <a:rPr lang="en-US" sz="1900" b="1" dirty="0">
+                <a:solidFill>
+                  <a:srgbClr val="1B1F3B"/>
+                </a:solidFill>
+                <a:latin typeface="Calibri" pitchFamily="34" charset="0"/>
+                <a:ea typeface="Calibri" pitchFamily="34" charset="-122"/>
+                <a:cs typeface="Calibri" pitchFamily="34" charset="-120"/>
+              </a:rPr>
+              <a:t>4.</a:t>
+            </a:r>
+            <a:pPr rtl="1" algn="r" marL="228600" indent="-228600">
+              <a:spcAft>
+                <a:spcPts val="1000"/>
+              </a:spcAft>
+              <a:buSzPct val="100000"/>
+              <a:buChar char="•"/>
+            </a:pPr>
+            <a:r>
               <a:rPr lang="en-US" sz="1900" dirty="0">
                 <a:solidFill>
                   <a:srgbClr val="1B1F3B"/>
@@ -11259,43 +13582,7 @@
                 <a:ea typeface="Calibri" pitchFamily="34" charset="-122"/>
                 <a:cs typeface="Calibri" pitchFamily="34" charset="-120"/>
               </a:rPr>
-              <a:t>אפילו על אותם משקלי מודל בדיוק, יש שונות (Variance) של 10-20 נקודות אחוז, בהתאם ל-</a:t>
-            </a:r>
-            <a:pPr rtl="1" algn="r" marL="228600" indent="-228600">
-              <a:spcAft>
-                <a:spcPts val="1000"/>
-              </a:spcAft>
-              <a:buSzPct val="100000"/>
-              <a:buChar char="•"/>
-            </a:pPr>
-            <a:r>
-              <a:rPr lang="en-US" sz="1900" b="1" dirty="0">
-                <a:solidFill>
-                  <a:srgbClr val="1B1F3B"/>
-                </a:solidFill>
-                <a:latin typeface="Calibri" pitchFamily="34" charset="0"/>
-                <a:ea typeface="Calibri" pitchFamily="34" charset="-122"/>
-                <a:cs typeface="Calibri" pitchFamily="34" charset="-120"/>
-              </a:rPr>
-              <a:t>Harness</a:t>
-            </a:r>
-            <a:pPr rtl="1" algn="r" marL="228600" indent="-228600">
-              <a:spcAft>
-                <a:spcPts val="1000"/>
-              </a:spcAft>
-              <a:buSzPct val="100000"/>
-              <a:buChar char="•"/>
-            </a:pPr>
-            <a:r>
-              <a:rPr lang="en-US" sz="1900" dirty="0">
-                <a:solidFill>
-                  <a:srgbClr val="1B1F3B"/>
-                </a:solidFill>
-                <a:latin typeface="Calibri" pitchFamily="34" charset="0"/>
-                <a:ea typeface="Calibri" pitchFamily="34" charset="-122"/>
-                <a:cs typeface="Calibri" pitchFamily="34" charset="-120"/>
-              </a:rPr>
-              <a:t> (התשתית הטכנית שמריצה את הבדיקה בפועל)</a:t>
+              <a:t> לעדכן פונקציה אחת בעשרה קבצים שונים בפרויקט, בעקביות</a:t>
             </a:r>
             <a:endParaRPr lang="en-US" sz="1900" dirty="0"/>
           </a:p>
@@ -11303,13 +13590,13 @@
       </p:sp>
       <p:sp>
         <p:nvSpPr>
-          <p:cNvPr id="5" name="Shape 3"/>
-          <p:cNvSpPr/>
-          <p:nvPr/>
-        </p:nvSpPr>
-        <p:spPr>
-          <a:xfrm>
-            <a:off x="548640" y="5577840"/>
+          <p:cNvPr id="4" name="Shape 2"/>
+          <p:cNvSpPr/>
+          <p:nvPr/>
+        </p:nvSpPr>
+        <p:spPr>
+          <a:xfrm>
+            <a:off x="548640" y="5303520"/>
             <a:ext cx="11091672" cy="0"/>
           </a:xfrm>
           <a:prstGeom prst="line">
@@ -11326,14 +13613,14 @@
       </p:sp>
       <p:sp>
         <p:nvSpPr>
-          <p:cNvPr id="6" name="Text 4"/>
-          <p:cNvSpPr/>
-          <p:nvPr/>
-        </p:nvSpPr>
-        <p:spPr>
-          <a:xfrm>
-            <a:off x="548640" y="5669280"/>
-            <a:ext cx="11091672" cy="868680"/>
+          <p:cNvPr id="5" name="Text 3"/>
+          <p:cNvSpPr/>
+          <p:nvPr/>
+        </p:nvSpPr>
+        <p:spPr>
+          <a:xfrm>
+            <a:off x="548640" y="5394960"/>
+            <a:ext cx="11091672" cy="932688"/>
           </a:xfrm>
           <a:prstGeom prst="rect">
             <a:avLst/>
@@ -11357,7 +13644,7 @@
                 <a:ea typeface="Arial" pitchFamily="34" charset="-122"/>
                 <a:cs typeface="Arial" pitchFamily="34" charset="-120"/>
               </a:rPr>
-              <a:t>✔ מה עושים בפועל: תמיד בודקים את המתודולוגיה מאחורי מספר בנצ'מארק לפני שסומכים עליו — בדיוק כמו שבודקים מתודולוגיה לפני שסומכים על הערכת מודל בכל הקשר אחר שאתם מכירים.</a:t>
+              <a:t>✔ מה עושים בפועל: התשובה הצפויה: 1+3 = Autocomplete מספיק (שינוי נקודתי, הקשר מקומי); 2+4 = דורש Agentic (משימה שמשתרעת על כמה קבצים ודורשת החלטות). אם זוג מתלבט על 4 — זה בדיוק הרגע להסביר שגם "עדכון עקבי" הוא סוג של החלטה שדורשת הבנת הקשר רחב, לא רק השלמת טקסט.</a:t>
             </a:r>
             <a:endParaRPr lang="en-US" sz="1700" dirty="0"/>
           </a:p>
@@ -11365,7 +13652,7 @@
       </p:sp>
       <p:sp>
         <p:nvSpPr>
-          <p:cNvPr id="7" name="Text 5"/>
+          <p:cNvPr id="6" name="Text 4"/>
           <p:cNvSpPr/>
           <p:nvPr/>
         </p:nvSpPr>

--- a/lesson_02/lesson_02_slides.pptx
+++ b/lesson_02/lesson_02_slides.pptx
@@ -4937,7 +4937,7 @@
         <p:spPr>
           <a:xfrm>
             <a:off x="548640" y="1508760"/>
-            <a:ext cx="11091672" cy="3730752"/>
+            <a:ext cx="11091672" cy="2112264"/>
           </a:xfrm>
           <a:prstGeom prst="rect">
             <a:avLst/>
@@ -5093,7 +5093,222 @@
         </p:nvSpPr>
         <p:spPr>
           <a:xfrm>
-            <a:off x="548640" y="5376672"/>
+            <a:off x="4997196" y="4160520"/>
+            <a:ext cx="822960" cy="274320"/>
+          </a:xfrm>
+          <a:prstGeom prst="rect">
+            <a:avLst/>
+          </a:prstGeom>
+          <a:solidFill>
+            <a:srgbClr val="B8B8C8"/>
+          </a:solidFill>
+          <a:ln/>
+        </p:spPr>
+      </p:sp>
+      <p:sp>
+        <p:nvSpPr>
+          <p:cNvPr id="6" name="Text 4"/>
+          <p:cNvSpPr/>
+          <p:nvPr/>
+        </p:nvSpPr>
+        <p:spPr>
+          <a:xfrm>
+            <a:off x="4677156" y="4480560"/>
+            <a:ext cx="1463040" cy="411480"/>
+          </a:xfrm>
+          <a:prstGeom prst="rect">
+            <a:avLst/>
+          </a:prstGeom>
+          <a:noFill/>
+          <a:ln/>
+        </p:spPr>
+        <p:txBody>
+          <a:bodyPr wrap="square" lIns="0" tIns="0" rIns="0" bIns="0" rtlCol="0" anchor="t"/>
+          <a:lstStyle/>
+          <a:p>
+            <a:pPr rtl="1" algn="ctr" indent="0" marL="0">
+              <a:buNone/>
+            </a:pPr>
+            <a:r>
+              <a:rPr lang="en-US" sz="900" dirty="0">
+                <a:solidFill>
+                  <a:srgbClr val="1B1F3B"/>
+                </a:solidFill>
+                <a:latin typeface="Calibri" pitchFamily="34" charset="0"/>
+                <a:ea typeface="Calibri" pitchFamily="34" charset="-122"/>
+                <a:cs typeface="Calibri" pitchFamily="34" charset="-120"/>
+              </a:rPr>
+              <a:t>Claude 3.7 Sonnet</a:t>
+            </a:r>
+            <a:endParaRPr lang="en-US" sz="900" dirty="0"/>
+          </a:p>
+          <a:p>
+            <a:pPr rtl="1" algn="ctr" indent="0" marL="0">
+              <a:buNone/>
+            </a:pPr>
+            <a:r>
+              <a:rPr lang="en-US" sz="900" dirty="0">
+                <a:solidFill>
+                  <a:srgbClr val="1B1F3B"/>
+                </a:solidFill>
+                <a:latin typeface="Calibri" pitchFamily="34" charset="0"/>
+                <a:ea typeface="Calibri" pitchFamily="34" charset="-122"/>
+                <a:cs typeface="Calibri" pitchFamily="34" charset="-120"/>
+              </a:rPr>
+              <a:t>~50 דקות</a:t>
+            </a:r>
+            <a:endParaRPr lang="en-US" sz="900" dirty="0"/>
+          </a:p>
+        </p:txBody>
+      </p:sp>
+      <p:sp>
+        <p:nvSpPr>
+          <p:cNvPr id="7" name="Shape 5"/>
+          <p:cNvSpPr/>
+          <p:nvPr/>
+        </p:nvSpPr>
+        <p:spPr>
+          <a:xfrm>
+            <a:off x="6368796" y="3758184"/>
+            <a:ext cx="822960" cy="676656"/>
+          </a:xfrm>
+          <a:prstGeom prst="rect">
+            <a:avLst/>
+          </a:prstGeom>
+          <a:solidFill>
+            <a:srgbClr val="00A88A"/>
+          </a:solidFill>
+          <a:ln/>
+        </p:spPr>
+      </p:sp>
+      <p:sp>
+        <p:nvSpPr>
+          <p:cNvPr id="8" name="Text 6"/>
+          <p:cNvSpPr/>
+          <p:nvPr/>
+        </p:nvSpPr>
+        <p:spPr>
+          <a:xfrm>
+            <a:off x="6048756" y="4480560"/>
+            <a:ext cx="1463040" cy="411480"/>
+          </a:xfrm>
+          <a:prstGeom prst="rect">
+            <a:avLst/>
+          </a:prstGeom>
+          <a:noFill/>
+          <a:ln/>
+        </p:spPr>
+        <p:txBody>
+          <a:bodyPr wrap="square" lIns="0" tIns="0" rIns="0" bIns="0" rtlCol="0" anchor="t"/>
+          <a:lstStyle/>
+          <a:p>
+            <a:pPr rtl="1" algn="ctr" indent="0" marL="0">
+              <a:buNone/>
+            </a:pPr>
+            <a:r>
+              <a:rPr lang="en-US" sz="900" dirty="0">
+                <a:solidFill>
+                  <a:srgbClr val="1B1F3B"/>
+                </a:solidFill>
+                <a:latin typeface="Calibri" pitchFamily="34" charset="0"/>
+                <a:ea typeface="Calibri" pitchFamily="34" charset="-122"/>
+                <a:cs typeface="Calibri" pitchFamily="34" charset="-120"/>
+              </a:rPr>
+              <a:t>מודלים מובילים</a:t>
+            </a:r>
+            <a:endParaRPr lang="en-US" sz="900" dirty="0"/>
+          </a:p>
+          <a:p>
+            <a:pPr rtl="1" algn="ctr" indent="0" marL="0">
+              <a:buNone/>
+            </a:pPr>
+            <a:r>
+              <a:rPr lang="en-US" sz="900" dirty="0">
+                <a:solidFill>
+                  <a:srgbClr val="1B1F3B"/>
+                </a:solidFill>
+                <a:latin typeface="Calibri" pitchFamily="34" charset="0"/>
+                <a:ea typeface="Calibri" pitchFamily="34" charset="-122"/>
+                <a:cs typeface="Calibri" pitchFamily="34" charset="-120"/>
+              </a:rPr>
+              <a:t>אמצע 2026: ~12 שעות</a:t>
+            </a:r>
+            <a:endParaRPr lang="en-US" sz="900" dirty="0"/>
+          </a:p>
+        </p:txBody>
+      </p:sp>
+      <p:sp>
+        <p:nvSpPr>
+          <p:cNvPr id="9" name="Shape 7"/>
+          <p:cNvSpPr/>
+          <p:nvPr/>
+        </p:nvSpPr>
+        <p:spPr>
+          <a:xfrm>
+            <a:off x="7328916" y="3859682"/>
+            <a:ext cx="0" cy="473659"/>
+          </a:xfrm>
+          <a:prstGeom prst="line">
+            <a:avLst/>
+          </a:prstGeom>
+          <a:noFill/>
+          <a:ln w="12700">
+            <a:solidFill>
+              <a:srgbClr val="6B7280"/>
+            </a:solidFill>
+            <a:prstDash val="dash"/>
+            <a:headEnd type="triangle"/>
+          </a:ln>
+        </p:spPr>
+      </p:sp>
+      <p:sp>
+        <p:nvSpPr>
+          <p:cNvPr id="10" name="Text 8"/>
+          <p:cNvSpPr/>
+          <p:nvPr/>
+        </p:nvSpPr>
+        <p:spPr>
+          <a:xfrm>
+            <a:off x="548640" y="4983480"/>
+            <a:ext cx="11091672" cy="274320"/>
+          </a:xfrm>
+          <a:prstGeom prst="rect">
+            <a:avLst/>
+          </a:prstGeom>
+          <a:noFill/>
+          <a:ln/>
+        </p:spPr>
+        <p:txBody>
+          <a:bodyPr wrap="square" lIns="0" tIns="0" rIns="0" bIns="0" rtlCol="0" anchor="ctr"/>
+          <a:lstStyle/>
+          <a:p>
+            <a:pPr rtl="1" algn="r" indent="0" marL="0">
+              <a:buNone/>
+            </a:pPr>
+            <a:r>
+              <a:rPr lang="en-US" sz="1000" i="1" dirty="0">
+                <a:solidFill>
+                  <a:srgbClr val="6B7280"/>
+                </a:solidFill>
+                <a:latin typeface="Calibri" pitchFamily="34" charset="0"/>
+                <a:ea typeface="Calibri" pitchFamily="34" charset="-122"/>
+                <a:cs typeface="Calibri" pitchFamily="34" charset="-120"/>
+              </a:rPr>
+              <a:t>איור: המחשה (לא לפי קנה-מידה): אופק הזמן גדל משמעותית בין דורות מודלים - מדקות בודדות לשעות ארוכות.</a:t>
+            </a:r>
+            <a:endParaRPr lang="en-US" sz="1000" dirty="0"/>
+          </a:p>
+        </p:txBody>
+      </p:sp>
+      <p:sp>
+        <p:nvSpPr>
+          <p:cNvPr id="11" name="Shape 9"/>
+          <p:cNvSpPr/>
+          <p:nvPr/>
+        </p:nvSpPr>
+        <p:spPr>
+          <a:xfrm>
+            <a:off x="548640" y="5239512"/>
             <a:ext cx="11091672" cy="0"/>
           </a:xfrm>
           <a:prstGeom prst="line">
@@ -5110,13 +5325,13 @@
       </p:sp>
       <p:sp>
         <p:nvSpPr>
-          <p:cNvPr id="6" name="Text 4"/>
-          <p:cNvSpPr/>
-          <p:nvPr/>
-        </p:nvSpPr>
-        <p:spPr>
-          <a:xfrm>
-            <a:off x="548640" y="5468112"/>
+          <p:cNvPr id="12" name="Text 10"/>
+          <p:cNvSpPr/>
+          <p:nvPr/>
+        </p:nvSpPr>
+        <p:spPr>
+          <a:xfrm>
+            <a:off x="548640" y="5330952"/>
             <a:ext cx="11091672" cy="621792"/>
           </a:xfrm>
           <a:prstGeom prst="rect">
@@ -5149,13 +5364,13 @@
       </p:sp>
       <p:sp>
         <p:nvSpPr>
-          <p:cNvPr id="7" name="Text 5"/>
-          <p:cNvSpPr/>
-          <p:nvPr/>
-        </p:nvSpPr>
-        <p:spPr>
-          <a:xfrm>
-            <a:off x="548640" y="6199632"/>
+          <p:cNvPr id="13" name="Text 11"/>
+          <p:cNvSpPr/>
+          <p:nvPr/>
+        </p:nvSpPr>
+        <p:spPr>
+          <a:xfrm>
+            <a:off x="548640" y="6062472"/>
             <a:ext cx="11091672" cy="274320"/>
           </a:xfrm>
           <a:prstGeom prst="rect">
@@ -5188,7 +5403,7 @@
       </p:sp>
       <p:sp>
         <p:nvSpPr>
-          <p:cNvPr id="8" name="Text 6"/>
+          <p:cNvPr id="14" name="Text 12"/>
           <p:cNvSpPr/>
           <p:nvPr/>
         </p:nvSpPr>
@@ -5344,7 +5559,7 @@
         <p:spPr>
           <a:xfrm>
             <a:off x="548640" y="1508760"/>
-            <a:ext cx="11091672" cy="3931920"/>
+            <a:ext cx="11091672" cy="2295144"/>
           </a:xfrm>
           <a:prstGeom prst="rect">
             <a:avLst/>
@@ -5578,7 +5793,462 @@
         </p:nvSpPr>
         <p:spPr>
           <a:xfrm>
-            <a:off x="548640" y="5577840"/>
+            <a:off x="11137392" y="4311396"/>
+            <a:ext cx="502920" cy="502920"/>
+          </a:xfrm>
+          <a:prstGeom prst="ellipse">
+            <a:avLst/>
+          </a:prstGeom>
+          <a:solidFill>
+            <a:srgbClr val="FFFFFF"/>
+          </a:solidFill>
+          <a:ln w="19050">
+            <a:solidFill>
+              <a:srgbClr val="00A88A"/>
+            </a:solidFill>
+            <a:prstDash val="solid"/>
+          </a:ln>
+        </p:spPr>
+      </p:sp>
+      <p:sp>
+        <p:nvSpPr>
+          <p:cNvPr id="6" name="Text 4"/>
+          <p:cNvSpPr/>
+          <p:nvPr/>
+        </p:nvSpPr>
+        <p:spPr>
+          <a:xfrm>
+            <a:off x="11137392" y="4311396"/>
+            <a:ext cx="502920" cy="502920"/>
+          </a:xfrm>
+          <a:prstGeom prst="rect">
+            <a:avLst/>
+          </a:prstGeom>
+          <a:noFill/>
+          <a:ln/>
+        </p:spPr>
+        <p:txBody>
+          <a:bodyPr wrap="square" lIns="0" tIns="0" rIns="0" bIns="0" rtlCol="0" anchor="ctr"/>
+          <a:lstStyle/>
+          <a:p>
+            <a:pPr algn="ctr" indent="0" marL="0">
+              <a:buNone/>
+            </a:pPr>
+            <a:r>
+              <a:rPr lang="en-US" sz="1300" b="1" dirty="0">
+                <a:solidFill>
+                  <a:srgbClr val="1B1F3B"/>
+                </a:solidFill>
+                <a:latin typeface="Arial" pitchFamily="34" charset="0"/>
+                <a:ea typeface="Arial" pitchFamily="34" charset="-122"/>
+                <a:cs typeface="Arial" pitchFamily="34" charset="-120"/>
+              </a:rPr>
+              <a:t>1</a:t>
+            </a:r>
+            <a:endParaRPr lang="en-US" sz="1300" dirty="0"/>
+          </a:p>
+        </p:txBody>
+      </p:sp>
+      <p:sp>
+        <p:nvSpPr>
+          <p:cNvPr id="7" name="Shape 5"/>
+          <p:cNvSpPr/>
+          <p:nvPr/>
+        </p:nvSpPr>
+        <p:spPr>
+          <a:xfrm>
+            <a:off x="9020556" y="4562856"/>
+            <a:ext cx="2089404" cy="0"/>
+          </a:xfrm>
+          <a:prstGeom prst="line">
+            <a:avLst/>
+          </a:prstGeom>
+          <a:noFill/>
+          <a:ln w="15875">
+            <a:solidFill>
+              <a:srgbClr val="B8B8C8"/>
+            </a:solidFill>
+            <a:prstDash val="solid"/>
+            <a:headEnd type="triangle"/>
+          </a:ln>
+        </p:spPr>
+      </p:sp>
+      <p:sp>
+        <p:nvSpPr>
+          <p:cNvPr id="8" name="Shape 6"/>
+          <p:cNvSpPr/>
+          <p:nvPr/>
+        </p:nvSpPr>
+        <p:spPr>
+          <a:xfrm>
+            <a:off x="8490204" y="4311396"/>
+            <a:ext cx="502920" cy="502920"/>
+          </a:xfrm>
+          <a:prstGeom prst="ellipse">
+            <a:avLst/>
+          </a:prstGeom>
+          <a:solidFill>
+            <a:srgbClr val="FFFFFF"/>
+          </a:solidFill>
+          <a:ln w="19050">
+            <a:solidFill>
+              <a:srgbClr val="00A88A"/>
+            </a:solidFill>
+            <a:prstDash val="solid"/>
+          </a:ln>
+        </p:spPr>
+      </p:sp>
+      <p:sp>
+        <p:nvSpPr>
+          <p:cNvPr id="9" name="Text 7"/>
+          <p:cNvSpPr/>
+          <p:nvPr/>
+        </p:nvSpPr>
+        <p:spPr>
+          <a:xfrm>
+            <a:off x="8490204" y="4311396"/>
+            <a:ext cx="502920" cy="502920"/>
+          </a:xfrm>
+          <a:prstGeom prst="rect">
+            <a:avLst/>
+          </a:prstGeom>
+          <a:noFill/>
+          <a:ln/>
+        </p:spPr>
+        <p:txBody>
+          <a:bodyPr wrap="square" lIns="0" tIns="0" rIns="0" bIns="0" rtlCol="0" anchor="ctr"/>
+          <a:lstStyle/>
+          <a:p>
+            <a:pPr algn="ctr" indent="0" marL="0">
+              <a:buNone/>
+            </a:pPr>
+            <a:r>
+              <a:rPr lang="en-US" sz="1300" b="1" dirty="0">
+                <a:solidFill>
+                  <a:srgbClr val="1B1F3B"/>
+                </a:solidFill>
+                <a:latin typeface="Arial" pitchFamily="34" charset="0"/>
+                <a:ea typeface="Arial" pitchFamily="34" charset="-122"/>
+                <a:cs typeface="Arial" pitchFamily="34" charset="-120"/>
+              </a:rPr>
+              <a:t>2</a:t>
+            </a:r>
+            <a:endParaRPr lang="en-US" sz="1300" dirty="0"/>
+          </a:p>
+        </p:txBody>
+      </p:sp>
+      <p:sp>
+        <p:nvSpPr>
+          <p:cNvPr id="10" name="Shape 8"/>
+          <p:cNvSpPr/>
+          <p:nvPr/>
+        </p:nvSpPr>
+        <p:spPr>
+          <a:xfrm>
+            <a:off x="6373368" y="4562856"/>
+            <a:ext cx="2089404" cy="0"/>
+          </a:xfrm>
+          <a:prstGeom prst="line">
+            <a:avLst/>
+          </a:prstGeom>
+          <a:noFill/>
+          <a:ln w="15875">
+            <a:solidFill>
+              <a:srgbClr val="B8B8C8"/>
+            </a:solidFill>
+            <a:prstDash val="solid"/>
+            <a:headEnd type="triangle"/>
+          </a:ln>
+        </p:spPr>
+      </p:sp>
+      <p:sp>
+        <p:nvSpPr>
+          <p:cNvPr id="11" name="Shape 9"/>
+          <p:cNvSpPr/>
+          <p:nvPr/>
+        </p:nvSpPr>
+        <p:spPr>
+          <a:xfrm>
+            <a:off x="5843016" y="4311396"/>
+            <a:ext cx="502920" cy="502920"/>
+          </a:xfrm>
+          <a:prstGeom prst="ellipse">
+            <a:avLst/>
+          </a:prstGeom>
+          <a:solidFill>
+            <a:srgbClr val="FFFFFF"/>
+          </a:solidFill>
+          <a:ln w="19050">
+            <a:solidFill>
+              <a:srgbClr val="00A88A"/>
+            </a:solidFill>
+            <a:prstDash val="solid"/>
+          </a:ln>
+        </p:spPr>
+      </p:sp>
+      <p:sp>
+        <p:nvSpPr>
+          <p:cNvPr id="12" name="Text 10"/>
+          <p:cNvSpPr/>
+          <p:nvPr/>
+        </p:nvSpPr>
+        <p:spPr>
+          <a:xfrm>
+            <a:off x="5843016" y="4311396"/>
+            <a:ext cx="502920" cy="502920"/>
+          </a:xfrm>
+          <a:prstGeom prst="rect">
+            <a:avLst/>
+          </a:prstGeom>
+          <a:noFill/>
+          <a:ln/>
+        </p:spPr>
+        <p:txBody>
+          <a:bodyPr wrap="square" lIns="0" tIns="0" rIns="0" bIns="0" rtlCol="0" anchor="ctr"/>
+          <a:lstStyle/>
+          <a:p>
+            <a:pPr algn="ctr" indent="0" marL="0">
+              <a:buNone/>
+            </a:pPr>
+            <a:r>
+              <a:rPr lang="en-US" sz="1300" b="1" dirty="0">
+                <a:solidFill>
+                  <a:srgbClr val="1B1F3B"/>
+                </a:solidFill>
+                <a:latin typeface="Arial" pitchFamily="34" charset="0"/>
+                <a:ea typeface="Arial" pitchFamily="34" charset="-122"/>
+                <a:cs typeface="Arial" pitchFamily="34" charset="-120"/>
+              </a:rPr>
+              <a:t>3</a:t>
+            </a:r>
+            <a:endParaRPr lang="en-US" sz="1300" dirty="0"/>
+          </a:p>
+        </p:txBody>
+      </p:sp>
+      <p:sp>
+        <p:nvSpPr>
+          <p:cNvPr id="13" name="Shape 11"/>
+          <p:cNvSpPr/>
+          <p:nvPr/>
+        </p:nvSpPr>
+        <p:spPr>
+          <a:xfrm>
+            <a:off x="3726180" y="4562856"/>
+            <a:ext cx="2089404" cy="0"/>
+          </a:xfrm>
+          <a:prstGeom prst="line">
+            <a:avLst/>
+          </a:prstGeom>
+          <a:noFill/>
+          <a:ln w="15875">
+            <a:solidFill>
+              <a:srgbClr val="B8B8C8"/>
+            </a:solidFill>
+            <a:prstDash val="solid"/>
+            <a:headEnd type="triangle"/>
+          </a:ln>
+        </p:spPr>
+      </p:sp>
+      <p:sp>
+        <p:nvSpPr>
+          <p:cNvPr id="14" name="Shape 12"/>
+          <p:cNvSpPr/>
+          <p:nvPr/>
+        </p:nvSpPr>
+        <p:spPr>
+          <a:xfrm>
+            <a:off x="3195828" y="4311396"/>
+            <a:ext cx="502920" cy="502920"/>
+          </a:xfrm>
+          <a:prstGeom prst="ellipse">
+            <a:avLst/>
+          </a:prstGeom>
+          <a:solidFill>
+            <a:srgbClr val="FFFFFF"/>
+          </a:solidFill>
+          <a:ln w="19050">
+            <a:solidFill>
+              <a:srgbClr val="00A88A"/>
+            </a:solidFill>
+            <a:prstDash val="solid"/>
+          </a:ln>
+        </p:spPr>
+      </p:sp>
+      <p:sp>
+        <p:nvSpPr>
+          <p:cNvPr id="15" name="Text 13"/>
+          <p:cNvSpPr/>
+          <p:nvPr/>
+        </p:nvSpPr>
+        <p:spPr>
+          <a:xfrm>
+            <a:off x="3195828" y="4311396"/>
+            <a:ext cx="502920" cy="502920"/>
+          </a:xfrm>
+          <a:prstGeom prst="rect">
+            <a:avLst/>
+          </a:prstGeom>
+          <a:noFill/>
+          <a:ln/>
+        </p:spPr>
+        <p:txBody>
+          <a:bodyPr wrap="square" lIns="0" tIns="0" rIns="0" bIns="0" rtlCol="0" anchor="ctr"/>
+          <a:lstStyle/>
+          <a:p>
+            <a:pPr algn="ctr" indent="0" marL="0">
+              <a:buNone/>
+            </a:pPr>
+            <a:r>
+              <a:rPr lang="en-US" sz="1300" b="1" dirty="0">
+                <a:solidFill>
+                  <a:srgbClr val="1B1F3B"/>
+                </a:solidFill>
+                <a:latin typeface="Arial" pitchFamily="34" charset="0"/>
+                <a:ea typeface="Arial" pitchFamily="34" charset="-122"/>
+                <a:cs typeface="Arial" pitchFamily="34" charset="-120"/>
+              </a:rPr>
+              <a:t>4</a:t>
+            </a:r>
+            <a:endParaRPr lang="en-US" sz="1300" dirty="0"/>
+          </a:p>
+        </p:txBody>
+      </p:sp>
+      <p:sp>
+        <p:nvSpPr>
+          <p:cNvPr id="16" name="Shape 14"/>
+          <p:cNvSpPr/>
+          <p:nvPr/>
+        </p:nvSpPr>
+        <p:spPr>
+          <a:xfrm>
+            <a:off x="1078992" y="4562856"/>
+            <a:ext cx="2089404" cy="0"/>
+          </a:xfrm>
+          <a:prstGeom prst="line">
+            <a:avLst/>
+          </a:prstGeom>
+          <a:noFill/>
+          <a:ln w="15875">
+            <a:solidFill>
+              <a:srgbClr val="B8B8C8"/>
+            </a:solidFill>
+            <a:prstDash val="solid"/>
+            <a:headEnd type="triangle"/>
+          </a:ln>
+        </p:spPr>
+      </p:sp>
+      <p:sp>
+        <p:nvSpPr>
+          <p:cNvPr id="17" name="Shape 15"/>
+          <p:cNvSpPr/>
+          <p:nvPr/>
+        </p:nvSpPr>
+        <p:spPr>
+          <a:xfrm>
+            <a:off x="548640" y="4311396"/>
+            <a:ext cx="502920" cy="502920"/>
+          </a:xfrm>
+          <a:prstGeom prst="ellipse">
+            <a:avLst/>
+          </a:prstGeom>
+          <a:solidFill>
+            <a:srgbClr val="00A88A"/>
+          </a:solidFill>
+          <a:ln w="19050">
+            <a:solidFill>
+              <a:srgbClr val="00A88A"/>
+            </a:solidFill>
+            <a:prstDash val="solid"/>
+          </a:ln>
+        </p:spPr>
+      </p:sp>
+      <p:sp>
+        <p:nvSpPr>
+          <p:cNvPr id="18" name="Text 16"/>
+          <p:cNvSpPr/>
+          <p:nvPr/>
+        </p:nvSpPr>
+        <p:spPr>
+          <a:xfrm>
+            <a:off x="548640" y="4311396"/>
+            <a:ext cx="502920" cy="502920"/>
+          </a:xfrm>
+          <a:prstGeom prst="rect">
+            <a:avLst/>
+          </a:prstGeom>
+          <a:noFill/>
+          <a:ln/>
+        </p:spPr>
+        <p:txBody>
+          <a:bodyPr wrap="square" lIns="0" tIns="0" rIns="0" bIns="0" rtlCol="0" anchor="ctr"/>
+          <a:lstStyle/>
+          <a:p>
+            <a:pPr algn="ctr" indent="0" marL="0">
+              <a:buNone/>
+            </a:pPr>
+            <a:r>
+              <a:rPr lang="en-US" sz="1300" b="1" dirty="0">
+                <a:solidFill>
+                  <a:srgbClr val="FFFFFF"/>
+                </a:solidFill>
+                <a:latin typeface="Arial" pitchFamily="34" charset="0"/>
+                <a:ea typeface="Arial" pitchFamily="34" charset="-122"/>
+                <a:cs typeface="Arial" pitchFamily="34" charset="-120"/>
+              </a:rPr>
+              <a:t>5</a:t>
+            </a:r>
+            <a:endParaRPr lang="en-US" sz="1300" dirty="0"/>
+          </a:p>
+        </p:txBody>
+      </p:sp>
+      <p:sp>
+        <p:nvSpPr>
+          <p:cNvPr id="19" name="Text 17"/>
+          <p:cNvSpPr/>
+          <p:nvPr/>
+        </p:nvSpPr>
+        <p:spPr>
+          <a:xfrm>
+            <a:off x="548640" y="5276088"/>
+            <a:ext cx="11091672" cy="274320"/>
+          </a:xfrm>
+          <a:prstGeom prst="rect">
+            <a:avLst/>
+          </a:prstGeom>
+          <a:noFill/>
+          <a:ln/>
+        </p:spPr>
+        <p:txBody>
+          <a:bodyPr wrap="square" lIns="0" tIns="0" rIns="0" bIns="0" rtlCol="0" anchor="ctr"/>
+          <a:lstStyle/>
+          <a:p>
+            <a:pPr rtl="1" algn="r" indent="0" marL="0">
+              <a:buNone/>
+            </a:pPr>
+            <a:r>
+              <a:rPr lang="en-US" sz="1000" i="1" dirty="0">
+                <a:solidFill>
+                  <a:srgbClr val="6B7280"/>
+                </a:solidFill>
+                <a:latin typeface="Calibri" pitchFamily="34" charset="0"/>
+                <a:ea typeface="Calibri" pitchFamily="34" charset="-122"/>
+                <a:cs typeface="Calibri" pitchFamily="34" charset="-120"/>
+              </a:rPr>
+              <a:t>איור: 5 השלבים בזרימה מ-1 עד 5 (כזכור מהבולט למעלה - אם שלב 4 דורש תיקון, חוזרים לשלב 2).</a:t>
+            </a:r>
+            <a:endParaRPr lang="en-US" sz="1000" dirty="0"/>
+          </a:p>
+        </p:txBody>
+      </p:sp>
+      <p:sp>
+        <p:nvSpPr>
+          <p:cNvPr id="20" name="Shape 18"/>
+          <p:cNvSpPr/>
+          <p:nvPr/>
+        </p:nvSpPr>
+        <p:spPr>
+          <a:xfrm>
+            <a:off x="548640" y="5532120"/>
             <a:ext cx="11091672" cy="0"/>
           </a:xfrm>
           <a:prstGeom prst="line">
@@ -5595,13 +6265,13 @@
       </p:sp>
       <p:sp>
         <p:nvSpPr>
-          <p:cNvPr id="6" name="Text 4"/>
-          <p:cNvSpPr/>
-          <p:nvPr/>
-        </p:nvSpPr>
-        <p:spPr>
-          <a:xfrm>
-            <a:off x="548640" y="5669280"/>
+          <p:cNvPr id="21" name="Text 19"/>
+          <p:cNvSpPr/>
+          <p:nvPr/>
+        </p:nvSpPr>
+        <p:spPr>
+          <a:xfrm>
+            <a:off x="548640" y="5623560"/>
             <a:ext cx="11091672" cy="621792"/>
           </a:xfrm>
           <a:prstGeom prst="rect">
@@ -5634,7 +6304,7 @@
       </p:sp>
       <p:sp>
         <p:nvSpPr>
-          <p:cNvPr id="7" name="Text 5"/>
+          <p:cNvPr id="22" name="Text 20"/>
           <p:cNvSpPr/>
           <p:nvPr/>
         </p:nvSpPr>
@@ -7601,7 +8271,7 @@
         <p:spPr>
           <a:xfrm>
             <a:off x="548640" y="1508760"/>
-            <a:ext cx="11091672" cy="3931920"/>
+            <a:ext cx="11091672" cy="2510028"/>
           </a:xfrm>
           <a:prstGeom prst="rect">
             <a:avLst/>
@@ -7742,13 +8412,81 @@
         </p:nvSpPr>
         <p:spPr>
           <a:xfrm>
-            <a:off x="548640" y="5577840"/>
-            <a:ext cx="11091672" cy="0"/>
-          </a:xfrm>
-          <a:prstGeom prst="line">
-            <a:avLst/>
-          </a:prstGeom>
-          <a:noFill/>
+            <a:off x="6277356" y="4155948"/>
+            <a:ext cx="5362956" cy="1028700"/>
+          </a:xfrm>
+          <a:prstGeom prst="roundRect">
+            <a:avLst>
+              <a:gd name="adj" fmla="val 5333"/>
+            </a:avLst>
+          </a:prstGeom>
+          <a:solidFill>
+            <a:srgbClr val="F6F6F8"/>
+          </a:solidFill>
+          <a:ln w="15875">
+            <a:solidFill>
+              <a:srgbClr val="B8B8C8"/>
+            </a:solidFill>
+            <a:prstDash val="solid"/>
+          </a:ln>
+        </p:spPr>
+      </p:sp>
+      <p:sp>
+        <p:nvSpPr>
+          <p:cNvPr id="6" name="Text 4"/>
+          <p:cNvSpPr/>
+          <p:nvPr/>
+        </p:nvSpPr>
+        <p:spPr>
+          <a:xfrm>
+            <a:off x="6277356" y="4229100"/>
+            <a:ext cx="5362956" cy="274320"/>
+          </a:xfrm>
+          <a:prstGeom prst="rect">
+            <a:avLst/>
+          </a:prstGeom>
+          <a:noFill/>
+          <a:ln/>
+        </p:spPr>
+        <p:txBody>
+          <a:bodyPr wrap="square" lIns="0" tIns="0" rIns="0" bIns="0" rtlCol="0" anchor="ctr"/>
+          <a:lstStyle/>
+          <a:p>
+            <a:pPr algn="ctr" indent="0" marL="0">
+              <a:buNone/>
+            </a:pPr>
+            <a:r>
+              <a:rPr lang="en-US" sz="1200" b="1" dirty="0">
+                <a:solidFill>
+                  <a:srgbClr val="6B7280"/>
+                </a:solidFill>
+                <a:latin typeface="Arial" pitchFamily="34" charset="0"/>
+                <a:ea typeface="Arial" pitchFamily="34" charset="-122"/>
+                <a:cs typeface="Arial" pitchFamily="34" charset="-120"/>
+              </a:rPr>
+              <a:t>Notepad</a:t>
+            </a:r>
+            <a:endParaRPr lang="en-US" sz="1200" dirty="0"/>
+          </a:p>
+        </p:txBody>
+      </p:sp>
+      <p:sp>
+        <p:nvSpPr>
+          <p:cNvPr id="7" name="Shape 5"/>
+          <p:cNvSpPr/>
+          <p:nvPr/>
+        </p:nvSpPr>
+        <p:spPr>
+          <a:xfrm>
+            <a:off x="6551676" y="4613148"/>
+            <a:ext cx="4814316" cy="434340"/>
+          </a:xfrm>
+          <a:prstGeom prst="rect">
+            <a:avLst/>
+          </a:prstGeom>
+          <a:solidFill>
+            <a:srgbClr val="FFFFFF"/>
+          </a:solidFill>
           <a:ln w="9525">
             <a:solidFill>
               <a:srgbClr val="B8B8C8"/>
@@ -7759,14 +8497,80 @@
       </p:sp>
       <p:sp>
         <p:nvSpPr>
-          <p:cNvPr id="6" name="Text 4"/>
-          <p:cNvSpPr/>
-          <p:nvPr/>
-        </p:nvSpPr>
-        <p:spPr>
-          <a:xfrm>
-            <a:off x="548640" y="5669280"/>
-            <a:ext cx="11091672" cy="621792"/>
+          <p:cNvPr id="8" name="Text 6"/>
+          <p:cNvSpPr/>
+          <p:nvPr/>
+        </p:nvSpPr>
+        <p:spPr>
+          <a:xfrm>
+            <a:off x="6551676" y="4613148"/>
+            <a:ext cx="4814316" cy="434340"/>
+          </a:xfrm>
+          <a:prstGeom prst="rect">
+            <a:avLst/>
+          </a:prstGeom>
+          <a:noFill/>
+          <a:ln/>
+        </p:spPr>
+        <p:txBody>
+          <a:bodyPr wrap="square" lIns="50800" tIns="50800" rIns="50800" bIns="50800" rtlCol="0" anchor="ctr"/>
+          <a:lstStyle/>
+          <a:p>
+            <a:pPr rtl="1" algn="ctr" indent="0" marL="0">
+              <a:buNone/>
+            </a:pPr>
+            <a:r>
+              <a:rPr lang="en-US" sz="900" dirty="0">
+                <a:solidFill>
+                  <a:srgbClr val="6B7280"/>
+                </a:solidFill>
+                <a:latin typeface="Courier New" pitchFamily="34" charset="0"/>
+                <a:ea typeface="Courier New" pitchFamily="34" charset="-122"/>
+                <a:cs typeface="Courier New" pitchFamily="34" charset="-120"/>
+              </a:rPr>
+              <a:t>טקסט רגיל, בלי צבע ובלי עזרה</a:t>
+            </a:r>
+            <a:endParaRPr lang="en-US" sz="900" dirty="0"/>
+          </a:p>
+        </p:txBody>
+      </p:sp>
+      <p:sp>
+        <p:nvSpPr>
+          <p:cNvPr id="9" name="Shape 7"/>
+          <p:cNvSpPr/>
+          <p:nvPr/>
+        </p:nvSpPr>
+        <p:spPr>
+          <a:xfrm>
+            <a:off x="548640" y="4155948"/>
+            <a:ext cx="5362956" cy="1028700"/>
+          </a:xfrm>
+          <a:prstGeom prst="roundRect">
+            <a:avLst>
+              <a:gd name="adj" fmla="val 5333"/>
+            </a:avLst>
+          </a:prstGeom>
+          <a:solidFill>
+            <a:srgbClr val="1B1F3B"/>
+          </a:solidFill>
+          <a:ln w="15875">
+            <a:solidFill>
+              <a:srgbClr val="00A88A"/>
+            </a:solidFill>
+            <a:prstDash val="solid"/>
+          </a:ln>
+        </p:spPr>
+      </p:sp>
+      <p:sp>
+        <p:nvSpPr>
+          <p:cNvPr id="10" name="Text 8"/>
+          <p:cNvSpPr/>
+          <p:nvPr/>
+        </p:nvSpPr>
+        <p:spPr>
+          <a:xfrm>
+            <a:off x="548640" y="4229100"/>
+            <a:ext cx="5362956" cy="274320"/>
           </a:xfrm>
           <a:prstGeom prst="rect">
             <a:avLst/>
@@ -7778,18 +8582,311 @@
           <a:bodyPr wrap="square" lIns="0" tIns="0" rIns="0" bIns="0" rtlCol="0" anchor="ctr"/>
           <a:lstStyle/>
           <a:p>
-            <a:pPr rtl="1" algn="r" indent="0" marL="0">
-              <a:buNone/>
-            </a:pPr>
-            <a:r>
-              <a:rPr lang="en-US" sz="1700" dirty="0">
-                <a:solidFill>
-                  <a:srgbClr val="00A88A"/>
+            <a:pPr algn="ctr" indent="0" marL="0">
+              <a:buNone/>
+            </a:pPr>
+            <a:r>
+              <a:rPr lang="en-US" sz="1200" b="1" dirty="0">
+                <a:solidFill>
+                  <a:srgbClr val="FFFFFF"/>
                 </a:solidFill>
                 <a:latin typeface="Arial" pitchFamily="34" charset="0"/>
                 <a:ea typeface="Arial" pitchFamily="34" charset="-122"/>
                 <a:cs typeface="Arial" pitchFamily="34" charset="-120"/>
               </a:rPr>
+              <a:t>VS Code (IDE)</a:t>
+            </a:r>
+            <a:endParaRPr lang="en-US" sz="1200" dirty="0"/>
+          </a:p>
+        </p:txBody>
+      </p:sp>
+      <p:sp>
+        <p:nvSpPr>
+          <p:cNvPr id="11" name="Shape 9"/>
+          <p:cNvSpPr/>
+          <p:nvPr/>
+        </p:nvSpPr>
+        <p:spPr>
+          <a:xfrm>
+            <a:off x="777240" y="4594860"/>
+            <a:ext cx="4905756" cy="218313"/>
+          </a:xfrm>
+          <a:prstGeom prst="rect">
+            <a:avLst/>
+          </a:prstGeom>
+          <a:solidFill>
+            <a:srgbClr val="2A2F55"/>
+          </a:solidFill>
+          <a:ln w="6350">
+            <a:solidFill>
+              <a:srgbClr val="00A88A"/>
+            </a:solidFill>
+            <a:prstDash val="solid"/>
+          </a:ln>
+        </p:spPr>
+      </p:sp>
+      <p:sp>
+        <p:nvSpPr>
+          <p:cNvPr id="12" name="Text 10"/>
+          <p:cNvSpPr/>
+          <p:nvPr/>
+        </p:nvSpPr>
+        <p:spPr>
+          <a:xfrm>
+            <a:off x="777240" y="4594860"/>
+            <a:ext cx="4905756" cy="218313"/>
+          </a:xfrm>
+          <a:prstGeom prst="rect">
+            <a:avLst/>
+          </a:prstGeom>
+          <a:noFill/>
+          <a:ln/>
+        </p:spPr>
+        <p:txBody>
+          <a:bodyPr wrap="square" lIns="25400" tIns="25400" rIns="25400" bIns="25400" rtlCol="0" anchor="ctr"/>
+          <a:lstStyle/>
+          <a:p>
+            <a:pPr rtl="1" algn="ctr" indent="0" marL="0">
+              <a:buNone/>
+            </a:pPr>
+            <a:r>
+              <a:rPr lang="en-US" sz="900" dirty="0">
+                <a:solidFill>
+                  <a:srgbClr val="CADCFC"/>
+                </a:solidFill>
+                <a:latin typeface="Calibri" pitchFamily="34" charset="0"/>
+                <a:ea typeface="Calibri" pitchFamily="34" charset="-122"/>
+                <a:cs typeface="Calibri" pitchFamily="34" charset="-120"/>
+              </a:rPr>
+              <a:t>עורך קוד צבעוני</a:t>
+            </a:r>
+            <a:endParaRPr lang="en-US" sz="900" dirty="0"/>
+          </a:p>
+        </p:txBody>
+      </p:sp>
+      <p:sp>
+        <p:nvSpPr>
+          <p:cNvPr id="13" name="Shape 11"/>
+          <p:cNvSpPr/>
+          <p:nvPr/>
+        </p:nvSpPr>
+        <p:spPr>
+          <a:xfrm>
+            <a:off x="777240" y="4868037"/>
+            <a:ext cx="4905756" cy="74295"/>
+          </a:xfrm>
+          <a:prstGeom prst="rect">
+            <a:avLst/>
+          </a:prstGeom>
+          <a:solidFill>
+            <a:srgbClr val="2A2F55"/>
+          </a:solidFill>
+          <a:ln w="6350">
+            <a:solidFill>
+              <a:srgbClr val="00A88A"/>
+            </a:solidFill>
+            <a:prstDash val="solid"/>
+          </a:ln>
+        </p:spPr>
+      </p:sp>
+      <p:sp>
+        <p:nvSpPr>
+          <p:cNvPr id="14" name="Text 12"/>
+          <p:cNvSpPr/>
+          <p:nvPr/>
+        </p:nvSpPr>
+        <p:spPr>
+          <a:xfrm>
+            <a:off x="777240" y="4868037"/>
+            <a:ext cx="4905756" cy="74295"/>
+          </a:xfrm>
+          <a:prstGeom prst="rect">
+            <a:avLst/>
+          </a:prstGeom>
+          <a:noFill/>
+          <a:ln/>
+        </p:spPr>
+        <p:txBody>
+          <a:bodyPr wrap="square" lIns="25400" tIns="25400" rIns="25400" bIns="25400" rtlCol="0" anchor="ctr"/>
+          <a:lstStyle/>
+          <a:p>
+            <a:pPr rtl="1" algn="ctr" indent="0" marL="0">
+              <a:buNone/>
+            </a:pPr>
+            <a:r>
+              <a:rPr lang="en-US" sz="900" dirty="0">
+                <a:solidFill>
+                  <a:srgbClr val="CADCFC"/>
+                </a:solidFill>
+                <a:latin typeface="Calibri" pitchFamily="34" charset="0"/>
+                <a:ea typeface="Calibri" pitchFamily="34" charset="-122"/>
+                <a:cs typeface="Calibri" pitchFamily="34" charset="-120"/>
+              </a:rPr>
+              <a:t>טרמינל מובנה</a:t>
+            </a:r>
+            <a:endParaRPr lang="en-US" sz="900" dirty="0"/>
+          </a:p>
+        </p:txBody>
+      </p:sp>
+      <p:sp>
+        <p:nvSpPr>
+          <p:cNvPr id="15" name="Shape 13"/>
+          <p:cNvSpPr/>
+          <p:nvPr/>
+        </p:nvSpPr>
+        <p:spPr>
+          <a:xfrm>
+            <a:off x="777240" y="4997196"/>
+            <a:ext cx="4905756" cy="50292"/>
+          </a:xfrm>
+          <a:prstGeom prst="rect">
+            <a:avLst/>
+          </a:prstGeom>
+          <a:solidFill>
+            <a:srgbClr val="2A2F55"/>
+          </a:solidFill>
+          <a:ln w="6350">
+            <a:solidFill>
+              <a:srgbClr val="00A88A"/>
+            </a:solidFill>
+            <a:prstDash val="solid"/>
+          </a:ln>
+        </p:spPr>
+      </p:sp>
+      <p:sp>
+        <p:nvSpPr>
+          <p:cNvPr id="16" name="Text 14"/>
+          <p:cNvSpPr/>
+          <p:nvPr/>
+        </p:nvSpPr>
+        <p:spPr>
+          <a:xfrm>
+            <a:off x="777240" y="4997196"/>
+            <a:ext cx="4905756" cy="50292"/>
+          </a:xfrm>
+          <a:prstGeom prst="rect">
+            <a:avLst/>
+          </a:prstGeom>
+          <a:noFill/>
+          <a:ln/>
+        </p:spPr>
+        <p:txBody>
+          <a:bodyPr wrap="square" lIns="25400" tIns="25400" rIns="25400" bIns="25400" rtlCol="0" anchor="ctr"/>
+          <a:lstStyle/>
+          <a:p>
+            <a:pPr rtl="1" algn="ctr" indent="0" marL="0">
+              <a:buNone/>
+            </a:pPr>
+            <a:r>
+              <a:rPr lang="en-US" sz="900" dirty="0">
+                <a:solidFill>
+                  <a:srgbClr val="CADCFC"/>
+                </a:solidFill>
+                <a:latin typeface="Calibri" pitchFamily="34" charset="0"/>
+                <a:ea typeface="Calibri" pitchFamily="34" charset="-122"/>
+                <a:cs typeface="Calibri" pitchFamily="34" charset="-120"/>
+              </a:rPr>
+              <a:t>איתור באגים</a:t>
+            </a:r>
+            <a:endParaRPr lang="en-US" sz="900" dirty="0"/>
+          </a:p>
+        </p:txBody>
+      </p:sp>
+      <p:sp>
+        <p:nvSpPr>
+          <p:cNvPr id="17" name="Text 15"/>
+          <p:cNvSpPr/>
+          <p:nvPr/>
+        </p:nvSpPr>
+        <p:spPr>
+          <a:xfrm>
+            <a:off x="548640" y="5276088"/>
+            <a:ext cx="11091672" cy="274320"/>
+          </a:xfrm>
+          <a:prstGeom prst="rect">
+            <a:avLst/>
+          </a:prstGeom>
+          <a:noFill/>
+          <a:ln/>
+        </p:spPr>
+        <p:txBody>
+          <a:bodyPr wrap="square" lIns="0" tIns="0" rIns="0" bIns="0" rtlCol="0" anchor="ctr"/>
+          <a:lstStyle/>
+          <a:p>
+            <a:pPr rtl="1" algn="r" indent="0" marL="0">
+              <a:buNone/>
+            </a:pPr>
+            <a:r>
+              <a:rPr lang="en-US" sz="1000" i="1" dirty="0">
+                <a:solidFill>
+                  <a:srgbClr val="6B7280"/>
+                </a:solidFill>
+                <a:latin typeface="Calibri" pitchFamily="34" charset="0"/>
+                <a:ea typeface="Calibri" pitchFamily="34" charset="-122"/>
+                <a:cs typeface="Calibri" pitchFamily="34" charset="-120"/>
+              </a:rPr>
+              <a:t>איור: Notepad — טקסט פשוט בלי עזרה, מול VS Code — עורך צבעוני + טרמינל מובנה + איתור באגים, הכל בחלון אחד.</a:t>
+            </a:r>
+            <a:endParaRPr lang="en-US" sz="1000" dirty="0"/>
+          </a:p>
+        </p:txBody>
+      </p:sp>
+      <p:sp>
+        <p:nvSpPr>
+          <p:cNvPr id="18" name="Shape 16"/>
+          <p:cNvSpPr/>
+          <p:nvPr/>
+        </p:nvSpPr>
+        <p:spPr>
+          <a:xfrm>
+            <a:off x="548640" y="5532120"/>
+            <a:ext cx="11091672" cy="0"/>
+          </a:xfrm>
+          <a:prstGeom prst="line">
+            <a:avLst/>
+          </a:prstGeom>
+          <a:noFill/>
+          <a:ln w="9525">
+            <a:solidFill>
+              <a:srgbClr val="B8B8C8"/>
+            </a:solidFill>
+            <a:prstDash val="solid"/>
+          </a:ln>
+        </p:spPr>
+      </p:sp>
+      <p:sp>
+        <p:nvSpPr>
+          <p:cNvPr id="19" name="Text 17"/>
+          <p:cNvSpPr/>
+          <p:nvPr/>
+        </p:nvSpPr>
+        <p:spPr>
+          <a:xfrm>
+            <a:off x="548640" y="5623560"/>
+            <a:ext cx="11091672" cy="621792"/>
+          </a:xfrm>
+          <a:prstGeom prst="rect">
+            <a:avLst/>
+          </a:prstGeom>
+          <a:noFill/>
+          <a:ln/>
+        </p:spPr>
+        <p:txBody>
+          <a:bodyPr wrap="square" lIns="0" tIns="0" rIns="0" bIns="0" rtlCol="0" anchor="ctr"/>
+          <a:lstStyle/>
+          <a:p>
+            <a:pPr rtl="1" algn="r" indent="0" marL="0">
+              <a:buNone/>
+            </a:pPr>
+            <a:r>
+              <a:rPr lang="en-US" sz="1700" dirty="0">
+                <a:solidFill>
+                  <a:srgbClr val="00A88A"/>
+                </a:solidFill>
+                <a:latin typeface="Arial" pitchFamily="34" charset="0"/>
+                <a:ea typeface="Arial" pitchFamily="34" charset="-122"/>
+                <a:cs typeface="Arial" pitchFamily="34" charset="-120"/>
+              </a:rPr>
               <a:t>✔ מה עושים בפועל: כל התרגול היום (ובכל שיעור מכאן והלאה) יתבצע בתוך VS Code — זה "השולחן" שעליו כל שאר הכלים יושבים.</a:t>
             </a:r>
             <a:endParaRPr lang="en-US" sz="1700" dirty="0"/>
@@ -7798,7 +8895,7 @@
       </p:sp>
       <p:sp>
         <p:nvSpPr>
-          <p:cNvPr id="7" name="Text 5"/>
+          <p:cNvPr id="20" name="Text 18"/>
           <p:cNvSpPr/>
           <p:nvPr/>
         </p:nvSpPr>
@@ -11202,7 +12299,7 @@
         <p:spPr>
           <a:xfrm>
             <a:off x="548640" y="1508760"/>
-            <a:ext cx="11091672" cy="3931920"/>
+            <a:ext cx="11091672" cy="2020824"/>
           </a:xfrm>
           <a:prstGeom prst="rect">
             <a:avLst/>
@@ -11283,7 +12380,565 @@
         </p:nvSpPr>
         <p:spPr>
           <a:xfrm>
-            <a:off x="548640" y="5577840"/>
+            <a:off x="8990838" y="3666744"/>
+            <a:ext cx="2649474" cy="384048"/>
+          </a:xfrm>
+          <a:prstGeom prst="rect">
+            <a:avLst/>
+          </a:prstGeom>
+          <a:solidFill>
+            <a:srgbClr val="F6F6F8"/>
+          </a:solidFill>
+          <a:ln w="12700">
+            <a:solidFill>
+              <a:srgbClr val="6B7280"/>
+            </a:solidFill>
+            <a:prstDash val="dash"/>
+          </a:ln>
+        </p:spPr>
+      </p:sp>
+      <p:sp>
+        <p:nvSpPr>
+          <p:cNvPr id="6" name="Text 4"/>
+          <p:cNvSpPr/>
+          <p:nvPr/>
+        </p:nvSpPr>
+        <p:spPr>
+          <a:xfrm>
+            <a:off x="8990838" y="3666744"/>
+            <a:ext cx="2649474" cy="384048"/>
+          </a:xfrm>
+          <a:prstGeom prst="rect">
+            <a:avLst/>
+          </a:prstGeom>
+          <a:noFill/>
+          <a:ln/>
+        </p:spPr>
+        <p:txBody>
+          <a:bodyPr wrap="square" lIns="25400" tIns="25400" rIns="25400" bIns="25400" rtlCol="0" anchor="ctr"/>
+          <a:lstStyle/>
+          <a:p>
+            <a:pPr algn="ctr" indent="0" marL="0">
+              <a:buNone/>
+            </a:pPr>
+            <a:r>
+              <a:rPr lang="en-US" sz="800" dirty="0">
+                <a:solidFill>
+                  <a:srgbClr val="6B7280"/>
+                </a:solidFill>
+                <a:latin typeface="Courier New" pitchFamily="34" charset="0"/>
+                <a:ea typeface="Courier New" pitchFamily="34" charset="-122"/>
+                <a:cs typeface="Courier New" pitchFamily="34" charset="-120"/>
+              </a:rPr>
+              <a:t>עבודה.docx</a:t>
+            </a:r>
+            <a:endParaRPr lang="en-US" sz="800" dirty="0"/>
+          </a:p>
+        </p:txBody>
+      </p:sp>
+      <p:sp>
+        <p:nvSpPr>
+          <p:cNvPr id="7" name="Shape 5"/>
+          <p:cNvSpPr/>
+          <p:nvPr/>
+        </p:nvSpPr>
+        <p:spPr>
+          <a:xfrm>
+            <a:off x="8844534" y="3858768"/>
+            <a:ext cx="128016" cy="0"/>
+          </a:xfrm>
+          <a:prstGeom prst="line">
+            <a:avLst/>
+          </a:prstGeom>
+          <a:noFill/>
+          <a:ln w="12700">
+            <a:solidFill>
+              <a:srgbClr val="6B7280"/>
+            </a:solidFill>
+            <a:prstDash val="solid"/>
+            <a:headEnd type="triangle"/>
+          </a:ln>
+        </p:spPr>
+      </p:sp>
+      <p:sp>
+        <p:nvSpPr>
+          <p:cNvPr id="8" name="Shape 6"/>
+          <p:cNvSpPr/>
+          <p:nvPr/>
+        </p:nvSpPr>
+        <p:spPr>
+          <a:xfrm>
+            <a:off x="6176772" y="3666744"/>
+            <a:ext cx="2649474" cy="384048"/>
+          </a:xfrm>
+          <a:prstGeom prst="rect">
+            <a:avLst/>
+          </a:prstGeom>
+          <a:solidFill>
+            <a:srgbClr val="F6F6F8"/>
+          </a:solidFill>
+          <a:ln w="12700">
+            <a:solidFill>
+              <a:srgbClr val="6B7280"/>
+            </a:solidFill>
+            <a:prstDash val="dash"/>
+          </a:ln>
+        </p:spPr>
+      </p:sp>
+      <p:sp>
+        <p:nvSpPr>
+          <p:cNvPr id="9" name="Text 7"/>
+          <p:cNvSpPr/>
+          <p:nvPr/>
+        </p:nvSpPr>
+        <p:spPr>
+          <a:xfrm>
+            <a:off x="6176772" y="3666744"/>
+            <a:ext cx="2649474" cy="384048"/>
+          </a:xfrm>
+          <a:prstGeom prst="rect">
+            <a:avLst/>
+          </a:prstGeom>
+          <a:noFill/>
+          <a:ln/>
+        </p:spPr>
+        <p:txBody>
+          <a:bodyPr wrap="square" lIns="25400" tIns="25400" rIns="25400" bIns="25400" rtlCol="0" anchor="ctr"/>
+          <a:lstStyle/>
+          <a:p>
+            <a:pPr algn="ctr" indent="0" marL="0">
+              <a:buNone/>
+            </a:pPr>
+            <a:r>
+              <a:rPr lang="en-US" sz="800" dirty="0">
+                <a:solidFill>
+                  <a:srgbClr val="6B7280"/>
+                </a:solidFill>
+                <a:latin typeface="Courier New" pitchFamily="34" charset="0"/>
+                <a:ea typeface="Courier New" pitchFamily="34" charset="-122"/>
+                <a:cs typeface="Courier New" pitchFamily="34" charset="-120"/>
+              </a:rPr>
+              <a:t>עבודה_v2.docx</a:t>
+            </a:r>
+            <a:endParaRPr lang="en-US" sz="800" dirty="0"/>
+          </a:p>
+        </p:txBody>
+      </p:sp>
+      <p:sp>
+        <p:nvSpPr>
+          <p:cNvPr id="10" name="Shape 8"/>
+          <p:cNvSpPr/>
+          <p:nvPr/>
+        </p:nvSpPr>
+        <p:spPr>
+          <a:xfrm>
+            <a:off x="6030468" y="3858768"/>
+            <a:ext cx="128016" cy="0"/>
+          </a:xfrm>
+          <a:prstGeom prst="line">
+            <a:avLst/>
+          </a:prstGeom>
+          <a:noFill/>
+          <a:ln w="12700">
+            <a:solidFill>
+              <a:srgbClr val="6B7280"/>
+            </a:solidFill>
+            <a:prstDash val="solid"/>
+            <a:headEnd type="triangle"/>
+          </a:ln>
+        </p:spPr>
+      </p:sp>
+      <p:sp>
+        <p:nvSpPr>
+          <p:cNvPr id="11" name="Shape 9"/>
+          <p:cNvSpPr/>
+          <p:nvPr/>
+        </p:nvSpPr>
+        <p:spPr>
+          <a:xfrm>
+            <a:off x="3362706" y="3666744"/>
+            <a:ext cx="2649474" cy="384048"/>
+          </a:xfrm>
+          <a:prstGeom prst="rect">
+            <a:avLst/>
+          </a:prstGeom>
+          <a:solidFill>
+            <a:srgbClr val="F6F6F8"/>
+          </a:solidFill>
+          <a:ln w="12700">
+            <a:solidFill>
+              <a:srgbClr val="6B7280"/>
+            </a:solidFill>
+            <a:prstDash val="dash"/>
+          </a:ln>
+        </p:spPr>
+      </p:sp>
+      <p:sp>
+        <p:nvSpPr>
+          <p:cNvPr id="12" name="Text 10"/>
+          <p:cNvSpPr/>
+          <p:nvPr/>
+        </p:nvSpPr>
+        <p:spPr>
+          <a:xfrm>
+            <a:off x="3362706" y="3666744"/>
+            <a:ext cx="2649474" cy="384048"/>
+          </a:xfrm>
+          <a:prstGeom prst="rect">
+            <a:avLst/>
+          </a:prstGeom>
+          <a:noFill/>
+          <a:ln/>
+        </p:spPr>
+        <p:txBody>
+          <a:bodyPr wrap="square" lIns="25400" tIns="25400" rIns="25400" bIns="25400" rtlCol="0" anchor="ctr"/>
+          <a:lstStyle/>
+          <a:p>
+            <a:pPr algn="ctr" indent="0" marL="0">
+              <a:buNone/>
+            </a:pPr>
+            <a:r>
+              <a:rPr lang="en-US" sz="800" dirty="0">
+                <a:solidFill>
+                  <a:srgbClr val="6B7280"/>
+                </a:solidFill>
+                <a:latin typeface="Courier New" pitchFamily="34" charset="0"/>
+                <a:ea typeface="Courier New" pitchFamily="34" charset="-122"/>
+                <a:cs typeface="Courier New" pitchFamily="34" charset="-120"/>
+              </a:rPr>
+              <a:t>v2_final.docx</a:t>
+            </a:r>
+            <a:endParaRPr lang="en-US" sz="800" dirty="0"/>
+          </a:p>
+        </p:txBody>
+      </p:sp>
+      <p:sp>
+        <p:nvSpPr>
+          <p:cNvPr id="13" name="Shape 11"/>
+          <p:cNvSpPr/>
+          <p:nvPr/>
+        </p:nvSpPr>
+        <p:spPr>
+          <a:xfrm>
+            <a:off x="3216402" y="3858768"/>
+            <a:ext cx="128016" cy="0"/>
+          </a:xfrm>
+          <a:prstGeom prst="line">
+            <a:avLst/>
+          </a:prstGeom>
+          <a:noFill/>
+          <a:ln w="12700">
+            <a:solidFill>
+              <a:srgbClr val="6B7280"/>
+            </a:solidFill>
+            <a:prstDash val="solid"/>
+            <a:headEnd type="triangle"/>
+          </a:ln>
+        </p:spPr>
+      </p:sp>
+      <p:sp>
+        <p:nvSpPr>
+          <p:cNvPr id="14" name="Shape 12"/>
+          <p:cNvSpPr/>
+          <p:nvPr/>
+        </p:nvSpPr>
+        <p:spPr>
+          <a:xfrm>
+            <a:off x="548640" y="3666744"/>
+            <a:ext cx="2649474" cy="384048"/>
+          </a:xfrm>
+          <a:prstGeom prst="rect">
+            <a:avLst/>
+          </a:prstGeom>
+          <a:solidFill>
+            <a:srgbClr val="F6F6F8"/>
+          </a:solidFill>
+          <a:ln w="12700">
+            <a:solidFill>
+              <a:srgbClr val="6B7280"/>
+            </a:solidFill>
+            <a:prstDash val="dash"/>
+          </a:ln>
+        </p:spPr>
+      </p:sp>
+      <p:sp>
+        <p:nvSpPr>
+          <p:cNvPr id="15" name="Text 13"/>
+          <p:cNvSpPr/>
+          <p:nvPr/>
+        </p:nvSpPr>
+        <p:spPr>
+          <a:xfrm>
+            <a:off x="548640" y="3666744"/>
+            <a:ext cx="2649474" cy="384048"/>
+          </a:xfrm>
+          <a:prstGeom prst="rect">
+            <a:avLst/>
+          </a:prstGeom>
+          <a:noFill/>
+          <a:ln/>
+        </p:spPr>
+        <p:txBody>
+          <a:bodyPr wrap="square" lIns="25400" tIns="25400" rIns="25400" bIns="25400" rtlCol="0" anchor="ctr"/>
+          <a:lstStyle/>
+          <a:p>
+            <a:pPr algn="ctr" indent="0" marL="0">
+              <a:buNone/>
+            </a:pPr>
+            <a:r>
+              <a:rPr lang="en-US" sz="800" dirty="0">
+                <a:solidFill>
+                  <a:srgbClr val="6B7280"/>
+                </a:solidFill>
+                <a:latin typeface="Courier New" pitchFamily="34" charset="0"/>
+                <a:ea typeface="Courier New" pitchFamily="34" charset="-122"/>
+                <a:cs typeface="Courier New" pitchFamily="34" charset="-120"/>
+              </a:rPr>
+              <a:t>v2_final_REALLY</a:t>
+            </a:r>
+            <a:endParaRPr lang="en-US" sz="800" dirty="0"/>
+          </a:p>
+        </p:txBody>
+      </p:sp>
+      <p:sp>
+        <p:nvSpPr>
+          <p:cNvPr id="16" name="Shape 14"/>
+          <p:cNvSpPr/>
+          <p:nvPr/>
+        </p:nvSpPr>
+        <p:spPr>
+          <a:xfrm>
+            <a:off x="10178415" y="4846320"/>
+            <a:ext cx="274320" cy="274320"/>
+          </a:xfrm>
+          <a:prstGeom prst="ellipse">
+            <a:avLst/>
+          </a:prstGeom>
+          <a:solidFill>
+            <a:srgbClr val="00A88A"/>
+          </a:solidFill>
+          <a:ln/>
+        </p:spPr>
+      </p:sp>
+      <p:sp>
+        <p:nvSpPr>
+          <p:cNvPr id="17" name="Shape 15"/>
+          <p:cNvSpPr/>
+          <p:nvPr/>
+        </p:nvSpPr>
+        <p:spPr>
+          <a:xfrm>
+            <a:off x="7666101" y="4983480"/>
+            <a:ext cx="2484882" cy="0"/>
+          </a:xfrm>
+          <a:prstGeom prst="line">
+            <a:avLst/>
+          </a:prstGeom>
+          <a:noFill/>
+          <a:ln w="15875">
+            <a:solidFill>
+              <a:srgbClr val="00A88A"/>
+            </a:solidFill>
+            <a:prstDash val="solid"/>
+            <a:headEnd type="triangle"/>
+          </a:ln>
+        </p:spPr>
+      </p:sp>
+      <p:sp>
+        <p:nvSpPr>
+          <p:cNvPr id="18" name="Shape 16"/>
+          <p:cNvSpPr/>
+          <p:nvPr/>
+        </p:nvSpPr>
+        <p:spPr>
+          <a:xfrm>
+            <a:off x="7364349" y="4846320"/>
+            <a:ext cx="274320" cy="274320"/>
+          </a:xfrm>
+          <a:prstGeom prst="ellipse">
+            <a:avLst/>
+          </a:prstGeom>
+          <a:solidFill>
+            <a:srgbClr val="00A88A"/>
+          </a:solidFill>
+          <a:ln/>
+        </p:spPr>
+      </p:sp>
+      <p:sp>
+        <p:nvSpPr>
+          <p:cNvPr id="19" name="Shape 17"/>
+          <p:cNvSpPr/>
+          <p:nvPr/>
+        </p:nvSpPr>
+        <p:spPr>
+          <a:xfrm>
+            <a:off x="4852035" y="4983480"/>
+            <a:ext cx="2484882" cy="0"/>
+          </a:xfrm>
+          <a:prstGeom prst="line">
+            <a:avLst/>
+          </a:prstGeom>
+          <a:noFill/>
+          <a:ln w="15875">
+            <a:solidFill>
+              <a:srgbClr val="00A88A"/>
+            </a:solidFill>
+            <a:prstDash val="solid"/>
+            <a:headEnd type="triangle"/>
+          </a:ln>
+        </p:spPr>
+      </p:sp>
+      <p:sp>
+        <p:nvSpPr>
+          <p:cNvPr id="20" name="Shape 18"/>
+          <p:cNvSpPr/>
+          <p:nvPr/>
+        </p:nvSpPr>
+        <p:spPr>
+          <a:xfrm>
+            <a:off x="4550283" y="4846320"/>
+            <a:ext cx="274320" cy="274320"/>
+          </a:xfrm>
+          <a:prstGeom prst="ellipse">
+            <a:avLst/>
+          </a:prstGeom>
+          <a:solidFill>
+            <a:srgbClr val="00A88A"/>
+          </a:solidFill>
+          <a:ln/>
+        </p:spPr>
+      </p:sp>
+      <p:sp>
+        <p:nvSpPr>
+          <p:cNvPr id="21" name="Shape 19"/>
+          <p:cNvSpPr/>
+          <p:nvPr/>
+        </p:nvSpPr>
+        <p:spPr>
+          <a:xfrm>
+            <a:off x="2037969" y="4983480"/>
+            <a:ext cx="2484882" cy="0"/>
+          </a:xfrm>
+          <a:prstGeom prst="line">
+            <a:avLst/>
+          </a:prstGeom>
+          <a:noFill/>
+          <a:ln w="15875">
+            <a:solidFill>
+              <a:srgbClr val="00A88A"/>
+            </a:solidFill>
+            <a:prstDash val="solid"/>
+            <a:headEnd type="triangle"/>
+          </a:ln>
+        </p:spPr>
+      </p:sp>
+      <p:sp>
+        <p:nvSpPr>
+          <p:cNvPr id="22" name="Shape 20"/>
+          <p:cNvSpPr/>
+          <p:nvPr/>
+        </p:nvSpPr>
+        <p:spPr>
+          <a:xfrm>
+            <a:off x="1736217" y="4846320"/>
+            <a:ext cx="274320" cy="274320"/>
+          </a:xfrm>
+          <a:prstGeom prst="ellipse">
+            <a:avLst/>
+          </a:prstGeom>
+          <a:solidFill>
+            <a:srgbClr val="00A88A"/>
+          </a:solidFill>
+          <a:ln/>
+        </p:spPr>
+      </p:sp>
+      <p:sp>
+        <p:nvSpPr>
+          <p:cNvPr id="23" name="Text 21"/>
+          <p:cNvSpPr/>
+          <p:nvPr/>
+        </p:nvSpPr>
+        <p:spPr>
+          <a:xfrm>
+            <a:off x="548640" y="5193792"/>
+            <a:ext cx="11091672" cy="201168"/>
+          </a:xfrm>
+          <a:prstGeom prst="rect">
+            <a:avLst/>
+          </a:prstGeom>
+          <a:noFill/>
+          <a:ln/>
+        </p:spPr>
+        <p:txBody>
+          <a:bodyPr wrap="square" lIns="0" tIns="0" rIns="0" bIns="0" rtlCol="0" anchor="ctr"/>
+          <a:lstStyle/>
+          <a:p>
+            <a:pPr rtl="1" algn="ctr" indent="0" marL="0">
+              <a:buNone/>
+            </a:pPr>
+            <a:r>
+              <a:rPr lang="en-US" sz="900" i="1" dirty="0">
+                <a:solidFill>
+                  <a:srgbClr val="00A88A"/>
+                </a:solidFill>
+                <a:latin typeface="Calibri" pitchFamily="34" charset="0"/>
+                <a:ea typeface="Calibri" pitchFamily="34" charset="-122"/>
+                <a:cs typeface="Calibri" pitchFamily="34" charset="-120"/>
+              </a:rPr>
+              <a:t>Commit נקי, מסודר וניתן-לחזרה</a:t>
+            </a:r>
+            <a:endParaRPr lang="en-US" sz="900" dirty="0"/>
+          </a:p>
+        </p:txBody>
+      </p:sp>
+      <p:sp>
+        <p:nvSpPr>
+          <p:cNvPr id="24" name="Text 22"/>
+          <p:cNvSpPr/>
+          <p:nvPr/>
+        </p:nvSpPr>
+        <p:spPr>
+          <a:xfrm>
+            <a:off x="548640" y="5266944"/>
+            <a:ext cx="11091672" cy="274320"/>
+          </a:xfrm>
+          <a:prstGeom prst="rect">
+            <a:avLst/>
+          </a:prstGeom>
+          <a:noFill/>
+          <a:ln/>
+        </p:spPr>
+        <p:txBody>
+          <a:bodyPr wrap="square" lIns="0" tIns="0" rIns="0" bIns="0" rtlCol="0" anchor="ctr"/>
+          <a:lstStyle/>
+          <a:p>
+            <a:pPr rtl="1" algn="r" indent="0" marL="0">
+              <a:buNone/>
+            </a:pPr>
+            <a:r>
+              <a:rPr lang="en-US" sz="1000" i="1" dirty="0">
+                <a:solidFill>
+                  <a:srgbClr val="6B7280"/>
+                </a:solidFill>
+                <a:latin typeface="Calibri" pitchFamily="34" charset="0"/>
+                <a:ea typeface="Calibri" pitchFamily="34" charset="-122"/>
+                <a:cs typeface="Calibri" pitchFamily="34" charset="-120"/>
+              </a:rPr>
+              <a:t>איור: שרשרת שמות קבצים מבולבלת (למעלה, מוחלש) מול שרשרת Commit-ים מסודרת עם מסלול חזרה (למטה, בטיל).</a:t>
+            </a:r>
+            <a:endParaRPr lang="en-US" sz="1000" dirty="0"/>
+          </a:p>
+        </p:txBody>
+      </p:sp>
+      <p:sp>
+        <p:nvSpPr>
+          <p:cNvPr id="25" name="Shape 23"/>
+          <p:cNvSpPr/>
+          <p:nvPr/>
+        </p:nvSpPr>
+        <p:spPr>
+          <a:xfrm>
+            <a:off x="548640" y="5522976"/>
             <a:ext cx="11091672" cy="0"/>
           </a:xfrm>
           <a:prstGeom prst="line">
@@ -11300,13 +12955,13 @@
       </p:sp>
       <p:sp>
         <p:nvSpPr>
-          <p:cNvPr id="6" name="Text 4"/>
-          <p:cNvSpPr/>
-          <p:nvPr/>
-        </p:nvSpPr>
-        <p:spPr>
-          <a:xfrm>
-            <a:off x="548640" y="5669280"/>
+          <p:cNvPr id="26" name="Text 24"/>
+          <p:cNvSpPr/>
+          <p:nvPr/>
+        </p:nvSpPr>
+        <p:spPr>
+          <a:xfrm>
+            <a:off x="548640" y="5614416"/>
             <a:ext cx="11091672" cy="621792"/>
           </a:xfrm>
           <a:prstGeom prst="rect">
@@ -11339,7 +12994,7 @@
       </p:sp>
       <p:sp>
         <p:nvSpPr>
-          <p:cNvPr id="7" name="Text 5"/>
+          <p:cNvPr id="27" name="Text 25"/>
           <p:cNvSpPr/>
           <p:nvPr/>
         </p:nvSpPr>
@@ -11920,7 +13575,7 @@
         <p:spPr>
           <a:xfrm>
             <a:off x="548640" y="1508760"/>
-            <a:ext cx="11091672" cy="3931920"/>
+            <a:ext cx="11091672" cy="2907792"/>
           </a:xfrm>
           <a:prstGeom prst="rect">
             <a:avLst/>
@@ -12086,7 +13741,7 @@
                 <a:ea typeface="Calibri" pitchFamily="34" charset="-122"/>
                 <a:cs typeface="Calibri" pitchFamily="34" charset="-120"/>
               </a:rPr>
-              <a:t> מי מכם כבר השתמש ב-Git בעבר, בכל הקשר שהוא — גם רק כדי לשכפל Repository של מישהו אחר? איך שיתפתם קוד עם מישהו לפני שהכרתם GitHub (וואטסאפ? מייל? Google Drive)?</a:t>
+              <a:t> מי כבר השתמש ב-Git, ולו רק כדי לשכפל Repository של מישהו אחר? איך שיתפתם קוד לפני שהכרתם GitHub (וואטסאפ? מייל?)</a:t>
             </a:r>
             <a:endParaRPr lang="en-US" sz="1900" dirty="0"/>
           </a:p>
@@ -12100,7 +13755,287 @@
         </p:nvSpPr>
         <p:spPr>
           <a:xfrm>
-            <a:off x="548640" y="5577840"/>
+            <a:off x="6597396" y="4647895"/>
+            <a:ext cx="5042916" cy="753466"/>
+          </a:xfrm>
+          <a:prstGeom prst="roundRect">
+            <a:avLst>
+              <a:gd name="adj" fmla="val 7282"/>
+            </a:avLst>
+          </a:prstGeom>
+          <a:solidFill>
+            <a:srgbClr val="F6F6F8"/>
+          </a:solidFill>
+          <a:ln w="15875">
+            <a:solidFill>
+              <a:srgbClr val="B8B8C8"/>
+            </a:solidFill>
+            <a:prstDash val="solid"/>
+          </a:ln>
+        </p:spPr>
+      </p:sp>
+      <p:sp>
+        <p:nvSpPr>
+          <p:cNvPr id="6" name="Text 4"/>
+          <p:cNvSpPr/>
+          <p:nvPr/>
+        </p:nvSpPr>
+        <p:spPr>
+          <a:xfrm>
+            <a:off x="6597396" y="4647895"/>
+            <a:ext cx="5042916" cy="753466"/>
+          </a:xfrm>
+          <a:prstGeom prst="rect">
+            <a:avLst/>
+          </a:prstGeom>
+          <a:noFill/>
+          <a:ln/>
+        </p:spPr>
+        <p:txBody>
+          <a:bodyPr wrap="square" lIns="76200" tIns="76200" rIns="76200" bIns="76200" rtlCol="0" anchor="ctr"/>
+          <a:lstStyle/>
+          <a:p>
+            <a:pPr rtl="1" algn="ctr" indent="0" marL="0">
+              <a:buNone/>
+            </a:pPr>
+            <a:r>
+              <a:rPr lang="en-US" sz="1300" b="1" dirty="0">
+                <a:solidFill>
+                  <a:srgbClr val="1B1F3B"/>
+                </a:solidFill>
+              </a:rPr>
+              <a:t>המחשב שלכם</a:t>
+            </a:r>
+            <a:endParaRPr lang="en-US" sz="1300" dirty="0"/>
+          </a:p>
+          <a:p>
+            <a:pPr rtl="1" algn="ctr" indent="0" marL="0">
+              <a:buNone/>
+            </a:pPr>
+            <a:r>
+              <a:rPr lang="en-US" sz="1000" dirty="0">
+                <a:solidFill>
+                  <a:srgbClr val="6B7280"/>
+                </a:solidFill>
+              </a:rPr>
+              <a:t>Git — היסטוריה מקומית</a:t>
+            </a:r>
+            <a:endParaRPr lang="en-US" sz="1300" dirty="0"/>
+          </a:p>
+        </p:txBody>
+      </p:sp>
+      <p:sp>
+        <p:nvSpPr>
+          <p:cNvPr id="7" name="Shape 5"/>
+          <p:cNvSpPr/>
+          <p:nvPr/>
+        </p:nvSpPr>
+        <p:spPr>
+          <a:xfrm>
+            <a:off x="548640" y="4647895"/>
+            <a:ext cx="5042916" cy="753466"/>
+          </a:xfrm>
+          <a:prstGeom prst="roundRect">
+            <a:avLst>
+              <a:gd name="adj" fmla="val 7282"/>
+            </a:avLst>
+          </a:prstGeom>
+          <a:solidFill>
+            <a:srgbClr val="00A88A"/>
+          </a:solidFill>
+          <a:ln w="15875">
+            <a:solidFill>
+              <a:srgbClr val="00A88A"/>
+            </a:solidFill>
+            <a:prstDash val="solid"/>
+          </a:ln>
+        </p:spPr>
+      </p:sp>
+      <p:sp>
+        <p:nvSpPr>
+          <p:cNvPr id="8" name="Text 6"/>
+          <p:cNvSpPr/>
+          <p:nvPr/>
+        </p:nvSpPr>
+        <p:spPr>
+          <a:xfrm>
+            <a:off x="548640" y="4647895"/>
+            <a:ext cx="5042916" cy="753466"/>
+          </a:xfrm>
+          <a:prstGeom prst="rect">
+            <a:avLst/>
+          </a:prstGeom>
+          <a:noFill/>
+          <a:ln/>
+        </p:spPr>
+        <p:txBody>
+          <a:bodyPr wrap="square" lIns="76200" tIns="76200" rIns="76200" bIns="76200" rtlCol="0" anchor="ctr"/>
+          <a:lstStyle/>
+          <a:p>
+            <a:pPr rtl="1" algn="ctr" indent="0" marL="0">
+              <a:buNone/>
+            </a:pPr>
+            <a:r>
+              <a:rPr lang="en-US" sz="1300" b="1" dirty="0">
+                <a:solidFill>
+                  <a:srgbClr val="FFFFFF"/>
+                </a:solidFill>
+              </a:rPr>
+              <a:t>GitHub</a:t>
+            </a:r>
+            <a:endParaRPr lang="en-US" sz="1300" dirty="0"/>
+          </a:p>
+          <a:p>
+            <a:pPr rtl="1" algn="ctr" indent="0" marL="0">
+              <a:buNone/>
+            </a:pPr>
+            <a:r>
+              <a:rPr lang="en-US" sz="1000" dirty="0">
+                <a:solidFill>
+                  <a:srgbClr val="E6FFFA"/>
+                </a:solidFill>
+              </a:rPr>
+              <a:t>בענן — מגובה ומשותף</a:t>
+            </a:r>
+            <a:endParaRPr lang="en-US" sz="1300" dirty="0"/>
+          </a:p>
+        </p:txBody>
+      </p:sp>
+      <p:sp>
+        <p:nvSpPr>
+          <p:cNvPr id="9" name="Shape 7"/>
+          <p:cNvSpPr/>
+          <p:nvPr/>
+        </p:nvSpPr>
+        <p:spPr>
+          <a:xfrm>
+            <a:off x="5682996" y="4911608"/>
+            <a:ext cx="822960" cy="0"/>
+          </a:xfrm>
+          <a:prstGeom prst="line">
+            <a:avLst/>
+          </a:prstGeom>
+          <a:noFill/>
+          <a:ln w="15875">
+            <a:solidFill>
+              <a:srgbClr val="B8B8C8"/>
+            </a:solidFill>
+            <a:prstDash val="solid"/>
+            <a:headEnd type="triangle"/>
+          </a:ln>
+        </p:spPr>
+      </p:sp>
+      <p:sp>
+        <p:nvSpPr>
+          <p:cNvPr id="10" name="Shape 8"/>
+          <p:cNvSpPr/>
+          <p:nvPr/>
+        </p:nvSpPr>
+        <p:spPr>
+          <a:xfrm>
+            <a:off x="5682996" y="5137648"/>
+            <a:ext cx="822960" cy="0"/>
+          </a:xfrm>
+          <a:prstGeom prst="line">
+            <a:avLst/>
+          </a:prstGeom>
+          <a:noFill/>
+          <a:ln w="15875">
+            <a:solidFill>
+              <a:srgbClr val="B8B8C8"/>
+            </a:solidFill>
+            <a:prstDash val="solid"/>
+            <a:tailEnd type="triangle"/>
+          </a:ln>
+        </p:spPr>
+      </p:sp>
+      <p:sp>
+        <p:nvSpPr>
+          <p:cNvPr id="11" name="Text 9"/>
+          <p:cNvSpPr/>
+          <p:nvPr/>
+        </p:nvSpPr>
+        <p:spPr>
+          <a:xfrm>
+            <a:off x="5637276" y="4905756"/>
+            <a:ext cx="914400" cy="237744"/>
+          </a:xfrm>
+          <a:prstGeom prst="rect">
+            <a:avLst/>
+          </a:prstGeom>
+          <a:noFill/>
+          <a:ln/>
+        </p:spPr>
+        <p:txBody>
+          <a:bodyPr wrap="square" lIns="0" tIns="0" rIns="0" bIns="0" rtlCol="0" anchor="ctr"/>
+          <a:lstStyle/>
+          <a:p>
+            <a:pPr algn="ctr" indent="0" marL="0">
+              <a:buNone/>
+            </a:pPr>
+            <a:r>
+              <a:rPr lang="en-US" sz="900" i="1" dirty="0">
+                <a:solidFill>
+                  <a:srgbClr val="6B7280"/>
+                </a:solidFill>
+                <a:latin typeface="Calibri" pitchFamily="34" charset="0"/>
+                <a:ea typeface="Calibri" pitchFamily="34" charset="-122"/>
+                <a:cs typeface="Calibri" pitchFamily="34" charset="-120"/>
+              </a:rPr>
+              <a:t>Push / Pull</a:t>
+            </a:r>
+            <a:endParaRPr lang="en-US" sz="900" dirty="0"/>
+          </a:p>
+        </p:txBody>
+      </p:sp>
+      <p:sp>
+        <p:nvSpPr>
+          <p:cNvPr id="12" name="Text 10"/>
+          <p:cNvSpPr/>
+          <p:nvPr/>
+        </p:nvSpPr>
+        <p:spPr>
+          <a:xfrm>
+            <a:off x="548640" y="5586984"/>
+            <a:ext cx="11091672" cy="274320"/>
+          </a:xfrm>
+          <a:prstGeom prst="rect">
+            <a:avLst/>
+          </a:prstGeom>
+          <a:noFill/>
+          <a:ln/>
+        </p:spPr>
+        <p:txBody>
+          <a:bodyPr wrap="square" lIns="0" tIns="0" rIns="0" bIns="0" rtlCol="0" anchor="ctr"/>
+          <a:lstStyle/>
+          <a:p>
+            <a:pPr rtl="1" algn="r" indent="0" marL="0">
+              <a:buNone/>
+            </a:pPr>
+            <a:r>
+              <a:rPr lang="en-US" sz="1000" i="1" dirty="0">
+                <a:solidFill>
+                  <a:srgbClr val="6B7280"/>
+                </a:solidFill>
+                <a:latin typeface="Calibri" pitchFamily="34" charset="0"/>
+                <a:ea typeface="Calibri" pitchFamily="34" charset="-122"/>
+                <a:cs typeface="Calibri" pitchFamily="34" charset="-120"/>
+              </a:rPr>
+              <a:t>איור: Git רץ על המחשב שלכם (היסטוריה מקומית); GitHub הוא העותק בענן, מגובה ומשותף — Push מעלה, Pull מוריד.</a:t>
+            </a:r>
+            <a:endParaRPr lang="en-US" sz="1000" dirty="0"/>
+          </a:p>
+        </p:txBody>
+      </p:sp>
+      <p:sp>
+        <p:nvSpPr>
+          <p:cNvPr id="13" name="Shape 11"/>
+          <p:cNvSpPr/>
+          <p:nvPr/>
+        </p:nvSpPr>
+        <p:spPr>
+          <a:xfrm>
+            <a:off x="548640" y="5843016"/>
             <a:ext cx="11091672" cy="0"/>
           </a:xfrm>
           <a:prstGeom prst="line">
@@ -12117,14 +14052,14 @@
       </p:sp>
       <p:sp>
         <p:nvSpPr>
-          <p:cNvPr id="6" name="Text 4"/>
-          <p:cNvSpPr/>
-          <p:nvPr/>
-        </p:nvSpPr>
-        <p:spPr>
-          <a:xfrm>
-            <a:off x="548640" y="5669280"/>
-            <a:ext cx="11091672" cy="621792"/>
+          <p:cNvPr id="14" name="Text 12"/>
+          <p:cNvSpPr/>
+          <p:nvPr/>
+        </p:nvSpPr>
+        <p:spPr>
+          <a:xfrm>
+            <a:off x="548640" y="5934456"/>
+            <a:ext cx="11091672" cy="457200"/>
           </a:xfrm>
           <a:prstGeom prst="rect">
             <a:avLst/>
@@ -12148,7 +14083,7 @@
                 <a:ea typeface="Arial" pitchFamily="34" charset="-122"/>
                 <a:cs typeface="Arial" pitchFamily="34" charset="-120"/>
               </a:rPr>
-              <a:t>✔ מה עושים בפועל: בתרגול היום תיצרו Repository ראשון משלכם ב-GitHub — זה הבית הקבוע של הפרויקט שילווה אתכם לאורך הסמסטר.</a:t>
+              <a:t>✔ מה עושים בפועל: בתרגול היום תיצרו Repository משלכם ב-GitHub — הבית הקבוע של הפרויקט לאורך הסמסטר.</a:t>
             </a:r>
             <a:endParaRPr lang="en-US" sz="1700" dirty="0"/>
           </a:p>
@@ -12156,7 +14091,7 @@
       </p:sp>
       <p:sp>
         <p:nvSpPr>
-          <p:cNvPr id="7" name="Text 5"/>
+          <p:cNvPr id="15" name="Text 13"/>
           <p:cNvSpPr/>
           <p:nvPr/>
         </p:nvSpPr>
@@ -12737,7 +14672,7 @@
         <p:spPr>
           <a:xfrm>
             <a:off x="548640" y="1508760"/>
-            <a:ext cx="11091672" cy="3931920"/>
+            <a:ext cx="11091672" cy="1499616"/>
           </a:xfrm>
           <a:prstGeom prst="rect">
             <a:avLst/>
@@ -12857,7 +14792,292 @@
         </p:nvSpPr>
         <p:spPr>
           <a:xfrm>
-            <a:off x="548640" y="5577840"/>
+            <a:off x="8095488" y="3648456"/>
+            <a:ext cx="3544824" cy="502920"/>
+          </a:xfrm>
+          <a:prstGeom prst="roundRect">
+            <a:avLst>
+              <a:gd name="adj" fmla="val 10909"/>
+            </a:avLst>
+          </a:prstGeom>
+          <a:solidFill>
+            <a:srgbClr val="F6F6F8"/>
+          </a:solidFill>
+          <a:ln w="15875">
+            <a:solidFill>
+              <a:srgbClr val="B8B8C8"/>
+            </a:solidFill>
+            <a:prstDash val="solid"/>
+          </a:ln>
+        </p:spPr>
+      </p:sp>
+      <p:sp>
+        <p:nvSpPr>
+          <p:cNvPr id="6" name="Text 4"/>
+          <p:cNvSpPr/>
+          <p:nvPr/>
+        </p:nvSpPr>
+        <p:spPr>
+          <a:xfrm>
+            <a:off x="8095488" y="3648456"/>
+            <a:ext cx="3544824" cy="502920"/>
+          </a:xfrm>
+          <a:prstGeom prst="rect">
+            <a:avLst/>
+          </a:prstGeom>
+          <a:noFill/>
+          <a:ln/>
+        </p:spPr>
+        <p:txBody>
+          <a:bodyPr wrap="square" lIns="50800" tIns="50800" rIns="50800" bIns="50800" rtlCol="0" anchor="ctr"/>
+          <a:lstStyle/>
+          <a:p>
+            <a:pPr rtl="1" algn="ctr" indent="0" marL="0">
+              <a:buNone/>
+            </a:pPr>
+            <a:r>
+              <a:rPr lang="en-US" sz="1200" dirty="0">
+                <a:solidFill>
+                  <a:srgbClr val="1B1F3B"/>
+                </a:solidFill>
+                <a:latin typeface="Calibri" pitchFamily="34" charset="0"/>
+                <a:ea typeface="Calibri" pitchFamily="34" charset="-122"/>
+                <a:cs typeface="Calibri" pitchFamily="34" charset="-120"/>
+              </a:rPr>
+              <a:t>בקשה בשפה טבעית</a:t>
+            </a:r>
+            <a:endParaRPr lang="en-US" sz="1200" dirty="0"/>
+          </a:p>
+        </p:txBody>
+      </p:sp>
+      <p:sp>
+        <p:nvSpPr>
+          <p:cNvPr id="7" name="Shape 5"/>
+          <p:cNvSpPr/>
+          <p:nvPr/>
+        </p:nvSpPr>
+        <p:spPr>
+          <a:xfrm>
+            <a:off x="7885176" y="3899916"/>
+            <a:ext cx="192024" cy="0"/>
+          </a:xfrm>
+          <a:prstGeom prst="line">
+            <a:avLst/>
+          </a:prstGeom>
+          <a:noFill/>
+          <a:ln w="19050">
+            <a:solidFill>
+              <a:srgbClr val="B8B8C8"/>
+            </a:solidFill>
+            <a:prstDash val="solid"/>
+            <a:headEnd type="triangle"/>
+          </a:ln>
+        </p:spPr>
+      </p:sp>
+      <p:sp>
+        <p:nvSpPr>
+          <p:cNvPr id="8" name="Shape 6"/>
+          <p:cNvSpPr/>
+          <p:nvPr/>
+        </p:nvSpPr>
+        <p:spPr>
+          <a:xfrm>
+            <a:off x="4322064" y="3648456"/>
+            <a:ext cx="3544824" cy="502920"/>
+          </a:xfrm>
+          <a:prstGeom prst="roundRect">
+            <a:avLst>
+              <a:gd name="adj" fmla="val 10909"/>
+            </a:avLst>
+          </a:prstGeom>
+          <a:solidFill>
+            <a:srgbClr val="00A88A"/>
+          </a:solidFill>
+          <a:ln w="15875">
+            <a:solidFill>
+              <a:srgbClr val="00A88A"/>
+            </a:solidFill>
+            <a:prstDash val="solid"/>
+          </a:ln>
+        </p:spPr>
+      </p:sp>
+      <p:sp>
+        <p:nvSpPr>
+          <p:cNvPr id="9" name="Text 7"/>
+          <p:cNvSpPr/>
+          <p:nvPr/>
+        </p:nvSpPr>
+        <p:spPr>
+          <a:xfrm>
+            <a:off x="4322064" y="3648456"/>
+            <a:ext cx="3544824" cy="502920"/>
+          </a:xfrm>
+          <a:prstGeom prst="rect">
+            <a:avLst/>
+          </a:prstGeom>
+          <a:noFill/>
+          <a:ln/>
+        </p:spPr>
+        <p:txBody>
+          <a:bodyPr wrap="square" lIns="50800" tIns="50800" rIns="50800" bIns="50800" rtlCol="0" anchor="ctr"/>
+          <a:lstStyle/>
+          <a:p>
+            <a:pPr rtl="1" algn="ctr" indent="0" marL="0">
+              <a:buNone/>
+            </a:pPr>
+            <a:r>
+              <a:rPr lang="en-US" sz="1200" b="1" dirty="0">
+                <a:solidFill>
+                  <a:srgbClr val="FFFFFF"/>
+                </a:solidFill>
+                <a:latin typeface="Calibri" pitchFamily="34" charset="0"/>
+                <a:ea typeface="Calibri" pitchFamily="34" charset="-122"/>
+                <a:cs typeface="Calibri" pitchFamily="34" charset="-120"/>
+              </a:rPr>
+              <a:t>כלי AI</a:t>
+            </a:r>
+            <a:endParaRPr lang="en-US" sz="1200" dirty="0"/>
+          </a:p>
+        </p:txBody>
+      </p:sp>
+      <p:sp>
+        <p:nvSpPr>
+          <p:cNvPr id="10" name="Shape 8"/>
+          <p:cNvSpPr/>
+          <p:nvPr/>
+        </p:nvSpPr>
+        <p:spPr>
+          <a:xfrm>
+            <a:off x="4111752" y="3899916"/>
+            <a:ext cx="192024" cy="0"/>
+          </a:xfrm>
+          <a:prstGeom prst="line">
+            <a:avLst/>
+          </a:prstGeom>
+          <a:noFill/>
+          <a:ln w="19050">
+            <a:solidFill>
+              <a:srgbClr val="B8B8C8"/>
+            </a:solidFill>
+            <a:prstDash val="solid"/>
+            <a:headEnd type="triangle"/>
+          </a:ln>
+        </p:spPr>
+      </p:sp>
+      <p:sp>
+        <p:nvSpPr>
+          <p:cNvPr id="11" name="Shape 9"/>
+          <p:cNvSpPr/>
+          <p:nvPr/>
+        </p:nvSpPr>
+        <p:spPr>
+          <a:xfrm>
+            <a:off x="548640" y="3648456"/>
+            <a:ext cx="3544824" cy="502920"/>
+          </a:xfrm>
+          <a:prstGeom prst="roundRect">
+            <a:avLst>
+              <a:gd name="adj" fmla="val 10909"/>
+            </a:avLst>
+          </a:prstGeom>
+          <a:solidFill>
+            <a:srgbClr val="F6F6F8"/>
+          </a:solidFill>
+          <a:ln w="15875">
+            <a:solidFill>
+              <a:srgbClr val="B8B8C8"/>
+            </a:solidFill>
+            <a:prstDash val="solid"/>
+          </a:ln>
+        </p:spPr>
+      </p:sp>
+      <p:sp>
+        <p:nvSpPr>
+          <p:cNvPr id="12" name="Text 10"/>
+          <p:cNvSpPr/>
+          <p:nvPr/>
+        </p:nvSpPr>
+        <p:spPr>
+          <a:xfrm>
+            <a:off x="548640" y="3648456"/>
+            <a:ext cx="3544824" cy="502920"/>
+          </a:xfrm>
+          <a:prstGeom prst="rect">
+            <a:avLst/>
+          </a:prstGeom>
+          <a:noFill/>
+          <a:ln/>
+        </p:spPr>
+        <p:txBody>
+          <a:bodyPr wrap="square" lIns="50800" tIns="50800" rIns="50800" bIns="50800" rtlCol="0" anchor="ctr"/>
+          <a:lstStyle/>
+          <a:p>
+            <a:pPr rtl="1" algn="ctr" indent="0" marL="0">
+              <a:buNone/>
+            </a:pPr>
+            <a:r>
+              <a:rPr lang="en-US" sz="1200" dirty="0">
+                <a:solidFill>
+                  <a:srgbClr val="1B1F3B"/>
+                </a:solidFill>
+                <a:latin typeface="Calibri" pitchFamily="34" charset="0"/>
+                <a:ea typeface="Calibri" pitchFamily="34" charset="-122"/>
+                <a:cs typeface="Calibri" pitchFamily="34" charset="-120"/>
+              </a:rPr>
+              <a:t>קוד בקובץ שלכם</a:t>
+            </a:r>
+            <a:endParaRPr lang="en-US" sz="1200" dirty="0"/>
+          </a:p>
+        </p:txBody>
+      </p:sp>
+      <p:sp>
+        <p:nvSpPr>
+          <p:cNvPr id="13" name="Text 11"/>
+          <p:cNvSpPr/>
+          <p:nvPr/>
+        </p:nvSpPr>
+        <p:spPr>
+          <a:xfrm>
+            <a:off x="548640" y="4745736"/>
+            <a:ext cx="11091672" cy="274320"/>
+          </a:xfrm>
+          <a:prstGeom prst="rect">
+            <a:avLst/>
+          </a:prstGeom>
+          <a:noFill/>
+          <a:ln/>
+        </p:spPr>
+        <p:txBody>
+          <a:bodyPr wrap="square" lIns="0" tIns="0" rIns="0" bIns="0" rtlCol="0" anchor="ctr"/>
+          <a:lstStyle/>
+          <a:p>
+            <a:pPr rtl="1" algn="r" indent="0" marL="0">
+              <a:buNone/>
+            </a:pPr>
+            <a:r>
+              <a:rPr lang="en-US" sz="1000" i="1" dirty="0">
+                <a:solidFill>
+                  <a:srgbClr val="6B7280"/>
+                </a:solidFill>
+                <a:latin typeface="Calibri" pitchFamily="34" charset="0"/>
+                <a:ea typeface="Calibri" pitchFamily="34" charset="-122"/>
+                <a:cs typeface="Calibri" pitchFamily="34" charset="-120"/>
+              </a:rPr>
+              <a:t>איור: בקשה בשפה טבעית → כלי AI → קוד שנכתב בפועל בקובץ שלכם.</a:t>
+            </a:r>
+            <a:endParaRPr lang="en-US" sz="1000" dirty="0"/>
+          </a:p>
+        </p:txBody>
+      </p:sp>
+      <p:sp>
+        <p:nvSpPr>
+          <p:cNvPr id="14" name="Shape 12"/>
+          <p:cNvSpPr/>
+          <p:nvPr/>
+        </p:nvSpPr>
+        <p:spPr>
+          <a:xfrm>
+            <a:off x="548640" y="5001768"/>
             <a:ext cx="11091672" cy="0"/>
           </a:xfrm>
           <a:prstGeom prst="line">
@@ -12874,13 +15094,13 @@
       </p:sp>
       <p:sp>
         <p:nvSpPr>
-          <p:cNvPr id="6" name="Text 4"/>
-          <p:cNvSpPr/>
-          <p:nvPr/>
-        </p:nvSpPr>
-        <p:spPr>
-          <a:xfrm>
-            <a:off x="548640" y="5669280"/>
+          <p:cNvPr id="15" name="Text 13"/>
+          <p:cNvSpPr/>
+          <p:nvPr/>
+        </p:nvSpPr>
+        <p:spPr>
+          <a:xfrm>
+            <a:off x="548640" y="5093208"/>
             <a:ext cx="11091672" cy="457200"/>
           </a:xfrm>
           <a:prstGeom prst="rect">
@@ -12913,7 +15133,7 @@
       </p:sp>
       <p:sp>
         <p:nvSpPr>
-          <p:cNvPr id="7" name="Text 5"/>
+          <p:cNvPr id="16" name="Text 14"/>
           <p:cNvSpPr/>
           <p:nvPr/>
         </p:nvSpPr>
@@ -13069,7 +15289,7 @@
         <p:spPr>
           <a:xfrm>
             <a:off x="548640" y="1508760"/>
-            <a:ext cx="11091672" cy="3931920"/>
+            <a:ext cx="11091672" cy="2724912"/>
           </a:xfrm>
           <a:prstGeom prst="rect">
             <a:avLst/>
@@ -13201,13 +15421,1100 @@
       </p:sp>
       <p:sp>
         <p:nvSpPr>
-          <p:cNvPr id="5" name="Shape 3"/>
-          <p:cNvSpPr/>
-          <p:nvPr/>
-        </p:nvSpPr>
-        <p:spPr>
-          <a:xfrm>
-            <a:off x="548640" y="5577840"/>
+          <p:cNvPr id="5" name="Text 3"/>
+          <p:cNvSpPr/>
+          <p:nvPr/>
+        </p:nvSpPr>
+        <p:spPr>
+          <a:xfrm>
+            <a:off x="10131552" y="4370832"/>
+            <a:ext cx="1508760" cy="359908"/>
+          </a:xfrm>
+          <a:prstGeom prst="rect">
+            <a:avLst/>
+          </a:prstGeom>
+          <a:noFill/>
+          <a:ln/>
+        </p:spPr>
+        <p:txBody>
+          <a:bodyPr wrap="square" lIns="0" tIns="0" rIns="0" bIns="0" rtlCol="0" anchor="ctr"/>
+          <a:lstStyle/>
+          <a:p>
+            <a:pPr rtl="1" algn="r" indent="0" marL="0">
+              <a:buNone/>
+            </a:pPr>
+            <a:r>
+              <a:rPr lang="en-US" sz="1100" b="1" dirty="0">
+                <a:solidFill>
+                  <a:srgbClr val="1B1F3B"/>
+                </a:solidFill>
+                <a:latin typeface="Arial" pitchFamily="34" charset="0"/>
+                <a:ea typeface="Arial" pitchFamily="34" charset="-122"/>
+                <a:cs typeface="Arial" pitchFamily="34" charset="-120"/>
+              </a:rPr>
+              <a:t>Autocomplete</a:t>
+            </a:r>
+            <a:endParaRPr lang="en-US" sz="1100" dirty="0"/>
+          </a:p>
+        </p:txBody>
+      </p:sp>
+      <p:sp>
+        <p:nvSpPr>
+          <p:cNvPr id="6" name="Shape 4"/>
+          <p:cNvSpPr/>
+          <p:nvPr/>
+        </p:nvSpPr>
+        <p:spPr>
+          <a:xfrm>
+            <a:off x="7715250" y="4370832"/>
+            <a:ext cx="2279142" cy="359908"/>
+          </a:xfrm>
+          <a:prstGeom prst="rect">
+            <a:avLst/>
+          </a:prstGeom>
+          <a:solidFill>
+            <a:srgbClr val="F6F6F8"/>
+          </a:solidFill>
+          <a:ln w="12700">
+            <a:solidFill>
+              <a:srgbClr val="B8B8C8"/>
+            </a:solidFill>
+            <a:prstDash val="solid"/>
+          </a:ln>
+        </p:spPr>
+      </p:sp>
+      <p:sp>
+        <p:nvSpPr>
+          <p:cNvPr id="7" name="Text 5"/>
+          <p:cNvSpPr/>
+          <p:nvPr/>
+        </p:nvSpPr>
+        <p:spPr>
+          <a:xfrm>
+            <a:off x="7715250" y="4370832"/>
+            <a:ext cx="2279142" cy="359908"/>
+          </a:xfrm>
+          <a:prstGeom prst="rect">
+            <a:avLst/>
+          </a:prstGeom>
+          <a:noFill/>
+          <a:ln/>
+        </p:spPr>
+        <p:txBody>
+          <a:bodyPr wrap="square" lIns="25400" tIns="25400" rIns="25400" bIns="25400" rtlCol="0" anchor="ctr"/>
+          <a:lstStyle/>
+          <a:p>
+            <a:pPr rtl="1" algn="ctr" indent="0" marL="0">
+              <a:buNone/>
+            </a:pPr>
+            <a:r>
+              <a:rPr lang="en-US" sz="1000" dirty="0">
+                <a:solidFill>
+                  <a:srgbClr val="1B1F3B"/>
+                </a:solidFill>
+                <a:latin typeface="Calibri" pitchFamily="34" charset="0"/>
+                <a:ea typeface="Calibri" pitchFamily="34" charset="-122"/>
+                <a:cs typeface="Calibri" pitchFamily="34" charset="-120"/>
+              </a:rPr>
+              <a:t>קורא קבצים</a:t>
+            </a:r>
+            <a:endParaRPr lang="en-US" sz="1000" dirty="0"/>
+          </a:p>
+        </p:txBody>
+      </p:sp>
+      <p:sp>
+        <p:nvSpPr>
+          <p:cNvPr id="8" name="Shape 6"/>
+          <p:cNvSpPr/>
+          <p:nvPr/>
+        </p:nvSpPr>
+        <p:spPr>
+          <a:xfrm>
+            <a:off x="7605522" y="4550786"/>
+            <a:ext cx="109728" cy="0"/>
+          </a:xfrm>
+          <a:prstGeom prst="line">
+            <a:avLst/>
+          </a:prstGeom>
+          <a:noFill/>
+          <a:ln w="12700">
+            <a:solidFill>
+              <a:srgbClr val="B8B8C8"/>
+            </a:solidFill>
+            <a:prstDash val="solid"/>
+          </a:ln>
+        </p:spPr>
+      </p:sp>
+      <p:sp>
+        <p:nvSpPr>
+          <p:cNvPr id="9" name="Shape 7"/>
+          <p:cNvSpPr/>
+          <p:nvPr/>
+        </p:nvSpPr>
+        <p:spPr>
+          <a:xfrm>
+            <a:off x="5326380" y="4370832"/>
+            <a:ext cx="2279142" cy="359908"/>
+          </a:xfrm>
+          <a:prstGeom prst="rect">
+            <a:avLst/>
+          </a:prstGeom>
+          <a:solidFill>
+            <a:srgbClr val="F6F6F8"/>
+          </a:solidFill>
+          <a:ln w="12700">
+            <a:solidFill>
+              <a:srgbClr val="B8B8C8"/>
+            </a:solidFill>
+            <a:prstDash val="solid"/>
+          </a:ln>
+        </p:spPr>
+      </p:sp>
+      <p:sp>
+        <p:nvSpPr>
+          <p:cNvPr id="10" name="Text 8"/>
+          <p:cNvSpPr/>
+          <p:nvPr/>
+        </p:nvSpPr>
+        <p:spPr>
+          <a:xfrm>
+            <a:off x="5326380" y="4370832"/>
+            <a:ext cx="2279142" cy="359908"/>
+          </a:xfrm>
+          <a:prstGeom prst="rect">
+            <a:avLst/>
+          </a:prstGeom>
+          <a:noFill/>
+          <a:ln/>
+        </p:spPr>
+        <p:txBody>
+          <a:bodyPr wrap="square" lIns="25400" tIns="25400" rIns="25400" bIns="25400" rtlCol="0" anchor="ctr"/>
+          <a:lstStyle/>
+          <a:p>
+            <a:pPr rtl="1" algn="ctr" indent="0" marL="0">
+              <a:buNone/>
+            </a:pPr>
+            <a:r>
+              <a:rPr lang="en-US" sz="1000" dirty="0">
+                <a:solidFill>
+                  <a:srgbClr val="1B1F3B"/>
+                </a:solidFill>
+                <a:latin typeface="Calibri" pitchFamily="34" charset="0"/>
+                <a:ea typeface="Calibri" pitchFamily="34" charset="-122"/>
+                <a:cs typeface="Calibri" pitchFamily="34" charset="-120"/>
+              </a:rPr>
+              <a:t>כותב קוד</a:t>
+            </a:r>
+            <a:endParaRPr lang="en-US" sz="1000" dirty="0"/>
+          </a:p>
+        </p:txBody>
+      </p:sp>
+      <p:sp>
+        <p:nvSpPr>
+          <p:cNvPr id="11" name="Shape 9"/>
+          <p:cNvSpPr/>
+          <p:nvPr/>
+        </p:nvSpPr>
+        <p:spPr>
+          <a:xfrm>
+            <a:off x="6356223" y="4228186"/>
+            <a:ext cx="219456" cy="219456"/>
+          </a:xfrm>
+          <a:prstGeom prst="ellipse">
+            <a:avLst/>
+          </a:prstGeom>
+          <a:solidFill>
+            <a:srgbClr val="6B7280"/>
+          </a:solidFill>
+          <a:ln w="12700">
+            <a:solidFill>
+              <a:srgbClr val="FFFFFF"/>
+            </a:solidFill>
+            <a:prstDash val="solid"/>
+          </a:ln>
+        </p:spPr>
+      </p:sp>
+      <p:sp>
+        <p:nvSpPr>
+          <p:cNvPr id="12" name="Text 10"/>
+          <p:cNvSpPr/>
+          <p:nvPr/>
+        </p:nvSpPr>
+        <p:spPr>
+          <a:xfrm>
+            <a:off x="6356223" y="4228186"/>
+            <a:ext cx="219456" cy="219456"/>
+          </a:xfrm>
+          <a:prstGeom prst="rect">
+            <a:avLst/>
+          </a:prstGeom>
+          <a:noFill/>
+          <a:ln/>
+        </p:spPr>
+        <p:txBody>
+          <a:bodyPr wrap="square" lIns="0" tIns="0" rIns="0" bIns="0" rtlCol="0" anchor="ctr"/>
+          <a:lstStyle/>
+          <a:p>
+            <a:pPr algn="ctr" indent="0" marL="0">
+              <a:buNone/>
+            </a:pPr>
+            <a:r>
+              <a:rPr lang="en-US" sz="900" b="1" dirty="0">
+                <a:solidFill>
+                  <a:srgbClr val="FFFFFF"/>
+                </a:solidFill>
+                <a:latin typeface="Arial" pitchFamily="34" charset="0"/>
+                <a:ea typeface="Arial" pitchFamily="34" charset="-122"/>
+                <a:cs typeface="Arial" pitchFamily="34" charset="-120"/>
+              </a:rPr>
+              <a:t>✓</a:t>
+            </a:r>
+            <a:endParaRPr lang="en-US" sz="900" dirty="0"/>
+          </a:p>
+        </p:txBody>
+      </p:sp>
+      <p:sp>
+        <p:nvSpPr>
+          <p:cNvPr id="13" name="Shape 11"/>
+          <p:cNvSpPr/>
+          <p:nvPr/>
+        </p:nvSpPr>
+        <p:spPr>
+          <a:xfrm>
+            <a:off x="5216652" y="4550786"/>
+            <a:ext cx="109728" cy="0"/>
+          </a:xfrm>
+          <a:prstGeom prst="line">
+            <a:avLst/>
+          </a:prstGeom>
+          <a:noFill/>
+          <a:ln w="12700">
+            <a:solidFill>
+              <a:srgbClr val="B8B8C8"/>
+            </a:solidFill>
+            <a:prstDash val="solid"/>
+          </a:ln>
+        </p:spPr>
+      </p:sp>
+      <p:sp>
+        <p:nvSpPr>
+          <p:cNvPr id="14" name="Shape 12"/>
+          <p:cNvSpPr/>
+          <p:nvPr/>
+        </p:nvSpPr>
+        <p:spPr>
+          <a:xfrm>
+            <a:off x="2937510" y="4370832"/>
+            <a:ext cx="2279142" cy="359908"/>
+          </a:xfrm>
+          <a:prstGeom prst="rect">
+            <a:avLst/>
+          </a:prstGeom>
+          <a:solidFill>
+            <a:srgbClr val="F6F6F8"/>
+          </a:solidFill>
+          <a:ln w="12700">
+            <a:solidFill>
+              <a:srgbClr val="B8B8C8"/>
+            </a:solidFill>
+            <a:prstDash val="solid"/>
+          </a:ln>
+        </p:spPr>
+      </p:sp>
+      <p:sp>
+        <p:nvSpPr>
+          <p:cNvPr id="15" name="Text 13"/>
+          <p:cNvSpPr/>
+          <p:nvPr/>
+        </p:nvSpPr>
+        <p:spPr>
+          <a:xfrm>
+            <a:off x="2937510" y="4370832"/>
+            <a:ext cx="2279142" cy="359908"/>
+          </a:xfrm>
+          <a:prstGeom prst="rect">
+            <a:avLst/>
+          </a:prstGeom>
+          <a:noFill/>
+          <a:ln/>
+        </p:spPr>
+        <p:txBody>
+          <a:bodyPr wrap="square" lIns="25400" tIns="25400" rIns="25400" bIns="25400" rtlCol="0" anchor="ctr"/>
+          <a:lstStyle/>
+          <a:p>
+            <a:pPr rtl="1" algn="ctr" indent="0" marL="0">
+              <a:buNone/>
+            </a:pPr>
+            <a:r>
+              <a:rPr lang="en-US" sz="1000" dirty="0">
+                <a:solidFill>
+                  <a:srgbClr val="1B1F3B"/>
+                </a:solidFill>
+                <a:latin typeface="Calibri" pitchFamily="34" charset="0"/>
+                <a:ea typeface="Calibri" pitchFamily="34" charset="-122"/>
+                <a:cs typeface="Calibri" pitchFamily="34" charset="-120"/>
+              </a:rPr>
+              <a:t>מריץ בדיקות</a:t>
+            </a:r>
+            <a:endParaRPr lang="en-US" sz="1000" dirty="0"/>
+          </a:p>
+        </p:txBody>
+      </p:sp>
+      <p:sp>
+        <p:nvSpPr>
+          <p:cNvPr id="16" name="Shape 14"/>
+          <p:cNvSpPr/>
+          <p:nvPr/>
+        </p:nvSpPr>
+        <p:spPr>
+          <a:xfrm>
+            <a:off x="2827782" y="4550786"/>
+            <a:ext cx="109728" cy="0"/>
+          </a:xfrm>
+          <a:prstGeom prst="line">
+            <a:avLst/>
+          </a:prstGeom>
+          <a:noFill/>
+          <a:ln w="12700">
+            <a:solidFill>
+              <a:srgbClr val="B8B8C8"/>
+            </a:solidFill>
+            <a:prstDash val="solid"/>
+          </a:ln>
+        </p:spPr>
+      </p:sp>
+      <p:sp>
+        <p:nvSpPr>
+          <p:cNvPr id="17" name="Shape 15"/>
+          <p:cNvSpPr/>
+          <p:nvPr/>
+        </p:nvSpPr>
+        <p:spPr>
+          <a:xfrm>
+            <a:off x="548640" y="4370832"/>
+            <a:ext cx="2279142" cy="359908"/>
+          </a:xfrm>
+          <a:prstGeom prst="rect">
+            <a:avLst/>
+          </a:prstGeom>
+          <a:solidFill>
+            <a:srgbClr val="F6F6F8"/>
+          </a:solidFill>
+          <a:ln w="12700">
+            <a:solidFill>
+              <a:srgbClr val="B8B8C8"/>
+            </a:solidFill>
+            <a:prstDash val="solid"/>
+          </a:ln>
+        </p:spPr>
+      </p:sp>
+      <p:sp>
+        <p:nvSpPr>
+          <p:cNvPr id="18" name="Text 16"/>
+          <p:cNvSpPr/>
+          <p:nvPr/>
+        </p:nvSpPr>
+        <p:spPr>
+          <a:xfrm>
+            <a:off x="548640" y="4370832"/>
+            <a:ext cx="2279142" cy="359908"/>
+          </a:xfrm>
+          <a:prstGeom prst="rect">
+            <a:avLst/>
+          </a:prstGeom>
+          <a:noFill/>
+          <a:ln/>
+        </p:spPr>
+        <p:txBody>
+          <a:bodyPr wrap="square" lIns="25400" tIns="25400" rIns="25400" bIns="25400" rtlCol="0" anchor="ctr"/>
+          <a:lstStyle/>
+          <a:p>
+            <a:pPr rtl="1" algn="ctr" indent="0" marL="0">
+              <a:buNone/>
+            </a:pPr>
+            <a:r>
+              <a:rPr lang="en-US" sz="1000" dirty="0">
+                <a:solidFill>
+                  <a:srgbClr val="1B1F3B"/>
+                </a:solidFill>
+                <a:latin typeface="Calibri" pitchFamily="34" charset="0"/>
+                <a:ea typeface="Calibri" pitchFamily="34" charset="-122"/>
+                <a:cs typeface="Calibri" pitchFamily="34" charset="-120"/>
+              </a:rPr>
+              <a:t>מתקן את עצמו</a:t>
+            </a:r>
+            <a:endParaRPr lang="en-US" sz="1000" dirty="0"/>
+          </a:p>
+        </p:txBody>
+      </p:sp>
+      <p:sp>
+        <p:nvSpPr>
+          <p:cNvPr id="19" name="Text 17"/>
+          <p:cNvSpPr/>
+          <p:nvPr/>
+        </p:nvSpPr>
+        <p:spPr>
+          <a:xfrm>
+            <a:off x="10131552" y="5044196"/>
+            <a:ext cx="1508760" cy="359908"/>
+          </a:xfrm>
+          <a:prstGeom prst="rect">
+            <a:avLst/>
+          </a:prstGeom>
+          <a:noFill/>
+          <a:ln/>
+        </p:spPr>
+        <p:txBody>
+          <a:bodyPr wrap="square" lIns="0" tIns="0" rIns="0" bIns="0" rtlCol="0" anchor="ctr"/>
+          <a:lstStyle/>
+          <a:p>
+            <a:pPr rtl="1" algn="r" indent="0" marL="0">
+              <a:buNone/>
+            </a:pPr>
+            <a:r>
+              <a:rPr lang="en-US" sz="1100" b="1" dirty="0">
+                <a:solidFill>
+                  <a:srgbClr val="1B1F3B"/>
+                </a:solidFill>
+                <a:latin typeface="Arial" pitchFamily="34" charset="0"/>
+                <a:ea typeface="Arial" pitchFamily="34" charset="-122"/>
+                <a:cs typeface="Arial" pitchFamily="34" charset="-120"/>
+              </a:rPr>
+              <a:t>Agentic</a:t>
+            </a:r>
+            <a:endParaRPr lang="en-US" sz="1100" dirty="0"/>
+          </a:p>
+        </p:txBody>
+      </p:sp>
+      <p:sp>
+        <p:nvSpPr>
+          <p:cNvPr id="20" name="Shape 18"/>
+          <p:cNvSpPr/>
+          <p:nvPr/>
+        </p:nvSpPr>
+        <p:spPr>
+          <a:xfrm>
+            <a:off x="7715250" y="5044196"/>
+            <a:ext cx="2279142" cy="359908"/>
+          </a:xfrm>
+          <a:prstGeom prst="rect">
+            <a:avLst/>
+          </a:prstGeom>
+          <a:solidFill>
+            <a:srgbClr val="F6F6F8"/>
+          </a:solidFill>
+          <a:ln w="12700">
+            <a:solidFill>
+              <a:srgbClr val="B8B8C8"/>
+            </a:solidFill>
+            <a:prstDash val="solid"/>
+          </a:ln>
+        </p:spPr>
+      </p:sp>
+      <p:sp>
+        <p:nvSpPr>
+          <p:cNvPr id="21" name="Text 19"/>
+          <p:cNvSpPr/>
+          <p:nvPr/>
+        </p:nvSpPr>
+        <p:spPr>
+          <a:xfrm>
+            <a:off x="7715250" y="5044196"/>
+            <a:ext cx="2279142" cy="359908"/>
+          </a:xfrm>
+          <a:prstGeom prst="rect">
+            <a:avLst/>
+          </a:prstGeom>
+          <a:noFill/>
+          <a:ln/>
+        </p:spPr>
+        <p:txBody>
+          <a:bodyPr wrap="square" lIns="25400" tIns="25400" rIns="25400" bIns="25400" rtlCol="0" anchor="ctr"/>
+          <a:lstStyle/>
+          <a:p>
+            <a:pPr rtl="1" algn="ctr" indent="0" marL="0">
+              <a:buNone/>
+            </a:pPr>
+            <a:r>
+              <a:rPr lang="en-US" sz="1000" dirty="0">
+                <a:solidFill>
+                  <a:srgbClr val="1B1F3B"/>
+                </a:solidFill>
+                <a:latin typeface="Calibri" pitchFamily="34" charset="0"/>
+                <a:ea typeface="Calibri" pitchFamily="34" charset="-122"/>
+                <a:cs typeface="Calibri" pitchFamily="34" charset="-120"/>
+              </a:rPr>
+              <a:t>קורא קבצים</a:t>
+            </a:r>
+            <a:endParaRPr lang="en-US" sz="1000" dirty="0"/>
+          </a:p>
+        </p:txBody>
+      </p:sp>
+      <p:sp>
+        <p:nvSpPr>
+          <p:cNvPr id="22" name="Shape 20"/>
+          <p:cNvSpPr/>
+          <p:nvPr/>
+        </p:nvSpPr>
+        <p:spPr>
+          <a:xfrm>
+            <a:off x="8745093" y="4901550"/>
+            <a:ext cx="219456" cy="219456"/>
+          </a:xfrm>
+          <a:prstGeom prst="ellipse">
+            <a:avLst/>
+          </a:prstGeom>
+          <a:solidFill>
+            <a:srgbClr val="00A88A"/>
+          </a:solidFill>
+          <a:ln w="12700">
+            <a:solidFill>
+              <a:srgbClr val="FFFFFF"/>
+            </a:solidFill>
+            <a:prstDash val="solid"/>
+          </a:ln>
+        </p:spPr>
+      </p:sp>
+      <p:sp>
+        <p:nvSpPr>
+          <p:cNvPr id="23" name="Text 21"/>
+          <p:cNvSpPr/>
+          <p:nvPr/>
+        </p:nvSpPr>
+        <p:spPr>
+          <a:xfrm>
+            <a:off x="8745093" y="4901550"/>
+            <a:ext cx="219456" cy="219456"/>
+          </a:xfrm>
+          <a:prstGeom prst="rect">
+            <a:avLst/>
+          </a:prstGeom>
+          <a:noFill/>
+          <a:ln/>
+        </p:spPr>
+        <p:txBody>
+          <a:bodyPr wrap="square" lIns="0" tIns="0" rIns="0" bIns="0" rtlCol="0" anchor="ctr"/>
+          <a:lstStyle/>
+          <a:p>
+            <a:pPr algn="ctr" indent="0" marL="0">
+              <a:buNone/>
+            </a:pPr>
+            <a:r>
+              <a:rPr lang="en-US" sz="900" b="1" dirty="0">
+                <a:solidFill>
+                  <a:srgbClr val="FFFFFF"/>
+                </a:solidFill>
+                <a:latin typeface="Arial" pitchFamily="34" charset="0"/>
+                <a:ea typeface="Arial" pitchFamily="34" charset="-122"/>
+                <a:cs typeface="Arial" pitchFamily="34" charset="-120"/>
+              </a:rPr>
+              <a:t>✓</a:t>
+            </a:r>
+            <a:endParaRPr lang="en-US" sz="900" dirty="0"/>
+          </a:p>
+        </p:txBody>
+      </p:sp>
+      <p:sp>
+        <p:nvSpPr>
+          <p:cNvPr id="24" name="Shape 22"/>
+          <p:cNvSpPr/>
+          <p:nvPr/>
+        </p:nvSpPr>
+        <p:spPr>
+          <a:xfrm>
+            <a:off x="7605522" y="5224150"/>
+            <a:ext cx="109728" cy="0"/>
+          </a:xfrm>
+          <a:prstGeom prst="line">
+            <a:avLst/>
+          </a:prstGeom>
+          <a:noFill/>
+          <a:ln w="12700">
+            <a:solidFill>
+              <a:srgbClr val="B8B8C8"/>
+            </a:solidFill>
+            <a:prstDash val="solid"/>
+          </a:ln>
+        </p:spPr>
+      </p:sp>
+      <p:sp>
+        <p:nvSpPr>
+          <p:cNvPr id="25" name="Shape 23"/>
+          <p:cNvSpPr/>
+          <p:nvPr/>
+        </p:nvSpPr>
+        <p:spPr>
+          <a:xfrm>
+            <a:off x="5326380" y="5044196"/>
+            <a:ext cx="2279142" cy="359908"/>
+          </a:xfrm>
+          <a:prstGeom prst="rect">
+            <a:avLst/>
+          </a:prstGeom>
+          <a:solidFill>
+            <a:srgbClr val="F6F6F8"/>
+          </a:solidFill>
+          <a:ln w="12700">
+            <a:solidFill>
+              <a:srgbClr val="B8B8C8"/>
+            </a:solidFill>
+            <a:prstDash val="solid"/>
+          </a:ln>
+        </p:spPr>
+      </p:sp>
+      <p:sp>
+        <p:nvSpPr>
+          <p:cNvPr id="26" name="Text 24"/>
+          <p:cNvSpPr/>
+          <p:nvPr/>
+        </p:nvSpPr>
+        <p:spPr>
+          <a:xfrm>
+            <a:off x="5326380" y="5044196"/>
+            <a:ext cx="2279142" cy="359908"/>
+          </a:xfrm>
+          <a:prstGeom prst="rect">
+            <a:avLst/>
+          </a:prstGeom>
+          <a:noFill/>
+          <a:ln/>
+        </p:spPr>
+        <p:txBody>
+          <a:bodyPr wrap="square" lIns="25400" tIns="25400" rIns="25400" bIns="25400" rtlCol="0" anchor="ctr"/>
+          <a:lstStyle/>
+          <a:p>
+            <a:pPr rtl="1" algn="ctr" indent="0" marL="0">
+              <a:buNone/>
+            </a:pPr>
+            <a:r>
+              <a:rPr lang="en-US" sz="1000" dirty="0">
+                <a:solidFill>
+                  <a:srgbClr val="1B1F3B"/>
+                </a:solidFill>
+                <a:latin typeface="Calibri" pitchFamily="34" charset="0"/>
+                <a:ea typeface="Calibri" pitchFamily="34" charset="-122"/>
+                <a:cs typeface="Calibri" pitchFamily="34" charset="-120"/>
+              </a:rPr>
+              <a:t>כותב קוד</a:t>
+            </a:r>
+            <a:endParaRPr lang="en-US" sz="1000" dirty="0"/>
+          </a:p>
+        </p:txBody>
+      </p:sp>
+      <p:sp>
+        <p:nvSpPr>
+          <p:cNvPr id="27" name="Shape 25"/>
+          <p:cNvSpPr/>
+          <p:nvPr/>
+        </p:nvSpPr>
+        <p:spPr>
+          <a:xfrm>
+            <a:off x="6356223" y="4901550"/>
+            <a:ext cx="219456" cy="219456"/>
+          </a:xfrm>
+          <a:prstGeom prst="ellipse">
+            <a:avLst/>
+          </a:prstGeom>
+          <a:solidFill>
+            <a:srgbClr val="00A88A"/>
+          </a:solidFill>
+          <a:ln w="12700">
+            <a:solidFill>
+              <a:srgbClr val="FFFFFF"/>
+            </a:solidFill>
+            <a:prstDash val="solid"/>
+          </a:ln>
+        </p:spPr>
+      </p:sp>
+      <p:sp>
+        <p:nvSpPr>
+          <p:cNvPr id="28" name="Text 26"/>
+          <p:cNvSpPr/>
+          <p:nvPr/>
+        </p:nvSpPr>
+        <p:spPr>
+          <a:xfrm>
+            <a:off x="6356223" y="4901550"/>
+            <a:ext cx="219456" cy="219456"/>
+          </a:xfrm>
+          <a:prstGeom prst="rect">
+            <a:avLst/>
+          </a:prstGeom>
+          <a:noFill/>
+          <a:ln/>
+        </p:spPr>
+        <p:txBody>
+          <a:bodyPr wrap="square" lIns="0" tIns="0" rIns="0" bIns="0" rtlCol="0" anchor="ctr"/>
+          <a:lstStyle/>
+          <a:p>
+            <a:pPr algn="ctr" indent="0" marL="0">
+              <a:buNone/>
+            </a:pPr>
+            <a:r>
+              <a:rPr lang="en-US" sz="900" b="1" dirty="0">
+                <a:solidFill>
+                  <a:srgbClr val="FFFFFF"/>
+                </a:solidFill>
+                <a:latin typeface="Arial" pitchFamily="34" charset="0"/>
+                <a:ea typeface="Arial" pitchFamily="34" charset="-122"/>
+                <a:cs typeface="Arial" pitchFamily="34" charset="-120"/>
+              </a:rPr>
+              <a:t>✓</a:t>
+            </a:r>
+            <a:endParaRPr lang="en-US" sz="900" dirty="0"/>
+          </a:p>
+        </p:txBody>
+      </p:sp>
+      <p:sp>
+        <p:nvSpPr>
+          <p:cNvPr id="29" name="Shape 27"/>
+          <p:cNvSpPr/>
+          <p:nvPr/>
+        </p:nvSpPr>
+        <p:spPr>
+          <a:xfrm>
+            <a:off x="5216652" y="5224150"/>
+            <a:ext cx="109728" cy="0"/>
+          </a:xfrm>
+          <a:prstGeom prst="line">
+            <a:avLst/>
+          </a:prstGeom>
+          <a:noFill/>
+          <a:ln w="12700">
+            <a:solidFill>
+              <a:srgbClr val="B8B8C8"/>
+            </a:solidFill>
+            <a:prstDash val="solid"/>
+          </a:ln>
+        </p:spPr>
+      </p:sp>
+      <p:sp>
+        <p:nvSpPr>
+          <p:cNvPr id="30" name="Shape 28"/>
+          <p:cNvSpPr/>
+          <p:nvPr/>
+        </p:nvSpPr>
+        <p:spPr>
+          <a:xfrm>
+            <a:off x="2937510" y="5044196"/>
+            <a:ext cx="2279142" cy="359908"/>
+          </a:xfrm>
+          <a:prstGeom prst="rect">
+            <a:avLst/>
+          </a:prstGeom>
+          <a:solidFill>
+            <a:srgbClr val="F6F6F8"/>
+          </a:solidFill>
+          <a:ln w="12700">
+            <a:solidFill>
+              <a:srgbClr val="B8B8C8"/>
+            </a:solidFill>
+            <a:prstDash val="solid"/>
+          </a:ln>
+        </p:spPr>
+      </p:sp>
+      <p:sp>
+        <p:nvSpPr>
+          <p:cNvPr id="31" name="Text 29"/>
+          <p:cNvSpPr/>
+          <p:nvPr/>
+        </p:nvSpPr>
+        <p:spPr>
+          <a:xfrm>
+            <a:off x="2937510" y="5044196"/>
+            <a:ext cx="2279142" cy="359908"/>
+          </a:xfrm>
+          <a:prstGeom prst="rect">
+            <a:avLst/>
+          </a:prstGeom>
+          <a:noFill/>
+          <a:ln/>
+        </p:spPr>
+        <p:txBody>
+          <a:bodyPr wrap="square" lIns="25400" tIns="25400" rIns="25400" bIns="25400" rtlCol="0" anchor="ctr"/>
+          <a:lstStyle/>
+          <a:p>
+            <a:pPr rtl="1" algn="ctr" indent="0" marL="0">
+              <a:buNone/>
+            </a:pPr>
+            <a:r>
+              <a:rPr lang="en-US" sz="1000" dirty="0">
+                <a:solidFill>
+                  <a:srgbClr val="1B1F3B"/>
+                </a:solidFill>
+                <a:latin typeface="Calibri" pitchFamily="34" charset="0"/>
+                <a:ea typeface="Calibri" pitchFamily="34" charset="-122"/>
+                <a:cs typeface="Calibri" pitchFamily="34" charset="-120"/>
+              </a:rPr>
+              <a:t>מריץ בדיקות</a:t>
+            </a:r>
+            <a:endParaRPr lang="en-US" sz="1000" dirty="0"/>
+          </a:p>
+        </p:txBody>
+      </p:sp>
+      <p:sp>
+        <p:nvSpPr>
+          <p:cNvPr id="32" name="Shape 30"/>
+          <p:cNvSpPr/>
+          <p:nvPr/>
+        </p:nvSpPr>
+        <p:spPr>
+          <a:xfrm>
+            <a:off x="3967353" y="4901550"/>
+            <a:ext cx="219456" cy="219456"/>
+          </a:xfrm>
+          <a:prstGeom prst="ellipse">
+            <a:avLst/>
+          </a:prstGeom>
+          <a:solidFill>
+            <a:srgbClr val="00A88A"/>
+          </a:solidFill>
+          <a:ln w="12700">
+            <a:solidFill>
+              <a:srgbClr val="FFFFFF"/>
+            </a:solidFill>
+            <a:prstDash val="solid"/>
+          </a:ln>
+        </p:spPr>
+      </p:sp>
+      <p:sp>
+        <p:nvSpPr>
+          <p:cNvPr id="33" name="Text 31"/>
+          <p:cNvSpPr/>
+          <p:nvPr/>
+        </p:nvSpPr>
+        <p:spPr>
+          <a:xfrm>
+            <a:off x="3967353" y="4901550"/>
+            <a:ext cx="219456" cy="219456"/>
+          </a:xfrm>
+          <a:prstGeom prst="rect">
+            <a:avLst/>
+          </a:prstGeom>
+          <a:noFill/>
+          <a:ln/>
+        </p:spPr>
+        <p:txBody>
+          <a:bodyPr wrap="square" lIns="0" tIns="0" rIns="0" bIns="0" rtlCol="0" anchor="ctr"/>
+          <a:lstStyle/>
+          <a:p>
+            <a:pPr algn="ctr" indent="0" marL="0">
+              <a:buNone/>
+            </a:pPr>
+            <a:r>
+              <a:rPr lang="en-US" sz="900" b="1" dirty="0">
+                <a:solidFill>
+                  <a:srgbClr val="FFFFFF"/>
+                </a:solidFill>
+                <a:latin typeface="Arial" pitchFamily="34" charset="0"/>
+                <a:ea typeface="Arial" pitchFamily="34" charset="-122"/>
+                <a:cs typeface="Arial" pitchFamily="34" charset="-120"/>
+              </a:rPr>
+              <a:t>✓</a:t>
+            </a:r>
+            <a:endParaRPr lang="en-US" sz="900" dirty="0"/>
+          </a:p>
+        </p:txBody>
+      </p:sp>
+      <p:sp>
+        <p:nvSpPr>
+          <p:cNvPr id="34" name="Shape 32"/>
+          <p:cNvSpPr/>
+          <p:nvPr/>
+        </p:nvSpPr>
+        <p:spPr>
+          <a:xfrm>
+            <a:off x="2827782" y="5224150"/>
+            <a:ext cx="109728" cy="0"/>
+          </a:xfrm>
+          <a:prstGeom prst="line">
+            <a:avLst/>
+          </a:prstGeom>
+          <a:noFill/>
+          <a:ln w="12700">
+            <a:solidFill>
+              <a:srgbClr val="B8B8C8"/>
+            </a:solidFill>
+            <a:prstDash val="solid"/>
+          </a:ln>
+        </p:spPr>
+      </p:sp>
+      <p:sp>
+        <p:nvSpPr>
+          <p:cNvPr id="35" name="Shape 33"/>
+          <p:cNvSpPr/>
+          <p:nvPr/>
+        </p:nvSpPr>
+        <p:spPr>
+          <a:xfrm>
+            <a:off x="548640" y="5044196"/>
+            <a:ext cx="2279142" cy="359908"/>
+          </a:xfrm>
+          <a:prstGeom prst="rect">
+            <a:avLst/>
+          </a:prstGeom>
+          <a:solidFill>
+            <a:srgbClr val="F6F6F8"/>
+          </a:solidFill>
+          <a:ln w="12700">
+            <a:solidFill>
+              <a:srgbClr val="B8B8C8"/>
+            </a:solidFill>
+            <a:prstDash val="solid"/>
+          </a:ln>
+        </p:spPr>
+      </p:sp>
+      <p:sp>
+        <p:nvSpPr>
+          <p:cNvPr id="36" name="Text 34"/>
+          <p:cNvSpPr/>
+          <p:nvPr/>
+        </p:nvSpPr>
+        <p:spPr>
+          <a:xfrm>
+            <a:off x="548640" y="5044196"/>
+            <a:ext cx="2279142" cy="359908"/>
+          </a:xfrm>
+          <a:prstGeom prst="rect">
+            <a:avLst/>
+          </a:prstGeom>
+          <a:noFill/>
+          <a:ln/>
+        </p:spPr>
+        <p:txBody>
+          <a:bodyPr wrap="square" lIns="25400" tIns="25400" rIns="25400" bIns="25400" rtlCol="0" anchor="ctr"/>
+          <a:lstStyle/>
+          <a:p>
+            <a:pPr rtl="1" algn="ctr" indent="0" marL="0">
+              <a:buNone/>
+            </a:pPr>
+            <a:r>
+              <a:rPr lang="en-US" sz="1000" dirty="0">
+                <a:solidFill>
+                  <a:srgbClr val="1B1F3B"/>
+                </a:solidFill>
+                <a:latin typeface="Calibri" pitchFamily="34" charset="0"/>
+                <a:ea typeface="Calibri" pitchFamily="34" charset="-122"/>
+                <a:cs typeface="Calibri" pitchFamily="34" charset="-120"/>
+              </a:rPr>
+              <a:t>מתקן את עצמו</a:t>
+            </a:r>
+            <a:endParaRPr lang="en-US" sz="1000" dirty="0"/>
+          </a:p>
+        </p:txBody>
+      </p:sp>
+      <p:sp>
+        <p:nvSpPr>
+          <p:cNvPr id="37" name="Shape 35"/>
+          <p:cNvSpPr/>
+          <p:nvPr/>
+        </p:nvSpPr>
+        <p:spPr>
+          <a:xfrm>
+            <a:off x="1578483" y="4901550"/>
+            <a:ext cx="219456" cy="219456"/>
+          </a:xfrm>
+          <a:prstGeom prst="ellipse">
+            <a:avLst/>
+          </a:prstGeom>
+          <a:solidFill>
+            <a:srgbClr val="00A88A"/>
+          </a:solidFill>
+          <a:ln w="12700">
+            <a:solidFill>
+              <a:srgbClr val="FFFFFF"/>
+            </a:solidFill>
+            <a:prstDash val="solid"/>
+          </a:ln>
+        </p:spPr>
+      </p:sp>
+      <p:sp>
+        <p:nvSpPr>
+          <p:cNvPr id="38" name="Text 36"/>
+          <p:cNvSpPr/>
+          <p:nvPr/>
+        </p:nvSpPr>
+        <p:spPr>
+          <a:xfrm>
+            <a:off x="1578483" y="4901550"/>
+            <a:ext cx="219456" cy="219456"/>
+          </a:xfrm>
+          <a:prstGeom prst="rect">
+            <a:avLst/>
+          </a:prstGeom>
+          <a:noFill/>
+          <a:ln/>
+        </p:spPr>
+        <p:txBody>
+          <a:bodyPr wrap="square" lIns="0" tIns="0" rIns="0" bIns="0" rtlCol="0" anchor="ctr"/>
+          <a:lstStyle/>
+          <a:p>
+            <a:pPr algn="ctr" indent="0" marL="0">
+              <a:buNone/>
+            </a:pPr>
+            <a:r>
+              <a:rPr lang="en-US" sz="900" b="1" dirty="0">
+                <a:solidFill>
+                  <a:srgbClr val="FFFFFF"/>
+                </a:solidFill>
+                <a:latin typeface="Arial" pitchFamily="34" charset="0"/>
+                <a:ea typeface="Arial" pitchFamily="34" charset="-122"/>
+                <a:cs typeface="Arial" pitchFamily="34" charset="-120"/>
+              </a:rPr>
+              <a:t>✓</a:t>
+            </a:r>
+            <a:endParaRPr lang="en-US" sz="900" dirty="0"/>
+          </a:p>
+        </p:txBody>
+      </p:sp>
+      <p:sp>
+        <p:nvSpPr>
+          <p:cNvPr id="39" name="Text 37"/>
+          <p:cNvSpPr/>
+          <p:nvPr/>
+        </p:nvSpPr>
+        <p:spPr>
+          <a:xfrm>
+            <a:off x="548640" y="5586984"/>
+            <a:ext cx="11091672" cy="274320"/>
+          </a:xfrm>
+          <a:prstGeom prst="rect">
+            <a:avLst/>
+          </a:prstGeom>
+          <a:noFill/>
+          <a:ln/>
+        </p:spPr>
+        <p:txBody>
+          <a:bodyPr wrap="square" lIns="0" tIns="0" rIns="0" bIns="0" rtlCol="0" anchor="ctr"/>
+          <a:lstStyle/>
+          <a:p>
+            <a:pPr rtl="1" algn="r" indent="0" marL="0">
+              <a:buNone/>
+            </a:pPr>
+            <a:r>
+              <a:rPr lang="en-US" sz="1000" i="1" dirty="0">
+                <a:solidFill>
+                  <a:srgbClr val="6B7280"/>
+                </a:solidFill>
+                <a:latin typeface="Calibri" pitchFamily="34" charset="0"/>
+                <a:ea typeface="Calibri" pitchFamily="34" charset="-122"/>
+                <a:cs typeface="Calibri" pitchFamily="34" charset="-120"/>
+              </a:rPr>
+              <a:t>איור: אותם 4 שלבי-פעולה: Autocomplete נוגע רק בכתיבת קוד; Agentic פועל בכל השלבים - קורא, כותב, בודק, ומתקן את עצמו.</a:t>
+            </a:r>
+            <a:endParaRPr lang="en-US" sz="1000" dirty="0"/>
+          </a:p>
+        </p:txBody>
+      </p:sp>
+      <p:sp>
+        <p:nvSpPr>
+          <p:cNvPr id="40" name="Shape 38"/>
+          <p:cNvSpPr/>
+          <p:nvPr/>
+        </p:nvSpPr>
+        <p:spPr>
+          <a:xfrm>
+            <a:off x="548640" y="5843016"/>
             <a:ext cx="11091672" cy="0"/>
           </a:xfrm>
           <a:prstGeom prst="line">
@@ -13224,13 +16531,13 @@
       </p:sp>
       <p:sp>
         <p:nvSpPr>
-          <p:cNvPr id="6" name="Text 4"/>
-          <p:cNvSpPr/>
-          <p:nvPr/>
-        </p:nvSpPr>
-        <p:spPr>
-          <a:xfrm>
-            <a:off x="548640" y="5669280"/>
+          <p:cNvPr id="41" name="Text 39"/>
+          <p:cNvSpPr/>
+          <p:nvPr/>
+        </p:nvSpPr>
+        <p:spPr>
+          <a:xfrm>
+            <a:off x="548640" y="5934456"/>
             <a:ext cx="11091672" cy="457200"/>
           </a:xfrm>
           <a:prstGeom prst="rect">
@@ -13263,7 +16570,7 @@
       </p:sp>
       <p:sp>
         <p:nvSpPr>
-          <p:cNvPr id="7" name="Text 5"/>
+          <p:cNvPr id="42" name="Text 40"/>
           <p:cNvSpPr/>
           <p:nvPr/>
         </p:nvSpPr>

--- a/lesson_02/lesson_02_slides.pptx
+++ b/lesson_02/lesson_02_slides.pptx
@@ -7199,7 +7199,7 @@
         <p:spPr>
           <a:xfrm>
             <a:off x="548640" y="1234440"/>
-            <a:ext cx="11091672" cy="3675888"/>
+            <a:ext cx="11091672" cy="3931920"/>
           </a:xfrm>
           <a:prstGeom prst="rect">
             <a:avLst/>
@@ -7373,7 +7373,7 @@
         </p:nvSpPr>
         <p:spPr>
           <a:xfrm>
-            <a:off x="548640" y="5047488"/>
+            <a:off x="548640" y="5303520"/>
             <a:ext cx="11091672" cy="0"/>
           </a:xfrm>
           <a:prstGeom prst="line">
@@ -7396,8 +7396,8 @@
         </p:nvSpPr>
         <p:spPr>
           <a:xfrm>
-            <a:off x="548640" y="5138928"/>
-            <a:ext cx="11091672" cy="1243584"/>
+            <a:off x="548640" y="5394960"/>
+            <a:ext cx="11091672" cy="621792"/>
           </a:xfrm>
           <a:prstGeom prst="rect">
             <a:avLst/>
@@ -7421,35 +7421,7 @@
                 <a:ea typeface="Arial" pitchFamily="34" charset="-122"/>
                 <a:cs typeface="Arial" pitchFamily="34" charset="-120"/>
               </a:rPr>
-              <a:t>✔ מה עושים בפועל: שוק הכלים והמסלולים החינמיים משתנה מהר מאוד — בשיעור 1 ראינו איך Gemini CLI החינמי נסגר תוך פחות משנה. </a:t>
-            </a:r>
-            <a:pPr rtl="1" algn="r" indent="0" marL="0">
-              <a:buNone/>
-            </a:pPr>
-            <a:r>
-              <a:rPr lang="en-US" sz="1700" b="1" dirty="0">
-                <a:solidFill>
-                  <a:srgbClr val="00A88A"/>
-                </a:solidFill>
-                <a:latin typeface="Arial" pitchFamily="34" charset="0"/>
-                <a:ea typeface="Arial" pitchFamily="34" charset="-122"/>
-                <a:cs typeface="Arial" pitchFamily="34" charset="-120"/>
-              </a:rPr>
-              <a:t>פעילות (2 דקות):</a:t>
-            </a:r>
-            <a:pPr rtl="1" algn="r" indent="0" marL="0">
-              <a:buNone/>
-            </a:pPr>
-            <a:r>
-              <a:rPr lang="en-US" sz="1700" dirty="0">
-                <a:solidFill>
-                  <a:srgbClr val="00A88A"/>
-                </a:solidFill>
-                <a:latin typeface="Arial" pitchFamily="34" charset="0"/>
-                <a:ea typeface="Arial" pitchFamily="34" charset="-122"/>
-                <a:cs typeface="Arial" pitchFamily="34" charset="-120"/>
-              </a:rPr>
-              <a:t> המרצה פותח את שני הלינקים (cursor.com/pricing ו-docs.github.com/.../plans) בכיתה בזמן אמת — האם המחירים/המכסות עדיין תואמים למה שכתוב כאן? זו לא רק הדגמה, זו ההרגל המקצועי עצמו: תמיד בודקים סטטוס עדכני קרוב למועד השימוש בפועל.</a:t>
+              <a:t>✔ מה עושים בפועל: שוק הכלים משתנה מהר (בשיעור 1 ראינו את Gemini CLI החינמי נסגר תוך פחות משנה) — ולכן ההתקנה וההרשמה בפועל לכלי הנבחר קורות בתרגול המיידי, לא כאן. תמיד כדאי לבדוק סטטוס עדכני קרוב למועד השימוש.</a:t>
             </a:r>
             <a:endParaRPr lang="en-US" sz="1700" dirty="0"/>
           </a:p>
@@ -15289,7 +15261,7 @@
         <p:spPr>
           <a:xfrm>
             <a:off x="548640" y="1508760"/>
-            <a:ext cx="11091672" cy="2724912"/>
+            <a:ext cx="11091672" cy="2418588"/>
           </a:xfrm>
           <a:prstGeom prst="rect">
             <a:avLst/>
@@ -15413,7 +15385,7 @@
                 <a:ea typeface="Calibri" pitchFamily="34" charset="-122"/>
                 <a:cs typeface="Calibri" pitchFamily="34" charset="-120"/>
               </a:rPr>
-              <a:t> זה דומה למעבר מ-Feature Engineering (בחירת מאפיינים) ידני למודלים מבוססי Deep Learning — גם שם המעבר הוא מ"אני מגדיר כל שלב בעצמי" ל"אני מגדיר מטרה, והמערכת מבצעת יותר מהדרך אליה" — אבל בשני המקרים אתם עדיין קובעים את המטרה ובודקים את התוצאה, בדיוק כמו ה-Evaluation שלכם ב-ML</a:t>
+              <a:t> דומה למעבר מ-Feature Engineering ידני ל-Deep Learning — גם שם עוברים מ"מגדיר כל שלב" ל"מגדיר מטרה, המערכת מבצעת", אבל אתם עדיין בודקים את התוצאה (כמו Evaluation ב-ML)</a:t>
             </a:r>
             <a:endParaRPr lang="en-US" sz="1900" dirty="0"/>
           </a:p>
@@ -15427,8 +15399,8 @@
         </p:nvSpPr>
         <p:spPr>
           <a:xfrm>
-            <a:off x="10131552" y="4370832"/>
-            <a:ext cx="1508760" cy="359908"/>
+            <a:off x="10131552" y="4064508"/>
+            <a:ext cx="1508760" cy="384048"/>
           </a:xfrm>
           <a:prstGeom prst="rect">
             <a:avLst/>
@@ -15466,8 +15438,8 @@
         </p:nvSpPr>
         <p:spPr>
           <a:xfrm>
-            <a:off x="7715250" y="4370832"/>
-            <a:ext cx="2279142" cy="359908"/>
+            <a:off x="7715250" y="4064508"/>
+            <a:ext cx="2279142" cy="384048"/>
           </a:xfrm>
           <a:prstGeom prst="rect">
             <a:avLst/>
@@ -15491,8 +15463,8 @@
         </p:nvSpPr>
         <p:spPr>
           <a:xfrm>
-            <a:off x="7715250" y="4370832"/>
-            <a:ext cx="2279142" cy="359908"/>
+            <a:off x="7715250" y="4064508"/>
+            <a:ext cx="2279142" cy="384048"/>
           </a:xfrm>
           <a:prstGeom prst="rect">
             <a:avLst/>
@@ -15530,7 +15502,7 @@
         </p:nvSpPr>
         <p:spPr>
           <a:xfrm>
-            <a:off x="7605522" y="4550786"/>
+            <a:off x="7605522" y="4256532"/>
             <a:ext cx="109728" cy="0"/>
           </a:xfrm>
           <a:prstGeom prst="line">
@@ -15553,8 +15525,8 @@
         </p:nvSpPr>
         <p:spPr>
           <a:xfrm>
-            <a:off x="5326380" y="4370832"/>
-            <a:ext cx="2279142" cy="359908"/>
+            <a:off x="5326380" y="4064508"/>
+            <a:ext cx="2279142" cy="384048"/>
           </a:xfrm>
           <a:prstGeom prst="rect">
             <a:avLst/>
@@ -15578,8 +15550,8 @@
         </p:nvSpPr>
         <p:spPr>
           <a:xfrm>
-            <a:off x="5326380" y="4370832"/>
-            <a:ext cx="2279142" cy="359908"/>
+            <a:off x="5326380" y="4064508"/>
+            <a:ext cx="2279142" cy="384048"/>
           </a:xfrm>
           <a:prstGeom prst="rect">
             <a:avLst/>
@@ -15617,7 +15589,7 @@
         </p:nvSpPr>
         <p:spPr>
           <a:xfrm>
-            <a:off x="6356223" y="4228186"/>
+            <a:off x="6356223" y="3921862"/>
             <a:ext cx="219456" cy="219456"/>
           </a:xfrm>
           <a:prstGeom prst="ellipse">
@@ -15642,7 +15614,7 @@
         </p:nvSpPr>
         <p:spPr>
           <a:xfrm>
-            <a:off x="6356223" y="4228186"/>
+            <a:off x="6356223" y="3921862"/>
             <a:ext cx="219456" cy="219456"/>
           </a:xfrm>
           <a:prstGeom prst="rect">
@@ -15681,7 +15653,7 @@
         </p:nvSpPr>
         <p:spPr>
           <a:xfrm>
-            <a:off x="5216652" y="4550786"/>
+            <a:off x="5216652" y="4256532"/>
             <a:ext cx="109728" cy="0"/>
           </a:xfrm>
           <a:prstGeom prst="line">
@@ -15704,8 +15676,8 @@
         </p:nvSpPr>
         <p:spPr>
           <a:xfrm>
-            <a:off x="2937510" y="4370832"/>
-            <a:ext cx="2279142" cy="359908"/>
+            <a:off x="2937510" y="4064508"/>
+            <a:ext cx="2279142" cy="384048"/>
           </a:xfrm>
           <a:prstGeom prst="rect">
             <a:avLst/>
@@ -15729,8 +15701,8 @@
         </p:nvSpPr>
         <p:spPr>
           <a:xfrm>
-            <a:off x="2937510" y="4370832"/>
-            <a:ext cx="2279142" cy="359908"/>
+            <a:off x="2937510" y="4064508"/>
+            <a:ext cx="2279142" cy="384048"/>
           </a:xfrm>
           <a:prstGeom prst="rect">
             <a:avLst/>
@@ -15768,7 +15740,7 @@
         </p:nvSpPr>
         <p:spPr>
           <a:xfrm>
-            <a:off x="2827782" y="4550786"/>
+            <a:off x="2827782" y="4256532"/>
             <a:ext cx="109728" cy="0"/>
           </a:xfrm>
           <a:prstGeom prst="line">
@@ -15791,8 +15763,8 @@
         </p:nvSpPr>
         <p:spPr>
           <a:xfrm>
-            <a:off x="548640" y="4370832"/>
-            <a:ext cx="2279142" cy="359908"/>
+            <a:off x="548640" y="4064508"/>
+            <a:ext cx="2279142" cy="384048"/>
           </a:xfrm>
           <a:prstGeom prst="rect">
             <a:avLst/>
@@ -15816,8 +15788,8 @@
         </p:nvSpPr>
         <p:spPr>
           <a:xfrm>
-            <a:off x="548640" y="4370832"/>
-            <a:ext cx="2279142" cy="359908"/>
+            <a:off x="548640" y="4064508"/>
+            <a:ext cx="2279142" cy="384048"/>
           </a:xfrm>
           <a:prstGeom prst="rect">
             <a:avLst/>
@@ -15855,8 +15827,8 @@
         </p:nvSpPr>
         <p:spPr>
           <a:xfrm>
-            <a:off x="10131552" y="5044196"/>
-            <a:ext cx="1508760" cy="359908"/>
+            <a:off x="10131552" y="5020056"/>
+            <a:ext cx="1508760" cy="384048"/>
           </a:xfrm>
           <a:prstGeom prst="rect">
             <a:avLst/>
@@ -15894,8 +15866,8 @@
         </p:nvSpPr>
         <p:spPr>
           <a:xfrm>
-            <a:off x="7715250" y="5044196"/>
-            <a:ext cx="2279142" cy="359908"/>
+            <a:off x="7715250" y="5020056"/>
+            <a:ext cx="2279142" cy="384048"/>
           </a:xfrm>
           <a:prstGeom prst="rect">
             <a:avLst/>
@@ -15919,8 +15891,8 @@
         </p:nvSpPr>
         <p:spPr>
           <a:xfrm>
-            <a:off x="7715250" y="5044196"/>
-            <a:ext cx="2279142" cy="359908"/>
+            <a:off x="7715250" y="5020056"/>
+            <a:ext cx="2279142" cy="384048"/>
           </a:xfrm>
           <a:prstGeom prst="rect">
             <a:avLst/>
@@ -15958,7 +15930,7 @@
         </p:nvSpPr>
         <p:spPr>
           <a:xfrm>
-            <a:off x="8745093" y="4901550"/>
+            <a:off x="8745093" y="4877410"/>
             <a:ext cx="219456" cy="219456"/>
           </a:xfrm>
           <a:prstGeom prst="ellipse">
@@ -15983,7 +15955,7 @@
         </p:nvSpPr>
         <p:spPr>
           <a:xfrm>
-            <a:off x="8745093" y="4901550"/>
+            <a:off x="8745093" y="4877410"/>
             <a:ext cx="219456" cy="219456"/>
           </a:xfrm>
           <a:prstGeom prst="rect">
@@ -16022,7 +15994,7 @@
         </p:nvSpPr>
         <p:spPr>
           <a:xfrm>
-            <a:off x="7605522" y="5224150"/>
+            <a:off x="7605522" y="5212080"/>
             <a:ext cx="109728" cy="0"/>
           </a:xfrm>
           <a:prstGeom prst="line">
@@ -16045,8 +16017,8 @@
         </p:nvSpPr>
         <p:spPr>
           <a:xfrm>
-            <a:off x="5326380" y="5044196"/>
-            <a:ext cx="2279142" cy="359908"/>
+            <a:off x="5326380" y="5020056"/>
+            <a:ext cx="2279142" cy="384048"/>
           </a:xfrm>
           <a:prstGeom prst="rect">
             <a:avLst/>
@@ -16070,8 +16042,8 @@
         </p:nvSpPr>
         <p:spPr>
           <a:xfrm>
-            <a:off x="5326380" y="5044196"/>
-            <a:ext cx="2279142" cy="359908"/>
+            <a:off x="5326380" y="5020056"/>
+            <a:ext cx="2279142" cy="384048"/>
           </a:xfrm>
           <a:prstGeom prst="rect">
             <a:avLst/>
@@ -16109,7 +16081,7 @@
         </p:nvSpPr>
         <p:spPr>
           <a:xfrm>
-            <a:off x="6356223" y="4901550"/>
+            <a:off x="6356223" y="4877410"/>
             <a:ext cx="219456" cy="219456"/>
           </a:xfrm>
           <a:prstGeom prst="ellipse">
@@ -16134,7 +16106,7 @@
         </p:nvSpPr>
         <p:spPr>
           <a:xfrm>
-            <a:off x="6356223" y="4901550"/>
+            <a:off x="6356223" y="4877410"/>
             <a:ext cx="219456" cy="219456"/>
           </a:xfrm>
           <a:prstGeom prst="rect">
@@ -16173,7 +16145,7 @@
         </p:nvSpPr>
         <p:spPr>
           <a:xfrm>
-            <a:off x="5216652" y="5224150"/>
+            <a:off x="5216652" y="5212080"/>
             <a:ext cx="109728" cy="0"/>
           </a:xfrm>
           <a:prstGeom prst="line">
@@ -16196,8 +16168,8 @@
         </p:nvSpPr>
         <p:spPr>
           <a:xfrm>
-            <a:off x="2937510" y="5044196"/>
-            <a:ext cx="2279142" cy="359908"/>
+            <a:off x="2937510" y="5020056"/>
+            <a:ext cx="2279142" cy="384048"/>
           </a:xfrm>
           <a:prstGeom prst="rect">
             <a:avLst/>
@@ -16221,8 +16193,8 @@
         </p:nvSpPr>
         <p:spPr>
           <a:xfrm>
-            <a:off x="2937510" y="5044196"/>
-            <a:ext cx="2279142" cy="359908"/>
+            <a:off x="2937510" y="5020056"/>
+            <a:ext cx="2279142" cy="384048"/>
           </a:xfrm>
           <a:prstGeom prst="rect">
             <a:avLst/>
@@ -16260,7 +16232,7 @@
         </p:nvSpPr>
         <p:spPr>
           <a:xfrm>
-            <a:off x="3967353" y="4901550"/>
+            <a:off x="3967353" y="4877410"/>
             <a:ext cx="219456" cy="219456"/>
           </a:xfrm>
           <a:prstGeom prst="ellipse">
@@ -16285,7 +16257,7 @@
         </p:nvSpPr>
         <p:spPr>
           <a:xfrm>
-            <a:off x="3967353" y="4901550"/>
+            <a:off x="3967353" y="4877410"/>
             <a:ext cx="219456" cy="219456"/>
           </a:xfrm>
           <a:prstGeom prst="rect">
@@ -16324,7 +16296,7 @@
         </p:nvSpPr>
         <p:spPr>
           <a:xfrm>
-            <a:off x="2827782" y="5224150"/>
+            <a:off x="2827782" y="5212080"/>
             <a:ext cx="109728" cy="0"/>
           </a:xfrm>
           <a:prstGeom prst="line">
@@ -16347,8 +16319,8 @@
         </p:nvSpPr>
         <p:spPr>
           <a:xfrm>
-            <a:off x="548640" y="5044196"/>
-            <a:ext cx="2279142" cy="359908"/>
+            <a:off x="548640" y="5020056"/>
+            <a:ext cx="2279142" cy="384048"/>
           </a:xfrm>
           <a:prstGeom prst="rect">
             <a:avLst/>
@@ -16372,8 +16344,8 @@
         </p:nvSpPr>
         <p:spPr>
           <a:xfrm>
-            <a:off x="548640" y="5044196"/>
-            <a:ext cx="2279142" cy="359908"/>
+            <a:off x="548640" y="5020056"/>
+            <a:ext cx="2279142" cy="384048"/>
           </a:xfrm>
           <a:prstGeom prst="rect">
             <a:avLst/>
@@ -16411,7 +16383,7 @@
         </p:nvSpPr>
         <p:spPr>
           <a:xfrm>
-            <a:off x="1578483" y="4901550"/>
+            <a:off x="1578483" y="4877410"/>
             <a:ext cx="219456" cy="219456"/>
           </a:xfrm>
           <a:prstGeom prst="ellipse">
@@ -16436,7 +16408,7 @@
         </p:nvSpPr>
         <p:spPr>
           <a:xfrm>
-            <a:off x="1578483" y="4901550"/>
+            <a:off x="1578483" y="4877410"/>
             <a:ext cx="219456" cy="219456"/>
           </a:xfrm>
           <a:prstGeom prst="rect">
@@ -16927,7 +16899,7 @@
         <p:spPr>
           <a:xfrm>
             <a:off x="548640" y="5394960"/>
-            <a:ext cx="11091672" cy="932688"/>
+            <a:ext cx="11091672" cy="621792"/>
           </a:xfrm>
           <a:prstGeom prst="rect">
             <a:avLst/>
@@ -16951,7 +16923,7 @@
                 <a:ea typeface="Arial" pitchFamily="34" charset="-122"/>
                 <a:cs typeface="Arial" pitchFamily="34" charset="-120"/>
               </a:rPr>
-              <a:t>✔ מה עושים בפועל: התשובה הצפויה: 1+3 = Autocomplete מספיק (שינוי נקודתי, הקשר מקומי); 2+4 = דורש Agentic (משימה שמשתרעת על כמה קבצים ודורשת החלטות). אם זוג מתלבט על 4 — זה בדיוק הרגע להסביר שגם "עדכון עקבי" הוא סוג של החלטה שדורשת הבנת הקשר רחב, לא רק השלמת טקסט.</a:t>
+              <a:t>✔ מה עושים בפועל: התשובה: 1+3 = Autocomplete מספיק (שינוי נקודתי); 2+4 = דורש Agentic (משתרע על כמה קבצים, דורש החלטות). תרחיש 4 הכי פחות חד-משמעי — זה בדיוק העניין.</a:t>
             </a:r>
             <a:endParaRPr lang="en-US" sz="1700" dirty="0"/>
           </a:p>
